--- a/outputs/presentation/dev-transformation-summary.pptx
+++ b/outputs/presentation/dev-transformation-summary.pptx
@@ -1253,7 +1253,7 @@
                 <a:ea typeface="Malgun Gothic" pitchFamily="34" charset="-122"/>
                 <a:cs typeface="Malgun Gothic" pitchFamily="34" charset="-120"/>
               </a:rPr>
-              <a:t>“고객의 아키텍처 안으로 들어가 수요를 함께 설계하는 기업이 이긴다” — 신문섭 파트너 인터뷰 (2026-06)</a:t>
+              <a:t>“고객의 아키텍처 안으로 들어가 수요를 함께 설계하는 기업이 이긴다” — 신문섭 파트너 (2026-06)</a:t>
             </a:r>
             <a:endParaRPr lang="en-US" sz="1300" dirty="0"/>
           </a:p>
@@ -1267,8 +1267,8 @@
         </p:nvSpPr>
         <p:spPr>
           <a:xfrm>
-            <a:off x="457200" y="1243584"/>
-            <a:ext cx="3602736" cy="4370832"/>
+            <a:off x="457200" y="1207008"/>
+            <a:ext cx="3602736" cy="4297680"/>
           </a:xfrm>
           <a:prstGeom prst="roundRect">
             <a:avLst>
@@ -1289,7 +1289,7 @@
         </p:nvSpPr>
         <p:spPr>
           <a:xfrm>
-            <a:off x="640080" y="1408176"/>
+            <a:off x="640080" y="1371600"/>
             <a:ext cx="329184" cy="329184"/>
           </a:xfrm>
           <a:prstGeom prst="ellipse">
@@ -1330,7 +1330,7 @@
         </p:nvSpPr>
         <p:spPr>
           <a:xfrm>
-            <a:off x="1060704" y="1380744"/>
+            <a:off x="1060704" y="1344168"/>
             <a:ext cx="2871216" cy="384048"/>
           </a:xfrm>
           <a:prstGeom prst="rect">
@@ -1369,8 +1369,8 @@
         </p:nvSpPr>
         <p:spPr>
           <a:xfrm>
-            <a:off x="4297680" y="1243584"/>
-            <a:ext cx="3602736" cy="4370832"/>
+            <a:off x="4297680" y="1207008"/>
+            <a:ext cx="3602736" cy="4297680"/>
           </a:xfrm>
           <a:prstGeom prst="roundRect">
             <a:avLst>
@@ -1391,7 +1391,7 @@
         </p:nvSpPr>
         <p:spPr>
           <a:xfrm>
-            <a:off x="4480560" y="1408176"/>
+            <a:off x="4480560" y="1371600"/>
             <a:ext cx="329184" cy="329184"/>
           </a:xfrm>
           <a:prstGeom prst="ellipse">
@@ -1432,7 +1432,7 @@
         </p:nvSpPr>
         <p:spPr>
           <a:xfrm>
-            <a:off x="4901184" y="1380744"/>
+            <a:off x="4901184" y="1344168"/>
             <a:ext cx="2871216" cy="384048"/>
           </a:xfrm>
           <a:prstGeom prst="rect">
@@ -1471,8 +1471,8 @@
         </p:nvSpPr>
         <p:spPr>
           <a:xfrm>
-            <a:off x="8129016" y="1243584"/>
-            <a:ext cx="3602736" cy="4370832"/>
+            <a:off x="8129016" y="1207008"/>
+            <a:ext cx="3602736" cy="4297680"/>
           </a:xfrm>
           <a:prstGeom prst="roundRect">
             <a:avLst>
@@ -1493,7 +1493,7 @@
         </p:nvSpPr>
         <p:spPr>
           <a:xfrm>
-            <a:off x="8311896" y="1408176"/>
+            <a:off x="8311896" y="1371600"/>
             <a:ext cx="329184" cy="329184"/>
           </a:xfrm>
           <a:prstGeom prst="ellipse">
@@ -1534,7 +1534,7 @@
         </p:nvSpPr>
         <p:spPr>
           <a:xfrm>
-            <a:off x="8732520" y="1380744"/>
+            <a:off x="8732520" y="1344168"/>
             <a:ext cx="2871216" cy="384048"/>
           </a:xfrm>
           <a:prstGeom prst="rect">
@@ -1567,14 +1567,96 @@
       </p:sp>
       <p:sp>
         <p:nvSpPr>
-          <p:cNvPr id="16" name="Text 14"/>
-          <p:cNvSpPr/>
-          <p:nvPr/>
-        </p:nvSpPr>
-        <p:spPr>
-          <a:xfrm>
-            <a:off x="658368" y="1901952"/>
-            <a:ext cx="3218688" cy="3547872"/>
+          <p:cNvPr id="16" name="Shape 14"/>
+          <p:cNvSpPr/>
+          <p:nvPr/>
+        </p:nvSpPr>
+        <p:spPr>
+          <a:xfrm>
+            <a:off x="841248" y="2084832"/>
+            <a:ext cx="0" cy="2148840"/>
+          </a:xfrm>
+          <a:prstGeom prst="line">
+            <a:avLst/>
+          </a:prstGeom>
+          <a:noFill/>
+          <a:ln w="19050">
+            <a:solidFill>
+              <a:srgbClr val="0E6BA8"/>
+            </a:solidFill>
+            <a:prstDash val="solid"/>
+          </a:ln>
+        </p:spPr>
+      </p:sp>
+      <p:sp>
+        <p:nvSpPr>
+          <p:cNvPr id="17" name="Shape 15"/>
+          <p:cNvSpPr/>
+          <p:nvPr/>
+        </p:nvSpPr>
+        <p:spPr>
+          <a:xfrm>
+            <a:off x="768096" y="2066544"/>
+            <a:ext cx="146304" cy="146304"/>
+          </a:xfrm>
+          <a:prstGeom prst="ellipse">
+            <a:avLst/>
+          </a:prstGeom>
+          <a:solidFill>
+            <a:srgbClr val="0E6BA8"/>
+          </a:solidFill>
+          <a:ln/>
+        </p:spPr>
+      </p:sp>
+      <p:sp>
+        <p:nvSpPr>
+          <p:cNvPr id="18" name="Text 16"/>
+          <p:cNvSpPr/>
+          <p:nvPr/>
+        </p:nvSpPr>
+        <p:spPr>
+          <a:xfrm>
+            <a:off x="1005840" y="1975104"/>
+            <a:ext cx="777240" cy="274320"/>
+          </a:xfrm>
+          <a:prstGeom prst="rect">
+            <a:avLst/>
+          </a:prstGeom>
+          <a:noFill/>
+          <a:ln/>
+        </p:spPr>
+        <p:txBody>
+          <a:bodyPr wrap="square" lIns="0" tIns="0" rIns="0" bIns="0" rtlCol="0" anchor="ctr"/>
+          <a:lstStyle/>
+          <a:p>
+            <a:pPr indent="0" marL="0">
+              <a:buNone/>
+            </a:pPr>
+            <a:r>
+              <a:rPr lang="en-US" sz="1400" b="1" dirty="0">
+                <a:solidFill>
+                  <a:srgbClr val="0E6BA8"/>
+                </a:solidFill>
+                <a:latin typeface="Malgun Gothic" pitchFamily="34" charset="0"/>
+                <a:ea typeface="Malgun Gothic" pitchFamily="34" charset="-122"/>
+                <a:cs typeface="Malgun Gothic" pitchFamily="34" charset="-120"/>
+              </a:rPr>
+              <a:t>’25.06</a:t>
+            </a:r>
+            <a:endParaRPr lang="en-US" sz="1400" dirty="0"/>
+          </a:p>
+        </p:txBody>
+      </p:sp>
+      <p:sp>
+        <p:nvSpPr>
+          <p:cNvPr id="19" name="Text 17"/>
+          <p:cNvSpPr/>
+          <p:nvPr/>
+        </p:nvSpPr>
+        <p:spPr>
+          <a:xfrm>
+            <a:off x="1755648" y="1965960"/>
+            <a:ext cx="2148840" cy="731520"/>
           </a:xfrm>
           <a:prstGeom prst="rect">
             <a:avLst/>
@@ -1586,15 +1668,14 @@
           <a:bodyPr wrap="square" lIns="0" tIns="0" rIns="0" bIns="0" rtlCol="0" anchor="t"/>
           <a:lstStyle/>
           <a:p>
-            <a:pPr marL="342900" indent="-342900">
-              <a:spcAft>
-                <a:spcPts val="800"/>
-              </a:spcAft>
-              <a:buSzPct val="100000"/>
-              <a:buChar char="•"/>
-            </a:pPr>
-            <a:r>
-              <a:rPr lang="en-US" sz="2100" dirty="0">
+            <a:pPr indent="0" marL="0">
+              <a:lnSpc>
+                <a:spcPct val="105000"/>
+              </a:lnSpc>
+              <a:buNone/>
+            </a:pPr>
+            <a:r>
+              <a:rPr lang="en-US" sz="1250" dirty="0">
                 <a:solidFill>
                   <a:srgbClr val="17313B"/>
                 </a:solidFill>
@@ -1602,20 +1683,19 @@
                 <a:ea typeface="Malgun Gothic" pitchFamily="34" charset="-122"/>
                 <a:cs typeface="Malgun Gothic" pitchFamily="34" charset="-120"/>
               </a:rPr>
-              <a:t>’25.06 SK하이닉스 커스텀 HBM 3사 인증</a:t>
-            </a:r>
-            <a:endParaRPr lang="en-US" sz="2100" dirty="0"/>
-          </a:p>
-          <a:p>
-            <a:pPr marL="342900" indent="-342900">
-              <a:spcAft>
-                <a:spcPts val="800"/>
-              </a:spcAft>
-              <a:buSzPct val="100000"/>
-              <a:buChar char="•"/>
-            </a:pPr>
-            <a:r>
-              <a:rPr lang="en-US" sz="2100" dirty="0">
+              <a:t>SK하이닉스 커스텀 HBM</a:t>
+            </a:r>
+            <a:endParaRPr lang="en-US" sz="1250" dirty="0"/>
+          </a:p>
+          <a:p>
+            <a:pPr indent="0" marL="0">
+              <a:lnSpc>
+                <a:spcPct val="105000"/>
+              </a:lnSpc>
+              <a:buNone/>
+            </a:pPr>
+            <a:r>
+              <a:rPr lang="en-US" sz="1250" dirty="0">
                 <a:solidFill>
                   <a:srgbClr val="17313B"/>
                 </a:solidFill>
@@ -1623,20 +1703,100 @@
                 <a:ea typeface="Malgun Gothic" pitchFamily="34" charset="-122"/>
                 <a:cs typeface="Malgun Gothic" pitchFamily="34" charset="-120"/>
               </a:rPr>
-              <a:t>’25.10 Stargate LOI — 월 90만 장</a:t>
-            </a:r>
-            <a:endParaRPr lang="en-US" sz="2100" dirty="0"/>
-          </a:p>
-          <a:p>
-            <a:pPr marL="342900" indent="-342900">
-              <a:spcAft>
-                <a:spcPts val="800"/>
-              </a:spcAft>
-              <a:buSzPct val="100000"/>
-              <a:buChar char="•"/>
-            </a:pPr>
-            <a:r>
-              <a:rPr lang="en-US" sz="2100" dirty="0">
+              <a:t>3사 인증</a:t>
+            </a:r>
+            <a:endParaRPr lang="en-US" sz="1250" dirty="0"/>
+          </a:p>
+        </p:txBody>
+      </p:sp>
+      <p:sp>
+        <p:nvSpPr>
+          <p:cNvPr id="20" name="Shape 18"/>
+          <p:cNvSpPr/>
+          <p:nvPr/>
+        </p:nvSpPr>
+        <p:spPr>
+          <a:xfrm>
+            <a:off x="768096" y="2926080"/>
+            <a:ext cx="146304" cy="146304"/>
+          </a:xfrm>
+          <a:prstGeom prst="ellipse">
+            <a:avLst/>
+          </a:prstGeom>
+          <a:solidFill>
+            <a:srgbClr val="0E6BA8"/>
+          </a:solidFill>
+          <a:ln/>
+        </p:spPr>
+      </p:sp>
+      <p:sp>
+        <p:nvSpPr>
+          <p:cNvPr id="21" name="Text 19"/>
+          <p:cNvSpPr/>
+          <p:nvPr/>
+        </p:nvSpPr>
+        <p:spPr>
+          <a:xfrm>
+            <a:off x="1005840" y="2834640"/>
+            <a:ext cx="777240" cy="274320"/>
+          </a:xfrm>
+          <a:prstGeom prst="rect">
+            <a:avLst/>
+          </a:prstGeom>
+          <a:noFill/>
+          <a:ln/>
+        </p:spPr>
+        <p:txBody>
+          <a:bodyPr wrap="square" lIns="0" tIns="0" rIns="0" bIns="0" rtlCol="0" anchor="ctr"/>
+          <a:lstStyle/>
+          <a:p>
+            <a:pPr indent="0" marL="0">
+              <a:buNone/>
+            </a:pPr>
+            <a:r>
+              <a:rPr lang="en-US" sz="1400" b="1" dirty="0">
+                <a:solidFill>
+                  <a:srgbClr val="0E6BA8"/>
+                </a:solidFill>
+                <a:latin typeface="Malgun Gothic" pitchFamily="34" charset="0"/>
+                <a:ea typeface="Malgun Gothic" pitchFamily="34" charset="-122"/>
+                <a:cs typeface="Malgun Gothic" pitchFamily="34" charset="-120"/>
+              </a:rPr>
+              <a:t>’25.10</a:t>
+            </a:r>
+            <a:endParaRPr lang="en-US" sz="1400" dirty="0"/>
+          </a:p>
+        </p:txBody>
+      </p:sp>
+      <p:sp>
+        <p:nvSpPr>
+          <p:cNvPr id="22" name="Text 20"/>
+          <p:cNvSpPr/>
+          <p:nvPr/>
+        </p:nvSpPr>
+        <p:spPr>
+          <a:xfrm>
+            <a:off x="1755648" y="2825496"/>
+            <a:ext cx="2148840" cy="731520"/>
+          </a:xfrm>
+          <a:prstGeom prst="rect">
+            <a:avLst/>
+          </a:prstGeom>
+          <a:noFill/>
+          <a:ln/>
+        </p:spPr>
+        <p:txBody>
+          <a:bodyPr wrap="square" lIns="0" tIns="0" rIns="0" bIns="0" rtlCol="0" anchor="t"/>
+          <a:lstStyle/>
+          <a:p>
+            <a:pPr indent="0" marL="0">
+              <a:lnSpc>
+                <a:spcPct val="105000"/>
+              </a:lnSpc>
+              <a:buNone/>
+            </a:pPr>
+            <a:r>
+              <a:rPr lang="en-US" sz="1250" dirty="0">
                 <a:solidFill>
                   <a:srgbClr val="17313B"/>
                 </a:solidFill>
@@ -1644,20 +1804,19 @@
                 <a:ea typeface="Malgun Gothic" pitchFamily="34" charset="-122"/>
                 <a:cs typeface="Malgun Gothic" pitchFamily="34" charset="-120"/>
               </a:rPr>
-              <a:t>’26.06 SCA 16건·$100B·$22B</a:t>
-            </a:r>
-            <a:endParaRPr lang="en-US" sz="2100" dirty="0"/>
-          </a:p>
-          <a:p>
-            <a:pPr marL="342900" indent="-342900">
-              <a:spcAft>
-                <a:spcPts val="800"/>
-              </a:spcAft>
-              <a:buSzPct val="100000"/>
-              <a:buChar char="•"/>
-            </a:pPr>
-            <a:r>
-              <a:rPr lang="en-US" sz="2100" b="1" dirty="0">
+              <a:t>Stargate LOI</a:t>
+            </a:r>
+            <a:endParaRPr lang="en-US" sz="1250" dirty="0"/>
+          </a:p>
+          <a:p>
+            <a:pPr indent="0" marL="0">
+              <a:lnSpc>
+                <a:spcPct val="105000"/>
+              </a:lnSpc>
+              <a:buNone/>
+            </a:pPr>
+            <a:r>
+              <a:rPr lang="en-US" sz="1250" dirty="0">
                 <a:solidFill>
                   <a:srgbClr val="17313B"/>
                 </a:solidFill>
@@ -1665,22 +1824,81 @@
                 <a:ea typeface="Malgun Gothic" pitchFamily="34" charset="-122"/>
                 <a:cs typeface="Malgun Gothic" pitchFamily="34" charset="-120"/>
               </a:rPr>
-              <a:t>납품 정확성만으론 SCA 못 앉는다</a:t>
-            </a:r>
-            <a:endParaRPr lang="en-US" sz="2100" dirty="0"/>
-          </a:p>
-        </p:txBody>
-      </p:sp>
-      <p:sp>
-        <p:nvSpPr>
-          <p:cNvPr id="17" name="Text 15"/>
-          <p:cNvSpPr/>
-          <p:nvPr/>
-        </p:nvSpPr>
-        <p:spPr>
-          <a:xfrm>
-            <a:off x="4498848" y="1901952"/>
-            <a:ext cx="3218688" cy="3547872"/>
+              <a:t>월 90만 장 (DRAM ~40%)</a:t>
+            </a:r>
+            <a:endParaRPr lang="en-US" sz="1250" dirty="0"/>
+          </a:p>
+        </p:txBody>
+      </p:sp>
+      <p:sp>
+        <p:nvSpPr>
+          <p:cNvPr id="23" name="Shape 21"/>
+          <p:cNvSpPr/>
+          <p:nvPr/>
+        </p:nvSpPr>
+        <p:spPr>
+          <a:xfrm>
+            <a:off x="768096" y="3785616"/>
+            <a:ext cx="146304" cy="146304"/>
+          </a:xfrm>
+          <a:prstGeom prst="ellipse">
+            <a:avLst/>
+          </a:prstGeom>
+          <a:solidFill>
+            <a:srgbClr val="0E6BA8"/>
+          </a:solidFill>
+          <a:ln/>
+        </p:spPr>
+      </p:sp>
+      <p:sp>
+        <p:nvSpPr>
+          <p:cNvPr id="24" name="Text 22"/>
+          <p:cNvSpPr/>
+          <p:nvPr/>
+        </p:nvSpPr>
+        <p:spPr>
+          <a:xfrm>
+            <a:off x="1005840" y="3694176"/>
+            <a:ext cx="777240" cy="274320"/>
+          </a:xfrm>
+          <a:prstGeom prst="rect">
+            <a:avLst/>
+          </a:prstGeom>
+          <a:noFill/>
+          <a:ln/>
+        </p:spPr>
+        <p:txBody>
+          <a:bodyPr wrap="square" lIns="0" tIns="0" rIns="0" bIns="0" rtlCol="0" anchor="ctr"/>
+          <a:lstStyle/>
+          <a:p>
+            <a:pPr indent="0" marL="0">
+              <a:buNone/>
+            </a:pPr>
+            <a:r>
+              <a:rPr lang="en-US" sz="1400" b="1" dirty="0">
+                <a:solidFill>
+                  <a:srgbClr val="0E6BA8"/>
+                </a:solidFill>
+                <a:latin typeface="Malgun Gothic" pitchFamily="34" charset="0"/>
+                <a:ea typeface="Malgun Gothic" pitchFamily="34" charset="-122"/>
+                <a:cs typeface="Malgun Gothic" pitchFamily="34" charset="-120"/>
+              </a:rPr>
+              <a:t>’26.06</a:t>
+            </a:r>
+            <a:endParaRPr lang="en-US" sz="1400" dirty="0"/>
+          </a:p>
+        </p:txBody>
+      </p:sp>
+      <p:sp>
+        <p:nvSpPr>
+          <p:cNvPr id="25" name="Text 23"/>
+          <p:cNvSpPr/>
+          <p:nvPr/>
+        </p:nvSpPr>
+        <p:spPr>
+          <a:xfrm>
+            <a:off x="1755648" y="3685032"/>
+            <a:ext cx="2148840" cy="731520"/>
           </a:xfrm>
           <a:prstGeom prst="rect">
             <a:avLst/>
@@ -1692,15 +1910,14 @@
           <a:bodyPr wrap="square" lIns="0" tIns="0" rIns="0" bIns="0" rtlCol="0" anchor="t"/>
           <a:lstStyle/>
           <a:p>
-            <a:pPr marL="342900" indent="-342900">
-              <a:spcAft>
-                <a:spcPts val="800"/>
-              </a:spcAft>
-              <a:buSzPct val="100000"/>
-              <a:buChar char="•"/>
-            </a:pPr>
-            <a:r>
-              <a:rPr lang="en-US" sz="2100" dirty="0">
+            <a:pPr indent="0" marL="0">
+              <a:lnSpc>
+                <a:spcPct val="105000"/>
+              </a:lnSpc>
+              <a:buNone/>
+            </a:pPr>
+            <a:r>
+              <a:rPr lang="en-US" sz="1250" dirty="0">
                 <a:solidFill>
                   <a:srgbClr val="17313B"/>
                 </a:solidFill>
@@ -1708,20 +1925,19 @@
                 <a:ea typeface="Malgun Gothic" pitchFamily="34" charset="-122"/>
                 <a:cs typeface="Malgun Gothic" pitchFamily="34" charset="-120"/>
               </a:rPr>
-              <a:t>스펙 수령 → 요구 공동 정의</a:t>
-            </a:r>
-            <a:endParaRPr lang="en-US" sz="2100" dirty="0"/>
-          </a:p>
-          <a:p>
-            <a:pPr marL="342900" indent="-342900">
-              <a:spcAft>
-                <a:spcPts val="800"/>
-              </a:spcAft>
-              <a:buSzPct val="100000"/>
-              <a:buChar char="•"/>
-            </a:pPr>
-            <a:r>
-              <a:rPr lang="en-US" sz="2100" dirty="0">
+              <a:t>Micron–Anthropic SCA</a:t>
+            </a:r>
+            <a:endParaRPr lang="en-US" sz="1250" dirty="0"/>
+          </a:p>
+          <a:p>
+            <a:pPr indent="0" marL="0">
+              <a:lnSpc>
+                <a:spcPct val="105000"/>
+              </a:lnSpc>
+              <a:buNone/>
+            </a:pPr>
+            <a:r>
+              <a:rPr lang="en-US" sz="1250" dirty="0">
                 <a:solidFill>
                   <a:srgbClr val="17313B"/>
                 </a:solidFill>
@@ -1729,20 +1945,92 @@
                 <a:ea typeface="Malgun Gothic" pitchFamily="34" charset="-122"/>
                 <a:cs typeface="Malgun Gothic" pitchFamily="34" charset="-120"/>
               </a:rPr>
-              <a:t>RFQ 응답 → 선제 제안</a:t>
-            </a:r>
-            <a:endParaRPr lang="en-US" sz="2100" dirty="0"/>
-          </a:p>
-          <a:p>
-            <a:pPr marL="342900" indent="-342900">
-              <a:spcAft>
-                <a:spcPts val="800"/>
-              </a:spcAft>
-              <a:buSzPct val="100000"/>
-              <a:buChar char="•"/>
-            </a:pPr>
-            <a:r>
-              <a:rPr lang="en-US" sz="2100" dirty="0">
+              <a:t>16건 · $100B · $22B</a:t>
+            </a:r>
+            <a:endParaRPr lang="en-US" sz="1250" dirty="0"/>
+          </a:p>
+        </p:txBody>
+      </p:sp>
+      <p:sp>
+        <p:nvSpPr>
+          <p:cNvPr id="26" name="Shape 24"/>
+          <p:cNvSpPr/>
+          <p:nvPr/>
+        </p:nvSpPr>
+        <p:spPr>
+          <a:xfrm>
+            <a:off x="640080" y="4590288"/>
+            <a:ext cx="3236976" cy="713232"/>
+          </a:xfrm>
+          <a:prstGeom prst="roundRect">
+            <a:avLst>
+              <a:gd name="adj" fmla="val 10256"/>
+            </a:avLst>
+          </a:prstGeom>
+          <a:solidFill>
+            <a:srgbClr val="FFFFFF"/>
+          </a:solidFill>
+          <a:ln w="12700">
+            <a:solidFill>
+              <a:srgbClr val="0E6BA8"/>
+            </a:solidFill>
+            <a:prstDash val="solid"/>
+          </a:ln>
+        </p:spPr>
+      </p:sp>
+      <p:pic>
+        <p:nvPicPr>
+          <p:cNvPr id="27" name="Image 0" descr="preencoded.png">    </p:cNvPr>
+          <p:cNvPicPr>
+            <a:picLocks noChangeAspect="1"/>
+          </p:cNvPicPr>
+          <p:nvPr/>
+        </p:nvPicPr>
+        <p:blipFill>
+          <a:blip r:embed="rId1"/>
+          <a:stretch>
+            <a:fillRect/>
+          </a:stretch>
+        </p:blipFill>
+        <p:spPr>
+          <a:xfrm>
+            <a:off x="786384" y="4791456"/>
+            <a:ext cx="310896" cy="310896"/>
+          </a:xfrm>
+          <a:prstGeom prst="rect">
+            <a:avLst/>
+          </a:prstGeom>
+        </p:spPr>
+      </p:pic>
+      <p:sp>
+        <p:nvSpPr>
+          <p:cNvPr id="28" name="Text 25"/>
+          <p:cNvSpPr/>
+          <p:nvPr/>
+        </p:nvSpPr>
+        <p:spPr>
+          <a:xfrm>
+            <a:off x="1207008" y="4626864"/>
+            <a:ext cx="2633472" cy="640080"/>
+          </a:xfrm>
+          <a:prstGeom prst="rect">
+            <a:avLst/>
+          </a:prstGeom>
+          <a:noFill/>
+          <a:ln/>
+        </p:spPr>
+        <p:txBody>
+          <a:bodyPr wrap="square" lIns="0" tIns="0" rIns="0" bIns="0" rtlCol="0" anchor="ctr"/>
+          <a:lstStyle/>
+          <a:p>
+            <a:pPr indent="0" marL="0">
+              <a:lnSpc>
+                <a:spcPct val="105000"/>
+              </a:lnSpc>
+              <a:buNone/>
+            </a:pPr>
+            <a:r>
+              <a:rPr lang="en-US" sz="1400" b="1" dirty="0">
                 <a:solidFill>
                   <a:srgbClr val="17313B"/>
                 </a:solidFill>
@@ -1750,20 +2038,19 @@
                 <a:ea typeface="Malgun Gothic" pitchFamily="34" charset="-122"/>
                 <a:cs typeface="Malgun Gothic" pitchFamily="34" charset="-120"/>
               </a:rPr>
-              <a:t>부품 → 시스템 모델 (서버→랙→DC)</a:t>
-            </a:r>
-            <a:endParaRPr lang="en-US" sz="2100" dirty="0"/>
-          </a:p>
-          <a:p>
-            <a:pPr marL="342900" indent="-342900">
-              <a:spcAft>
-                <a:spcPts val="800"/>
-              </a:spcAft>
-              <a:buSzPct val="100000"/>
-              <a:buChar char="•"/>
-            </a:pPr>
-            <a:r>
-              <a:rPr lang="en-US" sz="2100" dirty="0">
+              <a:t>납품 정확성만으론</a:t>
+            </a:r>
+            <a:endParaRPr lang="en-US" sz="1400" dirty="0"/>
+          </a:p>
+          <a:p>
+            <a:pPr indent="0" marL="0">
+              <a:lnSpc>
+                <a:spcPct val="105000"/>
+              </a:lnSpc>
+              <a:buNone/>
+            </a:pPr>
+            <a:r>
+              <a:rPr lang="en-US" sz="1400" b="1" dirty="0">
                 <a:solidFill>
                   <a:srgbClr val="17313B"/>
                 </a:solidFill>
@@ -1771,20 +2058,699 @@
                 <a:ea typeface="Malgun Gothic" pitchFamily="34" charset="-122"/>
                 <a:cs typeface="Malgun Gothic" pitchFamily="34" charset="-120"/>
               </a:rPr>
-              <a:t>QCD → 공동설계·채택률 KPI</a:t>
-            </a:r>
-            <a:endParaRPr lang="en-US" sz="2100" dirty="0"/>
-          </a:p>
-          <a:p>
-            <a:pPr marL="342900" indent="-342900">
-              <a:spcAft>
-                <a:spcPts val="800"/>
-              </a:spcAft>
-              <a:buSzPct val="100000"/>
-              <a:buChar char="•"/>
-            </a:pPr>
-            <a:r>
-              <a:rPr lang="en-US" sz="2100" dirty="0">
+              <a:t>SCA 테이블에 못 앉는다</a:t>
+            </a:r>
+            <a:endParaRPr lang="en-US" sz="1400" dirty="0"/>
+          </a:p>
+        </p:txBody>
+      </p:sp>
+      <p:sp>
+        <p:nvSpPr>
+          <p:cNvPr id="29" name="Text 26"/>
+          <p:cNvSpPr/>
+          <p:nvPr/>
+        </p:nvSpPr>
+        <p:spPr>
+          <a:xfrm>
+            <a:off x="4517136" y="1883664"/>
+            <a:ext cx="1371600" cy="237744"/>
+          </a:xfrm>
+          <a:prstGeom prst="rect">
+            <a:avLst/>
+          </a:prstGeom>
+          <a:noFill/>
+          <a:ln/>
+        </p:spPr>
+        <p:txBody>
+          <a:bodyPr wrap="square" lIns="0" tIns="0" rIns="0" bIns="0" rtlCol="0" anchor="ctr"/>
+          <a:lstStyle/>
+          <a:p>
+            <a:pPr indent="0" marL="0">
+              <a:buNone/>
+            </a:pPr>
+            <a:r>
+              <a:rPr lang="en-US" sz="1200" b="1" dirty="0">
+                <a:solidFill>
+                  <a:srgbClr val="5A7184"/>
+                </a:solidFill>
+                <a:latin typeface="Malgun Gothic" pitchFamily="34" charset="0"/>
+                <a:ea typeface="Malgun Gothic" pitchFamily="34" charset="-122"/>
+                <a:cs typeface="Malgun Gothic" pitchFamily="34" charset="-120"/>
+              </a:rPr>
+              <a:t>As-Is</a:t>
+            </a:r>
+            <a:endParaRPr lang="en-US" sz="1200" dirty="0"/>
+          </a:p>
+        </p:txBody>
+      </p:sp>
+      <p:sp>
+        <p:nvSpPr>
+          <p:cNvPr id="30" name="Text 27"/>
+          <p:cNvSpPr/>
+          <p:nvPr/>
+        </p:nvSpPr>
+        <p:spPr>
+          <a:xfrm>
+            <a:off x="6181344" y="1883664"/>
+            <a:ext cx="1463040" cy="237744"/>
+          </a:xfrm>
+          <a:prstGeom prst="rect">
+            <a:avLst/>
+          </a:prstGeom>
+          <a:noFill/>
+          <a:ln/>
+        </p:spPr>
+        <p:txBody>
+          <a:bodyPr wrap="square" lIns="0" tIns="0" rIns="0" bIns="0" rtlCol="0" anchor="ctr"/>
+          <a:lstStyle/>
+          <a:p>
+            <a:pPr indent="0" marL="0">
+              <a:buNone/>
+            </a:pPr>
+            <a:r>
+              <a:rPr lang="en-US" sz="1200" b="1" dirty="0">
+                <a:solidFill>
+                  <a:srgbClr val="028090"/>
+                </a:solidFill>
+                <a:latin typeface="Malgun Gothic" pitchFamily="34" charset="0"/>
+                <a:ea typeface="Malgun Gothic" pitchFamily="34" charset="-122"/>
+                <a:cs typeface="Malgun Gothic" pitchFamily="34" charset="-120"/>
+              </a:rPr>
+              <a:t>To-Be</a:t>
+            </a:r>
+            <a:endParaRPr lang="en-US" sz="1200" dirty="0"/>
+          </a:p>
+        </p:txBody>
+      </p:sp>
+      <p:sp>
+        <p:nvSpPr>
+          <p:cNvPr id="31" name="Text 28"/>
+          <p:cNvSpPr/>
+          <p:nvPr/>
+        </p:nvSpPr>
+        <p:spPr>
+          <a:xfrm>
+            <a:off x="4517136" y="2157984"/>
+            <a:ext cx="1371600" cy="475488"/>
+          </a:xfrm>
+          <a:prstGeom prst="roundRect">
+            <a:avLst>
+              <a:gd name="adj" fmla="val 11538"/>
+            </a:avLst>
+          </a:prstGeom>
+          <a:solidFill>
+            <a:srgbClr val="FFFFFF"/>
+          </a:solidFill>
+          <a:ln w="12700">
+            <a:solidFill>
+              <a:srgbClr val="D9E6EC"/>
+            </a:solidFill>
+          </a:ln>
+        </p:spPr>
+        <p:txBody>
+          <a:bodyPr wrap="square" lIns="0" tIns="0" rIns="0" bIns="0" rtlCol="0" anchor="ctr"/>
+          <a:lstStyle/>
+          <a:p>
+            <a:pPr algn="ctr" indent="0" marL="0">
+              <a:buNone/>
+            </a:pPr>
+            <a:r>
+              <a:rPr lang="en-US" sz="1350" dirty="0">
+                <a:solidFill>
+                  <a:srgbClr val="5A7184"/>
+                </a:solidFill>
+                <a:latin typeface="Malgun Gothic" pitchFamily="34" charset="0"/>
+                <a:ea typeface="Malgun Gothic" pitchFamily="34" charset="-122"/>
+                <a:cs typeface="Malgun Gothic" pitchFamily="34" charset="-120"/>
+              </a:rPr>
+              <a:t>스펙 수령</a:t>
+            </a:r>
+            <a:endParaRPr lang="en-US" sz="1350" dirty="0"/>
+          </a:p>
+        </p:txBody>
+      </p:sp>
+      <p:sp>
+        <p:nvSpPr>
+          <p:cNvPr id="32" name="Text 29"/>
+          <p:cNvSpPr/>
+          <p:nvPr/>
+        </p:nvSpPr>
+        <p:spPr>
+          <a:xfrm>
+            <a:off x="5888736" y="2157984"/>
+            <a:ext cx="292608" cy="475488"/>
+          </a:xfrm>
+          <a:prstGeom prst="rect">
+            <a:avLst/>
+          </a:prstGeom>
+          <a:noFill/>
+          <a:ln/>
+        </p:spPr>
+        <p:txBody>
+          <a:bodyPr wrap="square" lIns="0" tIns="0" rIns="0" bIns="0" rtlCol="0" anchor="ctr"/>
+          <a:lstStyle/>
+          <a:p>
+            <a:pPr algn="ctr" indent="0" marL="0">
+              <a:buNone/>
+            </a:pPr>
+            <a:r>
+              <a:rPr lang="en-US" sz="1600" b="1" dirty="0">
+                <a:solidFill>
+                  <a:srgbClr val="028090"/>
+                </a:solidFill>
+                <a:latin typeface="Malgun Gothic" pitchFamily="34" charset="0"/>
+                <a:ea typeface="Malgun Gothic" pitchFamily="34" charset="-122"/>
+                <a:cs typeface="Malgun Gothic" pitchFamily="34" charset="-120"/>
+              </a:rPr>
+              <a:t>→</a:t>
+            </a:r>
+            <a:endParaRPr lang="en-US" sz="1600" dirty="0"/>
+          </a:p>
+        </p:txBody>
+      </p:sp>
+      <p:sp>
+        <p:nvSpPr>
+          <p:cNvPr id="33" name="Text 30"/>
+          <p:cNvSpPr/>
+          <p:nvPr/>
+        </p:nvSpPr>
+        <p:spPr>
+          <a:xfrm>
+            <a:off x="6181344" y="2157984"/>
+            <a:ext cx="1499616" cy="475488"/>
+          </a:xfrm>
+          <a:prstGeom prst="roundRect">
+            <a:avLst>
+              <a:gd name="adj" fmla="val 11538"/>
+            </a:avLst>
+          </a:prstGeom>
+          <a:solidFill>
+            <a:srgbClr val="FFFFFF"/>
+          </a:solidFill>
+          <a:ln w="15875">
+            <a:solidFill>
+              <a:srgbClr val="028090"/>
+            </a:solidFill>
+          </a:ln>
+        </p:spPr>
+        <p:txBody>
+          <a:bodyPr wrap="square" lIns="0" tIns="0" rIns="0" bIns="0" rtlCol="0" anchor="ctr"/>
+          <a:lstStyle/>
+          <a:p>
+            <a:pPr algn="ctr" indent="0" marL="0">
+              <a:buNone/>
+            </a:pPr>
+            <a:r>
+              <a:rPr lang="en-US" sz="1350" b="1" dirty="0">
+                <a:solidFill>
+                  <a:srgbClr val="028090"/>
+                </a:solidFill>
+                <a:latin typeface="Malgun Gothic" pitchFamily="34" charset="0"/>
+                <a:ea typeface="Malgun Gothic" pitchFamily="34" charset="-122"/>
+                <a:cs typeface="Malgun Gothic" pitchFamily="34" charset="-120"/>
+              </a:rPr>
+              <a:t>요구 공동 정의</a:t>
+            </a:r>
+            <a:endParaRPr lang="en-US" sz="1350" dirty="0"/>
+          </a:p>
+        </p:txBody>
+      </p:sp>
+      <p:sp>
+        <p:nvSpPr>
+          <p:cNvPr id="34" name="Text 31"/>
+          <p:cNvSpPr/>
+          <p:nvPr/>
+        </p:nvSpPr>
+        <p:spPr>
+          <a:xfrm>
+            <a:off x="4517136" y="2761488"/>
+            <a:ext cx="1371600" cy="475488"/>
+          </a:xfrm>
+          <a:prstGeom prst="roundRect">
+            <a:avLst>
+              <a:gd name="adj" fmla="val 11538"/>
+            </a:avLst>
+          </a:prstGeom>
+          <a:solidFill>
+            <a:srgbClr val="FFFFFF"/>
+          </a:solidFill>
+          <a:ln w="12700">
+            <a:solidFill>
+              <a:srgbClr val="D9E6EC"/>
+            </a:solidFill>
+          </a:ln>
+        </p:spPr>
+        <p:txBody>
+          <a:bodyPr wrap="square" lIns="0" tIns="0" rIns="0" bIns="0" rtlCol="0" anchor="ctr"/>
+          <a:lstStyle/>
+          <a:p>
+            <a:pPr algn="ctr" indent="0" marL="0">
+              <a:buNone/>
+            </a:pPr>
+            <a:r>
+              <a:rPr lang="en-US" sz="1350" dirty="0">
+                <a:solidFill>
+                  <a:srgbClr val="5A7184"/>
+                </a:solidFill>
+                <a:latin typeface="Malgun Gothic" pitchFamily="34" charset="0"/>
+                <a:ea typeface="Malgun Gothic" pitchFamily="34" charset="-122"/>
+                <a:cs typeface="Malgun Gothic" pitchFamily="34" charset="-120"/>
+              </a:rPr>
+              <a:t>RFQ 응답</a:t>
+            </a:r>
+            <a:endParaRPr lang="en-US" sz="1350" dirty="0"/>
+          </a:p>
+        </p:txBody>
+      </p:sp>
+      <p:sp>
+        <p:nvSpPr>
+          <p:cNvPr id="35" name="Text 32"/>
+          <p:cNvSpPr/>
+          <p:nvPr/>
+        </p:nvSpPr>
+        <p:spPr>
+          <a:xfrm>
+            <a:off x="5888736" y="2761488"/>
+            <a:ext cx="292608" cy="475488"/>
+          </a:xfrm>
+          <a:prstGeom prst="rect">
+            <a:avLst/>
+          </a:prstGeom>
+          <a:noFill/>
+          <a:ln/>
+        </p:spPr>
+        <p:txBody>
+          <a:bodyPr wrap="square" lIns="0" tIns="0" rIns="0" bIns="0" rtlCol="0" anchor="ctr"/>
+          <a:lstStyle/>
+          <a:p>
+            <a:pPr algn="ctr" indent="0" marL="0">
+              <a:buNone/>
+            </a:pPr>
+            <a:r>
+              <a:rPr lang="en-US" sz="1600" b="1" dirty="0">
+                <a:solidFill>
+                  <a:srgbClr val="028090"/>
+                </a:solidFill>
+                <a:latin typeface="Malgun Gothic" pitchFamily="34" charset="0"/>
+                <a:ea typeface="Malgun Gothic" pitchFamily="34" charset="-122"/>
+                <a:cs typeface="Malgun Gothic" pitchFamily="34" charset="-120"/>
+              </a:rPr>
+              <a:t>→</a:t>
+            </a:r>
+            <a:endParaRPr lang="en-US" sz="1600" dirty="0"/>
+          </a:p>
+        </p:txBody>
+      </p:sp>
+      <p:sp>
+        <p:nvSpPr>
+          <p:cNvPr id="36" name="Text 33"/>
+          <p:cNvSpPr/>
+          <p:nvPr/>
+        </p:nvSpPr>
+        <p:spPr>
+          <a:xfrm>
+            <a:off x="6181344" y="2761488"/>
+            <a:ext cx="1499616" cy="475488"/>
+          </a:xfrm>
+          <a:prstGeom prst="roundRect">
+            <a:avLst>
+              <a:gd name="adj" fmla="val 11538"/>
+            </a:avLst>
+          </a:prstGeom>
+          <a:solidFill>
+            <a:srgbClr val="FFFFFF"/>
+          </a:solidFill>
+          <a:ln w="15875">
+            <a:solidFill>
+              <a:srgbClr val="028090"/>
+            </a:solidFill>
+          </a:ln>
+        </p:spPr>
+        <p:txBody>
+          <a:bodyPr wrap="square" lIns="0" tIns="0" rIns="0" bIns="0" rtlCol="0" anchor="ctr"/>
+          <a:lstStyle/>
+          <a:p>
+            <a:pPr algn="ctr" indent="0" marL="0">
+              <a:buNone/>
+            </a:pPr>
+            <a:r>
+              <a:rPr lang="en-US" sz="1350" b="1" dirty="0">
+                <a:solidFill>
+                  <a:srgbClr val="028090"/>
+                </a:solidFill>
+                <a:latin typeface="Malgun Gothic" pitchFamily="34" charset="0"/>
+                <a:ea typeface="Malgun Gothic" pitchFamily="34" charset="-122"/>
+                <a:cs typeface="Malgun Gothic" pitchFamily="34" charset="-120"/>
+              </a:rPr>
+              <a:t>선제 제안</a:t>
+            </a:r>
+            <a:endParaRPr lang="en-US" sz="1350" dirty="0"/>
+          </a:p>
+        </p:txBody>
+      </p:sp>
+      <p:sp>
+        <p:nvSpPr>
+          <p:cNvPr id="37" name="Text 34"/>
+          <p:cNvSpPr/>
+          <p:nvPr/>
+        </p:nvSpPr>
+        <p:spPr>
+          <a:xfrm>
+            <a:off x="4517136" y="3364992"/>
+            <a:ext cx="1371600" cy="475488"/>
+          </a:xfrm>
+          <a:prstGeom prst="roundRect">
+            <a:avLst>
+              <a:gd name="adj" fmla="val 11538"/>
+            </a:avLst>
+          </a:prstGeom>
+          <a:solidFill>
+            <a:srgbClr val="FFFFFF"/>
+          </a:solidFill>
+          <a:ln w="12700">
+            <a:solidFill>
+              <a:srgbClr val="D9E6EC"/>
+            </a:solidFill>
+          </a:ln>
+        </p:spPr>
+        <p:txBody>
+          <a:bodyPr wrap="square" lIns="0" tIns="0" rIns="0" bIns="0" rtlCol="0" anchor="ctr"/>
+          <a:lstStyle/>
+          <a:p>
+            <a:pPr algn="ctr" indent="0" marL="0">
+              <a:buNone/>
+            </a:pPr>
+            <a:r>
+              <a:rPr lang="en-US" sz="1350" dirty="0">
+                <a:solidFill>
+                  <a:srgbClr val="5A7184"/>
+                </a:solidFill>
+                <a:latin typeface="Malgun Gothic" pitchFamily="34" charset="0"/>
+                <a:ea typeface="Malgun Gothic" pitchFamily="34" charset="-122"/>
+                <a:cs typeface="Malgun Gothic" pitchFamily="34" charset="-120"/>
+              </a:rPr>
+              <a:t>부품 단품</a:t>
+            </a:r>
+            <a:endParaRPr lang="en-US" sz="1350" dirty="0"/>
+          </a:p>
+        </p:txBody>
+      </p:sp>
+      <p:sp>
+        <p:nvSpPr>
+          <p:cNvPr id="38" name="Text 35"/>
+          <p:cNvSpPr/>
+          <p:nvPr/>
+        </p:nvSpPr>
+        <p:spPr>
+          <a:xfrm>
+            <a:off x="5888736" y="3364992"/>
+            <a:ext cx="292608" cy="475488"/>
+          </a:xfrm>
+          <a:prstGeom prst="rect">
+            <a:avLst/>
+          </a:prstGeom>
+          <a:noFill/>
+          <a:ln/>
+        </p:spPr>
+        <p:txBody>
+          <a:bodyPr wrap="square" lIns="0" tIns="0" rIns="0" bIns="0" rtlCol="0" anchor="ctr"/>
+          <a:lstStyle/>
+          <a:p>
+            <a:pPr algn="ctr" indent="0" marL="0">
+              <a:buNone/>
+            </a:pPr>
+            <a:r>
+              <a:rPr lang="en-US" sz="1600" b="1" dirty="0">
+                <a:solidFill>
+                  <a:srgbClr val="028090"/>
+                </a:solidFill>
+                <a:latin typeface="Malgun Gothic" pitchFamily="34" charset="0"/>
+                <a:ea typeface="Malgun Gothic" pitchFamily="34" charset="-122"/>
+                <a:cs typeface="Malgun Gothic" pitchFamily="34" charset="-120"/>
+              </a:rPr>
+              <a:t>→</a:t>
+            </a:r>
+            <a:endParaRPr lang="en-US" sz="1600" dirty="0"/>
+          </a:p>
+        </p:txBody>
+      </p:sp>
+      <p:sp>
+        <p:nvSpPr>
+          <p:cNvPr id="39" name="Text 36"/>
+          <p:cNvSpPr/>
+          <p:nvPr/>
+        </p:nvSpPr>
+        <p:spPr>
+          <a:xfrm>
+            <a:off x="6181344" y="3364992"/>
+            <a:ext cx="1499616" cy="475488"/>
+          </a:xfrm>
+          <a:prstGeom prst="roundRect">
+            <a:avLst>
+              <a:gd name="adj" fmla="val 11538"/>
+            </a:avLst>
+          </a:prstGeom>
+          <a:solidFill>
+            <a:srgbClr val="FFFFFF"/>
+          </a:solidFill>
+          <a:ln w="15875">
+            <a:solidFill>
+              <a:srgbClr val="028090"/>
+            </a:solidFill>
+          </a:ln>
+        </p:spPr>
+        <p:txBody>
+          <a:bodyPr wrap="square" lIns="0" tIns="0" rIns="0" bIns="0" rtlCol="0" anchor="ctr"/>
+          <a:lstStyle/>
+          <a:p>
+            <a:pPr algn="ctr" indent="0" marL="0">
+              <a:buNone/>
+            </a:pPr>
+            <a:r>
+              <a:rPr lang="en-US" sz="1350" b="1" dirty="0">
+                <a:solidFill>
+                  <a:srgbClr val="028090"/>
+                </a:solidFill>
+                <a:latin typeface="Malgun Gothic" pitchFamily="34" charset="0"/>
+                <a:ea typeface="Malgun Gothic" pitchFamily="34" charset="-122"/>
+                <a:cs typeface="Malgun Gothic" pitchFamily="34" charset="-120"/>
+              </a:rPr>
+              <a:t>시스템 모델</a:t>
+            </a:r>
+            <a:endParaRPr lang="en-US" sz="1350" dirty="0"/>
+          </a:p>
+        </p:txBody>
+      </p:sp>
+      <p:sp>
+        <p:nvSpPr>
+          <p:cNvPr id="40" name="Text 37"/>
+          <p:cNvSpPr/>
+          <p:nvPr/>
+        </p:nvSpPr>
+        <p:spPr>
+          <a:xfrm>
+            <a:off x="4517136" y="3968496"/>
+            <a:ext cx="1371600" cy="475488"/>
+          </a:xfrm>
+          <a:prstGeom prst="roundRect">
+            <a:avLst>
+              <a:gd name="adj" fmla="val 11538"/>
+            </a:avLst>
+          </a:prstGeom>
+          <a:solidFill>
+            <a:srgbClr val="FFFFFF"/>
+          </a:solidFill>
+          <a:ln w="12700">
+            <a:solidFill>
+              <a:srgbClr val="D9E6EC"/>
+            </a:solidFill>
+          </a:ln>
+        </p:spPr>
+        <p:txBody>
+          <a:bodyPr wrap="square" lIns="0" tIns="0" rIns="0" bIns="0" rtlCol="0" anchor="ctr"/>
+          <a:lstStyle/>
+          <a:p>
+            <a:pPr algn="ctr" indent="0" marL="0">
+              <a:buNone/>
+            </a:pPr>
+            <a:r>
+              <a:rPr lang="en-US" sz="1350" dirty="0">
+                <a:solidFill>
+                  <a:srgbClr val="5A7184"/>
+                </a:solidFill>
+                <a:latin typeface="Malgun Gothic" pitchFamily="34" charset="0"/>
+                <a:ea typeface="Malgun Gothic" pitchFamily="34" charset="-122"/>
+                <a:cs typeface="Malgun Gothic" pitchFamily="34" charset="-120"/>
+              </a:rPr>
+              <a:t>QCD</a:t>
+            </a:r>
+            <a:endParaRPr lang="en-US" sz="1350" dirty="0"/>
+          </a:p>
+        </p:txBody>
+      </p:sp>
+      <p:sp>
+        <p:nvSpPr>
+          <p:cNvPr id="41" name="Text 38"/>
+          <p:cNvSpPr/>
+          <p:nvPr/>
+        </p:nvSpPr>
+        <p:spPr>
+          <a:xfrm>
+            <a:off x="5888736" y="3968496"/>
+            <a:ext cx="292608" cy="475488"/>
+          </a:xfrm>
+          <a:prstGeom prst="rect">
+            <a:avLst/>
+          </a:prstGeom>
+          <a:noFill/>
+          <a:ln/>
+        </p:spPr>
+        <p:txBody>
+          <a:bodyPr wrap="square" lIns="0" tIns="0" rIns="0" bIns="0" rtlCol="0" anchor="ctr"/>
+          <a:lstStyle/>
+          <a:p>
+            <a:pPr algn="ctr" indent="0" marL="0">
+              <a:buNone/>
+            </a:pPr>
+            <a:r>
+              <a:rPr lang="en-US" sz="1600" b="1" dirty="0">
+                <a:solidFill>
+                  <a:srgbClr val="028090"/>
+                </a:solidFill>
+                <a:latin typeface="Malgun Gothic" pitchFamily="34" charset="0"/>
+                <a:ea typeface="Malgun Gothic" pitchFamily="34" charset="-122"/>
+                <a:cs typeface="Malgun Gothic" pitchFamily="34" charset="-120"/>
+              </a:rPr>
+              <a:t>→</a:t>
+            </a:r>
+            <a:endParaRPr lang="en-US" sz="1600" dirty="0"/>
+          </a:p>
+        </p:txBody>
+      </p:sp>
+      <p:sp>
+        <p:nvSpPr>
+          <p:cNvPr id="42" name="Text 39"/>
+          <p:cNvSpPr/>
+          <p:nvPr/>
+        </p:nvSpPr>
+        <p:spPr>
+          <a:xfrm>
+            <a:off x="6181344" y="3968496"/>
+            <a:ext cx="1499616" cy="475488"/>
+          </a:xfrm>
+          <a:prstGeom prst="roundRect">
+            <a:avLst>
+              <a:gd name="adj" fmla="val 11538"/>
+            </a:avLst>
+          </a:prstGeom>
+          <a:solidFill>
+            <a:srgbClr val="FFFFFF"/>
+          </a:solidFill>
+          <a:ln w="15875">
+            <a:solidFill>
+              <a:srgbClr val="028090"/>
+            </a:solidFill>
+          </a:ln>
+        </p:spPr>
+        <p:txBody>
+          <a:bodyPr wrap="square" lIns="0" tIns="0" rIns="0" bIns="0" rtlCol="0" anchor="ctr"/>
+          <a:lstStyle/>
+          <a:p>
+            <a:pPr algn="ctr" indent="0" marL="0">
+              <a:buNone/>
+            </a:pPr>
+            <a:r>
+              <a:rPr lang="en-US" sz="1350" b="1" dirty="0">
+                <a:solidFill>
+                  <a:srgbClr val="028090"/>
+                </a:solidFill>
+                <a:latin typeface="Malgun Gothic" pitchFamily="34" charset="0"/>
+                <a:ea typeface="Malgun Gothic" pitchFamily="34" charset="-122"/>
+                <a:cs typeface="Malgun Gothic" pitchFamily="34" charset="-120"/>
+              </a:rPr>
+              <a:t>공동설계 KPI</a:t>
+            </a:r>
+            <a:endParaRPr lang="en-US" sz="1350" dirty="0"/>
+          </a:p>
+        </p:txBody>
+      </p:sp>
+      <p:sp>
+        <p:nvSpPr>
+          <p:cNvPr id="43" name="Shape 40"/>
+          <p:cNvSpPr/>
+          <p:nvPr/>
+        </p:nvSpPr>
+        <p:spPr>
+          <a:xfrm>
+            <a:off x="4517136" y="4700016"/>
+            <a:ext cx="3163824" cy="530352"/>
+          </a:xfrm>
+          <a:prstGeom prst="roundRect">
+            <a:avLst>
+              <a:gd name="adj" fmla="val 13793"/>
+            </a:avLst>
+          </a:prstGeom>
+          <a:solidFill>
+            <a:srgbClr val="FFFFFF"/>
+          </a:solidFill>
+          <a:ln w="12700">
+            <a:solidFill>
+              <a:srgbClr val="028090"/>
+            </a:solidFill>
+            <a:prstDash val="solid"/>
+          </a:ln>
+        </p:spPr>
+      </p:sp>
+      <p:pic>
+        <p:nvPicPr>
+          <p:cNvPr id="44" name="Image 1" descr="preencoded.png">    </p:cNvPr>
+          <p:cNvPicPr>
+            <a:picLocks noChangeAspect="1"/>
+          </p:cNvPicPr>
+          <p:nvPr/>
+        </p:nvPicPr>
+        <p:blipFill>
+          <a:blip r:embed="rId2"/>
+          <a:stretch>
+            <a:fillRect/>
+          </a:stretch>
+        </p:blipFill>
+        <p:spPr>
+          <a:xfrm>
+            <a:off x="4663440" y="4828032"/>
+            <a:ext cx="274320" cy="274320"/>
+          </a:xfrm>
+          <a:prstGeom prst="rect">
+            <a:avLst/>
+          </a:prstGeom>
+        </p:spPr>
+      </p:pic>
+      <p:sp>
+        <p:nvSpPr>
+          <p:cNvPr id="45" name="Text 41"/>
+          <p:cNvSpPr/>
+          <p:nvPr/>
+        </p:nvSpPr>
+        <p:spPr>
+          <a:xfrm>
+            <a:off x="5029200" y="4700016"/>
+            <a:ext cx="2596896" cy="530352"/>
+          </a:xfrm>
+          <a:prstGeom prst="rect">
+            <a:avLst/>
+          </a:prstGeom>
+          <a:noFill/>
+          <a:ln/>
+        </p:spPr>
+        <p:txBody>
+          <a:bodyPr wrap="square" lIns="0" tIns="0" rIns="0" bIns="0" rtlCol="0" anchor="ctr"/>
+          <a:lstStyle/>
+          <a:p>
+            <a:pPr indent="0" marL="0">
+              <a:buNone/>
+            </a:pPr>
+            <a:r>
+              <a:rPr lang="en-US" sz="1300" b="1" dirty="0">
                 <a:solidFill>
                   <a:srgbClr val="17313B"/>
                 </a:solidFill>
@@ -1792,58 +2758,82 @@
                 <a:ea typeface="Malgun Gothic" pitchFamily="34" charset="-122"/>
                 <a:cs typeface="Malgun Gothic" pitchFamily="34" charset="-120"/>
               </a:rPr>
-              <a:t>롤모델: Palantir FDE (고객사 상주)</a:t>
-            </a:r>
-            <a:endParaRPr lang="en-US" sz="2100" dirty="0"/>
-          </a:p>
-        </p:txBody>
-      </p:sp>
-      <p:sp>
-        <p:nvSpPr>
-          <p:cNvPr id="18" name="Text 16"/>
-          <p:cNvSpPr/>
-          <p:nvPr/>
-        </p:nvSpPr>
-        <p:spPr>
-          <a:xfrm>
-            <a:off x="8330184" y="1901952"/>
-            <a:ext cx="3218688" cy="3547872"/>
-          </a:xfrm>
-          <a:prstGeom prst="rect">
-            <a:avLst/>
-          </a:prstGeom>
-          <a:noFill/>
-          <a:ln/>
-        </p:spPr>
-        <p:txBody>
-          <a:bodyPr wrap="square" lIns="0" tIns="0" rIns="0" bIns="0" rtlCol="0" anchor="t"/>
-          <a:lstStyle/>
-          <a:p>
-            <a:pPr indent="0" marL="0">
-              <a:spcAft>
-                <a:spcPts val="700"/>
-              </a:spcAft>
-              <a:buNone/>
-            </a:pPr>
-            <a:r>
-              <a:rPr lang="en-US" sz="2100" b="1" dirty="0">
-                <a:solidFill>
-                  <a:srgbClr val="02A878"/>
-                </a:solidFill>
-                <a:latin typeface="Malgun Gothic" pitchFamily="34" charset="0"/>
-                <a:ea typeface="Malgun Gothic" pitchFamily="34" charset="-122"/>
-                <a:cs typeface="Malgun Gothic" pitchFamily="34" charset="-120"/>
-              </a:rPr>
-              <a:t>기술 </a:t>
-            </a:r>
-            <a:pPr indent="0" marL="0">
-              <a:spcAft>
-                <a:spcPts val="700"/>
-              </a:spcAft>
-              <a:buNone/>
-            </a:pPr>
-            <a:r>
-              <a:rPr lang="en-US" sz="2100" dirty="0">
+              <a:t>롤모델 Palantir FDE — 고객사 상주</a:t>
+            </a:r>
+            <a:endParaRPr lang="en-US" sz="1300" dirty="0"/>
+          </a:p>
+        </p:txBody>
+      </p:sp>
+      <p:sp>
+        <p:nvSpPr>
+          <p:cNvPr id="46" name="Shape 42"/>
+          <p:cNvSpPr/>
+          <p:nvPr/>
+        </p:nvSpPr>
+        <p:spPr>
+          <a:xfrm>
+            <a:off x="8842248" y="1956816"/>
+            <a:ext cx="475488" cy="475488"/>
+          </a:xfrm>
+          <a:prstGeom prst="ellipse">
+            <a:avLst/>
+          </a:prstGeom>
+          <a:solidFill>
+            <a:srgbClr val="0E6BA8"/>
+          </a:solidFill>
+          <a:ln/>
+        </p:spPr>
+      </p:sp>
+      <p:pic>
+        <p:nvPicPr>
+          <p:cNvPr id="47" name="Image 2" descr="preencoded.png">    </p:cNvPr>
+          <p:cNvPicPr>
+            <a:picLocks noChangeAspect="1"/>
+          </p:cNvPicPr>
+          <p:nvPr/>
+        </p:nvPicPr>
+        <p:blipFill>
+          <a:blip r:embed="rId3"/>
+          <a:stretch>
+            <a:fillRect/>
+          </a:stretch>
+        </p:blipFill>
+        <p:spPr>
+          <a:xfrm>
+            <a:off x="8956365" y="2070933"/>
+            <a:ext cx="247254" cy="247254"/>
+          </a:xfrm>
+          <a:prstGeom prst="rect">
+            <a:avLst/>
+          </a:prstGeom>
+        </p:spPr>
+      </p:pic>
+      <p:sp>
+        <p:nvSpPr>
+          <p:cNvPr id="48" name="Text 43"/>
+          <p:cNvSpPr/>
+          <p:nvPr/>
+        </p:nvSpPr>
+        <p:spPr>
+          <a:xfrm>
+            <a:off x="8330184" y="2468880"/>
+            <a:ext cx="1499616" cy="292608"/>
+          </a:xfrm>
+          <a:prstGeom prst="rect">
+            <a:avLst/>
+          </a:prstGeom>
+          <a:noFill/>
+          <a:ln/>
+        </p:spPr>
+        <p:txBody>
+          <a:bodyPr wrap="square" lIns="0" tIns="0" rIns="0" bIns="0" rtlCol="0" anchor="ctr"/>
+          <a:lstStyle/>
+          <a:p>
+            <a:pPr algn="ctr" indent="0" marL="0">
+              <a:buNone/>
+            </a:pPr>
+            <a:r>
+              <a:rPr lang="en-US" sz="1600" b="1" dirty="0">
                 <a:solidFill>
                   <a:srgbClr val="17313B"/>
                 </a:solidFill>
@@ -1851,36 +2841,121 @@
                 <a:ea typeface="Malgun Gothic" pitchFamily="34" charset="-122"/>
                 <a:cs typeface="Malgun Gothic" pitchFamily="34" charset="-120"/>
               </a:rPr>
-              <a:t>워크로드 랩·시스템 모델</a:t>
-            </a:r>
-            <a:endParaRPr lang="en-US" sz="2100" dirty="0"/>
-          </a:p>
-          <a:p>
-            <a:pPr indent="0" marL="0">
-              <a:spcAft>
-                <a:spcPts val="700"/>
-              </a:spcAft>
-              <a:buNone/>
-            </a:pPr>
-            <a:r>
-              <a:rPr lang="en-US" sz="2100" b="1" dirty="0">
-                <a:solidFill>
-                  <a:srgbClr val="02A878"/>
-                </a:solidFill>
-                <a:latin typeface="Malgun Gothic" pitchFamily="34" charset="0"/>
-                <a:ea typeface="Malgun Gothic" pitchFamily="34" charset="-122"/>
-                <a:cs typeface="Malgun Gothic" pitchFamily="34" charset="-120"/>
-              </a:rPr>
-              <a:t>문화 </a:t>
-            </a:r>
-            <a:pPr indent="0" marL="0">
-              <a:spcAft>
-                <a:spcPts val="700"/>
-              </a:spcAft>
-              <a:buNone/>
-            </a:pPr>
-            <a:r>
-              <a:rPr lang="en-US" sz="2100" dirty="0">
+              <a:t>기술</a:t>
+            </a:r>
+            <a:endParaRPr lang="en-US" sz="1600" dirty="0"/>
+          </a:p>
+        </p:txBody>
+      </p:sp>
+      <p:sp>
+        <p:nvSpPr>
+          <p:cNvPr id="49" name="Text 44"/>
+          <p:cNvSpPr/>
+          <p:nvPr/>
+        </p:nvSpPr>
+        <p:spPr>
+          <a:xfrm>
+            <a:off x="8275320" y="2761488"/>
+            <a:ext cx="1609344" cy="237744"/>
+          </a:xfrm>
+          <a:prstGeom prst="rect">
+            <a:avLst/>
+          </a:prstGeom>
+          <a:noFill/>
+          <a:ln/>
+        </p:spPr>
+        <p:txBody>
+          <a:bodyPr wrap="square" lIns="0" tIns="0" rIns="0" bIns="0" rtlCol="0" anchor="ctr"/>
+          <a:lstStyle/>
+          <a:p>
+            <a:pPr algn="ctr" indent="0" marL="0">
+              <a:buNone/>
+            </a:pPr>
+            <a:r>
+              <a:rPr lang="en-US" sz="1100" dirty="0">
+                <a:solidFill>
+                  <a:srgbClr val="5A7184"/>
+                </a:solidFill>
+                <a:latin typeface="Malgun Gothic" pitchFamily="34" charset="0"/>
+                <a:ea typeface="Malgun Gothic" pitchFamily="34" charset="-122"/>
+                <a:cs typeface="Malgun Gothic" pitchFamily="34" charset="-120"/>
+              </a:rPr>
+              <a:t>워크로드 랩·모델</a:t>
+            </a:r>
+            <a:endParaRPr lang="en-US" sz="1100" dirty="0"/>
+          </a:p>
+        </p:txBody>
+      </p:sp>
+      <p:sp>
+        <p:nvSpPr>
+          <p:cNvPr id="50" name="Shape 45"/>
+          <p:cNvSpPr/>
+          <p:nvPr/>
+        </p:nvSpPr>
+        <p:spPr>
+          <a:xfrm>
+            <a:off x="10506456" y="1956816"/>
+            <a:ext cx="475488" cy="475488"/>
+          </a:xfrm>
+          <a:prstGeom prst="ellipse">
+            <a:avLst/>
+          </a:prstGeom>
+          <a:solidFill>
+            <a:srgbClr val="028090"/>
+          </a:solidFill>
+          <a:ln/>
+        </p:spPr>
+      </p:sp>
+      <p:pic>
+        <p:nvPicPr>
+          <p:cNvPr id="51" name="Image 3" descr="preencoded.png">    </p:cNvPr>
+          <p:cNvPicPr>
+            <a:picLocks noChangeAspect="1"/>
+          </p:cNvPicPr>
+          <p:nvPr/>
+        </p:nvPicPr>
+        <p:blipFill>
+          <a:blip r:embed="rId4"/>
+          <a:stretch>
+            <a:fillRect/>
+          </a:stretch>
+        </p:blipFill>
+        <p:spPr>
+          <a:xfrm>
+            <a:off x="10620573" y="2070933"/>
+            <a:ext cx="247254" cy="247254"/>
+          </a:xfrm>
+          <a:prstGeom prst="rect">
+            <a:avLst/>
+          </a:prstGeom>
+        </p:spPr>
+      </p:pic>
+      <p:sp>
+        <p:nvSpPr>
+          <p:cNvPr id="52" name="Text 46"/>
+          <p:cNvSpPr/>
+          <p:nvPr/>
+        </p:nvSpPr>
+        <p:spPr>
+          <a:xfrm>
+            <a:off x="9994392" y="2468880"/>
+            <a:ext cx="1499616" cy="292608"/>
+          </a:xfrm>
+          <a:prstGeom prst="rect">
+            <a:avLst/>
+          </a:prstGeom>
+          <a:noFill/>
+          <a:ln/>
+        </p:spPr>
+        <p:txBody>
+          <a:bodyPr wrap="square" lIns="0" tIns="0" rIns="0" bIns="0" rtlCol="0" anchor="ctr"/>
+          <a:lstStyle/>
+          <a:p>
+            <a:pPr algn="ctr" indent="0" marL="0">
+              <a:buNone/>
+            </a:pPr>
+            <a:r>
+              <a:rPr lang="en-US" sz="1600" b="1" dirty="0">
                 <a:solidFill>
                   <a:srgbClr val="17313B"/>
                 </a:solidFill>
@@ -1888,36 +2963,121 @@
                 <a:ea typeface="Malgun Gothic" pitchFamily="34" charset="-122"/>
                 <a:cs typeface="Malgun Gothic" pitchFamily="34" charset="-120"/>
               </a:rPr>
-              <a:t>가설 제안 KPI·스타 호명</a:t>
-            </a:r>
-            <a:endParaRPr lang="en-US" sz="2100" dirty="0"/>
-          </a:p>
-          <a:p>
-            <a:pPr indent="0" marL="0">
-              <a:spcAft>
-                <a:spcPts val="700"/>
-              </a:spcAft>
-              <a:buNone/>
-            </a:pPr>
-            <a:r>
-              <a:rPr lang="en-US" sz="2100" b="1" dirty="0">
-                <a:solidFill>
-                  <a:srgbClr val="02A878"/>
-                </a:solidFill>
-                <a:latin typeface="Malgun Gothic" pitchFamily="34" charset="0"/>
-                <a:ea typeface="Malgun Gothic" pitchFamily="34" charset="-122"/>
-                <a:cs typeface="Malgun Gothic" pitchFamily="34" charset="-120"/>
-              </a:rPr>
-              <a:t>조직 </a:t>
-            </a:r>
-            <a:pPr indent="0" marL="0">
-              <a:spcAft>
-                <a:spcPts val="700"/>
-              </a:spcAft>
-              <a:buNone/>
-            </a:pPr>
-            <a:r>
-              <a:rPr lang="en-US" sz="2100" dirty="0">
+              <a:t>문화</a:t>
+            </a:r>
+            <a:endParaRPr lang="en-US" sz="1600" dirty="0"/>
+          </a:p>
+        </p:txBody>
+      </p:sp>
+      <p:sp>
+        <p:nvSpPr>
+          <p:cNvPr id="53" name="Text 47"/>
+          <p:cNvSpPr/>
+          <p:nvPr/>
+        </p:nvSpPr>
+        <p:spPr>
+          <a:xfrm>
+            <a:off x="9939528" y="2761488"/>
+            <a:ext cx="1609344" cy="237744"/>
+          </a:xfrm>
+          <a:prstGeom prst="rect">
+            <a:avLst/>
+          </a:prstGeom>
+          <a:noFill/>
+          <a:ln/>
+        </p:spPr>
+        <p:txBody>
+          <a:bodyPr wrap="square" lIns="0" tIns="0" rIns="0" bIns="0" rtlCol="0" anchor="ctr"/>
+          <a:lstStyle/>
+          <a:p>
+            <a:pPr algn="ctr" indent="0" marL="0">
+              <a:buNone/>
+            </a:pPr>
+            <a:r>
+              <a:rPr lang="en-US" sz="1100" dirty="0">
+                <a:solidFill>
+                  <a:srgbClr val="5A7184"/>
+                </a:solidFill>
+                <a:latin typeface="Malgun Gothic" pitchFamily="34" charset="0"/>
+                <a:ea typeface="Malgun Gothic" pitchFamily="34" charset="-122"/>
+                <a:cs typeface="Malgun Gothic" pitchFamily="34" charset="-120"/>
+              </a:rPr>
+              <a:t>가설 제안·호명</a:t>
+            </a:r>
+            <a:endParaRPr lang="en-US" sz="1100" dirty="0"/>
+          </a:p>
+        </p:txBody>
+      </p:sp>
+      <p:sp>
+        <p:nvSpPr>
+          <p:cNvPr id="54" name="Shape 48"/>
+          <p:cNvSpPr/>
+          <p:nvPr/>
+        </p:nvSpPr>
+        <p:spPr>
+          <a:xfrm>
+            <a:off x="8842248" y="3200400"/>
+            <a:ext cx="475488" cy="475488"/>
+          </a:xfrm>
+          <a:prstGeom prst="ellipse">
+            <a:avLst/>
+          </a:prstGeom>
+          <a:solidFill>
+            <a:srgbClr val="02A878"/>
+          </a:solidFill>
+          <a:ln/>
+        </p:spPr>
+      </p:sp>
+      <p:pic>
+        <p:nvPicPr>
+          <p:cNvPr id="55" name="Image 4" descr="preencoded.png">    </p:cNvPr>
+          <p:cNvPicPr>
+            <a:picLocks noChangeAspect="1"/>
+          </p:cNvPicPr>
+          <p:nvPr/>
+        </p:nvPicPr>
+        <p:blipFill>
+          <a:blip r:embed="rId5"/>
+          <a:stretch>
+            <a:fillRect/>
+          </a:stretch>
+        </p:blipFill>
+        <p:spPr>
+          <a:xfrm>
+            <a:off x="8956365" y="3314517"/>
+            <a:ext cx="247254" cy="247254"/>
+          </a:xfrm>
+          <a:prstGeom prst="rect">
+            <a:avLst/>
+          </a:prstGeom>
+        </p:spPr>
+      </p:pic>
+      <p:sp>
+        <p:nvSpPr>
+          <p:cNvPr id="56" name="Text 49"/>
+          <p:cNvSpPr/>
+          <p:nvPr/>
+        </p:nvSpPr>
+        <p:spPr>
+          <a:xfrm>
+            <a:off x="8330184" y="3712464"/>
+            <a:ext cx="1499616" cy="292608"/>
+          </a:xfrm>
+          <a:prstGeom prst="rect">
+            <a:avLst/>
+          </a:prstGeom>
+          <a:noFill/>
+          <a:ln/>
+        </p:spPr>
+        <p:txBody>
+          <a:bodyPr wrap="square" lIns="0" tIns="0" rIns="0" bIns="0" rtlCol="0" anchor="ctr"/>
+          <a:lstStyle/>
+          <a:p>
+            <a:pPr algn="ctr" indent="0" marL="0">
+              <a:buNone/>
+            </a:pPr>
+            <a:r>
+              <a:rPr lang="en-US" sz="1600" b="1" dirty="0">
                 <a:solidFill>
                   <a:srgbClr val="17313B"/>
                 </a:solidFill>
@@ -1925,36 +3085,121 @@
                 <a:ea typeface="Malgun Gothic" pitchFamily="34" charset="-122"/>
                 <a:cs typeface="Malgun Gothic" pitchFamily="34" charset="-120"/>
               </a:rPr>
-              <a:t>Co-Design Pod·DE 재정의</a:t>
-            </a:r>
-            <a:endParaRPr lang="en-US" sz="2100" dirty="0"/>
-          </a:p>
-          <a:p>
-            <a:pPr indent="0" marL="0">
-              <a:spcAft>
-                <a:spcPts val="700"/>
-              </a:spcAft>
-              <a:buNone/>
-            </a:pPr>
-            <a:r>
-              <a:rPr lang="en-US" sz="2100" b="1" dirty="0">
-                <a:solidFill>
-                  <a:srgbClr val="02A878"/>
-                </a:solidFill>
-                <a:latin typeface="Malgun Gothic" pitchFamily="34" charset="0"/>
-                <a:ea typeface="Malgun Gothic" pitchFamily="34" charset="-122"/>
-                <a:cs typeface="Malgun Gothic" pitchFamily="34" charset="-120"/>
-              </a:rPr>
-              <a:t>방식 </a:t>
-            </a:r>
-            <a:pPr indent="0" marL="0">
-              <a:spcAft>
-                <a:spcPts val="700"/>
-              </a:spcAft>
-              <a:buNone/>
-            </a:pPr>
-            <a:r>
-              <a:rPr lang="en-US" sz="2100" dirty="0">
+              <a:t>조직</a:t>
+            </a:r>
+            <a:endParaRPr lang="en-US" sz="1600" dirty="0"/>
+          </a:p>
+        </p:txBody>
+      </p:sp>
+      <p:sp>
+        <p:nvSpPr>
+          <p:cNvPr id="57" name="Text 50"/>
+          <p:cNvSpPr/>
+          <p:nvPr/>
+        </p:nvSpPr>
+        <p:spPr>
+          <a:xfrm>
+            <a:off x="8275320" y="4005072"/>
+            <a:ext cx="1609344" cy="237744"/>
+          </a:xfrm>
+          <a:prstGeom prst="rect">
+            <a:avLst/>
+          </a:prstGeom>
+          <a:noFill/>
+          <a:ln/>
+        </p:spPr>
+        <p:txBody>
+          <a:bodyPr wrap="square" lIns="0" tIns="0" rIns="0" bIns="0" rtlCol="0" anchor="ctr"/>
+          <a:lstStyle/>
+          <a:p>
+            <a:pPr algn="ctr" indent="0" marL="0">
+              <a:buNone/>
+            </a:pPr>
+            <a:r>
+              <a:rPr lang="en-US" sz="1100" dirty="0">
+                <a:solidFill>
+                  <a:srgbClr val="5A7184"/>
+                </a:solidFill>
+                <a:latin typeface="Malgun Gothic" pitchFamily="34" charset="0"/>
+                <a:ea typeface="Malgun Gothic" pitchFamily="34" charset="-122"/>
+                <a:cs typeface="Malgun Gothic" pitchFamily="34" charset="-120"/>
+              </a:rPr>
+              <a:t>Pod·DE 트랙</a:t>
+            </a:r>
+            <a:endParaRPr lang="en-US" sz="1100" dirty="0"/>
+          </a:p>
+        </p:txBody>
+      </p:sp>
+      <p:sp>
+        <p:nvSpPr>
+          <p:cNvPr id="58" name="Shape 51"/>
+          <p:cNvSpPr/>
+          <p:nvPr/>
+        </p:nvSpPr>
+        <p:spPr>
+          <a:xfrm>
+            <a:off x="10506456" y="3200400"/>
+            <a:ext cx="475488" cy="475488"/>
+          </a:xfrm>
+          <a:prstGeom prst="ellipse">
+            <a:avLst/>
+          </a:prstGeom>
+          <a:solidFill>
+            <a:srgbClr val="4C7C94"/>
+          </a:solidFill>
+          <a:ln/>
+        </p:spPr>
+      </p:sp>
+      <p:pic>
+        <p:nvPicPr>
+          <p:cNvPr id="59" name="Image 5" descr="preencoded.png">    </p:cNvPr>
+          <p:cNvPicPr>
+            <a:picLocks noChangeAspect="1"/>
+          </p:cNvPicPr>
+          <p:nvPr/>
+        </p:nvPicPr>
+        <p:blipFill>
+          <a:blip r:embed="rId6"/>
+          <a:stretch>
+            <a:fillRect/>
+          </a:stretch>
+        </p:blipFill>
+        <p:spPr>
+          <a:xfrm>
+            <a:off x="10620573" y="3314517"/>
+            <a:ext cx="247254" cy="247254"/>
+          </a:xfrm>
+          <a:prstGeom prst="rect">
+            <a:avLst/>
+          </a:prstGeom>
+        </p:spPr>
+      </p:pic>
+      <p:sp>
+        <p:nvSpPr>
+          <p:cNvPr id="60" name="Text 52"/>
+          <p:cNvSpPr/>
+          <p:nvPr/>
+        </p:nvSpPr>
+        <p:spPr>
+          <a:xfrm>
+            <a:off x="9994392" y="3712464"/>
+            <a:ext cx="1499616" cy="292608"/>
+          </a:xfrm>
+          <a:prstGeom prst="rect">
+            <a:avLst/>
+          </a:prstGeom>
+          <a:noFill/>
+          <a:ln/>
+        </p:spPr>
+        <p:txBody>
+          <a:bodyPr wrap="square" lIns="0" tIns="0" rIns="0" bIns="0" rtlCol="0" anchor="ctr"/>
+          <a:lstStyle/>
+          <a:p>
+            <a:pPr algn="ctr" indent="0" marL="0">
+              <a:buNone/>
+            </a:pPr>
+            <a:r>
+              <a:rPr lang="en-US" sz="1600" b="1" dirty="0">
                 <a:solidFill>
                   <a:srgbClr val="17313B"/>
                 </a:solidFill>
@@ -1962,19 +3207,123 @@
                 <a:ea typeface="Malgun Gothic" pitchFamily="34" charset="-122"/>
                 <a:cs typeface="Malgun Gothic" pitchFamily="34" charset="-120"/>
               </a:rPr>
-              <a:t>교차 리뷰·PoA·AI 내재화</a:t>
-            </a:r>
-            <a:endParaRPr lang="en-US" sz="2100" dirty="0"/>
-          </a:p>
-          <a:p>
-            <a:pPr indent="0" marL="0">
-              <a:spcAft>
-                <a:spcPts val="700"/>
-              </a:spcAft>
-              <a:buNone/>
-            </a:pPr>
-            <a:r>
-              <a:rPr lang="en-US" sz="2100" b="1" dirty="0">
+              <a:t>방식</a:t>
+            </a:r>
+            <a:endParaRPr lang="en-US" sz="1600" dirty="0"/>
+          </a:p>
+        </p:txBody>
+      </p:sp>
+      <p:sp>
+        <p:nvSpPr>
+          <p:cNvPr id="61" name="Text 53"/>
+          <p:cNvSpPr/>
+          <p:nvPr/>
+        </p:nvSpPr>
+        <p:spPr>
+          <a:xfrm>
+            <a:off x="9939528" y="4005072"/>
+            <a:ext cx="1609344" cy="237744"/>
+          </a:xfrm>
+          <a:prstGeom prst="rect">
+            <a:avLst/>
+          </a:prstGeom>
+          <a:noFill/>
+          <a:ln/>
+        </p:spPr>
+        <p:txBody>
+          <a:bodyPr wrap="square" lIns="0" tIns="0" rIns="0" bIns="0" rtlCol="0" anchor="ctr"/>
+          <a:lstStyle/>
+          <a:p>
+            <a:pPr algn="ctr" indent="0" marL="0">
+              <a:buNone/>
+            </a:pPr>
+            <a:r>
+              <a:rPr lang="en-US" sz="1100" dirty="0">
+                <a:solidFill>
+                  <a:srgbClr val="5A7184"/>
+                </a:solidFill>
+                <a:latin typeface="Malgun Gothic" pitchFamily="34" charset="0"/>
+                <a:ea typeface="Malgun Gothic" pitchFamily="34" charset="-122"/>
+                <a:cs typeface="Malgun Gothic" pitchFamily="34" charset="-120"/>
+              </a:rPr>
+              <a:t>교차 리뷰·PoA</a:t>
+            </a:r>
+            <a:endParaRPr lang="en-US" sz="1100" dirty="0"/>
+          </a:p>
+        </p:txBody>
+      </p:sp>
+      <p:sp>
+        <p:nvSpPr>
+          <p:cNvPr id="62" name="Shape 54"/>
+          <p:cNvSpPr/>
+          <p:nvPr/>
+        </p:nvSpPr>
+        <p:spPr>
+          <a:xfrm>
+            <a:off x="8695944" y="4828032"/>
+            <a:ext cx="2468880" cy="0"/>
+          </a:xfrm>
+          <a:prstGeom prst="line">
+            <a:avLst/>
+          </a:prstGeom>
+          <a:noFill/>
+          <a:ln w="19050">
+            <a:solidFill>
+              <a:srgbClr val="02A878"/>
+            </a:solidFill>
+            <a:prstDash val="solid"/>
+          </a:ln>
+        </p:spPr>
+      </p:sp>
+      <p:sp>
+        <p:nvSpPr>
+          <p:cNvPr id="63" name="Shape 55"/>
+          <p:cNvSpPr/>
+          <p:nvPr/>
+        </p:nvSpPr>
+        <p:spPr>
+          <a:xfrm>
+            <a:off x="8631936" y="4764024"/>
+            <a:ext cx="128016" cy="128016"/>
+          </a:xfrm>
+          <a:prstGeom prst="ellipse">
+            <a:avLst/>
+          </a:prstGeom>
+          <a:solidFill>
+            <a:srgbClr val="02A878"/>
+          </a:solidFill>
+          <a:ln/>
+        </p:spPr>
+      </p:sp>
+      <p:sp>
+        <p:nvSpPr>
+          <p:cNvPr id="64" name="Text 56"/>
+          <p:cNvSpPr/>
+          <p:nvPr/>
+        </p:nvSpPr>
+        <p:spPr>
+          <a:xfrm>
+            <a:off x="8147304" y="4956048"/>
+            <a:ext cx="1097280" cy="475488"/>
+          </a:xfrm>
+          <a:prstGeom prst="rect">
+            <a:avLst/>
+          </a:prstGeom>
+          <a:noFill/>
+          <a:ln/>
+        </p:spPr>
+        <p:txBody>
+          <a:bodyPr wrap="square" lIns="0" tIns="0" rIns="0" bIns="0" rtlCol="0" anchor="ctr"/>
+          <a:lstStyle/>
+          <a:p>
+            <a:pPr algn="ctr" indent="0" marL="0">
+              <a:lnSpc>
+                <a:spcPct val="100000"/>
+              </a:lnSpc>
+              <a:buNone/>
+            </a:pPr>
+            <a:r>
+              <a:rPr lang="en-US" sz="1200" b="1" dirty="0">
                 <a:solidFill>
                   <a:srgbClr val="17313B"/>
                 </a:solidFill>
@@ -1982,21 +3331,205 @@
                 <a:ea typeface="Malgun Gothic" pitchFamily="34" charset="-122"/>
                 <a:cs typeface="Malgun Gothic" pitchFamily="34" charset="-120"/>
               </a:rPr>
-              <a:t>90일 증명 → 1년 제도화 → 3년 표준화</a:t>
-            </a:r>
-            <a:endParaRPr lang="en-US" sz="2100" dirty="0"/>
-          </a:p>
-        </p:txBody>
-      </p:sp>
-      <p:sp>
-        <p:nvSpPr>
-          <p:cNvPr id="19" name="Text 17"/>
-          <p:cNvSpPr/>
-          <p:nvPr/>
-        </p:nvSpPr>
-        <p:spPr>
-          <a:xfrm>
-            <a:off x="457200" y="5724144"/>
+              <a:t>90일</a:t>
+            </a:r>
+            <a:endParaRPr lang="en-US" sz="1200" dirty="0"/>
+          </a:p>
+          <a:p>
+            <a:pPr algn="ctr" indent="0" marL="0">
+              <a:lnSpc>
+                <a:spcPct val="100000"/>
+              </a:lnSpc>
+              <a:buNone/>
+            </a:pPr>
+            <a:r>
+              <a:rPr lang="en-US" sz="1200" b="1" dirty="0">
+                <a:solidFill>
+                  <a:srgbClr val="17313B"/>
+                </a:solidFill>
+                <a:latin typeface="Malgun Gothic" pitchFamily="34" charset="0"/>
+                <a:ea typeface="Malgun Gothic" pitchFamily="34" charset="-122"/>
+                <a:cs typeface="Malgun Gothic" pitchFamily="34" charset="-120"/>
+              </a:rPr>
+              <a:t>증명</a:t>
+            </a:r>
+            <a:endParaRPr lang="en-US" sz="1200" dirty="0"/>
+          </a:p>
+        </p:txBody>
+      </p:sp>
+      <p:sp>
+        <p:nvSpPr>
+          <p:cNvPr id="65" name="Shape 57"/>
+          <p:cNvSpPr/>
+          <p:nvPr/>
+        </p:nvSpPr>
+        <p:spPr>
+          <a:xfrm>
+            <a:off x="9866376" y="4764024"/>
+            <a:ext cx="128016" cy="128016"/>
+          </a:xfrm>
+          <a:prstGeom prst="ellipse">
+            <a:avLst/>
+          </a:prstGeom>
+          <a:solidFill>
+            <a:srgbClr val="02A878"/>
+          </a:solidFill>
+          <a:ln/>
+        </p:spPr>
+      </p:sp>
+      <p:sp>
+        <p:nvSpPr>
+          <p:cNvPr id="66" name="Text 58"/>
+          <p:cNvSpPr/>
+          <p:nvPr/>
+        </p:nvSpPr>
+        <p:spPr>
+          <a:xfrm>
+            <a:off x="9381744" y="4956048"/>
+            <a:ext cx="1097280" cy="475488"/>
+          </a:xfrm>
+          <a:prstGeom prst="rect">
+            <a:avLst/>
+          </a:prstGeom>
+          <a:noFill/>
+          <a:ln/>
+        </p:spPr>
+        <p:txBody>
+          <a:bodyPr wrap="square" lIns="0" tIns="0" rIns="0" bIns="0" rtlCol="0" anchor="ctr"/>
+          <a:lstStyle/>
+          <a:p>
+            <a:pPr algn="ctr" indent="0" marL="0">
+              <a:lnSpc>
+                <a:spcPct val="100000"/>
+              </a:lnSpc>
+              <a:buNone/>
+            </a:pPr>
+            <a:r>
+              <a:rPr lang="en-US" sz="1200" b="1" dirty="0">
+                <a:solidFill>
+                  <a:srgbClr val="17313B"/>
+                </a:solidFill>
+                <a:latin typeface="Malgun Gothic" pitchFamily="34" charset="0"/>
+                <a:ea typeface="Malgun Gothic" pitchFamily="34" charset="-122"/>
+                <a:cs typeface="Malgun Gothic" pitchFamily="34" charset="-120"/>
+              </a:rPr>
+              <a:t>1년</a:t>
+            </a:r>
+            <a:endParaRPr lang="en-US" sz="1200" dirty="0"/>
+          </a:p>
+          <a:p>
+            <a:pPr algn="ctr" indent="0" marL="0">
+              <a:lnSpc>
+                <a:spcPct val="100000"/>
+              </a:lnSpc>
+              <a:buNone/>
+            </a:pPr>
+            <a:r>
+              <a:rPr lang="en-US" sz="1200" b="1" dirty="0">
+                <a:solidFill>
+                  <a:srgbClr val="17313B"/>
+                </a:solidFill>
+                <a:latin typeface="Malgun Gothic" pitchFamily="34" charset="0"/>
+                <a:ea typeface="Malgun Gothic" pitchFamily="34" charset="-122"/>
+                <a:cs typeface="Malgun Gothic" pitchFamily="34" charset="-120"/>
+              </a:rPr>
+              <a:t>제도화</a:t>
+            </a:r>
+            <a:endParaRPr lang="en-US" sz="1200" dirty="0"/>
+          </a:p>
+        </p:txBody>
+      </p:sp>
+      <p:sp>
+        <p:nvSpPr>
+          <p:cNvPr id="67" name="Shape 59"/>
+          <p:cNvSpPr/>
+          <p:nvPr/>
+        </p:nvSpPr>
+        <p:spPr>
+          <a:xfrm>
+            <a:off x="11100816" y="4764024"/>
+            <a:ext cx="128016" cy="128016"/>
+          </a:xfrm>
+          <a:prstGeom prst="ellipse">
+            <a:avLst/>
+          </a:prstGeom>
+          <a:solidFill>
+            <a:srgbClr val="02A878"/>
+          </a:solidFill>
+          <a:ln/>
+        </p:spPr>
+      </p:sp>
+      <p:sp>
+        <p:nvSpPr>
+          <p:cNvPr id="68" name="Text 60"/>
+          <p:cNvSpPr/>
+          <p:nvPr/>
+        </p:nvSpPr>
+        <p:spPr>
+          <a:xfrm>
+            <a:off x="10616184" y="4956048"/>
+            <a:ext cx="1097280" cy="475488"/>
+          </a:xfrm>
+          <a:prstGeom prst="rect">
+            <a:avLst/>
+          </a:prstGeom>
+          <a:noFill/>
+          <a:ln/>
+        </p:spPr>
+        <p:txBody>
+          <a:bodyPr wrap="square" lIns="0" tIns="0" rIns="0" bIns="0" rtlCol="0" anchor="ctr"/>
+          <a:lstStyle/>
+          <a:p>
+            <a:pPr algn="ctr" indent="0" marL="0">
+              <a:lnSpc>
+                <a:spcPct val="100000"/>
+              </a:lnSpc>
+              <a:buNone/>
+            </a:pPr>
+            <a:r>
+              <a:rPr lang="en-US" sz="1200" b="1" dirty="0">
+                <a:solidFill>
+                  <a:srgbClr val="17313B"/>
+                </a:solidFill>
+                <a:latin typeface="Malgun Gothic" pitchFamily="34" charset="0"/>
+                <a:ea typeface="Malgun Gothic" pitchFamily="34" charset="-122"/>
+                <a:cs typeface="Malgun Gothic" pitchFamily="34" charset="-120"/>
+              </a:rPr>
+              <a:t>3년</a:t>
+            </a:r>
+            <a:endParaRPr lang="en-US" sz="1200" dirty="0"/>
+          </a:p>
+          <a:p>
+            <a:pPr algn="ctr" indent="0" marL="0">
+              <a:lnSpc>
+                <a:spcPct val="100000"/>
+              </a:lnSpc>
+              <a:buNone/>
+            </a:pPr>
+            <a:r>
+              <a:rPr lang="en-US" sz="1200" b="1" dirty="0">
+                <a:solidFill>
+                  <a:srgbClr val="17313B"/>
+                </a:solidFill>
+                <a:latin typeface="Malgun Gothic" pitchFamily="34" charset="0"/>
+                <a:ea typeface="Malgun Gothic" pitchFamily="34" charset="-122"/>
+                <a:cs typeface="Malgun Gothic" pitchFamily="34" charset="-120"/>
+              </a:rPr>
+              <a:t>표준화</a:t>
+            </a:r>
+            <a:endParaRPr lang="en-US" sz="1200" dirty="0"/>
+          </a:p>
+        </p:txBody>
+      </p:sp>
+      <p:sp>
+        <p:nvSpPr>
+          <p:cNvPr id="69" name="Text 61"/>
+          <p:cNvSpPr/>
+          <p:nvPr/>
+        </p:nvSpPr>
+        <p:spPr>
+          <a:xfrm>
+            <a:off x="457200" y="5687568"/>
             <a:ext cx="2167128" cy="384048"/>
           </a:xfrm>
           <a:prstGeom prst="rect">
@@ -2029,13 +3562,13 @@
       </p:sp>
       <p:sp>
         <p:nvSpPr>
-          <p:cNvPr id="20" name="Text 18"/>
-          <p:cNvSpPr/>
-          <p:nvPr/>
-        </p:nvSpPr>
-        <p:spPr>
-          <a:xfrm>
-            <a:off x="457200" y="6126480"/>
+          <p:cNvPr id="70" name="Text 62"/>
+          <p:cNvSpPr/>
+          <p:nvPr/>
+        </p:nvSpPr>
+        <p:spPr>
+          <a:xfrm>
+            <a:off x="457200" y="6089904"/>
             <a:ext cx="2167128" cy="237744"/>
           </a:xfrm>
           <a:prstGeom prst="rect">
@@ -2068,13 +3601,13 @@
       </p:sp>
       <p:sp>
         <p:nvSpPr>
-          <p:cNvPr id="21" name="Text 19"/>
-          <p:cNvSpPr/>
-          <p:nvPr/>
-        </p:nvSpPr>
-        <p:spPr>
-          <a:xfrm>
-            <a:off x="2715768" y="5724144"/>
+          <p:cNvPr id="71" name="Text 63"/>
+          <p:cNvSpPr/>
+          <p:nvPr/>
+        </p:nvSpPr>
+        <p:spPr>
+          <a:xfrm>
+            <a:off x="2715768" y="5687568"/>
             <a:ext cx="2167128" cy="384048"/>
           </a:xfrm>
           <a:prstGeom prst="rect">
@@ -2107,13 +3640,13 @@
       </p:sp>
       <p:sp>
         <p:nvSpPr>
-          <p:cNvPr id="22" name="Text 20"/>
-          <p:cNvSpPr/>
-          <p:nvPr/>
-        </p:nvSpPr>
-        <p:spPr>
-          <a:xfrm>
-            <a:off x="2715768" y="6126480"/>
+          <p:cNvPr id="72" name="Text 64"/>
+          <p:cNvSpPr/>
+          <p:nvPr/>
+        </p:nvSpPr>
+        <p:spPr>
+          <a:xfrm>
+            <a:off x="2715768" y="6089904"/>
             <a:ext cx="2167128" cy="237744"/>
           </a:xfrm>
           <a:prstGeom prst="rect">
@@ -2146,13 +3679,13 @@
       </p:sp>
       <p:sp>
         <p:nvSpPr>
-          <p:cNvPr id="23" name="Text 21"/>
-          <p:cNvSpPr/>
-          <p:nvPr/>
-        </p:nvSpPr>
-        <p:spPr>
-          <a:xfrm>
-            <a:off x="4974336" y="5724144"/>
+          <p:cNvPr id="73" name="Text 65"/>
+          <p:cNvSpPr/>
+          <p:nvPr/>
+        </p:nvSpPr>
+        <p:spPr>
+          <a:xfrm>
+            <a:off x="4974336" y="5687568"/>
             <a:ext cx="2167128" cy="384048"/>
           </a:xfrm>
           <a:prstGeom prst="rect">
@@ -2185,13 +3718,13 @@
       </p:sp>
       <p:sp>
         <p:nvSpPr>
-          <p:cNvPr id="24" name="Text 22"/>
-          <p:cNvSpPr/>
-          <p:nvPr/>
-        </p:nvSpPr>
-        <p:spPr>
-          <a:xfrm>
-            <a:off x="4974336" y="6126480"/>
+          <p:cNvPr id="74" name="Text 66"/>
+          <p:cNvSpPr/>
+          <p:nvPr/>
+        </p:nvSpPr>
+        <p:spPr>
+          <a:xfrm>
+            <a:off x="4974336" y="6089904"/>
             <a:ext cx="2167128" cy="237744"/>
           </a:xfrm>
           <a:prstGeom prst="rect">
@@ -2224,13 +3757,13 @@
       </p:sp>
       <p:sp>
         <p:nvSpPr>
-          <p:cNvPr id="25" name="Text 23"/>
-          <p:cNvSpPr/>
-          <p:nvPr/>
-        </p:nvSpPr>
-        <p:spPr>
-          <a:xfrm>
-            <a:off x="7232904" y="5724144"/>
+          <p:cNvPr id="75" name="Text 67"/>
+          <p:cNvSpPr/>
+          <p:nvPr/>
+        </p:nvSpPr>
+        <p:spPr>
+          <a:xfrm>
+            <a:off x="7232904" y="5687568"/>
             <a:ext cx="2167128" cy="384048"/>
           </a:xfrm>
           <a:prstGeom prst="rect">
@@ -2263,13 +3796,13 @@
       </p:sp>
       <p:sp>
         <p:nvSpPr>
-          <p:cNvPr id="26" name="Text 24"/>
-          <p:cNvSpPr/>
-          <p:nvPr/>
-        </p:nvSpPr>
-        <p:spPr>
-          <a:xfrm>
-            <a:off x="7232904" y="6126480"/>
+          <p:cNvPr id="76" name="Text 68"/>
+          <p:cNvSpPr/>
+          <p:nvPr/>
+        </p:nvSpPr>
+        <p:spPr>
+          <a:xfrm>
+            <a:off x="7232904" y="6089904"/>
             <a:ext cx="2167128" cy="237744"/>
           </a:xfrm>
           <a:prstGeom prst="rect">
@@ -2302,13 +3835,13 @@
       </p:sp>
       <p:sp>
         <p:nvSpPr>
-          <p:cNvPr id="27" name="Text 25"/>
-          <p:cNvSpPr/>
-          <p:nvPr/>
-        </p:nvSpPr>
-        <p:spPr>
-          <a:xfrm>
-            <a:off x="9491472" y="5724144"/>
+          <p:cNvPr id="77" name="Text 69"/>
+          <p:cNvSpPr/>
+          <p:nvPr/>
+        </p:nvSpPr>
+        <p:spPr>
+          <a:xfrm>
+            <a:off x="9491472" y="5687568"/>
             <a:ext cx="2167128" cy="384048"/>
           </a:xfrm>
           <a:prstGeom prst="rect">
@@ -2341,13 +3874,13 @@
       </p:sp>
       <p:sp>
         <p:nvSpPr>
-          <p:cNvPr id="28" name="Text 26"/>
-          <p:cNvSpPr/>
-          <p:nvPr/>
-        </p:nvSpPr>
-        <p:spPr>
-          <a:xfrm>
-            <a:off x="9491472" y="6126480"/>
+          <p:cNvPr id="78" name="Text 70"/>
+          <p:cNvSpPr/>
+          <p:nvPr/>
+        </p:nvSpPr>
+        <p:spPr>
+          <a:xfrm>
+            <a:off x="9491472" y="6089904"/>
             <a:ext cx="2167128" cy="237744"/>
           </a:xfrm>
           <a:prstGeom prst="rect">
@@ -2571,12 +4104,12 @@
         </p:nvSpPr>
         <p:spPr>
           <a:xfrm>
-            <a:off x="457200" y="896112"/>
-            <a:ext cx="11274552" cy="603504"/>
+            <a:off x="457200" y="859536"/>
+            <a:ext cx="11274552" cy="530352"/>
           </a:xfrm>
           <a:prstGeom prst="roundRect">
             <a:avLst>
-              <a:gd name="adj" fmla="val 13636"/>
+              <a:gd name="adj" fmla="val 15517"/>
             </a:avLst>
           </a:prstGeom>
           <a:solidFill>
@@ -2592,7 +4125,7 @@
               <a:buNone/>
             </a:pPr>
             <a:r>
-              <a:rPr lang="en-US" sz="2100" i="1" dirty="0">
+              <a:rPr lang="en-US" sz="1800" i="1" dirty="0">
                 <a:solidFill>
                   <a:srgbClr val="17313B"/>
                 </a:solidFill>
@@ -2602,7 +4135,7 @@
               </a:rPr>
               <a:t>“고객의 아키텍처 안으로 들어가 수요를 함께 설계하는 기업이 이긴다” — 신문섭 (2026-06)</a:t>
             </a:r>
-            <a:endParaRPr lang="en-US" sz="2100" dirty="0"/>
+            <a:endParaRPr lang="en-US" sz="1800" dirty="0"/>
           </a:p>
         </p:txBody>
       </p:sp>
@@ -2614,12 +4147,12 @@
         </p:nvSpPr>
         <p:spPr>
           <a:xfrm>
-            <a:off x="457200" y="1682496"/>
-            <a:ext cx="5477256" cy="2542032"/>
+            <a:off x="457200" y="1554480"/>
+            <a:ext cx="5477256" cy="2011680"/>
           </a:xfrm>
           <a:prstGeom prst="roundRect">
             <a:avLst>
-              <a:gd name="adj" fmla="val 3237"/>
+              <a:gd name="adj" fmla="val 4091"/>
             </a:avLst>
           </a:prstGeom>
           <a:solidFill>
@@ -2636,7 +4169,7 @@
         </p:nvSpPr>
         <p:spPr>
           <a:xfrm>
-            <a:off x="640080" y="1847088"/>
+            <a:off x="640080" y="1700784"/>
             <a:ext cx="329184" cy="329184"/>
           </a:xfrm>
           <a:prstGeom prst="ellipse">
@@ -2677,8 +4210,8 @@
         </p:nvSpPr>
         <p:spPr>
           <a:xfrm>
-            <a:off x="1060704" y="1819656"/>
-            <a:ext cx="4114800" cy="384048"/>
+            <a:off x="1060704" y="1673352"/>
+            <a:ext cx="4206240" cy="365760"/>
           </a:xfrm>
           <a:prstGeom prst="rect">
             <a:avLst/>
@@ -2694,7 +4227,7 @@
               <a:buNone/>
             </a:pPr>
             <a:r>
-              <a:rPr lang="en-US" sz="2100" b="1" dirty="0">
+              <a:rPr lang="en-US" sz="1900" b="1" dirty="0">
                 <a:solidFill>
                   <a:srgbClr val="0E6BA8"/>
                 </a:solidFill>
@@ -2702,9 +4235,9 @@
                 <a:ea typeface="Malgun Gothic" pitchFamily="34" charset="-122"/>
                 <a:cs typeface="Malgun Gothic" pitchFamily="34" charset="-120"/>
               </a:rPr>
-              <a:t>왜 지금인가</a:t>
-            </a:r>
-            <a:endParaRPr lang="en-US" sz="2100" dirty="0"/>
+              <a:t>왜 지금인가 — 계약의 진화</a:t>
+            </a:r>
+            <a:endParaRPr lang="en-US" sz="1900" dirty="0"/>
           </a:p>
         </p:txBody>
       </p:sp>
@@ -2716,104 +4249,96 @@
         </p:nvSpPr>
         <p:spPr>
           <a:xfrm>
-            <a:off x="658368" y="2304288"/>
-            <a:ext cx="5074920" cy="1755648"/>
-          </a:xfrm>
-          <a:prstGeom prst="rect">
-            <a:avLst/>
-          </a:prstGeom>
-          <a:noFill/>
-          <a:ln/>
-        </p:spPr>
-        <p:txBody>
-          <a:bodyPr wrap="square" lIns="0" tIns="0" rIns="0" bIns="0" rtlCol="0" anchor="t"/>
-          <a:lstStyle/>
-          <a:p>
-            <a:pPr marL="342900" indent="-342900">
-              <a:spcAft>
-                <a:spcPts val="1000"/>
-              </a:spcAft>
-              <a:buSzPct val="100000"/>
-              <a:buChar char="•"/>
-            </a:pPr>
-            <a:r>
-              <a:rPr lang="en-US" sz="2100" dirty="0">
-                <a:solidFill>
-                  <a:srgbClr val="17313B"/>
-                </a:solidFill>
-                <a:latin typeface="Malgun Gothic" pitchFamily="34" charset="0"/>
-                <a:ea typeface="Malgun Gothic" pitchFamily="34" charset="-122"/>
-                <a:cs typeface="Malgun Gothic" pitchFamily="34" charset="-120"/>
-              </a:rPr>
-              <a:t>고객이 사는 것: 납품 → 공동 기술 드라이브 (LTA→SCA)</a:t>
-            </a:r>
-            <a:endParaRPr lang="en-US" sz="2100" dirty="0"/>
-          </a:p>
-          <a:p>
-            <a:pPr marL="342900" indent="-342900">
-              <a:spcAft>
-                <a:spcPts val="1000"/>
-              </a:spcAft>
-              <a:buSzPct val="100000"/>
-              <a:buChar char="•"/>
-            </a:pPr>
-            <a:r>
-              <a:rPr lang="en-US" sz="2100" dirty="0">
-                <a:solidFill>
-                  <a:srgbClr val="17313B"/>
-                </a:solidFill>
-                <a:latin typeface="Malgun Gothic" pitchFamily="34" charset="0"/>
-                <a:ea typeface="Malgun Gothic" pitchFamily="34" charset="-122"/>
-                <a:cs typeface="Malgun Gothic" pitchFamily="34" charset="-120"/>
-              </a:rPr>
-              <a:t>Micron–Anthropic 등 SCA 16건 · $100B</a:t>
-            </a:r>
-            <a:endParaRPr lang="en-US" sz="2100" dirty="0"/>
-          </a:p>
-          <a:p>
-            <a:pPr marL="342900" indent="-342900">
-              <a:spcAft>
-                <a:spcPts val="1000"/>
-              </a:spcAft>
-              <a:buSzPct val="100000"/>
-              <a:buChar char="•"/>
-            </a:pPr>
-            <a:r>
-              <a:rPr lang="en-US" sz="2100" dirty="0">
-                <a:solidFill>
-                  <a:srgbClr val="17313B"/>
-                </a:solidFill>
-                <a:latin typeface="Malgun Gothic" pitchFamily="34" charset="0"/>
-                <a:ea typeface="Malgun Gothic" pitchFamily="34" charset="-122"/>
-                <a:cs typeface="Malgun Gothic" pitchFamily="34" charset="-120"/>
-              </a:rPr>
-              <a:t>공동설계 역량 없으면 SCA에서 배제</a:t>
-            </a:r>
-            <a:endParaRPr lang="en-US" sz="2100" dirty="0"/>
-          </a:p>
-        </p:txBody>
-      </p:sp>
-      <p:sp>
-        <p:nvSpPr>
-          <p:cNvPr id="11" name="Shape 9"/>
-          <p:cNvSpPr/>
-          <p:nvPr/>
-        </p:nvSpPr>
-        <p:spPr>
-          <a:xfrm>
-            <a:off x="6254496" y="1682496"/>
-            <a:ext cx="5477256" cy="2542032"/>
+            <a:off x="713232" y="2157984"/>
+            <a:ext cx="1463040" cy="786384"/>
           </a:xfrm>
           <a:prstGeom prst="roundRect">
             <a:avLst>
-              <a:gd name="adj" fmla="val 3237"/>
+              <a:gd name="adj" fmla="val 8140"/>
             </a:avLst>
           </a:prstGeom>
           <a:solidFill>
-            <a:srgbClr val="E6F4F4"/>
-          </a:solidFill>
-          <a:ln/>
-        </p:spPr>
+            <a:srgbClr val="C7D5DE"/>
+          </a:solidFill>
+          <a:ln/>
+        </p:spPr>
+        <p:txBody>
+          <a:bodyPr wrap="square" lIns="0" tIns="0" rIns="0" bIns="0" rtlCol="0" anchor="ctr"/>
+          <a:lstStyle/>
+          <a:p>
+            <a:pPr algn="ctr" indent="0" marL="0">
+              <a:buNone/>
+            </a:pPr>
+            <a:r>
+              <a:rPr lang="en-US" sz="1700" b="1" dirty="0">
+                <a:solidFill>
+                  <a:srgbClr val="5A7184"/>
+                </a:solidFill>
+                <a:latin typeface="Malgun Gothic" pitchFamily="34" charset="0"/>
+                <a:ea typeface="Malgun Gothic" pitchFamily="34" charset="-122"/>
+                <a:cs typeface="Malgun Gothic" pitchFamily="34" charset="-120"/>
+              </a:rPr>
+              <a:t>Spot</a:t>
+            </a:r>
+            <a:endParaRPr lang="en-US" sz="1700" dirty="0"/>
+          </a:p>
+          <a:p>
+            <a:pPr algn="ctr" indent="0" marL="0">
+              <a:buNone/>
+            </a:pPr>
+            <a:r>
+              <a:rPr lang="en-US" sz="1050" dirty="0">
+                <a:solidFill>
+                  <a:srgbClr val="5A7184"/>
+                </a:solidFill>
+                <a:latin typeface="Malgun Gothic" pitchFamily="34" charset="0"/>
+                <a:ea typeface="Malgun Gothic" pitchFamily="34" charset="-122"/>
+                <a:cs typeface="Malgun Gothic" pitchFamily="34" charset="-120"/>
+              </a:rPr>
+              <a:t>현물 거래</a:t>
+            </a:r>
+            <a:endParaRPr lang="en-US" sz="1700" dirty="0"/>
+          </a:p>
+        </p:txBody>
+      </p:sp>
+      <p:sp>
+        <p:nvSpPr>
+          <p:cNvPr id="11" name="Text 9"/>
+          <p:cNvSpPr/>
+          <p:nvPr/>
+        </p:nvSpPr>
+        <p:spPr>
+          <a:xfrm>
+            <a:off x="2157984" y="2157984"/>
+            <a:ext cx="274320" cy="786384"/>
+          </a:xfrm>
+          <a:prstGeom prst="rect">
+            <a:avLst/>
+          </a:prstGeom>
+          <a:noFill/>
+          <a:ln/>
+        </p:spPr>
+        <p:txBody>
+          <a:bodyPr wrap="square" lIns="0" tIns="0" rIns="0" bIns="0" rtlCol="0" anchor="ctr"/>
+          <a:lstStyle/>
+          <a:p>
+            <a:pPr algn="ctr" indent="0" marL="0">
+              <a:buNone/>
+            </a:pPr>
+            <a:r>
+              <a:rPr lang="en-US" sz="1400" dirty="0">
+                <a:solidFill>
+                  <a:srgbClr val="0E6BA8"/>
+                </a:solidFill>
+                <a:latin typeface="Malgun Gothic" pitchFamily="34" charset="0"/>
+                <a:ea typeface="Malgun Gothic" pitchFamily="34" charset="-122"/>
+                <a:cs typeface="Malgun Gothic" pitchFamily="34" charset="-120"/>
+              </a:rPr>
+              <a:t>▶</a:t>
+            </a:r>
+            <a:endParaRPr lang="en-US" sz="1400" dirty="0"/>
+          </a:p>
+        </p:txBody>
       </p:sp>
       <p:sp>
         <p:nvSpPr>
@@ -2823,391 +4348,183 @@
         </p:nvSpPr>
         <p:spPr>
           <a:xfrm>
-            <a:off x="6437376" y="1847088"/>
-            <a:ext cx="329184" cy="329184"/>
-          </a:xfrm>
-          <a:prstGeom prst="ellipse">
-            <a:avLst/>
-          </a:prstGeom>
-          <a:solidFill>
-            <a:srgbClr val="028090"/>
-          </a:solidFill>
-          <a:ln/>
-        </p:spPr>
-        <p:txBody>
-          <a:bodyPr wrap="square" lIns="0" tIns="0" rIns="0" bIns="0" rtlCol="0" anchor="ctr"/>
-          <a:lstStyle/>
-          <a:p>
-            <a:pPr algn="ctr" indent="0" marL="0">
-              <a:buNone/>
-            </a:pPr>
-            <a:r>
-              <a:rPr lang="en-US" sz="1500" b="1" dirty="0">
-                <a:solidFill>
-                  <a:srgbClr val="FFFFFF"/>
-                </a:solidFill>
-                <a:latin typeface="Malgun Gothic" pitchFamily="34" charset="0"/>
-                <a:ea typeface="Malgun Gothic" pitchFamily="34" charset="-122"/>
-                <a:cs typeface="Malgun Gothic" pitchFamily="34" charset="-120"/>
-              </a:rPr>
-              <a:t>2</a:t>
-            </a:r>
-            <a:endParaRPr lang="en-US" sz="1500" dirty="0"/>
-          </a:p>
-        </p:txBody>
-      </p:sp>
-      <p:sp>
-        <p:nvSpPr>
-          <p:cNvPr id="13" name="Text 11"/>
-          <p:cNvSpPr/>
-          <p:nvPr/>
-        </p:nvSpPr>
-        <p:spPr>
-          <a:xfrm>
-            <a:off x="6858000" y="1819656"/>
-            <a:ext cx="4754880" cy="384048"/>
-          </a:xfrm>
-          <a:prstGeom prst="rect">
-            <a:avLst/>
-          </a:prstGeom>
-          <a:noFill/>
-          <a:ln/>
-        </p:spPr>
-        <p:txBody>
-          <a:bodyPr wrap="square" lIns="0" tIns="0" rIns="0" bIns="0" rtlCol="0" anchor="ctr"/>
-          <a:lstStyle/>
-          <a:p>
-            <a:pPr indent="0" marL="0">
-              <a:buNone/>
-            </a:pPr>
-            <a:r>
-              <a:rPr lang="en-US" sz="2100" b="1" dirty="0">
-                <a:solidFill>
-                  <a:srgbClr val="028090"/>
-                </a:solidFill>
-                <a:latin typeface="Malgun Gothic" pitchFamily="34" charset="0"/>
-                <a:ea typeface="Malgun Gothic" pitchFamily="34" charset="-122"/>
-                <a:cs typeface="Malgun Gothic" pitchFamily="34" charset="-120"/>
-              </a:rPr>
-              <a:t>무엇이 되나 (As-Is → To-Be)</a:t>
-            </a:r>
-            <a:endParaRPr lang="en-US" sz="2100" dirty="0"/>
-          </a:p>
-        </p:txBody>
-      </p:sp>
-      <p:sp>
-        <p:nvSpPr>
-          <p:cNvPr id="14" name="Text 12"/>
-          <p:cNvSpPr/>
-          <p:nvPr/>
-        </p:nvSpPr>
-        <p:spPr>
-          <a:xfrm>
-            <a:off x="6455664" y="2304288"/>
-            <a:ext cx="5074920" cy="1755648"/>
-          </a:xfrm>
-          <a:prstGeom prst="rect">
-            <a:avLst/>
-          </a:prstGeom>
-          <a:noFill/>
-          <a:ln/>
-        </p:spPr>
-        <p:txBody>
-          <a:bodyPr wrap="square" lIns="0" tIns="0" rIns="0" bIns="0" rtlCol="0" anchor="t"/>
-          <a:lstStyle/>
-          <a:p>
-            <a:pPr marL="342900" indent="-342900">
-              <a:spcAft>
-                <a:spcPts val="1000"/>
-              </a:spcAft>
-              <a:buSzPct val="100000"/>
-              <a:buChar char="•"/>
-            </a:pPr>
-            <a:r>
-              <a:rPr lang="en-US" sz="2100" dirty="0">
-                <a:solidFill>
-                  <a:srgbClr val="17313B"/>
-                </a:solidFill>
-                <a:latin typeface="Malgun Gothic" pitchFamily="34" charset="0"/>
-                <a:ea typeface="Malgun Gothic" pitchFamily="34" charset="-122"/>
-                <a:cs typeface="Malgun Gothic" pitchFamily="34" charset="-120"/>
-              </a:rPr>
-              <a:t>스펙 수령 → 요구사항 공동 정의</a:t>
-            </a:r>
-            <a:endParaRPr lang="en-US" sz="2100" dirty="0"/>
-          </a:p>
-          <a:p>
-            <a:pPr marL="342900" indent="-342900">
-              <a:spcAft>
-                <a:spcPts val="1000"/>
-              </a:spcAft>
-              <a:buSzPct val="100000"/>
-              <a:buChar char="•"/>
-            </a:pPr>
-            <a:r>
-              <a:rPr lang="en-US" sz="2100" dirty="0">
-                <a:solidFill>
-                  <a:srgbClr val="17313B"/>
-                </a:solidFill>
-                <a:latin typeface="Malgun Gothic" pitchFamily="34" charset="0"/>
-                <a:ea typeface="Malgun Gothic" pitchFamily="34" charset="-122"/>
-                <a:cs typeface="Malgun Gothic" pitchFamily="34" charset="-120"/>
-              </a:rPr>
-              <a:t>RFQ 응답 → 선제 제안·기술 드라이브</a:t>
-            </a:r>
-            <a:endParaRPr lang="en-US" sz="2100" dirty="0"/>
-          </a:p>
-          <a:p>
-            <a:pPr marL="342900" indent="-342900">
-              <a:spcAft>
-                <a:spcPts val="1000"/>
-              </a:spcAft>
-              <a:buSzPct val="100000"/>
-              <a:buChar char="•"/>
-            </a:pPr>
-            <a:r>
-              <a:rPr lang="en-US" sz="2100" dirty="0">
-                <a:solidFill>
-                  <a:srgbClr val="17313B"/>
-                </a:solidFill>
-                <a:latin typeface="Malgun Gothic" pitchFamily="34" charset="0"/>
-                <a:ea typeface="Malgun Gothic" pitchFamily="34" charset="-122"/>
-                <a:cs typeface="Malgun Gothic" pitchFamily="34" charset="-120"/>
-              </a:rPr>
-              <a:t>부품 스펙 → 시스템 모델 (서버→랙→데이터센터)</a:t>
-            </a:r>
-            <a:endParaRPr lang="en-US" sz="2100" dirty="0"/>
-          </a:p>
-        </p:txBody>
-      </p:sp>
-      <p:sp>
-        <p:nvSpPr>
-          <p:cNvPr id="15" name="Text 13"/>
-          <p:cNvSpPr/>
-          <p:nvPr/>
-        </p:nvSpPr>
-        <p:spPr>
-          <a:xfrm>
-            <a:off x="640080" y="4379976"/>
-            <a:ext cx="329184" cy="329184"/>
-          </a:xfrm>
-          <a:prstGeom prst="ellipse">
-            <a:avLst/>
-          </a:prstGeom>
-          <a:solidFill>
-            <a:srgbClr val="02A878"/>
-          </a:solidFill>
-          <a:ln/>
-        </p:spPr>
-        <p:txBody>
-          <a:bodyPr wrap="square" lIns="0" tIns="0" rIns="0" bIns="0" rtlCol="0" anchor="ctr"/>
-          <a:lstStyle/>
-          <a:p>
-            <a:pPr algn="ctr" indent="0" marL="0">
-              <a:buNone/>
-            </a:pPr>
-            <a:r>
-              <a:rPr lang="en-US" sz="1500" b="1" dirty="0">
-                <a:solidFill>
-                  <a:srgbClr val="FFFFFF"/>
-                </a:solidFill>
-                <a:latin typeface="Malgun Gothic" pitchFamily="34" charset="0"/>
-                <a:ea typeface="Malgun Gothic" pitchFamily="34" charset="-122"/>
-                <a:cs typeface="Malgun Gothic" pitchFamily="34" charset="-120"/>
-              </a:rPr>
-              <a:t>3</a:t>
-            </a:r>
-            <a:endParaRPr lang="en-US" sz="1500" dirty="0"/>
-          </a:p>
-        </p:txBody>
-      </p:sp>
-      <p:sp>
-        <p:nvSpPr>
-          <p:cNvPr id="16" name="Text 14"/>
-          <p:cNvSpPr/>
-          <p:nvPr/>
-        </p:nvSpPr>
-        <p:spPr>
-          <a:xfrm>
-            <a:off x="1060704" y="4352544"/>
-            <a:ext cx="7315200" cy="384048"/>
-          </a:xfrm>
-          <a:prstGeom prst="rect">
-            <a:avLst/>
-          </a:prstGeom>
-          <a:noFill/>
-          <a:ln/>
-        </p:spPr>
-        <p:txBody>
-          <a:bodyPr wrap="square" lIns="0" tIns="0" rIns="0" bIns="0" rtlCol="0" anchor="ctr"/>
-          <a:lstStyle/>
-          <a:p>
-            <a:pPr indent="0" marL="0">
-              <a:buNone/>
-            </a:pPr>
-            <a:r>
-              <a:rPr lang="en-US" sz="2100" b="1" dirty="0">
-                <a:solidFill>
-                  <a:srgbClr val="02A878"/>
-                </a:solidFill>
-                <a:latin typeface="Malgun Gothic" pitchFamily="34" charset="0"/>
-                <a:ea typeface="Malgun Gothic" pitchFamily="34" charset="-122"/>
-                <a:cs typeface="Malgun Gothic" pitchFamily="34" charset="-120"/>
-              </a:rPr>
-              <a:t>어떻게 하나 — 4대 축 · 3-Phase</a:t>
-            </a:r>
-            <a:endParaRPr lang="en-US" sz="2100" dirty="0"/>
-          </a:p>
-        </p:txBody>
-      </p:sp>
-      <p:sp>
-        <p:nvSpPr>
-          <p:cNvPr id="17" name="Shape 15"/>
-          <p:cNvSpPr/>
-          <p:nvPr/>
-        </p:nvSpPr>
-        <p:spPr>
-          <a:xfrm>
-            <a:off x="457200" y="4828032"/>
-            <a:ext cx="2724912" cy="786384"/>
+            <a:off x="2414016" y="2157984"/>
+            <a:ext cx="1463040" cy="786384"/>
           </a:xfrm>
           <a:prstGeom prst="roundRect">
             <a:avLst>
-              <a:gd name="adj" fmla="val 10465"/>
+              <a:gd name="adj" fmla="val 8140"/>
             </a:avLst>
           </a:prstGeom>
           <a:solidFill>
-            <a:srgbClr val="E8F6F0"/>
-          </a:solidFill>
-          <a:ln/>
-        </p:spPr>
-      </p:sp>
-      <p:sp>
-        <p:nvSpPr>
-          <p:cNvPr id="18" name="Text 16"/>
-          <p:cNvSpPr/>
-          <p:nvPr/>
-        </p:nvSpPr>
-        <p:spPr>
-          <a:xfrm>
-            <a:off x="603504" y="4892040"/>
-            <a:ext cx="2432304" cy="329184"/>
-          </a:xfrm>
-          <a:prstGeom prst="rect">
-            <a:avLst/>
-          </a:prstGeom>
-          <a:noFill/>
-          <a:ln/>
-        </p:spPr>
-        <p:txBody>
-          <a:bodyPr wrap="square" lIns="0" tIns="0" rIns="0" bIns="0" rtlCol="0" anchor="ctr"/>
-          <a:lstStyle/>
-          <a:p>
-            <a:pPr indent="0" marL="0">
-              <a:buNone/>
-            </a:pPr>
-            <a:r>
-              <a:rPr lang="en-US" sz="2100" b="1" dirty="0">
-                <a:solidFill>
-                  <a:srgbClr val="17313B"/>
-                </a:solidFill>
-                <a:latin typeface="Malgun Gothic" pitchFamily="34" charset="0"/>
-                <a:ea typeface="Malgun Gothic" pitchFamily="34" charset="-122"/>
-                <a:cs typeface="Malgun Gothic" pitchFamily="34" charset="-120"/>
-              </a:rPr>
-              <a:t>기술</a:t>
-            </a:r>
-            <a:endParaRPr lang="en-US" sz="2100" dirty="0"/>
-          </a:p>
-        </p:txBody>
-      </p:sp>
-      <p:sp>
-        <p:nvSpPr>
-          <p:cNvPr id="19" name="Text 17"/>
-          <p:cNvSpPr/>
-          <p:nvPr/>
-        </p:nvSpPr>
-        <p:spPr>
-          <a:xfrm>
-            <a:off x="603504" y="5239512"/>
-            <a:ext cx="2432304" cy="274320"/>
-          </a:xfrm>
-          <a:prstGeom prst="rect">
-            <a:avLst/>
-          </a:prstGeom>
-          <a:noFill/>
-          <a:ln/>
-        </p:spPr>
-        <p:txBody>
-          <a:bodyPr wrap="square" lIns="0" tIns="0" rIns="0" bIns="0" rtlCol="0" anchor="ctr"/>
-          <a:lstStyle/>
-          <a:p>
-            <a:pPr indent="0" marL="0">
-              <a:buNone/>
-            </a:pPr>
-            <a:r>
-              <a:rPr lang="en-US" sz="1250" dirty="0">
-                <a:solidFill>
-                  <a:srgbClr val="5A7184"/>
-                </a:solidFill>
-                <a:latin typeface="Malgun Gothic" pitchFamily="34" charset="0"/>
-                <a:ea typeface="Malgun Gothic" pitchFamily="34" charset="-122"/>
-                <a:cs typeface="Malgun Gothic" pitchFamily="34" charset="-120"/>
-              </a:rPr>
-              <a:t>워크로드 랩 · 시스템 모델</a:t>
-            </a:r>
-            <a:endParaRPr lang="en-US" sz="1250" dirty="0"/>
-          </a:p>
-        </p:txBody>
-      </p:sp>
-      <p:sp>
-        <p:nvSpPr>
-          <p:cNvPr id="20" name="Shape 18"/>
-          <p:cNvSpPr/>
-          <p:nvPr/>
-        </p:nvSpPr>
-        <p:spPr>
-          <a:xfrm>
-            <a:off x="3319272" y="4828032"/>
-            <a:ext cx="2724912" cy="786384"/>
+            <a:srgbClr val="7FB3D3"/>
+          </a:solidFill>
+          <a:ln/>
+        </p:spPr>
+        <p:txBody>
+          <a:bodyPr wrap="square" lIns="0" tIns="0" rIns="0" bIns="0" rtlCol="0" anchor="ctr"/>
+          <a:lstStyle/>
+          <a:p>
+            <a:pPr algn="ctr" indent="0" marL="0">
+              <a:buNone/>
+            </a:pPr>
+            <a:r>
+              <a:rPr lang="en-US" sz="1700" b="1" dirty="0">
+                <a:solidFill>
+                  <a:srgbClr val="FFFFFF"/>
+                </a:solidFill>
+                <a:latin typeface="Malgun Gothic" pitchFamily="34" charset="0"/>
+                <a:ea typeface="Malgun Gothic" pitchFamily="34" charset="-122"/>
+                <a:cs typeface="Malgun Gothic" pitchFamily="34" charset="-120"/>
+              </a:rPr>
+              <a:t>LTA</a:t>
+            </a:r>
+            <a:endParaRPr lang="en-US" sz="1700" dirty="0"/>
+          </a:p>
+          <a:p>
+            <a:pPr algn="ctr" indent="0" marL="0">
+              <a:buNone/>
+            </a:pPr>
+            <a:r>
+              <a:rPr lang="en-US" sz="1050" dirty="0">
+                <a:solidFill>
+                  <a:srgbClr val="FFFFFF"/>
+                </a:solidFill>
+                <a:latin typeface="Malgun Gothic" pitchFamily="34" charset="0"/>
+                <a:ea typeface="Malgun Gothic" pitchFamily="34" charset="-122"/>
+                <a:cs typeface="Malgun Gothic" pitchFamily="34" charset="-120"/>
+              </a:rPr>
+              <a:t>물량·가격 락인</a:t>
+            </a:r>
+            <a:endParaRPr lang="en-US" sz="1700" dirty="0"/>
+          </a:p>
+        </p:txBody>
+      </p:sp>
+      <p:sp>
+        <p:nvSpPr>
+          <p:cNvPr id="13" name="Text 11"/>
+          <p:cNvSpPr/>
+          <p:nvPr/>
+        </p:nvSpPr>
+        <p:spPr>
+          <a:xfrm>
+            <a:off x="3858768" y="2157984"/>
+            <a:ext cx="274320" cy="786384"/>
+          </a:xfrm>
+          <a:prstGeom prst="rect">
+            <a:avLst/>
+          </a:prstGeom>
+          <a:noFill/>
+          <a:ln/>
+        </p:spPr>
+        <p:txBody>
+          <a:bodyPr wrap="square" lIns="0" tIns="0" rIns="0" bIns="0" rtlCol="0" anchor="ctr"/>
+          <a:lstStyle/>
+          <a:p>
+            <a:pPr algn="ctr" indent="0" marL="0">
+              <a:buNone/>
+            </a:pPr>
+            <a:r>
+              <a:rPr lang="en-US" sz="1400" dirty="0">
+                <a:solidFill>
+                  <a:srgbClr val="0E6BA8"/>
+                </a:solidFill>
+                <a:latin typeface="Malgun Gothic" pitchFamily="34" charset="0"/>
+                <a:ea typeface="Malgun Gothic" pitchFamily="34" charset="-122"/>
+                <a:cs typeface="Malgun Gothic" pitchFamily="34" charset="-120"/>
+              </a:rPr>
+              <a:t>▶</a:t>
+            </a:r>
+            <a:endParaRPr lang="en-US" sz="1400" dirty="0"/>
+          </a:p>
+        </p:txBody>
+      </p:sp>
+      <p:sp>
+        <p:nvSpPr>
+          <p:cNvPr id="14" name="Text 12"/>
+          <p:cNvSpPr/>
+          <p:nvPr/>
+        </p:nvSpPr>
+        <p:spPr>
+          <a:xfrm>
+            <a:off x="4114800" y="2157984"/>
+            <a:ext cx="1463040" cy="786384"/>
           </a:xfrm>
           <a:prstGeom prst="roundRect">
             <a:avLst>
-              <a:gd name="adj" fmla="val 10465"/>
+              <a:gd name="adj" fmla="val 8140"/>
             </a:avLst>
           </a:prstGeom>
           <a:solidFill>
-            <a:srgbClr val="E8F6F0"/>
-          </a:solidFill>
-          <a:ln/>
-        </p:spPr>
-      </p:sp>
-      <p:sp>
-        <p:nvSpPr>
-          <p:cNvPr id="21" name="Text 19"/>
-          <p:cNvSpPr/>
-          <p:nvPr/>
-        </p:nvSpPr>
-        <p:spPr>
-          <a:xfrm>
-            <a:off x="3465576" y="4892040"/>
-            <a:ext cx="2432304" cy="329184"/>
-          </a:xfrm>
-          <a:prstGeom prst="rect">
-            <a:avLst/>
-          </a:prstGeom>
-          <a:noFill/>
-          <a:ln/>
-        </p:spPr>
-        <p:txBody>
-          <a:bodyPr wrap="square" lIns="0" tIns="0" rIns="0" bIns="0" rtlCol="0" anchor="ctr"/>
-          <a:lstStyle/>
-          <a:p>
-            <a:pPr indent="0" marL="0">
-              <a:buNone/>
-            </a:pPr>
-            <a:r>
-              <a:rPr lang="en-US" sz="2100" b="1" dirty="0">
+            <a:srgbClr val="028090"/>
+          </a:solidFill>
+          <a:ln/>
+        </p:spPr>
+        <p:txBody>
+          <a:bodyPr wrap="square" lIns="0" tIns="0" rIns="0" bIns="0" rtlCol="0" anchor="ctr"/>
+          <a:lstStyle/>
+          <a:p>
+            <a:pPr algn="ctr" indent="0" marL="0">
+              <a:buNone/>
+            </a:pPr>
+            <a:r>
+              <a:rPr lang="en-US" sz="1700" b="1" dirty="0">
+                <a:solidFill>
+                  <a:srgbClr val="FFFFFF"/>
+                </a:solidFill>
+                <a:latin typeface="Malgun Gothic" pitchFamily="34" charset="0"/>
+                <a:ea typeface="Malgun Gothic" pitchFamily="34" charset="-122"/>
+                <a:cs typeface="Malgun Gothic" pitchFamily="34" charset="-120"/>
+              </a:rPr>
+              <a:t>SCA</a:t>
+            </a:r>
+            <a:endParaRPr lang="en-US" sz="1700" dirty="0"/>
+          </a:p>
+          <a:p>
+            <a:pPr algn="ctr" indent="0" marL="0">
+              <a:buNone/>
+            </a:pPr>
+            <a:r>
+              <a:rPr lang="en-US" sz="1050" dirty="0">
+                <a:solidFill>
+                  <a:srgbClr val="FFFFFF"/>
+                </a:solidFill>
+                <a:latin typeface="Malgun Gothic" pitchFamily="34" charset="0"/>
+                <a:ea typeface="Malgun Gothic" pitchFamily="34" charset="-122"/>
+                <a:cs typeface="Malgun Gothic" pitchFamily="34" charset="-120"/>
+              </a:rPr>
+              <a:t>공동설계·자본 연계</a:t>
+            </a:r>
+            <a:endParaRPr lang="en-US" sz="1700" dirty="0"/>
+          </a:p>
+        </p:txBody>
+      </p:sp>
+      <p:sp>
+        <p:nvSpPr>
+          <p:cNvPr id="15" name="Text 13"/>
+          <p:cNvSpPr/>
+          <p:nvPr/>
+        </p:nvSpPr>
+        <p:spPr>
+          <a:xfrm>
+            <a:off x="713232" y="3108960"/>
+            <a:ext cx="4965192" cy="310896"/>
+          </a:xfrm>
+          <a:prstGeom prst="rect">
+            <a:avLst/>
+          </a:prstGeom>
+          <a:noFill/>
+          <a:ln/>
+        </p:spPr>
+        <p:txBody>
+          <a:bodyPr wrap="square" lIns="0" tIns="0" rIns="0" bIns="0" rtlCol="0" anchor="ctr"/>
+          <a:lstStyle/>
+          <a:p>
+            <a:pPr algn="ctr" indent="0" marL="0">
+              <a:buNone/>
+            </a:pPr>
+            <a:r>
+              <a:rPr lang="en-US" sz="1300" dirty="0">
                 <a:solidFill>
                   <a:srgbClr val="17313B"/>
                 </a:solidFill>
@@ -3215,83 +4532,85 @@
                 <a:ea typeface="Malgun Gothic" pitchFamily="34" charset="-122"/>
                 <a:cs typeface="Malgun Gothic" pitchFamily="34" charset="-120"/>
               </a:rPr>
-              <a:t>문화</a:t>
-            </a:r>
-            <a:endParaRPr lang="en-US" sz="2100" dirty="0"/>
-          </a:p>
-        </p:txBody>
-      </p:sp>
-      <p:sp>
-        <p:nvSpPr>
-          <p:cNvPr id="22" name="Text 20"/>
-          <p:cNvSpPr/>
-          <p:nvPr/>
-        </p:nvSpPr>
-        <p:spPr>
-          <a:xfrm>
-            <a:off x="3465576" y="5239512"/>
-            <a:ext cx="2432304" cy="274320"/>
-          </a:xfrm>
-          <a:prstGeom prst="rect">
-            <a:avLst/>
-          </a:prstGeom>
-          <a:noFill/>
-          <a:ln/>
-        </p:spPr>
-        <p:txBody>
-          <a:bodyPr wrap="square" lIns="0" tIns="0" rIns="0" bIns="0" rtlCol="0" anchor="ctr"/>
-          <a:lstStyle/>
-          <a:p>
-            <a:pPr indent="0" marL="0">
-              <a:buNone/>
-            </a:pPr>
-            <a:r>
-              <a:rPr lang="en-US" sz="1250" dirty="0">
-                <a:solidFill>
-                  <a:srgbClr val="5A7184"/>
-                </a:solidFill>
-                <a:latin typeface="Malgun Gothic" pitchFamily="34" charset="0"/>
-                <a:ea typeface="Malgun Gothic" pitchFamily="34" charset="-122"/>
-                <a:cs typeface="Malgun Gothic" pitchFamily="34" charset="-120"/>
-              </a:rPr>
-              <a:t>가설 제안 KPI · 스타 호명</a:t>
-            </a:r>
-            <a:endParaRPr lang="en-US" sz="1250" dirty="0"/>
-          </a:p>
-        </p:txBody>
-      </p:sp>
-      <p:sp>
-        <p:nvSpPr>
-          <p:cNvPr id="23" name="Shape 21"/>
-          <p:cNvSpPr/>
-          <p:nvPr/>
-        </p:nvSpPr>
-        <p:spPr>
-          <a:xfrm>
-            <a:off x="6181344" y="4828032"/>
-            <a:ext cx="2724912" cy="786384"/>
+              <a:t>고객이 사는 것: 정확한 납품 → 공동 기술 드라이브</a:t>
+            </a:r>
+            <a:endParaRPr lang="en-US" sz="1300" dirty="0"/>
+          </a:p>
+        </p:txBody>
+      </p:sp>
+      <p:sp>
+        <p:nvSpPr>
+          <p:cNvPr id="16" name="Shape 14"/>
+          <p:cNvSpPr/>
+          <p:nvPr/>
+        </p:nvSpPr>
+        <p:spPr>
+          <a:xfrm>
+            <a:off x="6254496" y="1554480"/>
+            <a:ext cx="5477256" cy="2011680"/>
           </a:xfrm>
           <a:prstGeom prst="roundRect">
             <a:avLst>
-              <a:gd name="adj" fmla="val 10465"/>
+              <a:gd name="adj" fmla="val 4091"/>
             </a:avLst>
           </a:prstGeom>
           <a:solidFill>
-            <a:srgbClr val="E8F6F0"/>
-          </a:solidFill>
-          <a:ln/>
-        </p:spPr>
-      </p:sp>
-      <p:sp>
-        <p:nvSpPr>
-          <p:cNvPr id="24" name="Text 22"/>
-          <p:cNvSpPr/>
-          <p:nvPr/>
-        </p:nvSpPr>
-        <p:spPr>
-          <a:xfrm>
-            <a:off x="6327648" y="4892040"/>
-            <a:ext cx="2432304" cy="329184"/>
+            <a:srgbClr val="E6F4F4"/>
+          </a:solidFill>
+          <a:ln/>
+        </p:spPr>
+      </p:sp>
+      <p:sp>
+        <p:nvSpPr>
+          <p:cNvPr id="17" name="Text 15"/>
+          <p:cNvSpPr/>
+          <p:nvPr/>
+        </p:nvSpPr>
+        <p:spPr>
+          <a:xfrm>
+            <a:off x="6437376" y="1700784"/>
+            <a:ext cx="329184" cy="329184"/>
+          </a:xfrm>
+          <a:prstGeom prst="ellipse">
+            <a:avLst/>
+          </a:prstGeom>
+          <a:solidFill>
+            <a:srgbClr val="028090"/>
+          </a:solidFill>
+          <a:ln/>
+        </p:spPr>
+        <p:txBody>
+          <a:bodyPr wrap="square" lIns="0" tIns="0" rIns="0" bIns="0" rtlCol="0" anchor="ctr"/>
+          <a:lstStyle/>
+          <a:p>
+            <a:pPr algn="ctr" indent="0" marL="0">
+              <a:buNone/>
+            </a:pPr>
+            <a:r>
+              <a:rPr lang="en-US" sz="1500" b="1" dirty="0">
+                <a:solidFill>
+                  <a:srgbClr val="FFFFFF"/>
+                </a:solidFill>
+                <a:latin typeface="Malgun Gothic" pitchFamily="34" charset="0"/>
+                <a:ea typeface="Malgun Gothic" pitchFamily="34" charset="-122"/>
+                <a:cs typeface="Malgun Gothic" pitchFamily="34" charset="-120"/>
+              </a:rPr>
+              <a:t>2</a:t>
+            </a:r>
+            <a:endParaRPr lang="en-US" sz="1500" dirty="0"/>
+          </a:p>
+        </p:txBody>
+      </p:sp>
+      <p:sp>
+        <p:nvSpPr>
+          <p:cNvPr id="18" name="Text 16"/>
+          <p:cNvSpPr/>
+          <p:nvPr/>
+        </p:nvSpPr>
+        <p:spPr>
+          <a:xfrm>
+            <a:off x="6858000" y="1673352"/>
+            <a:ext cx="4754880" cy="365760"/>
           </a:xfrm>
           <a:prstGeom prst="rect">
             <a:avLst/>
@@ -3307,169 +4626,30 @@
               <a:buNone/>
             </a:pPr>
             <a:r>
-              <a:rPr lang="en-US" sz="2100" b="1" dirty="0">
-                <a:solidFill>
-                  <a:srgbClr val="17313B"/>
-                </a:solidFill>
-                <a:latin typeface="Malgun Gothic" pitchFamily="34" charset="0"/>
-                <a:ea typeface="Malgun Gothic" pitchFamily="34" charset="-122"/>
-                <a:cs typeface="Malgun Gothic" pitchFamily="34" charset="-120"/>
-              </a:rPr>
-              <a:t>조직</a:t>
-            </a:r>
-            <a:endParaRPr lang="en-US" sz="2100" dirty="0"/>
-          </a:p>
-        </p:txBody>
-      </p:sp>
-      <p:sp>
-        <p:nvSpPr>
-          <p:cNvPr id="25" name="Text 23"/>
-          <p:cNvSpPr/>
-          <p:nvPr/>
-        </p:nvSpPr>
-        <p:spPr>
-          <a:xfrm>
-            <a:off x="6327648" y="5239512"/>
-            <a:ext cx="2432304" cy="274320"/>
-          </a:xfrm>
-          <a:prstGeom prst="rect">
-            <a:avLst/>
-          </a:prstGeom>
-          <a:noFill/>
-          <a:ln/>
-        </p:spPr>
-        <p:txBody>
-          <a:bodyPr wrap="square" lIns="0" tIns="0" rIns="0" bIns="0" rtlCol="0" anchor="ctr"/>
-          <a:lstStyle/>
-          <a:p>
-            <a:pPr indent="0" marL="0">
-              <a:buNone/>
-            </a:pPr>
-            <a:r>
-              <a:rPr lang="en-US" sz="1250" dirty="0">
-                <a:solidFill>
-                  <a:srgbClr val="5A7184"/>
-                </a:solidFill>
-                <a:latin typeface="Malgun Gothic" pitchFamily="34" charset="0"/>
-                <a:ea typeface="Malgun Gothic" pitchFamily="34" charset="-122"/>
-                <a:cs typeface="Malgun Gothic" pitchFamily="34" charset="-120"/>
-              </a:rPr>
-              <a:t>Co-Design Pod · DE 트랙</a:t>
-            </a:r>
-            <a:endParaRPr lang="en-US" sz="1250" dirty="0"/>
-          </a:p>
-        </p:txBody>
-      </p:sp>
-      <p:sp>
-        <p:nvSpPr>
-          <p:cNvPr id="26" name="Shape 24"/>
-          <p:cNvSpPr/>
-          <p:nvPr/>
-        </p:nvSpPr>
-        <p:spPr>
-          <a:xfrm>
-            <a:off x="9043416" y="4828032"/>
-            <a:ext cx="2724912" cy="786384"/>
-          </a:xfrm>
-          <a:prstGeom prst="roundRect">
-            <a:avLst>
-              <a:gd name="adj" fmla="val 10465"/>
-            </a:avLst>
-          </a:prstGeom>
-          <a:solidFill>
-            <a:srgbClr val="E8F6F0"/>
-          </a:solidFill>
-          <a:ln/>
-        </p:spPr>
-      </p:sp>
-      <p:sp>
-        <p:nvSpPr>
-          <p:cNvPr id="27" name="Text 25"/>
-          <p:cNvSpPr/>
-          <p:nvPr/>
-        </p:nvSpPr>
-        <p:spPr>
-          <a:xfrm>
-            <a:off x="9189720" y="4892040"/>
-            <a:ext cx="2432304" cy="329184"/>
-          </a:xfrm>
-          <a:prstGeom prst="rect">
-            <a:avLst/>
-          </a:prstGeom>
-          <a:noFill/>
-          <a:ln/>
-        </p:spPr>
-        <p:txBody>
-          <a:bodyPr wrap="square" lIns="0" tIns="0" rIns="0" bIns="0" rtlCol="0" anchor="ctr"/>
-          <a:lstStyle/>
-          <a:p>
-            <a:pPr indent="0" marL="0">
-              <a:buNone/>
-            </a:pPr>
-            <a:r>
-              <a:rPr lang="en-US" sz="2100" b="1" dirty="0">
-                <a:solidFill>
-                  <a:srgbClr val="17313B"/>
-                </a:solidFill>
-                <a:latin typeface="Malgun Gothic" pitchFamily="34" charset="0"/>
-                <a:ea typeface="Malgun Gothic" pitchFamily="34" charset="-122"/>
-                <a:cs typeface="Malgun Gothic" pitchFamily="34" charset="-120"/>
-              </a:rPr>
-              <a:t>일하는 방식</a:t>
-            </a:r>
-            <a:endParaRPr lang="en-US" sz="2100" dirty="0"/>
-          </a:p>
-        </p:txBody>
-      </p:sp>
-      <p:sp>
-        <p:nvSpPr>
-          <p:cNvPr id="28" name="Text 26"/>
-          <p:cNvSpPr/>
-          <p:nvPr/>
-        </p:nvSpPr>
-        <p:spPr>
-          <a:xfrm>
-            <a:off x="9189720" y="5239512"/>
-            <a:ext cx="2432304" cy="274320"/>
-          </a:xfrm>
-          <a:prstGeom prst="rect">
-            <a:avLst/>
-          </a:prstGeom>
-          <a:noFill/>
-          <a:ln/>
-        </p:spPr>
-        <p:txBody>
-          <a:bodyPr wrap="square" lIns="0" tIns="0" rIns="0" bIns="0" rtlCol="0" anchor="ctr"/>
-          <a:lstStyle/>
-          <a:p>
-            <a:pPr indent="0" marL="0">
-              <a:buNone/>
-            </a:pPr>
-            <a:r>
-              <a:rPr lang="en-US" sz="1250" dirty="0">
-                <a:solidFill>
-                  <a:srgbClr val="5A7184"/>
-                </a:solidFill>
-                <a:latin typeface="Malgun Gothic" pitchFamily="34" charset="0"/>
-                <a:ea typeface="Malgun Gothic" pitchFamily="34" charset="-122"/>
-                <a:cs typeface="Malgun Gothic" pitchFamily="34" charset="-120"/>
-              </a:rPr>
-              <a:t>교차 리뷰 · PoA · AI 내재화</a:t>
-            </a:r>
-            <a:endParaRPr lang="en-US" sz="1250" dirty="0"/>
-          </a:p>
-        </p:txBody>
-      </p:sp>
-      <p:sp>
-        <p:nvSpPr>
-          <p:cNvPr id="29" name="Shape 27"/>
-          <p:cNvSpPr/>
-          <p:nvPr/>
-        </p:nvSpPr>
-        <p:spPr>
-          <a:xfrm>
-            <a:off x="457200" y="5742432"/>
-            <a:ext cx="3511296" cy="658368"/>
+              <a:rPr lang="en-US" sz="1900" b="1" dirty="0">
+                <a:solidFill>
+                  <a:srgbClr val="028090"/>
+                </a:solidFill>
+                <a:latin typeface="Malgun Gothic" pitchFamily="34" charset="0"/>
+                <a:ea typeface="Malgun Gothic" pitchFamily="34" charset="-122"/>
+                <a:cs typeface="Malgun Gothic" pitchFamily="34" charset="-120"/>
+              </a:rPr>
+              <a:t>무엇이 되나 — As-Is → To-Be</a:t>
+            </a:r>
+            <a:endParaRPr lang="en-US" sz="1900" dirty="0"/>
+          </a:p>
+        </p:txBody>
+      </p:sp>
+      <p:sp>
+        <p:nvSpPr>
+          <p:cNvPr id="19" name="Text 17"/>
+          <p:cNvSpPr/>
+          <p:nvPr/>
+        </p:nvSpPr>
+        <p:spPr>
+          <a:xfrm>
+            <a:off x="6473952" y="2139696"/>
+            <a:ext cx="1554480" cy="365760"/>
           </a:xfrm>
           <a:prstGeom prst="roundRect">
             <a:avLst>
@@ -3477,90 +4657,62 @@
             </a:avLst>
           </a:prstGeom>
           <a:solidFill>
-            <a:srgbClr val="EAF3FA"/>
-          </a:solidFill>
-          <a:ln/>
-        </p:spPr>
-      </p:sp>
-      <p:sp>
-        <p:nvSpPr>
-          <p:cNvPr id="30" name="Text 28"/>
-          <p:cNvSpPr/>
-          <p:nvPr/>
-        </p:nvSpPr>
-        <p:spPr>
-          <a:xfrm>
-            <a:off x="603504" y="5742432"/>
-            <a:ext cx="3255264" cy="658368"/>
-          </a:xfrm>
-          <a:prstGeom prst="rect">
-            <a:avLst/>
-          </a:prstGeom>
-          <a:noFill/>
-          <a:ln/>
-        </p:spPr>
-        <p:txBody>
-          <a:bodyPr wrap="square" lIns="0" tIns="0" rIns="0" bIns="0" rtlCol="0" anchor="ctr"/>
-          <a:lstStyle/>
-          <a:p>
-            <a:pPr indent="0" marL="0">
-              <a:buNone/>
-            </a:pPr>
-            <a:r>
-              <a:rPr lang="en-US" sz="1550" b="1" dirty="0">
-                <a:solidFill>
-                  <a:srgbClr val="0E6BA8"/>
-                </a:solidFill>
-                <a:latin typeface="Malgun Gothic" pitchFamily="34" charset="0"/>
-                <a:ea typeface="Malgun Gothic" pitchFamily="34" charset="-122"/>
-                <a:cs typeface="Malgun Gothic" pitchFamily="34" charset="-120"/>
-              </a:rPr>
-              <a:t>90일 · 증명  </a:t>
-            </a:r>
-            <a:pPr indent="0" marL="0">
-              <a:buNone/>
-            </a:pPr>
-            <a:r>
-              <a:rPr lang="en-US" sz="1550" dirty="0">
-                <a:solidFill>
-                  <a:srgbClr val="17313B"/>
-                </a:solidFill>
-                <a:latin typeface="Malgun Gothic" pitchFamily="34" charset="0"/>
-                <a:ea typeface="Malgun Gothic" pitchFamily="34" charset="-122"/>
-                <a:cs typeface="Malgun Gothic" pitchFamily="34" charset="-120"/>
-              </a:rPr>
-              <a:t>Pod 1호 · 시스템 모델 v0.1</a:t>
-            </a:r>
-            <a:endParaRPr lang="en-US" sz="1550" dirty="0"/>
-          </a:p>
-        </p:txBody>
-      </p:sp>
-      <p:sp>
-        <p:nvSpPr>
-          <p:cNvPr id="31" name="Text 29"/>
-          <p:cNvSpPr/>
-          <p:nvPr/>
-        </p:nvSpPr>
-        <p:spPr>
-          <a:xfrm>
-            <a:off x="3968496" y="5742432"/>
-            <a:ext cx="374904" cy="658368"/>
-          </a:xfrm>
-          <a:prstGeom prst="rect">
-            <a:avLst/>
-          </a:prstGeom>
-          <a:noFill/>
-          <a:ln/>
-        </p:spPr>
-        <p:txBody>
-          <a:bodyPr wrap="square" lIns="0" tIns="0" rIns="0" bIns="0" rtlCol="0" anchor="ctr"/>
-          <a:lstStyle/>
-          <a:p>
-            <a:pPr algn="ctr" indent="0" marL="0">
-              <a:buNone/>
-            </a:pPr>
-            <a:r>
-              <a:rPr lang="en-US" sz="1600" dirty="0">
+            <a:srgbClr val="FFFFFF"/>
+          </a:solidFill>
+          <a:ln w="12700">
+            <a:solidFill>
+              <a:srgbClr val="D9E6EC"/>
+            </a:solidFill>
+          </a:ln>
+        </p:spPr>
+        <p:txBody>
+          <a:bodyPr wrap="square" lIns="0" tIns="0" rIns="0" bIns="0" rtlCol="0" anchor="ctr"/>
+          <a:lstStyle/>
+          <a:p>
+            <a:pPr algn="ctr" indent="0" marL="0">
+              <a:buNone/>
+            </a:pPr>
+            <a:r>
+              <a:rPr lang="en-US" sz="1250" dirty="0">
+                <a:solidFill>
+                  <a:srgbClr val="5A7184"/>
+                </a:solidFill>
+                <a:latin typeface="Malgun Gothic" pitchFamily="34" charset="0"/>
+                <a:ea typeface="Malgun Gothic" pitchFamily="34" charset="-122"/>
+                <a:cs typeface="Malgun Gothic" pitchFamily="34" charset="-120"/>
+              </a:rPr>
+              <a:t>스펙 수령</a:t>
+            </a:r>
+            <a:endParaRPr lang="en-US" sz="1250" dirty="0"/>
+          </a:p>
+        </p:txBody>
+      </p:sp>
+      <p:sp>
+        <p:nvSpPr>
+          <p:cNvPr id="20" name="Text 18"/>
+          <p:cNvSpPr/>
+          <p:nvPr/>
+        </p:nvSpPr>
+        <p:spPr>
+          <a:xfrm>
+            <a:off x="8065008" y="2139696"/>
+            <a:ext cx="274320" cy="365760"/>
+          </a:xfrm>
+          <a:prstGeom prst="rect">
+            <a:avLst/>
+          </a:prstGeom>
+          <a:noFill/>
+          <a:ln/>
+        </p:spPr>
+        <p:txBody>
+          <a:bodyPr wrap="square" lIns="0" tIns="0" rIns="0" bIns="0" rtlCol="0" anchor="ctr"/>
+          <a:lstStyle/>
+          <a:p>
+            <a:pPr algn="ctr" indent="0" marL="0">
+              <a:buNone/>
+            </a:pPr>
+            <a:r>
+              <a:rPr lang="en-US" sz="1500" b="1" dirty="0">
                 <a:solidFill>
                   <a:srgbClr val="028090"/>
                 </a:solidFill>
@@ -3568,22 +4720,22 @@
                 <a:ea typeface="Malgun Gothic" pitchFamily="34" charset="-122"/>
                 <a:cs typeface="Malgun Gothic" pitchFamily="34" charset="-120"/>
               </a:rPr>
-              <a:t>▶</a:t>
-            </a:r>
-            <a:endParaRPr lang="en-US" sz="1600" dirty="0"/>
-          </a:p>
-        </p:txBody>
-      </p:sp>
-      <p:sp>
-        <p:nvSpPr>
-          <p:cNvPr id="32" name="Shape 30"/>
-          <p:cNvSpPr/>
-          <p:nvPr/>
-        </p:nvSpPr>
-        <p:spPr>
-          <a:xfrm>
-            <a:off x="4343400" y="5742432"/>
-            <a:ext cx="3511296" cy="658368"/>
+              <a:t>→</a:t>
+            </a:r>
+            <a:endParaRPr lang="en-US" sz="1500" dirty="0"/>
+          </a:p>
+        </p:txBody>
+      </p:sp>
+      <p:sp>
+        <p:nvSpPr>
+          <p:cNvPr id="21" name="Text 19"/>
+          <p:cNvSpPr/>
+          <p:nvPr/>
+        </p:nvSpPr>
+        <p:spPr>
+          <a:xfrm>
+            <a:off x="8357616" y="2139696"/>
+            <a:ext cx="3108960" cy="365760"/>
           </a:xfrm>
           <a:prstGeom prst="roundRect">
             <a:avLst>
@@ -3591,90 +4743,23 @@
             </a:avLst>
           </a:prstGeom>
           <a:solidFill>
-            <a:srgbClr val="EAF3FA"/>
-          </a:solidFill>
-          <a:ln/>
-        </p:spPr>
-      </p:sp>
-      <p:sp>
-        <p:nvSpPr>
-          <p:cNvPr id="33" name="Text 31"/>
-          <p:cNvSpPr/>
-          <p:nvPr/>
-        </p:nvSpPr>
-        <p:spPr>
-          <a:xfrm>
-            <a:off x="4489704" y="5742432"/>
-            <a:ext cx="3255264" cy="658368"/>
-          </a:xfrm>
-          <a:prstGeom prst="rect">
-            <a:avLst/>
-          </a:prstGeom>
-          <a:noFill/>
-          <a:ln/>
-        </p:spPr>
-        <p:txBody>
-          <a:bodyPr wrap="square" lIns="0" tIns="0" rIns="0" bIns="0" rtlCol="0" anchor="ctr"/>
-          <a:lstStyle/>
-          <a:p>
-            <a:pPr indent="0" marL="0">
-              <a:buNone/>
-            </a:pPr>
-            <a:r>
-              <a:rPr lang="en-US" sz="1550" b="1" dirty="0">
-                <a:solidFill>
-                  <a:srgbClr val="0E6BA8"/>
-                </a:solidFill>
-                <a:latin typeface="Malgun Gothic" pitchFamily="34" charset="0"/>
-                <a:ea typeface="Malgun Gothic" pitchFamily="34" charset="-122"/>
-                <a:cs typeface="Malgun Gothic" pitchFamily="34" charset="-120"/>
-              </a:rPr>
-              <a:t>1년 · 제도화  </a:t>
-            </a:r>
-            <a:pPr indent="0" marL="0">
-              <a:buNone/>
-            </a:pPr>
-            <a:r>
-              <a:rPr lang="en-US" sz="1550" dirty="0">
-                <a:solidFill>
-                  <a:srgbClr val="17313B"/>
-                </a:solidFill>
-                <a:latin typeface="Malgun Gothic" pitchFamily="34" charset="0"/>
-                <a:ea typeface="Malgun Gothic" pitchFamily="34" charset="-122"/>
-                <a:cs typeface="Malgun Gothic" pitchFamily="34" charset="-120"/>
-              </a:rPr>
-              <a:t>Pod 3~5개 · SCA형 계약 1건</a:t>
-            </a:r>
-            <a:endParaRPr lang="en-US" sz="1550" dirty="0"/>
-          </a:p>
-        </p:txBody>
-      </p:sp>
-      <p:sp>
-        <p:nvSpPr>
-          <p:cNvPr id="34" name="Text 32"/>
-          <p:cNvSpPr/>
-          <p:nvPr/>
-        </p:nvSpPr>
-        <p:spPr>
-          <a:xfrm>
-            <a:off x="7854696" y="5742432"/>
-            <a:ext cx="374904" cy="658368"/>
-          </a:xfrm>
-          <a:prstGeom prst="rect">
-            <a:avLst/>
-          </a:prstGeom>
-          <a:noFill/>
-          <a:ln/>
-        </p:spPr>
-        <p:txBody>
-          <a:bodyPr wrap="square" lIns="0" tIns="0" rIns="0" bIns="0" rtlCol="0" anchor="ctr"/>
-          <a:lstStyle/>
-          <a:p>
-            <a:pPr algn="ctr" indent="0" marL="0">
-              <a:buNone/>
-            </a:pPr>
-            <a:r>
-              <a:rPr lang="en-US" sz="1600" dirty="0">
+            <a:srgbClr val="FFFFFF"/>
+          </a:solidFill>
+          <a:ln w="15875">
+            <a:solidFill>
+              <a:srgbClr val="028090"/>
+            </a:solidFill>
+          </a:ln>
+        </p:spPr>
+        <p:txBody>
+          <a:bodyPr wrap="square" lIns="0" tIns="0" rIns="0" bIns="0" rtlCol="0" anchor="ctr"/>
+          <a:lstStyle/>
+          <a:p>
+            <a:pPr algn="ctr" indent="0" marL="0">
+              <a:buNone/>
+            </a:pPr>
+            <a:r>
+              <a:rPr lang="en-US" sz="1250" b="1" dirty="0">
                 <a:solidFill>
                   <a:srgbClr val="028090"/>
                 </a:solidFill>
@@ -3682,22 +4767,22 @@
                 <a:ea typeface="Malgun Gothic" pitchFamily="34" charset="-122"/>
                 <a:cs typeface="Malgun Gothic" pitchFamily="34" charset="-120"/>
               </a:rPr>
-              <a:t>▶</a:t>
-            </a:r>
-            <a:endParaRPr lang="en-US" sz="1600" dirty="0"/>
-          </a:p>
-        </p:txBody>
-      </p:sp>
-      <p:sp>
-        <p:nvSpPr>
-          <p:cNvPr id="35" name="Shape 33"/>
-          <p:cNvSpPr/>
-          <p:nvPr/>
-        </p:nvSpPr>
-        <p:spPr>
-          <a:xfrm>
-            <a:off x="8229600" y="5742432"/>
-            <a:ext cx="3511296" cy="658368"/>
+              <a:t>요구사항 공동 정의</a:t>
+            </a:r>
+            <a:endParaRPr lang="en-US" sz="1250" dirty="0"/>
+          </a:p>
+        </p:txBody>
+      </p:sp>
+      <p:sp>
+        <p:nvSpPr>
+          <p:cNvPr id="22" name="Text 20"/>
+          <p:cNvSpPr/>
+          <p:nvPr/>
+        </p:nvSpPr>
+        <p:spPr>
+          <a:xfrm>
+            <a:off x="6473952" y="2596896"/>
+            <a:ext cx="1554480" cy="365760"/>
           </a:xfrm>
           <a:prstGeom prst="roundRect">
             <a:avLst>
@@ -3705,21 +4790,328 @@
             </a:avLst>
           </a:prstGeom>
           <a:solidFill>
-            <a:srgbClr val="EAF3FA"/>
-          </a:solidFill>
-          <a:ln/>
-        </p:spPr>
-      </p:sp>
-      <p:sp>
-        <p:nvSpPr>
-          <p:cNvPr id="36" name="Text 34"/>
-          <p:cNvSpPr/>
-          <p:nvPr/>
-        </p:nvSpPr>
-        <p:spPr>
-          <a:xfrm>
-            <a:off x="8375904" y="5742432"/>
-            <a:ext cx="3255264" cy="658368"/>
+            <a:srgbClr val="FFFFFF"/>
+          </a:solidFill>
+          <a:ln w="12700">
+            <a:solidFill>
+              <a:srgbClr val="D9E6EC"/>
+            </a:solidFill>
+          </a:ln>
+        </p:spPr>
+        <p:txBody>
+          <a:bodyPr wrap="square" lIns="0" tIns="0" rIns="0" bIns="0" rtlCol="0" anchor="ctr"/>
+          <a:lstStyle/>
+          <a:p>
+            <a:pPr algn="ctr" indent="0" marL="0">
+              <a:buNone/>
+            </a:pPr>
+            <a:r>
+              <a:rPr lang="en-US" sz="1250" dirty="0">
+                <a:solidFill>
+                  <a:srgbClr val="5A7184"/>
+                </a:solidFill>
+                <a:latin typeface="Malgun Gothic" pitchFamily="34" charset="0"/>
+                <a:ea typeface="Malgun Gothic" pitchFamily="34" charset="-122"/>
+                <a:cs typeface="Malgun Gothic" pitchFamily="34" charset="-120"/>
+              </a:rPr>
+              <a:t>RFQ 응답</a:t>
+            </a:r>
+            <a:endParaRPr lang="en-US" sz="1250" dirty="0"/>
+          </a:p>
+        </p:txBody>
+      </p:sp>
+      <p:sp>
+        <p:nvSpPr>
+          <p:cNvPr id="23" name="Text 21"/>
+          <p:cNvSpPr/>
+          <p:nvPr/>
+        </p:nvSpPr>
+        <p:spPr>
+          <a:xfrm>
+            <a:off x="8065008" y="2596896"/>
+            <a:ext cx="274320" cy="365760"/>
+          </a:xfrm>
+          <a:prstGeom prst="rect">
+            <a:avLst/>
+          </a:prstGeom>
+          <a:noFill/>
+          <a:ln/>
+        </p:spPr>
+        <p:txBody>
+          <a:bodyPr wrap="square" lIns="0" tIns="0" rIns="0" bIns="0" rtlCol="0" anchor="ctr"/>
+          <a:lstStyle/>
+          <a:p>
+            <a:pPr algn="ctr" indent="0" marL="0">
+              <a:buNone/>
+            </a:pPr>
+            <a:r>
+              <a:rPr lang="en-US" sz="1500" b="1" dirty="0">
+                <a:solidFill>
+                  <a:srgbClr val="028090"/>
+                </a:solidFill>
+                <a:latin typeface="Malgun Gothic" pitchFamily="34" charset="0"/>
+                <a:ea typeface="Malgun Gothic" pitchFamily="34" charset="-122"/>
+                <a:cs typeface="Malgun Gothic" pitchFamily="34" charset="-120"/>
+              </a:rPr>
+              <a:t>→</a:t>
+            </a:r>
+            <a:endParaRPr lang="en-US" sz="1500" dirty="0"/>
+          </a:p>
+        </p:txBody>
+      </p:sp>
+      <p:sp>
+        <p:nvSpPr>
+          <p:cNvPr id="24" name="Text 22"/>
+          <p:cNvSpPr/>
+          <p:nvPr/>
+        </p:nvSpPr>
+        <p:spPr>
+          <a:xfrm>
+            <a:off x="8357616" y="2596896"/>
+            <a:ext cx="3108960" cy="365760"/>
+          </a:xfrm>
+          <a:prstGeom prst="roundRect">
+            <a:avLst>
+              <a:gd name="adj" fmla="val 12500"/>
+            </a:avLst>
+          </a:prstGeom>
+          <a:solidFill>
+            <a:srgbClr val="FFFFFF"/>
+          </a:solidFill>
+          <a:ln w="15875">
+            <a:solidFill>
+              <a:srgbClr val="028090"/>
+            </a:solidFill>
+          </a:ln>
+        </p:spPr>
+        <p:txBody>
+          <a:bodyPr wrap="square" lIns="0" tIns="0" rIns="0" bIns="0" rtlCol="0" anchor="ctr"/>
+          <a:lstStyle/>
+          <a:p>
+            <a:pPr algn="ctr" indent="0" marL="0">
+              <a:buNone/>
+            </a:pPr>
+            <a:r>
+              <a:rPr lang="en-US" sz="1250" b="1" dirty="0">
+                <a:solidFill>
+                  <a:srgbClr val="028090"/>
+                </a:solidFill>
+                <a:latin typeface="Malgun Gothic" pitchFamily="34" charset="0"/>
+                <a:ea typeface="Malgun Gothic" pitchFamily="34" charset="-122"/>
+                <a:cs typeface="Malgun Gothic" pitchFamily="34" charset="-120"/>
+              </a:rPr>
+              <a:t>선제 제안·기술 드라이브</a:t>
+            </a:r>
+            <a:endParaRPr lang="en-US" sz="1250" dirty="0"/>
+          </a:p>
+        </p:txBody>
+      </p:sp>
+      <p:sp>
+        <p:nvSpPr>
+          <p:cNvPr id="25" name="Text 23"/>
+          <p:cNvSpPr/>
+          <p:nvPr/>
+        </p:nvSpPr>
+        <p:spPr>
+          <a:xfrm>
+            <a:off x="6473952" y="3054096"/>
+            <a:ext cx="1554480" cy="365760"/>
+          </a:xfrm>
+          <a:prstGeom prst="roundRect">
+            <a:avLst>
+              <a:gd name="adj" fmla="val 12500"/>
+            </a:avLst>
+          </a:prstGeom>
+          <a:solidFill>
+            <a:srgbClr val="FFFFFF"/>
+          </a:solidFill>
+          <a:ln w="12700">
+            <a:solidFill>
+              <a:srgbClr val="D9E6EC"/>
+            </a:solidFill>
+          </a:ln>
+        </p:spPr>
+        <p:txBody>
+          <a:bodyPr wrap="square" lIns="0" tIns="0" rIns="0" bIns="0" rtlCol="0" anchor="ctr"/>
+          <a:lstStyle/>
+          <a:p>
+            <a:pPr algn="ctr" indent="0" marL="0">
+              <a:buNone/>
+            </a:pPr>
+            <a:r>
+              <a:rPr lang="en-US" sz="1250" dirty="0">
+                <a:solidFill>
+                  <a:srgbClr val="5A7184"/>
+                </a:solidFill>
+                <a:latin typeface="Malgun Gothic" pitchFamily="34" charset="0"/>
+                <a:ea typeface="Malgun Gothic" pitchFamily="34" charset="-122"/>
+                <a:cs typeface="Malgun Gothic" pitchFamily="34" charset="-120"/>
+              </a:rPr>
+              <a:t>부품 스펙</a:t>
+            </a:r>
+            <a:endParaRPr lang="en-US" sz="1250" dirty="0"/>
+          </a:p>
+        </p:txBody>
+      </p:sp>
+      <p:sp>
+        <p:nvSpPr>
+          <p:cNvPr id="26" name="Text 24"/>
+          <p:cNvSpPr/>
+          <p:nvPr/>
+        </p:nvSpPr>
+        <p:spPr>
+          <a:xfrm>
+            <a:off x="8065008" y="3054096"/>
+            <a:ext cx="274320" cy="365760"/>
+          </a:xfrm>
+          <a:prstGeom prst="rect">
+            <a:avLst/>
+          </a:prstGeom>
+          <a:noFill/>
+          <a:ln/>
+        </p:spPr>
+        <p:txBody>
+          <a:bodyPr wrap="square" lIns="0" tIns="0" rIns="0" bIns="0" rtlCol="0" anchor="ctr"/>
+          <a:lstStyle/>
+          <a:p>
+            <a:pPr algn="ctr" indent="0" marL="0">
+              <a:buNone/>
+            </a:pPr>
+            <a:r>
+              <a:rPr lang="en-US" sz="1500" b="1" dirty="0">
+                <a:solidFill>
+                  <a:srgbClr val="028090"/>
+                </a:solidFill>
+                <a:latin typeface="Malgun Gothic" pitchFamily="34" charset="0"/>
+                <a:ea typeface="Malgun Gothic" pitchFamily="34" charset="-122"/>
+                <a:cs typeface="Malgun Gothic" pitchFamily="34" charset="-120"/>
+              </a:rPr>
+              <a:t>→</a:t>
+            </a:r>
+            <a:endParaRPr lang="en-US" sz="1500" dirty="0"/>
+          </a:p>
+        </p:txBody>
+      </p:sp>
+      <p:sp>
+        <p:nvSpPr>
+          <p:cNvPr id="27" name="Text 25"/>
+          <p:cNvSpPr/>
+          <p:nvPr/>
+        </p:nvSpPr>
+        <p:spPr>
+          <a:xfrm>
+            <a:off x="8357616" y="3054096"/>
+            <a:ext cx="3108960" cy="365760"/>
+          </a:xfrm>
+          <a:prstGeom prst="roundRect">
+            <a:avLst>
+              <a:gd name="adj" fmla="val 12500"/>
+            </a:avLst>
+          </a:prstGeom>
+          <a:solidFill>
+            <a:srgbClr val="FFFFFF"/>
+          </a:solidFill>
+          <a:ln w="15875">
+            <a:solidFill>
+              <a:srgbClr val="028090"/>
+            </a:solidFill>
+          </a:ln>
+        </p:spPr>
+        <p:txBody>
+          <a:bodyPr wrap="square" lIns="0" tIns="0" rIns="0" bIns="0" rtlCol="0" anchor="ctr"/>
+          <a:lstStyle/>
+          <a:p>
+            <a:pPr algn="ctr" indent="0" marL="0">
+              <a:buNone/>
+            </a:pPr>
+            <a:r>
+              <a:rPr lang="en-US" sz="1250" b="1" dirty="0">
+                <a:solidFill>
+                  <a:srgbClr val="028090"/>
+                </a:solidFill>
+                <a:latin typeface="Malgun Gothic" pitchFamily="34" charset="0"/>
+                <a:ea typeface="Malgun Gothic" pitchFamily="34" charset="-122"/>
+                <a:cs typeface="Malgun Gothic" pitchFamily="34" charset="-120"/>
+              </a:rPr>
+              <a:t>시스템 모델 (서버→랙→DC)</a:t>
+            </a:r>
+            <a:endParaRPr lang="en-US" sz="1250" dirty="0"/>
+          </a:p>
+        </p:txBody>
+      </p:sp>
+      <p:sp>
+        <p:nvSpPr>
+          <p:cNvPr id="28" name="Shape 26"/>
+          <p:cNvSpPr/>
+          <p:nvPr/>
+        </p:nvSpPr>
+        <p:spPr>
+          <a:xfrm>
+            <a:off x="457200" y="3730752"/>
+            <a:ext cx="11274552" cy="1133856"/>
+          </a:xfrm>
+          <a:prstGeom prst="roundRect">
+            <a:avLst>
+              <a:gd name="adj" fmla="val 7258"/>
+            </a:avLst>
+          </a:prstGeom>
+          <a:solidFill>
+            <a:srgbClr val="E8F6F0"/>
+          </a:solidFill>
+          <a:ln/>
+        </p:spPr>
+      </p:sp>
+      <p:sp>
+        <p:nvSpPr>
+          <p:cNvPr id="29" name="Text 27"/>
+          <p:cNvSpPr/>
+          <p:nvPr/>
+        </p:nvSpPr>
+        <p:spPr>
+          <a:xfrm>
+            <a:off x="640080" y="3877056"/>
+            <a:ext cx="329184" cy="329184"/>
+          </a:xfrm>
+          <a:prstGeom prst="ellipse">
+            <a:avLst/>
+          </a:prstGeom>
+          <a:solidFill>
+            <a:srgbClr val="02A878"/>
+          </a:solidFill>
+          <a:ln/>
+        </p:spPr>
+        <p:txBody>
+          <a:bodyPr wrap="square" lIns="0" tIns="0" rIns="0" bIns="0" rtlCol="0" anchor="ctr"/>
+          <a:lstStyle/>
+          <a:p>
+            <a:pPr algn="ctr" indent="0" marL="0">
+              <a:buNone/>
+            </a:pPr>
+            <a:r>
+              <a:rPr lang="en-US" sz="1500" b="1" dirty="0">
+                <a:solidFill>
+                  <a:srgbClr val="FFFFFF"/>
+                </a:solidFill>
+                <a:latin typeface="Malgun Gothic" pitchFamily="34" charset="0"/>
+                <a:ea typeface="Malgun Gothic" pitchFamily="34" charset="-122"/>
+                <a:cs typeface="Malgun Gothic" pitchFamily="34" charset="-120"/>
+              </a:rPr>
+              <a:t>3</a:t>
+            </a:r>
+            <a:endParaRPr lang="en-US" sz="1500" dirty="0"/>
+          </a:p>
+        </p:txBody>
+      </p:sp>
+      <p:sp>
+        <p:nvSpPr>
+          <p:cNvPr id="30" name="Text 28"/>
+          <p:cNvSpPr/>
+          <p:nvPr/>
+        </p:nvSpPr>
+        <p:spPr>
+          <a:xfrm>
+            <a:off x="1060704" y="3849624"/>
+            <a:ext cx="3108960" cy="365760"/>
           </a:xfrm>
           <a:prstGeom prst="rect">
             <a:avLst/>
@@ -3735,21 +5127,90 @@
               <a:buNone/>
             </a:pPr>
             <a:r>
-              <a:rPr lang="en-US" sz="1550" b="1" dirty="0">
-                <a:solidFill>
-                  <a:srgbClr val="0E6BA8"/>
-                </a:solidFill>
-                <a:latin typeface="Malgun Gothic" pitchFamily="34" charset="0"/>
-                <a:ea typeface="Malgun Gothic" pitchFamily="34" charset="-122"/>
-                <a:cs typeface="Malgun Gothic" pitchFamily="34" charset="-120"/>
-              </a:rPr>
-              <a:t>3년 · 표준화  </a:t>
-            </a:r>
+              <a:rPr lang="en-US" sz="1900" b="1" dirty="0">
+                <a:solidFill>
+                  <a:srgbClr val="02A878"/>
+                </a:solidFill>
+                <a:latin typeface="Malgun Gothic" pitchFamily="34" charset="0"/>
+                <a:ea typeface="Malgun Gothic" pitchFamily="34" charset="-122"/>
+                <a:cs typeface="Malgun Gothic" pitchFamily="34" charset="-120"/>
+              </a:rPr>
+              <a:t>어떻게 하나 — 4대 축</a:t>
+            </a:r>
+            <a:endParaRPr lang="en-US" sz="1900" dirty="0"/>
+          </a:p>
+        </p:txBody>
+      </p:sp>
+      <p:sp>
+        <p:nvSpPr>
+          <p:cNvPr id="31" name="Shape 29"/>
+          <p:cNvSpPr/>
+          <p:nvPr/>
+        </p:nvSpPr>
+        <p:spPr>
+          <a:xfrm>
+            <a:off x="4224528" y="3913632"/>
+            <a:ext cx="420624" cy="420624"/>
+          </a:xfrm>
+          <a:prstGeom prst="ellipse">
+            <a:avLst/>
+          </a:prstGeom>
+          <a:solidFill>
+            <a:srgbClr val="0E6BA8"/>
+          </a:solidFill>
+          <a:ln/>
+        </p:spPr>
+      </p:sp>
+      <p:pic>
+        <p:nvPicPr>
+          <p:cNvPr id="32" name="Image 0" descr="preencoded.png">    </p:cNvPr>
+          <p:cNvPicPr>
+            <a:picLocks noChangeAspect="1"/>
+          </p:cNvPicPr>
+          <p:nvPr/>
+        </p:nvPicPr>
+        <p:blipFill>
+          <a:blip r:embed="rId1"/>
+          <a:stretch>
+            <a:fillRect/>
+          </a:stretch>
+        </p:blipFill>
+        <p:spPr>
+          <a:xfrm>
+            <a:off x="4325478" y="4014582"/>
+            <a:ext cx="218724" cy="218724"/>
+          </a:xfrm>
+          <a:prstGeom prst="rect">
+            <a:avLst/>
+          </a:prstGeom>
+        </p:spPr>
+      </p:pic>
+      <p:sp>
+        <p:nvSpPr>
+          <p:cNvPr id="33" name="Text 30"/>
+          <p:cNvSpPr/>
+          <p:nvPr/>
+        </p:nvSpPr>
+        <p:spPr>
+          <a:xfrm>
+            <a:off x="4718304" y="3895344"/>
+            <a:ext cx="1371600" cy="274320"/>
+          </a:xfrm>
+          <a:prstGeom prst="rect">
+            <a:avLst/>
+          </a:prstGeom>
+          <a:noFill/>
+          <a:ln/>
+        </p:spPr>
+        <p:txBody>
+          <a:bodyPr wrap="square" lIns="0" tIns="0" rIns="0" bIns="0" rtlCol="0" anchor="ctr"/>
+          <a:lstStyle/>
+          <a:p>
             <a:pPr indent="0" marL="0">
               <a:buNone/>
             </a:pPr>
             <a:r>
-              <a:rPr lang="en-US" sz="1550" dirty="0">
+              <a:rPr lang="en-US" sz="1450" b="1" dirty="0">
                 <a:solidFill>
                   <a:srgbClr val="17313B"/>
                 </a:solidFill>
@@ -3757,9 +5218,782 @@
                 <a:ea typeface="Malgun Gothic" pitchFamily="34" charset="-122"/>
                 <a:cs typeface="Malgun Gothic" pitchFamily="34" charset="-120"/>
               </a:rPr>
+              <a:t>기술</a:t>
+            </a:r>
+            <a:endParaRPr lang="en-US" sz="1450" dirty="0"/>
+          </a:p>
+        </p:txBody>
+      </p:sp>
+      <p:sp>
+        <p:nvSpPr>
+          <p:cNvPr id="34" name="Text 31"/>
+          <p:cNvSpPr/>
+          <p:nvPr/>
+        </p:nvSpPr>
+        <p:spPr>
+          <a:xfrm>
+            <a:off x="4718304" y="4169664"/>
+            <a:ext cx="1426464" cy="548640"/>
+          </a:xfrm>
+          <a:prstGeom prst="rect">
+            <a:avLst/>
+          </a:prstGeom>
+          <a:noFill/>
+          <a:ln/>
+        </p:spPr>
+        <p:txBody>
+          <a:bodyPr wrap="square" lIns="0" tIns="0" rIns="0" bIns="0" rtlCol="0" anchor="t"/>
+          <a:lstStyle/>
+          <a:p>
+            <a:pPr indent="0" marL="0">
+              <a:lnSpc>
+                <a:spcPct val="105000"/>
+              </a:lnSpc>
+              <a:buNone/>
+            </a:pPr>
+            <a:r>
+              <a:rPr lang="en-US" sz="1000" dirty="0">
+                <a:solidFill>
+                  <a:srgbClr val="5A7184"/>
+                </a:solidFill>
+                <a:latin typeface="Malgun Gothic" pitchFamily="34" charset="0"/>
+                <a:ea typeface="Malgun Gothic" pitchFamily="34" charset="-122"/>
+                <a:cs typeface="Malgun Gothic" pitchFamily="34" charset="-120"/>
+              </a:rPr>
+              <a:t>워크로드 랩 · 시스템 모델</a:t>
+            </a:r>
+            <a:endParaRPr lang="en-US" sz="1000" dirty="0"/>
+          </a:p>
+        </p:txBody>
+      </p:sp>
+      <p:sp>
+        <p:nvSpPr>
+          <p:cNvPr id="35" name="Shape 32"/>
+          <p:cNvSpPr/>
+          <p:nvPr/>
+        </p:nvSpPr>
+        <p:spPr>
+          <a:xfrm>
+            <a:off x="6108192" y="3913632"/>
+            <a:ext cx="420624" cy="420624"/>
+          </a:xfrm>
+          <a:prstGeom prst="ellipse">
+            <a:avLst/>
+          </a:prstGeom>
+          <a:solidFill>
+            <a:srgbClr val="028090"/>
+          </a:solidFill>
+          <a:ln/>
+        </p:spPr>
+      </p:sp>
+      <p:pic>
+        <p:nvPicPr>
+          <p:cNvPr id="36" name="Image 1" descr="preencoded.png">    </p:cNvPr>
+          <p:cNvPicPr>
+            <a:picLocks noChangeAspect="1"/>
+          </p:cNvPicPr>
+          <p:nvPr/>
+        </p:nvPicPr>
+        <p:blipFill>
+          <a:blip r:embed="rId2"/>
+          <a:stretch>
+            <a:fillRect/>
+          </a:stretch>
+        </p:blipFill>
+        <p:spPr>
+          <a:xfrm>
+            <a:off x="6209142" y="4014582"/>
+            <a:ext cx="218724" cy="218724"/>
+          </a:xfrm>
+          <a:prstGeom prst="rect">
+            <a:avLst/>
+          </a:prstGeom>
+        </p:spPr>
+      </p:pic>
+      <p:sp>
+        <p:nvSpPr>
+          <p:cNvPr id="37" name="Text 33"/>
+          <p:cNvSpPr/>
+          <p:nvPr/>
+        </p:nvSpPr>
+        <p:spPr>
+          <a:xfrm>
+            <a:off x="6601968" y="3895344"/>
+            <a:ext cx="1371600" cy="274320"/>
+          </a:xfrm>
+          <a:prstGeom prst="rect">
+            <a:avLst/>
+          </a:prstGeom>
+          <a:noFill/>
+          <a:ln/>
+        </p:spPr>
+        <p:txBody>
+          <a:bodyPr wrap="square" lIns="0" tIns="0" rIns="0" bIns="0" rtlCol="0" anchor="ctr"/>
+          <a:lstStyle/>
+          <a:p>
+            <a:pPr indent="0" marL="0">
+              <a:buNone/>
+            </a:pPr>
+            <a:r>
+              <a:rPr lang="en-US" sz="1450" b="1" dirty="0">
+                <a:solidFill>
+                  <a:srgbClr val="17313B"/>
+                </a:solidFill>
+                <a:latin typeface="Malgun Gothic" pitchFamily="34" charset="0"/>
+                <a:ea typeface="Malgun Gothic" pitchFamily="34" charset="-122"/>
+                <a:cs typeface="Malgun Gothic" pitchFamily="34" charset="-120"/>
+              </a:rPr>
+              <a:t>문화</a:t>
+            </a:r>
+            <a:endParaRPr lang="en-US" sz="1450" dirty="0"/>
+          </a:p>
+        </p:txBody>
+      </p:sp>
+      <p:sp>
+        <p:nvSpPr>
+          <p:cNvPr id="38" name="Text 34"/>
+          <p:cNvSpPr/>
+          <p:nvPr/>
+        </p:nvSpPr>
+        <p:spPr>
+          <a:xfrm>
+            <a:off x="6601968" y="4169664"/>
+            <a:ext cx="1426464" cy="548640"/>
+          </a:xfrm>
+          <a:prstGeom prst="rect">
+            <a:avLst/>
+          </a:prstGeom>
+          <a:noFill/>
+          <a:ln/>
+        </p:spPr>
+        <p:txBody>
+          <a:bodyPr wrap="square" lIns="0" tIns="0" rIns="0" bIns="0" rtlCol="0" anchor="t"/>
+          <a:lstStyle/>
+          <a:p>
+            <a:pPr indent="0" marL="0">
+              <a:lnSpc>
+                <a:spcPct val="105000"/>
+              </a:lnSpc>
+              <a:buNone/>
+            </a:pPr>
+            <a:r>
+              <a:rPr lang="en-US" sz="1000" dirty="0">
+                <a:solidFill>
+                  <a:srgbClr val="5A7184"/>
+                </a:solidFill>
+                <a:latin typeface="Malgun Gothic" pitchFamily="34" charset="0"/>
+                <a:ea typeface="Malgun Gothic" pitchFamily="34" charset="-122"/>
+                <a:cs typeface="Malgun Gothic" pitchFamily="34" charset="-120"/>
+              </a:rPr>
+              <a:t>가설 제안 KPI · 스타 호명</a:t>
+            </a:r>
+            <a:endParaRPr lang="en-US" sz="1000" dirty="0"/>
+          </a:p>
+        </p:txBody>
+      </p:sp>
+      <p:sp>
+        <p:nvSpPr>
+          <p:cNvPr id="39" name="Shape 35"/>
+          <p:cNvSpPr/>
+          <p:nvPr/>
+        </p:nvSpPr>
+        <p:spPr>
+          <a:xfrm>
+            <a:off x="7991856" y="3913632"/>
+            <a:ext cx="420624" cy="420624"/>
+          </a:xfrm>
+          <a:prstGeom prst="ellipse">
+            <a:avLst/>
+          </a:prstGeom>
+          <a:solidFill>
+            <a:srgbClr val="02A878"/>
+          </a:solidFill>
+          <a:ln/>
+        </p:spPr>
+      </p:sp>
+      <p:pic>
+        <p:nvPicPr>
+          <p:cNvPr id="40" name="Image 2" descr="preencoded.png">    </p:cNvPr>
+          <p:cNvPicPr>
+            <a:picLocks noChangeAspect="1"/>
+          </p:cNvPicPr>
+          <p:nvPr/>
+        </p:nvPicPr>
+        <p:blipFill>
+          <a:blip r:embed="rId3"/>
+          <a:stretch>
+            <a:fillRect/>
+          </a:stretch>
+        </p:blipFill>
+        <p:spPr>
+          <a:xfrm>
+            <a:off x="8092806" y="4014582"/>
+            <a:ext cx="218724" cy="218724"/>
+          </a:xfrm>
+          <a:prstGeom prst="rect">
+            <a:avLst/>
+          </a:prstGeom>
+        </p:spPr>
+      </p:pic>
+      <p:sp>
+        <p:nvSpPr>
+          <p:cNvPr id="41" name="Text 36"/>
+          <p:cNvSpPr/>
+          <p:nvPr/>
+        </p:nvSpPr>
+        <p:spPr>
+          <a:xfrm>
+            <a:off x="8485632" y="3895344"/>
+            <a:ext cx="1371600" cy="274320"/>
+          </a:xfrm>
+          <a:prstGeom prst="rect">
+            <a:avLst/>
+          </a:prstGeom>
+          <a:noFill/>
+          <a:ln/>
+        </p:spPr>
+        <p:txBody>
+          <a:bodyPr wrap="square" lIns="0" tIns="0" rIns="0" bIns="0" rtlCol="0" anchor="ctr"/>
+          <a:lstStyle/>
+          <a:p>
+            <a:pPr indent="0" marL="0">
+              <a:buNone/>
+            </a:pPr>
+            <a:r>
+              <a:rPr lang="en-US" sz="1450" b="1" dirty="0">
+                <a:solidFill>
+                  <a:srgbClr val="17313B"/>
+                </a:solidFill>
+                <a:latin typeface="Malgun Gothic" pitchFamily="34" charset="0"/>
+                <a:ea typeface="Malgun Gothic" pitchFamily="34" charset="-122"/>
+                <a:cs typeface="Malgun Gothic" pitchFamily="34" charset="-120"/>
+              </a:rPr>
+              <a:t>조직</a:t>
+            </a:r>
+            <a:endParaRPr lang="en-US" sz="1450" dirty="0"/>
+          </a:p>
+        </p:txBody>
+      </p:sp>
+      <p:sp>
+        <p:nvSpPr>
+          <p:cNvPr id="42" name="Text 37"/>
+          <p:cNvSpPr/>
+          <p:nvPr/>
+        </p:nvSpPr>
+        <p:spPr>
+          <a:xfrm>
+            <a:off x="8485632" y="4169664"/>
+            <a:ext cx="1426464" cy="548640"/>
+          </a:xfrm>
+          <a:prstGeom prst="rect">
+            <a:avLst/>
+          </a:prstGeom>
+          <a:noFill/>
+          <a:ln/>
+        </p:spPr>
+        <p:txBody>
+          <a:bodyPr wrap="square" lIns="0" tIns="0" rIns="0" bIns="0" rtlCol="0" anchor="t"/>
+          <a:lstStyle/>
+          <a:p>
+            <a:pPr indent="0" marL="0">
+              <a:lnSpc>
+                <a:spcPct val="105000"/>
+              </a:lnSpc>
+              <a:buNone/>
+            </a:pPr>
+            <a:r>
+              <a:rPr lang="en-US" sz="1000" dirty="0">
+                <a:solidFill>
+                  <a:srgbClr val="5A7184"/>
+                </a:solidFill>
+                <a:latin typeface="Malgun Gothic" pitchFamily="34" charset="0"/>
+                <a:ea typeface="Malgun Gothic" pitchFamily="34" charset="-122"/>
+                <a:cs typeface="Malgun Gothic" pitchFamily="34" charset="-120"/>
+              </a:rPr>
+              <a:t>Co-Design Pod · DE 트랙</a:t>
+            </a:r>
+            <a:endParaRPr lang="en-US" sz="1000" dirty="0"/>
+          </a:p>
+        </p:txBody>
+      </p:sp>
+      <p:sp>
+        <p:nvSpPr>
+          <p:cNvPr id="43" name="Shape 38"/>
+          <p:cNvSpPr/>
+          <p:nvPr/>
+        </p:nvSpPr>
+        <p:spPr>
+          <a:xfrm>
+            <a:off x="9875520" y="3913632"/>
+            <a:ext cx="420624" cy="420624"/>
+          </a:xfrm>
+          <a:prstGeom prst="ellipse">
+            <a:avLst/>
+          </a:prstGeom>
+          <a:solidFill>
+            <a:srgbClr val="4C7C94"/>
+          </a:solidFill>
+          <a:ln/>
+        </p:spPr>
+      </p:sp>
+      <p:pic>
+        <p:nvPicPr>
+          <p:cNvPr id="44" name="Image 3" descr="preencoded.png">    </p:cNvPr>
+          <p:cNvPicPr>
+            <a:picLocks noChangeAspect="1"/>
+          </p:cNvPicPr>
+          <p:nvPr/>
+        </p:nvPicPr>
+        <p:blipFill>
+          <a:blip r:embed="rId4"/>
+          <a:stretch>
+            <a:fillRect/>
+          </a:stretch>
+        </p:blipFill>
+        <p:spPr>
+          <a:xfrm>
+            <a:off x="9976470" y="4014582"/>
+            <a:ext cx="218724" cy="218724"/>
+          </a:xfrm>
+          <a:prstGeom prst="rect">
+            <a:avLst/>
+          </a:prstGeom>
+        </p:spPr>
+      </p:pic>
+      <p:sp>
+        <p:nvSpPr>
+          <p:cNvPr id="45" name="Text 39"/>
+          <p:cNvSpPr/>
+          <p:nvPr/>
+        </p:nvSpPr>
+        <p:spPr>
+          <a:xfrm>
+            <a:off x="10369296" y="3895344"/>
+            <a:ext cx="1371600" cy="274320"/>
+          </a:xfrm>
+          <a:prstGeom prst="rect">
+            <a:avLst/>
+          </a:prstGeom>
+          <a:noFill/>
+          <a:ln/>
+        </p:spPr>
+        <p:txBody>
+          <a:bodyPr wrap="square" lIns="0" tIns="0" rIns="0" bIns="0" rtlCol="0" anchor="ctr"/>
+          <a:lstStyle/>
+          <a:p>
+            <a:pPr indent="0" marL="0">
+              <a:buNone/>
+            </a:pPr>
+            <a:r>
+              <a:rPr lang="en-US" sz="1450" b="1" dirty="0">
+                <a:solidFill>
+                  <a:srgbClr val="17313B"/>
+                </a:solidFill>
+                <a:latin typeface="Malgun Gothic" pitchFamily="34" charset="0"/>
+                <a:ea typeface="Malgun Gothic" pitchFamily="34" charset="-122"/>
+                <a:cs typeface="Malgun Gothic" pitchFamily="34" charset="-120"/>
+              </a:rPr>
+              <a:t>방식</a:t>
+            </a:r>
+            <a:endParaRPr lang="en-US" sz="1450" dirty="0"/>
+          </a:p>
+        </p:txBody>
+      </p:sp>
+      <p:sp>
+        <p:nvSpPr>
+          <p:cNvPr id="46" name="Text 40"/>
+          <p:cNvSpPr/>
+          <p:nvPr/>
+        </p:nvSpPr>
+        <p:spPr>
+          <a:xfrm>
+            <a:off x="10369296" y="4169664"/>
+            <a:ext cx="1426464" cy="548640"/>
+          </a:xfrm>
+          <a:prstGeom prst="rect">
+            <a:avLst/>
+          </a:prstGeom>
+          <a:noFill/>
+          <a:ln/>
+        </p:spPr>
+        <p:txBody>
+          <a:bodyPr wrap="square" lIns="0" tIns="0" rIns="0" bIns="0" rtlCol="0" anchor="t"/>
+          <a:lstStyle/>
+          <a:p>
+            <a:pPr indent="0" marL="0">
+              <a:lnSpc>
+                <a:spcPct val="105000"/>
+              </a:lnSpc>
+              <a:buNone/>
+            </a:pPr>
+            <a:r>
+              <a:rPr lang="en-US" sz="1000" dirty="0">
+                <a:solidFill>
+                  <a:srgbClr val="5A7184"/>
+                </a:solidFill>
+                <a:latin typeface="Malgun Gothic" pitchFamily="34" charset="0"/>
+                <a:ea typeface="Malgun Gothic" pitchFamily="34" charset="-122"/>
+                <a:cs typeface="Malgun Gothic" pitchFamily="34" charset="-120"/>
+              </a:rPr>
+              <a:t>교차 리뷰 · PoA · AI 내재화</a:t>
+            </a:r>
+            <a:endParaRPr lang="en-US" sz="1000" dirty="0"/>
+          </a:p>
+        </p:txBody>
+      </p:sp>
+      <p:sp>
+        <p:nvSpPr>
+          <p:cNvPr id="47" name="Shape 41"/>
+          <p:cNvSpPr/>
+          <p:nvPr/>
+        </p:nvSpPr>
+        <p:spPr>
+          <a:xfrm>
+            <a:off x="1463040" y="5431536"/>
+            <a:ext cx="9262872" cy="0"/>
+          </a:xfrm>
+          <a:prstGeom prst="line">
+            <a:avLst/>
+          </a:prstGeom>
+          <a:noFill/>
+          <a:ln w="25400">
+            <a:solidFill>
+              <a:srgbClr val="028090"/>
+            </a:solidFill>
+            <a:prstDash val="solid"/>
+          </a:ln>
+        </p:spPr>
+      </p:sp>
+      <p:sp>
+        <p:nvSpPr>
+          <p:cNvPr id="48" name="Shape 42"/>
+          <p:cNvSpPr/>
+          <p:nvPr/>
+        </p:nvSpPr>
+        <p:spPr>
+          <a:xfrm>
+            <a:off x="1380744" y="5349240"/>
+            <a:ext cx="164592" cy="164592"/>
+          </a:xfrm>
+          <a:prstGeom prst="ellipse">
+            <a:avLst/>
+          </a:prstGeom>
+          <a:solidFill>
+            <a:srgbClr val="028090"/>
+          </a:solidFill>
+          <a:ln/>
+        </p:spPr>
+      </p:sp>
+      <p:sp>
+        <p:nvSpPr>
+          <p:cNvPr id="49" name="Text 43"/>
+          <p:cNvSpPr/>
+          <p:nvPr/>
+        </p:nvSpPr>
+        <p:spPr>
+          <a:xfrm>
+            <a:off x="45720" y="5047488"/>
+            <a:ext cx="2834640" cy="274320"/>
+          </a:xfrm>
+          <a:prstGeom prst="rect">
+            <a:avLst/>
+          </a:prstGeom>
+          <a:noFill/>
+          <a:ln/>
+        </p:spPr>
+        <p:txBody>
+          <a:bodyPr wrap="square" lIns="0" tIns="0" rIns="0" bIns="0" rtlCol="0" anchor="ctr"/>
+          <a:lstStyle/>
+          <a:p>
+            <a:pPr algn="ctr" indent="0" marL="0">
+              <a:buNone/>
+            </a:pPr>
+            <a:r>
+              <a:rPr lang="en-US" sz="1500" b="1" dirty="0">
+                <a:solidFill>
+                  <a:srgbClr val="17313B"/>
+                </a:solidFill>
+                <a:latin typeface="Malgun Gothic" pitchFamily="34" charset="0"/>
+                <a:ea typeface="Malgun Gothic" pitchFamily="34" charset="-122"/>
+                <a:cs typeface="Malgun Gothic" pitchFamily="34" charset="-120"/>
+              </a:rPr>
+              <a:t>90일 · 증명</a:t>
+            </a:r>
+            <a:endParaRPr lang="en-US" sz="1500" dirty="0"/>
+          </a:p>
+        </p:txBody>
+      </p:sp>
+      <p:sp>
+        <p:nvSpPr>
+          <p:cNvPr id="50" name="Text 44"/>
+          <p:cNvSpPr/>
+          <p:nvPr/>
+        </p:nvSpPr>
+        <p:spPr>
+          <a:xfrm>
+            <a:off x="-137160" y="5596128"/>
+            <a:ext cx="3200400" cy="256032"/>
+          </a:xfrm>
+          <a:prstGeom prst="rect">
+            <a:avLst/>
+          </a:prstGeom>
+          <a:noFill/>
+          <a:ln/>
+        </p:spPr>
+        <p:txBody>
+          <a:bodyPr wrap="square" lIns="0" tIns="0" rIns="0" bIns="0" rtlCol="0" anchor="ctr"/>
+          <a:lstStyle/>
+          <a:p>
+            <a:pPr algn="ctr" indent="0" marL="0">
+              <a:buNone/>
+            </a:pPr>
+            <a:r>
+              <a:rPr lang="en-US" sz="1150" dirty="0">
+                <a:solidFill>
+                  <a:srgbClr val="5A7184"/>
+                </a:solidFill>
+                <a:latin typeface="Malgun Gothic" pitchFamily="34" charset="0"/>
+                <a:ea typeface="Malgun Gothic" pitchFamily="34" charset="-122"/>
+                <a:cs typeface="Malgun Gothic" pitchFamily="34" charset="-120"/>
+              </a:rPr>
+              <a:t>Co-Design Pod 1호 · 시스템 모델 v0.1</a:t>
+            </a:r>
+            <a:endParaRPr lang="en-US" sz="1150" dirty="0"/>
+          </a:p>
+        </p:txBody>
+      </p:sp>
+      <p:sp>
+        <p:nvSpPr>
+          <p:cNvPr id="51" name="Shape 45"/>
+          <p:cNvSpPr/>
+          <p:nvPr/>
+        </p:nvSpPr>
+        <p:spPr>
+          <a:xfrm>
+            <a:off x="6016752" y="5349240"/>
+            <a:ext cx="164592" cy="164592"/>
+          </a:xfrm>
+          <a:prstGeom prst="ellipse">
+            <a:avLst/>
+          </a:prstGeom>
+          <a:solidFill>
+            <a:srgbClr val="028090"/>
+          </a:solidFill>
+          <a:ln/>
+        </p:spPr>
+      </p:sp>
+      <p:sp>
+        <p:nvSpPr>
+          <p:cNvPr id="52" name="Text 46"/>
+          <p:cNvSpPr/>
+          <p:nvPr/>
+        </p:nvSpPr>
+        <p:spPr>
+          <a:xfrm>
+            <a:off x="4681728" y="5047488"/>
+            <a:ext cx="2834640" cy="274320"/>
+          </a:xfrm>
+          <a:prstGeom prst="rect">
+            <a:avLst/>
+          </a:prstGeom>
+          <a:noFill/>
+          <a:ln/>
+        </p:spPr>
+        <p:txBody>
+          <a:bodyPr wrap="square" lIns="0" tIns="0" rIns="0" bIns="0" rtlCol="0" anchor="ctr"/>
+          <a:lstStyle/>
+          <a:p>
+            <a:pPr algn="ctr" indent="0" marL="0">
+              <a:buNone/>
+            </a:pPr>
+            <a:r>
+              <a:rPr lang="en-US" sz="1500" b="1" dirty="0">
+                <a:solidFill>
+                  <a:srgbClr val="17313B"/>
+                </a:solidFill>
+                <a:latin typeface="Malgun Gothic" pitchFamily="34" charset="0"/>
+                <a:ea typeface="Malgun Gothic" pitchFamily="34" charset="-122"/>
+                <a:cs typeface="Malgun Gothic" pitchFamily="34" charset="-120"/>
+              </a:rPr>
+              <a:t>1년 · 제도화</a:t>
+            </a:r>
+            <a:endParaRPr lang="en-US" sz="1500" dirty="0"/>
+          </a:p>
+        </p:txBody>
+      </p:sp>
+      <p:sp>
+        <p:nvSpPr>
+          <p:cNvPr id="53" name="Text 47"/>
+          <p:cNvSpPr/>
+          <p:nvPr/>
+        </p:nvSpPr>
+        <p:spPr>
+          <a:xfrm>
+            <a:off x="4498848" y="5596128"/>
+            <a:ext cx="3200400" cy="256032"/>
+          </a:xfrm>
+          <a:prstGeom prst="rect">
+            <a:avLst/>
+          </a:prstGeom>
+          <a:noFill/>
+          <a:ln/>
+        </p:spPr>
+        <p:txBody>
+          <a:bodyPr wrap="square" lIns="0" tIns="0" rIns="0" bIns="0" rtlCol="0" anchor="ctr"/>
+          <a:lstStyle/>
+          <a:p>
+            <a:pPr algn="ctr" indent="0" marL="0">
+              <a:buNone/>
+            </a:pPr>
+            <a:r>
+              <a:rPr lang="en-US" sz="1150" dirty="0">
+                <a:solidFill>
+                  <a:srgbClr val="5A7184"/>
+                </a:solidFill>
+                <a:latin typeface="Malgun Gothic" pitchFamily="34" charset="0"/>
+                <a:ea typeface="Malgun Gothic" pitchFamily="34" charset="-122"/>
+                <a:cs typeface="Malgun Gothic" pitchFamily="34" charset="-120"/>
+              </a:rPr>
+              <a:t>Pod 3~5개 · SCA형 계약 1건</a:t>
+            </a:r>
+            <a:endParaRPr lang="en-US" sz="1150" dirty="0"/>
+          </a:p>
+        </p:txBody>
+      </p:sp>
+      <p:sp>
+        <p:nvSpPr>
+          <p:cNvPr id="54" name="Shape 48"/>
+          <p:cNvSpPr/>
+          <p:nvPr/>
+        </p:nvSpPr>
+        <p:spPr>
+          <a:xfrm>
+            <a:off x="10643616" y="5349240"/>
+            <a:ext cx="164592" cy="164592"/>
+          </a:xfrm>
+          <a:prstGeom prst="ellipse">
+            <a:avLst/>
+          </a:prstGeom>
+          <a:solidFill>
+            <a:srgbClr val="028090"/>
+          </a:solidFill>
+          <a:ln/>
+        </p:spPr>
+      </p:sp>
+      <p:sp>
+        <p:nvSpPr>
+          <p:cNvPr id="55" name="Text 49"/>
+          <p:cNvSpPr/>
+          <p:nvPr/>
+        </p:nvSpPr>
+        <p:spPr>
+          <a:xfrm>
+            <a:off x="9308592" y="5047488"/>
+            <a:ext cx="2834640" cy="274320"/>
+          </a:xfrm>
+          <a:prstGeom prst="rect">
+            <a:avLst/>
+          </a:prstGeom>
+          <a:noFill/>
+          <a:ln/>
+        </p:spPr>
+        <p:txBody>
+          <a:bodyPr wrap="square" lIns="0" tIns="0" rIns="0" bIns="0" rtlCol="0" anchor="ctr"/>
+          <a:lstStyle/>
+          <a:p>
+            <a:pPr algn="ctr" indent="0" marL="0">
+              <a:buNone/>
+            </a:pPr>
+            <a:r>
+              <a:rPr lang="en-US" sz="1500" b="1" dirty="0">
+                <a:solidFill>
+                  <a:srgbClr val="17313B"/>
+                </a:solidFill>
+                <a:latin typeface="Malgun Gothic" pitchFamily="34" charset="0"/>
+                <a:ea typeface="Malgun Gothic" pitchFamily="34" charset="-122"/>
+                <a:cs typeface="Malgun Gothic" pitchFamily="34" charset="-120"/>
+              </a:rPr>
+              <a:t>3년 · 표준화</a:t>
+            </a:r>
+            <a:endParaRPr lang="en-US" sz="1500" dirty="0"/>
+          </a:p>
+        </p:txBody>
+      </p:sp>
+      <p:sp>
+        <p:nvSpPr>
+          <p:cNvPr id="56" name="Text 50"/>
+          <p:cNvSpPr/>
+          <p:nvPr/>
+        </p:nvSpPr>
+        <p:spPr>
+          <a:xfrm>
+            <a:off x="9125712" y="5596128"/>
+            <a:ext cx="3200400" cy="256032"/>
+          </a:xfrm>
+          <a:prstGeom prst="rect">
+            <a:avLst/>
+          </a:prstGeom>
+          <a:noFill/>
+          <a:ln/>
+        </p:spPr>
+        <p:txBody>
+          <a:bodyPr wrap="square" lIns="0" tIns="0" rIns="0" bIns="0" rtlCol="0" anchor="ctr"/>
+          <a:lstStyle/>
+          <a:p>
+            <a:pPr algn="ctr" indent="0" marL="0">
+              <a:buNone/>
+            </a:pPr>
+            <a:r>
+              <a:rPr lang="en-US" sz="1150" dirty="0">
+                <a:solidFill>
+                  <a:srgbClr val="5A7184"/>
+                </a:solidFill>
+                <a:latin typeface="Malgun Gothic" pitchFamily="34" charset="0"/>
+                <a:ea typeface="Malgun Gothic" pitchFamily="34" charset="-122"/>
+                <a:cs typeface="Malgun Gothic" pitchFamily="34" charset="-120"/>
+              </a:rPr>
               <a:t>설계 플랫폼 · 커스텀 매출 30%+</a:t>
             </a:r>
-            <a:endParaRPr lang="en-US" sz="1550" dirty="0"/>
+            <a:endParaRPr lang="en-US" sz="1150" dirty="0"/>
+          </a:p>
+        </p:txBody>
+      </p:sp>
+      <p:sp>
+        <p:nvSpPr>
+          <p:cNvPr id="57" name="Text 51"/>
+          <p:cNvSpPr/>
+          <p:nvPr/>
+        </p:nvSpPr>
+        <p:spPr>
+          <a:xfrm>
+            <a:off x="457200" y="6053328"/>
+            <a:ext cx="11274552" cy="274320"/>
+          </a:xfrm>
+          <a:prstGeom prst="rect">
+            <a:avLst/>
+          </a:prstGeom>
+          <a:noFill/>
+          <a:ln/>
+        </p:spPr>
+        <p:txBody>
+          <a:bodyPr wrap="square" lIns="0" tIns="0" rIns="0" bIns="0" rtlCol="0" anchor="ctr"/>
+          <a:lstStyle/>
+          <a:p>
+            <a:pPr algn="ctr" indent="0" marL="0">
+              <a:buNone/>
+            </a:pPr>
+            <a:r>
+              <a:rPr lang="en-US" sz="1200" dirty="0">
+                <a:solidFill>
+                  <a:srgbClr val="5A7184"/>
+                </a:solidFill>
+                <a:latin typeface="Malgun Gothic" pitchFamily="34" charset="0"/>
+                <a:ea typeface="Malgun Gothic" pitchFamily="34" charset="-122"/>
+                <a:cs typeface="Malgun Gothic" pitchFamily="34" charset="-120"/>
+              </a:rPr>
+              <a:t>SCA 16건 · 최소 계약매출 $100B · 예치금 $22B — Micron IR (2026-06)</a:t>
+            </a:r>
+            <a:endParaRPr lang="en-US" sz="1200" dirty="0"/>
           </a:p>
         </p:txBody>
       </p:sp>
@@ -3956,12 +6190,12 @@
         </p:nvSpPr>
         <p:spPr>
           <a:xfrm>
-            <a:off x="914400" y="1042416"/>
-            <a:ext cx="10360152" cy="969264"/>
+            <a:off x="914400" y="987552"/>
+            <a:ext cx="10360152" cy="932688"/>
           </a:xfrm>
           <a:prstGeom prst="roundRect">
             <a:avLst>
-              <a:gd name="adj" fmla="val 9434"/>
+              <a:gd name="adj" fmla="val 9804"/>
             </a:avLst>
           </a:prstGeom>
           <a:solidFill>
@@ -3978,7 +6212,7 @@
         </p:nvSpPr>
         <p:spPr>
           <a:xfrm>
-            <a:off x="1097280" y="1152144"/>
+            <a:off x="1097280" y="1078992"/>
             <a:ext cx="9994392" cy="475488"/>
           </a:xfrm>
           <a:prstGeom prst="rect">
@@ -4017,8 +6251,8 @@
         </p:nvSpPr>
         <p:spPr>
           <a:xfrm>
-            <a:off x="1097280" y="1627632"/>
-            <a:ext cx="9994392" cy="274320"/>
+            <a:off x="1097280" y="1554480"/>
+            <a:ext cx="9994392" cy="256032"/>
           </a:xfrm>
           <a:prstGeom prst="rect">
             <a:avLst/>
@@ -4056,48 +6290,175 @@
         </p:nvSpPr>
         <p:spPr>
           <a:xfrm>
-            <a:off x="457200" y="2340864"/>
-            <a:ext cx="3602736" cy="2743200"/>
+            <a:off x="2011680" y="2286000"/>
+            <a:ext cx="3200400" cy="1773936"/>
           </a:xfrm>
           <a:prstGeom prst="roundRect">
             <a:avLst>
-              <a:gd name="adj" fmla="val 3000"/>
+              <a:gd name="adj" fmla="val 5155"/>
             </a:avLst>
           </a:prstGeom>
           <a:solidFill>
-            <a:srgbClr val="EAF3FA"/>
-          </a:solidFill>
-          <a:ln/>
-        </p:spPr>
-      </p:sp>
-      <p:sp>
-        <p:nvSpPr>
-          <p:cNvPr id="10" name="Text 8"/>
-          <p:cNvSpPr/>
-          <p:nvPr/>
-        </p:nvSpPr>
-        <p:spPr>
-          <a:xfrm>
-            <a:off x="658368" y="2542032"/>
-            <a:ext cx="329184" cy="329184"/>
+            <a:srgbClr val="F3F6F8"/>
+          </a:solidFill>
+          <a:ln w="15875">
+            <a:solidFill>
+              <a:srgbClr val="D9E6EC"/>
+            </a:solidFill>
+            <a:prstDash val="solid"/>
+          </a:ln>
+        </p:spPr>
+      </p:sp>
+      <p:sp>
+        <p:nvSpPr>
+          <p:cNvPr id="10" name="Shape 8"/>
+          <p:cNvSpPr/>
+          <p:nvPr/>
+        </p:nvSpPr>
+        <p:spPr>
+          <a:xfrm>
+            <a:off x="3364992" y="2487168"/>
+            <a:ext cx="493776" cy="493776"/>
           </a:xfrm>
           <a:prstGeom prst="ellipse">
             <a:avLst/>
           </a:prstGeom>
           <a:solidFill>
-            <a:srgbClr val="0E6BA8"/>
-          </a:solidFill>
-          <a:ln/>
-        </p:spPr>
-        <p:txBody>
-          <a:bodyPr wrap="square" lIns="0" tIns="0" rIns="0" bIns="0" rtlCol="0" anchor="ctr"/>
-          <a:lstStyle/>
-          <a:p>
-            <a:pPr algn="ctr" indent="0" marL="0">
-              <a:buNone/>
-            </a:pPr>
-            <a:r>
-              <a:rPr lang="en-US" sz="1500" b="1" dirty="0">
+            <a:srgbClr val="5A7184"/>
+          </a:solidFill>
+          <a:ln/>
+        </p:spPr>
+      </p:sp>
+      <p:pic>
+        <p:nvPicPr>
+          <p:cNvPr id="11" name="Image 0" descr="preencoded.png">    </p:cNvPr>
+          <p:cNvPicPr>
+            <a:picLocks noChangeAspect="1"/>
+          </p:cNvPicPr>
+          <p:nvPr/>
+        </p:nvPicPr>
+        <p:blipFill>
+          <a:blip r:embed="rId1"/>
+          <a:stretch>
+            <a:fillRect/>
+          </a:stretch>
+        </p:blipFill>
+        <p:spPr>
+          <a:xfrm>
+            <a:off x="3483498" y="2605674"/>
+            <a:ext cx="256764" cy="256764"/>
+          </a:xfrm>
+          <a:prstGeom prst="rect">
+            <a:avLst/>
+          </a:prstGeom>
+        </p:spPr>
+      </p:pic>
+      <p:sp>
+        <p:nvSpPr>
+          <p:cNvPr id="12" name="Text 9"/>
+          <p:cNvSpPr/>
+          <p:nvPr/>
+        </p:nvSpPr>
+        <p:spPr>
+          <a:xfrm>
+            <a:off x="2103120" y="3054096"/>
+            <a:ext cx="3017520" cy="365760"/>
+          </a:xfrm>
+          <a:prstGeom prst="rect">
+            <a:avLst/>
+          </a:prstGeom>
+          <a:noFill/>
+          <a:ln/>
+        </p:spPr>
+        <p:txBody>
+          <a:bodyPr wrap="square" lIns="0" tIns="0" rIns="0" bIns="0" rtlCol="0" anchor="ctr"/>
+          <a:lstStyle/>
+          <a:p>
+            <a:pPr algn="ctr" indent="0" marL="0">
+              <a:buNone/>
+            </a:pPr>
+            <a:r>
+              <a:rPr lang="en-US" sz="2200" b="1" dirty="0">
+                <a:solidFill>
+                  <a:srgbClr val="5A7184"/>
+                </a:solidFill>
+                <a:latin typeface="Malgun Gothic" pitchFamily="34" charset="0"/>
+                <a:ea typeface="Malgun Gothic" pitchFamily="34" charset="-122"/>
+                <a:cs typeface="Malgun Gothic" pitchFamily="34" charset="-120"/>
+              </a:rPr>
+              <a:t>수주 이행자</a:t>
+            </a:r>
+            <a:endParaRPr lang="en-US" sz="2200" dirty="0"/>
+          </a:p>
+        </p:txBody>
+      </p:sp>
+      <p:sp>
+        <p:nvSpPr>
+          <p:cNvPr id="13" name="Text 10"/>
+          <p:cNvSpPr/>
+          <p:nvPr/>
+        </p:nvSpPr>
+        <p:spPr>
+          <a:xfrm>
+            <a:off x="2103120" y="3474720"/>
+            <a:ext cx="3017520" cy="274320"/>
+          </a:xfrm>
+          <a:prstGeom prst="rect">
+            <a:avLst/>
+          </a:prstGeom>
+          <a:noFill/>
+          <a:ln/>
+        </p:spPr>
+        <p:txBody>
+          <a:bodyPr wrap="square" lIns="0" tIns="0" rIns="0" bIns="0" rtlCol="0" anchor="ctr"/>
+          <a:lstStyle/>
+          <a:p>
+            <a:pPr algn="ctr" indent="0" marL="0">
+              <a:buNone/>
+            </a:pPr>
+            <a:r>
+              <a:rPr lang="en-US" sz="1300" dirty="0">
+                <a:solidFill>
+                  <a:srgbClr val="5A7184"/>
+                </a:solidFill>
+                <a:latin typeface="Malgun Gothic" pitchFamily="34" charset="0"/>
+                <a:ea typeface="Malgun Gothic" pitchFamily="34" charset="-122"/>
+                <a:cs typeface="Malgun Gothic" pitchFamily="34" charset="-120"/>
+              </a:rPr>
+              <a:t>스펙 수령 · RFQ 응답 · QCD</a:t>
+            </a:r>
+            <a:endParaRPr lang="en-US" sz="1300" dirty="0"/>
+          </a:p>
+        </p:txBody>
+      </p:sp>
+      <p:sp>
+        <p:nvSpPr>
+          <p:cNvPr id="14" name="Text 11"/>
+          <p:cNvSpPr/>
+          <p:nvPr/>
+        </p:nvSpPr>
+        <p:spPr>
+          <a:xfrm>
+            <a:off x="5349240" y="2761488"/>
+            <a:ext cx="1463040" cy="822960"/>
+          </a:xfrm>
+          <a:prstGeom prst="rightArrow">
+            <a:avLst/>
+          </a:prstGeom>
+          <a:solidFill>
+            <a:srgbClr val="028090"/>
+          </a:solidFill>
+          <a:ln/>
+        </p:spPr>
+        <p:txBody>
+          <a:bodyPr wrap="square" lIns="0" tIns="0" rIns="0" bIns="0" rtlCol="0" anchor="ctr"/>
+          <a:lstStyle/>
+          <a:p>
+            <a:pPr algn="ctr" indent="0" marL="0">
+              <a:buNone/>
+            </a:pPr>
+            <a:r>
+              <a:rPr lang="en-US" sz="1300" b="1" dirty="0">
                 <a:solidFill>
                   <a:srgbClr val="FFFFFF"/>
                 </a:solidFill>
@@ -4105,218 +6466,148 @@
                 <a:ea typeface="Malgun Gothic" pitchFamily="34" charset="-122"/>
                 <a:cs typeface="Malgun Gothic" pitchFamily="34" charset="-120"/>
               </a:rPr>
-              <a:t>1</a:t>
-            </a:r>
-            <a:endParaRPr lang="en-US" sz="1500" dirty="0"/>
-          </a:p>
-        </p:txBody>
-      </p:sp>
-      <p:sp>
-        <p:nvSpPr>
-          <p:cNvPr id="11" name="Text 9"/>
-          <p:cNvSpPr/>
-          <p:nvPr/>
-        </p:nvSpPr>
-        <p:spPr>
-          <a:xfrm>
-            <a:off x="1097280" y="2514600"/>
-            <a:ext cx="2779776" cy="384048"/>
-          </a:xfrm>
-          <a:prstGeom prst="rect">
-            <a:avLst/>
-          </a:prstGeom>
-          <a:noFill/>
-          <a:ln/>
-        </p:spPr>
-        <p:txBody>
-          <a:bodyPr wrap="square" lIns="0" tIns="0" rIns="0" bIns="0" rtlCol="0" anchor="ctr"/>
-          <a:lstStyle/>
-          <a:p>
-            <a:pPr indent="0" marL="0">
-              <a:buNone/>
-            </a:pPr>
-            <a:r>
-              <a:rPr lang="en-US" sz="2100" b="1" dirty="0">
-                <a:solidFill>
-                  <a:srgbClr val="0E6BA8"/>
-                </a:solidFill>
-                <a:latin typeface="Malgun Gothic" pitchFamily="34" charset="0"/>
-                <a:ea typeface="Malgun Gothic" pitchFamily="34" charset="-122"/>
-                <a:cs typeface="Malgun Gothic" pitchFamily="34" charset="-120"/>
-              </a:rPr>
-              <a:t>왜 지금인가</a:t>
-            </a:r>
-            <a:endParaRPr lang="en-US" sz="2100" dirty="0"/>
-          </a:p>
-        </p:txBody>
-      </p:sp>
-      <p:sp>
-        <p:nvSpPr>
-          <p:cNvPr id="12" name="Text 10"/>
-          <p:cNvSpPr/>
-          <p:nvPr/>
-        </p:nvSpPr>
-        <p:spPr>
-          <a:xfrm>
-            <a:off x="694944" y="3072384"/>
-            <a:ext cx="3127248" cy="1828800"/>
-          </a:xfrm>
-          <a:prstGeom prst="rect">
-            <a:avLst/>
-          </a:prstGeom>
-          <a:noFill/>
-          <a:ln/>
-        </p:spPr>
-        <p:txBody>
-          <a:bodyPr wrap="square" lIns="0" tIns="0" rIns="0" bIns="0" rtlCol="0" anchor="t"/>
-          <a:lstStyle/>
-          <a:p>
-            <a:pPr indent="0" marL="0">
-              <a:buNone/>
-            </a:pPr>
-            <a:r>
-              <a:rPr lang="en-US" sz="2100" dirty="0">
-                <a:solidFill>
-                  <a:srgbClr val="17313B"/>
-                </a:solidFill>
-                <a:latin typeface="Malgun Gothic" pitchFamily="34" charset="0"/>
-                <a:ea typeface="Malgun Gothic" pitchFamily="34" charset="-122"/>
-                <a:cs typeface="Malgun Gothic" pitchFamily="34" charset="-120"/>
-              </a:rPr>
-              <a:t>계약이 LTA→SCA로 진화 — 물량·가격이 아니라 공동설계 역량이 수주를 결정한다</a:t>
-            </a:r>
-            <a:endParaRPr lang="en-US" sz="2100" dirty="0"/>
-          </a:p>
-        </p:txBody>
-      </p:sp>
-      <p:sp>
-        <p:nvSpPr>
-          <p:cNvPr id="13" name="Shape 11"/>
-          <p:cNvSpPr/>
-          <p:nvPr/>
-        </p:nvSpPr>
-        <p:spPr>
-          <a:xfrm>
-            <a:off x="4297680" y="2340864"/>
-            <a:ext cx="3602736" cy="2743200"/>
+              <a:t>LTA → SCA</a:t>
+            </a:r>
+            <a:endParaRPr lang="en-US" sz="1300" dirty="0"/>
+          </a:p>
+        </p:txBody>
+      </p:sp>
+      <p:sp>
+        <p:nvSpPr>
+          <p:cNvPr id="15" name="Shape 12"/>
+          <p:cNvSpPr/>
+          <p:nvPr/>
+        </p:nvSpPr>
+        <p:spPr>
+          <a:xfrm>
+            <a:off x="6949440" y="2286000"/>
+            <a:ext cx="3200400" cy="1773936"/>
           </a:xfrm>
           <a:prstGeom prst="roundRect">
             <a:avLst>
-              <a:gd name="adj" fmla="val 3000"/>
+              <a:gd name="adj" fmla="val 5155"/>
             </a:avLst>
           </a:prstGeom>
           <a:solidFill>
-            <a:srgbClr val="E6F4F4"/>
-          </a:solidFill>
-          <a:ln/>
-        </p:spPr>
-      </p:sp>
-      <p:sp>
-        <p:nvSpPr>
-          <p:cNvPr id="14" name="Text 12"/>
-          <p:cNvSpPr/>
-          <p:nvPr/>
-        </p:nvSpPr>
-        <p:spPr>
-          <a:xfrm>
-            <a:off x="4498848" y="2542032"/>
-            <a:ext cx="329184" cy="329184"/>
+            <a:srgbClr val="E8F6F0"/>
+          </a:solidFill>
+          <a:ln w="19050">
+            <a:solidFill>
+              <a:srgbClr val="02A878"/>
+            </a:solidFill>
+            <a:prstDash val="solid"/>
+          </a:ln>
+        </p:spPr>
+      </p:sp>
+      <p:sp>
+        <p:nvSpPr>
+          <p:cNvPr id="16" name="Shape 13"/>
+          <p:cNvSpPr/>
+          <p:nvPr/>
+        </p:nvSpPr>
+        <p:spPr>
+          <a:xfrm>
+            <a:off x="8302752" y="2487168"/>
+            <a:ext cx="493776" cy="493776"/>
           </a:xfrm>
           <a:prstGeom prst="ellipse">
             <a:avLst/>
           </a:prstGeom>
           <a:solidFill>
-            <a:srgbClr val="028090"/>
-          </a:solidFill>
-          <a:ln/>
-        </p:spPr>
-        <p:txBody>
-          <a:bodyPr wrap="square" lIns="0" tIns="0" rIns="0" bIns="0" rtlCol="0" anchor="ctr"/>
-          <a:lstStyle/>
-          <a:p>
-            <a:pPr algn="ctr" indent="0" marL="0">
-              <a:buNone/>
-            </a:pPr>
-            <a:r>
-              <a:rPr lang="en-US" sz="1500" b="1" dirty="0">
-                <a:solidFill>
-                  <a:srgbClr val="FFFFFF"/>
-                </a:solidFill>
-                <a:latin typeface="Malgun Gothic" pitchFamily="34" charset="0"/>
-                <a:ea typeface="Malgun Gothic" pitchFamily="34" charset="-122"/>
-                <a:cs typeface="Malgun Gothic" pitchFamily="34" charset="-120"/>
-              </a:rPr>
-              <a:t>2</a:t>
-            </a:r>
-            <a:endParaRPr lang="en-US" sz="1500" dirty="0"/>
-          </a:p>
-        </p:txBody>
-      </p:sp>
-      <p:sp>
-        <p:nvSpPr>
-          <p:cNvPr id="15" name="Text 13"/>
-          <p:cNvSpPr/>
-          <p:nvPr/>
-        </p:nvSpPr>
-        <p:spPr>
-          <a:xfrm>
-            <a:off x="4937760" y="2514600"/>
-            <a:ext cx="2779776" cy="384048"/>
-          </a:xfrm>
-          <a:prstGeom prst="rect">
-            <a:avLst/>
-          </a:prstGeom>
-          <a:noFill/>
-          <a:ln/>
-        </p:spPr>
-        <p:txBody>
-          <a:bodyPr wrap="square" lIns="0" tIns="0" rIns="0" bIns="0" rtlCol="0" anchor="ctr"/>
-          <a:lstStyle/>
-          <a:p>
-            <a:pPr indent="0" marL="0">
-              <a:buNone/>
-            </a:pPr>
-            <a:r>
-              <a:rPr lang="en-US" sz="2100" b="1" dirty="0">
-                <a:solidFill>
-                  <a:srgbClr val="028090"/>
-                </a:solidFill>
-                <a:latin typeface="Malgun Gothic" pitchFamily="34" charset="0"/>
-                <a:ea typeface="Malgun Gothic" pitchFamily="34" charset="-122"/>
-                <a:cs typeface="Malgun Gothic" pitchFamily="34" charset="-120"/>
-              </a:rPr>
-              <a:t>무엇이 되나</a:t>
-            </a:r>
-            <a:endParaRPr lang="en-US" sz="2100" dirty="0"/>
-          </a:p>
-        </p:txBody>
-      </p:sp>
-      <p:sp>
-        <p:nvSpPr>
-          <p:cNvPr id="16" name="Text 14"/>
-          <p:cNvSpPr/>
-          <p:nvPr/>
-        </p:nvSpPr>
-        <p:spPr>
-          <a:xfrm>
-            <a:off x="4535424" y="3072384"/>
-            <a:ext cx="3127248" cy="1828800"/>
-          </a:xfrm>
-          <a:prstGeom prst="rect">
-            <a:avLst/>
-          </a:prstGeom>
-          <a:noFill/>
-          <a:ln/>
-        </p:spPr>
-        <p:txBody>
-          <a:bodyPr wrap="square" lIns="0" tIns="0" rIns="0" bIns="0" rtlCol="0" anchor="t"/>
-          <a:lstStyle/>
-          <a:p>
-            <a:pPr indent="0" marL="0">
-              <a:buNone/>
-            </a:pPr>
-            <a:r>
-              <a:rPr lang="en-US" sz="2100" dirty="0">
+            <a:srgbClr val="02A878"/>
+          </a:solidFill>
+          <a:ln/>
+        </p:spPr>
+      </p:sp>
+      <p:pic>
+        <p:nvPicPr>
+          <p:cNvPr id="17" name="Image 1" descr="preencoded.png">    </p:cNvPr>
+          <p:cNvPicPr>
+            <a:picLocks noChangeAspect="1"/>
+          </p:cNvPicPr>
+          <p:nvPr/>
+        </p:nvPicPr>
+        <p:blipFill>
+          <a:blip r:embed="rId2"/>
+          <a:stretch>
+            <a:fillRect/>
+          </a:stretch>
+        </p:blipFill>
+        <p:spPr>
+          <a:xfrm>
+            <a:off x="8421258" y="2605674"/>
+            <a:ext cx="256764" cy="256764"/>
+          </a:xfrm>
+          <a:prstGeom prst="rect">
+            <a:avLst/>
+          </a:prstGeom>
+        </p:spPr>
+      </p:pic>
+      <p:sp>
+        <p:nvSpPr>
+          <p:cNvPr id="18" name="Text 14"/>
+          <p:cNvSpPr/>
+          <p:nvPr/>
+        </p:nvSpPr>
+        <p:spPr>
+          <a:xfrm>
+            <a:off x="7040880" y="3054096"/>
+            <a:ext cx="3017520" cy="365760"/>
+          </a:xfrm>
+          <a:prstGeom prst="rect">
+            <a:avLst/>
+          </a:prstGeom>
+          <a:noFill/>
+          <a:ln/>
+        </p:spPr>
+        <p:txBody>
+          <a:bodyPr wrap="square" lIns="0" tIns="0" rIns="0" bIns="0" rtlCol="0" anchor="ctr"/>
+          <a:lstStyle/>
+          <a:p>
+            <a:pPr algn="ctr" indent="0" marL="0">
+              <a:buNone/>
+            </a:pPr>
+            <a:r>
+              <a:rPr lang="en-US" sz="2200" b="1" dirty="0">
+                <a:solidFill>
+                  <a:srgbClr val="02A878"/>
+                </a:solidFill>
+                <a:latin typeface="Malgun Gothic" pitchFamily="34" charset="0"/>
+                <a:ea typeface="Malgun Gothic" pitchFamily="34" charset="-122"/>
+                <a:cs typeface="Malgun Gothic" pitchFamily="34" charset="-120"/>
+              </a:rPr>
+              <a:t>기술 파트너</a:t>
+            </a:r>
+            <a:endParaRPr lang="en-US" sz="2200" dirty="0"/>
+          </a:p>
+        </p:txBody>
+      </p:sp>
+      <p:sp>
+        <p:nvSpPr>
+          <p:cNvPr id="19" name="Text 15"/>
+          <p:cNvSpPr/>
+          <p:nvPr/>
+        </p:nvSpPr>
+        <p:spPr>
+          <a:xfrm>
+            <a:off x="6949440" y="3474720"/>
+            <a:ext cx="3200400" cy="274320"/>
+          </a:xfrm>
+          <a:prstGeom prst="rect">
+            <a:avLst/>
+          </a:prstGeom>
+          <a:noFill/>
+          <a:ln/>
+        </p:spPr>
+        <p:txBody>
+          <a:bodyPr wrap="square" lIns="0" tIns="0" rIns="0" bIns="0" rtlCol="0" anchor="ctr"/>
+          <a:lstStyle/>
+          <a:p>
+            <a:pPr algn="ctr" indent="0" marL="0">
+              <a:buNone/>
+            </a:pPr>
+            <a:r>
+              <a:rPr lang="en-US" sz="1300" dirty="0">
                 <a:solidFill>
                   <a:srgbClr val="17313B"/>
                 </a:solidFill>
@@ -4324,44 +6615,45 @@
                 <a:ea typeface="Malgun Gothic" pitchFamily="34" charset="-122"/>
                 <a:cs typeface="Malgun Gothic" pitchFamily="34" charset="-120"/>
               </a:rPr>
-              <a:t>수주 이행자 → 기술 파트너 — 요구사항을 공동 정의하고, 먼저 제안한다</a:t>
-            </a:r>
-            <a:endParaRPr lang="en-US" sz="2100" dirty="0"/>
-          </a:p>
-        </p:txBody>
-      </p:sp>
-      <p:sp>
-        <p:nvSpPr>
-          <p:cNvPr id="17" name="Shape 15"/>
-          <p:cNvSpPr/>
-          <p:nvPr/>
-        </p:nvSpPr>
-        <p:spPr>
-          <a:xfrm>
-            <a:off x="8138160" y="2340864"/>
-            <a:ext cx="3602736" cy="2743200"/>
-          </a:xfrm>
-          <a:prstGeom prst="roundRect">
-            <a:avLst>
-              <a:gd name="adj" fmla="val 3000"/>
-            </a:avLst>
-          </a:prstGeom>
-          <a:solidFill>
-            <a:srgbClr val="E8F6F0"/>
-          </a:solidFill>
-          <a:ln/>
-        </p:spPr>
-      </p:sp>
-      <p:sp>
-        <p:nvSpPr>
-          <p:cNvPr id="18" name="Text 16"/>
-          <p:cNvSpPr/>
-          <p:nvPr/>
-        </p:nvSpPr>
-        <p:spPr>
-          <a:xfrm>
-            <a:off x="8339328" y="2542032"/>
-            <a:ext cx="329184" cy="329184"/>
+              <a:t>요구 공동 정의 · 선제 제안 · 시스템 모델</a:t>
+            </a:r>
+            <a:endParaRPr lang="en-US" sz="1300" dirty="0"/>
+          </a:p>
+        </p:txBody>
+      </p:sp>
+      <p:sp>
+        <p:nvSpPr>
+          <p:cNvPr id="20" name="Shape 16"/>
+          <p:cNvSpPr/>
+          <p:nvPr/>
+        </p:nvSpPr>
+        <p:spPr>
+          <a:xfrm>
+            <a:off x="2468880" y="4901184"/>
+            <a:ext cx="7251192" cy="0"/>
+          </a:xfrm>
+          <a:prstGeom prst="line">
+            <a:avLst/>
+          </a:prstGeom>
+          <a:noFill/>
+          <a:ln w="25400">
+            <a:solidFill>
+              <a:srgbClr val="02A878"/>
+            </a:solidFill>
+            <a:prstDash val="solid"/>
+          </a:ln>
+        </p:spPr>
+      </p:sp>
+      <p:sp>
+        <p:nvSpPr>
+          <p:cNvPr id="21" name="Shape 17"/>
+          <p:cNvSpPr/>
+          <p:nvPr/>
+        </p:nvSpPr>
+        <p:spPr>
+          <a:xfrm>
+            <a:off x="2377440" y="4809744"/>
+            <a:ext cx="182880" cy="182880"/>
           </a:xfrm>
           <a:prstGeom prst="ellipse">
             <a:avLst/>
@@ -4371,93 +6663,33 @@
           </a:solidFill>
           <a:ln/>
         </p:spPr>
-        <p:txBody>
-          <a:bodyPr wrap="square" lIns="0" tIns="0" rIns="0" bIns="0" rtlCol="0" anchor="ctr"/>
-          <a:lstStyle/>
-          <a:p>
-            <a:pPr algn="ctr" indent="0" marL="0">
-              <a:buNone/>
-            </a:pPr>
-            <a:r>
-              <a:rPr lang="en-US" sz="1500" b="1" dirty="0">
-                <a:solidFill>
-                  <a:srgbClr val="FFFFFF"/>
-                </a:solidFill>
-                <a:latin typeface="Malgun Gothic" pitchFamily="34" charset="0"/>
-                <a:ea typeface="Malgun Gothic" pitchFamily="34" charset="-122"/>
-                <a:cs typeface="Malgun Gothic" pitchFamily="34" charset="-120"/>
-              </a:rPr>
-              <a:t>3</a:t>
-            </a:r>
-            <a:endParaRPr lang="en-US" sz="1500" dirty="0"/>
-          </a:p>
-        </p:txBody>
-      </p:sp>
-      <p:sp>
-        <p:nvSpPr>
-          <p:cNvPr id="19" name="Text 17"/>
-          <p:cNvSpPr/>
-          <p:nvPr/>
-        </p:nvSpPr>
-        <p:spPr>
-          <a:xfrm>
-            <a:off x="8778240" y="2514600"/>
-            <a:ext cx="2779776" cy="384048"/>
-          </a:xfrm>
-          <a:prstGeom prst="rect">
-            <a:avLst/>
-          </a:prstGeom>
-          <a:noFill/>
-          <a:ln/>
-        </p:spPr>
-        <p:txBody>
-          <a:bodyPr wrap="square" lIns="0" tIns="0" rIns="0" bIns="0" rtlCol="0" anchor="ctr"/>
-          <a:lstStyle/>
-          <a:p>
-            <a:pPr indent="0" marL="0">
-              <a:buNone/>
-            </a:pPr>
-            <a:r>
-              <a:rPr lang="en-US" sz="2100" b="1" dirty="0">
-                <a:solidFill>
-                  <a:srgbClr val="02A878"/>
-                </a:solidFill>
-                <a:latin typeface="Malgun Gothic" pitchFamily="34" charset="0"/>
-                <a:ea typeface="Malgun Gothic" pitchFamily="34" charset="-122"/>
-                <a:cs typeface="Malgun Gothic" pitchFamily="34" charset="-120"/>
-              </a:rPr>
-              <a:t>어떻게 하나</a:t>
-            </a:r>
-            <a:endParaRPr lang="en-US" sz="2100" dirty="0"/>
-          </a:p>
-        </p:txBody>
-      </p:sp>
-      <p:sp>
-        <p:nvSpPr>
-          <p:cNvPr id="20" name="Text 18"/>
-          <p:cNvSpPr/>
-          <p:nvPr/>
-        </p:nvSpPr>
-        <p:spPr>
-          <a:xfrm>
-            <a:off x="8375904" y="3072384"/>
-            <a:ext cx="3127248" cy="1828800"/>
-          </a:xfrm>
-          <a:prstGeom prst="rect">
-            <a:avLst/>
-          </a:prstGeom>
-          <a:noFill/>
-          <a:ln/>
-        </p:spPr>
-        <p:txBody>
-          <a:bodyPr wrap="square" lIns="0" tIns="0" rIns="0" bIns="0" rtlCol="0" anchor="t"/>
-          <a:lstStyle/>
-          <a:p>
-            <a:pPr indent="0" marL="0">
-              <a:buNone/>
-            </a:pPr>
-            <a:r>
-              <a:rPr lang="en-US" sz="2100" dirty="0">
+      </p:sp>
+      <p:sp>
+        <p:nvSpPr>
+          <p:cNvPr id="22" name="Text 18"/>
+          <p:cNvSpPr/>
+          <p:nvPr/>
+        </p:nvSpPr>
+        <p:spPr>
+          <a:xfrm>
+            <a:off x="1188720" y="4480560"/>
+            <a:ext cx="2560320" cy="292608"/>
+          </a:xfrm>
+          <a:prstGeom prst="rect">
+            <a:avLst/>
+          </a:prstGeom>
+          <a:noFill/>
+          <a:ln/>
+        </p:spPr>
+        <p:txBody>
+          <a:bodyPr wrap="square" lIns="0" tIns="0" rIns="0" bIns="0" rtlCol="0" anchor="ctr"/>
+          <a:lstStyle/>
+          <a:p>
+            <a:pPr algn="ctr" indent="0" marL="0">
+              <a:buNone/>
+            </a:pPr>
+            <a:r>
+              <a:rPr lang="en-US" sz="1600" b="1" dirty="0">
                 <a:solidFill>
                   <a:srgbClr val="17313B"/>
                 </a:solidFill>
@@ -4465,21 +6697,256 @@
                 <a:ea typeface="Malgun Gothic" pitchFamily="34" charset="-122"/>
                 <a:cs typeface="Malgun Gothic" pitchFamily="34" charset="-120"/>
               </a:rPr>
-              <a:t>기술·문화·조직·일하는 방식 4대 축 — 90일 증명 → 1년 제도화 → 3년 표준화</a:t>
-            </a:r>
-            <a:endParaRPr lang="en-US" sz="2100" dirty="0"/>
-          </a:p>
-        </p:txBody>
-      </p:sp>
-      <p:sp>
-        <p:nvSpPr>
-          <p:cNvPr id="21" name="Text 19"/>
-          <p:cNvSpPr/>
-          <p:nvPr/>
-        </p:nvSpPr>
-        <p:spPr>
-          <a:xfrm>
-            <a:off x="457200" y="5541264"/>
+              <a:t>90일 증명</a:t>
+            </a:r>
+            <a:endParaRPr lang="en-US" sz="1600" dirty="0"/>
+          </a:p>
+        </p:txBody>
+      </p:sp>
+      <p:sp>
+        <p:nvSpPr>
+          <p:cNvPr id="23" name="Text 19"/>
+          <p:cNvSpPr/>
+          <p:nvPr/>
+        </p:nvSpPr>
+        <p:spPr>
+          <a:xfrm>
+            <a:off x="1097280" y="5084064"/>
+            <a:ext cx="2743200" cy="256032"/>
+          </a:xfrm>
+          <a:prstGeom prst="rect">
+            <a:avLst/>
+          </a:prstGeom>
+          <a:noFill/>
+          <a:ln/>
+        </p:spPr>
+        <p:txBody>
+          <a:bodyPr wrap="square" lIns="0" tIns="0" rIns="0" bIns="0" rtlCol="0" anchor="ctr"/>
+          <a:lstStyle/>
+          <a:p>
+            <a:pPr algn="ctr" indent="0" marL="0">
+              <a:buNone/>
+            </a:pPr>
+            <a:r>
+              <a:rPr lang="en-US" sz="1200" dirty="0">
+                <a:solidFill>
+                  <a:srgbClr val="5A7184"/>
+                </a:solidFill>
+                <a:latin typeface="Malgun Gothic" pitchFamily="34" charset="0"/>
+                <a:ea typeface="Malgun Gothic" pitchFamily="34" charset="-122"/>
+                <a:cs typeface="Malgun Gothic" pitchFamily="34" charset="-120"/>
+              </a:rPr>
+              <a:t>Pod 1호 · 모델 v0.1</a:t>
+            </a:r>
+            <a:endParaRPr lang="en-US" sz="1200" dirty="0"/>
+          </a:p>
+        </p:txBody>
+      </p:sp>
+      <p:sp>
+        <p:nvSpPr>
+          <p:cNvPr id="24" name="Shape 20"/>
+          <p:cNvSpPr/>
+          <p:nvPr/>
+        </p:nvSpPr>
+        <p:spPr>
+          <a:xfrm>
+            <a:off x="6007608" y="4809744"/>
+            <a:ext cx="182880" cy="182880"/>
+          </a:xfrm>
+          <a:prstGeom prst="ellipse">
+            <a:avLst/>
+          </a:prstGeom>
+          <a:solidFill>
+            <a:srgbClr val="02A878"/>
+          </a:solidFill>
+          <a:ln/>
+        </p:spPr>
+      </p:sp>
+      <p:sp>
+        <p:nvSpPr>
+          <p:cNvPr id="25" name="Text 21"/>
+          <p:cNvSpPr/>
+          <p:nvPr/>
+        </p:nvSpPr>
+        <p:spPr>
+          <a:xfrm>
+            <a:off x="4818888" y="4480560"/>
+            <a:ext cx="2560320" cy="292608"/>
+          </a:xfrm>
+          <a:prstGeom prst="rect">
+            <a:avLst/>
+          </a:prstGeom>
+          <a:noFill/>
+          <a:ln/>
+        </p:spPr>
+        <p:txBody>
+          <a:bodyPr wrap="square" lIns="0" tIns="0" rIns="0" bIns="0" rtlCol="0" anchor="ctr"/>
+          <a:lstStyle/>
+          <a:p>
+            <a:pPr algn="ctr" indent="0" marL="0">
+              <a:buNone/>
+            </a:pPr>
+            <a:r>
+              <a:rPr lang="en-US" sz="1600" b="1" dirty="0">
+                <a:solidFill>
+                  <a:srgbClr val="17313B"/>
+                </a:solidFill>
+                <a:latin typeface="Malgun Gothic" pitchFamily="34" charset="0"/>
+                <a:ea typeface="Malgun Gothic" pitchFamily="34" charset="-122"/>
+                <a:cs typeface="Malgun Gothic" pitchFamily="34" charset="-120"/>
+              </a:rPr>
+              <a:t>1년 제도화</a:t>
+            </a:r>
+            <a:endParaRPr lang="en-US" sz="1600" dirty="0"/>
+          </a:p>
+        </p:txBody>
+      </p:sp>
+      <p:sp>
+        <p:nvSpPr>
+          <p:cNvPr id="26" name="Text 22"/>
+          <p:cNvSpPr/>
+          <p:nvPr/>
+        </p:nvSpPr>
+        <p:spPr>
+          <a:xfrm>
+            <a:off x="4727448" y="5084064"/>
+            <a:ext cx="2743200" cy="256032"/>
+          </a:xfrm>
+          <a:prstGeom prst="rect">
+            <a:avLst/>
+          </a:prstGeom>
+          <a:noFill/>
+          <a:ln/>
+        </p:spPr>
+        <p:txBody>
+          <a:bodyPr wrap="square" lIns="0" tIns="0" rIns="0" bIns="0" rtlCol="0" anchor="ctr"/>
+          <a:lstStyle/>
+          <a:p>
+            <a:pPr algn="ctr" indent="0" marL="0">
+              <a:buNone/>
+            </a:pPr>
+            <a:r>
+              <a:rPr lang="en-US" sz="1200" dirty="0">
+                <a:solidFill>
+                  <a:srgbClr val="5A7184"/>
+                </a:solidFill>
+                <a:latin typeface="Malgun Gothic" pitchFamily="34" charset="0"/>
+                <a:ea typeface="Malgun Gothic" pitchFamily="34" charset="-122"/>
+                <a:cs typeface="Malgun Gothic" pitchFamily="34" charset="-120"/>
+              </a:rPr>
+              <a:t>Pod 3~5 · SCA 1건</a:t>
+            </a:r>
+            <a:endParaRPr lang="en-US" sz="1200" dirty="0"/>
+          </a:p>
+        </p:txBody>
+      </p:sp>
+      <p:sp>
+        <p:nvSpPr>
+          <p:cNvPr id="27" name="Shape 23"/>
+          <p:cNvSpPr/>
+          <p:nvPr/>
+        </p:nvSpPr>
+        <p:spPr>
+          <a:xfrm>
+            <a:off x="9628632" y="4809744"/>
+            <a:ext cx="182880" cy="182880"/>
+          </a:xfrm>
+          <a:prstGeom prst="ellipse">
+            <a:avLst/>
+          </a:prstGeom>
+          <a:solidFill>
+            <a:srgbClr val="02A878"/>
+          </a:solidFill>
+          <a:ln/>
+        </p:spPr>
+      </p:sp>
+      <p:sp>
+        <p:nvSpPr>
+          <p:cNvPr id="28" name="Text 24"/>
+          <p:cNvSpPr/>
+          <p:nvPr/>
+        </p:nvSpPr>
+        <p:spPr>
+          <a:xfrm>
+            <a:off x="8439912" y="4480560"/>
+            <a:ext cx="2560320" cy="292608"/>
+          </a:xfrm>
+          <a:prstGeom prst="rect">
+            <a:avLst/>
+          </a:prstGeom>
+          <a:noFill/>
+          <a:ln/>
+        </p:spPr>
+        <p:txBody>
+          <a:bodyPr wrap="square" lIns="0" tIns="0" rIns="0" bIns="0" rtlCol="0" anchor="ctr"/>
+          <a:lstStyle/>
+          <a:p>
+            <a:pPr algn="ctr" indent="0" marL="0">
+              <a:buNone/>
+            </a:pPr>
+            <a:r>
+              <a:rPr lang="en-US" sz="1600" b="1" dirty="0">
+                <a:solidFill>
+                  <a:srgbClr val="17313B"/>
+                </a:solidFill>
+                <a:latin typeface="Malgun Gothic" pitchFamily="34" charset="0"/>
+                <a:ea typeface="Malgun Gothic" pitchFamily="34" charset="-122"/>
+                <a:cs typeface="Malgun Gothic" pitchFamily="34" charset="-120"/>
+              </a:rPr>
+              <a:t>3년 표준화</a:t>
+            </a:r>
+            <a:endParaRPr lang="en-US" sz="1600" dirty="0"/>
+          </a:p>
+        </p:txBody>
+      </p:sp>
+      <p:sp>
+        <p:nvSpPr>
+          <p:cNvPr id="29" name="Text 25"/>
+          <p:cNvSpPr/>
+          <p:nvPr/>
+        </p:nvSpPr>
+        <p:spPr>
+          <a:xfrm>
+            <a:off x="8348472" y="5084064"/>
+            <a:ext cx="2743200" cy="256032"/>
+          </a:xfrm>
+          <a:prstGeom prst="rect">
+            <a:avLst/>
+          </a:prstGeom>
+          <a:noFill/>
+          <a:ln/>
+        </p:spPr>
+        <p:txBody>
+          <a:bodyPr wrap="square" lIns="0" tIns="0" rIns="0" bIns="0" rtlCol="0" anchor="ctr"/>
+          <a:lstStyle/>
+          <a:p>
+            <a:pPr algn="ctr" indent="0" marL="0">
+              <a:buNone/>
+            </a:pPr>
+            <a:r>
+              <a:rPr lang="en-US" sz="1200" dirty="0">
+                <a:solidFill>
+                  <a:srgbClr val="5A7184"/>
+                </a:solidFill>
+                <a:latin typeface="Malgun Gothic" pitchFamily="34" charset="0"/>
+                <a:ea typeface="Malgun Gothic" pitchFamily="34" charset="-122"/>
+                <a:cs typeface="Malgun Gothic" pitchFamily="34" charset="-120"/>
+              </a:rPr>
+              <a:t>플랫폼 · 커스텀 30%+</a:t>
+            </a:r>
+            <a:endParaRPr lang="en-US" sz="1200" dirty="0"/>
+          </a:p>
+        </p:txBody>
+      </p:sp>
+      <p:sp>
+        <p:nvSpPr>
+          <p:cNvPr id="30" name="Text 26"/>
+          <p:cNvSpPr/>
+          <p:nvPr/>
+        </p:nvSpPr>
+        <p:spPr>
+          <a:xfrm>
+            <a:off x="457200" y="5650992"/>
             <a:ext cx="11274552" cy="548640"/>
           </a:xfrm>
           <a:prstGeom prst="rect">

--- a/outputs/presentation/dev-transformation-summary.pptx
+++ b/outputs/presentation/dev-transformation-summary.pptx
@@ -1102,7 +1102,7 @@
             </a:avLst>
           </a:prstGeom>
           <a:solidFill>
-            <a:srgbClr val="EAF3FA"/>
+            <a:srgbClr val="EFF3F5"/>
           </a:solidFill>
           <a:ln/>
         </p:spPr>
@@ -1116,7 +1116,7 @@
             <a:r>
               <a:rPr lang="en-US" sz="1400" b="1" dirty="0">
                 <a:solidFill>
-                  <a:srgbClr val="0E6BA8"/>
+                  <a:srgbClr val="5A7184"/>
                 </a:solidFill>
                 <a:latin typeface="Malgun Gothic" pitchFamily="34" charset="0"/>
                 <a:ea typeface="Malgun Gothic" pitchFamily="34" charset="-122"/>
@@ -1276,7 +1276,7 @@
             </a:avLst>
           </a:prstGeom>
           <a:solidFill>
-            <a:srgbClr val="EAF3FA"/>
+            <a:srgbClr val="F5F7F8"/>
           </a:solidFill>
           <a:ln/>
         </p:spPr>
@@ -1296,7 +1296,7 @@
             <a:avLst/>
           </a:prstGeom>
           <a:solidFill>
-            <a:srgbClr val="0E6BA8"/>
+            <a:srgbClr val="17313B"/>
           </a:solidFill>
           <a:ln/>
         </p:spPr>
@@ -1349,7 +1349,7 @@
             <a:r>
               <a:rPr lang="en-US" sz="2100" b="1" dirty="0">
                 <a:solidFill>
-                  <a:srgbClr val="0E6BA8"/>
+                  <a:srgbClr val="17313B"/>
                 </a:solidFill>
                 <a:latin typeface="Malgun Gothic" pitchFamily="34" charset="0"/>
                 <a:ea typeface="Malgun Gothic" pitchFamily="34" charset="-122"/>
@@ -1378,7 +1378,7 @@
             </a:avLst>
           </a:prstGeom>
           <a:solidFill>
-            <a:srgbClr val="E6F4F4"/>
+            <a:srgbClr val="F5F7F8"/>
           </a:solidFill>
           <a:ln/>
         </p:spPr>
@@ -1398,7 +1398,7 @@
             <a:avLst/>
           </a:prstGeom>
           <a:solidFill>
-            <a:srgbClr val="028090"/>
+            <a:srgbClr val="17313B"/>
           </a:solidFill>
           <a:ln/>
         </p:spPr>
@@ -1451,7 +1451,7 @@
             <a:r>
               <a:rPr lang="en-US" sz="2100" b="1" dirty="0">
                 <a:solidFill>
-                  <a:srgbClr val="028090"/>
+                  <a:srgbClr val="17313B"/>
                 </a:solidFill>
                 <a:latin typeface="Malgun Gothic" pitchFamily="34" charset="0"/>
                 <a:ea typeface="Malgun Gothic" pitchFamily="34" charset="-122"/>
@@ -1480,7 +1480,7 @@
             </a:avLst>
           </a:prstGeom>
           <a:solidFill>
-            <a:srgbClr val="E8F6F0"/>
+            <a:srgbClr val="F5F7F8"/>
           </a:solidFill>
           <a:ln/>
         </p:spPr>
@@ -1500,7 +1500,7 @@
             <a:avLst/>
           </a:prstGeom>
           <a:solidFill>
-            <a:srgbClr val="02A878"/>
+            <a:srgbClr val="17313B"/>
           </a:solidFill>
           <a:ln/>
         </p:spPr>
@@ -1553,7 +1553,7 @@
             <a:r>
               <a:rPr lang="en-US" sz="2100" b="1" dirty="0">
                 <a:solidFill>
-                  <a:srgbClr val="02A878"/>
+                  <a:srgbClr val="17313B"/>
                 </a:solidFill>
                 <a:latin typeface="Malgun Gothic" pitchFamily="34" charset="0"/>
                 <a:ea typeface="Malgun Gothic" pitchFamily="34" charset="-122"/>
@@ -1582,7 +1582,7 @@
           <a:noFill/>
           <a:ln w="19050">
             <a:solidFill>
-              <a:srgbClr val="0E6BA8"/>
+              <a:srgbClr val="C4CFD6"/>
             </a:solidFill>
             <a:prstDash val="solid"/>
           </a:ln>
@@ -1603,7 +1603,7 @@
             <a:avLst/>
           </a:prstGeom>
           <a:solidFill>
-            <a:srgbClr val="0E6BA8"/>
+            <a:srgbClr val="17313B"/>
           </a:solidFill>
           <a:ln/>
         </p:spPr>
@@ -1635,7 +1635,7 @@
             <a:r>
               <a:rPr lang="en-US" sz="1400" b="1" dirty="0">
                 <a:solidFill>
-                  <a:srgbClr val="0E6BA8"/>
+                  <a:srgbClr val="17313B"/>
                 </a:solidFill>
                 <a:latin typeface="Malgun Gothic" pitchFamily="34" charset="0"/>
                 <a:ea typeface="Malgun Gothic" pitchFamily="34" charset="-122"/>
@@ -1724,7 +1724,7 @@
             <a:avLst/>
           </a:prstGeom>
           <a:solidFill>
-            <a:srgbClr val="0E6BA8"/>
+            <a:srgbClr val="17313B"/>
           </a:solidFill>
           <a:ln/>
         </p:spPr>
@@ -1756,7 +1756,7 @@
             <a:r>
               <a:rPr lang="en-US" sz="1400" b="1" dirty="0">
                 <a:solidFill>
-                  <a:srgbClr val="0E6BA8"/>
+                  <a:srgbClr val="17313B"/>
                 </a:solidFill>
                 <a:latin typeface="Malgun Gothic" pitchFamily="34" charset="0"/>
                 <a:ea typeface="Malgun Gothic" pitchFamily="34" charset="-122"/>
@@ -1845,7 +1845,7 @@
             <a:avLst/>
           </a:prstGeom>
           <a:solidFill>
-            <a:srgbClr val="0E6BA8"/>
+            <a:srgbClr val="17313B"/>
           </a:solidFill>
           <a:ln/>
         </p:spPr>
@@ -1877,7 +1877,7 @@
             <a:r>
               <a:rPr lang="en-US" sz="1400" b="1" dirty="0">
                 <a:solidFill>
-                  <a:srgbClr val="0E6BA8"/>
+                  <a:srgbClr val="17313B"/>
                 </a:solidFill>
                 <a:latin typeface="Malgun Gothic" pitchFamily="34" charset="0"/>
                 <a:ea typeface="Malgun Gothic" pitchFamily="34" charset="-122"/>
@@ -1972,7 +1972,7 @@
           </a:solidFill>
           <a:ln w="12700">
             <a:solidFill>
-              <a:srgbClr val="0E6BA8"/>
+              <a:srgbClr val="DCE4E9"/>
             </a:solidFill>
             <a:prstDash val="solid"/>
           </a:ln>
@@ -2163,7 +2163,7 @@
           </a:solidFill>
           <a:ln w="12700">
             <a:solidFill>
-              <a:srgbClr val="D9E6EC"/>
+              <a:srgbClr val="DCE4E9"/>
             </a:solidFill>
           </a:ln>
         </p:spPr>
@@ -2296,7 +2296,7 @@
           </a:solidFill>
           <a:ln w="12700">
             <a:solidFill>
-              <a:srgbClr val="D9E6EC"/>
+              <a:srgbClr val="DCE4E9"/>
             </a:solidFill>
           </a:ln>
         </p:spPr>
@@ -2429,7 +2429,7 @@
           </a:solidFill>
           <a:ln w="12700">
             <a:solidFill>
-              <a:srgbClr val="D9E6EC"/>
+              <a:srgbClr val="DCE4E9"/>
             </a:solidFill>
           </a:ln>
         </p:spPr>
@@ -2562,7 +2562,7 @@
           </a:solidFill>
           <a:ln w="12700">
             <a:solidFill>
-              <a:srgbClr val="D9E6EC"/>
+              <a:srgbClr val="DCE4E9"/>
             </a:solidFill>
           </a:ln>
         </p:spPr>
@@ -2695,7 +2695,7 @@
           </a:solidFill>
           <a:ln w="12700">
             <a:solidFill>
-              <a:srgbClr val="028090"/>
+              <a:srgbClr val="DCE4E9"/>
             </a:solidFill>
             <a:prstDash val="solid"/>
           </a:ln>
@@ -2772,14 +2772,14 @@
         </p:nvSpPr>
         <p:spPr>
           <a:xfrm>
-            <a:off x="8842248" y="1956816"/>
-            <a:ext cx="475488" cy="475488"/>
+            <a:off x="8897112" y="1847088"/>
+            <a:ext cx="402336" cy="402336"/>
           </a:xfrm>
           <a:prstGeom prst="ellipse">
             <a:avLst/>
           </a:prstGeom>
           <a:solidFill>
-            <a:srgbClr val="0E6BA8"/>
+            <a:srgbClr val="5A7184"/>
           </a:solidFill>
           <a:ln/>
         </p:spPr>
@@ -2800,8 +2800,8 @@
         </p:blipFill>
         <p:spPr>
           <a:xfrm>
-            <a:off x="8956365" y="2070933"/>
-            <a:ext cx="247254" cy="247254"/>
+            <a:off x="8993673" y="1943649"/>
+            <a:ext cx="209215" cy="209215"/>
           </a:xfrm>
           <a:prstGeom prst="rect">
             <a:avLst/>
@@ -2816,24 +2816,24 @@
         </p:nvSpPr>
         <p:spPr>
           <a:xfrm>
-            <a:off x="8330184" y="2468880"/>
-            <a:ext cx="1499616" cy="292608"/>
-          </a:xfrm>
-          <a:prstGeom prst="rect">
-            <a:avLst/>
-          </a:prstGeom>
-          <a:noFill/>
-          <a:ln/>
-        </p:spPr>
-        <p:txBody>
-          <a:bodyPr wrap="square" lIns="0" tIns="0" rIns="0" bIns="0" rtlCol="0" anchor="ctr"/>
-          <a:lstStyle/>
-          <a:p>
-            <a:pPr algn="ctr" indent="0" marL="0">
-              <a:buNone/>
-            </a:pPr>
-            <a:r>
-              <a:rPr lang="en-US" sz="1600" b="1" dirty="0">
+            <a:off x="8330184" y="2267712"/>
+            <a:ext cx="1536192" cy="274320"/>
+          </a:xfrm>
+          <a:prstGeom prst="rect">
+            <a:avLst/>
+          </a:prstGeom>
+          <a:noFill/>
+          <a:ln/>
+        </p:spPr>
+        <p:txBody>
+          <a:bodyPr wrap="square" lIns="0" tIns="0" rIns="0" bIns="0" rtlCol="0" anchor="ctr"/>
+          <a:lstStyle/>
+          <a:p>
+            <a:pPr algn="ctr" indent="0" marL="0">
+              <a:buNone/>
+            </a:pPr>
+            <a:r>
+              <a:rPr lang="en-US" sz="1500" b="1" dirty="0">
                 <a:solidFill>
                   <a:srgbClr val="17313B"/>
                 </a:solidFill>
@@ -2843,7 +2843,7 @@
               </a:rPr>
               <a:t>기술</a:t>
             </a:r>
-            <a:endParaRPr lang="en-US" sz="1600" dirty="0"/>
+            <a:endParaRPr lang="en-US" sz="1500" dirty="0"/>
           </a:p>
         </p:txBody>
       </p:sp>
@@ -2855,24 +2855,24 @@
         </p:nvSpPr>
         <p:spPr>
           <a:xfrm>
-            <a:off x="8275320" y="2761488"/>
-            <a:ext cx="1609344" cy="237744"/>
-          </a:xfrm>
-          <a:prstGeom prst="rect">
-            <a:avLst/>
-          </a:prstGeom>
-          <a:noFill/>
-          <a:ln/>
-        </p:spPr>
-        <p:txBody>
-          <a:bodyPr wrap="square" lIns="0" tIns="0" rIns="0" bIns="0" rtlCol="0" anchor="ctr"/>
-          <a:lstStyle/>
-          <a:p>
-            <a:pPr algn="ctr" indent="0" marL="0">
-              <a:buNone/>
-            </a:pPr>
-            <a:r>
-              <a:rPr lang="en-US" sz="1100" dirty="0">
+            <a:off x="8275320" y="2542032"/>
+            <a:ext cx="1645920" cy="219456"/>
+          </a:xfrm>
+          <a:prstGeom prst="rect">
+            <a:avLst/>
+          </a:prstGeom>
+          <a:noFill/>
+          <a:ln/>
+        </p:spPr>
+        <p:txBody>
+          <a:bodyPr wrap="square" lIns="0" tIns="0" rIns="0" bIns="0" rtlCol="0" anchor="ctr"/>
+          <a:lstStyle/>
+          <a:p>
+            <a:pPr algn="ctr" indent="0" marL="0">
+              <a:buNone/>
+            </a:pPr>
+            <a:r>
+              <a:rPr lang="en-US" sz="1050" dirty="0">
                 <a:solidFill>
                   <a:srgbClr val="5A7184"/>
                 </a:solidFill>
@@ -2882,7 +2882,7 @@
               </a:rPr>
               <a:t>워크로드 랩·모델</a:t>
             </a:r>
-            <a:endParaRPr lang="en-US" sz="1100" dirty="0"/>
+            <a:endParaRPr lang="en-US" sz="1050" dirty="0"/>
           </a:p>
         </p:txBody>
       </p:sp>
@@ -2894,14 +2894,14 @@
         </p:nvSpPr>
         <p:spPr>
           <a:xfrm>
-            <a:off x="10506456" y="1956816"/>
-            <a:ext cx="475488" cy="475488"/>
+            <a:off x="10561320" y="1847088"/>
+            <a:ext cx="402336" cy="402336"/>
           </a:xfrm>
           <a:prstGeom prst="ellipse">
             <a:avLst/>
           </a:prstGeom>
           <a:solidFill>
-            <a:srgbClr val="028090"/>
+            <a:srgbClr val="5A7184"/>
           </a:solidFill>
           <a:ln/>
         </p:spPr>
@@ -2922,8 +2922,8 @@
         </p:blipFill>
         <p:spPr>
           <a:xfrm>
-            <a:off x="10620573" y="2070933"/>
-            <a:ext cx="247254" cy="247254"/>
+            <a:off x="10657881" y="1943649"/>
+            <a:ext cx="209215" cy="209215"/>
           </a:xfrm>
           <a:prstGeom prst="rect">
             <a:avLst/>
@@ -2938,24 +2938,24 @@
         </p:nvSpPr>
         <p:spPr>
           <a:xfrm>
-            <a:off x="9994392" y="2468880"/>
-            <a:ext cx="1499616" cy="292608"/>
-          </a:xfrm>
-          <a:prstGeom prst="rect">
-            <a:avLst/>
-          </a:prstGeom>
-          <a:noFill/>
-          <a:ln/>
-        </p:spPr>
-        <p:txBody>
-          <a:bodyPr wrap="square" lIns="0" tIns="0" rIns="0" bIns="0" rtlCol="0" anchor="ctr"/>
-          <a:lstStyle/>
-          <a:p>
-            <a:pPr algn="ctr" indent="0" marL="0">
-              <a:buNone/>
-            </a:pPr>
-            <a:r>
-              <a:rPr lang="en-US" sz="1600" b="1" dirty="0">
+            <a:off x="9994392" y="2267712"/>
+            <a:ext cx="1536192" cy="274320"/>
+          </a:xfrm>
+          <a:prstGeom prst="rect">
+            <a:avLst/>
+          </a:prstGeom>
+          <a:noFill/>
+          <a:ln/>
+        </p:spPr>
+        <p:txBody>
+          <a:bodyPr wrap="square" lIns="0" tIns="0" rIns="0" bIns="0" rtlCol="0" anchor="ctr"/>
+          <a:lstStyle/>
+          <a:p>
+            <a:pPr algn="ctr" indent="0" marL="0">
+              <a:buNone/>
+            </a:pPr>
+            <a:r>
+              <a:rPr lang="en-US" sz="1500" b="1" dirty="0">
                 <a:solidFill>
                   <a:srgbClr val="17313B"/>
                 </a:solidFill>
@@ -2965,7 +2965,7 @@
               </a:rPr>
               <a:t>문화</a:t>
             </a:r>
-            <a:endParaRPr lang="en-US" sz="1600" dirty="0"/>
+            <a:endParaRPr lang="en-US" sz="1500" dirty="0"/>
           </a:p>
         </p:txBody>
       </p:sp>
@@ -2977,24 +2977,24 @@
         </p:nvSpPr>
         <p:spPr>
           <a:xfrm>
-            <a:off x="9939528" y="2761488"/>
-            <a:ext cx="1609344" cy="237744"/>
-          </a:xfrm>
-          <a:prstGeom prst="rect">
-            <a:avLst/>
-          </a:prstGeom>
-          <a:noFill/>
-          <a:ln/>
-        </p:spPr>
-        <p:txBody>
-          <a:bodyPr wrap="square" lIns="0" tIns="0" rIns="0" bIns="0" rtlCol="0" anchor="ctr"/>
-          <a:lstStyle/>
-          <a:p>
-            <a:pPr algn="ctr" indent="0" marL="0">
-              <a:buNone/>
-            </a:pPr>
-            <a:r>
-              <a:rPr lang="en-US" sz="1100" dirty="0">
+            <a:off x="9939528" y="2542032"/>
+            <a:ext cx="1645920" cy="219456"/>
+          </a:xfrm>
+          <a:prstGeom prst="rect">
+            <a:avLst/>
+          </a:prstGeom>
+          <a:noFill/>
+          <a:ln/>
+        </p:spPr>
+        <p:txBody>
+          <a:bodyPr wrap="square" lIns="0" tIns="0" rIns="0" bIns="0" rtlCol="0" anchor="ctr"/>
+          <a:lstStyle/>
+          <a:p>
+            <a:pPr algn="ctr" indent="0" marL="0">
+              <a:buNone/>
+            </a:pPr>
+            <a:r>
+              <a:rPr lang="en-US" sz="1050" dirty="0">
                 <a:solidFill>
                   <a:srgbClr val="5A7184"/>
                 </a:solidFill>
@@ -3002,9 +3002,9 @@
                 <a:ea typeface="Malgun Gothic" pitchFamily="34" charset="-122"/>
                 <a:cs typeface="Malgun Gothic" pitchFamily="34" charset="-120"/>
               </a:rPr>
-              <a:t>가설 제안·호명</a:t>
-            </a:r>
-            <a:endParaRPr lang="en-US" sz="1100" dirty="0"/>
+              <a:t>모난 놈 → 호명</a:t>
+            </a:r>
+            <a:endParaRPr lang="en-US" sz="1050" dirty="0"/>
           </a:p>
         </p:txBody>
       </p:sp>
@@ -3016,14 +3016,14 @@
         </p:nvSpPr>
         <p:spPr>
           <a:xfrm>
-            <a:off x="8842248" y="3200400"/>
-            <a:ext cx="475488" cy="475488"/>
+            <a:off x="8897112" y="2907792"/>
+            <a:ext cx="402336" cy="402336"/>
           </a:xfrm>
           <a:prstGeom prst="ellipse">
             <a:avLst/>
           </a:prstGeom>
           <a:solidFill>
-            <a:srgbClr val="02A878"/>
+            <a:srgbClr val="5A7184"/>
           </a:solidFill>
           <a:ln/>
         </p:spPr>
@@ -3044,8 +3044,8 @@
         </p:blipFill>
         <p:spPr>
           <a:xfrm>
-            <a:off x="8956365" y="3314517"/>
-            <a:ext cx="247254" cy="247254"/>
+            <a:off x="8993673" y="3004353"/>
+            <a:ext cx="209215" cy="209215"/>
           </a:xfrm>
           <a:prstGeom prst="rect">
             <a:avLst/>
@@ -3060,24 +3060,24 @@
         </p:nvSpPr>
         <p:spPr>
           <a:xfrm>
-            <a:off x="8330184" y="3712464"/>
-            <a:ext cx="1499616" cy="292608"/>
-          </a:xfrm>
-          <a:prstGeom prst="rect">
-            <a:avLst/>
-          </a:prstGeom>
-          <a:noFill/>
-          <a:ln/>
-        </p:spPr>
-        <p:txBody>
-          <a:bodyPr wrap="square" lIns="0" tIns="0" rIns="0" bIns="0" rtlCol="0" anchor="ctr"/>
-          <a:lstStyle/>
-          <a:p>
-            <a:pPr algn="ctr" indent="0" marL="0">
-              <a:buNone/>
-            </a:pPr>
-            <a:r>
-              <a:rPr lang="en-US" sz="1600" b="1" dirty="0">
+            <a:off x="8330184" y="3328416"/>
+            <a:ext cx="1536192" cy="274320"/>
+          </a:xfrm>
+          <a:prstGeom prst="rect">
+            <a:avLst/>
+          </a:prstGeom>
+          <a:noFill/>
+          <a:ln/>
+        </p:spPr>
+        <p:txBody>
+          <a:bodyPr wrap="square" lIns="0" tIns="0" rIns="0" bIns="0" rtlCol="0" anchor="ctr"/>
+          <a:lstStyle/>
+          <a:p>
+            <a:pPr algn="ctr" indent="0" marL="0">
+              <a:buNone/>
+            </a:pPr>
+            <a:r>
+              <a:rPr lang="en-US" sz="1500" b="1" dirty="0">
                 <a:solidFill>
                   <a:srgbClr val="17313B"/>
                 </a:solidFill>
@@ -3087,7 +3087,7 @@
               </a:rPr>
               <a:t>조직</a:t>
             </a:r>
-            <a:endParaRPr lang="en-US" sz="1600" dirty="0"/>
+            <a:endParaRPr lang="en-US" sz="1500" dirty="0"/>
           </a:p>
         </p:txBody>
       </p:sp>
@@ -3099,24 +3099,24 @@
         </p:nvSpPr>
         <p:spPr>
           <a:xfrm>
-            <a:off x="8275320" y="4005072"/>
-            <a:ext cx="1609344" cy="237744"/>
-          </a:xfrm>
-          <a:prstGeom prst="rect">
-            <a:avLst/>
-          </a:prstGeom>
-          <a:noFill/>
-          <a:ln/>
-        </p:spPr>
-        <p:txBody>
-          <a:bodyPr wrap="square" lIns="0" tIns="0" rIns="0" bIns="0" rtlCol="0" anchor="ctr"/>
-          <a:lstStyle/>
-          <a:p>
-            <a:pPr algn="ctr" indent="0" marL="0">
-              <a:buNone/>
-            </a:pPr>
-            <a:r>
-              <a:rPr lang="en-US" sz="1100" dirty="0">
+            <a:off x="8275320" y="3602736"/>
+            <a:ext cx="1645920" cy="219456"/>
+          </a:xfrm>
+          <a:prstGeom prst="rect">
+            <a:avLst/>
+          </a:prstGeom>
+          <a:noFill/>
+          <a:ln/>
+        </p:spPr>
+        <p:txBody>
+          <a:bodyPr wrap="square" lIns="0" tIns="0" rIns="0" bIns="0" rtlCol="0" anchor="ctr"/>
+          <a:lstStyle/>
+          <a:p>
+            <a:pPr algn="ctr" indent="0" marL="0">
+              <a:buNone/>
+            </a:pPr>
+            <a:r>
+              <a:rPr lang="en-US" sz="1050" dirty="0">
                 <a:solidFill>
                   <a:srgbClr val="5A7184"/>
                 </a:solidFill>
@@ -3124,9 +3124,9 @@
                 <a:ea typeface="Malgun Gothic" pitchFamily="34" charset="-122"/>
                 <a:cs typeface="Malgun Gothic" pitchFamily="34" charset="-120"/>
               </a:rPr>
-              <a:t>Pod·DE 트랙</a:t>
-            </a:r>
-            <a:endParaRPr lang="en-US" sz="1100" dirty="0"/>
+              <a:t>DE 스타·Pod 상주</a:t>
+            </a:r>
+            <a:endParaRPr lang="en-US" sz="1050" dirty="0"/>
           </a:p>
         </p:txBody>
       </p:sp>
@@ -3138,14 +3138,14 @@
         </p:nvSpPr>
         <p:spPr>
           <a:xfrm>
-            <a:off x="10506456" y="3200400"/>
-            <a:ext cx="475488" cy="475488"/>
+            <a:off x="10561320" y="2907792"/>
+            <a:ext cx="402336" cy="402336"/>
           </a:xfrm>
           <a:prstGeom prst="ellipse">
             <a:avLst/>
           </a:prstGeom>
           <a:solidFill>
-            <a:srgbClr val="4C7C94"/>
+            <a:srgbClr val="5A7184"/>
           </a:solidFill>
           <a:ln/>
         </p:spPr>
@@ -3166,8 +3166,8 @@
         </p:blipFill>
         <p:spPr>
           <a:xfrm>
-            <a:off x="10620573" y="3314517"/>
-            <a:ext cx="247254" cy="247254"/>
+            <a:off x="10657881" y="3004353"/>
+            <a:ext cx="209215" cy="209215"/>
           </a:xfrm>
           <a:prstGeom prst="rect">
             <a:avLst/>
@@ -3182,24 +3182,24 @@
         </p:nvSpPr>
         <p:spPr>
           <a:xfrm>
-            <a:off x="9994392" y="3712464"/>
-            <a:ext cx="1499616" cy="292608"/>
-          </a:xfrm>
-          <a:prstGeom prst="rect">
-            <a:avLst/>
-          </a:prstGeom>
-          <a:noFill/>
-          <a:ln/>
-        </p:spPr>
-        <p:txBody>
-          <a:bodyPr wrap="square" lIns="0" tIns="0" rIns="0" bIns="0" rtlCol="0" anchor="ctr"/>
-          <a:lstStyle/>
-          <a:p>
-            <a:pPr algn="ctr" indent="0" marL="0">
-              <a:buNone/>
-            </a:pPr>
-            <a:r>
-              <a:rPr lang="en-US" sz="1600" b="1" dirty="0">
+            <a:off x="9994392" y="3328416"/>
+            <a:ext cx="1536192" cy="274320"/>
+          </a:xfrm>
+          <a:prstGeom prst="rect">
+            <a:avLst/>
+          </a:prstGeom>
+          <a:noFill/>
+          <a:ln/>
+        </p:spPr>
+        <p:txBody>
+          <a:bodyPr wrap="square" lIns="0" tIns="0" rIns="0" bIns="0" rtlCol="0" anchor="ctr"/>
+          <a:lstStyle/>
+          <a:p>
+            <a:pPr algn="ctr" indent="0" marL="0">
+              <a:buNone/>
+            </a:pPr>
+            <a:r>
+              <a:rPr lang="en-US" sz="1500" b="1" dirty="0">
                 <a:solidFill>
                   <a:srgbClr val="17313B"/>
                 </a:solidFill>
@@ -3209,7 +3209,7 @@
               </a:rPr>
               <a:t>방식</a:t>
             </a:r>
-            <a:endParaRPr lang="en-US" sz="1600" dirty="0"/>
+            <a:endParaRPr lang="en-US" sz="1500" dirty="0"/>
           </a:p>
         </p:txBody>
       </p:sp>
@@ -3221,24 +3221,24 @@
         </p:nvSpPr>
         <p:spPr>
           <a:xfrm>
-            <a:off x="9939528" y="4005072"/>
-            <a:ext cx="1609344" cy="237744"/>
-          </a:xfrm>
-          <a:prstGeom prst="rect">
-            <a:avLst/>
-          </a:prstGeom>
-          <a:noFill/>
-          <a:ln/>
-        </p:spPr>
-        <p:txBody>
-          <a:bodyPr wrap="square" lIns="0" tIns="0" rIns="0" bIns="0" rtlCol="0" anchor="ctr"/>
-          <a:lstStyle/>
-          <a:p>
-            <a:pPr algn="ctr" indent="0" marL="0">
-              <a:buNone/>
-            </a:pPr>
-            <a:r>
-              <a:rPr lang="en-US" sz="1100" dirty="0">
+            <a:off x="9939528" y="3602736"/>
+            <a:ext cx="1645920" cy="219456"/>
+          </a:xfrm>
+          <a:prstGeom prst="rect">
+            <a:avLst/>
+          </a:prstGeom>
+          <a:noFill/>
+          <a:ln/>
+        </p:spPr>
+        <p:txBody>
+          <a:bodyPr wrap="square" lIns="0" tIns="0" rIns="0" bIns="0" rtlCol="0" anchor="ctr"/>
+          <a:lstStyle/>
+          <a:p>
+            <a:pPr algn="ctr" indent="0" marL="0">
+              <a:buNone/>
+            </a:pPr>
+            <a:r>
+              <a:rPr lang="en-US" sz="1050" dirty="0">
                 <a:solidFill>
                   <a:srgbClr val="5A7184"/>
                 </a:solidFill>
@@ -3248,7 +3248,7 @@
               </a:rPr>
               <a:t>교차 리뷰·PoA</a:t>
             </a:r>
-            <a:endParaRPr lang="en-US" sz="1100" dirty="0"/>
+            <a:endParaRPr lang="en-US" sz="1050" dirty="0"/>
           </a:p>
         </p:txBody>
       </p:sp>
@@ -3260,7 +3260,7 @@
         </p:nvSpPr>
         <p:spPr>
           <a:xfrm>
-            <a:off x="8695944" y="4828032"/>
+            <a:off x="8695944" y="4206240"/>
             <a:ext cx="2468880" cy="0"/>
           </a:xfrm>
           <a:prstGeom prst="line">
@@ -3268,6 +3268,279 @@
           </a:prstGeom>
           <a:noFill/>
           <a:ln w="19050">
+            <a:solidFill>
+              <a:srgbClr val="C4CFD6"/>
+            </a:solidFill>
+            <a:prstDash val="solid"/>
+          </a:ln>
+        </p:spPr>
+      </p:sp>
+      <p:sp>
+        <p:nvSpPr>
+          <p:cNvPr id="63" name="Shape 55"/>
+          <p:cNvSpPr/>
+          <p:nvPr/>
+        </p:nvSpPr>
+        <p:spPr>
+          <a:xfrm>
+            <a:off x="8631936" y="4142232"/>
+            <a:ext cx="128016" cy="128016"/>
+          </a:xfrm>
+          <a:prstGeom prst="ellipse">
+            <a:avLst/>
+          </a:prstGeom>
+          <a:solidFill>
+            <a:srgbClr val="17313B"/>
+          </a:solidFill>
+          <a:ln/>
+        </p:spPr>
+      </p:sp>
+      <p:sp>
+        <p:nvSpPr>
+          <p:cNvPr id="64" name="Text 56"/>
+          <p:cNvSpPr/>
+          <p:nvPr/>
+        </p:nvSpPr>
+        <p:spPr>
+          <a:xfrm>
+            <a:off x="8147304" y="4334256"/>
+            <a:ext cx="1097280" cy="457200"/>
+          </a:xfrm>
+          <a:prstGeom prst="rect">
+            <a:avLst/>
+          </a:prstGeom>
+          <a:noFill/>
+          <a:ln/>
+        </p:spPr>
+        <p:txBody>
+          <a:bodyPr wrap="square" lIns="0" tIns="0" rIns="0" bIns="0" rtlCol="0" anchor="ctr"/>
+          <a:lstStyle/>
+          <a:p>
+            <a:pPr algn="ctr" indent="0" marL="0">
+              <a:lnSpc>
+                <a:spcPct val="100000"/>
+              </a:lnSpc>
+              <a:buNone/>
+            </a:pPr>
+            <a:r>
+              <a:rPr lang="en-US" sz="1150" b="1" dirty="0">
+                <a:solidFill>
+                  <a:srgbClr val="17313B"/>
+                </a:solidFill>
+                <a:latin typeface="Malgun Gothic" pitchFamily="34" charset="0"/>
+                <a:ea typeface="Malgun Gothic" pitchFamily="34" charset="-122"/>
+                <a:cs typeface="Malgun Gothic" pitchFamily="34" charset="-120"/>
+              </a:rPr>
+              <a:t>90일</a:t>
+            </a:r>
+            <a:endParaRPr lang="en-US" sz="1150" dirty="0"/>
+          </a:p>
+          <a:p>
+            <a:pPr algn="ctr" indent="0" marL="0">
+              <a:lnSpc>
+                <a:spcPct val="100000"/>
+              </a:lnSpc>
+              <a:buNone/>
+            </a:pPr>
+            <a:r>
+              <a:rPr lang="en-US" sz="1150" b="1" dirty="0">
+                <a:solidFill>
+                  <a:srgbClr val="17313B"/>
+                </a:solidFill>
+                <a:latin typeface="Malgun Gothic" pitchFamily="34" charset="0"/>
+                <a:ea typeface="Malgun Gothic" pitchFamily="34" charset="-122"/>
+                <a:cs typeface="Malgun Gothic" pitchFamily="34" charset="-120"/>
+              </a:rPr>
+              <a:t>증명</a:t>
+            </a:r>
+            <a:endParaRPr lang="en-US" sz="1150" dirty="0"/>
+          </a:p>
+        </p:txBody>
+      </p:sp>
+      <p:sp>
+        <p:nvSpPr>
+          <p:cNvPr id="65" name="Shape 57"/>
+          <p:cNvSpPr/>
+          <p:nvPr/>
+        </p:nvSpPr>
+        <p:spPr>
+          <a:xfrm>
+            <a:off x="9866376" y="4142232"/>
+            <a:ext cx="128016" cy="128016"/>
+          </a:xfrm>
+          <a:prstGeom prst="ellipse">
+            <a:avLst/>
+          </a:prstGeom>
+          <a:solidFill>
+            <a:srgbClr val="17313B"/>
+          </a:solidFill>
+          <a:ln/>
+        </p:spPr>
+      </p:sp>
+      <p:sp>
+        <p:nvSpPr>
+          <p:cNvPr id="66" name="Text 58"/>
+          <p:cNvSpPr/>
+          <p:nvPr/>
+        </p:nvSpPr>
+        <p:spPr>
+          <a:xfrm>
+            <a:off x="9381744" y="4334256"/>
+            <a:ext cx="1097280" cy="457200"/>
+          </a:xfrm>
+          <a:prstGeom prst="rect">
+            <a:avLst/>
+          </a:prstGeom>
+          <a:noFill/>
+          <a:ln/>
+        </p:spPr>
+        <p:txBody>
+          <a:bodyPr wrap="square" lIns="0" tIns="0" rIns="0" bIns="0" rtlCol="0" anchor="ctr"/>
+          <a:lstStyle/>
+          <a:p>
+            <a:pPr algn="ctr" indent="0" marL="0">
+              <a:lnSpc>
+                <a:spcPct val="100000"/>
+              </a:lnSpc>
+              <a:buNone/>
+            </a:pPr>
+            <a:r>
+              <a:rPr lang="en-US" sz="1150" b="1" dirty="0">
+                <a:solidFill>
+                  <a:srgbClr val="17313B"/>
+                </a:solidFill>
+                <a:latin typeface="Malgun Gothic" pitchFamily="34" charset="0"/>
+                <a:ea typeface="Malgun Gothic" pitchFamily="34" charset="-122"/>
+                <a:cs typeface="Malgun Gothic" pitchFamily="34" charset="-120"/>
+              </a:rPr>
+              <a:t>1년</a:t>
+            </a:r>
+            <a:endParaRPr lang="en-US" sz="1150" dirty="0"/>
+          </a:p>
+          <a:p>
+            <a:pPr algn="ctr" indent="0" marL="0">
+              <a:lnSpc>
+                <a:spcPct val="100000"/>
+              </a:lnSpc>
+              <a:buNone/>
+            </a:pPr>
+            <a:r>
+              <a:rPr lang="en-US" sz="1150" b="1" dirty="0">
+                <a:solidFill>
+                  <a:srgbClr val="17313B"/>
+                </a:solidFill>
+                <a:latin typeface="Malgun Gothic" pitchFamily="34" charset="0"/>
+                <a:ea typeface="Malgun Gothic" pitchFamily="34" charset="-122"/>
+                <a:cs typeface="Malgun Gothic" pitchFamily="34" charset="-120"/>
+              </a:rPr>
+              <a:t>제도화</a:t>
+            </a:r>
+            <a:endParaRPr lang="en-US" sz="1150" dirty="0"/>
+          </a:p>
+        </p:txBody>
+      </p:sp>
+      <p:sp>
+        <p:nvSpPr>
+          <p:cNvPr id="67" name="Shape 59"/>
+          <p:cNvSpPr/>
+          <p:nvPr/>
+        </p:nvSpPr>
+        <p:spPr>
+          <a:xfrm>
+            <a:off x="11100816" y="4142232"/>
+            <a:ext cx="128016" cy="128016"/>
+          </a:xfrm>
+          <a:prstGeom prst="ellipse">
+            <a:avLst/>
+          </a:prstGeom>
+          <a:solidFill>
+            <a:srgbClr val="17313B"/>
+          </a:solidFill>
+          <a:ln/>
+        </p:spPr>
+      </p:sp>
+      <p:sp>
+        <p:nvSpPr>
+          <p:cNvPr id="68" name="Text 60"/>
+          <p:cNvSpPr/>
+          <p:nvPr/>
+        </p:nvSpPr>
+        <p:spPr>
+          <a:xfrm>
+            <a:off x="10616184" y="4334256"/>
+            <a:ext cx="1097280" cy="457200"/>
+          </a:xfrm>
+          <a:prstGeom prst="rect">
+            <a:avLst/>
+          </a:prstGeom>
+          <a:noFill/>
+          <a:ln/>
+        </p:spPr>
+        <p:txBody>
+          <a:bodyPr wrap="square" lIns="0" tIns="0" rIns="0" bIns="0" rtlCol="0" anchor="ctr"/>
+          <a:lstStyle/>
+          <a:p>
+            <a:pPr algn="ctr" indent="0" marL="0">
+              <a:lnSpc>
+                <a:spcPct val="100000"/>
+              </a:lnSpc>
+              <a:buNone/>
+            </a:pPr>
+            <a:r>
+              <a:rPr lang="en-US" sz="1150" b="1" dirty="0">
+                <a:solidFill>
+                  <a:srgbClr val="17313B"/>
+                </a:solidFill>
+                <a:latin typeface="Malgun Gothic" pitchFamily="34" charset="0"/>
+                <a:ea typeface="Malgun Gothic" pitchFamily="34" charset="-122"/>
+                <a:cs typeface="Malgun Gothic" pitchFamily="34" charset="-120"/>
+              </a:rPr>
+              <a:t>3년</a:t>
+            </a:r>
+            <a:endParaRPr lang="en-US" sz="1150" dirty="0"/>
+          </a:p>
+          <a:p>
+            <a:pPr algn="ctr" indent="0" marL="0">
+              <a:lnSpc>
+                <a:spcPct val="100000"/>
+              </a:lnSpc>
+              <a:buNone/>
+            </a:pPr>
+            <a:r>
+              <a:rPr lang="en-US" sz="1150" b="1" dirty="0">
+                <a:solidFill>
+                  <a:srgbClr val="17313B"/>
+                </a:solidFill>
+                <a:latin typeface="Malgun Gothic" pitchFamily="34" charset="0"/>
+                <a:ea typeface="Malgun Gothic" pitchFamily="34" charset="-122"/>
+                <a:cs typeface="Malgun Gothic" pitchFamily="34" charset="-120"/>
+              </a:rPr>
+              <a:t>표준화</a:t>
+            </a:r>
+            <a:endParaRPr lang="en-US" sz="1150" dirty="0"/>
+          </a:p>
+        </p:txBody>
+      </p:sp>
+      <p:sp>
+        <p:nvSpPr>
+          <p:cNvPr id="69" name="Shape 61"/>
+          <p:cNvSpPr/>
+          <p:nvPr/>
+        </p:nvSpPr>
+        <p:spPr>
+          <a:xfrm>
+            <a:off x="8311896" y="4864608"/>
+            <a:ext cx="3236976" cy="512064"/>
+          </a:xfrm>
+          <a:prstGeom prst="roundRect">
+            <a:avLst>
+              <a:gd name="adj" fmla="val 14286"/>
+            </a:avLst>
+          </a:prstGeom>
+          <a:solidFill>
+            <a:srgbClr val="E8F6F0"/>
+          </a:solidFill>
+          <a:ln w="15875">
             <a:solidFill>
               <a:srgbClr val="02A878"/>
             </a:solidFill>
@@ -3275,55 +3548,59 @@
           </a:ln>
         </p:spPr>
       </p:sp>
-      <p:sp>
-        <p:nvSpPr>
-          <p:cNvPr id="63" name="Shape 55"/>
-          <p:cNvSpPr/>
-          <p:nvPr/>
-        </p:nvSpPr>
-        <p:spPr>
-          <a:xfrm>
-            <a:off x="8631936" y="4764024"/>
-            <a:ext cx="128016" cy="128016"/>
-          </a:xfrm>
-          <a:prstGeom prst="ellipse">
-            <a:avLst/>
-          </a:prstGeom>
-          <a:solidFill>
-            <a:srgbClr val="02A878"/>
-          </a:solidFill>
-          <a:ln/>
-        </p:spPr>
-      </p:sp>
-      <p:sp>
-        <p:nvSpPr>
-          <p:cNvPr id="64" name="Text 56"/>
-          <p:cNvSpPr/>
-          <p:nvPr/>
-        </p:nvSpPr>
-        <p:spPr>
-          <a:xfrm>
-            <a:off x="8147304" y="4956048"/>
-            <a:ext cx="1097280" cy="475488"/>
-          </a:xfrm>
-          <a:prstGeom prst="rect">
-            <a:avLst/>
-          </a:prstGeom>
-          <a:noFill/>
-          <a:ln/>
-        </p:spPr>
-        <p:txBody>
-          <a:bodyPr wrap="square" lIns="0" tIns="0" rIns="0" bIns="0" rtlCol="0" anchor="ctr"/>
-          <a:lstStyle/>
-          <a:p>
-            <a:pPr algn="ctr" indent="0" marL="0">
+      <p:pic>
+        <p:nvPicPr>
+          <p:cNvPr id="70" name="Image 6" descr="preencoded.png">    </p:cNvPr>
+          <p:cNvPicPr>
+            <a:picLocks noChangeAspect="1"/>
+          </p:cNvPicPr>
+          <p:nvPr/>
+        </p:nvPicPr>
+        <p:blipFill>
+          <a:blip r:embed="rId7"/>
+          <a:stretch>
+            <a:fillRect/>
+          </a:stretch>
+        </p:blipFill>
+        <p:spPr>
+          <a:xfrm>
+            <a:off x="8494776" y="4937760"/>
+            <a:ext cx="365760" cy="365760"/>
+          </a:xfrm>
+          <a:prstGeom prst="rect">
+            <a:avLst/>
+          </a:prstGeom>
+        </p:spPr>
+      </p:pic>
+      <p:sp>
+        <p:nvSpPr>
+          <p:cNvPr id="71" name="Text 62"/>
+          <p:cNvSpPr/>
+          <p:nvPr/>
+        </p:nvSpPr>
+        <p:spPr>
+          <a:xfrm>
+            <a:off x="8988552" y="4864608"/>
+            <a:ext cx="2377440" cy="512064"/>
+          </a:xfrm>
+          <a:prstGeom prst="rect">
+            <a:avLst/>
+          </a:prstGeom>
+          <a:noFill/>
+          <a:ln/>
+        </p:spPr>
+        <p:txBody>
+          <a:bodyPr wrap="square" lIns="0" tIns="0" rIns="0" bIns="0" rtlCol="0" anchor="ctr"/>
+          <a:lstStyle/>
+          <a:p>
+            <a:pPr indent="0" marL="0">
               <a:lnSpc>
-                <a:spcPct val="100000"/>
+                <a:spcPct val="112000"/>
               </a:lnSpc>
               <a:buNone/>
             </a:pPr>
             <a:r>
-              <a:rPr lang="en-US" sz="1200" b="1" dirty="0">
+              <a:rPr lang="en-US" sz="1300" b="1" dirty="0">
                 <a:solidFill>
                   <a:srgbClr val="17313B"/>
                 </a:solidFill>
@@ -3331,199 +3608,35 @@
                 <a:ea typeface="Malgun Gothic" pitchFamily="34" charset="-122"/>
                 <a:cs typeface="Malgun Gothic" pitchFamily="34" charset="-120"/>
               </a:rPr>
-              <a:t>90일</a:t>
-            </a:r>
-            <a:endParaRPr lang="en-US" sz="1200" dirty="0"/>
-          </a:p>
-          <a:p>
-            <a:pPr algn="ctr" indent="0" marL="0">
+              <a:t>DE를 스타 플레이어로</a:t>
+            </a:r>
+            <a:endParaRPr lang="en-US" sz="1300" dirty="0"/>
+          </a:p>
+          <a:p>
+            <a:pPr indent="0" marL="0">
               <a:lnSpc>
-                <a:spcPct val="100000"/>
+                <a:spcPct val="112000"/>
               </a:lnSpc>
               <a:buNone/>
             </a:pPr>
             <a:r>
-              <a:rPr lang="en-US" sz="1200" b="1" dirty="0">
-                <a:solidFill>
-                  <a:srgbClr val="17313B"/>
-                </a:solidFill>
-                <a:latin typeface="Malgun Gothic" pitchFamily="34" charset="0"/>
-                <a:ea typeface="Malgun Gothic" pitchFamily="34" charset="-122"/>
-                <a:cs typeface="Malgun Gothic" pitchFamily="34" charset="-120"/>
-              </a:rPr>
-              <a:t>증명</a:t>
-            </a:r>
-            <a:endParaRPr lang="en-US" sz="1200" dirty="0"/>
-          </a:p>
-        </p:txBody>
-      </p:sp>
-      <p:sp>
-        <p:nvSpPr>
-          <p:cNvPr id="65" name="Shape 57"/>
-          <p:cNvSpPr/>
-          <p:nvPr/>
-        </p:nvSpPr>
-        <p:spPr>
-          <a:xfrm>
-            <a:off x="9866376" y="4764024"/>
-            <a:ext cx="128016" cy="128016"/>
-          </a:xfrm>
-          <a:prstGeom prst="ellipse">
-            <a:avLst/>
-          </a:prstGeom>
-          <a:solidFill>
-            <a:srgbClr val="02A878"/>
-          </a:solidFill>
-          <a:ln/>
-        </p:spPr>
-      </p:sp>
-      <p:sp>
-        <p:nvSpPr>
-          <p:cNvPr id="66" name="Text 58"/>
-          <p:cNvSpPr/>
-          <p:nvPr/>
-        </p:nvSpPr>
-        <p:spPr>
-          <a:xfrm>
-            <a:off x="9381744" y="4956048"/>
-            <a:ext cx="1097280" cy="475488"/>
-          </a:xfrm>
-          <a:prstGeom prst="rect">
-            <a:avLst/>
-          </a:prstGeom>
-          <a:noFill/>
-          <a:ln/>
-        </p:spPr>
-        <p:txBody>
-          <a:bodyPr wrap="square" lIns="0" tIns="0" rIns="0" bIns="0" rtlCol="0" anchor="ctr"/>
-          <a:lstStyle/>
-          <a:p>
-            <a:pPr algn="ctr" indent="0" marL="0">
-              <a:lnSpc>
-                <a:spcPct val="100000"/>
-              </a:lnSpc>
-              <a:buNone/>
-            </a:pPr>
-            <a:r>
-              <a:rPr lang="en-US" sz="1200" b="1" dirty="0">
-                <a:solidFill>
-                  <a:srgbClr val="17313B"/>
-                </a:solidFill>
-                <a:latin typeface="Malgun Gothic" pitchFamily="34" charset="0"/>
-                <a:ea typeface="Malgun Gothic" pitchFamily="34" charset="-122"/>
-                <a:cs typeface="Malgun Gothic" pitchFamily="34" charset="-120"/>
-              </a:rPr>
-              <a:t>1년</a:t>
-            </a:r>
-            <a:endParaRPr lang="en-US" sz="1200" dirty="0"/>
-          </a:p>
-          <a:p>
-            <a:pPr algn="ctr" indent="0" marL="0">
-              <a:lnSpc>
-                <a:spcPct val="100000"/>
-              </a:lnSpc>
-              <a:buNone/>
-            </a:pPr>
-            <a:r>
-              <a:rPr lang="en-US" sz="1200" b="1" dirty="0">
-                <a:solidFill>
-                  <a:srgbClr val="17313B"/>
-                </a:solidFill>
-                <a:latin typeface="Malgun Gothic" pitchFamily="34" charset="0"/>
-                <a:ea typeface="Malgun Gothic" pitchFamily="34" charset="-122"/>
-                <a:cs typeface="Malgun Gothic" pitchFamily="34" charset="-120"/>
-              </a:rPr>
-              <a:t>제도화</a:t>
-            </a:r>
-            <a:endParaRPr lang="en-US" sz="1200" dirty="0"/>
-          </a:p>
-        </p:txBody>
-      </p:sp>
-      <p:sp>
-        <p:nvSpPr>
-          <p:cNvPr id="67" name="Shape 59"/>
-          <p:cNvSpPr/>
-          <p:nvPr/>
-        </p:nvSpPr>
-        <p:spPr>
-          <a:xfrm>
-            <a:off x="11100816" y="4764024"/>
-            <a:ext cx="128016" cy="128016"/>
-          </a:xfrm>
-          <a:prstGeom prst="ellipse">
-            <a:avLst/>
-          </a:prstGeom>
-          <a:solidFill>
-            <a:srgbClr val="02A878"/>
-          </a:solidFill>
-          <a:ln/>
-        </p:spPr>
-      </p:sp>
-      <p:sp>
-        <p:nvSpPr>
-          <p:cNvPr id="68" name="Text 60"/>
-          <p:cNvSpPr/>
-          <p:nvPr/>
-        </p:nvSpPr>
-        <p:spPr>
-          <a:xfrm>
-            <a:off x="10616184" y="4956048"/>
-            <a:ext cx="1097280" cy="475488"/>
-          </a:xfrm>
-          <a:prstGeom prst="rect">
-            <a:avLst/>
-          </a:prstGeom>
-          <a:noFill/>
-          <a:ln/>
-        </p:spPr>
-        <p:txBody>
-          <a:bodyPr wrap="square" lIns="0" tIns="0" rIns="0" bIns="0" rtlCol="0" anchor="ctr"/>
-          <a:lstStyle/>
-          <a:p>
-            <a:pPr algn="ctr" indent="0" marL="0">
-              <a:lnSpc>
-                <a:spcPct val="100000"/>
-              </a:lnSpc>
-              <a:buNone/>
-            </a:pPr>
-            <a:r>
-              <a:rPr lang="en-US" sz="1200" b="1" dirty="0">
-                <a:solidFill>
-                  <a:srgbClr val="17313B"/>
-                </a:solidFill>
-                <a:latin typeface="Malgun Gothic" pitchFamily="34" charset="0"/>
-                <a:ea typeface="Malgun Gothic" pitchFamily="34" charset="-122"/>
-                <a:cs typeface="Malgun Gothic" pitchFamily="34" charset="-120"/>
-              </a:rPr>
-              <a:t>3년</a:t>
-            </a:r>
-            <a:endParaRPr lang="en-US" sz="1200" dirty="0"/>
-          </a:p>
-          <a:p>
-            <a:pPr algn="ctr" indent="0" marL="0">
-              <a:lnSpc>
-                <a:spcPct val="100000"/>
-              </a:lnSpc>
-              <a:buNone/>
-            </a:pPr>
-            <a:r>
-              <a:rPr lang="en-US" sz="1200" b="1" dirty="0">
-                <a:solidFill>
-                  <a:srgbClr val="17313B"/>
-                </a:solidFill>
-                <a:latin typeface="Malgun Gothic" pitchFamily="34" charset="0"/>
-                <a:ea typeface="Malgun Gothic" pitchFamily="34" charset="-122"/>
-                <a:cs typeface="Malgun Gothic" pitchFamily="34" charset="-120"/>
-              </a:rPr>
-              <a:t>표준화</a:t>
-            </a:r>
-            <a:endParaRPr lang="en-US" sz="1200" dirty="0"/>
-          </a:p>
-        </p:txBody>
-      </p:sp>
-      <p:sp>
-        <p:nvSpPr>
-          <p:cNvPr id="69" name="Text 61"/>
+              <a:rPr lang="en-US" sz="1050" dirty="0">
+                <a:solidFill>
+                  <a:srgbClr val="5A7184"/>
+                </a:solidFill>
+                <a:latin typeface="Malgun Gothic" pitchFamily="34" charset="0"/>
+                <a:ea typeface="Malgun Gothic" pitchFamily="34" charset="-122"/>
+                <a:cs typeface="Malgun Gothic" pitchFamily="34" charset="-120"/>
+              </a:rPr>
+              <a:t>고객과 기술 생태계 공동 설계</a:t>
+            </a:r>
+            <a:endParaRPr lang="en-US" sz="1300" dirty="0"/>
+          </a:p>
+        </p:txBody>
+      </p:sp>
+      <p:sp>
+        <p:nvSpPr>
+          <p:cNvPr id="72" name="Text 63"/>
           <p:cNvSpPr/>
           <p:nvPr/>
         </p:nvSpPr>
@@ -3548,7 +3661,7 @@
             <a:r>
               <a:rPr lang="en-US" sz="2400" b="1" dirty="0">
                 <a:solidFill>
-                  <a:srgbClr val="028090"/>
+                  <a:srgbClr val="17313B"/>
                 </a:solidFill>
                 <a:latin typeface="Malgun Gothic" pitchFamily="34" charset="0"/>
                 <a:ea typeface="Malgun Gothic" pitchFamily="34" charset="-122"/>
@@ -3562,7 +3675,7 @@
       </p:sp>
       <p:sp>
         <p:nvSpPr>
-          <p:cNvPr id="70" name="Text 62"/>
+          <p:cNvPr id="73" name="Text 64"/>
           <p:cNvSpPr/>
           <p:nvPr/>
         </p:nvSpPr>
@@ -3601,7 +3714,7 @@
       </p:sp>
       <p:sp>
         <p:nvSpPr>
-          <p:cNvPr id="71" name="Text 63"/>
+          <p:cNvPr id="74" name="Text 65"/>
           <p:cNvSpPr/>
           <p:nvPr/>
         </p:nvSpPr>
@@ -3626,7 +3739,7 @@
             <a:r>
               <a:rPr lang="en-US" sz="2400" b="1" dirty="0">
                 <a:solidFill>
-                  <a:srgbClr val="028090"/>
+                  <a:srgbClr val="17313B"/>
                 </a:solidFill>
                 <a:latin typeface="Malgun Gothic" pitchFamily="34" charset="0"/>
                 <a:ea typeface="Malgun Gothic" pitchFamily="34" charset="-122"/>
@@ -3640,7 +3753,7 @@
       </p:sp>
       <p:sp>
         <p:nvSpPr>
-          <p:cNvPr id="72" name="Text 64"/>
+          <p:cNvPr id="75" name="Text 66"/>
           <p:cNvSpPr/>
           <p:nvPr/>
         </p:nvSpPr>
@@ -3679,7 +3792,7 @@
       </p:sp>
       <p:sp>
         <p:nvSpPr>
-          <p:cNvPr id="73" name="Text 65"/>
+          <p:cNvPr id="76" name="Text 67"/>
           <p:cNvSpPr/>
           <p:nvPr/>
         </p:nvSpPr>
@@ -3704,7 +3817,7 @@
             <a:r>
               <a:rPr lang="en-US" sz="2400" b="1" dirty="0">
                 <a:solidFill>
-                  <a:srgbClr val="028090"/>
+                  <a:srgbClr val="17313B"/>
                 </a:solidFill>
                 <a:latin typeface="Malgun Gothic" pitchFamily="34" charset="0"/>
                 <a:ea typeface="Malgun Gothic" pitchFamily="34" charset="-122"/>
@@ -3718,7 +3831,7 @@
       </p:sp>
       <p:sp>
         <p:nvSpPr>
-          <p:cNvPr id="74" name="Text 66"/>
+          <p:cNvPr id="77" name="Text 68"/>
           <p:cNvSpPr/>
           <p:nvPr/>
         </p:nvSpPr>
@@ -3757,7 +3870,7 @@
       </p:sp>
       <p:sp>
         <p:nvSpPr>
-          <p:cNvPr id="75" name="Text 67"/>
+          <p:cNvPr id="78" name="Text 69"/>
           <p:cNvSpPr/>
           <p:nvPr/>
         </p:nvSpPr>
@@ -3782,7 +3895,7 @@
             <a:r>
               <a:rPr lang="en-US" sz="2400" b="1" dirty="0">
                 <a:solidFill>
-                  <a:srgbClr val="028090"/>
+                  <a:srgbClr val="17313B"/>
                 </a:solidFill>
                 <a:latin typeface="Malgun Gothic" pitchFamily="34" charset="0"/>
                 <a:ea typeface="Malgun Gothic" pitchFamily="34" charset="-122"/>
@@ -3796,7 +3909,7 @@
       </p:sp>
       <p:sp>
         <p:nvSpPr>
-          <p:cNvPr id="76" name="Text 68"/>
+          <p:cNvPr id="79" name="Text 70"/>
           <p:cNvSpPr/>
           <p:nvPr/>
         </p:nvSpPr>
@@ -3835,7 +3948,7 @@
       </p:sp>
       <p:sp>
         <p:nvSpPr>
-          <p:cNvPr id="77" name="Text 69"/>
+          <p:cNvPr id="80" name="Text 71"/>
           <p:cNvSpPr/>
           <p:nvPr/>
         </p:nvSpPr>
@@ -3860,7 +3973,7 @@
             <a:r>
               <a:rPr lang="en-US" sz="2400" b="1" dirty="0">
                 <a:solidFill>
-                  <a:srgbClr val="028090"/>
+                  <a:srgbClr val="02A878"/>
                 </a:solidFill>
                 <a:latin typeface="Malgun Gothic" pitchFamily="34" charset="0"/>
                 <a:ea typeface="Malgun Gothic" pitchFamily="34" charset="-122"/>
@@ -3874,7 +3987,7 @@
       </p:sp>
       <p:sp>
         <p:nvSpPr>
-          <p:cNvPr id="78" name="Text 70"/>
+          <p:cNvPr id="81" name="Text 72"/>
           <p:cNvSpPr/>
           <p:nvPr/>
         </p:nvSpPr>
@@ -3992,7 +4105,7 @@
             </a:avLst>
           </a:prstGeom>
           <a:solidFill>
-            <a:srgbClr val="E6F4F4"/>
+            <a:srgbClr val="EFF3F5"/>
           </a:solidFill>
           <a:ln/>
         </p:spPr>
@@ -4006,7 +4119,7 @@
             <a:r>
               <a:rPr lang="en-US" sz="1400" b="1" dirty="0">
                 <a:solidFill>
-                  <a:srgbClr val="028090"/>
+                  <a:srgbClr val="5A7184"/>
                 </a:solidFill>
                 <a:latin typeface="Malgun Gothic" pitchFamily="34" charset="0"/>
                 <a:ea typeface="Malgun Gothic" pitchFamily="34" charset="-122"/>
@@ -4105,15 +4218,15 @@
         <p:spPr>
           <a:xfrm>
             <a:off x="457200" y="859536"/>
-            <a:ext cx="11274552" cy="530352"/>
+            <a:ext cx="11274552" cy="512064"/>
           </a:xfrm>
           <a:prstGeom prst="roundRect">
             <a:avLst>
-              <a:gd name="adj" fmla="val 15517"/>
+              <a:gd name="adj" fmla="val 16071"/>
             </a:avLst>
           </a:prstGeom>
           <a:solidFill>
-            <a:srgbClr val="E8F6F0"/>
+            <a:srgbClr val="F5F7F8"/>
           </a:solidFill>
           <a:ln/>
         </p:spPr>
@@ -4147,16 +4260,16 @@
         </p:nvSpPr>
         <p:spPr>
           <a:xfrm>
-            <a:off x="457200" y="1554480"/>
-            <a:ext cx="5477256" cy="2011680"/>
+            <a:off x="457200" y="1517904"/>
+            <a:ext cx="5477256" cy="1865376"/>
           </a:xfrm>
           <a:prstGeom prst="roundRect">
             <a:avLst>
-              <a:gd name="adj" fmla="val 4091"/>
+              <a:gd name="adj" fmla="val 4412"/>
             </a:avLst>
           </a:prstGeom>
           <a:solidFill>
-            <a:srgbClr val="EAF3FA"/>
+            <a:srgbClr val="F5F7F8"/>
           </a:solidFill>
           <a:ln/>
         </p:spPr>
@@ -4169,14 +4282,14 @@
         </p:nvSpPr>
         <p:spPr>
           <a:xfrm>
-            <a:off x="640080" y="1700784"/>
+            <a:off x="640080" y="1645920"/>
             <a:ext cx="329184" cy="329184"/>
           </a:xfrm>
           <a:prstGeom prst="ellipse">
             <a:avLst/>
           </a:prstGeom>
           <a:solidFill>
-            <a:srgbClr val="0E6BA8"/>
+            <a:srgbClr val="17313B"/>
           </a:solidFill>
           <a:ln/>
         </p:spPr>
@@ -4210,7 +4323,7 @@
         </p:nvSpPr>
         <p:spPr>
           <a:xfrm>
-            <a:off x="1060704" y="1673352"/>
+            <a:off x="1060704" y="1618488"/>
             <a:ext cx="4206240" cy="365760"/>
           </a:xfrm>
           <a:prstGeom prst="rect">
@@ -4229,7 +4342,7 @@
             <a:r>
               <a:rPr lang="en-US" sz="1900" b="1" dirty="0">
                 <a:solidFill>
-                  <a:srgbClr val="0E6BA8"/>
+                  <a:srgbClr val="17313B"/>
                 </a:solidFill>
                 <a:latin typeface="Malgun Gothic" pitchFamily="34" charset="0"/>
                 <a:ea typeface="Malgun Gothic" pitchFamily="34" charset="-122"/>
@@ -4249,16 +4362,16 @@
         </p:nvSpPr>
         <p:spPr>
           <a:xfrm>
-            <a:off x="713232" y="2157984"/>
-            <a:ext cx="1463040" cy="786384"/>
+            <a:off x="713232" y="2048256"/>
+            <a:ext cx="1463040" cy="749808"/>
           </a:xfrm>
           <a:prstGeom prst="roundRect">
             <a:avLst>
-              <a:gd name="adj" fmla="val 8140"/>
+              <a:gd name="adj" fmla="val 8537"/>
             </a:avLst>
           </a:prstGeom>
           <a:solidFill>
-            <a:srgbClr val="C7D5DE"/>
+            <a:srgbClr val="E7ECEF"/>
           </a:solidFill>
           <a:ln/>
         </p:spPr>
@@ -4309,8 +4422,8 @@
         </p:nvSpPr>
         <p:spPr>
           <a:xfrm>
-            <a:off x="2157984" y="2157984"/>
-            <a:ext cx="274320" cy="786384"/>
+            <a:off x="2157984" y="2048256"/>
+            <a:ext cx="274320" cy="749808"/>
           </a:xfrm>
           <a:prstGeom prst="rect">
             <a:avLst/>
@@ -4328,7 +4441,7 @@
             <a:r>
               <a:rPr lang="en-US" sz="1400" dirty="0">
                 <a:solidFill>
-                  <a:srgbClr val="0E6BA8"/>
+                  <a:srgbClr val="5A7184"/>
                 </a:solidFill>
                 <a:latin typeface="Malgun Gothic" pitchFamily="34" charset="0"/>
                 <a:ea typeface="Malgun Gothic" pitchFamily="34" charset="-122"/>
@@ -4348,16 +4461,16 @@
         </p:nvSpPr>
         <p:spPr>
           <a:xfrm>
-            <a:off x="2414016" y="2157984"/>
-            <a:ext cx="1463040" cy="786384"/>
+            <a:off x="2414016" y="2048256"/>
+            <a:ext cx="1463040" cy="749808"/>
           </a:xfrm>
           <a:prstGeom prst="roundRect">
             <a:avLst>
-              <a:gd name="adj" fmla="val 8140"/>
+              <a:gd name="adj" fmla="val 8537"/>
             </a:avLst>
           </a:prstGeom>
           <a:solidFill>
-            <a:srgbClr val="7FB3D3"/>
+            <a:srgbClr val="CBD6DD"/>
           </a:solidFill>
           <a:ln/>
         </p:spPr>
@@ -4371,7 +4484,7 @@
             <a:r>
               <a:rPr lang="en-US" sz="1700" b="1" dirty="0">
                 <a:solidFill>
-                  <a:srgbClr val="FFFFFF"/>
+                  <a:srgbClr val="17313B"/>
                 </a:solidFill>
                 <a:latin typeface="Malgun Gothic" pitchFamily="34" charset="0"/>
                 <a:ea typeface="Malgun Gothic" pitchFamily="34" charset="-122"/>
@@ -4388,7 +4501,7 @@
             <a:r>
               <a:rPr lang="en-US" sz="1050" dirty="0">
                 <a:solidFill>
-                  <a:srgbClr val="FFFFFF"/>
+                  <a:srgbClr val="17313B"/>
                 </a:solidFill>
                 <a:latin typeface="Malgun Gothic" pitchFamily="34" charset="0"/>
                 <a:ea typeface="Malgun Gothic" pitchFamily="34" charset="-122"/>
@@ -4408,8 +4521,8 @@
         </p:nvSpPr>
         <p:spPr>
           <a:xfrm>
-            <a:off x="3858768" y="2157984"/>
-            <a:ext cx="274320" cy="786384"/>
+            <a:off x="3858768" y="2048256"/>
+            <a:ext cx="274320" cy="749808"/>
           </a:xfrm>
           <a:prstGeom prst="rect">
             <a:avLst/>
@@ -4427,7 +4540,7 @@
             <a:r>
               <a:rPr lang="en-US" sz="1400" dirty="0">
                 <a:solidFill>
-                  <a:srgbClr val="0E6BA8"/>
+                  <a:srgbClr val="5A7184"/>
                 </a:solidFill>
                 <a:latin typeface="Malgun Gothic" pitchFamily="34" charset="0"/>
                 <a:ea typeface="Malgun Gothic" pitchFamily="34" charset="-122"/>
@@ -4447,12 +4560,12 @@
         </p:nvSpPr>
         <p:spPr>
           <a:xfrm>
-            <a:off x="4114800" y="2157984"/>
-            <a:ext cx="1463040" cy="786384"/>
+            <a:off x="4114800" y="2048256"/>
+            <a:ext cx="1463040" cy="749808"/>
           </a:xfrm>
           <a:prstGeom prst="roundRect">
             <a:avLst>
-              <a:gd name="adj" fmla="val 8140"/>
+              <a:gd name="adj" fmla="val 8537"/>
             </a:avLst>
           </a:prstGeom>
           <a:solidFill>
@@ -4507,7 +4620,7 @@
         </p:nvSpPr>
         <p:spPr>
           <a:xfrm>
-            <a:off x="713232" y="3108960"/>
+            <a:off x="713232" y="2944368"/>
             <a:ext cx="4965192" cy="310896"/>
           </a:xfrm>
           <a:prstGeom prst="rect">
@@ -4524,17 +4637,17 @@
               <a:buNone/>
             </a:pPr>
             <a:r>
-              <a:rPr lang="en-US" sz="1300" dirty="0">
-                <a:solidFill>
-                  <a:srgbClr val="17313B"/>
-                </a:solidFill>
-                <a:latin typeface="Malgun Gothic" pitchFamily="34" charset="0"/>
-                <a:ea typeface="Malgun Gothic" pitchFamily="34" charset="-122"/>
-                <a:cs typeface="Malgun Gothic" pitchFamily="34" charset="-120"/>
-              </a:rPr>
-              <a:t>고객이 사는 것: 정확한 납품 → 공동 기술 드라이브</a:t>
-            </a:r>
-            <a:endParaRPr lang="en-US" sz="1300" dirty="0"/>
+              <a:rPr lang="en-US" sz="1200" dirty="0">
+                <a:solidFill>
+                  <a:srgbClr val="5A7184"/>
+                </a:solidFill>
+                <a:latin typeface="Malgun Gothic" pitchFamily="34" charset="0"/>
+                <a:ea typeface="Malgun Gothic" pitchFamily="34" charset="-122"/>
+                <a:cs typeface="Malgun Gothic" pitchFamily="34" charset="-120"/>
+              </a:rPr>
+              <a:t>고객이 사는 것: 납품 → 공동 기술 드라이브 · SCA 16건 · $100B</a:t>
+            </a:r>
+            <a:endParaRPr lang="en-US" sz="1200" dirty="0"/>
           </a:p>
         </p:txBody>
       </p:sp>
@@ -4546,16 +4659,16 @@
         </p:nvSpPr>
         <p:spPr>
           <a:xfrm>
-            <a:off x="6254496" y="1554480"/>
-            <a:ext cx="5477256" cy="2011680"/>
+            <a:off x="6254496" y="1517904"/>
+            <a:ext cx="5477256" cy="1865376"/>
           </a:xfrm>
           <a:prstGeom prst="roundRect">
             <a:avLst>
-              <a:gd name="adj" fmla="val 4091"/>
+              <a:gd name="adj" fmla="val 4412"/>
             </a:avLst>
           </a:prstGeom>
           <a:solidFill>
-            <a:srgbClr val="E6F4F4"/>
+            <a:srgbClr val="F5F7F8"/>
           </a:solidFill>
           <a:ln/>
         </p:spPr>
@@ -4568,14 +4681,14 @@
         </p:nvSpPr>
         <p:spPr>
           <a:xfrm>
-            <a:off x="6437376" y="1700784"/>
+            <a:off x="6437376" y="1645920"/>
             <a:ext cx="329184" cy="329184"/>
           </a:xfrm>
           <a:prstGeom prst="ellipse">
             <a:avLst/>
           </a:prstGeom>
           <a:solidFill>
-            <a:srgbClr val="028090"/>
+            <a:srgbClr val="17313B"/>
           </a:solidFill>
           <a:ln/>
         </p:spPr>
@@ -4609,7 +4722,7 @@
         </p:nvSpPr>
         <p:spPr>
           <a:xfrm>
-            <a:off x="6858000" y="1673352"/>
+            <a:off x="6858000" y="1618488"/>
             <a:ext cx="4754880" cy="365760"/>
           </a:xfrm>
           <a:prstGeom prst="rect">
@@ -4628,7 +4741,7 @@
             <a:r>
               <a:rPr lang="en-US" sz="1900" b="1" dirty="0">
                 <a:solidFill>
-                  <a:srgbClr val="028090"/>
+                  <a:srgbClr val="17313B"/>
                 </a:solidFill>
                 <a:latin typeface="Malgun Gothic" pitchFamily="34" charset="0"/>
                 <a:ea typeface="Malgun Gothic" pitchFamily="34" charset="-122"/>
@@ -4648,12 +4761,12 @@
         </p:nvSpPr>
         <p:spPr>
           <a:xfrm>
-            <a:off x="6473952" y="2139696"/>
-            <a:ext cx="1554480" cy="365760"/>
+            <a:off x="6473952" y="2029968"/>
+            <a:ext cx="1554480" cy="347472"/>
           </a:xfrm>
           <a:prstGeom prst="roundRect">
             <a:avLst>
-              <a:gd name="adj" fmla="val 12500"/>
+              <a:gd name="adj" fmla="val 13158"/>
             </a:avLst>
           </a:prstGeom>
           <a:solidFill>
@@ -4661,7 +4774,7 @@
           </a:solidFill>
           <a:ln w="12700">
             <a:solidFill>
-              <a:srgbClr val="D9E6EC"/>
+              <a:srgbClr val="DCE4E9"/>
             </a:solidFill>
           </a:ln>
         </p:spPr>
@@ -4695,8 +4808,8 @@
         </p:nvSpPr>
         <p:spPr>
           <a:xfrm>
-            <a:off x="8065008" y="2139696"/>
-            <a:ext cx="274320" cy="365760"/>
+            <a:off x="8065008" y="2029968"/>
+            <a:ext cx="274320" cy="347472"/>
           </a:xfrm>
           <a:prstGeom prst="rect">
             <a:avLst/>
@@ -4734,12 +4847,12 @@
         </p:nvSpPr>
         <p:spPr>
           <a:xfrm>
-            <a:off x="8357616" y="2139696"/>
-            <a:ext cx="3108960" cy="365760"/>
+            <a:off x="8357616" y="2029968"/>
+            <a:ext cx="3108960" cy="347472"/>
           </a:xfrm>
           <a:prstGeom prst="roundRect">
             <a:avLst>
-              <a:gd name="adj" fmla="val 12500"/>
+              <a:gd name="adj" fmla="val 13158"/>
             </a:avLst>
           </a:prstGeom>
           <a:solidFill>
@@ -4781,12 +4894,12 @@
         </p:nvSpPr>
         <p:spPr>
           <a:xfrm>
-            <a:off x="6473952" y="2596896"/>
-            <a:ext cx="1554480" cy="365760"/>
+            <a:off x="6473952" y="2468880"/>
+            <a:ext cx="1554480" cy="347472"/>
           </a:xfrm>
           <a:prstGeom prst="roundRect">
             <a:avLst>
-              <a:gd name="adj" fmla="val 12500"/>
+              <a:gd name="adj" fmla="val 13158"/>
             </a:avLst>
           </a:prstGeom>
           <a:solidFill>
@@ -4794,7 +4907,7 @@
           </a:solidFill>
           <a:ln w="12700">
             <a:solidFill>
-              <a:srgbClr val="D9E6EC"/>
+              <a:srgbClr val="DCE4E9"/>
             </a:solidFill>
           </a:ln>
         </p:spPr>
@@ -4828,8 +4941,8 @@
         </p:nvSpPr>
         <p:spPr>
           <a:xfrm>
-            <a:off x="8065008" y="2596896"/>
-            <a:ext cx="274320" cy="365760"/>
+            <a:off x="8065008" y="2468880"/>
+            <a:ext cx="274320" cy="347472"/>
           </a:xfrm>
           <a:prstGeom prst="rect">
             <a:avLst/>
@@ -4867,12 +4980,12 @@
         </p:nvSpPr>
         <p:spPr>
           <a:xfrm>
-            <a:off x="8357616" y="2596896"/>
-            <a:ext cx="3108960" cy="365760"/>
+            <a:off x="8357616" y="2468880"/>
+            <a:ext cx="3108960" cy="347472"/>
           </a:xfrm>
           <a:prstGeom prst="roundRect">
             <a:avLst>
-              <a:gd name="adj" fmla="val 12500"/>
+              <a:gd name="adj" fmla="val 13158"/>
             </a:avLst>
           </a:prstGeom>
           <a:solidFill>
@@ -4914,12 +5027,12 @@
         </p:nvSpPr>
         <p:spPr>
           <a:xfrm>
-            <a:off x="6473952" y="3054096"/>
-            <a:ext cx="1554480" cy="365760"/>
+            <a:off x="6473952" y="2907792"/>
+            <a:ext cx="1554480" cy="347472"/>
           </a:xfrm>
           <a:prstGeom prst="roundRect">
             <a:avLst>
-              <a:gd name="adj" fmla="val 12500"/>
+              <a:gd name="adj" fmla="val 13158"/>
             </a:avLst>
           </a:prstGeom>
           <a:solidFill>
@@ -4927,7 +5040,7 @@
           </a:solidFill>
           <a:ln w="12700">
             <a:solidFill>
-              <a:srgbClr val="D9E6EC"/>
+              <a:srgbClr val="DCE4E9"/>
             </a:solidFill>
           </a:ln>
         </p:spPr>
@@ -4961,8 +5074,8 @@
         </p:nvSpPr>
         <p:spPr>
           <a:xfrm>
-            <a:off x="8065008" y="3054096"/>
-            <a:ext cx="274320" cy="365760"/>
+            <a:off x="8065008" y="2907792"/>
+            <a:ext cx="274320" cy="347472"/>
           </a:xfrm>
           <a:prstGeom prst="rect">
             <a:avLst/>
@@ -5000,12 +5113,12 @@
         </p:nvSpPr>
         <p:spPr>
           <a:xfrm>
-            <a:off x="8357616" y="3054096"/>
-            <a:ext cx="3108960" cy="365760"/>
+            <a:off x="8357616" y="2907792"/>
+            <a:ext cx="3108960" cy="347472"/>
           </a:xfrm>
           <a:prstGeom prst="roundRect">
             <a:avLst>
-              <a:gd name="adj" fmla="val 12500"/>
+              <a:gd name="adj" fmla="val 13158"/>
             </a:avLst>
           </a:prstGeom>
           <a:solidFill>
@@ -5047,16 +5160,16 @@
         </p:nvSpPr>
         <p:spPr>
           <a:xfrm>
-            <a:off x="457200" y="3730752"/>
-            <a:ext cx="11274552" cy="1133856"/>
+            <a:off x="457200" y="3529584"/>
+            <a:ext cx="11274552" cy="1005840"/>
           </a:xfrm>
           <a:prstGeom prst="roundRect">
             <a:avLst>
-              <a:gd name="adj" fmla="val 7258"/>
+              <a:gd name="adj" fmla="val 8182"/>
             </a:avLst>
           </a:prstGeom>
           <a:solidFill>
-            <a:srgbClr val="E8F6F0"/>
+            <a:srgbClr val="F5F7F8"/>
           </a:solidFill>
           <a:ln/>
         </p:spPr>
@@ -5069,14 +5182,14 @@
         </p:nvSpPr>
         <p:spPr>
           <a:xfrm>
-            <a:off x="640080" y="3877056"/>
+            <a:off x="640080" y="3657600"/>
             <a:ext cx="329184" cy="329184"/>
           </a:xfrm>
           <a:prstGeom prst="ellipse">
             <a:avLst/>
           </a:prstGeom>
           <a:solidFill>
-            <a:srgbClr val="02A878"/>
+            <a:srgbClr val="17313B"/>
           </a:solidFill>
           <a:ln/>
         </p:spPr>
@@ -5110,8 +5223,8 @@
         </p:nvSpPr>
         <p:spPr>
           <a:xfrm>
-            <a:off x="1060704" y="3849624"/>
-            <a:ext cx="3108960" cy="365760"/>
+            <a:off x="1060704" y="3630168"/>
+            <a:ext cx="3017520" cy="365760"/>
           </a:xfrm>
           <a:prstGeom prst="rect">
             <a:avLst/>
@@ -5129,7 +5242,7 @@
             <a:r>
               <a:rPr lang="en-US" sz="1900" b="1" dirty="0">
                 <a:solidFill>
-                  <a:srgbClr val="02A878"/>
+                  <a:srgbClr val="17313B"/>
                 </a:solidFill>
                 <a:latin typeface="Malgun Gothic" pitchFamily="34" charset="0"/>
                 <a:ea typeface="Malgun Gothic" pitchFamily="34" charset="-122"/>
@@ -5149,14 +5262,14 @@
         </p:nvSpPr>
         <p:spPr>
           <a:xfrm>
-            <a:off x="4224528" y="3913632"/>
-            <a:ext cx="420624" cy="420624"/>
+            <a:off x="4114800" y="3657600"/>
+            <a:ext cx="384048" cy="384048"/>
           </a:xfrm>
           <a:prstGeom prst="ellipse">
             <a:avLst/>
           </a:prstGeom>
           <a:solidFill>
-            <a:srgbClr val="0E6BA8"/>
+            <a:srgbClr val="5A7184"/>
           </a:solidFill>
           <a:ln/>
         </p:spPr>
@@ -5177,8 +5290,8 @@
         </p:blipFill>
         <p:spPr>
           <a:xfrm>
-            <a:off x="4325478" y="4014582"/>
-            <a:ext cx="218724" cy="218724"/>
+            <a:off x="4206972" y="3749772"/>
+            <a:ext cx="199705" cy="199705"/>
           </a:xfrm>
           <a:prstGeom prst="rect">
             <a:avLst/>
@@ -5193,8 +5306,8 @@
         </p:nvSpPr>
         <p:spPr>
           <a:xfrm>
-            <a:off x="4718304" y="3895344"/>
-            <a:ext cx="1371600" cy="274320"/>
+            <a:off x="4572000" y="3621024"/>
+            <a:ext cx="1426464" cy="274320"/>
           </a:xfrm>
           <a:prstGeom prst="rect">
             <a:avLst/>
@@ -5210,7 +5323,7 @@
               <a:buNone/>
             </a:pPr>
             <a:r>
-              <a:rPr lang="en-US" sz="1450" b="1" dirty="0">
+              <a:rPr lang="en-US" sz="1400" b="1" dirty="0">
                 <a:solidFill>
                   <a:srgbClr val="17313B"/>
                 </a:solidFill>
@@ -5220,7 +5333,7 @@
               </a:rPr>
               <a:t>기술</a:t>
             </a:r>
-            <a:endParaRPr lang="en-US" sz="1450" dirty="0"/>
+            <a:endParaRPr lang="en-US" sz="1400" dirty="0"/>
           </a:p>
         </p:txBody>
       </p:sp>
@@ -5232,8 +5345,8 @@
         </p:nvSpPr>
         <p:spPr>
           <a:xfrm>
-            <a:off x="4718304" y="4169664"/>
-            <a:ext cx="1426464" cy="548640"/>
+            <a:off x="4572000" y="3895344"/>
+            <a:ext cx="1463040" cy="512064"/>
           </a:xfrm>
           <a:prstGeom prst="rect">
             <a:avLst/>
@@ -5274,14 +5387,14 @@
         </p:nvSpPr>
         <p:spPr>
           <a:xfrm>
-            <a:off x="6108192" y="3913632"/>
-            <a:ext cx="420624" cy="420624"/>
+            <a:off x="6035040" y="3657600"/>
+            <a:ext cx="384048" cy="384048"/>
           </a:xfrm>
           <a:prstGeom prst="ellipse">
             <a:avLst/>
           </a:prstGeom>
           <a:solidFill>
-            <a:srgbClr val="028090"/>
+            <a:srgbClr val="5A7184"/>
           </a:solidFill>
           <a:ln/>
         </p:spPr>
@@ -5302,8 +5415,8 @@
         </p:blipFill>
         <p:spPr>
           <a:xfrm>
-            <a:off x="6209142" y="4014582"/>
-            <a:ext cx="218724" cy="218724"/>
+            <a:off x="6127212" y="3749772"/>
+            <a:ext cx="199705" cy="199705"/>
           </a:xfrm>
           <a:prstGeom prst="rect">
             <a:avLst/>
@@ -5318,8 +5431,8 @@
         </p:nvSpPr>
         <p:spPr>
           <a:xfrm>
-            <a:off x="6601968" y="3895344"/>
-            <a:ext cx="1371600" cy="274320"/>
+            <a:off x="6492240" y="3621024"/>
+            <a:ext cx="1426464" cy="274320"/>
           </a:xfrm>
           <a:prstGeom prst="rect">
             <a:avLst/>
@@ -5335,7 +5448,7 @@
               <a:buNone/>
             </a:pPr>
             <a:r>
-              <a:rPr lang="en-US" sz="1450" b="1" dirty="0">
+              <a:rPr lang="en-US" sz="1400" b="1" dirty="0">
                 <a:solidFill>
                   <a:srgbClr val="17313B"/>
                 </a:solidFill>
@@ -5345,7 +5458,7 @@
               </a:rPr>
               <a:t>문화</a:t>
             </a:r>
-            <a:endParaRPr lang="en-US" sz="1450" dirty="0"/>
+            <a:endParaRPr lang="en-US" sz="1400" dirty="0"/>
           </a:p>
         </p:txBody>
       </p:sp>
@@ -5357,8 +5470,8 @@
         </p:nvSpPr>
         <p:spPr>
           <a:xfrm>
-            <a:off x="6601968" y="4169664"/>
-            <a:ext cx="1426464" cy="548640"/>
+            <a:off x="6492240" y="3895344"/>
+            <a:ext cx="1463040" cy="512064"/>
           </a:xfrm>
           <a:prstGeom prst="rect">
             <a:avLst/>
@@ -5385,7 +5498,7 @@
                 <a:ea typeface="Malgun Gothic" pitchFamily="34" charset="-122"/>
                 <a:cs typeface="Malgun Gothic" pitchFamily="34" charset="-120"/>
               </a:rPr>
-              <a:t>가설 제안 KPI · 스타 호명</a:t>
+              <a:t>모난 놈 → 호명 문화</a:t>
             </a:r>
             <a:endParaRPr lang="en-US" sz="1000" dirty="0"/>
           </a:p>
@@ -5399,14 +5512,14 @@
         </p:nvSpPr>
         <p:spPr>
           <a:xfrm>
-            <a:off x="7991856" y="3913632"/>
-            <a:ext cx="420624" cy="420624"/>
+            <a:off x="7955280" y="3657600"/>
+            <a:ext cx="384048" cy="384048"/>
           </a:xfrm>
           <a:prstGeom prst="ellipse">
             <a:avLst/>
           </a:prstGeom>
           <a:solidFill>
-            <a:srgbClr val="02A878"/>
+            <a:srgbClr val="5A7184"/>
           </a:solidFill>
           <a:ln/>
         </p:spPr>
@@ -5427,8 +5540,8 @@
         </p:blipFill>
         <p:spPr>
           <a:xfrm>
-            <a:off x="8092806" y="4014582"/>
-            <a:ext cx="218724" cy="218724"/>
+            <a:off x="8047452" y="3749772"/>
+            <a:ext cx="199705" cy="199705"/>
           </a:xfrm>
           <a:prstGeom prst="rect">
             <a:avLst/>
@@ -5443,8 +5556,8 @@
         </p:nvSpPr>
         <p:spPr>
           <a:xfrm>
-            <a:off x="8485632" y="3895344"/>
-            <a:ext cx="1371600" cy="274320"/>
+            <a:off x="8412480" y="3621024"/>
+            <a:ext cx="1426464" cy="274320"/>
           </a:xfrm>
           <a:prstGeom prst="rect">
             <a:avLst/>
@@ -5460,7 +5573,7 @@
               <a:buNone/>
             </a:pPr>
             <a:r>
-              <a:rPr lang="en-US" sz="1450" b="1" dirty="0">
+              <a:rPr lang="en-US" sz="1400" b="1" dirty="0">
                 <a:solidFill>
                   <a:srgbClr val="17313B"/>
                 </a:solidFill>
@@ -5470,7 +5583,7 @@
               </a:rPr>
               <a:t>조직</a:t>
             </a:r>
-            <a:endParaRPr lang="en-US" sz="1450" dirty="0"/>
+            <a:endParaRPr lang="en-US" sz="1400" dirty="0"/>
           </a:p>
         </p:txBody>
       </p:sp>
@@ -5482,8 +5595,8 @@
         </p:nvSpPr>
         <p:spPr>
           <a:xfrm>
-            <a:off x="8485632" y="4169664"/>
-            <a:ext cx="1426464" cy="548640"/>
+            <a:off x="8412480" y="3895344"/>
+            <a:ext cx="1463040" cy="512064"/>
           </a:xfrm>
           <a:prstGeom prst="rect">
             <a:avLst/>
@@ -5510,7 +5623,7 @@
                 <a:ea typeface="Malgun Gothic" pitchFamily="34" charset="-122"/>
                 <a:cs typeface="Malgun Gothic" pitchFamily="34" charset="-120"/>
               </a:rPr>
-              <a:t>Co-Design Pod · DE 트랙</a:t>
+              <a:t>DE 스타 · Co-Design Pod</a:t>
             </a:r>
             <a:endParaRPr lang="en-US" sz="1000" dirty="0"/>
           </a:p>
@@ -5524,14 +5637,14 @@
         </p:nvSpPr>
         <p:spPr>
           <a:xfrm>
-            <a:off x="9875520" y="3913632"/>
-            <a:ext cx="420624" cy="420624"/>
+            <a:off x="9875520" y="3657600"/>
+            <a:ext cx="384048" cy="384048"/>
           </a:xfrm>
           <a:prstGeom prst="ellipse">
             <a:avLst/>
           </a:prstGeom>
           <a:solidFill>
-            <a:srgbClr val="4C7C94"/>
+            <a:srgbClr val="5A7184"/>
           </a:solidFill>
           <a:ln/>
         </p:spPr>
@@ -5552,8 +5665,8 @@
         </p:blipFill>
         <p:spPr>
           <a:xfrm>
-            <a:off x="9976470" y="4014582"/>
-            <a:ext cx="218724" cy="218724"/>
+            <a:off x="9967692" y="3749772"/>
+            <a:ext cx="199705" cy="199705"/>
           </a:xfrm>
           <a:prstGeom prst="rect">
             <a:avLst/>
@@ -5568,8 +5681,8 @@
         </p:nvSpPr>
         <p:spPr>
           <a:xfrm>
-            <a:off x="10369296" y="3895344"/>
-            <a:ext cx="1371600" cy="274320"/>
+            <a:off x="10332720" y="3621024"/>
+            <a:ext cx="1426464" cy="274320"/>
           </a:xfrm>
           <a:prstGeom prst="rect">
             <a:avLst/>
@@ -5585,7 +5698,7 @@
               <a:buNone/>
             </a:pPr>
             <a:r>
-              <a:rPr lang="en-US" sz="1450" b="1" dirty="0">
+              <a:rPr lang="en-US" sz="1400" b="1" dirty="0">
                 <a:solidFill>
                   <a:srgbClr val="17313B"/>
                 </a:solidFill>
@@ -5595,7 +5708,7 @@
               </a:rPr>
               <a:t>방식</a:t>
             </a:r>
-            <a:endParaRPr lang="en-US" sz="1450" dirty="0"/>
+            <a:endParaRPr lang="en-US" sz="1400" dirty="0"/>
           </a:p>
         </p:txBody>
       </p:sp>
@@ -5607,8 +5720,8 @@
         </p:nvSpPr>
         <p:spPr>
           <a:xfrm>
-            <a:off x="10369296" y="4169664"/>
-            <a:ext cx="1426464" cy="548640"/>
+            <a:off x="10332720" y="3895344"/>
+            <a:ext cx="1463040" cy="512064"/>
           </a:xfrm>
           <a:prstGeom prst="rect">
             <a:avLst/>
@@ -5635,7 +5748,7 @@
                 <a:ea typeface="Malgun Gothic" pitchFamily="34" charset="-122"/>
                 <a:cs typeface="Malgun Gothic" pitchFamily="34" charset="-120"/>
               </a:rPr>
-              <a:t>교차 리뷰 · PoA · AI 내재화</a:t>
+              <a:t>교차 리뷰 · PoA · AI</a:t>
             </a:r>
             <a:endParaRPr lang="en-US" sz="1000" dirty="0"/>
           </a:p>
@@ -5649,67 +5762,180 @@
         </p:nvSpPr>
         <p:spPr>
           <a:xfrm>
-            <a:off x="1463040" y="5431536"/>
-            <a:ext cx="9262872" cy="0"/>
-          </a:xfrm>
-          <a:prstGeom prst="line">
-            <a:avLst/>
-          </a:prstGeom>
-          <a:noFill/>
-          <a:ln w="25400">
+            <a:off x="457200" y="4645152"/>
+            <a:ext cx="11274552" cy="676656"/>
+          </a:xfrm>
+          <a:prstGeom prst="roundRect">
+            <a:avLst>
+              <a:gd name="adj" fmla="val 10811"/>
+            </a:avLst>
+          </a:prstGeom>
+          <a:solidFill>
+            <a:srgbClr val="E8F6F0"/>
+          </a:solidFill>
+          <a:ln w="15875">
             <a:solidFill>
-              <a:srgbClr val="028090"/>
+              <a:srgbClr val="02A878"/>
             </a:solidFill>
             <a:prstDash val="solid"/>
           </a:ln>
         </p:spPr>
       </p:sp>
-      <p:sp>
-        <p:nvSpPr>
-          <p:cNvPr id="48" name="Shape 42"/>
-          <p:cNvSpPr/>
-          <p:nvPr/>
-        </p:nvSpPr>
-        <p:spPr>
-          <a:xfrm>
-            <a:off x="1380744" y="5349240"/>
+      <p:pic>
+        <p:nvPicPr>
+          <p:cNvPr id="48" name="Image 4" descr="preencoded.png">    </p:cNvPr>
+          <p:cNvPicPr>
+            <a:picLocks noChangeAspect="1"/>
+          </p:cNvPicPr>
+          <p:nvPr/>
+        </p:nvPicPr>
+        <p:blipFill>
+          <a:blip r:embed="rId5"/>
+          <a:stretch>
+            <a:fillRect/>
+          </a:stretch>
+        </p:blipFill>
+        <p:spPr>
+          <a:xfrm>
+            <a:off x="640080" y="4800600"/>
+            <a:ext cx="365760" cy="365760"/>
+          </a:xfrm>
+          <a:prstGeom prst="rect">
+            <a:avLst/>
+          </a:prstGeom>
+        </p:spPr>
+      </p:pic>
+      <p:sp>
+        <p:nvSpPr>
+          <p:cNvPr id="49" name="Text 42"/>
+          <p:cNvSpPr/>
+          <p:nvPr/>
+        </p:nvSpPr>
+        <p:spPr>
+          <a:xfrm>
+            <a:off x="1133856" y="4645152"/>
+            <a:ext cx="10415016" cy="676656"/>
+          </a:xfrm>
+          <a:prstGeom prst="rect">
+            <a:avLst/>
+          </a:prstGeom>
+          <a:noFill/>
+          <a:ln/>
+        </p:spPr>
+        <p:txBody>
+          <a:bodyPr wrap="square" lIns="0" tIns="0" rIns="0" bIns="0" rtlCol="0" anchor="ctr"/>
+          <a:lstStyle/>
+          <a:p>
+            <a:pPr indent="0" marL="0">
+              <a:lnSpc>
+                <a:spcPct val="112000"/>
+              </a:lnSpc>
+              <a:buNone/>
+            </a:pPr>
+            <a:r>
+              <a:rPr lang="en-US" sz="1400" b="1" dirty="0">
+                <a:solidFill>
+                  <a:srgbClr val="17313B"/>
+                </a:solidFill>
+                <a:latin typeface="Malgun Gothic" pitchFamily="34" charset="0"/>
+                <a:ea typeface="Malgun Gothic" pitchFamily="34" charset="-122"/>
+                <a:cs typeface="Malgun Gothic" pitchFamily="34" charset="-120"/>
+              </a:rPr>
+              <a:t>핵심 — DE(Distinguished Engineer)를 스타 플레이어로, 고객사와 기술 생태계를 함께 만든다</a:t>
+            </a:r>
+            <a:endParaRPr lang="en-US" sz="1400" dirty="0"/>
+          </a:p>
+          <a:p>
+            <a:pPr indent="0" marL="0">
+              <a:lnSpc>
+                <a:spcPct val="112000"/>
+              </a:lnSpc>
+              <a:buNone/>
+            </a:pPr>
+            <a:r>
+              <a:rPr lang="en-US" sz="1100" dirty="0">
+                <a:solidFill>
+                  <a:srgbClr val="5A7184"/>
+                </a:solidFill>
+                <a:latin typeface="Malgun Gothic" pitchFamily="34" charset="0"/>
+                <a:ea typeface="Malgun Gothic" pitchFamily="34" charset="-122"/>
+                <a:cs typeface="Malgun Gothic" pitchFamily="34" charset="-120"/>
+              </a:rPr>
+              <a:t>‘모난 놈이 정 맞는’ 기존 문화 → 스타를 호명하고 드러내는 문화로 (호명사회) · 관리 보직 분리 + 실리콘밸리 현역 스타 영입</a:t>
+            </a:r>
+            <a:endParaRPr lang="en-US" sz="1400" dirty="0"/>
+          </a:p>
+        </p:txBody>
+      </p:sp>
+      <p:sp>
+        <p:nvSpPr>
+          <p:cNvPr id="50" name="Shape 43"/>
+          <p:cNvSpPr/>
+          <p:nvPr/>
+        </p:nvSpPr>
+        <p:spPr>
+          <a:xfrm>
+            <a:off x="1463040" y="5797296"/>
+            <a:ext cx="9262872" cy="0"/>
+          </a:xfrm>
+          <a:prstGeom prst="line">
+            <a:avLst/>
+          </a:prstGeom>
+          <a:noFill/>
+          <a:ln w="25400">
+            <a:solidFill>
+              <a:srgbClr val="C4CFD6"/>
+            </a:solidFill>
+            <a:prstDash val="solid"/>
+          </a:ln>
+        </p:spPr>
+      </p:sp>
+      <p:sp>
+        <p:nvSpPr>
+          <p:cNvPr id="51" name="Shape 44"/>
+          <p:cNvSpPr/>
+          <p:nvPr/>
+        </p:nvSpPr>
+        <p:spPr>
+          <a:xfrm>
+            <a:off x="1380744" y="5715000"/>
             <a:ext cx="164592" cy="164592"/>
           </a:xfrm>
           <a:prstGeom prst="ellipse">
             <a:avLst/>
           </a:prstGeom>
           <a:solidFill>
-            <a:srgbClr val="028090"/>
-          </a:solidFill>
-          <a:ln/>
-        </p:spPr>
-      </p:sp>
-      <p:sp>
-        <p:nvSpPr>
-          <p:cNvPr id="49" name="Text 43"/>
-          <p:cNvSpPr/>
-          <p:nvPr/>
-        </p:nvSpPr>
-        <p:spPr>
-          <a:xfrm>
-            <a:off x="45720" y="5047488"/>
-            <a:ext cx="2834640" cy="274320"/>
-          </a:xfrm>
-          <a:prstGeom prst="rect">
-            <a:avLst/>
-          </a:prstGeom>
-          <a:noFill/>
-          <a:ln/>
-        </p:spPr>
-        <p:txBody>
-          <a:bodyPr wrap="square" lIns="0" tIns="0" rIns="0" bIns="0" rtlCol="0" anchor="ctr"/>
-          <a:lstStyle/>
-          <a:p>
-            <a:pPr algn="ctr" indent="0" marL="0">
-              <a:buNone/>
-            </a:pPr>
-            <a:r>
-              <a:rPr lang="en-US" sz="1500" b="1" dirty="0">
+            <a:srgbClr val="17313B"/>
+          </a:solidFill>
+          <a:ln/>
+        </p:spPr>
+      </p:sp>
+      <p:sp>
+        <p:nvSpPr>
+          <p:cNvPr id="52" name="Text 45"/>
+          <p:cNvSpPr/>
+          <p:nvPr/>
+        </p:nvSpPr>
+        <p:spPr>
+          <a:xfrm>
+            <a:off x="45720" y="5449824"/>
+            <a:ext cx="2834640" cy="256032"/>
+          </a:xfrm>
+          <a:prstGeom prst="rect">
+            <a:avLst/>
+          </a:prstGeom>
+          <a:noFill/>
+          <a:ln/>
+        </p:spPr>
+        <p:txBody>
+          <a:bodyPr wrap="square" lIns="0" tIns="0" rIns="0" bIns="0" rtlCol="0" anchor="ctr"/>
+          <a:lstStyle/>
+          <a:p>
+            <a:pPr algn="ctr" indent="0" marL="0">
+              <a:buNone/>
+            </a:pPr>
+            <a:r>
+              <a:rPr lang="en-US" sz="1450" b="1" dirty="0">
                 <a:solidFill>
                   <a:srgbClr val="17313B"/>
                 </a:solidFill>
@@ -5719,36 +5945,36 @@
               </a:rPr>
               <a:t>90일 · 증명</a:t>
             </a:r>
-            <a:endParaRPr lang="en-US" sz="1500" dirty="0"/>
-          </a:p>
-        </p:txBody>
-      </p:sp>
-      <p:sp>
-        <p:nvSpPr>
-          <p:cNvPr id="50" name="Text 44"/>
-          <p:cNvSpPr/>
-          <p:nvPr/>
-        </p:nvSpPr>
-        <p:spPr>
-          <a:xfrm>
-            <a:off x="-137160" y="5596128"/>
-            <a:ext cx="3200400" cy="256032"/>
-          </a:xfrm>
-          <a:prstGeom prst="rect">
-            <a:avLst/>
-          </a:prstGeom>
-          <a:noFill/>
-          <a:ln/>
-        </p:spPr>
-        <p:txBody>
-          <a:bodyPr wrap="square" lIns="0" tIns="0" rIns="0" bIns="0" rtlCol="0" anchor="ctr"/>
-          <a:lstStyle/>
-          <a:p>
-            <a:pPr algn="ctr" indent="0" marL="0">
-              <a:buNone/>
-            </a:pPr>
-            <a:r>
-              <a:rPr lang="en-US" sz="1150" dirty="0">
+            <a:endParaRPr lang="en-US" sz="1450" dirty="0"/>
+          </a:p>
+        </p:txBody>
+      </p:sp>
+      <p:sp>
+        <p:nvSpPr>
+          <p:cNvPr id="53" name="Text 46"/>
+          <p:cNvSpPr/>
+          <p:nvPr/>
+        </p:nvSpPr>
+        <p:spPr>
+          <a:xfrm>
+            <a:off x="-137160" y="5943600"/>
+            <a:ext cx="3200400" cy="237744"/>
+          </a:xfrm>
+          <a:prstGeom prst="rect">
+            <a:avLst/>
+          </a:prstGeom>
+          <a:noFill/>
+          <a:ln/>
+        </p:spPr>
+        <p:txBody>
+          <a:bodyPr wrap="square" lIns="0" tIns="0" rIns="0" bIns="0" rtlCol="0" anchor="ctr"/>
+          <a:lstStyle/>
+          <a:p>
+            <a:pPr algn="ctr" indent="0" marL="0">
+              <a:buNone/>
+            </a:pPr>
+            <a:r>
+              <a:rPr lang="en-US" sz="1100" dirty="0">
                 <a:solidFill>
                   <a:srgbClr val="5A7184"/>
                 </a:solidFill>
@@ -5758,56 +5984,56 @@
               </a:rPr>
               <a:t>Co-Design Pod 1호 · 시스템 모델 v0.1</a:t>
             </a:r>
-            <a:endParaRPr lang="en-US" sz="1150" dirty="0"/>
-          </a:p>
-        </p:txBody>
-      </p:sp>
-      <p:sp>
-        <p:nvSpPr>
-          <p:cNvPr id="51" name="Shape 45"/>
-          <p:cNvSpPr/>
-          <p:nvPr/>
-        </p:nvSpPr>
-        <p:spPr>
-          <a:xfrm>
-            <a:off x="6016752" y="5349240"/>
+            <a:endParaRPr lang="en-US" sz="1100" dirty="0"/>
+          </a:p>
+        </p:txBody>
+      </p:sp>
+      <p:sp>
+        <p:nvSpPr>
+          <p:cNvPr id="54" name="Shape 47"/>
+          <p:cNvSpPr/>
+          <p:nvPr/>
+        </p:nvSpPr>
+        <p:spPr>
+          <a:xfrm>
+            <a:off x="6016752" y="5715000"/>
             <a:ext cx="164592" cy="164592"/>
           </a:xfrm>
           <a:prstGeom prst="ellipse">
             <a:avLst/>
           </a:prstGeom>
           <a:solidFill>
-            <a:srgbClr val="028090"/>
-          </a:solidFill>
-          <a:ln/>
-        </p:spPr>
-      </p:sp>
-      <p:sp>
-        <p:nvSpPr>
-          <p:cNvPr id="52" name="Text 46"/>
-          <p:cNvSpPr/>
-          <p:nvPr/>
-        </p:nvSpPr>
-        <p:spPr>
-          <a:xfrm>
-            <a:off x="4681728" y="5047488"/>
-            <a:ext cx="2834640" cy="274320"/>
-          </a:xfrm>
-          <a:prstGeom prst="rect">
-            <a:avLst/>
-          </a:prstGeom>
-          <a:noFill/>
-          <a:ln/>
-        </p:spPr>
-        <p:txBody>
-          <a:bodyPr wrap="square" lIns="0" tIns="0" rIns="0" bIns="0" rtlCol="0" anchor="ctr"/>
-          <a:lstStyle/>
-          <a:p>
-            <a:pPr algn="ctr" indent="0" marL="0">
-              <a:buNone/>
-            </a:pPr>
-            <a:r>
-              <a:rPr lang="en-US" sz="1500" b="1" dirty="0">
+            <a:srgbClr val="17313B"/>
+          </a:solidFill>
+          <a:ln/>
+        </p:spPr>
+      </p:sp>
+      <p:sp>
+        <p:nvSpPr>
+          <p:cNvPr id="55" name="Text 48"/>
+          <p:cNvSpPr/>
+          <p:nvPr/>
+        </p:nvSpPr>
+        <p:spPr>
+          <a:xfrm>
+            <a:off x="4681728" y="5449824"/>
+            <a:ext cx="2834640" cy="256032"/>
+          </a:xfrm>
+          <a:prstGeom prst="rect">
+            <a:avLst/>
+          </a:prstGeom>
+          <a:noFill/>
+          <a:ln/>
+        </p:spPr>
+        <p:txBody>
+          <a:bodyPr wrap="square" lIns="0" tIns="0" rIns="0" bIns="0" rtlCol="0" anchor="ctr"/>
+          <a:lstStyle/>
+          <a:p>
+            <a:pPr algn="ctr" indent="0" marL="0">
+              <a:buNone/>
+            </a:pPr>
+            <a:r>
+              <a:rPr lang="en-US" sz="1450" b="1" dirty="0">
                 <a:solidFill>
                   <a:srgbClr val="17313B"/>
                 </a:solidFill>
@@ -5817,36 +6043,36 @@
               </a:rPr>
               <a:t>1년 · 제도화</a:t>
             </a:r>
-            <a:endParaRPr lang="en-US" sz="1500" dirty="0"/>
-          </a:p>
-        </p:txBody>
-      </p:sp>
-      <p:sp>
-        <p:nvSpPr>
-          <p:cNvPr id="53" name="Text 47"/>
-          <p:cNvSpPr/>
-          <p:nvPr/>
-        </p:nvSpPr>
-        <p:spPr>
-          <a:xfrm>
-            <a:off x="4498848" y="5596128"/>
-            <a:ext cx="3200400" cy="256032"/>
-          </a:xfrm>
-          <a:prstGeom prst="rect">
-            <a:avLst/>
-          </a:prstGeom>
-          <a:noFill/>
-          <a:ln/>
-        </p:spPr>
-        <p:txBody>
-          <a:bodyPr wrap="square" lIns="0" tIns="0" rIns="0" bIns="0" rtlCol="0" anchor="ctr"/>
-          <a:lstStyle/>
-          <a:p>
-            <a:pPr algn="ctr" indent="0" marL="0">
-              <a:buNone/>
-            </a:pPr>
-            <a:r>
-              <a:rPr lang="en-US" sz="1150" dirty="0">
+            <a:endParaRPr lang="en-US" sz="1450" dirty="0"/>
+          </a:p>
+        </p:txBody>
+      </p:sp>
+      <p:sp>
+        <p:nvSpPr>
+          <p:cNvPr id="56" name="Text 49"/>
+          <p:cNvSpPr/>
+          <p:nvPr/>
+        </p:nvSpPr>
+        <p:spPr>
+          <a:xfrm>
+            <a:off x="4498848" y="5943600"/>
+            <a:ext cx="3200400" cy="237744"/>
+          </a:xfrm>
+          <a:prstGeom prst="rect">
+            <a:avLst/>
+          </a:prstGeom>
+          <a:noFill/>
+          <a:ln/>
+        </p:spPr>
+        <p:txBody>
+          <a:bodyPr wrap="square" lIns="0" tIns="0" rIns="0" bIns="0" rtlCol="0" anchor="ctr"/>
+          <a:lstStyle/>
+          <a:p>
+            <a:pPr algn="ctr" indent="0" marL="0">
+              <a:buNone/>
+            </a:pPr>
+            <a:r>
+              <a:rPr lang="en-US" sz="1100" dirty="0">
                 <a:solidFill>
                   <a:srgbClr val="5A7184"/>
                 </a:solidFill>
@@ -5856,56 +6082,56 @@
               </a:rPr>
               <a:t>Pod 3~5개 · SCA형 계약 1건</a:t>
             </a:r>
-            <a:endParaRPr lang="en-US" sz="1150" dirty="0"/>
-          </a:p>
-        </p:txBody>
-      </p:sp>
-      <p:sp>
-        <p:nvSpPr>
-          <p:cNvPr id="54" name="Shape 48"/>
-          <p:cNvSpPr/>
-          <p:nvPr/>
-        </p:nvSpPr>
-        <p:spPr>
-          <a:xfrm>
-            <a:off x="10643616" y="5349240"/>
+            <a:endParaRPr lang="en-US" sz="1100" dirty="0"/>
+          </a:p>
+        </p:txBody>
+      </p:sp>
+      <p:sp>
+        <p:nvSpPr>
+          <p:cNvPr id="57" name="Shape 50"/>
+          <p:cNvSpPr/>
+          <p:nvPr/>
+        </p:nvSpPr>
+        <p:spPr>
+          <a:xfrm>
+            <a:off x="10643616" y="5715000"/>
             <a:ext cx="164592" cy="164592"/>
           </a:xfrm>
           <a:prstGeom prst="ellipse">
             <a:avLst/>
           </a:prstGeom>
           <a:solidFill>
-            <a:srgbClr val="028090"/>
-          </a:solidFill>
-          <a:ln/>
-        </p:spPr>
-      </p:sp>
-      <p:sp>
-        <p:nvSpPr>
-          <p:cNvPr id="55" name="Text 49"/>
-          <p:cNvSpPr/>
-          <p:nvPr/>
-        </p:nvSpPr>
-        <p:spPr>
-          <a:xfrm>
-            <a:off x="9308592" y="5047488"/>
-            <a:ext cx="2834640" cy="274320"/>
-          </a:xfrm>
-          <a:prstGeom prst="rect">
-            <a:avLst/>
-          </a:prstGeom>
-          <a:noFill/>
-          <a:ln/>
-        </p:spPr>
-        <p:txBody>
-          <a:bodyPr wrap="square" lIns="0" tIns="0" rIns="0" bIns="0" rtlCol="0" anchor="ctr"/>
-          <a:lstStyle/>
-          <a:p>
-            <a:pPr algn="ctr" indent="0" marL="0">
-              <a:buNone/>
-            </a:pPr>
-            <a:r>
-              <a:rPr lang="en-US" sz="1500" b="1" dirty="0">
+            <a:srgbClr val="17313B"/>
+          </a:solidFill>
+          <a:ln/>
+        </p:spPr>
+      </p:sp>
+      <p:sp>
+        <p:nvSpPr>
+          <p:cNvPr id="58" name="Text 51"/>
+          <p:cNvSpPr/>
+          <p:nvPr/>
+        </p:nvSpPr>
+        <p:spPr>
+          <a:xfrm>
+            <a:off x="9308592" y="5449824"/>
+            <a:ext cx="2834640" cy="256032"/>
+          </a:xfrm>
+          <a:prstGeom prst="rect">
+            <a:avLst/>
+          </a:prstGeom>
+          <a:noFill/>
+          <a:ln/>
+        </p:spPr>
+        <p:txBody>
+          <a:bodyPr wrap="square" lIns="0" tIns="0" rIns="0" bIns="0" rtlCol="0" anchor="ctr"/>
+          <a:lstStyle/>
+          <a:p>
+            <a:pPr algn="ctr" indent="0" marL="0">
+              <a:buNone/>
+            </a:pPr>
+            <a:r>
+              <a:rPr lang="en-US" sz="1450" b="1" dirty="0">
                 <a:solidFill>
                   <a:srgbClr val="17313B"/>
                 </a:solidFill>
@@ -5915,36 +6141,36 @@
               </a:rPr>
               <a:t>3년 · 표준화</a:t>
             </a:r>
-            <a:endParaRPr lang="en-US" sz="1500" dirty="0"/>
-          </a:p>
-        </p:txBody>
-      </p:sp>
-      <p:sp>
-        <p:nvSpPr>
-          <p:cNvPr id="56" name="Text 50"/>
-          <p:cNvSpPr/>
-          <p:nvPr/>
-        </p:nvSpPr>
-        <p:spPr>
-          <a:xfrm>
-            <a:off x="9125712" y="5596128"/>
-            <a:ext cx="3200400" cy="256032"/>
-          </a:xfrm>
-          <a:prstGeom prst="rect">
-            <a:avLst/>
-          </a:prstGeom>
-          <a:noFill/>
-          <a:ln/>
-        </p:spPr>
-        <p:txBody>
-          <a:bodyPr wrap="square" lIns="0" tIns="0" rIns="0" bIns="0" rtlCol="0" anchor="ctr"/>
-          <a:lstStyle/>
-          <a:p>
-            <a:pPr algn="ctr" indent="0" marL="0">
-              <a:buNone/>
-            </a:pPr>
-            <a:r>
-              <a:rPr lang="en-US" sz="1150" dirty="0">
+            <a:endParaRPr lang="en-US" sz="1450" dirty="0"/>
+          </a:p>
+        </p:txBody>
+      </p:sp>
+      <p:sp>
+        <p:nvSpPr>
+          <p:cNvPr id="59" name="Text 52"/>
+          <p:cNvSpPr/>
+          <p:nvPr/>
+        </p:nvSpPr>
+        <p:spPr>
+          <a:xfrm>
+            <a:off x="9125712" y="5943600"/>
+            <a:ext cx="3200400" cy="237744"/>
+          </a:xfrm>
+          <a:prstGeom prst="rect">
+            <a:avLst/>
+          </a:prstGeom>
+          <a:noFill/>
+          <a:ln/>
+        </p:spPr>
+        <p:txBody>
+          <a:bodyPr wrap="square" lIns="0" tIns="0" rIns="0" bIns="0" rtlCol="0" anchor="ctr"/>
+          <a:lstStyle/>
+          <a:p>
+            <a:pPr algn="ctr" indent="0" marL="0">
+              <a:buNone/>
+            </a:pPr>
+            <a:r>
+              <a:rPr lang="en-US" sz="1100" dirty="0">
                 <a:solidFill>
                   <a:srgbClr val="5A7184"/>
                 </a:solidFill>
@@ -5954,46 +6180,7 @@
               </a:rPr>
               <a:t>설계 플랫폼 · 커스텀 매출 30%+</a:t>
             </a:r>
-            <a:endParaRPr lang="en-US" sz="1150" dirty="0"/>
-          </a:p>
-        </p:txBody>
-      </p:sp>
-      <p:sp>
-        <p:nvSpPr>
-          <p:cNvPr id="57" name="Text 51"/>
-          <p:cNvSpPr/>
-          <p:nvPr/>
-        </p:nvSpPr>
-        <p:spPr>
-          <a:xfrm>
-            <a:off x="457200" y="6053328"/>
-            <a:ext cx="11274552" cy="274320"/>
-          </a:xfrm>
-          <a:prstGeom prst="rect">
-            <a:avLst/>
-          </a:prstGeom>
-          <a:noFill/>
-          <a:ln/>
-        </p:spPr>
-        <p:txBody>
-          <a:bodyPr wrap="square" lIns="0" tIns="0" rIns="0" bIns="0" rtlCol="0" anchor="ctr"/>
-          <a:lstStyle/>
-          <a:p>
-            <a:pPr algn="ctr" indent="0" marL="0">
-              <a:buNone/>
-            </a:pPr>
-            <a:r>
-              <a:rPr lang="en-US" sz="1200" dirty="0">
-                <a:solidFill>
-                  <a:srgbClr val="5A7184"/>
-                </a:solidFill>
-                <a:latin typeface="Malgun Gothic" pitchFamily="34" charset="0"/>
-                <a:ea typeface="Malgun Gothic" pitchFamily="34" charset="-122"/>
-                <a:cs typeface="Malgun Gothic" pitchFamily="34" charset="-120"/>
-              </a:rPr>
-              <a:t>SCA 16건 · 최소 계약매출 $100B · 예치금 $22B — Micron IR (2026-06)</a:t>
-            </a:r>
-            <a:endParaRPr lang="en-US" sz="1200" dirty="0"/>
+            <a:endParaRPr lang="en-US" sz="1100" dirty="0"/>
           </a:p>
         </p:txBody>
       </p:sp>
@@ -6078,7 +6265,7 @@
             </a:avLst>
           </a:prstGeom>
           <a:solidFill>
-            <a:srgbClr val="E8F6F0"/>
+            <a:srgbClr val="EFF3F5"/>
           </a:solidFill>
           <a:ln/>
         </p:spPr>
@@ -6092,7 +6279,7 @@
             <a:r>
               <a:rPr lang="en-US" sz="1400" b="1" dirty="0">
                 <a:solidFill>
-                  <a:srgbClr val="02A878"/>
+                  <a:srgbClr val="5A7184"/>
                 </a:solidFill>
                 <a:latin typeface="Malgun Gothic" pitchFamily="34" charset="0"/>
                 <a:ea typeface="Malgun Gothic" pitchFamily="34" charset="-122"/>
@@ -6190,16 +6377,16 @@
         </p:nvSpPr>
         <p:spPr>
           <a:xfrm>
-            <a:off x="914400" y="987552"/>
-            <a:ext cx="10360152" cy="932688"/>
+            <a:off x="914400" y="932688"/>
+            <a:ext cx="10360152" cy="822960"/>
           </a:xfrm>
           <a:prstGeom prst="roundRect">
             <a:avLst>
-              <a:gd name="adj" fmla="val 9804"/>
+              <a:gd name="adj" fmla="val 11111"/>
             </a:avLst>
           </a:prstGeom>
           <a:solidFill>
-            <a:srgbClr val="E8F6F0"/>
+            <a:srgbClr val="F5F7F8"/>
           </a:solidFill>
           <a:ln/>
         </p:spPr>
@@ -6212,24 +6399,24 @@
         </p:nvSpPr>
         <p:spPr>
           <a:xfrm>
-            <a:off x="1097280" y="1078992"/>
-            <a:ext cx="9994392" cy="475488"/>
-          </a:xfrm>
-          <a:prstGeom prst="rect">
-            <a:avLst/>
-          </a:prstGeom>
-          <a:noFill/>
-          <a:ln/>
-        </p:spPr>
-        <p:txBody>
-          <a:bodyPr wrap="square" lIns="0" tIns="0" rIns="0" bIns="0" rtlCol="0" anchor="ctr"/>
-          <a:lstStyle/>
-          <a:p>
-            <a:pPr algn="ctr" indent="0" marL="0">
-              <a:buNone/>
-            </a:pPr>
-            <a:r>
-              <a:rPr lang="en-US" sz="2400" b="1" i="1" dirty="0">
+            <a:off x="1097280" y="1005840"/>
+            <a:ext cx="9994392" cy="420624"/>
+          </a:xfrm>
+          <a:prstGeom prst="rect">
+            <a:avLst/>
+          </a:prstGeom>
+          <a:noFill/>
+          <a:ln/>
+        </p:spPr>
+        <p:txBody>
+          <a:bodyPr wrap="square" lIns="0" tIns="0" rIns="0" bIns="0" rtlCol="0" anchor="ctr"/>
+          <a:lstStyle/>
+          <a:p>
+            <a:pPr algn="ctr" indent="0" marL="0">
+              <a:buNone/>
+            </a:pPr>
+            <a:r>
+              <a:rPr lang="en-US" sz="2200" b="1" i="1" dirty="0">
                 <a:solidFill>
                   <a:srgbClr val="17313B"/>
                 </a:solidFill>
@@ -6239,7 +6426,7 @@
               </a:rPr>
               <a:t>“고객의 아키텍처 안으로 들어가 수요를 함께 설계하는 기업이 이긴다”</a:t>
             </a:r>
-            <a:endParaRPr lang="en-US" sz="2400" dirty="0"/>
+            <a:endParaRPr lang="en-US" sz="2200" dirty="0"/>
           </a:p>
         </p:txBody>
       </p:sp>
@@ -6251,24 +6438,24 @@
         </p:nvSpPr>
         <p:spPr>
           <a:xfrm>
-            <a:off x="1097280" y="1554480"/>
-            <a:ext cx="9994392" cy="256032"/>
-          </a:xfrm>
-          <a:prstGeom prst="rect">
-            <a:avLst/>
-          </a:prstGeom>
-          <a:noFill/>
-          <a:ln/>
-        </p:spPr>
-        <p:txBody>
-          <a:bodyPr wrap="square" lIns="0" tIns="0" rIns="0" bIns="0" rtlCol="0" anchor="ctr"/>
-          <a:lstStyle/>
-          <a:p>
-            <a:pPr algn="ctr" indent="0" marL="0">
-              <a:buNone/>
-            </a:pPr>
-            <a:r>
-              <a:rPr lang="en-US" sz="1300" dirty="0">
+            <a:off x="1097280" y="1426464"/>
+            <a:ext cx="9994392" cy="237744"/>
+          </a:xfrm>
+          <a:prstGeom prst="rect">
+            <a:avLst/>
+          </a:prstGeom>
+          <a:noFill/>
+          <a:ln/>
+        </p:spPr>
+        <p:txBody>
+          <a:bodyPr wrap="square" lIns="0" tIns="0" rIns="0" bIns="0" rtlCol="0" anchor="ctr"/>
+          <a:lstStyle/>
+          <a:p>
+            <a:pPr algn="ctr" indent="0" marL="0">
+              <a:buNone/>
+            </a:pPr>
+            <a:r>
+              <a:rPr lang="en-US" sz="1250" dirty="0">
                 <a:solidFill>
                   <a:srgbClr val="5A7184"/>
                 </a:solidFill>
@@ -6278,7 +6465,7 @@
               </a:rPr>
               <a:t>— 신문섭 파트너, AI 인프라 슈퍼사이클 인터뷰 (2026-06)</a:t>
             </a:r>
-            <a:endParaRPr lang="en-US" sz="1300" dirty="0"/>
+            <a:endParaRPr lang="en-US" sz="1250" dirty="0"/>
           </a:p>
         </p:txBody>
       </p:sp>
@@ -6290,20 +6477,20 @@
         </p:nvSpPr>
         <p:spPr>
           <a:xfrm>
-            <a:off x="2011680" y="2286000"/>
-            <a:ext cx="3200400" cy="1773936"/>
+            <a:off x="2011680" y="1920240"/>
+            <a:ext cx="3200400" cy="1554480"/>
           </a:xfrm>
           <a:prstGeom prst="roundRect">
             <a:avLst>
-              <a:gd name="adj" fmla="val 5155"/>
+              <a:gd name="adj" fmla="val 5882"/>
             </a:avLst>
           </a:prstGeom>
           <a:solidFill>
-            <a:srgbClr val="F3F6F8"/>
+            <a:srgbClr val="F5F7F8"/>
           </a:solidFill>
           <a:ln w="15875">
             <a:solidFill>
-              <a:srgbClr val="D9E6EC"/>
+              <a:srgbClr val="DCE4E9"/>
             </a:solidFill>
             <a:prstDash val="solid"/>
           </a:ln>
@@ -6317,8 +6504,8 @@
         </p:nvSpPr>
         <p:spPr>
           <a:xfrm>
-            <a:off x="3364992" y="2487168"/>
-            <a:ext cx="493776" cy="493776"/>
+            <a:off x="3383280" y="2066544"/>
+            <a:ext cx="457200" cy="457200"/>
           </a:xfrm>
           <a:prstGeom prst="ellipse">
             <a:avLst/>
@@ -6345,8 +6532,8 @@
         </p:blipFill>
         <p:spPr>
           <a:xfrm>
-            <a:off x="3483498" y="2605674"/>
-            <a:ext cx="256764" cy="256764"/>
+            <a:off x="3493008" y="2176272"/>
+            <a:ext cx="237744" cy="237744"/>
           </a:xfrm>
           <a:prstGeom prst="rect">
             <a:avLst/>
@@ -6361,24 +6548,24 @@
         </p:nvSpPr>
         <p:spPr>
           <a:xfrm>
-            <a:off x="2103120" y="3054096"/>
-            <a:ext cx="3017520" cy="365760"/>
-          </a:xfrm>
-          <a:prstGeom prst="rect">
-            <a:avLst/>
-          </a:prstGeom>
-          <a:noFill/>
-          <a:ln/>
-        </p:spPr>
-        <p:txBody>
-          <a:bodyPr wrap="square" lIns="0" tIns="0" rIns="0" bIns="0" rtlCol="0" anchor="ctr"/>
-          <a:lstStyle/>
-          <a:p>
-            <a:pPr algn="ctr" indent="0" marL="0">
-              <a:buNone/>
-            </a:pPr>
-            <a:r>
-              <a:rPr lang="en-US" sz="2200" b="1" dirty="0">
+            <a:off x="2103120" y="2560320"/>
+            <a:ext cx="3017520" cy="347472"/>
+          </a:xfrm>
+          <a:prstGeom prst="rect">
+            <a:avLst/>
+          </a:prstGeom>
+          <a:noFill/>
+          <a:ln/>
+        </p:spPr>
+        <p:txBody>
+          <a:bodyPr wrap="square" lIns="0" tIns="0" rIns="0" bIns="0" rtlCol="0" anchor="ctr"/>
+          <a:lstStyle/>
+          <a:p>
+            <a:pPr algn="ctr" indent="0" marL="0">
+              <a:buNone/>
+            </a:pPr>
+            <a:r>
+              <a:rPr lang="en-US" sz="2100" b="1" dirty="0">
                 <a:solidFill>
                   <a:srgbClr val="5A7184"/>
                 </a:solidFill>
@@ -6388,7 +6575,7 @@
               </a:rPr>
               <a:t>수주 이행자</a:t>
             </a:r>
-            <a:endParaRPr lang="en-US" sz="2200" dirty="0"/>
+            <a:endParaRPr lang="en-US" sz="2100" dirty="0"/>
           </a:p>
         </p:txBody>
       </p:sp>
@@ -6400,24 +6587,24 @@
         </p:nvSpPr>
         <p:spPr>
           <a:xfrm>
-            <a:off x="2103120" y="3474720"/>
-            <a:ext cx="3017520" cy="274320"/>
-          </a:xfrm>
-          <a:prstGeom prst="rect">
-            <a:avLst/>
-          </a:prstGeom>
-          <a:noFill/>
-          <a:ln/>
-        </p:spPr>
-        <p:txBody>
-          <a:bodyPr wrap="square" lIns="0" tIns="0" rIns="0" bIns="0" rtlCol="0" anchor="ctr"/>
-          <a:lstStyle/>
-          <a:p>
-            <a:pPr algn="ctr" indent="0" marL="0">
-              <a:buNone/>
-            </a:pPr>
-            <a:r>
-              <a:rPr lang="en-US" sz="1300" dirty="0">
+            <a:off x="2103120" y="2962656"/>
+            <a:ext cx="3017520" cy="256032"/>
+          </a:xfrm>
+          <a:prstGeom prst="rect">
+            <a:avLst/>
+          </a:prstGeom>
+          <a:noFill/>
+          <a:ln/>
+        </p:spPr>
+        <p:txBody>
+          <a:bodyPr wrap="square" lIns="0" tIns="0" rIns="0" bIns="0" rtlCol="0" anchor="ctr"/>
+          <a:lstStyle/>
+          <a:p>
+            <a:pPr algn="ctr" indent="0" marL="0">
+              <a:buNone/>
+            </a:pPr>
+            <a:r>
+              <a:rPr lang="en-US" sz="1250" dirty="0">
                 <a:solidFill>
                   <a:srgbClr val="5A7184"/>
                 </a:solidFill>
@@ -6427,65 +6614,65 @@
               </a:rPr>
               <a:t>스펙 수령 · RFQ 응답 · QCD</a:t>
             </a:r>
+            <a:endParaRPr lang="en-US" sz="1250" dirty="0"/>
+          </a:p>
+        </p:txBody>
+      </p:sp>
+      <p:sp>
+        <p:nvSpPr>
+          <p:cNvPr id="14" name="Text 11"/>
+          <p:cNvSpPr/>
+          <p:nvPr/>
+        </p:nvSpPr>
+        <p:spPr>
+          <a:xfrm>
+            <a:off x="5349240" y="2286000"/>
+            <a:ext cx="1463040" cy="822960"/>
+          </a:xfrm>
+          <a:prstGeom prst="rightArrow">
+            <a:avLst/>
+          </a:prstGeom>
+          <a:solidFill>
+            <a:srgbClr val="028090"/>
+          </a:solidFill>
+          <a:ln/>
+        </p:spPr>
+        <p:txBody>
+          <a:bodyPr wrap="square" lIns="0" tIns="0" rIns="0" bIns="0" rtlCol="0" anchor="ctr"/>
+          <a:lstStyle/>
+          <a:p>
+            <a:pPr algn="ctr" indent="0" marL="0">
+              <a:buNone/>
+            </a:pPr>
+            <a:r>
+              <a:rPr lang="en-US" sz="1300" b="1" dirty="0">
+                <a:solidFill>
+                  <a:srgbClr val="FFFFFF"/>
+                </a:solidFill>
+                <a:latin typeface="Malgun Gothic" pitchFamily="34" charset="0"/>
+                <a:ea typeface="Malgun Gothic" pitchFamily="34" charset="-122"/>
+                <a:cs typeface="Malgun Gothic" pitchFamily="34" charset="-120"/>
+              </a:rPr>
+              <a:t>LTA → SCA</a:t>
+            </a:r>
             <a:endParaRPr lang="en-US" sz="1300" dirty="0"/>
           </a:p>
         </p:txBody>
       </p:sp>
       <p:sp>
         <p:nvSpPr>
-          <p:cNvPr id="14" name="Text 11"/>
-          <p:cNvSpPr/>
-          <p:nvPr/>
-        </p:nvSpPr>
-        <p:spPr>
-          <a:xfrm>
-            <a:off x="5349240" y="2761488"/>
-            <a:ext cx="1463040" cy="822960"/>
-          </a:xfrm>
-          <a:prstGeom prst="rightArrow">
-            <a:avLst/>
-          </a:prstGeom>
-          <a:solidFill>
-            <a:srgbClr val="028090"/>
-          </a:solidFill>
-          <a:ln/>
-        </p:spPr>
-        <p:txBody>
-          <a:bodyPr wrap="square" lIns="0" tIns="0" rIns="0" bIns="0" rtlCol="0" anchor="ctr"/>
-          <a:lstStyle/>
-          <a:p>
-            <a:pPr algn="ctr" indent="0" marL="0">
-              <a:buNone/>
-            </a:pPr>
-            <a:r>
-              <a:rPr lang="en-US" sz="1300" b="1" dirty="0">
-                <a:solidFill>
-                  <a:srgbClr val="FFFFFF"/>
-                </a:solidFill>
-                <a:latin typeface="Malgun Gothic" pitchFamily="34" charset="0"/>
-                <a:ea typeface="Malgun Gothic" pitchFamily="34" charset="-122"/>
-                <a:cs typeface="Malgun Gothic" pitchFamily="34" charset="-120"/>
-              </a:rPr>
-              <a:t>LTA → SCA</a:t>
-            </a:r>
-            <a:endParaRPr lang="en-US" sz="1300" dirty="0"/>
-          </a:p>
-        </p:txBody>
-      </p:sp>
-      <p:sp>
-        <p:nvSpPr>
           <p:cNvPr id="15" name="Shape 12"/>
           <p:cNvSpPr/>
           <p:nvPr/>
         </p:nvSpPr>
         <p:spPr>
           <a:xfrm>
-            <a:off x="6949440" y="2286000"/>
-            <a:ext cx="3200400" cy="1773936"/>
+            <a:off x="6949440" y="1920240"/>
+            <a:ext cx="3200400" cy="1554480"/>
           </a:xfrm>
           <a:prstGeom prst="roundRect">
             <a:avLst>
-              <a:gd name="adj" fmla="val 5155"/>
+              <a:gd name="adj" fmla="val 5882"/>
             </a:avLst>
           </a:prstGeom>
           <a:solidFill>
@@ -6507,8 +6694,8 @@
         </p:nvSpPr>
         <p:spPr>
           <a:xfrm>
-            <a:off x="8302752" y="2487168"/>
-            <a:ext cx="493776" cy="493776"/>
+            <a:off x="8321040" y="2066544"/>
+            <a:ext cx="457200" cy="457200"/>
           </a:xfrm>
           <a:prstGeom prst="ellipse">
             <a:avLst/>
@@ -6535,8 +6722,8 @@
         </p:blipFill>
         <p:spPr>
           <a:xfrm>
-            <a:off x="8421258" y="2605674"/>
-            <a:ext cx="256764" cy="256764"/>
+            <a:off x="8430768" y="2176272"/>
+            <a:ext cx="237744" cy="237744"/>
           </a:xfrm>
           <a:prstGeom prst="rect">
             <a:avLst/>
@@ -6551,24 +6738,24 @@
         </p:nvSpPr>
         <p:spPr>
           <a:xfrm>
-            <a:off x="7040880" y="3054096"/>
-            <a:ext cx="3017520" cy="365760"/>
-          </a:xfrm>
-          <a:prstGeom prst="rect">
-            <a:avLst/>
-          </a:prstGeom>
-          <a:noFill/>
-          <a:ln/>
-        </p:spPr>
-        <p:txBody>
-          <a:bodyPr wrap="square" lIns="0" tIns="0" rIns="0" bIns="0" rtlCol="0" anchor="ctr"/>
-          <a:lstStyle/>
-          <a:p>
-            <a:pPr algn="ctr" indent="0" marL="0">
-              <a:buNone/>
-            </a:pPr>
-            <a:r>
-              <a:rPr lang="en-US" sz="2200" b="1" dirty="0">
+            <a:off x="7040880" y="2560320"/>
+            <a:ext cx="3017520" cy="347472"/>
+          </a:xfrm>
+          <a:prstGeom prst="rect">
+            <a:avLst/>
+          </a:prstGeom>
+          <a:noFill/>
+          <a:ln/>
+        </p:spPr>
+        <p:txBody>
+          <a:bodyPr wrap="square" lIns="0" tIns="0" rIns="0" bIns="0" rtlCol="0" anchor="ctr"/>
+          <a:lstStyle/>
+          <a:p>
+            <a:pPr algn="ctr" indent="0" marL="0">
+              <a:buNone/>
+            </a:pPr>
+            <a:r>
+              <a:rPr lang="en-US" sz="2100" b="1" dirty="0">
                 <a:solidFill>
                   <a:srgbClr val="02A878"/>
                 </a:solidFill>
@@ -6578,7 +6765,7 @@
               </a:rPr>
               <a:t>기술 파트너</a:t>
             </a:r>
-            <a:endParaRPr lang="en-US" sz="2200" dirty="0"/>
+            <a:endParaRPr lang="en-US" sz="2100" dirty="0"/>
           </a:p>
         </p:txBody>
       </p:sp>
@@ -6590,24 +6777,24 @@
         </p:nvSpPr>
         <p:spPr>
           <a:xfrm>
-            <a:off x="6949440" y="3474720"/>
-            <a:ext cx="3200400" cy="274320"/>
-          </a:xfrm>
-          <a:prstGeom prst="rect">
-            <a:avLst/>
-          </a:prstGeom>
-          <a:noFill/>
-          <a:ln/>
-        </p:spPr>
-        <p:txBody>
-          <a:bodyPr wrap="square" lIns="0" tIns="0" rIns="0" bIns="0" rtlCol="0" anchor="ctr"/>
-          <a:lstStyle/>
-          <a:p>
-            <a:pPr algn="ctr" indent="0" marL="0">
-              <a:buNone/>
-            </a:pPr>
-            <a:r>
-              <a:rPr lang="en-US" sz="1300" dirty="0">
+            <a:off x="6949440" y="2962656"/>
+            <a:ext cx="3200400" cy="256032"/>
+          </a:xfrm>
+          <a:prstGeom prst="rect">
+            <a:avLst/>
+          </a:prstGeom>
+          <a:noFill/>
+          <a:ln/>
+        </p:spPr>
+        <p:txBody>
+          <a:bodyPr wrap="square" lIns="0" tIns="0" rIns="0" bIns="0" rtlCol="0" anchor="ctr"/>
+          <a:lstStyle/>
+          <a:p>
+            <a:pPr algn="ctr" indent="0" marL="0">
+              <a:buNone/>
+            </a:pPr>
+            <a:r>
+              <a:rPr lang="en-US" sz="1250" dirty="0">
                 <a:solidFill>
                   <a:srgbClr val="17313B"/>
                 </a:solidFill>
@@ -6617,7 +6804,7 @@
               </a:rPr>
               <a:t>요구 공동 정의 · 선제 제안 · 시스템 모델</a:t>
             </a:r>
-            <a:endParaRPr lang="en-US" sz="1300" dirty="0"/>
+            <a:endParaRPr lang="en-US" sz="1250" dirty="0"/>
           </a:p>
         </p:txBody>
       </p:sp>
@@ -6629,14 +6816,18 @@
         </p:nvSpPr>
         <p:spPr>
           <a:xfrm>
-            <a:off x="2468880" y="4901184"/>
-            <a:ext cx="7251192" cy="0"/>
-          </a:xfrm>
-          <a:prstGeom prst="line">
-            <a:avLst/>
-          </a:prstGeom>
-          <a:noFill/>
-          <a:ln w="25400">
+            <a:off x="1463040" y="3675888"/>
+            <a:ext cx="9262872" cy="731520"/>
+          </a:xfrm>
+          <a:prstGeom prst="roundRect">
+            <a:avLst>
+              <a:gd name="adj" fmla="val 10000"/>
+            </a:avLst>
+          </a:prstGeom>
+          <a:solidFill>
+            <a:srgbClr val="E8F6F0"/>
+          </a:solidFill>
+          <a:ln w="15875">
             <a:solidFill>
               <a:srgbClr val="02A878"/>
             </a:solidFill>
@@ -6644,52 +6835,161 @@
           </a:ln>
         </p:spPr>
       </p:sp>
-      <p:sp>
-        <p:nvSpPr>
-          <p:cNvPr id="21" name="Shape 17"/>
-          <p:cNvSpPr/>
-          <p:nvPr/>
-        </p:nvSpPr>
-        <p:spPr>
-          <a:xfrm>
-            <a:off x="2377440" y="4809744"/>
+      <p:pic>
+        <p:nvPicPr>
+          <p:cNvPr id="21" name="Image 2" descr="preencoded.png">    </p:cNvPr>
+          <p:cNvPicPr>
+            <a:picLocks noChangeAspect="1"/>
+          </p:cNvPicPr>
+          <p:nvPr/>
+        </p:nvPicPr>
+        <p:blipFill>
+          <a:blip r:embed="rId3"/>
+          <a:stretch>
+            <a:fillRect/>
+          </a:stretch>
+        </p:blipFill>
+        <p:spPr>
+          <a:xfrm>
+            <a:off x="1645920" y="3858768"/>
+            <a:ext cx="365760" cy="365760"/>
+          </a:xfrm>
+          <a:prstGeom prst="rect">
+            <a:avLst/>
+          </a:prstGeom>
+        </p:spPr>
+      </p:pic>
+      <p:sp>
+        <p:nvSpPr>
+          <p:cNvPr id="22" name="Text 17"/>
+          <p:cNvSpPr/>
+          <p:nvPr/>
+        </p:nvSpPr>
+        <p:spPr>
+          <a:xfrm>
+            <a:off x="2139696" y="3675888"/>
+            <a:ext cx="8403336" cy="731520"/>
+          </a:xfrm>
+          <a:prstGeom prst="rect">
+            <a:avLst/>
+          </a:prstGeom>
+          <a:noFill/>
+          <a:ln/>
+        </p:spPr>
+        <p:txBody>
+          <a:bodyPr wrap="square" lIns="0" tIns="0" rIns="0" bIns="0" rtlCol="0" anchor="ctr"/>
+          <a:lstStyle/>
+          <a:p>
+            <a:pPr indent="0" marL="0">
+              <a:lnSpc>
+                <a:spcPct val="112000"/>
+              </a:lnSpc>
+              <a:buNone/>
+            </a:pPr>
+            <a:r>
+              <a:rPr lang="en-US" sz="1450" b="1" dirty="0">
+                <a:solidFill>
+                  <a:srgbClr val="17313B"/>
+                </a:solidFill>
+                <a:latin typeface="Malgun Gothic" pitchFamily="34" charset="0"/>
+                <a:ea typeface="Malgun Gothic" pitchFamily="34" charset="-122"/>
+                <a:cs typeface="Malgun Gothic" pitchFamily="34" charset="-120"/>
+              </a:rPr>
+              <a:t>핵심 전략 — Distinguished Engineer를 스타 플레이어로, 고객사와 기술 생태계를 함께 만든다</a:t>
+            </a:r>
+            <a:endParaRPr lang="en-US" sz="1450" dirty="0"/>
+          </a:p>
+          <a:p>
+            <a:pPr indent="0" marL="0">
+              <a:lnSpc>
+                <a:spcPct val="112000"/>
+              </a:lnSpc>
+              <a:buNone/>
+            </a:pPr>
+            <a:r>
+              <a:rPr lang="en-US" sz="1150" dirty="0">
+                <a:solidFill>
+                  <a:srgbClr val="5A7184"/>
+                </a:solidFill>
+                <a:latin typeface="Malgun Gothic" pitchFamily="34" charset="0"/>
+                <a:ea typeface="Malgun Gothic" pitchFamily="34" charset="-122"/>
+                <a:cs typeface="Malgun Gothic" pitchFamily="34" charset="-120"/>
+              </a:rPr>
+              <a:t>‘모난 놈이 정 맞는’ 기존 문화에서 → 스타를 호명하고 드러내는 문화로</a:t>
+            </a:r>
+            <a:endParaRPr lang="en-US" sz="1450" dirty="0"/>
+          </a:p>
+        </p:txBody>
+      </p:sp>
+      <p:sp>
+        <p:nvSpPr>
+          <p:cNvPr id="23" name="Shape 18"/>
+          <p:cNvSpPr/>
+          <p:nvPr/>
+        </p:nvSpPr>
+        <p:spPr>
+          <a:xfrm>
+            <a:off x="2468880" y="4974336"/>
+            <a:ext cx="7251192" cy="0"/>
+          </a:xfrm>
+          <a:prstGeom prst="line">
+            <a:avLst/>
+          </a:prstGeom>
+          <a:noFill/>
+          <a:ln w="25400">
+            <a:solidFill>
+              <a:srgbClr val="C4CFD6"/>
+            </a:solidFill>
+            <a:prstDash val="solid"/>
+          </a:ln>
+        </p:spPr>
+      </p:sp>
+      <p:sp>
+        <p:nvSpPr>
+          <p:cNvPr id="24" name="Shape 19"/>
+          <p:cNvSpPr/>
+          <p:nvPr/>
+        </p:nvSpPr>
+        <p:spPr>
+          <a:xfrm>
+            <a:off x="2377440" y="4882896"/>
             <a:ext cx="182880" cy="182880"/>
           </a:xfrm>
           <a:prstGeom prst="ellipse">
             <a:avLst/>
           </a:prstGeom>
           <a:solidFill>
-            <a:srgbClr val="02A878"/>
-          </a:solidFill>
-          <a:ln/>
-        </p:spPr>
-      </p:sp>
-      <p:sp>
-        <p:nvSpPr>
-          <p:cNvPr id="22" name="Text 18"/>
-          <p:cNvSpPr/>
-          <p:nvPr/>
-        </p:nvSpPr>
-        <p:spPr>
-          <a:xfrm>
-            <a:off x="1188720" y="4480560"/>
-            <a:ext cx="2560320" cy="292608"/>
-          </a:xfrm>
-          <a:prstGeom prst="rect">
-            <a:avLst/>
-          </a:prstGeom>
-          <a:noFill/>
-          <a:ln/>
-        </p:spPr>
-        <p:txBody>
-          <a:bodyPr wrap="square" lIns="0" tIns="0" rIns="0" bIns="0" rtlCol="0" anchor="ctr"/>
-          <a:lstStyle/>
-          <a:p>
-            <a:pPr algn="ctr" indent="0" marL="0">
-              <a:buNone/>
-            </a:pPr>
-            <a:r>
-              <a:rPr lang="en-US" sz="1600" b="1" dirty="0">
+            <a:srgbClr val="17313B"/>
+          </a:solidFill>
+          <a:ln/>
+        </p:spPr>
+      </p:sp>
+      <p:sp>
+        <p:nvSpPr>
+          <p:cNvPr id="25" name="Text 20"/>
+          <p:cNvSpPr/>
+          <p:nvPr/>
+        </p:nvSpPr>
+        <p:spPr>
+          <a:xfrm>
+            <a:off x="1188720" y="4572000"/>
+            <a:ext cx="2560320" cy="274320"/>
+          </a:xfrm>
+          <a:prstGeom prst="rect">
+            <a:avLst/>
+          </a:prstGeom>
+          <a:noFill/>
+          <a:ln/>
+        </p:spPr>
+        <p:txBody>
+          <a:bodyPr wrap="square" lIns="0" tIns="0" rIns="0" bIns="0" rtlCol="0" anchor="ctr"/>
+          <a:lstStyle/>
+          <a:p>
+            <a:pPr algn="ctr" indent="0" marL="0">
+              <a:buNone/>
+            </a:pPr>
+            <a:r>
+              <a:rPr lang="en-US" sz="1550" b="1" dirty="0">
                 <a:solidFill>
                   <a:srgbClr val="17313B"/>
                 </a:solidFill>
@@ -6699,36 +6999,36 @@
               </a:rPr>
               <a:t>90일 증명</a:t>
             </a:r>
-            <a:endParaRPr lang="en-US" sz="1600" dirty="0"/>
-          </a:p>
-        </p:txBody>
-      </p:sp>
-      <p:sp>
-        <p:nvSpPr>
-          <p:cNvPr id="23" name="Text 19"/>
-          <p:cNvSpPr/>
-          <p:nvPr/>
-        </p:nvSpPr>
-        <p:spPr>
-          <a:xfrm>
-            <a:off x="1097280" y="5084064"/>
-            <a:ext cx="2743200" cy="256032"/>
-          </a:xfrm>
-          <a:prstGeom prst="rect">
-            <a:avLst/>
-          </a:prstGeom>
-          <a:noFill/>
-          <a:ln/>
-        </p:spPr>
-        <p:txBody>
-          <a:bodyPr wrap="square" lIns="0" tIns="0" rIns="0" bIns="0" rtlCol="0" anchor="ctr"/>
-          <a:lstStyle/>
-          <a:p>
-            <a:pPr algn="ctr" indent="0" marL="0">
-              <a:buNone/>
-            </a:pPr>
-            <a:r>
-              <a:rPr lang="en-US" sz="1200" dirty="0">
+            <a:endParaRPr lang="en-US" sz="1550" dirty="0"/>
+          </a:p>
+        </p:txBody>
+      </p:sp>
+      <p:sp>
+        <p:nvSpPr>
+          <p:cNvPr id="26" name="Text 21"/>
+          <p:cNvSpPr/>
+          <p:nvPr/>
+        </p:nvSpPr>
+        <p:spPr>
+          <a:xfrm>
+            <a:off x="1097280" y="5138928"/>
+            <a:ext cx="2743200" cy="237744"/>
+          </a:xfrm>
+          <a:prstGeom prst="rect">
+            <a:avLst/>
+          </a:prstGeom>
+          <a:noFill/>
+          <a:ln/>
+        </p:spPr>
+        <p:txBody>
+          <a:bodyPr wrap="square" lIns="0" tIns="0" rIns="0" bIns="0" rtlCol="0" anchor="ctr"/>
+          <a:lstStyle/>
+          <a:p>
+            <a:pPr algn="ctr" indent="0" marL="0">
+              <a:buNone/>
+            </a:pPr>
+            <a:r>
+              <a:rPr lang="en-US" sz="1150" dirty="0">
                 <a:solidFill>
                   <a:srgbClr val="5A7184"/>
                 </a:solidFill>
@@ -6738,56 +7038,56 @@
               </a:rPr>
               <a:t>Pod 1호 · 모델 v0.1</a:t>
             </a:r>
-            <a:endParaRPr lang="en-US" sz="1200" dirty="0"/>
-          </a:p>
-        </p:txBody>
-      </p:sp>
-      <p:sp>
-        <p:nvSpPr>
-          <p:cNvPr id="24" name="Shape 20"/>
-          <p:cNvSpPr/>
-          <p:nvPr/>
-        </p:nvSpPr>
-        <p:spPr>
-          <a:xfrm>
-            <a:off x="6007608" y="4809744"/>
+            <a:endParaRPr lang="en-US" sz="1150" dirty="0"/>
+          </a:p>
+        </p:txBody>
+      </p:sp>
+      <p:sp>
+        <p:nvSpPr>
+          <p:cNvPr id="27" name="Shape 22"/>
+          <p:cNvSpPr/>
+          <p:nvPr/>
+        </p:nvSpPr>
+        <p:spPr>
+          <a:xfrm>
+            <a:off x="6007608" y="4882896"/>
             <a:ext cx="182880" cy="182880"/>
           </a:xfrm>
           <a:prstGeom prst="ellipse">
             <a:avLst/>
           </a:prstGeom>
           <a:solidFill>
-            <a:srgbClr val="02A878"/>
-          </a:solidFill>
-          <a:ln/>
-        </p:spPr>
-      </p:sp>
-      <p:sp>
-        <p:nvSpPr>
-          <p:cNvPr id="25" name="Text 21"/>
-          <p:cNvSpPr/>
-          <p:nvPr/>
-        </p:nvSpPr>
-        <p:spPr>
-          <a:xfrm>
-            <a:off x="4818888" y="4480560"/>
-            <a:ext cx="2560320" cy="292608"/>
-          </a:xfrm>
-          <a:prstGeom prst="rect">
-            <a:avLst/>
-          </a:prstGeom>
-          <a:noFill/>
-          <a:ln/>
-        </p:spPr>
-        <p:txBody>
-          <a:bodyPr wrap="square" lIns="0" tIns="0" rIns="0" bIns="0" rtlCol="0" anchor="ctr"/>
-          <a:lstStyle/>
-          <a:p>
-            <a:pPr algn="ctr" indent="0" marL="0">
-              <a:buNone/>
-            </a:pPr>
-            <a:r>
-              <a:rPr lang="en-US" sz="1600" b="1" dirty="0">
+            <a:srgbClr val="17313B"/>
+          </a:solidFill>
+          <a:ln/>
+        </p:spPr>
+      </p:sp>
+      <p:sp>
+        <p:nvSpPr>
+          <p:cNvPr id="28" name="Text 23"/>
+          <p:cNvSpPr/>
+          <p:nvPr/>
+        </p:nvSpPr>
+        <p:spPr>
+          <a:xfrm>
+            <a:off x="4818888" y="4572000"/>
+            <a:ext cx="2560320" cy="274320"/>
+          </a:xfrm>
+          <a:prstGeom prst="rect">
+            <a:avLst/>
+          </a:prstGeom>
+          <a:noFill/>
+          <a:ln/>
+        </p:spPr>
+        <p:txBody>
+          <a:bodyPr wrap="square" lIns="0" tIns="0" rIns="0" bIns="0" rtlCol="0" anchor="ctr"/>
+          <a:lstStyle/>
+          <a:p>
+            <a:pPr algn="ctr" indent="0" marL="0">
+              <a:buNone/>
+            </a:pPr>
+            <a:r>
+              <a:rPr lang="en-US" sz="1550" b="1" dirty="0">
                 <a:solidFill>
                   <a:srgbClr val="17313B"/>
                 </a:solidFill>
@@ -6797,36 +7097,36 @@
               </a:rPr>
               <a:t>1년 제도화</a:t>
             </a:r>
-            <a:endParaRPr lang="en-US" sz="1600" dirty="0"/>
-          </a:p>
-        </p:txBody>
-      </p:sp>
-      <p:sp>
-        <p:nvSpPr>
-          <p:cNvPr id="26" name="Text 22"/>
-          <p:cNvSpPr/>
-          <p:nvPr/>
-        </p:nvSpPr>
-        <p:spPr>
-          <a:xfrm>
-            <a:off x="4727448" y="5084064"/>
-            <a:ext cx="2743200" cy="256032"/>
-          </a:xfrm>
-          <a:prstGeom prst="rect">
-            <a:avLst/>
-          </a:prstGeom>
-          <a:noFill/>
-          <a:ln/>
-        </p:spPr>
-        <p:txBody>
-          <a:bodyPr wrap="square" lIns="0" tIns="0" rIns="0" bIns="0" rtlCol="0" anchor="ctr"/>
-          <a:lstStyle/>
-          <a:p>
-            <a:pPr algn="ctr" indent="0" marL="0">
-              <a:buNone/>
-            </a:pPr>
-            <a:r>
-              <a:rPr lang="en-US" sz="1200" dirty="0">
+            <a:endParaRPr lang="en-US" sz="1550" dirty="0"/>
+          </a:p>
+        </p:txBody>
+      </p:sp>
+      <p:sp>
+        <p:nvSpPr>
+          <p:cNvPr id="29" name="Text 24"/>
+          <p:cNvSpPr/>
+          <p:nvPr/>
+        </p:nvSpPr>
+        <p:spPr>
+          <a:xfrm>
+            <a:off x="4727448" y="5138928"/>
+            <a:ext cx="2743200" cy="237744"/>
+          </a:xfrm>
+          <a:prstGeom prst="rect">
+            <a:avLst/>
+          </a:prstGeom>
+          <a:noFill/>
+          <a:ln/>
+        </p:spPr>
+        <p:txBody>
+          <a:bodyPr wrap="square" lIns="0" tIns="0" rIns="0" bIns="0" rtlCol="0" anchor="ctr"/>
+          <a:lstStyle/>
+          <a:p>
+            <a:pPr algn="ctr" indent="0" marL="0">
+              <a:buNone/>
+            </a:pPr>
+            <a:r>
+              <a:rPr lang="en-US" sz="1150" dirty="0">
                 <a:solidFill>
                   <a:srgbClr val="5A7184"/>
                 </a:solidFill>
@@ -6836,56 +7136,56 @@
               </a:rPr>
               <a:t>Pod 3~5 · SCA 1건</a:t>
             </a:r>
-            <a:endParaRPr lang="en-US" sz="1200" dirty="0"/>
-          </a:p>
-        </p:txBody>
-      </p:sp>
-      <p:sp>
-        <p:nvSpPr>
-          <p:cNvPr id="27" name="Shape 23"/>
-          <p:cNvSpPr/>
-          <p:nvPr/>
-        </p:nvSpPr>
-        <p:spPr>
-          <a:xfrm>
-            <a:off x="9628632" y="4809744"/>
+            <a:endParaRPr lang="en-US" sz="1150" dirty="0"/>
+          </a:p>
+        </p:txBody>
+      </p:sp>
+      <p:sp>
+        <p:nvSpPr>
+          <p:cNvPr id="30" name="Shape 25"/>
+          <p:cNvSpPr/>
+          <p:nvPr/>
+        </p:nvSpPr>
+        <p:spPr>
+          <a:xfrm>
+            <a:off x="9628632" y="4882896"/>
             <a:ext cx="182880" cy="182880"/>
           </a:xfrm>
           <a:prstGeom prst="ellipse">
             <a:avLst/>
           </a:prstGeom>
           <a:solidFill>
-            <a:srgbClr val="02A878"/>
-          </a:solidFill>
-          <a:ln/>
-        </p:spPr>
-      </p:sp>
-      <p:sp>
-        <p:nvSpPr>
-          <p:cNvPr id="28" name="Text 24"/>
-          <p:cNvSpPr/>
-          <p:nvPr/>
-        </p:nvSpPr>
-        <p:spPr>
-          <a:xfrm>
-            <a:off x="8439912" y="4480560"/>
-            <a:ext cx="2560320" cy="292608"/>
-          </a:xfrm>
-          <a:prstGeom prst="rect">
-            <a:avLst/>
-          </a:prstGeom>
-          <a:noFill/>
-          <a:ln/>
-        </p:spPr>
-        <p:txBody>
-          <a:bodyPr wrap="square" lIns="0" tIns="0" rIns="0" bIns="0" rtlCol="0" anchor="ctr"/>
-          <a:lstStyle/>
-          <a:p>
-            <a:pPr algn="ctr" indent="0" marL="0">
-              <a:buNone/>
-            </a:pPr>
-            <a:r>
-              <a:rPr lang="en-US" sz="1600" b="1" dirty="0">
+            <a:srgbClr val="17313B"/>
+          </a:solidFill>
+          <a:ln/>
+        </p:spPr>
+      </p:sp>
+      <p:sp>
+        <p:nvSpPr>
+          <p:cNvPr id="31" name="Text 26"/>
+          <p:cNvSpPr/>
+          <p:nvPr/>
+        </p:nvSpPr>
+        <p:spPr>
+          <a:xfrm>
+            <a:off x="8439912" y="4572000"/>
+            <a:ext cx="2560320" cy="274320"/>
+          </a:xfrm>
+          <a:prstGeom prst="rect">
+            <a:avLst/>
+          </a:prstGeom>
+          <a:noFill/>
+          <a:ln/>
+        </p:spPr>
+        <p:txBody>
+          <a:bodyPr wrap="square" lIns="0" tIns="0" rIns="0" bIns="0" rtlCol="0" anchor="ctr"/>
+          <a:lstStyle/>
+          <a:p>
+            <a:pPr algn="ctr" indent="0" marL="0">
+              <a:buNone/>
+            </a:pPr>
+            <a:r>
+              <a:rPr lang="en-US" sz="1550" b="1" dirty="0">
                 <a:solidFill>
                   <a:srgbClr val="17313B"/>
                 </a:solidFill>
@@ -6895,36 +7195,36 @@
               </a:rPr>
               <a:t>3년 표준화</a:t>
             </a:r>
-            <a:endParaRPr lang="en-US" sz="1600" dirty="0"/>
-          </a:p>
-        </p:txBody>
-      </p:sp>
-      <p:sp>
-        <p:nvSpPr>
-          <p:cNvPr id="29" name="Text 25"/>
-          <p:cNvSpPr/>
-          <p:nvPr/>
-        </p:nvSpPr>
-        <p:spPr>
-          <a:xfrm>
-            <a:off x="8348472" y="5084064"/>
-            <a:ext cx="2743200" cy="256032"/>
-          </a:xfrm>
-          <a:prstGeom prst="rect">
-            <a:avLst/>
-          </a:prstGeom>
-          <a:noFill/>
-          <a:ln/>
-        </p:spPr>
-        <p:txBody>
-          <a:bodyPr wrap="square" lIns="0" tIns="0" rIns="0" bIns="0" rtlCol="0" anchor="ctr"/>
-          <a:lstStyle/>
-          <a:p>
-            <a:pPr algn="ctr" indent="0" marL="0">
-              <a:buNone/>
-            </a:pPr>
-            <a:r>
-              <a:rPr lang="en-US" sz="1200" dirty="0">
+            <a:endParaRPr lang="en-US" sz="1550" dirty="0"/>
+          </a:p>
+        </p:txBody>
+      </p:sp>
+      <p:sp>
+        <p:nvSpPr>
+          <p:cNvPr id="32" name="Text 27"/>
+          <p:cNvSpPr/>
+          <p:nvPr/>
+        </p:nvSpPr>
+        <p:spPr>
+          <a:xfrm>
+            <a:off x="8348472" y="5138928"/>
+            <a:ext cx="2743200" cy="237744"/>
+          </a:xfrm>
+          <a:prstGeom prst="rect">
+            <a:avLst/>
+          </a:prstGeom>
+          <a:noFill/>
+          <a:ln/>
+        </p:spPr>
+        <p:txBody>
+          <a:bodyPr wrap="square" lIns="0" tIns="0" rIns="0" bIns="0" rtlCol="0" anchor="ctr"/>
+          <a:lstStyle/>
+          <a:p>
+            <a:pPr algn="ctr" indent="0" marL="0">
+              <a:buNone/>
+            </a:pPr>
+            <a:r>
+              <a:rPr lang="en-US" sz="1150" dirty="0">
                 <a:solidFill>
                   <a:srgbClr val="5A7184"/>
                 </a:solidFill>
@@ -6934,19 +7234,19 @@
               </a:rPr>
               <a:t>플랫폼 · 커스텀 30%+</a:t>
             </a:r>
-            <a:endParaRPr lang="en-US" sz="1200" dirty="0"/>
-          </a:p>
-        </p:txBody>
-      </p:sp>
-      <p:sp>
-        <p:nvSpPr>
-          <p:cNvPr id="30" name="Text 26"/>
-          <p:cNvSpPr/>
-          <p:nvPr/>
-        </p:nvSpPr>
-        <p:spPr>
-          <a:xfrm>
-            <a:off x="457200" y="5650992"/>
+            <a:endParaRPr lang="en-US" sz="1150" dirty="0"/>
+          </a:p>
+        </p:txBody>
+      </p:sp>
+      <p:sp>
+        <p:nvSpPr>
+          <p:cNvPr id="33" name="Text 28"/>
+          <p:cNvSpPr/>
+          <p:nvPr/>
+        </p:nvSpPr>
+        <p:spPr>
+          <a:xfrm>
+            <a:off x="457200" y="5596128"/>
             <a:ext cx="11274552" cy="548640"/>
           </a:xfrm>
           <a:prstGeom prst="rect">

--- a/outputs/presentation/dev-transformation-summary.pptx
+++ b/outputs/presentation/dev-transformation-summary.pptx
@@ -1214,8 +1214,8 @@
         </p:nvSpPr>
         <p:spPr>
           <a:xfrm>
-            <a:off x="457200" y="841248"/>
-            <a:ext cx="11274552" cy="292608"/>
+            <a:off x="457200" y="804672"/>
+            <a:ext cx="11274552" cy="246888"/>
           </a:xfrm>
           <a:prstGeom prst="rect">
             <a:avLst/>
@@ -1261,14 +1261,67 @@
       </p:sp>
       <p:sp>
         <p:nvSpPr>
-          <p:cNvPr id="7" name="Shape 5"/>
-          <p:cNvSpPr/>
-          <p:nvPr/>
-        </p:nvSpPr>
-        <p:spPr>
-          <a:xfrm>
-            <a:off x="457200" y="1207008"/>
-            <a:ext cx="3602736" cy="4297680"/>
+          <p:cNvPr id="7" name="Text 5"/>
+          <p:cNvSpPr/>
+          <p:nvPr/>
+        </p:nvSpPr>
+        <p:spPr>
+          <a:xfrm>
+            <a:off x="457200" y="1051560"/>
+            <a:ext cx="11274552" cy="246888"/>
+          </a:xfrm>
+          <a:prstGeom prst="rect">
+            <a:avLst/>
+          </a:prstGeom>
+          <a:noFill/>
+          <a:ln/>
+        </p:spPr>
+        <p:txBody>
+          <a:bodyPr wrap="square" lIns="0" tIns="0" rIns="0" bIns="0" rtlCol="0" anchor="ctr"/>
+          <a:lstStyle/>
+          <a:p>
+            <a:pPr indent="0" marL="0">
+              <a:buNone/>
+            </a:pPr>
+            <a:r>
+              <a:rPr lang="en-US" sz="1300" b="1" dirty="0">
+                <a:solidFill>
+                  <a:srgbClr val="02A878"/>
+                </a:solidFill>
+                <a:latin typeface="Malgun Gothic" pitchFamily="34" charset="0"/>
+                <a:ea typeface="Malgun Gothic" pitchFamily="34" charset="-122"/>
+                <a:cs typeface="Malgun Gothic" pitchFamily="34" charset="-120"/>
+              </a:rPr>
+              <a:t>호명사회  </a:t>
+            </a:r>
+            <a:pPr indent="0" marL="0">
+              <a:buNone/>
+            </a:pPr>
+            <a:r>
+              <a:rPr lang="en-US" sz="1300" i="1" dirty="0">
+                <a:solidFill>
+                  <a:srgbClr val="5A7184"/>
+                </a:solidFill>
+                <a:latin typeface="Malgun Gothic" pitchFamily="34" charset="0"/>
+                <a:ea typeface="Malgun Gothic" pitchFamily="34" charset="-122"/>
+                <a:cs typeface="Malgun Gothic" pitchFamily="34" charset="-120"/>
+              </a:rPr>
+              <a:t>“조직의 이름 뒤에 숨지 않고, 자신의 이름으로 불리며 책임과 결과를 마주한다” — 송길영 『시대예보: 호명사회』</a:t>
+            </a:r>
+            <a:endParaRPr lang="en-US" sz="1300" dirty="0"/>
+          </a:p>
+        </p:txBody>
+      </p:sp>
+      <p:sp>
+        <p:nvSpPr>
+          <p:cNvPr id="8" name="Shape 6"/>
+          <p:cNvSpPr/>
+          <p:nvPr/>
+        </p:nvSpPr>
+        <p:spPr>
+          <a:xfrm>
+            <a:off x="457200" y="1389888"/>
+            <a:ext cx="3602736" cy="4114800"/>
           </a:xfrm>
           <a:prstGeom prst="roundRect">
             <a:avLst>
@@ -1283,13 +1336,13 @@
       </p:sp>
       <p:sp>
         <p:nvSpPr>
-          <p:cNvPr id="8" name="Text 6"/>
-          <p:cNvSpPr/>
-          <p:nvPr/>
-        </p:nvSpPr>
-        <p:spPr>
-          <a:xfrm>
-            <a:off x="640080" y="1371600"/>
+          <p:cNvPr id="9" name="Text 7"/>
+          <p:cNvSpPr/>
+          <p:nvPr/>
+        </p:nvSpPr>
+        <p:spPr>
+          <a:xfrm>
+            <a:off x="640080" y="1554480"/>
             <a:ext cx="329184" cy="329184"/>
           </a:xfrm>
           <a:prstGeom prst="ellipse">
@@ -1324,13 +1377,13 @@
       </p:sp>
       <p:sp>
         <p:nvSpPr>
-          <p:cNvPr id="9" name="Text 7"/>
-          <p:cNvSpPr/>
-          <p:nvPr/>
-        </p:nvSpPr>
-        <p:spPr>
-          <a:xfrm>
-            <a:off x="1060704" y="1344168"/>
+          <p:cNvPr id="10" name="Text 8"/>
+          <p:cNvSpPr/>
+          <p:nvPr/>
+        </p:nvSpPr>
+        <p:spPr>
+          <a:xfrm>
+            <a:off x="1060704" y="1527048"/>
             <a:ext cx="2871216" cy="384048"/>
           </a:xfrm>
           <a:prstGeom prst="rect">
@@ -1363,14 +1416,14 @@
       </p:sp>
       <p:sp>
         <p:nvSpPr>
-          <p:cNvPr id="10" name="Shape 8"/>
-          <p:cNvSpPr/>
-          <p:nvPr/>
-        </p:nvSpPr>
-        <p:spPr>
-          <a:xfrm>
-            <a:off x="4297680" y="1207008"/>
-            <a:ext cx="3602736" cy="4297680"/>
+          <p:cNvPr id="11" name="Shape 9"/>
+          <p:cNvSpPr/>
+          <p:nvPr/>
+        </p:nvSpPr>
+        <p:spPr>
+          <a:xfrm>
+            <a:off x="4297680" y="1389888"/>
+            <a:ext cx="3602736" cy="4114800"/>
           </a:xfrm>
           <a:prstGeom prst="roundRect">
             <a:avLst>
@@ -1385,13 +1438,13 @@
       </p:sp>
       <p:sp>
         <p:nvSpPr>
-          <p:cNvPr id="11" name="Text 9"/>
-          <p:cNvSpPr/>
-          <p:nvPr/>
-        </p:nvSpPr>
-        <p:spPr>
-          <a:xfrm>
-            <a:off x="4480560" y="1371600"/>
+          <p:cNvPr id="12" name="Text 10"/>
+          <p:cNvSpPr/>
+          <p:nvPr/>
+        </p:nvSpPr>
+        <p:spPr>
+          <a:xfrm>
+            <a:off x="4480560" y="1554480"/>
             <a:ext cx="329184" cy="329184"/>
           </a:xfrm>
           <a:prstGeom prst="ellipse">
@@ -1426,13 +1479,13 @@
       </p:sp>
       <p:sp>
         <p:nvSpPr>
-          <p:cNvPr id="12" name="Text 10"/>
-          <p:cNvSpPr/>
-          <p:nvPr/>
-        </p:nvSpPr>
-        <p:spPr>
-          <a:xfrm>
-            <a:off x="4901184" y="1344168"/>
+          <p:cNvPr id="13" name="Text 11"/>
+          <p:cNvSpPr/>
+          <p:nvPr/>
+        </p:nvSpPr>
+        <p:spPr>
+          <a:xfrm>
+            <a:off x="4901184" y="1527048"/>
             <a:ext cx="2871216" cy="384048"/>
           </a:xfrm>
           <a:prstGeom prst="rect">
@@ -1465,14 +1518,14 @@
       </p:sp>
       <p:sp>
         <p:nvSpPr>
-          <p:cNvPr id="13" name="Shape 11"/>
-          <p:cNvSpPr/>
-          <p:nvPr/>
-        </p:nvSpPr>
-        <p:spPr>
-          <a:xfrm>
-            <a:off x="8129016" y="1207008"/>
-            <a:ext cx="3602736" cy="4297680"/>
+          <p:cNvPr id="14" name="Shape 12"/>
+          <p:cNvSpPr/>
+          <p:nvPr/>
+        </p:nvSpPr>
+        <p:spPr>
+          <a:xfrm>
+            <a:off x="8129016" y="1389888"/>
+            <a:ext cx="3602736" cy="4114800"/>
           </a:xfrm>
           <a:prstGeom prst="roundRect">
             <a:avLst>
@@ -1487,13 +1540,13 @@
       </p:sp>
       <p:sp>
         <p:nvSpPr>
-          <p:cNvPr id="14" name="Text 12"/>
-          <p:cNvSpPr/>
-          <p:nvPr/>
-        </p:nvSpPr>
-        <p:spPr>
-          <a:xfrm>
-            <a:off x="8311896" y="1371600"/>
+          <p:cNvPr id="15" name="Text 13"/>
+          <p:cNvSpPr/>
+          <p:nvPr/>
+        </p:nvSpPr>
+        <p:spPr>
+          <a:xfrm>
+            <a:off x="8311896" y="1554480"/>
             <a:ext cx="329184" cy="329184"/>
           </a:xfrm>
           <a:prstGeom prst="ellipse">
@@ -1528,13 +1581,13 @@
       </p:sp>
       <p:sp>
         <p:nvSpPr>
-          <p:cNvPr id="15" name="Text 13"/>
-          <p:cNvSpPr/>
-          <p:nvPr/>
-        </p:nvSpPr>
-        <p:spPr>
-          <a:xfrm>
-            <a:off x="8732520" y="1344168"/>
+          <p:cNvPr id="16" name="Text 14"/>
+          <p:cNvSpPr/>
+          <p:nvPr/>
+        </p:nvSpPr>
+        <p:spPr>
+          <a:xfrm>
+            <a:off x="8732520" y="1527048"/>
             <a:ext cx="2871216" cy="384048"/>
           </a:xfrm>
           <a:prstGeom prst="rect">
@@ -1567,7 +1620,7 @@
       </p:sp>
       <p:sp>
         <p:nvSpPr>
-          <p:cNvPr id="16" name="Shape 14"/>
+          <p:cNvPr id="17" name="Shape 15"/>
           <p:cNvSpPr/>
           <p:nvPr/>
         </p:nvSpPr>
@@ -1590,7 +1643,7 @@
       </p:sp>
       <p:sp>
         <p:nvSpPr>
-          <p:cNvPr id="17" name="Shape 15"/>
+          <p:cNvPr id="18" name="Shape 16"/>
           <p:cNvSpPr/>
           <p:nvPr/>
         </p:nvSpPr>
@@ -1610,7 +1663,7 @@
       </p:sp>
       <p:sp>
         <p:nvSpPr>
-          <p:cNvPr id="18" name="Text 16"/>
+          <p:cNvPr id="19" name="Text 17"/>
           <p:cNvSpPr/>
           <p:nvPr/>
         </p:nvSpPr>
@@ -1649,7 +1702,7 @@
       </p:sp>
       <p:sp>
         <p:nvSpPr>
-          <p:cNvPr id="19" name="Text 17"/>
+          <p:cNvPr id="20" name="Text 18"/>
           <p:cNvSpPr/>
           <p:nvPr/>
         </p:nvSpPr>
@@ -1711,7 +1764,7 @@
       </p:sp>
       <p:sp>
         <p:nvSpPr>
-          <p:cNvPr id="20" name="Shape 18"/>
+          <p:cNvPr id="21" name="Shape 19"/>
           <p:cNvSpPr/>
           <p:nvPr/>
         </p:nvSpPr>
@@ -1731,7 +1784,7 @@
       </p:sp>
       <p:sp>
         <p:nvSpPr>
-          <p:cNvPr id="21" name="Text 19"/>
+          <p:cNvPr id="22" name="Text 20"/>
           <p:cNvSpPr/>
           <p:nvPr/>
         </p:nvSpPr>
@@ -1770,7 +1823,7 @@
       </p:sp>
       <p:sp>
         <p:nvSpPr>
-          <p:cNvPr id="22" name="Text 20"/>
+          <p:cNvPr id="23" name="Text 21"/>
           <p:cNvSpPr/>
           <p:nvPr/>
         </p:nvSpPr>
@@ -1832,7 +1885,7 @@
       </p:sp>
       <p:sp>
         <p:nvSpPr>
-          <p:cNvPr id="23" name="Shape 21"/>
+          <p:cNvPr id="24" name="Shape 22"/>
           <p:cNvSpPr/>
           <p:nvPr/>
         </p:nvSpPr>
@@ -1852,7 +1905,7 @@
       </p:sp>
       <p:sp>
         <p:nvSpPr>
-          <p:cNvPr id="24" name="Text 22"/>
+          <p:cNvPr id="25" name="Text 23"/>
           <p:cNvSpPr/>
           <p:nvPr/>
         </p:nvSpPr>
@@ -1891,7 +1944,7 @@
       </p:sp>
       <p:sp>
         <p:nvSpPr>
-          <p:cNvPr id="25" name="Text 23"/>
+          <p:cNvPr id="26" name="Text 24"/>
           <p:cNvSpPr/>
           <p:nvPr/>
         </p:nvSpPr>
@@ -1953,7 +2006,7 @@
       </p:sp>
       <p:sp>
         <p:nvSpPr>
-          <p:cNvPr id="26" name="Shape 24"/>
+          <p:cNvPr id="27" name="Shape 25"/>
           <p:cNvSpPr/>
           <p:nvPr/>
         </p:nvSpPr>
@@ -1980,7 +2033,7 @@
       </p:sp>
       <p:pic>
         <p:nvPicPr>
-          <p:cNvPr id="27" name="Image 0" descr="preencoded.png">    </p:cNvPr>
+          <p:cNvPr id="28" name="Image 0" descr="preencoded.png">    </p:cNvPr>
           <p:cNvPicPr>
             <a:picLocks noChangeAspect="1"/>
           </p:cNvPicPr>
@@ -2004,7 +2057,7 @@
       </p:pic>
       <p:sp>
         <p:nvSpPr>
-          <p:cNvPr id="28" name="Text 25"/>
+          <p:cNvPr id="29" name="Text 26"/>
           <p:cNvSpPr/>
           <p:nvPr/>
         </p:nvSpPr>
@@ -2066,13 +2119,13 @@
       </p:sp>
       <p:sp>
         <p:nvSpPr>
-          <p:cNvPr id="29" name="Text 26"/>
-          <p:cNvSpPr/>
-          <p:nvPr/>
-        </p:nvSpPr>
-        <p:spPr>
-          <a:xfrm>
-            <a:off x="4517136" y="1883664"/>
+          <p:cNvPr id="30" name="Text 27"/>
+          <p:cNvSpPr/>
+          <p:nvPr/>
+        </p:nvSpPr>
+        <p:spPr>
+          <a:xfrm>
+            <a:off x="4517136" y="1956816"/>
             <a:ext cx="1371600" cy="237744"/>
           </a:xfrm>
           <a:prstGeom prst="rect">
@@ -2105,13 +2158,13 @@
       </p:sp>
       <p:sp>
         <p:nvSpPr>
-          <p:cNvPr id="30" name="Text 27"/>
-          <p:cNvSpPr/>
-          <p:nvPr/>
-        </p:nvSpPr>
-        <p:spPr>
-          <a:xfrm>
-            <a:off x="6181344" y="1883664"/>
+          <p:cNvPr id="31" name="Text 28"/>
+          <p:cNvSpPr/>
+          <p:nvPr/>
+        </p:nvSpPr>
+        <p:spPr>
+          <a:xfrm>
+            <a:off x="6181344" y="1956816"/>
             <a:ext cx="1463040" cy="237744"/>
           </a:xfrm>
           <a:prstGeom prst="rect">
@@ -2144,13 +2197,13 @@
       </p:sp>
       <p:sp>
         <p:nvSpPr>
-          <p:cNvPr id="31" name="Text 28"/>
-          <p:cNvSpPr/>
-          <p:nvPr/>
-        </p:nvSpPr>
-        <p:spPr>
-          <a:xfrm>
-            <a:off x="4517136" y="2157984"/>
+          <p:cNvPr id="32" name="Text 29"/>
+          <p:cNvSpPr/>
+          <p:nvPr/>
+        </p:nvSpPr>
+        <p:spPr>
+          <a:xfrm>
+            <a:off x="4517136" y="2231136"/>
             <a:ext cx="1371600" cy="475488"/>
           </a:xfrm>
           <a:prstGeom prst="roundRect">
@@ -2191,13 +2244,13 @@
       </p:sp>
       <p:sp>
         <p:nvSpPr>
-          <p:cNvPr id="32" name="Text 29"/>
-          <p:cNvSpPr/>
-          <p:nvPr/>
-        </p:nvSpPr>
-        <p:spPr>
-          <a:xfrm>
-            <a:off x="5888736" y="2157984"/>
+          <p:cNvPr id="33" name="Text 30"/>
+          <p:cNvSpPr/>
+          <p:nvPr/>
+        </p:nvSpPr>
+        <p:spPr>
+          <a:xfrm>
+            <a:off x="5888736" y="2231136"/>
             <a:ext cx="292608" cy="475488"/>
           </a:xfrm>
           <a:prstGeom prst="rect">
@@ -2230,13 +2283,13 @@
       </p:sp>
       <p:sp>
         <p:nvSpPr>
-          <p:cNvPr id="33" name="Text 30"/>
-          <p:cNvSpPr/>
-          <p:nvPr/>
-        </p:nvSpPr>
-        <p:spPr>
-          <a:xfrm>
-            <a:off x="6181344" y="2157984"/>
+          <p:cNvPr id="34" name="Text 31"/>
+          <p:cNvSpPr/>
+          <p:nvPr/>
+        </p:nvSpPr>
+        <p:spPr>
+          <a:xfrm>
+            <a:off x="6181344" y="2231136"/>
             <a:ext cx="1499616" cy="475488"/>
           </a:xfrm>
           <a:prstGeom prst="roundRect">
@@ -2277,13 +2330,13 @@
       </p:sp>
       <p:sp>
         <p:nvSpPr>
-          <p:cNvPr id="34" name="Text 31"/>
-          <p:cNvSpPr/>
-          <p:nvPr/>
-        </p:nvSpPr>
-        <p:spPr>
-          <a:xfrm>
-            <a:off x="4517136" y="2761488"/>
+          <p:cNvPr id="35" name="Text 32"/>
+          <p:cNvSpPr/>
+          <p:nvPr/>
+        </p:nvSpPr>
+        <p:spPr>
+          <a:xfrm>
+            <a:off x="4517136" y="2807208"/>
             <a:ext cx="1371600" cy="475488"/>
           </a:xfrm>
           <a:prstGeom prst="roundRect">
@@ -2324,13 +2377,13 @@
       </p:sp>
       <p:sp>
         <p:nvSpPr>
-          <p:cNvPr id="35" name="Text 32"/>
-          <p:cNvSpPr/>
-          <p:nvPr/>
-        </p:nvSpPr>
-        <p:spPr>
-          <a:xfrm>
-            <a:off x="5888736" y="2761488"/>
+          <p:cNvPr id="36" name="Text 33"/>
+          <p:cNvSpPr/>
+          <p:nvPr/>
+        </p:nvSpPr>
+        <p:spPr>
+          <a:xfrm>
+            <a:off x="5888736" y="2807208"/>
             <a:ext cx="292608" cy="475488"/>
           </a:xfrm>
           <a:prstGeom prst="rect">
@@ -2363,13 +2416,13 @@
       </p:sp>
       <p:sp>
         <p:nvSpPr>
-          <p:cNvPr id="36" name="Text 33"/>
-          <p:cNvSpPr/>
-          <p:nvPr/>
-        </p:nvSpPr>
-        <p:spPr>
-          <a:xfrm>
-            <a:off x="6181344" y="2761488"/>
+          <p:cNvPr id="37" name="Text 34"/>
+          <p:cNvSpPr/>
+          <p:nvPr/>
+        </p:nvSpPr>
+        <p:spPr>
+          <a:xfrm>
+            <a:off x="6181344" y="2807208"/>
             <a:ext cx="1499616" cy="475488"/>
           </a:xfrm>
           <a:prstGeom prst="roundRect">
@@ -2410,13 +2463,13 @@
       </p:sp>
       <p:sp>
         <p:nvSpPr>
-          <p:cNvPr id="37" name="Text 34"/>
-          <p:cNvSpPr/>
-          <p:nvPr/>
-        </p:nvSpPr>
-        <p:spPr>
-          <a:xfrm>
-            <a:off x="4517136" y="3364992"/>
+          <p:cNvPr id="38" name="Text 35"/>
+          <p:cNvSpPr/>
+          <p:nvPr/>
+        </p:nvSpPr>
+        <p:spPr>
+          <a:xfrm>
+            <a:off x="4517136" y="3383280"/>
             <a:ext cx="1371600" cy="475488"/>
           </a:xfrm>
           <a:prstGeom prst="roundRect">
@@ -2457,13 +2510,13 @@
       </p:sp>
       <p:sp>
         <p:nvSpPr>
-          <p:cNvPr id="38" name="Text 35"/>
-          <p:cNvSpPr/>
-          <p:nvPr/>
-        </p:nvSpPr>
-        <p:spPr>
-          <a:xfrm>
-            <a:off x="5888736" y="3364992"/>
+          <p:cNvPr id="39" name="Text 36"/>
+          <p:cNvSpPr/>
+          <p:nvPr/>
+        </p:nvSpPr>
+        <p:spPr>
+          <a:xfrm>
+            <a:off x="5888736" y="3383280"/>
             <a:ext cx="292608" cy="475488"/>
           </a:xfrm>
           <a:prstGeom prst="rect">
@@ -2496,13 +2549,13 @@
       </p:sp>
       <p:sp>
         <p:nvSpPr>
-          <p:cNvPr id="39" name="Text 36"/>
-          <p:cNvSpPr/>
-          <p:nvPr/>
-        </p:nvSpPr>
-        <p:spPr>
-          <a:xfrm>
-            <a:off x="6181344" y="3364992"/>
+          <p:cNvPr id="40" name="Text 37"/>
+          <p:cNvSpPr/>
+          <p:nvPr/>
+        </p:nvSpPr>
+        <p:spPr>
+          <a:xfrm>
+            <a:off x="6181344" y="3383280"/>
             <a:ext cx="1499616" cy="475488"/>
           </a:xfrm>
           <a:prstGeom prst="roundRect">
@@ -2543,13 +2596,13 @@
       </p:sp>
       <p:sp>
         <p:nvSpPr>
-          <p:cNvPr id="40" name="Text 37"/>
-          <p:cNvSpPr/>
-          <p:nvPr/>
-        </p:nvSpPr>
-        <p:spPr>
-          <a:xfrm>
-            <a:off x="4517136" y="3968496"/>
+          <p:cNvPr id="41" name="Text 38"/>
+          <p:cNvSpPr/>
+          <p:nvPr/>
+        </p:nvSpPr>
+        <p:spPr>
+          <a:xfrm>
+            <a:off x="4517136" y="3959352"/>
             <a:ext cx="1371600" cy="475488"/>
           </a:xfrm>
           <a:prstGeom prst="roundRect">
@@ -2590,13 +2643,13 @@
       </p:sp>
       <p:sp>
         <p:nvSpPr>
-          <p:cNvPr id="41" name="Text 38"/>
-          <p:cNvSpPr/>
-          <p:nvPr/>
-        </p:nvSpPr>
-        <p:spPr>
-          <a:xfrm>
-            <a:off x="5888736" y="3968496"/>
+          <p:cNvPr id="42" name="Text 39"/>
+          <p:cNvSpPr/>
+          <p:nvPr/>
+        </p:nvSpPr>
+        <p:spPr>
+          <a:xfrm>
+            <a:off x="5888736" y="3959352"/>
             <a:ext cx="292608" cy="475488"/>
           </a:xfrm>
           <a:prstGeom prst="rect">
@@ -2629,13 +2682,13 @@
       </p:sp>
       <p:sp>
         <p:nvSpPr>
-          <p:cNvPr id="42" name="Text 39"/>
-          <p:cNvSpPr/>
-          <p:nvPr/>
-        </p:nvSpPr>
-        <p:spPr>
-          <a:xfrm>
-            <a:off x="6181344" y="3968496"/>
+          <p:cNvPr id="43" name="Text 40"/>
+          <p:cNvSpPr/>
+          <p:nvPr/>
+        </p:nvSpPr>
+        <p:spPr>
+          <a:xfrm>
+            <a:off x="6181344" y="3959352"/>
             <a:ext cx="1499616" cy="475488"/>
           </a:xfrm>
           <a:prstGeom prst="roundRect">
@@ -2676,7 +2729,7 @@
       </p:sp>
       <p:sp>
         <p:nvSpPr>
-          <p:cNvPr id="43" name="Shape 40"/>
+          <p:cNvPr id="44" name="Shape 41"/>
           <p:cNvSpPr/>
           <p:nvPr/>
         </p:nvSpPr>
@@ -2703,7 +2756,7 @@
       </p:sp>
       <p:pic>
         <p:nvPicPr>
-          <p:cNvPr id="44" name="Image 1" descr="preencoded.png">    </p:cNvPr>
+          <p:cNvPr id="45" name="Image 1" descr="preencoded.png">    </p:cNvPr>
           <p:cNvPicPr>
             <a:picLocks noChangeAspect="1"/>
           </p:cNvPicPr>
@@ -2727,7 +2780,7 @@
       </p:pic>
       <p:sp>
         <p:nvSpPr>
-          <p:cNvPr id="45" name="Text 41"/>
+          <p:cNvPr id="46" name="Text 42"/>
           <p:cNvSpPr/>
           <p:nvPr/>
         </p:nvSpPr>
@@ -2766,13 +2819,13 @@
       </p:sp>
       <p:sp>
         <p:nvSpPr>
-          <p:cNvPr id="46" name="Shape 42"/>
-          <p:cNvSpPr/>
-          <p:nvPr/>
-        </p:nvSpPr>
-        <p:spPr>
-          <a:xfrm>
-            <a:off x="8897112" y="1847088"/>
+          <p:cNvPr id="47" name="Shape 43"/>
+          <p:cNvSpPr/>
+          <p:nvPr/>
+        </p:nvSpPr>
+        <p:spPr>
+          <a:xfrm>
+            <a:off x="8897112" y="1956816"/>
             <a:ext cx="402336" cy="402336"/>
           </a:xfrm>
           <a:prstGeom prst="ellipse">
@@ -2786,7 +2839,7 @@
       </p:sp>
       <p:pic>
         <p:nvPicPr>
-          <p:cNvPr id="47" name="Image 2" descr="preencoded.png">    </p:cNvPr>
+          <p:cNvPr id="48" name="Image 2" descr="preencoded.png">    </p:cNvPr>
           <p:cNvPicPr>
             <a:picLocks noChangeAspect="1"/>
           </p:cNvPicPr>
@@ -2800,7 +2853,7 @@
         </p:blipFill>
         <p:spPr>
           <a:xfrm>
-            <a:off x="8993673" y="1943649"/>
+            <a:off x="8993673" y="2053377"/>
             <a:ext cx="209215" cy="209215"/>
           </a:xfrm>
           <a:prstGeom prst="rect">
@@ -2810,13 +2863,13 @@
       </p:pic>
       <p:sp>
         <p:nvSpPr>
-          <p:cNvPr id="48" name="Text 43"/>
-          <p:cNvSpPr/>
-          <p:nvPr/>
-        </p:nvSpPr>
-        <p:spPr>
-          <a:xfrm>
-            <a:off x="8330184" y="2267712"/>
+          <p:cNvPr id="49" name="Text 44"/>
+          <p:cNvSpPr/>
+          <p:nvPr/>
+        </p:nvSpPr>
+        <p:spPr>
+          <a:xfrm>
+            <a:off x="8330184" y="2377440"/>
             <a:ext cx="1536192" cy="274320"/>
           </a:xfrm>
           <a:prstGeom prst="rect">
@@ -2849,13 +2902,13 @@
       </p:sp>
       <p:sp>
         <p:nvSpPr>
-          <p:cNvPr id="49" name="Text 44"/>
-          <p:cNvSpPr/>
-          <p:nvPr/>
-        </p:nvSpPr>
-        <p:spPr>
-          <a:xfrm>
-            <a:off x="8275320" y="2542032"/>
+          <p:cNvPr id="50" name="Text 45"/>
+          <p:cNvSpPr/>
+          <p:nvPr/>
+        </p:nvSpPr>
+        <p:spPr>
+          <a:xfrm>
+            <a:off x="8275320" y="2651760"/>
             <a:ext cx="1645920" cy="219456"/>
           </a:xfrm>
           <a:prstGeom prst="rect">
@@ -2888,13 +2941,13 @@
       </p:sp>
       <p:sp>
         <p:nvSpPr>
-          <p:cNvPr id="50" name="Shape 45"/>
-          <p:cNvSpPr/>
-          <p:nvPr/>
-        </p:nvSpPr>
-        <p:spPr>
-          <a:xfrm>
-            <a:off x="10561320" y="1847088"/>
+          <p:cNvPr id="51" name="Shape 46"/>
+          <p:cNvSpPr/>
+          <p:nvPr/>
+        </p:nvSpPr>
+        <p:spPr>
+          <a:xfrm>
+            <a:off x="10561320" y="1956816"/>
             <a:ext cx="402336" cy="402336"/>
           </a:xfrm>
           <a:prstGeom prst="ellipse">
@@ -2908,7 +2961,7 @@
       </p:sp>
       <p:pic>
         <p:nvPicPr>
-          <p:cNvPr id="51" name="Image 3" descr="preencoded.png">    </p:cNvPr>
+          <p:cNvPr id="52" name="Image 3" descr="preencoded.png">    </p:cNvPr>
           <p:cNvPicPr>
             <a:picLocks noChangeAspect="1"/>
           </p:cNvPicPr>
@@ -2922,7 +2975,7 @@
         </p:blipFill>
         <p:spPr>
           <a:xfrm>
-            <a:off x="10657881" y="1943649"/>
+            <a:off x="10657881" y="2053377"/>
             <a:ext cx="209215" cy="209215"/>
           </a:xfrm>
           <a:prstGeom prst="rect">
@@ -2932,13 +2985,13 @@
       </p:pic>
       <p:sp>
         <p:nvSpPr>
-          <p:cNvPr id="52" name="Text 46"/>
-          <p:cNvSpPr/>
-          <p:nvPr/>
-        </p:nvSpPr>
-        <p:spPr>
-          <a:xfrm>
-            <a:off x="9994392" y="2267712"/>
+          <p:cNvPr id="53" name="Text 47"/>
+          <p:cNvSpPr/>
+          <p:nvPr/>
+        </p:nvSpPr>
+        <p:spPr>
+          <a:xfrm>
+            <a:off x="9994392" y="2377440"/>
             <a:ext cx="1536192" cy="274320"/>
           </a:xfrm>
           <a:prstGeom prst="rect">
@@ -2971,13 +3024,13 @@
       </p:sp>
       <p:sp>
         <p:nvSpPr>
-          <p:cNvPr id="53" name="Text 47"/>
-          <p:cNvSpPr/>
-          <p:nvPr/>
-        </p:nvSpPr>
-        <p:spPr>
-          <a:xfrm>
-            <a:off x="9939528" y="2542032"/>
+          <p:cNvPr id="54" name="Text 48"/>
+          <p:cNvSpPr/>
+          <p:nvPr/>
+        </p:nvSpPr>
+        <p:spPr>
+          <a:xfrm>
+            <a:off x="9939528" y="2651760"/>
             <a:ext cx="1645920" cy="219456"/>
           </a:xfrm>
           <a:prstGeom prst="rect">
@@ -3010,13 +3063,13 @@
       </p:sp>
       <p:sp>
         <p:nvSpPr>
-          <p:cNvPr id="54" name="Shape 48"/>
-          <p:cNvSpPr/>
-          <p:nvPr/>
-        </p:nvSpPr>
-        <p:spPr>
-          <a:xfrm>
-            <a:off x="8897112" y="2907792"/>
+          <p:cNvPr id="55" name="Shape 49"/>
+          <p:cNvSpPr/>
+          <p:nvPr/>
+        </p:nvSpPr>
+        <p:spPr>
+          <a:xfrm>
+            <a:off x="8897112" y="3017520"/>
             <a:ext cx="402336" cy="402336"/>
           </a:xfrm>
           <a:prstGeom prst="ellipse">
@@ -3030,7 +3083,7 @@
       </p:sp>
       <p:pic>
         <p:nvPicPr>
-          <p:cNvPr id="55" name="Image 4" descr="preencoded.png">    </p:cNvPr>
+          <p:cNvPr id="56" name="Image 4" descr="preencoded.png">    </p:cNvPr>
           <p:cNvPicPr>
             <a:picLocks noChangeAspect="1"/>
           </p:cNvPicPr>
@@ -3044,7 +3097,7 @@
         </p:blipFill>
         <p:spPr>
           <a:xfrm>
-            <a:off x="8993673" y="3004353"/>
+            <a:off x="8993673" y="3114081"/>
             <a:ext cx="209215" cy="209215"/>
           </a:xfrm>
           <a:prstGeom prst="rect">
@@ -3054,13 +3107,13 @@
       </p:pic>
       <p:sp>
         <p:nvSpPr>
-          <p:cNvPr id="56" name="Text 49"/>
-          <p:cNvSpPr/>
-          <p:nvPr/>
-        </p:nvSpPr>
-        <p:spPr>
-          <a:xfrm>
-            <a:off x="8330184" y="3328416"/>
+          <p:cNvPr id="57" name="Text 50"/>
+          <p:cNvSpPr/>
+          <p:nvPr/>
+        </p:nvSpPr>
+        <p:spPr>
+          <a:xfrm>
+            <a:off x="8330184" y="3438144"/>
             <a:ext cx="1536192" cy="274320"/>
           </a:xfrm>
           <a:prstGeom prst="rect">
@@ -3093,13 +3146,13 @@
       </p:sp>
       <p:sp>
         <p:nvSpPr>
-          <p:cNvPr id="57" name="Text 50"/>
-          <p:cNvSpPr/>
-          <p:nvPr/>
-        </p:nvSpPr>
-        <p:spPr>
-          <a:xfrm>
-            <a:off x="8275320" y="3602736"/>
+          <p:cNvPr id="58" name="Text 51"/>
+          <p:cNvSpPr/>
+          <p:nvPr/>
+        </p:nvSpPr>
+        <p:spPr>
+          <a:xfrm>
+            <a:off x="8275320" y="3712464"/>
             <a:ext cx="1645920" cy="219456"/>
           </a:xfrm>
           <a:prstGeom prst="rect">
@@ -3132,13 +3185,13 @@
       </p:sp>
       <p:sp>
         <p:nvSpPr>
-          <p:cNvPr id="58" name="Shape 51"/>
-          <p:cNvSpPr/>
-          <p:nvPr/>
-        </p:nvSpPr>
-        <p:spPr>
-          <a:xfrm>
-            <a:off x="10561320" y="2907792"/>
+          <p:cNvPr id="59" name="Shape 52"/>
+          <p:cNvSpPr/>
+          <p:nvPr/>
+        </p:nvSpPr>
+        <p:spPr>
+          <a:xfrm>
+            <a:off x="10561320" y="3017520"/>
             <a:ext cx="402336" cy="402336"/>
           </a:xfrm>
           <a:prstGeom prst="ellipse">
@@ -3152,7 +3205,7 @@
       </p:sp>
       <p:pic>
         <p:nvPicPr>
-          <p:cNvPr id="59" name="Image 5" descr="preencoded.png">    </p:cNvPr>
+          <p:cNvPr id="60" name="Image 5" descr="preencoded.png">    </p:cNvPr>
           <p:cNvPicPr>
             <a:picLocks noChangeAspect="1"/>
           </p:cNvPicPr>
@@ -3166,7 +3219,7 @@
         </p:blipFill>
         <p:spPr>
           <a:xfrm>
-            <a:off x="10657881" y="3004353"/>
+            <a:off x="10657881" y="3114081"/>
             <a:ext cx="209215" cy="209215"/>
           </a:xfrm>
           <a:prstGeom prst="rect">
@@ -3176,13 +3229,13 @@
       </p:pic>
       <p:sp>
         <p:nvSpPr>
-          <p:cNvPr id="60" name="Text 52"/>
-          <p:cNvSpPr/>
-          <p:nvPr/>
-        </p:nvSpPr>
-        <p:spPr>
-          <a:xfrm>
-            <a:off x="9994392" y="3328416"/>
+          <p:cNvPr id="61" name="Text 53"/>
+          <p:cNvSpPr/>
+          <p:nvPr/>
+        </p:nvSpPr>
+        <p:spPr>
+          <a:xfrm>
+            <a:off x="9994392" y="3438144"/>
             <a:ext cx="1536192" cy="274320"/>
           </a:xfrm>
           <a:prstGeom prst="rect">
@@ -3215,13 +3268,13 @@
       </p:sp>
       <p:sp>
         <p:nvSpPr>
-          <p:cNvPr id="61" name="Text 53"/>
-          <p:cNvSpPr/>
-          <p:nvPr/>
-        </p:nvSpPr>
-        <p:spPr>
-          <a:xfrm>
-            <a:off x="9939528" y="3602736"/>
+          <p:cNvPr id="62" name="Text 54"/>
+          <p:cNvSpPr/>
+          <p:nvPr/>
+        </p:nvSpPr>
+        <p:spPr>
+          <a:xfrm>
+            <a:off x="9939528" y="3712464"/>
             <a:ext cx="1645920" cy="219456"/>
           </a:xfrm>
           <a:prstGeom prst="rect">
@@ -3254,7 +3307,7 @@
       </p:sp>
       <p:sp>
         <p:nvSpPr>
-          <p:cNvPr id="62" name="Shape 54"/>
+          <p:cNvPr id="63" name="Shape 55"/>
           <p:cNvSpPr/>
           <p:nvPr/>
         </p:nvSpPr>
@@ -3277,7 +3330,7 @@
       </p:sp>
       <p:sp>
         <p:nvSpPr>
-          <p:cNvPr id="63" name="Shape 55"/>
+          <p:cNvPr id="64" name="Shape 56"/>
           <p:cNvSpPr/>
           <p:nvPr/>
         </p:nvSpPr>
@@ -3297,7 +3350,7 @@
       </p:sp>
       <p:sp>
         <p:nvSpPr>
-          <p:cNvPr id="64" name="Text 56"/>
+          <p:cNvPr id="65" name="Text 57"/>
           <p:cNvSpPr/>
           <p:nvPr/>
         </p:nvSpPr>
@@ -3359,7 +3412,7 @@
       </p:sp>
       <p:sp>
         <p:nvSpPr>
-          <p:cNvPr id="65" name="Shape 57"/>
+          <p:cNvPr id="66" name="Shape 58"/>
           <p:cNvSpPr/>
           <p:nvPr/>
         </p:nvSpPr>
@@ -3379,7 +3432,7 @@
       </p:sp>
       <p:sp>
         <p:nvSpPr>
-          <p:cNvPr id="66" name="Text 58"/>
+          <p:cNvPr id="67" name="Text 59"/>
           <p:cNvSpPr/>
           <p:nvPr/>
         </p:nvSpPr>
@@ -3441,7 +3494,7 @@
       </p:sp>
       <p:sp>
         <p:nvSpPr>
-          <p:cNvPr id="67" name="Shape 59"/>
+          <p:cNvPr id="68" name="Shape 60"/>
           <p:cNvSpPr/>
           <p:nvPr/>
         </p:nvSpPr>
@@ -3461,7 +3514,7 @@
       </p:sp>
       <p:sp>
         <p:nvSpPr>
-          <p:cNvPr id="68" name="Text 60"/>
+          <p:cNvPr id="69" name="Text 61"/>
           <p:cNvSpPr/>
           <p:nvPr/>
         </p:nvSpPr>
@@ -3523,7 +3576,7 @@
       </p:sp>
       <p:sp>
         <p:nvSpPr>
-          <p:cNvPr id="69" name="Shape 61"/>
+          <p:cNvPr id="70" name="Shape 62"/>
           <p:cNvSpPr/>
           <p:nvPr/>
         </p:nvSpPr>
@@ -3550,7 +3603,7 @@
       </p:sp>
       <p:pic>
         <p:nvPicPr>
-          <p:cNvPr id="70" name="Image 6" descr="preencoded.png">    </p:cNvPr>
+          <p:cNvPr id="71" name="Image 6" descr="preencoded.png">    </p:cNvPr>
           <p:cNvPicPr>
             <a:picLocks noChangeAspect="1"/>
           </p:cNvPicPr>
@@ -3574,7 +3627,7 @@
       </p:pic>
       <p:sp>
         <p:nvSpPr>
-          <p:cNvPr id="71" name="Text 62"/>
+          <p:cNvPr id="72" name="Text 63"/>
           <p:cNvSpPr/>
           <p:nvPr/>
         </p:nvSpPr>
@@ -3636,7 +3689,7 @@
       </p:sp>
       <p:sp>
         <p:nvSpPr>
-          <p:cNvPr id="72" name="Text 63"/>
+          <p:cNvPr id="73" name="Text 64"/>
           <p:cNvSpPr/>
           <p:nvPr/>
         </p:nvSpPr>
@@ -3675,7 +3728,7 @@
       </p:sp>
       <p:sp>
         <p:nvSpPr>
-          <p:cNvPr id="73" name="Text 64"/>
+          <p:cNvPr id="74" name="Text 65"/>
           <p:cNvSpPr/>
           <p:nvPr/>
         </p:nvSpPr>
@@ -3714,7 +3767,7 @@
       </p:sp>
       <p:sp>
         <p:nvSpPr>
-          <p:cNvPr id="74" name="Text 65"/>
+          <p:cNvPr id="75" name="Text 66"/>
           <p:cNvSpPr/>
           <p:nvPr/>
         </p:nvSpPr>
@@ -3753,7 +3806,7 @@
       </p:sp>
       <p:sp>
         <p:nvSpPr>
-          <p:cNvPr id="75" name="Text 66"/>
+          <p:cNvPr id="76" name="Text 67"/>
           <p:cNvSpPr/>
           <p:nvPr/>
         </p:nvSpPr>
@@ -3792,7 +3845,7 @@
       </p:sp>
       <p:sp>
         <p:nvSpPr>
-          <p:cNvPr id="76" name="Text 67"/>
+          <p:cNvPr id="77" name="Text 68"/>
           <p:cNvSpPr/>
           <p:nvPr/>
         </p:nvSpPr>
@@ -3831,7 +3884,7 @@
       </p:sp>
       <p:sp>
         <p:nvSpPr>
-          <p:cNvPr id="77" name="Text 68"/>
+          <p:cNvPr id="78" name="Text 69"/>
           <p:cNvSpPr/>
           <p:nvPr/>
         </p:nvSpPr>
@@ -3870,7 +3923,7 @@
       </p:sp>
       <p:sp>
         <p:nvSpPr>
-          <p:cNvPr id="78" name="Text 69"/>
+          <p:cNvPr id="79" name="Text 70"/>
           <p:cNvSpPr/>
           <p:nvPr/>
         </p:nvSpPr>
@@ -3909,7 +3962,7 @@
       </p:sp>
       <p:sp>
         <p:nvSpPr>
-          <p:cNvPr id="79" name="Text 70"/>
+          <p:cNvPr id="80" name="Text 71"/>
           <p:cNvSpPr/>
           <p:nvPr/>
         </p:nvSpPr>
@@ -3948,7 +4001,7 @@
       </p:sp>
       <p:sp>
         <p:nvSpPr>
-          <p:cNvPr id="80" name="Text 71"/>
+          <p:cNvPr id="81" name="Text 72"/>
           <p:cNvSpPr/>
           <p:nvPr/>
         </p:nvSpPr>
@@ -3987,7 +4040,7 @@
       </p:sp>
       <p:sp>
         <p:nvSpPr>
-          <p:cNvPr id="81" name="Text 72"/>
+          <p:cNvPr id="82" name="Text 73"/>
           <p:cNvSpPr/>
           <p:nvPr/>
         </p:nvSpPr>
@@ -5861,7 +5914,7 @@
                 <a:ea typeface="Malgun Gothic" pitchFamily="34" charset="-122"/>
                 <a:cs typeface="Malgun Gothic" pitchFamily="34" charset="-120"/>
               </a:rPr>
-              <a:t>‘모난 놈이 정 맞는’ 기존 문화 → 스타를 호명하고 드러내는 문화로 (호명사회) · 관리 보직 분리 + 실리콘밸리 현역 스타 영입</a:t>
+              <a:t>“조직 이름 뒤에 숨지 않고 자기 이름으로 불린다” — 송길영 『호명사회』 · ‘모난 놈이 정 맞는’ 문화 → 호명 문화로 · 관리 분리 + SV 영입</a:t>
             </a:r>
             <a:endParaRPr lang="en-US" sz="1400" dirty="0"/>
           </a:p>
@@ -6377,12 +6430,12 @@
         </p:nvSpPr>
         <p:spPr>
           <a:xfrm>
-            <a:off x="914400" y="932688"/>
-            <a:ext cx="10360152" cy="822960"/>
+            <a:off x="457200" y="932688"/>
+            <a:ext cx="5541264" cy="859536"/>
           </a:xfrm>
           <a:prstGeom prst="roundRect">
             <a:avLst>
-              <a:gd name="adj" fmla="val 11111"/>
+              <a:gd name="adj" fmla="val 9574"/>
             </a:avLst>
           </a:prstGeom>
           <a:solidFill>
@@ -6399,24 +6452,27 @@
         </p:nvSpPr>
         <p:spPr>
           <a:xfrm>
-            <a:off x="1097280" y="1005840"/>
-            <a:ext cx="9994392" cy="420624"/>
-          </a:xfrm>
-          <a:prstGeom prst="rect">
-            <a:avLst/>
-          </a:prstGeom>
-          <a:noFill/>
-          <a:ln/>
-        </p:spPr>
-        <p:txBody>
-          <a:bodyPr wrap="square" lIns="0" tIns="0" rIns="0" bIns="0" rtlCol="0" anchor="ctr"/>
-          <a:lstStyle/>
-          <a:p>
-            <a:pPr algn="ctr" indent="0" marL="0">
-              <a:buNone/>
-            </a:pPr>
-            <a:r>
-              <a:rPr lang="en-US" sz="2200" b="1" i="1" dirty="0">
+            <a:off x="640080" y="1005840"/>
+            <a:ext cx="5175504" cy="457200"/>
+          </a:xfrm>
+          <a:prstGeom prst="rect">
+            <a:avLst/>
+          </a:prstGeom>
+          <a:noFill/>
+          <a:ln/>
+        </p:spPr>
+        <p:txBody>
+          <a:bodyPr wrap="square" lIns="0" tIns="0" rIns="0" bIns="0" rtlCol="0" anchor="ctr"/>
+          <a:lstStyle/>
+          <a:p>
+            <a:pPr algn="ctr" indent="0" marL="0">
+              <a:lnSpc>
+                <a:spcPct val="105000"/>
+              </a:lnSpc>
+              <a:buNone/>
+            </a:pPr>
+            <a:r>
+              <a:rPr lang="en-US" sz="1450" b="1" i="1" dirty="0">
                 <a:solidFill>
                   <a:srgbClr val="17313B"/>
                 </a:solidFill>
@@ -6426,7 +6482,7 @@
               </a:rPr>
               <a:t>“고객의 아키텍처 안으로 들어가 수요를 함께 설계하는 기업이 이긴다”</a:t>
             </a:r>
-            <a:endParaRPr lang="en-US" sz="2200" dirty="0"/>
+            <a:endParaRPr lang="en-US" sz="1450" dirty="0"/>
           </a:p>
         </p:txBody>
       </p:sp>
@@ -6438,24 +6494,24 @@
         </p:nvSpPr>
         <p:spPr>
           <a:xfrm>
-            <a:off x="1097280" y="1426464"/>
-            <a:ext cx="9994392" cy="237744"/>
-          </a:xfrm>
-          <a:prstGeom prst="rect">
-            <a:avLst/>
-          </a:prstGeom>
-          <a:noFill/>
-          <a:ln/>
-        </p:spPr>
-        <p:txBody>
-          <a:bodyPr wrap="square" lIns="0" tIns="0" rIns="0" bIns="0" rtlCol="0" anchor="ctr"/>
-          <a:lstStyle/>
-          <a:p>
-            <a:pPr algn="ctr" indent="0" marL="0">
-              <a:buNone/>
-            </a:pPr>
-            <a:r>
-              <a:rPr lang="en-US" sz="1250" dirty="0">
+            <a:off x="640080" y="1490472"/>
+            <a:ext cx="5175504" cy="219456"/>
+          </a:xfrm>
+          <a:prstGeom prst="rect">
+            <a:avLst/>
+          </a:prstGeom>
+          <a:noFill/>
+          <a:ln/>
+        </p:spPr>
+        <p:txBody>
+          <a:bodyPr wrap="square" lIns="0" tIns="0" rIns="0" bIns="0" rtlCol="0" anchor="ctr"/>
+          <a:lstStyle/>
+          <a:p>
+            <a:pPr algn="ctr" indent="0" marL="0">
+              <a:buNone/>
+            </a:pPr>
+            <a:r>
+              <a:rPr lang="en-US" sz="1050" dirty="0">
                 <a:solidFill>
                   <a:srgbClr val="5A7184"/>
                 </a:solidFill>
@@ -6465,13 +6521,116 @@
               </a:rPr>
               <a:t>— 신문섭 파트너, AI 인프라 슈퍼사이클 인터뷰 (2026-06)</a:t>
             </a:r>
-            <a:endParaRPr lang="en-US" sz="1250" dirty="0"/>
+            <a:endParaRPr lang="en-US" sz="1050" dirty="0"/>
           </a:p>
         </p:txBody>
       </p:sp>
       <p:sp>
         <p:nvSpPr>
           <p:cNvPr id="9" name="Shape 7"/>
+          <p:cNvSpPr/>
+          <p:nvPr/>
+        </p:nvSpPr>
+        <p:spPr>
+          <a:xfrm>
+            <a:off x="6190488" y="932688"/>
+            <a:ext cx="5541264" cy="859536"/>
+          </a:xfrm>
+          <a:prstGeom prst="roundRect">
+            <a:avLst>
+              <a:gd name="adj" fmla="val 9574"/>
+            </a:avLst>
+          </a:prstGeom>
+          <a:solidFill>
+            <a:srgbClr val="F5F7F8"/>
+          </a:solidFill>
+          <a:ln/>
+        </p:spPr>
+      </p:sp>
+      <p:sp>
+        <p:nvSpPr>
+          <p:cNvPr id="10" name="Text 8"/>
+          <p:cNvSpPr/>
+          <p:nvPr/>
+        </p:nvSpPr>
+        <p:spPr>
+          <a:xfrm>
+            <a:off x="6373368" y="1005840"/>
+            <a:ext cx="5175504" cy="457200"/>
+          </a:xfrm>
+          <a:prstGeom prst="rect">
+            <a:avLst/>
+          </a:prstGeom>
+          <a:noFill/>
+          <a:ln/>
+        </p:spPr>
+        <p:txBody>
+          <a:bodyPr wrap="square" lIns="0" tIns="0" rIns="0" bIns="0" rtlCol="0" anchor="ctr"/>
+          <a:lstStyle/>
+          <a:p>
+            <a:pPr algn="ctr" indent="0" marL="0">
+              <a:lnSpc>
+                <a:spcPct val="105000"/>
+              </a:lnSpc>
+              <a:buNone/>
+            </a:pPr>
+            <a:r>
+              <a:rPr lang="en-US" sz="1450" b="1" i="1" dirty="0">
+                <a:solidFill>
+                  <a:srgbClr val="17313B"/>
+                </a:solidFill>
+                <a:latin typeface="Malgun Gothic" pitchFamily="34" charset="0"/>
+                <a:ea typeface="Malgun Gothic" pitchFamily="34" charset="-122"/>
+                <a:cs typeface="Malgun Gothic" pitchFamily="34" charset="-120"/>
+              </a:rPr>
+              <a:t>“조직의 이름 뒤에 숨지 않고, 자신의 이름으로 불리며 책임과 결과를 마주한다”</a:t>
+            </a:r>
+            <a:endParaRPr lang="en-US" sz="1450" dirty="0"/>
+          </a:p>
+        </p:txBody>
+      </p:sp>
+      <p:sp>
+        <p:nvSpPr>
+          <p:cNvPr id="11" name="Text 9"/>
+          <p:cNvSpPr/>
+          <p:nvPr/>
+        </p:nvSpPr>
+        <p:spPr>
+          <a:xfrm>
+            <a:off x="6373368" y="1490472"/>
+            <a:ext cx="5175504" cy="219456"/>
+          </a:xfrm>
+          <a:prstGeom prst="rect">
+            <a:avLst/>
+          </a:prstGeom>
+          <a:noFill/>
+          <a:ln/>
+        </p:spPr>
+        <p:txBody>
+          <a:bodyPr wrap="square" lIns="0" tIns="0" rIns="0" bIns="0" rtlCol="0" anchor="ctr"/>
+          <a:lstStyle/>
+          <a:p>
+            <a:pPr algn="ctr" indent="0" marL="0">
+              <a:buNone/>
+            </a:pPr>
+            <a:r>
+              <a:rPr lang="en-US" sz="1050" dirty="0">
+                <a:solidFill>
+                  <a:srgbClr val="5A7184"/>
+                </a:solidFill>
+                <a:latin typeface="Malgun Gothic" pitchFamily="34" charset="0"/>
+                <a:ea typeface="Malgun Gothic" pitchFamily="34" charset="-122"/>
+                <a:cs typeface="Malgun Gothic" pitchFamily="34" charset="-120"/>
+              </a:rPr>
+              <a:t>— 송길영, 『시대예보: 호명사회』 (2024)</a:t>
+            </a:r>
+            <a:endParaRPr lang="en-US" sz="1050" dirty="0"/>
+          </a:p>
+        </p:txBody>
+      </p:sp>
+      <p:sp>
+        <p:nvSpPr>
+          <p:cNvPr id="12" name="Shape 10"/>
           <p:cNvSpPr/>
           <p:nvPr/>
         </p:nvSpPr>
@@ -6498,7 +6657,7 @@
       </p:sp>
       <p:sp>
         <p:nvSpPr>
-          <p:cNvPr id="10" name="Shape 8"/>
+          <p:cNvPr id="13" name="Shape 11"/>
           <p:cNvSpPr/>
           <p:nvPr/>
         </p:nvSpPr>
@@ -6518,7 +6677,7 @@
       </p:sp>
       <p:pic>
         <p:nvPicPr>
-          <p:cNvPr id="11" name="Image 0" descr="preencoded.png">    </p:cNvPr>
+          <p:cNvPr id="14" name="Image 0" descr="preencoded.png">    </p:cNvPr>
           <p:cNvPicPr>
             <a:picLocks noChangeAspect="1"/>
           </p:cNvPicPr>
@@ -6542,7 +6701,7 @@
       </p:pic>
       <p:sp>
         <p:nvSpPr>
-          <p:cNvPr id="12" name="Text 9"/>
+          <p:cNvPr id="15" name="Text 12"/>
           <p:cNvSpPr/>
           <p:nvPr/>
         </p:nvSpPr>
@@ -6581,7 +6740,7 @@
       </p:sp>
       <p:sp>
         <p:nvSpPr>
-          <p:cNvPr id="13" name="Text 10"/>
+          <p:cNvPr id="16" name="Text 13"/>
           <p:cNvSpPr/>
           <p:nvPr/>
         </p:nvSpPr>
@@ -6620,7 +6779,7 @@
       </p:sp>
       <p:sp>
         <p:nvSpPr>
-          <p:cNvPr id="14" name="Text 11"/>
+          <p:cNvPr id="17" name="Text 14"/>
           <p:cNvSpPr/>
           <p:nvPr/>
         </p:nvSpPr>
@@ -6661,7 +6820,7 @@
       </p:sp>
       <p:sp>
         <p:nvSpPr>
-          <p:cNvPr id="15" name="Shape 12"/>
+          <p:cNvPr id="18" name="Shape 15"/>
           <p:cNvSpPr/>
           <p:nvPr/>
         </p:nvSpPr>
@@ -6688,7 +6847,7 @@
       </p:sp>
       <p:sp>
         <p:nvSpPr>
-          <p:cNvPr id="16" name="Shape 13"/>
+          <p:cNvPr id="19" name="Shape 16"/>
           <p:cNvSpPr/>
           <p:nvPr/>
         </p:nvSpPr>
@@ -6708,7 +6867,7 @@
       </p:sp>
       <p:pic>
         <p:nvPicPr>
-          <p:cNvPr id="17" name="Image 1" descr="preencoded.png">    </p:cNvPr>
+          <p:cNvPr id="20" name="Image 1" descr="preencoded.png">    </p:cNvPr>
           <p:cNvPicPr>
             <a:picLocks noChangeAspect="1"/>
           </p:cNvPicPr>
@@ -6732,7 +6891,7 @@
       </p:pic>
       <p:sp>
         <p:nvSpPr>
-          <p:cNvPr id="18" name="Text 14"/>
+          <p:cNvPr id="21" name="Text 17"/>
           <p:cNvSpPr/>
           <p:nvPr/>
         </p:nvSpPr>
@@ -6771,7 +6930,7 @@
       </p:sp>
       <p:sp>
         <p:nvSpPr>
-          <p:cNvPr id="19" name="Text 15"/>
+          <p:cNvPr id="22" name="Text 18"/>
           <p:cNvSpPr/>
           <p:nvPr/>
         </p:nvSpPr>
@@ -6810,7 +6969,7 @@
       </p:sp>
       <p:sp>
         <p:nvSpPr>
-          <p:cNvPr id="20" name="Shape 16"/>
+          <p:cNvPr id="23" name="Shape 19"/>
           <p:cNvSpPr/>
           <p:nvPr/>
         </p:nvSpPr>
@@ -6837,7 +6996,7 @@
       </p:sp>
       <p:pic>
         <p:nvPicPr>
-          <p:cNvPr id="21" name="Image 2" descr="preencoded.png">    </p:cNvPr>
+          <p:cNvPr id="24" name="Image 2" descr="preencoded.png">    </p:cNvPr>
           <p:cNvPicPr>
             <a:picLocks noChangeAspect="1"/>
           </p:cNvPicPr>
@@ -6861,7 +7020,7 @@
       </p:pic>
       <p:sp>
         <p:nvSpPr>
-          <p:cNvPr id="22" name="Text 17"/>
+          <p:cNvPr id="25" name="Text 20"/>
           <p:cNvSpPr/>
           <p:nvPr/>
         </p:nvSpPr>
@@ -6923,7 +7082,7 @@
       </p:sp>
       <p:sp>
         <p:nvSpPr>
-          <p:cNvPr id="23" name="Shape 18"/>
+          <p:cNvPr id="26" name="Shape 21"/>
           <p:cNvSpPr/>
           <p:nvPr/>
         </p:nvSpPr>
@@ -6946,7 +7105,7 @@
       </p:sp>
       <p:sp>
         <p:nvSpPr>
-          <p:cNvPr id="24" name="Shape 19"/>
+          <p:cNvPr id="27" name="Shape 22"/>
           <p:cNvSpPr/>
           <p:nvPr/>
         </p:nvSpPr>
@@ -6966,7 +7125,7 @@
       </p:sp>
       <p:sp>
         <p:nvSpPr>
-          <p:cNvPr id="25" name="Text 20"/>
+          <p:cNvPr id="28" name="Text 23"/>
           <p:cNvSpPr/>
           <p:nvPr/>
         </p:nvSpPr>
@@ -7005,7 +7164,7 @@
       </p:sp>
       <p:sp>
         <p:nvSpPr>
-          <p:cNvPr id="26" name="Text 21"/>
+          <p:cNvPr id="29" name="Text 24"/>
           <p:cNvSpPr/>
           <p:nvPr/>
         </p:nvSpPr>
@@ -7044,7 +7203,7 @@
       </p:sp>
       <p:sp>
         <p:nvSpPr>
-          <p:cNvPr id="27" name="Shape 22"/>
+          <p:cNvPr id="30" name="Shape 25"/>
           <p:cNvSpPr/>
           <p:nvPr/>
         </p:nvSpPr>
@@ -7064,7 +7223,7 @@
       </p:sp>
       <p:sp>
         <p:nvSpPr>
-          <p:cNvPr id="28" name="Text 23"/>
+          <p:cNvPr id="31" name="Text 26"/>
           <p:cNvSpPr/>
           <p:nvPr/>
         </p:nvSpPr>
@@ -7103,7 +7262,7 @@
       </p:sp>
       <p:sp>
         <p:nvSpPr>
-          <p:cNvPr id="29" name="Text 24"/>
+          <p:cNvPr id="32" name="Text 27"/>
           <p:cNvSpPr/>
           <p:nvPr/>
         </p:nvSpPr>
@@ -7142,7 +7301,7 @@
       </p:sp>
       <p:sp>
         <p:nvSpPr>
-          <p:cNvPr id="30" name="Shape 25"/>
+          <p:cNvPr id="33" name="Shape 28"/>
           <p:cNvSpPr/>
           <p:nvPr/>
         </p:nvSpPr>
@@ -7162,7 +7321,7 @@
       </p:sp>
       <p:sp>
         <p:nvSpPr>
-          <p:cNvPr id="31" name="Text 26"/>
+          <p:cNvPr id="34" name="Text 29"/>
           <p:cNvSpPr/>
           <p:nvPr/>
         </p:nvSpPr>
@@ -7201,7 +7360,7 @@
       </p:sp>
       <p:sp>
         <p:nvSpPr>
-          <p:cNvPr id="32" name="Text 27"/>
+          <p:cNvPr id="35" name="Text 30"/>
           <p:cNvSpPr/>
           <p:nvPr/>
         </p:nvSpPr>
@@ -7240,7 +7399,7 @@
       </p:sp>
       <p:sp>
         <p:nvSpPr>
-          <p:cNvPr id="33" name="Text 28"/>
+          <p:cNvPr id="36" name="Text 31"/>
           <p:cNvSpPr/>
           <p:nvPr/>
         </p:nvSpPr>

--- a/outputs/presentation/dev-transformation-summary.pptx
+++ b/outputs/presentation/dev-transformation-summary.pptx
@@ -1978,7 +1978,27 @@
                 <a:ea typeface="Malgun Gothic" pitchFamily="34" charset="-122"/>
                 <a:cs typeface="Malgun Gothic" pitchFamily="34" charset="-120"/>
               </a:rPr>
-              <a:t>Micron–Anthropic SCA</a:t>
+              <a:t>Micron–Anthropic</a:t>
+            </a:r>
+            <a:endParaRPr lang="en-US" sz="1250" dirty="0"/>
+          </a:p>
+          <a:p>
+            <a:pPr indent="0" marL="0">
+              <a:lnSpc>
+                <a:spcPct val="105000"/>
+              </a:lnSpc>
+              <a:buNone/>
+            </a:pPr>
+            <a:r>
+              <a:rPr lang="en-US" sz="1250" dirty="0">
+                <a:solidFill>
+                  <a:srgbClr val="17313B"/>
+                </a:solidFill>
+                <a:latin typeface="Malgun Gothic" pitchFamily="34" charset="0"/>
+                <a:ea typeface="Malgun Gothic" pitchFamily="34" charset="-122"/>
+                <a:cs typeface="Malgun Gothic" pitchFamily="34" charset="-120"/>
+              </a:rPr>
+              <a:t>전략적 고객 계약</a:t>
             </a:r>
             <a:endParaRPr lang="en-US" sz="1250" dirty="0"/>
           </a:p>
@@ -2091,7 +2111,7 @@
                 <a:ea typeface="Malgun Gothic" pitchFamily="34" charset="-122"/>
                 <a:cs typeface="Malgun Gothic" pitchFamily="34" charset="-120"/>
               </a:rPr>
-              <a:t>납품 정확성만으론</a:t>
+              <a:t>정확한 납품만으로는</a:t>
             </a:r>
             <a:endParaRPr lang="en-US" sz="1400" dirty="0"/>
           </a:p>
@@ -2111,7 +2131,7 @@
                 <a:ea typeface="Malgun Gothic" pitchFamily="34" charset="-122"/>
                 <a:cs typeface="Malgun Gothic" pitchFamily="34" charset="-120"/>
               </a:rPr>
-              <a:t>SCA 테이블에 못 앉는다</a:t>
+              <a:t>전략적 고객 계약 수주 불가</a:t>
             </a:r>
             <a:endParaRPr lang="en-US" sz="1400" dirty="0"/>
           </a:p>
@@ -3177,7 +3197,7 @@
                 <a:ea typeface="Malgun Gothic" pitchFamily="34" charset="-122"/>
                 <a:cs typeface="Malgun Gothic" pitchFamily="34" charset="-120"/>
               </a:rPr>
-              <a:t>DE 스타·Pod 상주</a:t>
+              <a:t>FDE 스타·Pod 상주</a:t>
             </a:r>
             <a:endParaRPr lang="en-US" sz="1050" dirty="0"/>
           </a:p>
@@ -3661,7 +3681,7 @@
                 <a:ea typeface="Malgun Gothic" pitchFamily="34" charset="-122"/>
                 <a:cs typeface="Malgun Gothic" pitchFamily="34" charset="-120"/>
               </a:rPr>
-              <a:t>DE를 스타 플레이어로</a:t>
+              <a:t>FDE를 스타 플레이어로</a:t>
             </a:r>
             <a:endParaRPr lang="en-US" sz="1300" dirty="0"/>
           </a:p>
@@ -4415,8 +4435,8 @@
         </p:nvSpPr>
         <p:spPr>
           <a:xfrm>
-            <a:off x="713232" y="2048256"/>
-            <a:ext cx="1463040" cy="749808"/>
+            <a:off x="676656" y="2048256"/>
+            <a:ext cx="1051560" cy="749808"/>
           </a:xfrm>
           <a:prstGeom prst="roundRect">
             <a:avLst>
@@ -4436,7 +4456,7 @@
               <a:buNone/>
             </a:pPr>
             <a:r>
-              <a:rPr lang="en-US" sz="1700" b="1" dirty="0">
+              <a:rPr lang="en-US" sz="1500" b="1" dirty="0">
                 <a:solidFill>
                   <a:srgbClr val="5A7184"/>
                 </a:solidFill>
@@ -4446,7 +4466,7 @@
               </a:rPr>
               <a:t>Spot</a:t>
             </a:r>
-            <a:endParaRPr lang="en-US" sz="1700" dirty="0"/>
+            <a:endParaRPr lang="en-US" sz="1500" dirty="0"/>
           </a:p>
           <a:p>
             <a:pPr algn="ctr" indent="0" marL="0">
@@ -4463,7 +4483,7 @@
               </a:rPr>
               <a:t>현물 거래</a:t>
             </a:r>
-            <a:endParaRPr lang="en-US" sz="1700" dirty="0"/>
+            <a:endParaRPr lang="en-US" sz="1500" dirty="0"/>
           </a:p>
         </p:txBody>
       </p:sp>
@@ -4475,8 +4495,8 @@
         </p:nvSpPr>
         <p:spPr>
           <a:xfrm>
-            <a:off x="2157984" y="2048256"/>
-            <a:ext cx="274320" cy="749808"/>
+            <a:off x="1728216" y="2048256"/>
+            <a:ext cx="237744" cy="749808"/>
           </a:xfrm>
           <a:prstGeom prst="rect">
             <a:avLst/>
@@ -4514,8 +4534,8 @@
         </p:nvSpPr>
         <p:spPr>
           <a:xfrm>
-            <a:off x="2414016" y="2048256"/>
-            <a:ext cx="1463040" cy="749808"/>
+            <a:off x="1965960" y="2048256"/>
+            <a:ext cx="1234440" cy="749808"/>
           </a:xfrm>
           <a:prstGeom prst="roundRect">
             <a:avLst>
@@ -4535,7 +4555,7 @@
               <a:buNone/>
             </a:pPr>
             <a:r>
-              <a:rPr lang="en-US" sz="1700" b="1" dirty="0">
+              <a:rPr lang="en-US" sz="1500" b="1" dirty="0">
                 <a:solidFill>
                   <a:srgbClr val="17313B"/>
                 </a:solidFill>
@@ -4545,7 +4565,7 @@
               </a:rPr>
               <a:t>LTA</a:t>
             </a:r>
-            <a:endParaRPr lang="en-US" sz="1700" dirty="0"/>
+            <a:endParaRPr lang="en-US" sz="1500" dirty="0"/>
           </a:p>
           <a:p>
             <a:pPr algn="ctr" indent="0" marL="0">
@@ -4562,7 +4582,7 @@
               </a:rPr>
               <a:t>물량·가격 락인</a:t>
             </a:r>
-            <a:endParaRPr lang="en-US" sz="1700" dirty="0"/>
+            <a:endParaRPr lang="en-US" sz="1500" dirty="0"/>
           </a:p>
         </p:txBody>
       </p:sp>
@@ -4574,8 +4594,8 @@
         </p:nvSpPr>
         <p:spPr>
           <a:xfrm>
-            <a:off x="3858768" y="2048256"/>
-            <a:ext cx="274320" cy="749808"/>
+            <a:off x="3200400" y="2048256"/>
+            <a:ext cx="237744" cy="749808"/>
           </a:xfrm>
           <a:prstGeom prst="rect">
             <a:avLst/>
@@ -4613,8 +4633,8 @@
         </p:nvSpPr>
         <p:spPr>
           <a:xfrm>
-            <a:off x="4114800" y="2048256"/>
-            <a:ext cx="1463040" cy="749808"/>
+            <a:off x="3438144" y="2048256"/>
+            <a:ext cx="2286000" cy="749808"/>
           </a:xfrm>
           <a:prstGeom prst="roundRect">
             <a:avLst>
@@ -4634,7 +4654,7 @@
               <a:buNone/>
             </a:pPr>
             <a:r>
-              <a:rPr lang="en-US" sz="1700" b="1" dirty="0">
+              <a:rPr lang="en-US" sz="1500" b="1" dirty="0">
                 <a:solidFill>
                   <a:srgbClr val="FFFFFF"/>
                 </a:solidFill>
@@ -4642,9 +4662,9 @@
                 <a:ea typeface="Malgun Gothic" pitchFamily="34" charset="-122"/>
                 <a:cs typeface="Malgun Gothic" pitchFamily="34" charset="-120"/>
               </a:rPr>
-              <a:t>SCA</a:t>
-            </a:r>
-            <a:endParaRPr lang="en-US" sz="1700" dirty="0"/>
+              <a:t>전략적 고객 계약</a:t>
+            </a:r>
+            <a:endParaRPr lang="en-US" sz="1500" dirty="0"/>
           </a:p>
           <a:p>
             <a:pPr algn="ctr" indent="0" marL="0">
@@ -4661,7 +4681,7 @@
               </a:rPr>
               <a:t>공동설계·자본 연계</a:t>
             </a:r>
-            <a:endParaRPr lang="en-US" sz="1700" dirty="0"/>
+            <a:endParaRPr lang="en-US" sz="1500" dirty="0"/>
           </a:p>
         </p:txBody>
       </p:sp>
@@ -4698,7 +4718,7 @@
                 <a:ea typeface="Malgun Gothic" pitchFamily="34" charset="-122"/>
                 <a:cs typeface="Malgun Gothic" pitchFamily="34" charset="-120"/>
               </a:rPr>
-              <a:t>고객이 사는 것: 납품 → 공동 기술 드라이브 · SCA 16건 · $100B</a:t>
+              <a:t>고객이 사는 것: 납품 → 공동 기술 드라이브 (16건 · $100B)</a:t>
             </a:r>
             <a:endParaRPr lang="en-US" sz="1200" dirty="0"/>
           </a:p>
@@ -5676,7 +5696,7 @@
                 <a:ea typeface="Malgun Gothic" pitchFamily="34" charset="-122"/>
                 <a:cs typeface="Malgun Gothic" pitchFamily="34" charset="-120"/>
               </a:rPr>
-              <a:t>DE 스타 · Co-Design Pod</a:t>
+              <a:t>FDE 스타 · Co-Design Pod</a:t>
             </a:r>
             <a:endParaRPr lang="en-US" sz="1000" dirty="0"/>
           </a:p>
@@ -5894,7 +5914,7 @@
                 <a:ea typeface="Malgun Gothic" pitchFamily="34" charset="-122"/>
                 <a:cs typeface="Malgun Gothic" pitchFamily="34" charset="-120"/>
               </a:rPr>
-              <a:t>핵심 — DE(Distinguished Engineer)를 스타 플레이어로, 고객사와 기술 생태계를 함께 만든다</a:t>
+              <a:t>핵심 — FDE(Forward Deployed Engineer)를 스타 플레이어로, 고객사와 기술 생태계를 함께 만든다</a:t>
             </a:r>
             <a:endParaRPr lang="en-US" sz="1400" dirty="0"/>
           </a:p>
@@ -6133,7 +6153,7 @@
                 <a:ea typeface="Malgun Gothic" pitchFamily="34" charset="-122"/>
                 <a:cs typeface="Malgun Gothic" pitchFamily="34" charset="-120"/>
               </a:rPr>
-              <a:t>Pod 3~5개 · SCA형 계약 1건</a:t>
+              <a:t>Pod 3~5개 · 전략적 고객 계약 1건</a:t>
             </a:r>
             <a:endParaRPr lang="en-US" sz="1100" dirty="0"/>
           </a:p>
@@ -6785,8 +6805,8 @@
         </p:nvSpPr>
         <p:spPr>
           <a:xfrm>
-            <a:off x="5349240" y="2286000"/>
-            <a:ext cx="1463040" cy="822960"/>
+            <a:off x="5285232" y="2286000"/>
+            <a:ext cx="1591056" cy="822960"/>
           </a:xfrm>
           <a:prstGeom prst="rightArrow">
             <a:avLst/>
@@ -6801,10 +6821,13 @@
           <a:lstStyle/>
           <a:p>
             <a:pPr algn="ctr" indent="0" marL="0">
-              <a:buNone/>
-            </a:pPr>
-            <a:r>
-              <a:rPr lang="en-US" sz="1300" b="1" dirty="0">
+              <a:lnSpc>
+                <a:spcPct val="105000"/>
+              </a:lnSpc>
+              <a:buNone/>
+            </a:pPr>
+            <a:r>
+              <a:rPr lang="en-US" sz="1100" b="1" dirty="0">
                 <a:solidFill>
                   <a:srgbClr val="FFFFFF"/>
                 </a:solidFill>
@@ -6812,9 +6835,29 @@
                 <a:ea typeface="Malgun Gothic" pitchFamily="34" charset="-122"/>
                 <a:cs typeface="Malgun Gothic" pitchFamily="34" charset="-120"/>
               </a:rPr>
-              <a:t>LTA → SCA</a:t>
-            </a:r>
-            <a:endParaRPr lang="en-US" sz="1300" dirty="0"/>
+              <a:t>LTA →</a:t>
+            </a:r>
+            <a:endParaRPr lang="en-US" sz="1100" dirty="0"/>
+          </a:p>
+          <a:p>
+            <a:pPr algn="ctr" indent="0" marL="0">
+              <a:lnSpc>
+                <a:spcPct val="105000"/>
+              </a:lnSpc>
+              <a:buNone/>
+            </a:pPr>
+            <a:r>
+              <a:rPr lang="en-US" sz="1100" b="1" dirty="0">
+                <a:solidFill>
+                  <a:srgbClr val="FFFFFF"/>
+                </a:solidFill>
+                <a:latin typeface="Malgun Gothic" pitchFamily="34" charset="0"/>
+                <a:ea typeface="Malgun Gothic" pitchFamily="34" charset="-122"/>
+                <a:cs typeface="Malgun Gothic" pitchFamily="34" charset="-120"/>
+              </a:rPr>
+              <a:t>전략적 고객 계약</a:t>
+            </a:r>
+            <a:endParaRPr lang="en-US" sz="1100" dirty="0"/>
           </a:p>
         </p:txBody>
       </p:sp>
@@ -7054,7 +7097,7 @@
                 <a:ea typeface="Malgun Gothic" pitchFamily="34" charset="-122"/>
                 <a:cs typeface="Malgun Gothic" pitchFamily="34" charset="-120"/>
               </a:rPr>
-              <a:t>핵심 전략 — Distinguished Engineer를 스타 플레이어로, 고객사와 기술 생태계를 함께 만든다</a:t>
+              <a:t>핵심 전략 — FDE(Forward Deployed Engineer)를 스타 플레이어로, 고객사와 기술 생태계를 함께 만든다</a:t>
             </a:r>
             <a:endParaRPr lang="en-US" sz="1450" dirty="0"/>
           </a:p>
@@ -7293,7 +7336,7 @@
                 <a:ea typeface="Malgun Gothic" pitchFamily="34" charset="-122"/>
                 <a:cs typeface="Malgun Gothic" pitchFamily="34" charset="-120"/>
               </a:rPr>
-              <a:t>Pod 3~5 · SCA 1건</a:t>
+              <a:t>Pod 3~5 · 전략적 고객 계약 1건</a:t>
             </a:r>
             <a:endParaRPr lang="en-US" sz="1150" dirty="0"/>
           </a:p>
@@ -7444,7 +7487,7 @@
                 <a:ea typeface="Malgun Gothic" pitchFamily="34" charset="-122"/>
                 <a:cs typeface="Malgun Gothic" pitchFamily="34" charset="-120"/>
               </a:rPr>
-              <a:t>   SCA 최소 계약매출 — 공동설계 없이는 참여할 수 없는 시장 (Micron IR, 2026-06)</a:t>
+              <a:t>   전략적 고객 계약 최소 계약매출 — 공동설계 없이는 참여할 수 없는 시장 (Micron IR, 2026-06)</a:t>
             </a:r>
             <a:endParaRPr lang="en-US" sz="3200" dirty="0"/>
           </a:p>

--- a/outputs/presentation/dev-transformation-summary.pptx
+++ b/outputs/presentation/dev-transformation-summary.pptx
@@ -3333,281 +3333,12 @@
         </p:nvSpPr>
         <p:spPr>
           <a:xfrm>
-            <a:off x="8695944" y="4206240"/>
-            <a:ext cx="2468880" cy="0"/>
-          </a:xfrm>
-          <a:prstGeom prst="line">
-            <a:avLst/>
-          </a:prstGeom>
-          <a:noFill/>
-          <a:ln w="19050">
-            <a:solidFill>
-              <a:srgbClr val="C4CFD6"/>
-            </a:solidFill>
-            <a:prstDash val="solid"/>
-          </a:ln>
-        </p:spPr>
-      </p:sp>
-      <p:sp>
-        <p:nvSpPr>
-          <p:cNvPr id="64" name="Shape 56"/>
-          <p:cNvSpPr/>
-          <p:nvPr/>
-        </p:nvSpPr>
-        <p:spPr>
-          <a:xfrm>
-            <a:off x="8631936" y="4142232"/>
-            <a:ext cx="128016" cy="128016"/>
-          </a:xfrm>
-          <a:prstGeom prst="ellipse">
-            <a:avLst/>
-          </a:prstGeom>
-          <a:solidFill>
-            <a:srgbClr val="17313B"/>
-          </a:solidFill>
-          <a:ln/>
-        </p:spPr>
-      </p:sp>
-      <p:sp>
-        <p:nvSpPr>
-          <p:cNvPr id="65" name="Text 57"/>
-          <p:cNvSpPr/>
-          <p:nvPr/>
-        </p:nvSpPr>
-        <p:spPr>
-          <a:xfrm>
-            <a:off x="8147304" y="4334256"/>
-            <a:ext cx="1097280" cy="457200"/>
-          </a:xfrm>
-          <a:prstGeom prst="rect">
-            <a:avLst/>
-          </a:prstGeom>
-          <a:noFill/>
-          <a:ln/>
-        </p:spPr>
-        <p:txBody>
-          <a:bodyPr wrap="square" lIns="0" tIns="0" rIns="0" bIns="0" rtlCol="0" anchor="ctr"/>
-          <a:lstStyle/>
-          <a:p>
-            <a:pPr algn="ctr" indent="0" marL="0">
-              <a:lnSpc>
-                <a:spcPct val="100000"/>
-              </a:lnSpc>
-              <a:buNone/>
-            </a:pPr>
-            <a:r>
-              <a:rPr lang="en-US" sz="1150" b="1" dirty="0">
-                <a:solidFill>
-                  <a:srgbClr val="17313B"/>
-                </a:solidFill>
-                <a:latin typeface="Malgun Gothic" pitchFamily="34" charset="0"/>
-                <a:ea typeface="Malgun Gothic" pitchFamily="34" charset="-122"/>
-                <a:cs typeface="Malgun Gothic" pitchFamily="34" charset="-120"/>
-              </a:rPr>
-              <a:t>90일</a:t>
-            </a:r>
-            <a:endParaRPr lang="en-US" sz="1150" dirty="0"/>
-          </a:p>
-          <a:p>
-            <a:pPr algn="ctr" indent="0" marL="0">
-              <a:lnSpc>
-                <a:spcPct val="100000"/>
-              </a:lnSpc>
-              <a:buNone/>
-            </a:pPr>
-            <a:r>
-              <a:rPr lang="en-US" sz="1150" b="1" dirty="0">
-                <a:solidFill>
-                  <a:srgbClr val="17313B"/>
-                </a:solidFill>
-                <a:latin typeface="Malgun Gothic" pitchFamily="34" charset="0"/>
-                <a:ea typeface="Malgun Gothic" pitchFamily="34" charset="-122"/>
-                <a:cs typeface="Malgun Gothic" pitchFamily="34" charset="-120"/>
-              </a:rPr>
-              <a:t>증명</a:t>
-            </a:r>
-            <a:endParaRPr lang="en-US" sz="1150" dirty="0"/>
-          </a:p>
-        </p:txBody>
-      </p:sp>
-      <p:sp>
-        <p:nvSpPr>
-          <p:cNvPr id="66" name="Shape 58"/>
-          <p:cNvSpPr/>
-          <p:nvPr/>
-        </p:nvSpPr>
-        <p:spPr>
-          <a:xfrm>
-            <a:off x="9866376" y="4142232"/>
-            <a:ext cx="128016" cy="128016"/>
-          </a:xfrm>
-          <a:prstGeom prst="ellipse">
-            <a:avLst/>
-          </a:prstGeom>
-          <a:solidFill>
-            <a:srgbClr val="17313B"/>
-          </a:solidFill>
-          <a:ln/>
-        </p:spPr>
-      </p:sp>
-      <p:sp>
-        <p:nvSpPr>
-          <p:cNvPr id="67" name="Text 59"/>
-          <p:cNvSpPr/>
-          <p:nvPr/>
-        </p:nvSpPr>
-        <p:spPr>
-          <a:xfrm>
-            <a:off x="9381744" y="4334256"/>
-            <a:ext cx="1097280" cy="457200"/>
-          </a:xfrm>
-          <a:prstGeom prst="rect">
-            <a:avLst/>
-          </a:prstGeom>
-          <a:noFill/>
-          <a:ln/>
-        </p:spPr>
-        <p:txBody>
-          <a:bodyPr wrap="square" lIns="0" tIns="0" rIns="0" bIns="0" rtlCol="0" anchor="ctr"/>
-          <a:lstStyle/>
-          <a:p>
-            <a:pPr algn="ctr" indent="0" marL="0">
-              <a:lnSpc>
-                <a:spcPct val="100000"/>
-              </a:lnSpc>
-              <a:buNone/>
-            </a:pPr>
-            <a:r>
-              <a:rPr lang="en-US" sz="1150" b="1" dirty="0">
-                <a:solidFill>
-                  <a:srgbClr val="17313B"/>
-                </a:solidFill>
-                <a:latin typeface="Malgun Gothic" pitchFamily="34" charset="0"/>
-                <a:ea typeface="Malgun Gothic" pitchFamily="34" charset="-122"/>
-                <a:cs typeface="Malgun Gothic" pitchFamily="34" charset="-120"/>
-              </a:rPr>
-              <a:t>1년</a:t>
-            </a:r>
-            <a:endParaRPr lang="en-US" sz="1150" dirty="0"/>
-          </a:p>
-          <a:p>
-            <a:pPr algn="ctr" indent="0" marL="0">
-              <a:lnSpc>
-                <a:spcPct val="100000"/>
-              </a:lnSpc>
-              <a:buNone/>
-            </a:pPr>
-            <a:r>
-              <a:rPr lang="en-US" sz="1150" b="1" dirty="0">
-                <a:solidFill>
-                  <a:srgbClr val="17313B"/>
-                </a:solidFill>
-                <a:latin typeface="Malgun Gothic" pitchFamily="34" charset="0"/>
-                <a:ea typeface="Malgun Gothic" pitchFamily="34" charset="-122"/>
-                <a:cs typeface="Malgun Gothic" pitchFamily="34" charset="-120"/>
-              </a:rPr>
-              <a:t>제도화</a:t>
-            </a:r>
-            <a:endParaRPr lang="en-US" sz="1150" dirty="0"/>
-          </a:p>
-        </p:txBody>
-      </p:sp>
-      <p:sp>
-        <p:nvSpPr>
-          <p:cNvPr id="68" name="Shape 60"/>
-          <p:cNvSpPr/>
-          <p:nvPr/>
-        </p:nvSpPr>
-        <p:spPr>
-          <a:xfrm>
-            <a:off x="11100816" y="4142232"/>
-            <a:ext cx="128016" cy="128016"/>
-          </a:xfrm>
-          <a:prstGeom prst="ellipse">
-            <a:avLst/>
-          </a:prstGeom>
-          <a:solidFill>
-            <a:srgbClr val="17313B"/>
-          </a:solidFill>
-          <a:ln/>
-        </p:spPr>
-      </p:sp>
-      <p:sp>
-        <p:nvSpPr>
-          <p:cNvPr id="69" name="Text 61"/>
-          <p:cNvSpPr/>
-          <p:nvPr/>
-        </p:nvSpPr>
-        <p:spPr>
-          <a:xfrm>
-            <a:off x="10616184" y="4334256"/>
-            <a:ext cx="1097280" cy="457200"/>
-          </a:xfrm>
-          <a:prstGeom prst="rect">
-            <a:avLst/>
-          </a:prstGeom>
-          <a:noFill/>
-          <a:ln/>
-        </p:spPr>
-        <p:txBody>
-          <a:bodyPr wrap="square" lIns="0" tIns="0" rIns="0" bIns="0" rtlCol="0" anchor="ctr"/>
-          <a:lstStyle/>
-          <a:p>
-            <a:pPr algn="ctr" indent="0" marL="0">
-              <a:lnSpc>
-                <a:spcPct val="100000"/>
-              </a:lnSpc>
-              <a:buNone/>
-            </a:pPr>
-            <a:r>
-              <a:rPr lang="en-US" sz="1150" b="1" dirty="0">
-                <a:solidFill>
-                  <a:srgbClr val="17313B"/>
-                </a:solidFill>
-                <a:latin typeface="Malgun Gothic" pitchFamily="34" charset="0"/>
-                <a:ea typeface="Malgun Gothic" pitchFamily="34" charset="-122"/>
-                <a:cs typeface="Malgun Gothic" pitchFamily="34" charset="-120"/>
-              </a:rPr>
-              <a:t>3년</a:t>
-            </a:r>
-            <a:endParaRPr lang="en-US" sz="1150" dirty="0"/>
-          </a:p>
-          <a:p>
-            <a:pPr algn="ctr" indent="0" marL="0">
-              <a:lnSpc>
-                <a:spcPct val="100000"/>
-              </a:lnSpc>
-              <a:buNone/>
-            </a:pPr>
-            <a:r>
-              <a:rPr lang="en-US" sz="1150" b="1" dirty="0">
-                <a:solidFill>
-                  <a:srgbClr val="17313B"/>
-                </a:solidFill>
-                <a:latin typeface="Malgun Gothic" pitchFamily="34" charset="0"/>
-                <a:ea typeface="Malgun Gothic" pitchFamily="34" charset="-122"/>
-                <a:cs typeface="Malgun Gothic" pitchFamily="34" charset="-120"/>
-              </a:rPr>
-              <a:t>표준화</a:t>
-            </a:r>
-            <a:endParaRPr lang="en-US" sz="1150" dirty="0"/>
-          </a:p>
-        </p:txBody>
-      </p:sp>
-      <p:sp>
-        <p:nvSpPr>
-          <p:cNvPr id="70" name="Shape 62"/>
-          <p:cNvSpPr/>
-          <p:nvPr/>
-        </p:nvSpPr>
-        <p:spPr>
-          <a:xfrm>
-            <a:off x="8311896" y="4864608"/>
-            <a:ext cx="3236976" cy="512064"/>
+            <a:off x="8311896" y="4480560"/>
+            <a:ext cx="3236976" cy="640080"/>
           </a:xfrm>
           <a:prstGeom prst="roundRect">
             <a:avLst>
-              <a:gd name="adj" fmla="val 14286"/>
+              <a:gd name="adj" fmla="val 11429"/>
             </a:avLst>
           </a:prstGeom>
           <a:solidFill>
@@ -3623,7 +3354,7 @@
       </p:sp>
       <p:pic>
         <p:nvPicPr>
-          <p:cNvPr id="71" name="Image 6" descr="preencoded.png">    </p:cNvPr>
+          <p:cNvPr id="64" name="Image 6" descr="preencoded.png">    </p:cNvPr>
           <p:cNvPicPr>
             <a:picLocks noChangeAspect="1"/>
           </p:cNvPicPr>
@@ -3637,7 +3368,7 @@
         </p:blipFill>
         <p:spPr>
           <a:xfrm>
-            <a:off x="8494776" y="4937760"/>
+            <a:off x="8494776" y="4617720"/>
             <a:ext cx="365760" cy="365760"/>
           </a:xfrm>
           <a:prstGeom prst="rect">
@@ -3647,14 +3378,14 @@
       </p:pic>
       <p:sp>
         <p:nvSpPr>
-          <p:cNvPr id="72" name="Text 63"/>
-          <p:cNvSpPr/>
-          <p:nvPr/>
-        </p:nvSpPr>
-        <p:spPr>
-          <a:xfrm>
-            <a:off x="8988552" y="4864608"/>
-            <a:ext cx="2377440" cy="512064"/>
+          <p:cNvPr id="65" name="Text 56"/>
+          <p:cNvSpPr/>
+          <p:nvPr/>
+        </p:nvSpPr>
+        <p:spPr>
+          <a:xfrm>
+            <a:off x="8988552" y="4480560"/>
+            <a:ext cx="2377440" cy="640080"/>
           </a:xfrm>
           <a:prstGeom prst="rect">
             <a:avLst/>
@@ -3673,7 +3404,7 @@
               <a:buNone/>
             </a:pPr>
             <a:r>
-              <a:rPr lang="en-US" sz="1300" b="1" dirty="0">
+              <a:rPr lang="en-US" sz="1350" b="1" dirty="0">
                 <a:solidFill>
                   <a:srgbClr val="17313B"/>
                 </a:solidFill>
@@ -3683,7 +3414,7 @@
               </a:rPr>
               <a:t>FDE를 스타 플레이어로</a:t>
             </a:r>
-            <a:endParaRPr lang="en-US" sz="1300" dirty="0"/>
+            <a:endParaRPr lang="en-US" sz="1350" dirty="0"/>
           </a:p>
           <a:p>
             <a:pPr indent="0" marL="0">
@@ -3693,6 +3424,106 @@
               <a:buNone/>
             </a:pPr>
             <a:r>
+              <a:rPr lang="en-US" sz="1100" dirty="0">
+                <a:solidFill>
+                  <a:srgbClr val="5A7184"/>
+                </a:solidFill>
+                <a:latin typeface="Malgun Gothic" pitchFamily="34" charset="0"/>
+                <a:ea typeface="Malgun Gothic" pitchFamily="34" charset="-122"/>
+                <a:cs typeface="Malgun Gothic" pitchFamily="34" charset="-120"/>
+              </a:rPr>
+              <a:t>고객과 기술 생태계 공동 설계</a:t>
+            </a:r>
+            <a:endParaRPr lang="en-US" sz="1350" dirty="0"/>
+          </a:p>
+        </p:txBody>
+      </p:sp>
+      <p:sp>
+        <p:nvSpPr>
+          <p:cNvPr id="66" name="Shape 57"/>
+          <p:cNvSpPr/>
+          <p:nvPr/>
+        </p:nvSpPr>
+        <p:spPr>
+          <a:xfrm>
+            <a:off x="457200" y="5559552"/>
+            <a:ext cx="11274552" cy="822960"/>
+          </a:xfrm>
+          <a:prstGeom prst="roundRect">
+            <a:avLst>
+              <a:gd name="adj" fmla="val 10000"/>
+            </a:avLst>
+          </a:prstGeom>
+          <a:solidFill>
+            <a:srgbClr val="F5F7F8"/>
+          </a:solidFill>
+          <a:ln/>
+        </p:spPr>
+      </p:sp>
+      <p:sp>
+        <p:nvSpPr>
+          <p:cNvPr id="67" name="Text 58"/>
+          <p:cNvSpPr/>
+          <p:nvPr/>
+        </p:nvSpPr>
+        <p:spPr>
+          <a:xfrm>
+            <a:off x="676656" y="5705856"/>
+            <a:ext cx="1920240" cy="274320"/>
+          </a:xfrm>
+          <a:prstGeom prst="rect">
+            <a:avLst/>
+          </a:prstGeom>
+          <a:noFill/>
+          <a:ln/>
+        </p:spPr>
+        <p:txBody>
+          <a:bodyPr wrap="square" lIns="0" tIns="0" rIns="0" bIns="0" rtlCol="0" anchor="ctr"/>
+          <a:lstStyle/>
+          <a:p>
+            <a:pPr indent="0" marL="0">
+              <a:buNone/>
+            </a:pPr>
+            <a:r>
+              <a:rPr lang="en-US" sz="1500" b="1" dirty="0">
+                <a:solidFill>
+                  <a:srgbClr val="17313B"/>
+                </a:solidFill>
+                <a:latin typeface="Malgun Gothic" pitchFamily="34" charset="0"/>
+                <a:ea typeface="Malgun Gothic" pitchFamily="34" charset="-122"/>
+                <a:cs typeface="Malgun Gothic" pitchFamily="34" charset="-120"/>
+              </a:rPr>
+              <a:t>환경 변화</a:t>
+            </a:r>
+            <a:endParaRPr lang="en-US" sz="1500" dirty="0"/>
+          </a:p>
+        </p:txBody>
+      </p:sp>
+      <p:sp>
+        <p:nvSpPr>
+          <p:cNvPr id="68" name="Text 59"/>
+          <p:cNvSpPr/>
+          <p:nvPr/>
+        </p:nvSpPr>
+        <p:spPr>
+          <a:xfrm>
+            <a:off x="676656" y="5998464"/>
+            <a:ext cx="2011680" cy="219456"/>
+          </a:xfrm>
+          <a:prstGeom prst="rect">
+            <a:avLst/>
+          </a:prstGeom>
+          <a:noFill/>
+          <a:ln/>
+        </p:spPr>
+        <p:txBody>
+          <a:bodyPr wrap="square" lIns="0" tIns="0" rIns="0" bIns="0" rtlCol="0" anchor="ctr"/>
+          <a:lstStyle/>
+          <a:p>
+            <a:pPr indent="0" marL="0">
+              <a:buNone/>
+            </a:pPr>
+            <a:r>
               <a:rPr lang="en-US" sz="1050" dirty="0">
                 <a:solidFill>
                   <a:srgbClr val="5A7184"/>
@@ -3701,9 +3532,227 @@
                 <a:ea typeface="Malgun Gothic" pitchFamily="34" charset="-122"/>
                 <a:cs typeface="Malgun Gothic" pitchFamily="34" charset="-120"/>
               </a:rPr>
-              <a:t>고객과 기술 생태계 공동 설계</a:t>
-            </a:r>
-            <a:endParaRPr lang="en-US" sz="1300" dirty="0"/>
+              <a:t>영입 가능한 임금 수준</a:t>
+            </a:r>
+            <a:endParaRPr lang="en-US" sz="1050" dirty="0"/>
+          </a:p>
+        </p:txBody>
+      </p:sp>
+      <p:sp>
+        <p:nvSpPr>
+          <p:cNvPr id="69" name="Text 60"/>
+          <p:cNvSpPr/>
+          <p:nvPr/>
+        </p:nvSpPr>
+        <p:spPr>
+          <a:xfrm>
+            <a:off x="2743200" y="5669280"/>
+            <a:ext cx="2331720" cy="603504"/>
+          </a:xfrm>
+          <a:prstGeom prst="roundRect">
+            <a:avLst>
+              <a:gd name="adj" fmla="val 9091"/>
+            </a:avLst>
+          </a:prstGeom>
+          <a:solidFill>
+            <a:srgbClr val="E7ECEF"/>
+          </a:solidFill>
+          <a:ln w="12700">
+            <a:solidFill>
+              <a:srgbClr val="DCE4E9"/>
+            </a:solidFill>
+          </a:ln>
+        </p:spPr>
+        <p:txBody>
+          <a:bodyPr wrap="square" lIns="0" tIns="0" rIns="0" bIns="0" rtlCol="0" anchor="ctr"/>
+          <a:lstStyle/>
+          <a:p>
+            <a:pPr algn="ctr" indent="0" marL="0">
+              <a:lnSpc>
+                <a:spcPct val="105000"/>
+              </a:lnSpc>
+              <a:buNone/>
+            </a:pPr>
+            <a:r>
+              <a:rPr lang="en-US" sz="1250" b="1" dirty="0">
+                <a:solidFill>
+                  <a:srgbClr val="5A7184"/>
+                </a:solidFill>
+                <a:latin typeface="Malgun Gothic" pitchFamily="34" charset="0"/>
+                <a:ea typeface="Malgun Gothic" pitchFamily="34" charset="-122"/>
+                <a:cs typeface="Malgun Gothic" pitchFamily="34" charset="-120"/>
+              </a:rPr>
+              <a:t>과거</a:t>
+            </a:r>
+            <a:endParaRPr lang="en-US" sz="1250" dirty="0"/>
+          </a:p>
+          <a:p>
+            <a:pPr algn="ctr" indent="0" marL="0">
+              <a:lnSpc>
+                <a:spcPct val="105000"/>
+              </a:lnSpc>
+              <a:buNone/>
+            </a:pPr>
+            <a:r>
+              <a:rPr lang="en-US" sz="1000" dirty="0">
+                <a:solidFill>
+                  <a:srgbClr val="5A7184"/>
+                </a:solidFill>
+                <a:latin typeface="Malgun Gothic" pitchFamily="34" charset="0"/>
+                <a:ea typeface="Malgun Gothic" pitchFamily="34" charset="-122"/>
+                <a:cs typeface="Malgun Gothic" pitchFamily="34" charset="-120"/>
+              </a:rPr>
+              <a:t>실리콘밸리 보상 열위</a:t>
+            </a:r>
+            <a:endParaRPr lang="en-US" sz="1250" dirty="0"/>
+          </a:p>
+        </p:txBody>
+      </p:sp>
+      <p:sp>
+        <p:nvSpPr>
+          <p:cNvPr id="70" name="Text 61"/>
+          <p:cNvSpPr/>
+          <p:nvPr/>
+        </p:nvSpPr>
+        <p:spPr>
+          <a:xfrm>
+            <a:off x="5074920" y="5669280"/>
+            <a:ext cx="219456" cy="603504"/>
+          </a:xfrm>
+          <a:prstGeom prst="rect">
+            <a:avLst/>
+          </a:prstGeom>
+          <a:noFill/>
+          <a:ln/>
+        </p:spPr>
+        <p:txBody>
+          <a:bodyPr wrap="square" lIns="0" tIns="0" rIns="0" bIns="0" rtlCol="0" anchor="ctr"/>
+          <a:lstStyle/>
+          <a:p>
+            <a:pPr algn="ctr" indent="0" marL="0">
+              <a:buNone/>
+            </a:pPr>
+            <a:r>
+              <a:rPr lang="en-US" sz="1200" dirty="0">
+                <a:solidFill>
+                  <a:srgbClr val="5A7184"/>
+                </a:solidFill>
+                <a:latin typeface="Malgun Gothic" pitchFamily="34" charset="0"/>
+                <a:ea typeface="Malgun Gothic" pitchFamily="34" charset="-122"/>
+                <a:cs typeface="Malgun Gothic" pitchFamily="34" charset="-120"/>
+              </a:rPr>
+              <a:t>▶</a:t>
+            </a:r>
+            <a:endParaRPr lang="en-US" sz="1200" dirty="0"/>
+          </a:p>
+        </p:txBody>
+      </p:sp>
+      <p:sp>
+        <p:nvSpPr>
+          <p:cNvPr id="71" name="Text 62"/>
+          <p:cNvSpPr/>
+          <p:nvPr/>
+        </p:nvSpPr>
+        <p:spPr>
+          <a:xfrm>
+            <a:off x="5294376" y="5669280"/>
+            <a:ext cx="3291840" cy="603504"/>
+          </a:xfrm>
+          <a:prstGeom prst="roundRect">
+            <a:avLst>
+              <a:gd name="adj" fmla="val 9091"/>
+            </a:avLst>
+          </a:prstGeom>
+          <a:solidFill>
+            <a:srgbClr val="FFFFFF"/>
+          </a:solidFill>
+          <a:ln w="12700">
+            <a:solidFill>
+              <a:srgbClr val="DCE4E9"/>
+            </a:solidFill>
+          </a:ln>
+        </p:spPr>
+        <p:txBody>
+          <a:bodyPr wrap="square" lIns="0" tIns="0" rIns="0" bIns="0" rtlCol="0" anchor="ctr"/>
+          <a:lstStyle/>
+          <a:p>
+            <a:pPr algn="ctr" indent="0" marL="0">
+              <a:lnSpc>
+                <a:spcPct val="105000"/>
+              </a:lnSpc>
+              <a:buNone/>
+            </a:pPr>
+            <a:r>
+              <a:rPr lang="en-US" sz="1250" b="1" dirty="0">
+                <a:solidFill>
+                  <a:srgbClr val="17313B"/>
+                </a:solidFill>
+                <a:latin typeface="Malgun Gothic" pitchFamily="34" charset="0"/>
+                <a:ea typeface="Malgun Gothic" pitchFamily="34" charset="-122"/>
+                <a:cs typeface="Malgun Gothic" pitchFamily="34" charset="-120"/>
+              </a:rPr>
+              <a:t>현재 — 처우 급등</a:t>
+            </a:r>
+            <a:endParaRPr lang="en-US" sz="1250" dirty="0"/>
+          </a:p>
+          <a:p>
+            <a:pPr algn="ctr" indent="0" marL="0">
+              <a:lnSpc>
+                <a:spcPct val="105000"/>
+              </a:lnSpc>
+              <a:buNone/>
+            </a:pPr>
+            <a:r>
+              <a:rPr lang="en-US" sz="1000" dirty="0">
+                <a:solidFill>
+                  <a:srgbClr val="5A7184"/>
+                </a:solidFill>
+                <a:latin typeface="Malgun Gothic" pitchFamily="34" charset="0"/>
+                <a:ea typeface="Malgun Gothic" pitchFamily="34" charset="-122"/>
+                <a:cs typeface="Malgun Gothic" pitchFamily="34" charset="-120"/>
+              </a:rPr>
+              <a:t>성과급 ~6억 · 상한 철폐 · 최대 12.9억 전망</a:t>
+            </a:r>
+            <a:endParaRPr lang="en-US" sz="1250" dirty="0"/>
+          </a:p>
+        </p:txBody>
+      </p:sp>
+      <p:sp>
+        <p:nvSpPr>
+          <p:cNvPr id="72" name="Text 63"/>
+          <p:cNvSpPr/>
+          <p:nvPr/>
+        </p:nvSpPr>
+        <p:spPr>
+          <a:xfrm>
+            <a:off x="8586216" y="5669280"/>
+            <a:ext cx="219456" cy="603504"/>
+          </a:xfrm>
+          <a:prstGeom prst="rect">
+            <a:avLst/>
+          </a:prstGeom>
+          <a:noFill/>
+          <a:ln/>
+        </p:spPr>
+        <p:txBody>
+          <a:bodyPr wrap="square" lIns="0" tIns="0" rIns="0" bIns="0" rtlCol="0" anchor="ctr"/>
+          <a:lstStyle/>
+          <a:p>
+            <a:pPr algn="ctr" indent="0" marL="0">
+              <a:buNone/>
+            </a:pPr>
+            <a:r>
+              <a:rPr lang="en-US" sz="1200" dirty="0">
+                <a:solidFill>
+                  <a:srgbClr val="5A7184"/>
+                </a:solidFill>
+                <a:latin typeface="Malgun Gothic" pitchFamily="34" charset="0"/>
+                <a:ea typeface="Malgun Gothic" pitchFamily="34" charset="-122"/>
+                <a:cs typeface="Malgun Gothic" pitchFamily="34" charset="-120"/>
+              </a:rPr>
+              <a:t>▶</a:t>
+            </a:r>
+            <a:endParaRPr lang="en-US" sz="1200" dirty="0"/>
           </a:p>
         </p:txBody>
       </p:sp>
@@ -3715,24 +3764,35 @@
         </p:nvSpPr>
         <p:spPr>
           <a:xfrm>
-            <a:off x="457200" y="5687568"/>
-            <a:ext cx="2167128" cy="384048"/>
-          </a:xfrm>
-          <a:prstGeom prst="rect">
-            <a:avLst/>
-          </a:prstGeom>
-          <a:noFill/>
-          <a:ln/>
-        </p:spPr>
-        <p:txBody>
-          <a:bodyPr wrap="square" lIns="0" tIns="0" rIns="0" bIns="0" rtlCol="0" anchor="ctr"/>
-          <a:lstStyle/>
-          <a:p>
-            <a:pPr algn="ctr" indent="0" marL="0">
-              <a:buNone/>
-            </a:pPr>
-            <a:r>
-              <a:rPr lang="en-US" sz="2400" b="1" dirty="0">
+            <a:off x="8805672" y="5669280"/>
+            <a:ext cx="2697480" cy="603504"/>
+          </a:xfrm>
+          <a:prstGeom prst="roundRect">
+            <a:avLst>
+              <a:gd name="adj" fmla="val 9091"/>
+            </a:avLst>
+          </a:prstGeom>
+          <a:solidFill>
+            <a:srgbClr val="E8F6F0"/>
+          </a:solidFill>
+          <a:ln w="15875">
+            <a:solidFill>
+              <a:srgbClr val="02A878"/>
+            </a:solidFill>
+          </a:ln>
+        </p:spPr>
+        <p:txBody>
+          <a:bodyPr wrap="square" lIns="0" tIns="0" rIns="0" bIns="0" rtlCol="0" anchor="ctr"/>
+          <a:lstStyle/>
+          <a:p>
+            <a:pPr algn="ctr" indent="0" marL="0">
+              <a:lnSpc>
+                <a:spcPct val="105000"/>
+              </a:lnSpc>
+              <a:buNone/>
+            </a:pPr>
+            <a:r>
+              <a:rPr lang="en-US" sz="1250" b="1" dirty="0">
                 <a:solidFill>
                   <a:srgbClr val="17313B"/>
                 </a:solidFill>
@@ -3740,38 +3800,19 @@
                 <a:ea typeface="Malgun Gothic" pitchFamily="34" charset="-122"/>
                 <a:cs typeface="Malgun Gothic" pitchFamily="34" charset="-120"/>
               </a:rPr>
-              <a:t>40건/년</a:t>
-            </a:r>
-            <a:endParaRPr lang="en-US" sz="2400" dirty="0"/>
-          </a:p>
-        </p:txBody>
-      </p:sp>
-      <p:sp>
-        <p:nvSpPr>
-          <p:cNvPr id="74" name="Text 65"/>
-          <p:cNvSpPr/>
-          <p:nvPr/>
-        </p:nvSpPr>
-        <p:spPr>
-          <a:xfrm>
-            <a:off x="457200" y="6089904"/>
-            <a:ext cx="2167128" cy="237744"/>
-          </a:xfrm>
-          <a:prstGeom prst="rect">
-            <a:avLst/>
-          </a:prstGeom>
-          <a:noFill/>
-          <a:ln/>
-        </p:spPr>
-        <p:txBody>
-          <a:bodyPr wrap="square" lIns="0" tIns="0" rIns="0" bIns="0" rtlCol="0" anchor="ctr"/>
-          <a:lstStyle/>
-          <a:p>
-            <a:pPr algn="ctr" indent="0" marL="0">
-              <a:buNone/>
-            </a:pPr>
-            <a:r>
-              <a:rPr lang="en-US" sz="1200" dirty="0">
+              <a:t>선순환 기대</a:t>
+            </a:r>
+            <a:endParaRPr lang="en-US" sz="1250" dirty="0"/>
+          </a:p>
+          <a:p>
+            <a:pPr algn="ctr" indent="0" marL="0">
+              <a:lnSpc>
+                <a:spcPct val="105000"/>
+              </a:lnSpc>
+              <a:buNone/>
+            </a:pPr>
+            <a:r>
+              <a:rPr lang="en-US" sz="1000" dirty="0">
                 <a:solidFill>
                   <a:srgbClr val="5A7184"/>
                 </a:solidFill>
@@ -3779,321 +3820,9 @@
                 <a:ea typeface="Malgun Gothic" pitchFamily="34" charset="-122"/>
                 <a:cs typeface="Malgun Gothic" pitchFamily="34" charset="-120"/>
               </a:rPr>
-              <a:t>선제 제안 (현재 ~0)</a:t>
-            </a:r>
-            <a:endParaRPr lang="en-US" sz="1200" dirty="0"/>
-          </a:p>
-        </p:txBody>
-      </p:sp>
-      <p:sp>
-        <p:nvSpPr>
-          <p:cNvPr id="75" name="Text 66"/>
-          <p:cNvSpPr/>
-          <p:nvPr/>
-        </p:nvSpPr>
-        <p:spPr>
-          <a:xfrm>
-            <a:off x="2715768" y="5687568"/>
-            <a:ext cx="2167128" cy="384048"/>
-          </a:xfrm>
-          <a:prstGeom prst="rect">
-            <a:avLst/>
-          </a:prstGeom>
-          <a:noFill/>
-          <a:ln/>
-        </p:spPr>
-        <p:txBody>
-          <a:bodyPr wrap="square" lIns="0" tIns="0" rIns="0" bIns="0" rtlCol="0" anchor="ctr"/>
-          <a:lstStyle/>
-          <a:p>
-            <a:pPr algn="ctr" indent="0" marL="0">
-              <a:buNone/>
-            </a:pPr>
-            <a:r>
-              <a:rPr lang="en-US" sz="2400" b="1" dirty="0">
-                <a:solidFill>
-                  <a:srgbClr val="17313B"/>
-                </a:solidFill>
-                <a:latin typeface="Malgun Gothic" pitchFamily="34" charset="0"/>
-                <a:ea typeface="Malgun Gothic" pitchFamily="34" charset="-122"/>
-                <a:cs typeface="Malgun Gothic" pitchFamily="34" charset="-120"/>
-              </a:rPr>
-              <a:t>35%</a:t>
-            </a:r>
-            <a:endParaRPr lang="en-US" sz="2400" dirty="0"/>
-          </a:p>
-        </p:txBody>
-      </p:sp>
-      <p:sp>
-        <p:nvSpPr>
-          <p:cNvPr id="76" name="Text 67"/>
-          <p:cNvSpPr/>
-          <p:nvPr/>
-        </p:nvSpPr>
-        <p:spPr>
-          <a:xfrm>
-            <a:off x="2715768" y="6089904"/>
-            <a:ext cx="2167128" cy="237744"/>
-          </a:xfrm>
-          <a:prstGeom prst="rect">
-            <a:avLst/>
-          </a:prstGeom>
-          <a:noFill/>
-          <a:ln/>
-        </p:spPr>
-        <p:txBody>
-          <a:bodyPr wrap="square" lIns="0" tIns="0" rIns="0" bIns="0" rtlCol="0" anchor="ctr"/>
-          <a:lstStyle/>
-          <a:p>
-            <a:pPr algn="ctr" indent="0" marL="0">
-              <a:buNone/>
-            </a:pPr>
-            <a:r>
-              <a:rPr lang="en-US" sz="1200" dirty="0">
-                <a:solidFill>
-                  <a:srgbClr val="5A7184"/>
-                </a:solidFill>
-                <a:latin typeface="Malgun Gothic" pitchFamily="34" charset="0"/>
-                <a:ea typeface="Malgun Gothic" pitchFamily="34" charset="-122"/>
-                <a:cs typeface="Malgun Gothic" pitchFamily="34" charset="-120"/>
-              </a:rPr>
-              <a:t>로드맵 채택률</a:t>
-            </a:r>
-            <a:endParaRPr lang="en-US" sz="1200" dirty="0"/>
-          </a:p>
-        </p:txBody>
-      </p:sp>
-      <p:sp>
-        <p:nvSpPr>
-          <p:cNvPr id="77" name="Text 68"/>
-          <p:cNvSpPr/>
-          <p:nvPr/>
-        </p:nvSpPr>
-        <p:spPr>
-          <a:xfrm>
-            <a:off x="4974336" y="5687568"/>
-            <a:ext cx="2167128" cy="384048"/>
-          </a:xfrm>
-          <a:prstGeom prst="rect">
-            <a:avLst/>
-          </a:prstGeom>
-          <a:noFill/>
-          <a:ln/>
-        </p:spPr>
-        <p:txBody>
-          <a:bodyPr wrap="square" lIns="0" tIns="0" rIns="0" bIns="0" rtlCol="0" anchor="ctr"/>
-          <a:lstStyle/>
-          <a:p>
-            <a:pPr algn="ctr" indent="0" marL="0">
-              <a:buNone/>
-            </a:pPr>
-            <a:r>
-              <a:rPr lang="en-US" sz="2400" b="1" dirty="0">
-                <a:solidFill>
-                  <a:srgbClr val="17313B"/>
-                </a:solidFill>
-                <a:latin typeface="Malgun Gothic" pitchFamily="34" charset="0"/>
-                <a:ea typeface="Malgun Gothic" pitchFamily="34" charset="-122"/>
-                <a:cs typeface="Malgun Gothic" pitchFamily="34" charset="-120"/>
-              </a:rPr>
-              <a:t>30%+</a:t>
-            </a:r>
-            <a:endParaRPr lang="en-US" sz="2400" dirty="0"/>
-          </a:p>
-        </p:txBody>
-      </p:sp>
-      <p:sp>
-        <p:nvSpPr>
-          <p:cNvPr id="78" name="Text 69"/>
-          <p:cNvSpPr/>
-          <p:nvPr/>
-        </p:nvSpPr>
-        <p:spPr>
-          <a:xfrm>
-            <a:off x="4974336" y="6089904"/>
-            <a:ext cx="2167128" cy="237744"/>
-          </a:xfrm>
-          <a:prstGeom prst="rect">
-            <a:avLst/>
-          </a:prstGeom>
-          <a:noFill/>
-          <a:ln/>
-        </p:spPr>
-        <p:txBody>
-          <a:bodyPr wrap="square" lIns="0" tIns="0" rIns="0" bIns="0" rtlCol="0" anchor="ctr"/>
-          <a:lstStyle/>
-          <a:p>
-            <a:pPr algn="ctr" indent="0" marL="0">
-              <a:buNone/>
-            </a:pPr>
-            <a:r>
-              <a:rPr lang="en-US" sz="1200" dirty="0">
-                <a:solidFill>
-                  <a:srgbClr val="5A7184"/>
-                </a:solidFill>
-                <a:latin typeface="Malgun Gothic" pitchFamily="34" charset="0"/>
-                <a:ea typeface="Malgun Gothic" pitchFamily="34" charset="-122"/>
-                <a:cs typeface="Malgun Gothic" pitchFamily="34" charset="-120"/>
-              </a:rPr>
-              <a:t>커스텀 매출 비중</a:t>
-            </a:r>
-            <a:endParaRPr lang="en-US" sz="1200" dirty="0"/>
-          </a:p>
-        </p:txBody>
-      </p:sp>
-      <p:sp>
-        <p:nvSpPr>
-          <p:cNvPr id="79" name="Text 70"/>
-          <p:cNvSpPr/>
-          <p:nvPr/>
-        </p:nvSpPr>
-        <p:spPr>
-          <a:xfrm>
-            <a:off x="7232904" y="5687568"/>
-            <a:ext cx="2167128" cy="384048"/>
-          </a:xfrm>
-          <a:prstGeom prst="rect">
-            <a:avLst/>
-          </a:prstGeom>
-          <a:noFill/>
-          <a:ln/>
-        </p:spPr>
-        <p:txBody>
-          <a:bodyPr wrap="square" lIns="0" tIns="0" rIns="0" bIns="0" rtlCol="0" anchor="ctr"/>
-          <a:lstStyle/>
-          <a:p>
-            <a:pPr algn="ctr" indent="0" marL="0">
-              <a:buNone/>
-            </a:pPr>
-            <a:r>
-              <a:rPr lang="en-US" sz="2400" b="1" dirty="0">
-                <a:solidFill>
-                  <a:srgbClr val="17313B"/>
-                </a:solidFill>
-                <a:latin typeface="Malgun Gothic" pitchFamily="34" charset="0"/>
-                <a:ea typeface="Malgun Gothic" pitchFamily="34" charset="-122"/>
-                <a:cs typeface="Malgun Gothic" pitchFamily="34" charset="-120"/>
-              </a:rPr>
-              <a:t>25%</a:t>
-            </a:r>
-            <a:endParaRPr lang="en-US" sz="2400" dirty="0"/>
-          </a:p>
-        </p:txBody>
-      </p:sp>
-      <p:sp>
-        <p:nvSpPr>
-          <p:cNvPr id="80" name="Text 71"/>
-          <p:cNvSpPr/>
-          <p:nvPr/>
-        </p:nvSpPr>
-        <p:spPr>
-          <a:xfrm>
-            <a:off x="7232904" y="6089904"/>
-            <a:ext cx="2167128" cy="237744"/>
-          </a:xfrm>
-          <a:prstGeom prst="rect">
-            <a:avLst/>
-          </a:prstGeom>
-          <a:noFill/>
-          <a:ln/>
-        </p:spPr>
-        <p:txBody>
-          <a:bodyPr wrap="square" lIns="0" tIns="0" rIns="0" bIns="0" rtlCol="0" anchor="ctr"/>
-          <a:lstStyle/>
-          <a:p>
-            <a:pPr algn="ctr" indent="0" marL="0">
-              <a:buNone/>
-            </a:pPr>
-            <a:r>
-              <a:rPr lang="en-US" sz="1200" dirty="0">
-                <a:solidFill>
-                  <a:srgbClr val="5A7184"/>
-                </a:solidFill>
-                <a:latin typeface="Malgun Gothic" pitchFamily="34" charset="0"/>
-                <a:ea typeface="Malgun Gothic" pitchFamily="34" charset="-122"/>
-                <a:cs typeface="Malgun Gothic" pitchFamily="34" charset="-120"/>
-              </a:rPr>
-              <a:t>고객 직접 교류 시간</a:t>
-            </a:r>
-            <a:endParaRPr lang="en-US" sz="1200" dirty="0"/>
-          </a:p>
-        </p:txBody>
-      </p:sp>
-      <p:sp>
-        <p:nvSpPr>
-          <p:cNvPr id="81" name="Text 72"/>
-          <p:cNvSpPr/>
-          <p:nvPr/>
-        </p:nvSpPr>
-        <p:spPr>
-          <a:xfrm>
-            <a:off x="9491472" y="5687568"/>
-            <a:ext cx="2167128" cy="384048"/>
-          </a:xfrm>
-          <a:prstGeom prst="rect">
-            <a:avLst/>
-          </a:prstGeom>
-          <a:noFill/>
-          <a:ln/>
-        </p:spPr>
-        <p:txBody>
-          <a:bodyPr wrap="square" lIns="0" tIns="0" rIns="0" bIns="0" rtlCol="0" anchor="ctr"/>
-          <a:lstStyle/>
-          <a:p>
-            <a:pPr algn="ctr" indent="0" marL="0">
-              <a:buNone/>
-            </a:pPr>
-            <a:r>
-              <a:rPr lang="en-US" sz="2400" b="1" dirty="0">
-                <a:solidFill>
-                  <a:srgbClr val="02A878"/>
-                </a:solidFill>
-                <a:latin typeface="Malgun Gothic" pitchFamily="34" charset="0"/>
-                <a:ea typeface="Malgun Gothic" pitchFamily="34" charset="-122"/>
-                <a:cs typeface="Malgun Gothic" pitchFamily="34" charset="-120"/>
-              </a:rPr>
-              <a:t>5명+</a:t>
-            </a:r>
-            <a:endParaRPr lang="en-US" sz="2400" dirty="0"/>
-          </a:p>
-        </p:txBody>
-      </p:sp>
-      <p:sp>
-        <p:nvSpPr>
-          <p:cNvPr id="82" name="Text 73"/>
-          <p:cNvSpPr/>
-          <p:nvPr/>
-        </p:nvSpPr>
-        <p:spPr>
-          <a:xfrm>
-            <a:off x="9491472" y="6089904"/>
-            <a:ext cx="2167128" cy="237744"/>
-          </a:xfrm>
-          <a:prstGeom prst="rect">
-            <a:avLst/>
-          </a:prstGeom>
-          <a:noFill/>
-          <a:ln/>
-        </p:spPr>
-        <p:txBody>
-          <a:bodyPr wrap="square" lIns="0" tIns="0" rIns="0" bIns="0" rtlCol="0" anchor="ctr"/>
-          <a:lstStyle/>
-          <a:p>
-            <a:pPr algn="ctr" indent="0" marL="0">
-              <a:buNone/>
-            </a:pPr>
-            <a:r>
-              <a:rPr lang="en-US" sz="1200" dirty="0">
-                <a:solidFill>
-                  <a:srgbClr val="5A7184"/>
-                </a:solidFill>
-                <a:latin typeface="Malgun Gothic" pitchFamily="34" charset="0"/>
-                <a:ea typeface="Malgun Gothic" pitchFamily="34" charset="-122"/>
-                <a:cs typeface="Malgun Gothic" pitchFamily="34" charset="-120"/>
-              </a:rPr>
-              <a:t>실리콘밸리 스타 영입</a:t>
-            </a:r>
-            <a:endParaRPr lang="en-US" sz="1200" dirty="0"/>
+              <a:t>스타 영입 축적 → 조직 수준 상향</a:t>
+            </a:r>
+            <a:endParaRPr lang="en-US" sz="1250" dirty="0"/>
           </a:p>
         </p:txBody>
       </p:sp>
@@ -5948,51 +5677,180 @@
         </p:nvSpPr>
         <p:spPr>
           <a:xfrm>
-            <a:off x="1463040" y="5797296"/>
-            <a:ext cx="9262872" cy="0"/>
-          </a:xfrm>
-          <a:prstGeom prst="line">
+            <a:off x="457200" y="5449824"/>
+            <a:ext cx="11274552" cy="914400"/>
+          </a:xfrm>
+          <a:prstGeom prst="roundRect">
+            <a:avLst>
+              <a:gd name="adj" fmla="val 9000"/>
+            </a:avLst>
+          </a:prstGeom>
+          <a:solidFill>
+            <a:srgbClr val="F5F7F8"/>
+          </a:solidFill>
+          <a:ln/>
+        </p:spPr>
+      </p:sp>
+      <p:sp>
+        <p:nvSpPr>
+          <p:cNvPr id="51" name="Text 44"/>
+          <p:cNvSpPr/>
+          <p:nvPr/>
+        </p:nvSpPr>
+        <p:spPr>
+          <a:xfrm>
+            <a:off x="640080" y="5742432"/>
+            <a:ext cx="329184" cy="329184"/>
+          </a:xfrm>
+          <a:prstGeom prst="ellipse">
+            <a:avLst/>
+          </a:prstGeom>
+          <a:solidFill>
+            <a:srgbClr val="17313B"/>
+          </a:solidFill>
+          <a:ln/>
+        </p:spPr>
+        <p:txBody>
+          <a:bodyPr wrap="square" lIns="0" tIns="0" rIns="0" bIns="0" rtlCol="0" anchor="ctr"/>
+          <a:lstStyle/>
+          <a:p>
+            <a:pPr algn="ctr" indent="0" marL="0">
+              <a:buNone/>
+            </a:pPr>
+            <a:r>
+              <a:rPr lang="en-US" sz="1500" b="1" dirty="0">
+                <a:solidFill>
+                  <a:srgbClr val="FFFFFF"/>
+                </a:solidFill>
+                <a:latin typeface="Malgun Gothic" pitchFamily="34" charset="0"/>
+                <a:ea typeface="Malgun Gothic" pitchFamily="34" charset="-122"/>
+                <a:cs typeface="Malgun Gothic" pitchFamily="34" charset="-120"/>
+              </a:rPr>
+              <a:t>4</a:t>
+            </a:r>
+            <a:endParaRPr lang="en-US" sz="1500" dirty="0"/>
+          </a:p>
+        </p:txBody>
+      </p:sp>
+      <p:sp>
+        <p:nvSpPr>
+          <p:cNvPr id="52" name="Text 45"/>
+          <p:cNvSpPr/>
+          <p:nvPr/>
+        </p:nvSpPr>
+        <p:spPr>
+          <a:xfrm>
+            <a:off x="1060704" y="5715000"/>
+            <a:ext cx="3017520" cy="365760"/>
+          </a:xfrm>
+          <a:prstGeom prst="rect">
             <a:avLst/>
           </a:prstGeom>
           <a:noFill/>
-          <a:ln w="25400">
+          <a:ln/>
+        </p:spPr>
+        <p:txBody>
+          <a:bodyPr wrap="square" lIns="0" tIns="0" rIns="0" bIns="0" rtlCol="0" anchor="ctr"/>
+          <a:lstStyle/>
+          <a:p>
+            <a:pPr indent="0" marL="0">
+              <a:buNone/>
+            </a:pPr>
+            <a:r>
+              <a:rPr lang="en-US" sz="1700" b="1" dirty="0">
+                <a:solidFill>
+                  <a:srgbClr val="17313B"/>
+                </a:solidFill>
+                <a:latin typeface="Malgun Gothic" pitchFamily="34" charset="0"/>
+                <a:ea typeface="Malgun Gothic" pitchFamily="34" charset="-122"/>
+                <a:cs typeface="Malgun Gothic" pitchFamily="34" charset="-120"/>
+              </a:rPr>
+              <a:t>환경 변화 — 영입 가능한 임금</a:t>
+            </a:r>
+            <a:endParaRPr lang="en-US" sz="1700" dirty="0"/>
+          </a:p>
+        </p:txBody>
+      </p:sp>
+      <p:sp>
+        <p:nvSpPr>
+          <p:cNvPr id="53" name="Text 46"/>
+          <p:cNvSpPr/>
+          <p:nvPr/>
+        </p:nvSpPr>
+        <p:spPr>
+          <a:xfrm>
+            <a:off x="4114800" y="5605272"/>
+            <a:ext cx="2103120" cy="603504"/>
+          </a:xfrm>
+          <a:prstGeom prst="roundRect">
+            <a:avLst>
+              <a:gd name="adj" fmla="val 9091"/>
+            </a:avLst>
+          </a:prstGeom>
+          <a:solidFill>
+            <a:srgbClr val="E7ECEF"/>
+          </a:solidFill>
+          <a:ln w="12700">
             <a:solidFill>
-              <a:srgbClr val="C4CFD6"/>
+              <a:srgbClr val="DCE4E9"/>
             </a:solidFill>
-            <a:prstDash val="solid"/>
           </a:ln>
         </p:spPr>
-      </p:sp>
-      <p:sp>
-        <p:nvSpPr>
-          <p:cNvPr id="51" name="Shape 44"/>
-          <p:cNvSpPr/>
-          <p:nvPr/>
-        </p:nvSpPr>
-        <p:spPr>
-          <a:xfrm>
-            <a:off x="1380744" y="5715000"/>
-            <a:ext cx="164592" cy="164592"/>
-          </a:xfrm>
-          <a:prstGeom prst="ellipse">
-            <a:avLst/>
-          </a:prstGeom>
-          <a:solidFill>
-            <a:srgbClr val="17313B"/>
-          </a:solidFill>
-          <a:ln/>
-        </p:spPr>
-      </p:sp>
-      <p:sp>
-        <p:nvSpPr>
-          <p:cNvPr id="52" name="Text 45"/>
-          <p:cNvSpPr/>
-          <p:nvPr/>
-        </p:nvSpPr>
-        <p:spPr>
-          <a:xfrm>
-            <a:off x="45720" y="5449824"/>
-            <a:ext cx="2834640" cy="256032"/>
+        <p:txBody>
+          <a:bodyPr wrap="square" lIns="0" tIns="0" rIns="0" bIns="0" rtlCol="0" anchor="ctr"/>
+          <a:lstStyle/>
+          <a:p>
+            <a:pPr algn="ctr" indent="0" marL="0">
+              <a:lnSpc>
+                <a:spcPct val="105000"/>
+              </a:lnSpc>
+              <a:buNone/>
+            </a:pPr>
+            <a:r>
+              <a:rPr lang="en-US" sz="1250" b="1" dirty="0">
+                <a:solidFill>
+                  <a:srgbClr val="5A7184"/>
+                </a:solidFill>
+                <a:latin typeface="Malgun Gothic" pitchFamily="34" charset="0"/>
+                <a:ea typeface="Malgun Gothic" pitchFamily="34" charset="-122"/>
+                <a:cs typeface="Malgun Gothic" pitchFamily="34" charset="-120"/>
+              </a:rPr>
+              <a:t>과거</a:t>
+            </a:r>
+            <a:endParaRPr lang="en-US" sz="1250" dirty="0"/>
+          </a:p>
+          <a:p>
+            <a:pPr algn="ctr" indent="0" marL="0">
+              <a:lnSpc>
+                <a:spcPct val="105000"/>
+              </a:lnSpc>
+              <a:buNone/>
+            </a:pPr>
+            <a:r>
+              <a:rPr lang="en-US" sz="1000" dirty="0">
+                <a:solidFill>
+                  <a:srgbClr val="5A7184"/>
+                </a:solidFill>
+                <a:latin typeface="Malgun Gothic" pitchFamily="34" charset="0"/>
+                <a:ea typeface="Malgun Gothic" pitchFamily="34" charset="-122"/>
+                <a:cs typeface="Malgun Gothic" pitchFamily="34" charset="-120"/>
+              </a:rPr>
+              <a:t>실리콘밸리 보상 열위</a:t>
+            </a:r>
+            <a:endParaRPr lang="en-US" sz="1250" dirty="0"/>
+          </a:p>
+        </p:txBody>
+      </p:sp>
+      <p:sp>
+        <p:nvSpPr>
+          <p:cNvPr id="54" name="Text 47"/>
+          <p:cNvSpPr/>
+          <p:nvPr/>
+        </p:nvSpPr>
+        <p:spPr>
+          <a:xfrm>
+            <a:off x="6217920" y="5605272"/>
+            <a:ext cx="219456" cy="603504"/>
           </a:xfrm>
           <a:prstGeom prst="rect">
             <a:avLst/>
@@ -6008,7 +5866,57 @@
               <a:buNone/>
             </a:pPr>
             <a:r>
-              <a:rPr lang="en-US" sz="1450" b="1" dirty="0">
+              <a:rPr lang="en-US" sz="1200" dirty="0">
+                <a:solidFill>
+                  <a:srgbClr val="5A7184"/>
+                </a:solidFill>
+                <a:latin typeface="Malgun Gothic" pitchFamily="34" charset="0"/>
+                <a:ea typeface="Malgun Gothic" pitchFamily="34" charset="-122"/>
+                <a:cs typeface="Malgun Gothic" pitchFamily="34" charset="-120"/>
+              </a:rPr>
+              <a:t>▶</a:t>
+            </a:r>
+            <a:endParaRPr lang="en-US" sz="1200" dirty="0"/>
+          </a:p>
+        </p:txBody>
+      </p:sp>
+      <p:sp>
+        <p:nvSpPr>
+          <p:cNvPr id="55" name="Text 48"/>
+          <p:cNvSpPr/>
+          <p:nvPr/>
+        </p:nvSpPr>
+        <p:spPr>
+          <a:xfrm>
+            <a:off x="6437376" y="5605272"/>
+            <a:ext cx="2651760" cy="603504"/>
+          </a:xfrm>
+          <a:prstGeom prst="roundRect">
+            <a:avLst>
+              <a:gd name="adj" fmla="val 9091"/>
+            </a:avLst>
+          </a:prstGeom>
+          <a:solidFill>
+            <a:srgbClr val="FFFFFF"/>
+          </a:solidFill>
+          <a:ln w="12700">
+            <a:solidFill>
+              <a:srgbClr val="DCE4E9"/>
+            </a:solidFill>
+          </a:ln>
+        </p:spPr>
+        <p:txBody>
+          <a:bodyPr wrap="square" lIns="0" tIns="0" rIns="0" bIns="0" rtlCol="0" anchor="ctr"/>
+          <a:lstStyle/>
+          <a:p>
+            <a:pPr algn="ctr" indent="0" marL="0">
+              <a:lnSpc>
+                <a:spcPct val="105000"/>
+              </a:lnSpc>
+              <a:buNone/>
+            </a:pPr>
+            <a:r>
+              <a:rPr lang="en-US" sz="1250" b="1" dirty="0">
                 <a:solidFill>
                   <a:srgbClr val="17313B"/>
                 </a:solidFill>
@@ -6016,22 +5924,42 @@
                 <a:ea typeface="Malgun Gothic" pitchFamily="34" charset="-122"/>
                 <a:cs typeface="Malgun Gothic" pitchFamily="34" charset="-120"/>
               </a:rPr>
-              <a:t>90일 · 증명</a:t>
-            </a:r>
-            <a:endParaRPr lang="en-US" sz="1450" dirty="0"/>
-          </a:p>
-        </p:txBody>
-      </p:sp>
-      <p:sp>
-        <p:nvSpPr>
-          <p:cNvPr id="53" name="Text 46"/>
-          <p:cNvSpPr/>
-          <p:nvPr/>
-        </p:nvSpPr>
-        <p:spPr>
-          <a:xfrm>
-            <a:off x="-137160" y="5943600"/>
-            <a:ext cx="3200400" cy="237744"/>
+              <a:t>현재</a:t>
+            </a:r>
+            <a:endParaRPr lang="en-US" sz="1250" dirty="0"/>
+          </a:p>
+          <a:p>
+            <a:pPr algn="ctr" indent="0" marL="0">
+              <a:lnSpc>
+                <a:spcPct val="105000"/>
+              </a:lnSpc>
+              <a:buNone/>
+            </a:pPr>
+            <a:r>
+              <a:rPr lang="en-US" sz="1000" dirty="0">
+                <a:solidFill>
+                  <a:srgbClr val="5A7184"/>
+                </a:solidFill>
+                <a:latin typeface="Malgun Gothic" pitchFamily="34" charset="0"/>
+                <a:ea typeface="Malgun Gothic" pitchFamily="34" charset="-122"/>
+                <a:cs typeface="Malgun Gothic" pitchFamily="34" charset="-120"/>
+              </a:rPr>
+              <a:t>성과급 ~6억 · 상한 철폐</a:t>
+            </a:r>
+            <a:endParaRPr lang="en-US" sz="1250" dirty="0"/>
+          </a:p>
+        </p:txBody>
+      </p:sp>
+      <p:sp>
+        <p:nvSpPr>
+          <p:cNvPr id="56" name="Text 49"/>
+          <p:cNvSpPr/>
+          <p:nvPr/>
+        </p:nvSpPr>
+        <p:spPr>
+          <a:xfrm>
+            <a:off x="9089136" y="5605272"/>
+            <a:ext cx="219456" cy="603504"/>
           </a:xfrm>
           <a:prstGeom prst="rect">
             <a:avLst/>
@@ -6047,7 +5975,7 @@
               <a:buNone/>
             </a:pPr>
             <a:r>
-              <a:rPr lang="en-US" sz="1100" dirty="0">
+              <a:rPr lang="en-US" sz="1200" dirty="0">
                 <a:solidFill>
                   <a:srgbClr val="5A7184"/>
                 </a:solidFill>
@@ -6055,58 +5983,49 @@
                 <a:ea typeface="Malgun Gothic" pitchFamily="34" charset="-122"/>
                 <a:cs typeface="Malgun Gothic" pitchFamily="34" charset="-120"/>
               </a:rPr>
-              <a:t>Co-Design Pod 1호 · 시스템 모델 v0.1</a:t>
-            </a:r>
-            <a:endParaRPr lang="en-US" sz="1100" dirty="0"/>
-          </a:p>
-        </p:txBody>
-      </p:sp>
-      <p:sp>
-        <p:nvSpPr>
-          <p:cNvPr id="54" name="Shape 47"/>
-          <p:cNvSpPr/>
-          <p:nvPr/>
-        </p:nvSpPr>
-        <p:spPr>
-          <a:xfrm>
-            <a:off x="6016752" y="5715000"/>
-            <a:ext cx="164592" cy="164592"/>
-          </a:xfrm>
-          <a:prstGeom prst="ellipse">
-            <a:avLst/>
-          </a:prstGeom>
-          <a:solidFill>
-            <a:srgbClr val="17313B"/>
-          </a:solidFill>
-          <a:ln/>
-        </p:spPr>
-      </p:sp>
-      <p:sp>
-        <p:nvSpPr>
-          <p:cNvPr id="55" name="Text 48"/>
-          <p:cNvSpPr/>
-          <p:nvPr/>
-        </p:nvSpPr>
-        <p:spPr>
-          <a:xfrm>
-            <a:off x="4681728" y="5449824"/>
-            <a:ext cx="2834640" cy="256032"/>
-          </a:xfrm>
-          <a:prstGeom prst="rect">
-            <a:avLst/>
-          </a:prstGeom>
-          <a:noFill/>
-          <a:ln/>
-        </p:spPr>
-        <p:txBody>
-          <a:bodyPr wrap="square" lIns="0" tIns="0" rIns="0" bIns="0" rtlCol="0" anchor="ctr"/>
-          <a:lstStyle/>
-          <a:p>
-            <a:pPr algn="ctr" indent="0" marL="0">
-              <a:buNone/>
-            </a:pPr>
-            <a:r>
-              <a:rPr lang="en-US" sz="1450" b="1" dirty="0">
+              <a:t>▶</a:t>
+            </a:r>
+            <a:endParaRPr lang="en-US" sz="1200" dirty="0"/>
+          </a:p>
+        </p:txBody>
+      </p:sp>
+      <p:sp>
+        <p:nvSpPr>
+          <p:cNvPr id="57" name="Text 50"/>
+          <p:cNvSpPr/>
+          <p:nvPr/>
+        </p:nvSpPr>
+        <p:spPr>
+          <a:xfrm>
+            <a:off x="9308592" y="5605272"/>
+            <a:ext cx="2286000" cy="603504"/>
+          </a:xfrm>
+          <a:prstGeom prst="roundRect">
+            <a:avLst>
+              <a:gd name="adj" fmla="val 9091"/>
+            </a:avLst>
+          </a:prstGeom>
+          <a:solidFill>
+            <a:srgbClr val="E8F6F0"/>
+          </a:solidFill>
+          <a:ln w="15875">
+            <a:solidFill>
+              <a:srgbClr val="02A878"/>
+            </a:solidFill>
+          </a:ln>
+        </p:spPr>
+        <p:txBody>
+          <a:bodyPr wrap="square" lIns="0" tIns="0" rIns="0" bIns="0" rtlCol="0" anchor="ctr"/>
+          <a:lstStyle/>
+          <a:p>
+            <a:pPr algn="ctr" indent="0" marL="0">
+              <a:lnSpc>
+                <a:spcPct val="105000"/>
+              </a:lnSpc>
+              <a:buNone/>
+            </a:pPr>
+            <a:r>
+              <a:rPr lang="en-US" sz="1250" b="1" dirty="0">
                 <a:solidFill>
                   <a:srgbClr val="17313B"/>
                 </a:solidFill>
@@ -6114,38 +6033,19 @@
                 <a:ea typeface="Malgun Gothic" pitchFamily="34" charset="-122"/>
                 <a:cs typeface="Malgun Gothic" pitchFamily="34" charset="-120"/>
               </a:rPr>
-              <a:t>1년 · 제도화</a:t>
-            </a:r>
-            <a:endParaRPr lang="en-US" sz="1450" dirty="0"/>
-          </a:p>
-        </p:txBody>
-      </p:sp>
-      <p:sp>
-        <p:nvSpPr>
-          <p:cNvPr id="56" name="Text 49"/>
-          <p:cNvSpPr/>
-          <p:nvPr/>
-        </p:nvSpPr>
-        <p:spPr>
-          <a:xfrm>
-            <a:off x="4498848" y="5943600"/>
-            <a:ext cx="3200400" cy="237744"/>
-          </a:xfrm>
-          <a:prstGeom prst="rect">
-            <a:avLst/>
-          </a:prstGeom>
-          <a:noFill/>
-          <a:ln/>
-        </p:spPr>
-        <p:txBody>
-          <a:bodyPr wrap="square" lIns="0" tIns="0" rIns="0" bIns="0" rtlCol="0" anchor="ctr"/>
-          <a:lstStyle/>
-          <a:p>
-            <a:pPr algn="ctr" indent="0" marL="0">
-              <a:buNone/>
-            </a:pPr>
-            <a:r>
-              <a:rPr lang="en-US" sz="1100" dirty="0">
+              <a:t>선순환</a:t>
+            </a:r>
+            <a:endParaRPr lang="en-US" sz="1250" dirty="0"/>
+          </a:p>
+          <a:p>
+            <a:pPr algn="ctr" indent="0" marL="0">
+              <a:lnSpc>
+                <a:spcPct val="105000"/>
+              </a:lnSpc>
+              <a:buNone/>
+            </a:pPr>
+            <a:r>
+              <a:rPr lang="en-US" sz="1000" dirty="0">
                 <a:solidFill>
                   <a:srgbClr val="5A7184"/>
                 </a:solidFill>
@@ -6153,107 +6053,9 @@
                 <a:ea typeface="Malgun Gothic" pitchFamily="34" charset="-122"/>
                 <a:cs typeface="Malgun Gothic" pitchFamily="34" charset="-120"/>
               </a:rPr>
-              <a:t>Pod 3~5개 · 전략적 고객 계약 1건</a:t>
-            </a:r>
-            <a:endParaRPr lang="en-US" sz="1100" dirty="0"/>
-          </a:p>
-        </p:txBody>
-      </p:sp>
-      <p:sp>
-        <p:nvSpPr>
-          <p:cNvPr id="57" name="Shape 50"/>
-          <p:cNvSpPr/>
-          <p:nvPr/>
-        </p:nvSpPr>
-        <p:spPr>
-          <a:xfrm>
-            <a:off x="10643616" y="5715000"/>
-            <a:ext cx="164592" cy="164592"/>
-          </a:xfrm>
-          <a:prstGeom prst="ellipse">
-            <a:avLst/>
-          </a:prstGeom>
-          <a:solidFill>
-            <a:srgbClr val="17313B"/>
-          </a:solidFill>
-          <a:ln/>
-        </p:spPr>
-      </p:sp>
-      <p:sp>
-        <p:nvSpPr>
-          <p:cNvPr id="58" name="Text 51"/>
-          <p:cNvSpPr/>
-          <p:nvPr/>
-        </p:nvSpPr>
-        <p:spPr>
-          <a:xfrm>
-            <a:off x="9308592" y="5449824"/>
-            <a:ext cx="2834640" cy="256032"/>
-          </a:xfrm>
-          <a:prstGeom prst="rect">
-            <a:avLst/>
-          </a:prstGeom>
-          <a:noFill/>
-          <a:ln/>
-        </p:spPr>
-        <p:txBody>
-          <a:bodyPr wrap="square" lIns="0" tIns="0" rIns="0" bIns="0" rtlCol="0" anchor="ctr"/>
-          <a:lstStyle/>
-          <a:p>
-            <a:pPr algn="ctr" indent="0" marL="0">
-              <a:buNone/>
-            </a:pPr>
-            <a:r>
-              <a:rPr lang="en-US" sz="1450" b="1" dirty="0">
-                <a:solidFill>
-                  <a:srgbClr val="17313B"/>
-                </a:solidFill>
-                <a:latin typeface="Malgun Gothic" pitchFamily="34" charset="0"/>
-                <a:ea typeface="Malgun Gothic" pitchFamily="34" charset="-122"/>
-                <a:cs typeface="Malgun Gothic" pitchFamily="34" charset="-120"/>
-              </a:rPr>
-              <a:t>3년 · 표준화</a:t>
-            </a:r>
-            <a:endParaRPr lang="en-US" sz="1450" dirty="0"/>
-          </a:p>
-        </p:txBody>
-      </p:sp>
-      <p:sp>
-        <p:nvSpPr>
-          <p:cNvPr id="59" name="Text 52"/>
-          <p:cNvSpPr/>
-          <p:nvPr/>
-        </p:nvSpPr>
-        <p:spPr>
-          <a:xfrm>
-            <a:off x="9125712" y="5943600"/>
-            <a:ext cx="3200400" cy="237744"/>
-          </a:xfrm>
-          <a:prstGeom prst="rect">
-            <a:avLst/>
-          </a:prstGeom>
-          <a:noFill/>
-          <a:ln/>
-        </p:spPr>
-        <p:txBody>
-          <a:bodyPr wrap="square" lIns="0" tIns="0" rIns="0" bIns="0" rtlCol="0" anchor="ctr"/>
-          <a:lstStyle/>
-          <a:p>
-            <a:pPr algn="ctr" indent="0" marL="0">
-              <a:buNone/>
-            </a:pPr>
-            <a:r>
-              <a:rPr lang="en-US" sz="1100" dirty="0">
-                <a:solidFill>
-                  <a:srgbClr val="5A7184"/>
-                </a:solidFill>
-                <a:latin typeface="Malgun Gothic" pitchFamily="34" charset="0"/>
-                <a:ea typeface="Malgun Gothic" pitchFamily="34" charset="-122"/>
-                <a:cs typeface="Malgun Gothic" pitchFamily="34" charset="-120"/>
-              </a:rPr>
-              <a:t>설계 플랫폼 · 커스텀 매출 30%+</a:t>
-            </a:r>
-            <a:endParaRPr lang="en-US" sz="1100" dirty="0"/>
+              <a:t>영입 축적 → 조직 수준 상향</a:t>
+            </a:r>
+            <a:endParaRPr lang="en-US" sz="1250" dirty="0"/>
           </a:p>
         </p:txBody>
       </p:sp>
@@ -7125,46 +6927,112 @@
       </p:sp>
       <p:sp>
         <p:nvSpPr>
-          <p:cNvPr id="26" name="Shape 21"/>
-          <p:cNvSpPr/>
-          <p:nvPr/>
-        </p:nvSpPr>
-        <p:spPr>
-          <a:xfrm>
-            <a:off x="2468880" y="4974336"/>
-            <a:ext cx="7251192" cy="0"/>
-          </a:xfrm>
-          <a:prstGeom prst="line">
+          <p:cNvPr id="26" name="Text 21"/>
+          <p:cNvSpPr/>
+          <p:nvPr/>
+        </p:nvSpPr>
+        <p:spPr>
+          <a:xfrm>
+            <a:off x="457200" y="4773168"/>
+            <a:ext cx="11274552" cy="292608"/>
+          </a:xfrm>
+          <a:prstGeom prst="rect">
             <a:avLst/>
           </a:prstGeom>
           <a:noFill/>
-          <a:ln w="25400">
+          <a:ln/>
+        </p:spPr>
+        <p:txBody>
+          <a:bodyPr wrap="square" lIns="0" tIns="0" rIns="0" bIns="0" rtlCol="0" anchor="ctr"/>
+          <a:lstStyle/>
+          <a:p>
+            <a:pPr algn="ctr" indent="0" marL="0">
+              <a:buNone/>
+            </a:pPr>
+            <a:r>
+              <a:rPr lang="en-US" sz="1500" b="1" dirty="0">
+                <a:solidFill>
+                  <a:srgbClr val="17313B"/>
+                </a:solidFill>
+                <a:latin typeface="Malgun Gothic" pitchFamily="34" charset="0"/>
+                <a:ea typeface="Malgun Gothic" pitchFamily="34" charset="-122"/>
+                <a:cs typeface="Malgun Gothic" pitchFamily="34" charset="-120"/>
+              </a:rPr>
+              <a:t>환경도 바뀌었다 — 스타를 영입할 수 있는 임금 수준</a:t>
+            </a:r>
+            <a:endParaRPr lang="en-US" sz="1500" dirty="0"/>
+          </a:p>
+        </p:txBody>
+      </p:sp>
+      <p:sp>
+        <p:nvSpPr>
+          <p:cNvPr id="27" name="Text 22"/>
+          <p:cNvSpPr/>
+          <p:nvPr/>
+        </p:nvSpPr>
+        <p:spPr>
+          <a:xfrm>
+            <a:off x="749808" y="5157216"/>
+            <a:ext cx="3108960" cy="804672"/>
+          </a:xfrm>
+          <a:prstGeom prst="roundRect">
+            <a:avLst>
+              <a:gd name="adj" fmla="val 9091"/>
+            </a:avLst>
+          </a:prstGeom>
+          <a:solidFill>
+            <a:srgbClr val="E7ECEF"/>
+          </a:solidFill>
+          <a:ln w="15875">
             <a:solidFill>
-              <a:srgbClr val="C4CFD6"/>
+              <a:srgbClr val="DCE4E9"/>
             </a:solidFill>
-            <a:prstDash val="solid"/>
           </a:ln>
         </p:spPr>
-      </p:sp>
-      <p:sp>
-        <p:nvSpPr>
-          <p:cNvPr id="27" name="Shape 22"/>
-          <p:cNvSpPr/>
-          <p:nvPr/>
-        </p:nvSpPr>
-        <p:spPr>
-          <a:xfrm>
-            <a:off x="2377440" y="4882896"/>
-            <a:ext cx="182880" cy="182880"/>
-          </a:xfrm>
-          <a:prstGeom prst="ellipse">
-            <a:avLst/>
-          </a:prstGeom>
-          <a:solidFill>
-            <a:srgbClr val="17313B"/>
-          </a:solidFill>
-          <a:ln/>
-        </p:spPr>
+        <p:txBody>
+          <a:bodyPr wrap="square" lIns="0" tIns="0" rIns="0" bIns="0" rtlCol="0" anchor="ctr"/>
+          <a:lstStyle/>
+          <a:p>
+            <a:pPr algn="ctr" indent="0" marL="0">
+              <a:lnSpc>
+                <a:spcPct val="108000"/>
+              </a:lnSpc>
+              <a:buNone/>
+            </a:pPr>
+            <a:r>
+              <a:rPr lang="en-US" sz="1350" b="1" dirty="0">
+                <a:solidFill>
+                  <a:srgbClr val="5A7184"/>
+                </a:solidFill>
+                <a:latin typeface="Malgun Gothic" pitchFamily="34" charset="0"/>
+                <a:ea typeface="Malgun Gothic" pitchFamily="34" charset="-122"/>
+                <a:cs typeface="Malgun Gothic" pitchFamily="34" charset="-120"/>
+              </a:rPr>
+              <a:t>과거</a:t>
+            </a:r>
+            <a:endParaRPr lang="en-US" sz="1350" dirty="0"/>
+          </a:p>
+          <a:p>
+            <a:pPr algn="ctr" indent="0" marL="0">
+              <a:lnSpc>
+                <a:spcPct val="108000"/>
+              </a:lnSpc>
+              <a:buNone/>
+            </a:pPr>
+            <a:r>
+              <a:rPr lang="en-US" sz="1150" dirty="0">
+                <a:solidFill>
+                  <a:srgbClr val="5A7184"/>
+                </a:solidFill>
+                <a:latin typeface="Malgun Gothic" pitchFamily="34" charset="0"/>
+                <a:ea typeface="Malgun Gothic" pitchFamily="34" charset="-122"/>
+                <a:cs typeface="Malgun Gothic" pitchFamily="34" charset="-120"/>
+              </a:rPr>
+              <a:t>실리콘밸리 수준에 못 미친 보상</a:t>
+            </a:r>
+            <a:endParaRPr lang="en-US" sz="1350" dirty="0"/>
+          </a:p>
+        </p:txBody>
       </p:sp>
       <p:sp>
         <p:nvSpPr>
@@ -7174,8 +7042,8 @@
         </p:nvSpPr>
         <p:spPr>
           <a:xfrm>
-            <a:off x="1188720" y="4572000"/>
-            <a:ext cx="2560320" cy="274320"/>
+            <a:off x="3858768" y="5157216"/>
+            <a:ext cx="274320" cy="804672"/>
           </a:xfrm>
           <a:prstGeom prst="rect">
             <a:avLst/>
@@ -7191,7 +7059,57 @@
               <a:buNone/>
             </a:pPr>
             <a:r>
-              <a:rPr lang="en-US" sz="1550" b="1" dirty="0">
+              <a:rPr lang="en-US" sz="1400" dirty="0">
+                <a:solidFill>
+                  <a:srgbClr val="5A7184"/>
+                </a:solidFill>
+                <a:latin typeface="Malgun Gothic" pitchFamily="34" charset="0"/>
+                <a:ea typeface="Malgun Gothic" pitchFamily="34" charset="-122"/>
+                <a:cs typeface="Malgun Gothic" pitchFamily="34" charset="-120"/>
+              </a:rPr>
+              <a:t>▶</a:t>
+            </a:r>
+            <a:endParaRPr lang="en-US" sz="1400" dirty="0"/>
+          </a:p>
+        </p:txBody>
+      </p:sp>
+      <p:sp>
+        <p:nvSpPr>
+          <p:cNvPr id="29" name="Text 24"/>
+          <p:cNvSpPr/>
+          <p:nvPr/>
+        </p:nvSpPr>
+        <p:spPr>
+          <a:xfrm>
+            <a:off x="4133088" y="5157216"/>
+            <a:ext cx="3383280" cy="804672"/>
+          </a:xfrm>
+          <a:prstGeom prst="roundRect">
+            <a:avLst>
+              <a:gd name="adj" fmla="val 9091"/>
+            </a:avLst>
+          </a:prstGeom>
+          <a:solidFill>
+            <a:srgbClr val="FFFFFF"/>
+          </a:solidFill>
+          <a:ln w="15875">
+            <a:solidFill>
+              <a:srgbClr val="DCE4E9"/>
+            </a:solidFill>
+          </a:ln>
+        </p:spPr>
+        <p:txBody>
+          <a:bodyPr wrap="square" lIns="0" tIns="0" rIns="0" bIns="0" rtlCol="0" anchor="ctr"/>
+          <a:lstStyle/>
+          <a:p>
+            <a:pPr algn="ctr" indent="0" marL="0">
+              <a:lnSpc>
+                <a:spcPct val="108000"/>
+              </a:lnSpc>
+              <a:buNone/>
+            </a:pPr>
+            <a:r>
+              <a:rPr lang="en-US" sz="1350" b="1" dirty="0">
                 <a:solidFill>
                   <a:srgbClr val="17313B"/>
                 </a:solidFill>
@@ -7199,22 +7117,42 @@
                 <a:ea typeface="Malgun Gothic" pitchFamily="34" charset="-122"/>
                 <a:cs typeface="Malgun Gothic" pitchFamily="34" charset="-120"/>
               </a:rPr>
-              <a:t>90일 증명</a:t>
-            </a:r>
-            <a:endParaRPr lang="en-US" sz="1550" dirty="0"/>
-          </a:p>
-        </p:txBody>
-      </p:sp>
-      <p:sp>
-        <p:nvSpPr>
-          <p:cNvPr id="29" name="Text 24"/>
-          <p:cNvSpPr/>
-          <p:nvPr/>
-        </p:nvSpPr>
-        <p:spPr>
-          <a:xfrm>
-            <a:off x="1097280" y="5138928"/>
-            <a:ext cx="2743200" cy="237744"/>
+              <a:t>현재</a:t>
+            </a:r>
+            <a:endParaRPr lang="en-US" sz="1350" dirty="0"/>
+          </a:p>
+          <a:p>
+            <a:pPr algn="ctr" indent="0" marL="0">
+              <a:lnSpc>
+                <a:spcPct val="108000"/>
+              </a:lnSpc>
+              <a:buNone/>
+            </a:pPr>
+            <a:r>
+              <a:rPr lang="en-US" sz="1150" dirty="0">
+                <a:solidFill>
+                  <a:srgbClr val="5A7184"/>
+                </a:solidFill>
+                <a:latin typeface="Malgun Gothic" pitchFamily="34" charset="0"/>
+                <a:ea typeface="Malgun Gothic" pitchFamily="34" charset="-122"/>
+                <a:cs typeface="Malgun Gothic" pitchFamily="34" charset="-120"/>
+              </a:rPr>
+              <a:t>성과급 ~6억 · 상한 철폐 · 영입 가능 수준</a:t>
+            </a:r>
+            <a:endParaRPr lang="en-US" sz="1350" dirty="0"/>
+          </a:p>
+        </p:txBody>
+      </p:sp>
+      <p:sp>
+        <p:nvSpPr>
+          <p:cNvPr id="30" name="Text 25"/>
+          <p:cNvSpPr/>
+          <p:nvPr/>
+        </p:nvSpPr>
+        <p:spPr>
+          <a:xfrm>
+            <a:off x="7516368" y="5157216"/>
+            <a:ext cx="274320" cy="804672"/>
           </a:xfrm>
           <a:prstGeom prst="rect">
             <a:avLst/>
@@ -7230,6 +7168,76 @@
               <a:buNone/>
             </a:pPr>
             <a:r>
+              <a:rPr lang="en-US" sz="1400" dirty="0">
+                <a:solidFill>
+                  <a:srgbClr val="5A7184"/>
+                </a:solidFill>
+                <a:latin typeface="Malgun Gothic" pitchFamily="34" charset="0"/>
+                <a:ea typeface="Malgun Gothic" pitchFamily="34" charset="-122"/>
+                <a:cs typeface="Malgun Gothic" pitchFamily="34" charset="-120"/>
+              </a:rPr>
+              <a:t>▶</a:t>
+            </a:r>
+            <a:endParaRPr lang="en-US" sz="1400" dirty="0"/>
+          </a:p>
+        </p:txBody>
+      </p:sp>
+      <p:sp>
+        <p:nvSpPr>
+          <p:cNvPr id="31" name="Text 26"/>
+          <p:cNvSpPr/>
+          <p:nvPr/>
+        </p:nvSpPr>
+        <p:spPr>
+          <a:xfrm>
+            <a:off x="7790688" y="5157216"/>
+            <a:ext cx="3657600" cy="804672"/>
+          </a:xfrm>
+          <a:prstGeom prst="roundRect">
+            <a:avLst>
+              <a:gd name="adj" fmla="val 9091"/>
+            </a:avLst>
+          </a:prstGeom>
+          <a:solidFill>
+            <a:srgbClr val="E8F6F0"/>
+          </a:solidFill>
+          <a:ln w="19050">
+            <a:solidFill>
+              <a:srgbClr val="02A878"/>
+            </a:solidFill>
+          </a:ln>
+        </p:spPr>
+        <p:txBody>
+          <a:bodyPr wrap="square" lIns="0" tIns="0" rIns="0" bIns="0" rtlCol="0" anchor="ctr"/>
+          <a:lstStyle/>
+          <a:p>
+            <a:pPr algn="ctr" indent="0" marL="0">
+              <a:lnSpc>
+                <a:spcPct val="108000"/>
+              </a:lnSpc>
+              <a:buNone/>
+            </a:pPr>
+            <a:r>
+              <a:rPr lang="en-US" sz="1350" b="1" dirty="0">
+                <a:solidFill>
+                  <a:srgbClr val="17313B"/>
+                </a:solidFill>
+                <a:latin typeface="Malgun Gothic" pitchFamily="34" charset="0"/>
+                <a:ea typeface="Malgun Gothic" pitchFamily="34" charset="-122"/>
+                <a:cs typeface="Malgun Gothic" pitchFamily="34" charset="-120"/>
+              </a:rPr>
+              <a:t>선순환 기대</a:t>
+            </a:r>
+            <a:endParaRPr lang="en-US" sz="1350" dirty="0"/>
+          </a:p>
+          <a:p>
+            <a:pPr algn="ctr" indent="0" marL="0">
+              <a:lnSpc>
+                <a:spcPct val="108000"/>
+              </a:lnSpc>
+              <a:buNone/>
+            </a:pPr>
+            <a:r>
               <a:rPr lang="en-US" sz="1150" dirty="0">
                 <a:solidFill>
                   <a:srgbClr val="5A7184"/>
@@ -7238,258 +7246,9 @@
                 <a:ea typeface="Malgun Gothic" pitchFamily="34" charset="-122"/>
                 <a:cs typeface="Malgun Gothic" pitchFamily="34" charset="-120"/>
               </a:rPr>
-              <a:t>Pod 1호 · 모델 v0.1</a:t>
-            </a:r>
-            <a:endParaRPr lang="en-US" sz="1150" dirty="0"/>
-          </a:p>
-        </p:txBody>
-      </p:sp>
-      <p:sp>
-        <p:nvSpPr>
-          <p:cNvPr id="30" name="Shape 25"/>
-          <p:cNvSpPr/>
-          <p:nvPr/>
-        </p:nvSpPr>
-        <p:spPr>
-          <a:xfrm>
-            <a:off x="6007608" y="4882896"/>
-            <a:ext cx="182880" cy="182880"/>
-          </a:xfrm>
-          <a:prstGeom prst="ellipse">
-            <a:avLst/>
-          </a:prstGeom>
-          <a:solidFill>
-            <a:srgbClr val="17313B"/>
-          </a:solidFill>
-          <a:ln/>
-        </p:spPr>
-      </p:sp>
-      <p:sp>
-        <p:nvSpPr>
-          <p:cNvPr id="31" name="Text 26"/>
-          <p:cNvSpPr/>
-          <p:nvPr/>
-        </p:nvSpPr>
-        <p:spPr>
-          <a:xfrm>
-            <a:off x="4818888" y="4572000"/>
-            <a:ext cx="2560320" cy="274320"/>
-          </a:xfrm>
-          <a:prstGeom prst="rect">
-            <a:avLst/>
-          </a:prstGeom>
-          <a:noFill/>
-          <a:ln/>
-        </p:spPr>
-        <p:txBody>
-          <a:bodyPr wrap="square" lIns="0" tIns="0" rIns="0" bIns="0" rtlCol="0" anchor="ctr"/>
-          <a:lstStyle/>
-          <a:p>
-            <a:pPr algn="ctr" indent="0" marL="0">
-              <a:buNone/>
-            </a:pPr>
-            <a:r>
-              <a:rPr lang="en-US" sz="1550" b="1" dirty="0">
-                <a:solidFill>
-                  <a:srgbClr val="17313B"/>
-                </a:solidFill>
-                <a:latin typeface="Malgun Gothic" pitchFamily="34" charset="0"/>
-                <a:ea typeface="Malgun Gothic" pitchFamily="34" charset="-122"/>
-                <a:cs typeface="Malgun Gothic" pitchFamily="34" charset="-120"/>
-              </a:rPr>
-              <a:t>1년 제도화</a:t>
-            </a:r>
-            <a:endParaRPr lang="en-US" sz="1550" dirty="0"/>
-          </a:p>
-        </p:txBody>
-      </p:sp>
-      <p:sp>
-        <p:nvSpPr>
-          <p:cNvPr id="32" name="Text 27"/>
-          <p:cNvSpPr/>
-          <p:nvPr/>
-        </p:nvSpPr>
-        <p:spPr>
-          <a:xfrm>
-            <a:off x="4727448" y="5138928"/>
-            <a:ext cx="2743200" cy="237744"/>
-          </a:xfrm>
-          <a:prstGeom prst="rect">
-            <a:avLst/>
-          </a:prstGeom>
-          <a:noFill/>
-          <a:ln/>
-        </p:spPr>
-        <p:txBody>
-          <a:bodyPr wrap="square" lIns="0" tIns="0" rIns="0" bIns="0" rtlCol="0" anchor="ctr"/>
-          <a:lstStyle/>
-          <a:p>
-            <a:pPr algn="ctr" indent="0" marL="0">
-              <a:buNone/>
-            </a:pPr>
-            <a:r>
-              <a:rPr lang="en-US" sz="1150" dirty="0">
-                <a:solidFill>
-                  <a:srgbClr val="5A7184"/>
-                </a:solidFill>
-                <a:latin typeface="Malgun Gothic" pitchFamily="34" charset="0"/>
-                <a:ea typeface="Malgun Gothic" pitchFamily="34" charset="-122"/>
-                <a:cs typeface="Malgun Gothic" pitchFamily="34" charset="-120"/>
-              </a:rPr>
-              <a:t>Pod 3~5 · 전략적 고객 계약 1건</a:t>
-            </a:r>
-            <a:endParaRPr lang="en-US" sz="1150" dirty="0"/>
-          </a:p>
-        </p:txBody>
-      </p:sp>
-      <p:sp>
-        <p:nvSpPr>
-          <p:cNvPr id="33" name="Shape 28"/>
-          <p:cNvSpPr/>
-          <p:nvPr/>
-        </p:nvSpPr>
-        <p:spPr>
-          <a:xfrm>
-            <a:off x="9628632" y="4882896"/>
-            <a:ext cx="182880" cy="182880"/>
-          </a:xfrm>
-          <a:prstGeom prst="ellipse">
-            <a:avLst/>
-          </a:prstGeom>
-          <a:solidFill>
-            <a:srgbClr val="17313B"/>
-          </a:solidFill>
-          <a:ln/>
-        </p:spPr>
-      </p:sp>
-      <p:sp>
-        <p:nvSpPr>
-          <p:cNvPr id="34" name="Text 29"/>
-          <p:cNvSpPr/>
-          <p:nvPr/>
-        </p:nvSpPr>
-        <p:spPr>
-          <a:xfrm>
-            <a:off x="8439912" y="4572000"/>
-            <a:ext cx="2560320" cy="274320"/>
-          </a:xfrm>
-          <a:prstGeom prst="rect">
-            <a:avLst/>
-          </a:prstGeom>
-          <a:noFill/>
-          <a:ln/>
-        </p:spPr>
-        <p:txBody>
-          <a:bodyPr wrap="square" lIns="0" tIns="0" rIns="0" bIns="0" rtlCol="0" anchor="ctr"/>
-          <a:lstStyle/>
-          <a:p>
-            <a:pPr algn="ctr" indent="0" marL="0">
-              <a:buNone/>
-            </a:pPr>
-            <a:r>
-              <a:rPr lang="en-US" sz="1550" b="1" dirty="0">
-                <a:solidFill>
-                  <a:srgbClr val="17313B"/>
-                </a:solidFill>
-                <a:latin typeface="Malgun Gothic" pitchFamily="34" charset="0"/>
-                <a:ea typeface="Malgun Gothic" pitchFamily="34" charset="-122"/>
-                <a:cs typeface="Malgun Gothic" pitchFamily="34" charset="-120"/>
-              </a:rPr>
-              <a:t>3년 표준화</a:t>
-            </a:r>
-            <a:endParaRPr lang="en-US" sz="1550" dirty="0"/>
-          </a:p>
-        </p:txBody>
-      </p:sp>
-      <p:sp>
-        <p:nvSpPr>
-          <p:cNvPr id="35" name="Text 30"/>
-          <p:cNvSpPr/>
-          <p:nvPr/>
-        </p:nvSpPr>
-        <p:spPr>
-          <a:xfrm>
-            <a:off x="8348472" y="5138928"/>
-            <a:ext cx="2743200" cy="237744"/>
-          </a:xfrm>
-          <a:prstGeom prst="rect">
-            <a:avLst/>
-          </a:prstGeom>
-          <a:noFill/>
-          <a:ln/>
-        </p:spPr>
-        <p:txBody>
-          <a:bodyPr wrap="square" lIns="0" tIns="0" rIns="0" bIns="0" rtlCol="0" anchor="ctr"/>
-          <a:lstStyle/>
-          <a:p>
-            <a:pPr algn="ctr" indent="0" marL="0">
-              <a:buNone/>
-            </a:pPr>
-            <a:r>
-              <a:rPr lang="en-US" sz="1150" dirty="0">
-                <a:solidFill>
-                  <a:srgbClr val="5A7184"/>
-                </a:solidFill>
-                <a:latin typeface="Malgun Gothic" pitchFamily="34" charset="0"/>
-                <a:ea typeface="Malgun Gothic" pitchFamily="34" charset="-122"/>
-                <a:cs typeface="Malgun Gothic" pitchFamily="34" charset="-120"/>
-              </a:rPr>
-              <a:t>플랫폼 · 커스텀 30%+</a:t>
-            </a:r>
-            <a:endParaRPr lang="en-US" sz="1150" dirty="0"/>
-          </a:p>
-        </p:txBody>
-      </p:sp>
-      <p:sp>
-        <p:nvSpPr>
-          <p:cNvPr id="36" name="Text 31"/>
-          <p:cNvSpPr/>
-          <p:nvPr/>
-        </p:nvSpPr>
-        <p:spPr>
-          <a:xfrm>
-            <a:off x="457200" y="5596128"/>
-            <a:ext cx="11274552" cy="548640"/>
-          </a:xfrm>
-          <a:prstGeom prst="rect">
-            <a:avLst/>
-          </a:prstGeom>
-          <a:noFill/>
-          <a:ln/>
-        </p:spPr>
-        <p:txBody>
-          <a:bodyPr wrap="square" lIns="0" tIns="0" rIns="0" bIns="0" rtlCol="0" anchor="ctr"/>
-          <a:lstStyle/>
-          <a:p>
-            <a:pPr algn="ctr" indent="0" marL="0">
-              <a:buNone/>
-            </a:pPr>
-            <a:r>
-              <a:rPr lang="en-US" sz="3200" b="1" dirty="0">
-                <a:solidFill>
-                  <a:srgbClr val="028090"/>
-                </a:solidFill>
-                <a:latin typeface="Malgun Gothic" pitchFamily="34" charset="0"/>
-                <a:ea typeface="Malgun Gothic" pitchFamily="34" charset="-122"/>
-                <a:cs typeface="Malgun Gothic" pitchFamily="34" charset="-120"/>
-              </a:rPr>
-              <a:t>$100B</a:t>
-            </a:r>
-            <a:pPr algn="ctr" indent="0" marL="0">
-              <a:buNone/>
-            </a:pPr>
-            <a:r>
-              <a:rPr lang="en-US" sz="1400" dirty="0">
-                <a:solidFill>
-                  <a:srgbClr val="5A7184"/>
-                </a:solidFill>
-                <a:latin typeface="Malgun Gothic" pitchFamily="34" charset="0"/>
-                <a:ea typeface="Malgun Gothic" pitchFamily="34" charset="-122"/>
-                <a:cs typeface="Malgun Gothic" pitchFamily="34" charset="-120"/>
-              </a:rPr>
-              <a:t>   전략적 고객 계약 최소 계약매출 — 공동설계 없이는 참여할 수 없는 시장 (Micron IR, 2026-06)</a:t>
-            </a:r>
-            <a:endParaRPr lang="en-US" sz="3200" dirty="0"/>
+              <a:t>스타 영입 축적 → 조직 전반 수준 상향</a:t>
+            </a:r>
+            <a:endParaRPr lang="en-US" sz="1350" dirty="0"/>
           </a:p>
         </p:txBody>
       </p:sp>

--- a/outputs/presentation/dev-transformation-summary.pptx
+++ b/outputs/presentation/dev-transformation-summary.pptx
@@ -8,9 +8,11 @@
     <p:sldId id="256" r:id="rId2"/>
     <p:sldId id="257" r:id="rId3"/>
     <p:sldId id="258" r:id="rId4"/>
+    <p:sldId id="259" r:id="rId5"/>
+    <p:sldId id="260" r:id="rId6"/>
   </p:sldIdLst>
   <p:notesMasterIdLst>
-    <p:notesMasterId r:id="rId5"/>
+    <p:notesMasterId r:id="rId7"/>
   </p:notesMasterIdLst>
   <p:sldSz cx="12192000" cy="6858000"/>
   <p:notesSz cx="6858000" cy="12192000"/>
@@ -722,6 +724,182 @@
 </p:notes>
 </file>
 
+<file path=ppt/notesSlides/notesSlide4.xml><?xml version="1.0" encoding="utf-8"?>
+<p:notes xmlns:a="http://schemas.openxmlformats.org/drawingml/2006/main" xmlns:r="http://schemas.openxmlformats.org/officeDocument/2006/relationships" xmlns:p="http://schemas.openxmlformats.org/presentationml/2006/main">
+  <p:cSld>
+    <p:spTree>
+      <p:nvGrpSpPr>
+        <p:cNvPr id="1" name=""/>
+        <p:cNvGrpSpPr/>
+        <p:nvPr/>
+      </p:nvGrpSpPr>
+      <p:grpSpPr>
+        <a:xfrm>
+          <a:off x="0" y="0"/>
+          <a:ext cx="0" cy="0"/>
+          <a:chOff x="0" y="0"/>
+          <a:chExt cx="0" cy="0"/>
+        </a:xfrm>
+      </p:grpSpPr>
+      <p:sp>
+        <p:nvSpPr>
+          <p:cNvPr id="2" name="Slide Image Placeholder 1"/>
+          <p:cNvSpPr>
+            <a:spLocks noGrp="1" noRot="1" noChangeAspect="1"/>
+          </p:cNvSpPr>
+          <p:nvPr>
+            <p:ph type="sldImg"/>
+          </p:nvPr>
+        </p:nvSpPr>
+        <p:spPr/>
+      </p:sp>
+      <p:sp>
+        <p:nvSpPr>
+          <p:cNvPr id="3" name="Notes Placeholder 2"/>
+          <p:cNvSpPr>
+            <a:spLocks noGrp="1"/>
+          </p:cNvSpPr>
+          <p:nvPr>
+            <p:ph type="body" idx="1"/>
+          </p:nvPr>
+        </p:nvSpPr>
+        <p:spPr/>
+        <p:txBody>
+          <a:bodyPr/>
+          <a:lstStyle/>
+          <a:p>
+            <a:r>
+              <a:rPr lang="en-US" dirty="0"/>
+              <a:t/>
+            </a:r>
+            <a:endParaRPr lang="en-US" dirty="0"/>
+          </a:p>
+        </p:txBody>
+      </p:sp>
+      <p:sp>
+        <p:nvSpPr>
+          <p:cNvPr id="4" name="Slide Number Placeholder 3"/>
+          <p:cNvSpPr>
+            <a:spLocks noGrp="1"/>
+          </p:cNvSpPr>
+          <p:nvPr>
+            <p:ph type="sldNum" sz="quarter" idx="10"/>
+          </p:nvPr>
+        </p:nvSpPr>
+        <p:spPr/>
+        <p:txBody>
+          <a:bodyPr/>
+          <a:lstStyle/>
+          <a:p>
+            <a:fld id="{F7021451-1387-4CA6-816F-3879F97B5CBC}" type="slidenum">
+              <a:rPr lang="en-US"/>
+              <a:t>4</a:t>
+            </a:fld>
+            <a:endParaRPr lang="en-US"/>
+          </a:p>
+        </p:txBody>
+      </p:sp>
+    </p:spTree>
+    <p:extLst>
+      <p:ext uri="{BB962C8B-B14F-4D97-AF65-F5344CB8AC3E}">
+        <p14:creationId xmlns:p14="http://schemas.microsoft.com/office/powerpoint/2010/main" val="1024086991"/>
+      </p:ext>
+    </p:extLst>
+  </p:cSld>
+  <p:clrMapOvr>
+    <a:masterClrMapping/>
+  </p:clrMapOvr>
+</p:notes>
+</file>
+
+<file path=ppt/notesSlides/notesSlide5.xml><?xml version="1.0" encoding="utf-8"?>
+<p:notes xmlns:a="http://schemas.openxmlformats.org/drawingml/2006/main" xmlns:r="http://schemas.openxmlformats.org/officeDocument/2006/relationships" xmlns:p="http://schemas.openxmlformats.org/presentationml/2006/main">
+  <p:cSld>
+    <p:spTree>
+      <p:nvGrpSpPr>
+        <p:cNvPr id="1" name=""/>
+        <p:cNvGrpSpPr/>
+        <p:nvPr/>
+      </p:nvGrpSpPr>
+      <p:grpSpPr>
+        <a:xfrm>
+          <a:off x="0" y="0"/>
+          <a:ext cx="0" cy="0"/>
+          <a:chOff x="0" y="0"/>
+          <a:chExt cx="0" cy="0"/>
+        </a:xfrm>
+      </p:grpSpPr>
+      <p:sp>
+        <p:nvSpPr>
+          <p:cNvPr id="2" name="Slide Image Placeholder 1"/>
+          <p:cNvSpPr>
+            <a:spLocks noGrp="1" noRot="1" noChangeAspect="1"/>
+          </p:cNvSpPr>
+          <p:nvPr>
+            <p:ph type="sldImg"/>
+          </p:nvPr>
+        </p:nvSpPr>
+        <p:spPr/>
+      </p:sp>
+      <p:sp>
+        <p:nvSpPr>
+          <p:cNvPr id="3" name="Notes Placeholder 2"/>
+          <p:cNvSpPr>
+            <a:spLocks noGrp="1"/>
+          </p:cNvSpPr>
+          <p:nvPr>
+            <p:ph type="body" idx="1"/>
+          </p:nvPr>
+        </p:nvSpPr>
+        <p:spPr/>
+        <p:txBody>
+          <a:bodyPr/>
+          <a:lstStyle/>
+          <a:p>
+            <a:r>
+              <a:rPr lang="en-US" dirty="0"/>
+              <a:t/>
+            </a:r>
+            <a:endParaRPr lang="en-US" dirty="0"/>
+          </a:p>
+        </p:txBody>
+      </p:sp>
+      <p:sp>
+        <p:nvSpPr>
+          <p:cNvPr id="4" name="Slide Number Placeholder 3"/>
+          <p:cNvSpPr>
+            <a:spLocks noGrp="1"/>
+          </p:cNvSpPr>
+          <p:nvPr>
+            <p:ph type="sldNum" sz="quarter" idx="10"/>
+          </p:nvPr>
+        </p:nvSpPr>
+        <p:spPr/>
+        <p:txBody>
+          <a:bodyPr/>
+          <a:lstStyle/>
+          <a:p>
+            <a:fld id="{F7021451-1387-4CA6-816F-3879F97B5CBC}" type="slidenum">
+              <a:rPr lang="en-US"/>
+              <a:t>5</a:t>
+            </a:fld>
+            <a:endParaRPr lang="en-US"/>
+          </a:p>
+        </p:txBody>
+      </p:sp>
+    </p:spTree>
+    <p:extLst>
+      <p:ext uri="{BB962C8B-B14F-4D97-AF65-F5344CB8AC3E}">
+        <p14:creationId xmlns:p14="http://schemas.microsoft.com/office/powerpoint/2010/main" val="1024086991"/>
+      </p:ext>
+    </p:extLst>
+  </p:cSld>
+  <p:clrMapOvr>
+    <a:masterClrMapping/>
+  </p:clrMapOvr>
+</p:notes>
+</file>
+
 <file path=ppt/slideLayouts/slideLayout1.xml><?xml version="1.0" encoding="utf-8"?>
 <p:sldLayout xmlns:a="http://schemas.openxmlformats.org/drawingml/2006/main" xmlns:r="http://schemas.openxmlformats.org/officeDocument/2006/relationships" xmlns:p="http://schemas.openxmlformats.org/presentationml/2006/main" preserve="1">
   <p:cSld name="DEFAULT">
@@ -1055,7 +1233,7 @@
         <p:spPr>
           <a:xfrm>
             <a:off x="457200" y="237744"/>
-            <a:ext cx="9692640" cy="566928"/>
+            <a:ext cx="9994392" cy="566928"/>
           </a:xfrm>
           <a:prstGeom prst="rect">
             <a:avLst/>
@@ -3860,7 +4038,7 @@
         <p:spPr>
           <a:xfrm>
             <a:off x="457200" y="237744"/>
-            <a:ext cx="9692640" cy="566928"/>
+            <a:ext cx="9994392" cy="566928"/>
           </a:xfrm>
           <a:prstGeom prst="rect">
             <a:avLst/>
@@ -6093,7 +6271,7 @@
         <p:spPr>
           <a:xfrm>
             <a:off x="457200" y="237744"/>
-            <a:ext cx="9692640" cy="566928"/>
+            <a:ext cx="9994392" cy="566928"/>
           </a:xfrm>
           <a:prstGeom prst="rect">
             <a:avLst/>
@@ -7249,6 +7427,2761 @@
               <a:t>스타 영입 축적 → 조직 전반 수준 상향</a:t>
             </a:r>
             <a:endParaRPr lang="en-US" sz="1350" dirty="0"/>
+          </a:p>
+        </p:txBody>
+      </p:sp>
+    </p:spTree>
+  </p:cSld>
+  <p:clrMapOvr>
+    <a:masterClrMapping/>
+  </p:clrMapOvr>
+</p:sld>
+</file>
+
+<file path=ppt/slides/slide4.xml><?xml version="1.0" encoding="utf-8"?>
+<p:sld xmlns:a="http://schemas.openxmlformats.org/drawingml/2006/main" xmlns:r="http://schemas.openxmlformats.org/officeDocument/2006/relationships" xmlns:p="http://schemas.openxmlformats.org/presentationml/2006/main">
+  <p:cSld name="Slide 4">
+    <p:spTree>
+      <p:nvGrpSpPr>
+        <p:cNvPr id="1" name=""/>
+        <p:cNvGrpSpPr/>
+        <p:nvPr/>
+      </p:nvGrpSpPr>
+      <p:grpSpPr>
+        <a:xfrm>
+          <a:off x="0" y="0"/>
+          <a:ext cx="0" cy="0"/>
+          <a:chOff x="0" y="0"/>
+          <a:chExt cx="0" cy="0"/>
+        </a:xfrm>
+      </p:grpSpPr>
+      <p:sp>
+        <p:nvSpPr>
+          <p:cNvPr id="2" name="Text 0"/>
+          <p:cNvSpPr/>
+          <p:nvPr/>
+        </p:nvSpPr>
+        <p:spPr>
+          <a:xfrm>
+            <a:off x="457200" y="237744"/>
+            <a:ext cx="9765792" cy="566928"/>
+          </a:xfrm>
+          <a:prstGeom prst="rect">
+            <a:avLst/>
+          </a:prstGeom>
+          <a:noFill/>
+          <a:ln/>
+        </p:spPr>
+        <p:txBody>
+          <a:bodyPr wrap="square" lIns="0" tIns="0" rIns="0" bIns="0" rtlCol="0" anchor="ctr"/>
+          <a:lstStyle/>
+          <a:p>
+            <a:pPr indent="0" marL="0">
+              <a:buNone/>
+            </a:pPr>
+            <a:r>
+              <a:rPr lang="en-US" sz="3200" b="1" dirty="0">
+                <a:solidFill>
+                  <a:srgbClr val="17313B"/>
+                </a:solidFill>
+                <a:latin typeface="Malgun Gothic" pitchFamily="34" charset="0"/>
+                <a:ea typeface="Malgun Gothic" pitchFamily="34" charset="-122"/>
+                <a:cs typeface="Malgun Gothic" pitchFamily="34" charset="-120"/>
+              </a:rPr>
+              <a:t>제품·기술 축 — FDP Host–SSD 통합 플랫폼</a:t>
+            </a:r>
+            <a:endParaRPr lang="en-US" sz="3200" dirty="0"/>
+          </a:p>
+        </p:txBody>
+      </p:sp>
+      <p:sp>
+        <p:nvSpPr>
+          <p:cNvPr id="3" name="Text 1"/>
+          <p:cNvSpPr/>
+          <p:nvPr/>
+        </p:nvSpPr>
+        <p:spPr>
+          <a:xfrm>
+            <a:off x="10268712" y="310896"/>
+            <a:ext cx="1463040" cy="420624"/>
+          </a:xfrm>
+          <a:prstGeom prst="roundRect">
+            <a:avLst>
+              <a:gd name="adj" fmla="val 21739"/>
+            </a:avLst>
+          </a:prstGeom>
+          <a:solidFill>
+            <a:srgbClr val="EFF3F5"/>
+          </a:solidFill>
+          <a:ln/>
+        </p:spPr>
+        <p:txBody>
+          <a:bodyPr wrap="square" lIns="0" tIns="0" rIns="0" bIns="0" rtlCol="0" anchor="ctr"/>
+          <a:lstStyle/>
+          <a:p>
+            <a:pPr algn="ctr" indent="0" marL="0">
+              <a:buNone/>
+            </a:pPr>
+            <a:r>
+              <a:rPr lang="en-US" sz="1400" b="1" dirty="0">
+                <a:solidFill>
+                  <a:srgbClr val="5A7184"/>
+                </a:solidFill>
+                <a:latin typeface="Malgun Gothic" pitchFamily="34" charset="0"/>
+                <a:ea typeface="Malgun Gothic" pitchFamily="34" charset="-122"/>
+                <a:cs typeface="Malgun Gothic" pitchFamily="34" charset="-120"/>
+              </a:rPr>
+              <a:t>제품 축 ①</a:t>
+            </a:r>
+            <a:endParaRPr lang="en-US" sz="1400" dirty="0"/>
+          </a:p>
+        </p:txBody>
+      </p:sp>
+      <p:sp>
+        <p:nvSpPr>
+          <p:cNvPr id="4" name="Text 2"/>
+          <p:cNvSpPr/>
+          <p:nvPr/>
+        </p:nvSpPr>
+        <p:spPr>
+          <a:xfrm>
+            <a:off x="457200" y="6510528"/>
+            <a:ext cx="6949440" cy="256032"/>
+          </a:xfrm>
+          <a:prstGeom prst="rect">
+            <a:avLst/>
+          </a:prstGeom>
+          <a:noFill/>
+          <a:ln/>
+        </p:spPr>
+        <p:txBody>
+          <a:bodyPr wrap="square" lIns="0" tIns="0" rIns="0" bIns="0" rtlCol="0" anchor="ctr"/>
+          <a:lstStyle/>
+          <a:p>
+            <a:pPr indent="0" marL="0">
+              <a:buNone/>
+            </a:pPr>
+            <a:r>
+              <a:rPr lang="en-US" sz="1000" dirty="0">
+                <a:solidFill>
+                  <a:srgbClr val="5A7184"/>
+                </a:solidFill>
+                <a:latin typeface="Malgun Gothic" pitchFamily="34" charset="0"/>
+                <a:ea typeface="Malgun Gothic" pitchFamily="34" charset="-122"/>
+                <a:cs typeface="Malgun Gothic" pitchFamily="34" charset="-120"/>
+              </a:rPr>
+              <a:t>삼성전자 메모리사업부 · 개발실 체질 전환 전략 요약 · 2026-07-24</a:t>
+            </a:r>
+            <a:endParaRPr lang="en-US" sz="1000" dirty="0"/>
+          </a:p>
+        </p:txBody>
+      </p:sp>
+      <p:sp>
+        <p:nvSpPr>
+          <p:cNvPr id="5" name="Text 3"/>
+          <p:cNvSpPr/>
+          <p:nvPr/>
+        </p:nvSpPr>
+        <p:spPr>
+          <a:xfrm>
+            <a:off x="7589520" y="6510528"/>
+            <a:ext cx="4142232" cy="256032"/>
+          </a:xfrm>
+          <a:prstGeom prst="rect">
+            <a:avLst/>
+          </a:prstGeom>
+          <a:noFill/>
+          <a:ln/>
+        </p:spPr>
+        <p:txBody>
+          <a:bodyPr wrap="square" lIns="0" tIns="0" rIns="0" bIns="0" rtlCol="0" anchor="ctr"/>
+          <a:lstStyle/>
+          <a:p>
+            <a:pPr algn="r" indent="0" marL="0">
+              <a:buNone/>
+            </a:pPr>
+            <a:r>
+              <a:rPr lang="en-US" sz="1000" dirty="0">
+                <a:solidFill>
+                  <a:srgbClr val="5A7184"/>
+                </a:solidFill>
+                <a:latin typeface="Malgun Gothic" pitchFamily="34" charset="0"/>
+                <a:ea typeface="Malgun Gothic" pitchFamily="34" charset="-122"/>
+                <a:cs typeface="Malgun Gothic" pitchFamily="34" charset="-120"/>
+              </a:rPr>
+              <a:t>원천: wiki/strategies/fdp-host-ssd-platform.md</a:t>
+            </a:r>
+            <a:endParaRPr lang="en-US" sz="1000" dirty="0"/>
+          </a:p>
+        </p:txBody>
+      </p:sp>
+      <p:sp>
+        <p:nvSpPr>
+          <p:cNvPr id="6" name="Text 4"/>
+          <p:cNvSpPr/>
+          <p:nvPr/>
+        </p:nvSpPr>
+        <p:spPr>
+          <a:xfrm>
+            <a:off x="457200" y="859536"/>
+            <a:ext cx="11274552" cy="512064"/>
+          </a:xfrm>
+          <a:prstGeom prst="roundRect">
+            <a:avLst>
+              <a:gd name="adj" fmla="val 16071"/>
+            </a:avLst>
+          </a:prstGeom>
+          <a:solidFill>
+            <a:srgbClr val="F5F7F8"/>
+          </a:solidFill>
+          <a:ln/>
+        </p:spPr>
+        <p:txBody>
+          <a:bodyPr wrap="square" lIns="0" tIns="0" rIns="0" bIns="0" rtlCol="0" anchor="ctr"/>
+          <a:lstStyle/>
+          <a:p>
+            <a:pPr algn="ctr" indent="0" marL="0">
+              <a:buNone/>
+            </a:pPr>
+            <a:r>
+              <a:rPr lang="en-US" sz="1650" i="1" dirty="0">
+                <a:solidFill>
+                  <a:srgbClr val="17313B"/>
+                </a:solidFill>
+                <a:latin typeface="Malgun Gothic" pitchFamily="34" charset="0"/>
+                <a:ea typeface="Malgun Gothic" pitchFamily="34" charset="-122"/>
+                <a:cs typeface="Malgun Gothic" pitchFamily="34" charset="-120"/>
+              </a:rPr>
+              <a:t>“Binding으로 수요를 확보하고, FDP로 제품을 표준화하며, 시스템 소프트웨어로 고객 워크로드를 연결한다”</a:t>
+            </a:r>
+            <a:endParaRPr lang="en-US" sz="1650" dirty="0"/>
+          </a:p>
+        </p:txBody>
+      </p:sp>
+      <p:sp>
+        <p:nvSpPr>
+          <p:cNvPr id="7" name="Shape 5"/>
+          <p:cNvSpPr/>
+          <p:nvPr/>
+        </p:nvSpPr>
+        <p:spPr>
+          <a:xfrm>
+            <a:off x="2011680" y="1517904"/>
+            <a:ext cx="3200400" cy="1371600"/>
+          </a:xfrm>
+          <a:prstGeom prst="roundRect">
+            <a:avLst>
+              <a:gd name="adj" fmla="val 6667"/>
+            </a:avLst>
+          </a:prstGeom>
+          <a:solidFill>
+            <a:srgbClr val="F5F7F8"/>
+          </a:solidFill>
+          <a:ln w="15875">
+            <a:solidFill>
+              <a:srgbClr val="DCE4E9"/>
+            </a:solidFill>
+            <a:prstDash val="solid"/>
+          </a:ln>
+        </p:spPr>
+      </p:sp>
+      <p:sp>
+        <p:nvSpPr>
+          <p:cNvPr id="8" name="Shape 6"/>
+          <p:cNvSpPr/>
+          <p:nvPr/>
+        </p:nvSpPr>
+        <p:spPr>
+          <a:xfrm>
+            <a:off x="3401568" y="1645920"/>
+            <a:ext cx="420624" cy="420624"/>
+          </a:xfrm>
+          <a:prstGeom prst="ellipse">
+            <a:avLst/>
+          </a:prstGeom>
+          <a:solidFill>
+            <a:srgbClr val="5A7184"/>
+          </a:solidFill>
+          <a:ln/>
+        </p:spPr>
+      </p:sp>
+      <p:pic>
+        <p:nvPicPr>
+          <p:cNvPr id="9" name="Image 0" descr="preencoded.png">    </p:cNvPr>
+          <p:cNvPicPr>
+            <a:picLocks noChangeAspect="1"/>
+          </p:cNvPicPr>
+          <p:nvPr/>
+        </p:nvPicPr>
+        <p:blipFill>
+          <a:blip r:embed="rId1"/>
+          <a:stretch>
+            <a:fillRect/>
+          </a:stretch>
+        </p:blipFill>
+        <p:spPr>
+          <a:xfrm>
+            <a:off x="3502518" y="1746870"/>
+            <a:ext cx="218724" cy="218724"/>
+          </a:xfrm>
+          <a:prstGeom prst="rect">
+            <a:avLst/>
+          </a:prstGeom>
+        </p:spPr>
+      </p:pic>
+      <p:sp>
+        <p:nvSpPr>
+          <p:cNvPr id="10" name="Text 7"/>
+          <p:cNvSpPr/>
+          <p:nvPr/>
+        </p:nvSpPr>
+        <p:spPr>
+          <a:xfrm>
+            <a:off x="2103120" y="2103120"/>
+            <a:ext cx="3017520" cy="329184"/>
+          </a:xfrm>
+          <a:prstGeom prst="rect">
+            <a:avLst/>
+          </a:prstGeom>
+          <a:noFill/>
+          <a:ln/>
+        </p:spPr>
+        <p:txBody>
+          <a:bodyPr wrap="square" lIns="0" tIns="0" rIns="0" bIns="0" rtlCol="0" anchor="ctr"/>
+          <a:lstStyle/>
+          <a:p>
+            <a:pPr algn="ctr" indent="0" marL="0">
+              <a:buNone/>
+            </a:pPr>
+            <a:r>
+              <a:rPr lang="en-US" sz="1900" b="1" dirty="0">
+                <a:solidFill>
+                  <a:srgbClr val="5A7184"/>
+                </a:solidFill>
+                <a:latin typeface="Malgun Gothic" pitchFamily="34" charset="0"/>
+                <a:ea typeface="Malgun Gothic" pitchFamily="34" charset="-122"/>
+                <a:cs typeface="Malgun Gothic" pitchFamily="34" charset="-120"/>
+              </a:rPr>
+              <a:t>FDP SSD 공급자</a:t>
+            </a:r>
+            <a:endParaRPr lang="en-US" sz="1900" dirty="0"/>
+          </a:p>
+        </p:txBody>
+      </p:sp>
+      <p:sp>
+        <p:nvSpPr>
+          <p:cNvPr id="11" name="Text 8"/>
+          <p:cNvSpPr/>
+          <p:nvPr/>
+        </p:nvSpPr>
+        <p:spPr>
+          <a:xfrm>
+            <a:off x="2103120" y="2468880"/>
+            <a:ext cx="3017520" cy="256032"/>
+          </a:xfrm>
+          <a:prstGeom prst="rect">
+            <a:avLst/>
+          </a:prstGeom>
+          <a:noFill/>
+          <a:ln/>
+        </p:spPr>
+        <p:txBody>
+          <a:bodyPr wrap="square" lIns="0" tIns="0" rIns="0" bIns="0" rtlCol="0" anchor="ctr"/>
+          <a:lstStyle/>
+          <a:p>
+            <a:pPr algn="ctr" indent="0" marL="0">
+              <a:buNone/>
+            </a:pPr>
+            <a:r>
+              <a:rPr lang="en-US" sz="1150" dirty="0">
+                <a:solidFill>
+                  <a:srgbClr val="5A7184"/>
+                </a:solidFill>
+                <a:latin typeface="Malgun Gothic" pitchFamily="34" charset="0"/>
+                <a:ea typeface="Malgun Gothic" pitchFamily="34" charset="-122"/>
+                <a:cs typeface="Malgun Gothic" pitchFamily="34" charset="-120"/>
+              </a:rPr>
+              <a:t>여러 공급사 중 하나 · 가격 경쟁 노출</a:t>
+            </a:r>
+            <a:endParaRPr lang="en-US" sz="1150" dirty="0"/>
+          </a:p>
+        </p:txBody>
+      </p:sp>
+      <p:sp>
+        <p:nvSpPr>
+          <p:cNvPr id="12" name="Text 9"/>
+          <p:cNvSpPr/>
+          <p:nvPr/>
+        </p:nvSpPr>
+        <p:spPr>
+          <a:xfrm>
+            <a:off x="5285232" y="1792224"/>
+            <a:ext cx="1591056" cy="822960"/>
+          </a:xfrm>
+          <a:prstGeom prst="rightArrow">
+            <a:avLst/>
+          </a:prstGeom>
+          <a:solidFill>
+            <a:srgbClr val="028090"/>
+          </a:solidFill>
+          <a:ln/>
+        </p:spPr>
+        <p:txBody>
+          <a:bodyPr wrap="square" lIns="0" tIns="0" rIns="0" bIns="0" rtlCol="0" anchor="ctr"/>
+          <a:lstStyle/>
+          <a:p>
+            <a:pPr algn="ctr" indent="0" marL="0">
+              <a:buNone/>
+            </a:pPr>
+            <a:r>
+              <a:rPr lang="en-US" sz="1200" b="1" dirty="0">
+                <a:solidFill>
+                  <a:srgbClr val="FFFFFF"/>
+                </a:solidFill>
+                <a:latin typeface="Malgun Gothic" pitchFamily="34" charset="0"/>
+                <a:ea typeface="Malgun Gothic" pitchFamily="34" charset="-122"/>
+                <a:cs typeface="Malgun Gothic" pitchFamily="34" charset="-120"/>
+              </a:rPr>
+              <a:t>+ 시스템 SW</a:t>
+            </a:r>
+            <a:endParaRPr lang="en-US" sz="1200" dirty="0"/>
+          </a:p>
+        </p:txBody>
+      </p:sp>
+      <p:sp>
+        <p:nvSpPr>
+          <p:cNvPr id="13" name="Shape 10"/>
+          <p:cNvSpPr/>
+          <p:nvPr/>
+        </p:nvSpPr>
+        <p:spPr>
+          <a:xfrm>
+            <a:off x="6949440" y="1517904"/>
+            <a:ext cx="3200400" cy="1371600"/>
+          </a:xfrm>
+          <a:prstGeom prst="roundRect">
+            <a:avLst>
+              <a:gd name="adj" fmla="val 6667"/>
+            </a:avLst>
+          </a:prstGeom>
+          <a:solidFill>
+            <a:srgbClr val="E8F6F0"/>
+          </a:solidFill>
+          <a:ln w="19050">
+            <a:solidFill>
+              <a:srgbClr val="02A878"/>
+            </a:solidFill>
+            <a:prstDash val="solid"/>
+          </a:ln>
+        </p:spPr>
+      </p:sp>
+      <p:sp>
+        <p:nvSpPr>
+          <p:cNvPr id="14" name="Shape 11"/>
+          <p:cNvSpPr/>
+          <p:nvPr/>
+        </p:nvSpPr>
+        <p:spPr>
+          <a:xfrm>
+            <a:off x="8339328" y="1645920"/>
+            <a:ext cx="420624" cy="420624"/>
+          </a:xfrm>
+          <a:prstGeom prst="ellipse">
+            <a:avLst/>
+          </a:prstGeom>
+          <a:solidFill>
+            <a:srgbClr val="02A878"/>
+          </a:solidFill>
+          <a:ln/>
+        </p:spPr>
+      </p:sp>
+      <p:pic>
+        <p:nvPicPr>
+          <p:cNvPr id="15" name="Image 1" descr="preencoded.png">    </p:cNvPr>
+          <p:cNvPicPr>
+            <a:picLocks noChangeAspect="1"/>
+          </p:cNvPicPr>
+          <p:nvPr/>
+        </p:nvPicPr>
+        <p:blipFill>
+          <a:blip r:embed="rId2"/>
+          <a:stretch>
+            <a:fillRect/>
+          </a:stretch>
+        </p:blipFill>
+        <p:spPr>
+          <a:xfrm>
+            <a:off x="8440278" y="1746870"/>
+            <a:ext cx="218724" cy="218724"/>
+          </a:xfrm>
+          <a:prstGeom prst="rect">
+            <a:avLst/>
+          </a:prstGeom>
+        </p:spPr>
+      </p:pic>
+      <p:sp>
+        <p:nvSpPr>
+          <p:cNvPr id="16" name="Text 12"/>
+          <p:cNvSpPr/>
+          <p:nvPr/>
+        </p:nvSpPr>
+        <p:spPr>
+          <a:xfrm>
+            <a:off x="7040880" y="2103120"/>
+            <a:ext cx="3017520" cy="329184"/>
+          </a:xfrm>
+          <a:prstGeom prst="rect">
+            <a:avLst/>
+          </a:prstGeom>
+          <a:noFill/>
+          <a:ln/>
+        </p:spPr>
+        <p:txBody>
+          <a:bodyPr wrap="square" lIns="0" tIns="0" rIns="0" bIns="0" rtlCol="0" anchor="ctr"/>
+          <a:lstStyle/>
+          <a:p>
+            <a:pPr algn="ctr" indent="0" marL="0">
+              <a:buNone/>
+            </a:pPr>
+            <a:r>
+              <a:rPr lang="en-US" sz="1900" b="1" dirty="0">
+                <a:solidFill>
+                  <a:srgbClr val="02A878"/>
+                </a:solidFill>
+                <a:latin typeface="Malgun Gothic" pitchFamily="34" charset="0"/>
+                <a:ea typeface="Malgun Gothic" pitchFamily="34" charset="-122"/>
+                <a:cs typeface="Malgun Gothic" pitchFamily="34" charset="-120"/>
+              </a:rPr>
+              <a:t>통합 솔루션 제공자</a:t>
+            </a:r>
+            <a:endParaRPr lang="en-US" sz="1900" dirty="0"/>
+          </a:p>
+        </p:txBody>
+      </p:sp>
+      <p:sp>
+        <p:nvSpPr>
+          <p:cNvPr id="17" name="Text 13"/>
+          <p:cNvSpPr/>
+          <p:nvPr/>
+        </p:nvSpPr>
+        <p:spPr>
+          <a:xfrm>
+            <a:off x="6949440" y="2468880"/>
+            <a:ext cx="3200400" cy="256032"/>
+          </a:xfrm>
+          <a:prstGeom prst="rect">
+            <a:avLst/>
+          </a:prstGeom>
+          <a:noFill/>
+          <a:ln/>
+        </p:spPr>
+        <p:txBody>
+          <a:bodyPr wrap="square" lIns="0" tIns="0" rIns="0" bIns="0" rtlCol="0" anchor="ctr"/>
+          <a:lstStyle/>
+          <a:p>
+            <a:pPr algn="ctr" indent="0" marL="0">
+              <a:buNone/>
+            </a:pPr>
+            <a:r>
+              <a:rPr lang="en-US" sz="1150" dirty="0">
+                <a:solidFill>
+                  <a:srgbClr val="17313B"/>
+                </a:solidFill>
+                <a:latin typeface="Malgun Gothic" pitchFamily="34" charset="0"/>
+                <a:ea typeface="Malgun Gothic" pitchFamily="34" charset="-122"/>
+                <a:cs typeface="Malgun Gothic" pitchFamily="34" charset="-120"/>
+              </a:rPr>
+              <a:t>Host SDK · Profiler · End-to-End 검증</a:t>
+            </a:r>
+            <a:endParaRPr lang="en-US" sz="1150" dirty="0"/>
+          </a:p>
+        </p:txBody>
+      </p:sp>
+      <p:sp>
+        <p:nvSpPr>
+          <p:cNvPr id="18" name="Text 14"/>
+          <p:cNvSpPr/>
+          <p:nvPr/>
+        </p:nvSpPr>
+        <p:spPr>
+          <a:xfrm>
+            <a:off x="457200" y="3035808"/>
+            <a:ext cx="5486400" cy="256032"/>
+          </a:xfrm>
+          <a:prstGeom prst="rect">
+            <a:avLst/>
+          </a:prstGeom>
+          <a:noFill/>
+          <a:ln/>
+        </p:spPr>
+        <p:txBody>
+          <a:bodyPr wrap="square" lIns="0" tIns="0" rIns="0" bIns="0" rtlCol="0" anchor="ctr"/>
+          <a:lstStyle/>
+          <a:p>
+            <a:pPr indent="0" marL="0">
+              <a:buNone/>
+            </a:pPr>
+            <a:r>
+              <a:rPr lang="en-US" sz="1400" b="1" dirty="0">
+                <a:solidFill>
+                  <a:srgbClr val="17313B"/>
+                </a:solidFill>
+                <a:latin typeface="Malgun Gothic" pitchFamily="34" charset="0"/>
+                <a:ea typeface="Malgun Gothic" pitchFamily="34" charset="-122"/>
+                <a:cs typeface="Malgun Gothic" pitchFamily="34" charset="-120"/>
+              </a:rPr>
+              <a:t>왜 시스템 소프트웨어인가</a:t>
+            </a:r>
+            <a:endParaRPr lang="en-US" sz="1400" dirty="0"/>
+          </a:p>
+        </p:txBody>
+      </p:sp>
+      <p:sp>
+        <p:nvSpPr>
+          <p:cNvPr id="19" name="Text 15"/>
+          <p:cNvSpPr/>
+          <p:nvPr/>
+        </p:nvSpPr>
+        <p:spPr>
+          <a:xfrm>
+            <a:off x="457200" y="3328416"/>
+            <a:ext cx="3602736" cy="877824"/>
+          </a:xfrm>
+          <a:prstGeom prst="roundRect">
+            <a:avLst>
+              <a:gd name="adj" fmla="val 8333"/>
+            </a:avLst>
+          </a:prstGeom>
+          <a:solidFill>
+            <a:srgbClr val="F5F7F8"/>
+          </a:solidFill>
+          <a:ln/>
+        </p:spPr>
+        <p:txBody>
+          <a:bodyPr wrap="square" lIns="0" tIns="0" rIns="0" bIns="0" rtlCol="0" anchor="ctr"/>
+          <a:lstStyle/>
+          <a:p>
+            <a:pPr algn="ctr" indent="0" marL="0">
+              <a:lnSpc>
+                <a:spcPct val="110000"/>
+              </a:lnSpc>
+              <a:buNone/>
+            </a:pPr>
+            <a:r>
+              <a:rPr lang="en-US" sz="1350" b="1" dirty="0">
+                <a:solidFill>
+                  <a:srgbClr val="17313B"/>
+                </a:solidFill>
+                <a:latin typeface="Malgun Gothic" pitchFamily="34" charset="0"/>
+                <a:ea typeface="Malgun Gothic" pitchFamily="34" charset="-122"/>
+                <a:cs typeface="Malgun Gothic" pitchFamily="34" charset="-120"/>
+              </a:rPr>
+              <a:t>FDP는 인터페이스일 뿐</a:t>
+            </a:r>
+            <a:endParaRPr lang="en-US" sz="1350" dirty="0"/>
+          </a:p>
+          <a:p>
+            <a:pPr algn="ctr" indent="0" marL="0">
+              <a:lnSpc>
+                <a:spcPct val="110000"/>
+              </a:lnSpc>
+              <a:buNone/>
+            </a:pPr>
+            <a:r>
+              <a:rPr lang="en-US" sz="1050" dirty="0">
+                <a:solidFill>
+                  <a:srgbClr val="5A7184"/>
+                </a:solidFill>
+                <a:latin typeface="Malgun Gothic" pitchFamily="34" charset="0"/>
+                <a:ea typeface="Malgun Gothic" pitchFamily="34" charset="-122"/>
+                <a:cs typeface="Malgun Gothic" pitchFamily="34" charset="-120"/>
+              </a:rPr>
+              <a:t>SSD는 hot/cold·수명·테넌트를 모른다 — 정보는 DB·캐시 등 상위 SW에 있다</a:t>
+            </a:r>
+            <a:endParaRPr lang="en-US" sz="1350" dirty="0"/>
+          </a:p>
+        </p:txBody>
+      </p:sp>
+      <p:sp>
+        <p:nvSpPr>
+          <p:cNvPr id="20" name="Text 16"/>
+          <p:cNvSpPr/>
+          <p:nvPr/>
+        </p:nvSpPr>
+        <p:spPr>
+          <a:xfrm>
+            <a:off x="4297680" y="3328416"/>
+            <a:ext cx="3602736" cy="877824"/>
+          </a:xfrm>
+          <a:prstGeom prst="roundRect">
+            <a:avLst>
+              <a:gd name="adj" fmla="val 8333"/>
+            </a:avLst>
+          </a:prstGeom>
+          <a:solidFill>
+            <a:srgbClr val="F5F7F8"/>
+          </a:solidFill>
+          <a:ln/>
+        </p:spPr>
+        <p:txBody>
+          <a:bodyPr wrap="square" lIns="0" tIns="0" rIns="0" bIns="0" rtlCol="0" anchor="ctr"/>
+          <a:lstStyle/>
+          <a:p>
+            <a:pPr algn="ctr" indent="0" marL="0">
+              <a:lnSpc>
+                <a:spcPct val="110000"/>
+              </a:lnSpc>
+              <a:buNone/>
+            </a:pPr>
+            <a:r>
+              <a:rPr lang="en-US" sz="1350" b="1" dirty="0">
+                <a:solidFill>
+                  <a:srgbClr val="17313B"/>
+                </a:solidFill>
+                <a:latin typeface="Malgun Gothic" pitchFamily="34" charset="0"/>
+                <a:ea typeface="Malgun Gothic" pitchFamily="34" charset="-122"/>
+                <a:cs typeface="Malgun Gothic" pitchFamily="34" charset="-120"/>
+              </a:rPr>
+              <a:t>Captive SSD 확대</a:t>
+            </a:r>
+            <a:endParaRPr lang="en-US" sz="1350" dirty="0"/>
+          </a:p>
+          <a:p>
+            <a:pPr algn="ctr" indent="0" marL="0">
+              <a:lnSpc>
+                <a:spcPct val="110000"/>
+              </a:lnSpc>
+              <a:buNone/>
+            </a:pPr>
+            <a:r>
+              <a:rPr lang="en-US" sz="1050" dirty="0">
+                <a:solidFill>
+                  <a:srgbClr val="5A7184"/>
+                </a:solidFill>
+                <a:latin typeface="Malgun Gothic" pitchFamily="34" charset="0"/>
+                <a:ea typeface="Malgun Gothic" pitchFamily="34" charset="-122"/>
+                <a:cs typeface="Malgun Gothic" pitchFamily="34" charset="-120"/>
+              </a:rPr>
+              <a:t>NAND 공급에만 머물면 완제품 SSD의 부가가치를 잃는다</a:t>
+            </a:r>
+            <a:endParaRPr lang="en-US" sz="1350" dirty="0"/>
+          </a:p>
+        </p:txBody>
+      </p:sp>
+      <p:sp>
+        <p:nvSpPr>
+          <p:cNvPr id="21" name="Text 17"/>
+          <p:cNvSpPr/>
+          <p:nvPr/>
+        </p:nvSpPr>
+        <p:spPr>
+          <a:xfrm>
+            <a:off x="8138160" y="3328416"/>
+            <a:ext cx="3602736" cy="877824"/>
+          </a:xfrm>
+          <a:prstGeom prst="roundRect">
+            <a:avLst>
+              <a:gd name="adj" fmla="val 8333"/>
+            </a:avLst>
+          </a:prstGeom>
+          <a:solidFill>
+            <a:srgbClr val="F5F7F8"/>
+          </a:solidFill>
+          <a:ln/>
+        </p:spPr>
+        <p:txBody>
+          <a:bodyPr wrap="square" lIns="0" tIns="0" rIns="0" bIns="0" rtlCol="0" anchor="ctr"/>
+          <a:lstStyle/>
+          <a:p>
+            <a:pPr algn="ctr" indent="0" marL="0">
+              <a:lnSpc>
+                <a:spcPct val="110000"/>
+              </a:lnSpc>
+              <a:buNone/>
+            </a:pPr>
+            <a:r>
+              <a:rPr lang="en-US" sz="1350" b="1" dirty="0">
+                <a:solidFill>
+                  <a:srgbClr val="17313B"/>
+                </a:solidFill>
+                <a:latin typeface="Malgun Gothic" pitchFamily="34" charset="0"/>
+                <a:ea typeface="Malgun Gothic" pitchFamily="34" charset="-122"/>
+                <a:cs typeface="Malgun Gothic" pitchFamily="34" charset="-120"/>
+              </a:rPr>
+              <a:t>커스텀 파편화</a:t>
+            </a:r>
+            <a:endParaRPr lang="en-US" sz="1350" dirty="0"/>
+          </a:p>
+          <a:p>
+            <a:pPr algn="ctr" indent="0" marL="0">
+              <a:lnSpc>
+                <a:spcPct val="110000"/>
+              </a:lnSpc>
+              <a:buNone/>
+            </a:pPr>
+            <a:r>
+              <a:rPr lang="en-US" sz="1050" dirty="0">
+                <a:solidFill>
+                  <a:srgbClr val="5A7184"/>
+                </a:solidFill>
+                <a:latin typeface="Malgun Gothic" pitchFamily="34" charset="0"/>
+                <a:ea typeface="Malgun Gothic" pitchFamily="34" charset="-122"/>
+                <a:cs typeface="Malgun Gothic" pitchFamily="34" charset="-120"/>
+              </a:rPr>
+              <a:t>고객별 커스텀 SSD 개발은 제품·펌웨어를 파편화시킨다</a:t>
+            </a:r>
+            <a:endParaRPr lang="en-US" sz="1350" dirty="0"/>
+          </a:p>
+        </p:txBody>
+      </p:sp>
+      <p:sp>
+        <p:nvSpPr>
+          <p:cNvPr id="22" name="Text 18"/>
+          <p:cNvSpPr/>
+          <p:nvPr/>
+        </p:nvSpPr>
+        <p:spPr>
+          <a:xfrm>
+            <a:off x="457200" y="4425696"/>
+            <a:ext cx="5486400" cy="256032"/>
+          </a:xfrm>
+          <a:prstGeom prst="rect">
+            <a:avLst/>
+          </a:prstGeom>
+          <a:noFill/>
+          <a:ln/>
+        </p:spPr>
+        <p:txBody>
+          <a:bodyPr wrap="square" lIns="0" tIns="0" rIns="0" bIns="0" rtlCol="0" anchor="ctr"/>
+          <a:lstStyle/>
+          <a:p>
+            <a:pPr indent="0" marL="0">
+              <a:buNone/>
+            </a:pPr>
+            <a:r>
+              <a:rPr lang="en-US" sz="1400" b="1" dirty="0">
+                <a:solidFill>
+                  <a:srgbClr val="17313B"/>
+                </a:solidFill>
+                <a:latin typeface="Malgun Gothic" pitchFamily="34" charset="0"/>
+                <a:ea typeface="Malgun Gothic" pitchFamily="34" charset="-122"/>
+                <a:cs typeface="Malgun Gothic" pitchFamily="34" charset="-120"/>
+              </a:rPr>
+              <a:t>전체 전략 구조 — 6요소</a:t>
+            </a:r>
+            <a:endParaRPr lang="en-US" sz="1400" dirty="0"/>
+          </a:p>
+        </p:txBody>
+      </p:sp>
+      <p:sp>
+        <p:nvSpPr>
+          <p:cNvPr id="23" name="Text 19"/>
+          <p:cNvSpPr/>
+          <p:nvPr/>
+        </p:nvSpPr>
+        <p:spPr>
+          <a:xfrm>
+            <a:off x="457200" y="4718304"/>
+            <a:ext cx="1682496" cy="731520"/>
+          </a:xfrm>
+          <a:prstGeom prst="roundRect">
+            <a:avLst>
+              <a:gd name="adj" fmla="val 8750"/>
+            </a:avLst>
+          </a:prstGeom>
+          <a:solidFill>
+            <a:srgbClr val="FFFFFF"/>
+          </a:solidFill>
+          <a:ln w="12700">
+            <a:solidFill>
+              <a:srgbClr val="DCE4E9"/>
+            </a:solidFill>
+          </a:ln>
+        </p:spPr>
+        <p:txBody>
+          <a:bodyPr wrap="square" lIns="0" tIns="0" rIns="0" bIns="0" rtlCol="0" anchor="ctr"/>
+          <a:lstStyle/>
+          <a:p>
+            <a:pPr algn="ctr" indent="0" marL="0">
+              <a:lnSpc>
+                <a:spcPct val="105000"/>
+              </a:lnSpc>
+              <a:buNone/>
+            </a:pPr>
+            <a:r>
+              <a:rPr lang="en-US" sz="1200" b="1" dirty="0">
+                <a:solidFill>
+                  <a:srgbClr val="17313B"/>
+                </a:solidFill>
+                <a:latin typeface="Malgun Gothic" pitchFamily="34" charset="0"/>
+                <a:ea typeface="Malgun Gothic" pitchFamily="34" charset="-122"/>
+                <a:cs typeface="Malgun Gothic" pitchFamily="34" charset="-120"/>
+              </a:rPr>
+              <a:t>Binding 계약</a:t>
+            </a:r>
+            <a:endParaRPr lang="en-US" sz="1200" dirty="0"/>
+          </a:p>
+          <a:p>
+            <a:pPr algn="ctr" indent="0" marL="0">
+              <a:lnSpc>
+                <a:spcPct val="105000"/>
+              </a:lnSpc>
+              <a:buNone/>
+            </a:pPr>
+            <a:r>
+              <a:rPr lang="en-US" sz="950" dirty="0">
+                <a:solidFill>
+                  <a:srgbClr val="5A7184"/>
+                </a:solidFill>
+                <a:latin typeface="Malgun Gothic" pitchFamily="34" charset="0"/>
+                <a:ea typeface="Malgun Gothic" pitchFamily="34" charset="-122"/>
+                <a:cs typeface="Malgun Gothic" pitchFamily="34" charset="-120"/>
+              </a:rPr>
+              <a:t>장기 물량 확보</a:t>
+            </a:r>
+            <a:endParaRPr lang="en-US" sz="1200" dirty="0"/>
+          </a:p>
+        </p:txBody>
+      </p:sp>
+      <p:sp>
+        <p:nvSpPr>
+          <p:cNvPr id="24" name="Text 20"/>
+          <p:cNvSpPr/>
+          <p:nvPr/>
+        </p:nvSpPr>
+        <p:spPr>
+          <a:xfrm>
+            <a:off x="2139696" y="4718304"/>
+            <a:ext cx="201168" cy="731520"/>
+          </a:xfrm>
+          <a:prstGeom prst="rect">
+            <a:avLst/>
+          </a:prstGeom>
+          <a:noFill/>
+          <a:ln/>
+        </p:spPr>
+        <p:txBody>
+          <a:bodyPr wrap="square" lIns="0" tIns="0" rIns="0" bIns="0" rtlCol="0" anchor="ctr"/>
+          <a:lstStyle/>
+          <a:p>
+            <a:pPr algn="ctr" indent="0" marL="0">
+              <a:buNone/>
+            </a:pPr>
+            <a:r>
+              <a:rPr lang="en-US" sz="1050" dirty="0">
+                <a:solidFill>
+                  <a:srgbClr val="5A7184"/>
+                </a:solidFill>
+                <a:latin typeface="Malgun Gothic" pitchFamily="34" charset="0"/>
+                <a:ea typeface="Malgun Gothic" pitchFamily="34" charset="-122"/>
+                <a:cs typeface="Malgun Gothic" pitchFamily="34" charset="-120"/>
+              </a:rPr>
+              <a:t>▶</a:t>
+            </a:r>
+            <a:endParaRPr lang="en-US" sz="1050" dirty="0"/>
+          </a:p>
+        </p:txBody>
+      </p:sp>
+      <p:sp>
+        <p:nvSpPr>
+          <p:cNvPr id="25" name="Text 21"/>
+          <p:cNvSpPr/>
+          <p:nvPr/>
+        </p:nvSpPr>
+        <p:spPr>
+          <a:xfrm>
+            <a:off x="2340864" y="4718304"/>
+            <a:ext cx="1682496" cy="731520"/>
+          </a:xfrm>
+          <a:prstGeom prst="roundRect">
+            <a:avLst>
+              <a:gd name="adj" fmla="val 8750"/>
+            </a:avLst>
+          </a:prstGeom>
+          <a:solidFill>
+            <a:srgbClr val="FFFFFF"/>
+          </a:solidFill>
+          <a:ln w="12700">
+            <a:solidFill>
+              <a:srgbClr val="DCE4E9"/>
+            </a:solidFill>
+          </a:ln>
+        </p:spPr>
+        <p:txBody>
+          <a:bodyPr wrap="square" lIns="0" tIns="0" rIns="0" bIns="0" rtlCol="0" anchor="ctr"/>
+          <a:lstStyle/>
+          <a:p>
+            <a:pPr algn="ctr" indent="0" marL="0">
+              <a:lnSpc>
+                <a:spcPct val="105000"/>
+              </a:lnSpc>
+              <a:buNone/>
+            </a:pPr>
+            <a:r>
+              <a:rPr lang="en-US" sz="1200" b="1" dirty="0">
+                <a:solidFill>
+                  <a:srgbClr val="17313B"/>
+                </a:solidFill>
+                <a:latin typeface="Malgun Gothic" pitchFamily="34" charset="0"/>
+                <a:ea typeface="Malgun Gothic" pitchFamily="34" charset="-122"/>
+                <a:cs typeface="Malgun Gothic" pitchFamily="34" charset="-120"/>
+              </a:rPr>
+              <a:t>FDP 표준 SSD</a:t>
+            </a:r>
+            <a:endParaRPr lang="en-US" sz="1200" dirty="0"/>
+          </a:p>
+          <a:p>
+            <a:pPr algn="ctr" indent="0" marL="0">
+              <a:lnSpc>
+                <a:spcPct val="105000"/>
+              </a:lnSpc>
+              <a:buNone/>
+            </a:pPr>
+            <a:r>
+              <a:rPr lang="en-US" sz="950" dirty="0">
+                <a:solidFill>
+                  <a:srgbClr val="5A7184"/>
+                </a:solidFill>
+                <a:latin typeface="Malgun Gothic" pitchFamily="34" charset="0"/>
+                <a:ea typeface="Malgun Gothic" pitchFamily="34" charset="-122"/>
+                <a:cs typeface="Malgun Gothic" pitchFamily="34" charset="-120"/>
+              </a:rPr>
+              <a:t>공통 인터페이스</a:t>
+            </a:r>
+            <a:endParaRPr lang="en-US" sz="1200" dirty="0"/>
+          </a:p>
+        </p:txBody>
+      </p:sp>
+      <p:sp>
+        <p:nvSpPr>
+          <p:cNvPr id="26" name="Text 22"/>
+          <p:cNvSpPr/>
+          <p:nvPr/>
+        </p:nvSpPr>
+        <p:spPr>
+          <a:xfrm>
+            <a:off x="4023360" y="4718304"/>
+            <a:ext cx="201168" cy="731520"/>
+          </a:xfrm>
+          <a:prstGeom prst="rect">
+            <a:avLst/>
+          </a:prstGeom>
+          <a:noFill/>
+          <a:ln/>
+        </p:spPr>
+        <p:txBody>
+          <a:bodyPr wrap="square" lIns="0" tIns="0" rIns="0" bIns="0" rtlCol="0" anchor="ctr"/>
+          <a:lstStyle/>
+          <a:p>
+            <a:pPr algn="ctr" indent="0" marL="0">
+              <a:buNone/>
+            </a:pPr>
+            <a:r>
+              <a:rPr lang="en-US" sz="1050" dirty="0">
+                <a:solidFill>
+                  <a:srgbClr val="5A7184"/>
+                </a:solidFill>
+                <a:latin typeface="Malgun Gothic" pitchFamily="34" charset="0"/>
+                <a:ea typeface="Malgun Gothic" pitchFamily="34" charset="-122"/>
+                <a:cs typeface="Malgun Gothic" pitchFamily="34" charset="-120"/>
+              </a:rPr>
+              <a:t>▶</a:t>
+            </a:r>
+            <a:endParaRPr lang="en-US" sz="1050" dirty="0"/>
+          </a:p>
+        </p:txBody>
+      </p:sp>
+      <p:sp>
+        <p:nvSpPr>
+          <p:cNvPr id="27" name="Text 23"/>
+          <p:cNvSpPr/>
+          <p:nvPr/>
+        </p:nvSpPr>
+        <p:spPr>
+          <a:xfrm>
+            <a:off x="4224528" y="4718304"/>
+            <a:ext cx="1682496" cy="731520"/>
+          </a:xfrm>
+          <a:prstGeom prst="roundRect">
+            <a:avLst>
+              <a:gd name="adj" fmla="val 8750"/>
+            </a:avLst>
+          </a:prstGeom>
+          <a:solidFill>
+            <a:srgbClr val="E8F6F0"/>
+          </a:solidFill>
+          <a:ln w="15875">
+            <a:solidFill>
+              <a:srgbClr val="02A878"/>
+            </a:solidFill>
+          </a:ln>
+        </p:spPr>
+        <p:txBody>
+          <a:bodyPr wrap="square" lIns="0" tIns="0" rIns="0" bIns="0" rtlCol="0" anchor="ctr"/>
+          <a:lstStyle/>
+          <a:p>
+            <a:pPr algn="ctr" indent="0" marL="0">
+              <a:lnSpc>
+                <a:spcPct val="105000"/>
+              </a:lnSpc>
+              <a:buNone/>
+            </a:pPr>
+            <a:r>
+              <a:rPr lang="en-US" sz="1200" b="1" dirty="0">
+                <a:solidFill>
+                  <a:srgbClr val="02A878"/>
+                </a:solidFill>
+                <a:latin typeface="Malgun Gothic" pitchFamily="34" charset="0"/>
+                <a:ea typeface="Malgun Gothic" pitchFamily="34" charset="-122"/>
+                <a:cs typeface="Malgun Gothic" pitchFamily="34" charset="-120"/>
+              </a:rPr>
+              <a:t>시스템 SW</a:t>
+            </a:r>
+            <a:endParaRPr lang="en-US" sz="1200" dirty="0"/>
+          </a:p>
+          <a:p>
+            <a:pPr algn="ctr" indent="0" marL="0">
+              <a:lnSpc>
+                <a:spcPct val="105000"/>
+              </a:lnSpc>
+              <a:buNone/>
+            </a:pPr>
+            <a:r>
+              <a:rPr lang="en-US" sz="950" dirty="0">
+                <a:solidFill>
+                  <a:srgbClr val="5A7184"/>
+                </a:solidFill>
+                <a:latin typeface="Malgun Gothic" pitchFamily="34" charset="0"/>
+                <a:ea typeface="Malgun Gothic" pitchFamily="34" charset="-122"/>
+                <a:cs typeface="Malgun Gothic" pitchFamily="34" charset="-120"/>
+              </a:rPr>
+              <a:t>워크로드→정책 변환</a:t>
+            </a:r>
+            <a:endParaRPr lang="en-US" sz="1200" dirty="0"/>
+          </a:p>
+        </p:txBody>
+      </p:sp>
+      <p:sp>
+        <p:nvSpPr>
+          <p:cNvPr id="28" name="Text 24"/>
+          <p:cNvSpPr/>
+          <p:nvPr/>
+        </p:nvSpPr>
+        <p:spPr>
+          <a:xfrm>
+            <a:off x="5907024" y="4718304"/>
+            <a:ext cx="201168" cy="731520"/>
+          </a:xfrm>
+          <a:prstGeom prst="rect">
+            <a:avLst/>
+          </a:prstGeom>
+          <a:noFill/>
+          <a:ln/>
+        </p:spPr>
+        <p:txBody>
+          <a:bodyPr wrap="square" lIns="0" tIns="0" rIns="0" bIns="0" rtlCol="0" anchor="ctr"/>
+          <a:lstStyle/>
+          <a:p>
+            <a:pPr algn="ctr" indent="0" marL="0">
+              <a:buNone/>
+            </a:pPr>
+            <a:r>
+              <a:rPr lang="en-US" sz="1050" dirty="0">
+                <a:solidFill>
+                  <a:srgbClr val="5A7184"/>
+                </a:solidFill>
+                <a:latin typeface="Malgun Gothic" pitchFamily="34" charset="0"/>
+                <a:ea typeface="Malgun Gothic" pitchFamily="34" charset="-122"/>
+                <a:cs typeface="Malgun Gothic" pitchFamily="34" charset="-120"/>
+              </a:rPr>
+              <a:t>▶</a:t>
+            </a:r>
+            <a:endParaRPr lang="en-US" sz="1050" dirty="0"/>
+          </a:p>
+        </p:txBody>
+      </p:sp>
+      <p:sp>
+        <p:nvSpPr>
+          <p:cNvPr id="29" name="Text 25"/>
+          <p:cNvSpPr/>
+          <p:nvPr/>
+        </p:nvSpPr>
+        <p:spPr>
+          <a:xfrm>
+            <a:off x="6108192" y="4718304"/>
+            <a:ext cx="1682496" cy="731520"/>
+          </a:xfrm>
+          <a:prstGeom prst="roundRect">
+            <a:avLst>
+              <a:gd name="adj" fmla="val 8750"/>
+            </a:avLst>
+          </a:prstGeom>
+          <a:solidFill>
+            <a:srgbClr val="FFFFFF"/>
+          </a:solidFill>
+          <a:ln w="12700">
+            <a:solidFill>
+              <a:srgbClr val="DCE4E9"/>
+            </a:solidFill>
+          </a:ln>
+        </p:spPr>
+        <p:txBody>
+          <a:bodyPr wrap="square" lIns="0" tIns="0" rIns="0" bIns="0" rtlCol="0" anchor="ctr"/>
+          <a:lstStyle/>
+          <a:p>
+            <a:pPr algn="ctr" indent="0" marL="0">
+              <a:lnSpc>
+                <a:spcPct val="105000"/>
+              </a:lnSpc>
+              <a:buNone/>
+            </a:pPr>
+            <a:r>
+              <a:rPr lang="en-US" sz="1200" b="1" dirty="0">
+                <a:solidFill>
+                  <a:srgbClr val="17313B"/>
+                </a:solidFill>
+                <a:latin typeface="Malgun Gothic" pitchFamily="34" charset="0"/>
+                <a:ea typeface="Malgun Gothic" pitchFamily="34" charset="-122"/>
+                <a:cs typeface="Malgun Gothic" pitchFamily="34" charset="-120"/>
+              </a:rPr>
+              <a:t>E2E 검증</a:t>
+            </a:r>
+            <a:endParaRPr lang="en-US" sz="1200" dirty="0"/>
+          </a:p>
+          <a:p>
+            <a:pPr algn="ctr" indent="0" marL="0">
+              <a:lnSpc>
+                <a:spcPct val="105000"/>
+              </a:lnSpc>
+              <a:buNone/>
+            </a:pPr>
+            <a:r>
+              <a:rPr lang="en-US" sz="950" dirty="0">
+                <a:solidFill>
+                  <a:srgbClr val="5A7184"/>
+                </a:solidFill>
+                <a:latin typeface="Malgun Gothic" pitchFamily="34" charset="0"/>
+                <a:ea typeface="Malgun Gothic" pitchFamily="34" charset="-122"/>
+                <a:cs typeface="Malgun Gothic" pitchFamily="34" charset="-120"/>
+              </a:rPr>
+              <a:t>TCO 개선 보장</a:t>
+            </a:r>
+            <a:endParaRPr lang="en-US" sz="1200" dirty="0"/>
+          </a:p>
+        </p:txBody>
+      </p:sp>
+      <p:sp>
+        <p:nvSpPr>
+          <p:cNvPr id="30" name="Text 26"/>
+          <p:cNvSpPr/>
+          <p:nvPr/>
+        </p:nvSpPr>
+        <p:spPr>
+          <a:xfrm>
+            <a:off x="7790688" y="4718304"/>
+            <a:ext cx="201168" cy="731520"/>
+          </a:xfrm>
+          <a:prstGeom prst="rect">
+            <a:avLst/>
+          </a:prstGeom>
+          <a:noFill/>
+          <a:ln/>
+        </p:spPr>
+        <p:txBody>
+          <a:bodyPr wrap="square" lIns="0" tIns="0" rIns="0" bIns="0" rtlCol="0" anchor="ctr"/>
+          <a:lstStyle/>
+          <a:p>
+            <a:pPr algn="ctr" indent="0" marL="0">
+              <a:buNone/>
+            </a:pPr>
+            <a:r>
+              <a:rPr lang="en-US" sz="1050" dirty="0">
+                <a:solidFill>
+                  <a:srgbClr val="5A7184"/>
+                </a:solidFill>
+                <a:latin typeface="Malgun Gothic" pitchFamily="34" charset="0"/>
+                <a:ea typeface="Malgun Gothic" pitchFamily="34" charset="-122"/>
+                <a:cs typeface="Malgun Gothic" pitchFamily="34" charset="-120"/>
+              </a:rPr>
+              <a:t>▶</a:t>
+            </a:r>
+            <a:endParaRPr lang="en-US" sz="1050" dirty="0"/>
+          </a:p>
+        </p:txBody>
+      </p:sp>
+      <p:sp>
+        <p:nvSpPr>
+          <p:cNvPr id="31" name="Text 27"/>
+          <p:cNvSpPr/>
+          <p:nvPr/>
+        </p:nvSpPr>
+        <p:spPr>
+          <a:xfrm>
+            <a:off x="7991856" y="4718304"/>
+            <a:ext cx="1682496" cy="731520"/>
+          </a:xfrm>
+          <a:prstGeom prst="roundRect">
+            <a:avLst>
+              <a:gd name="adj" fmla="val 8750"/>
+            </a:avLst>
+          </a:prstGeom>
+          <a:solidFill>
+            <a:srgbClr val="FFFFFF"/>
+          </a:solidFill>
+          <a:ln w="12700">
+            <a:solidFill>
+              <a:srgbClr val="DCE4E9"/>
+            </a:solidFill>
+          </a:ln>
+        </p:spPr>
+        <p:txBody>
+          <a:bodyPr wrap="square" lIns="0" tIns="0" rIns="0" bIns="0" rtlCol="0" anchor="ctr"/>
+          <a:lstStyle/>
+          <a:p>
+            <a:pPr algn="ctr" indent="0" marL="0">
+              <a:lnSpc>
+                <a:spcPct val="105000"/>
+              </a:lnSpc>
+              <a:buNone/>
+            </a:pPr>
+            <a:r>
+              <a:rPr lang="en-US" sz="1200" b="1" dirty="0">
+                <a:solidFill>
+                  <a:srgbClr val="17313B"/>
+                </a:solidFill>
+                <a:latin typeface="Malgun Gothic" pitchFamily="34" charset="0"/>
+                <a:ea typeface="Malgun Gothic" pitchFamily="34" charset="-122"/>
+                <a:cs typeface="Malgun Gothic" pitchFamily="34" charset="-120"/>
+              </a:rPr>
+              <a:t>고객 공동개발</a:t>
+            </a:r>
+            <a:endParaRPr lang="en-US" sz="1200" dirty="0"/>
+          </a:p>
+          <a:p>
+            <a:pPr algn="ctr" indent="0" marL="0">
+              <a:lnSpc>
+                <a:spcPct val="105000"/>
+              </a:lnSpc>
+              <a:buNone/>
+            </a:pPr>
+            <a:r>
+              <a:rPr lang="en-US" sz="950" dirty="0">
+                <a:solidFill>
+                  <a:srgbClr val="5A7184"/>
+                </a:solidFill>
+                <a:latin typeface="Malgun Gothic" pitchFamily="34" charset="0"/>
+                <a:ea typeface="Malgun Gothic" pitchFamily="34" charset="-122"/>
+                <a:cs typeface="Malgun Gothic" pitchFamily="34" charset="-120"/>
+              </a:rPr>
+              <a:t>장기 관계 구축</a:t>
+            </a:r>
+            <a:endParaRPr lang="en-US" sz="1200" dirty="0"/>
+          </a:p>
+        </p:txBody>
+      </p:sp>
+      <p:sp>
+        <p:nvSpPr>
+          <p:cNvPr id="32" name="Text 28"/>
+          <p:cNvSpPr/>
+          <p:nvPr/>
+        </p:nvSpPr>
+        <p:spPr>
+          <a:xfrm>
+            <a:off x="9674352" y="4718304"/>
+            <a:ext cx="201168" cy="731520"/>
+          </a:xfrm>
+          <a:prstGeom prst="rect">
+            <a:avLst/>
+          </a:prstGeom>
+          <a:noFill/>
+          <a:ln/>
+        </p:spPr>
+        <p:txBody>
+          <a:bodyPr wrap="square" lIns="0" tIns="0" rIns="0" bIns="0" rtlCol="0" anchor="ctr"/>
+          <a:lstStyle/>
+          <a:p>
+            <a:pPr algn="ctr" indent="0" marL="0">
+              <a:buNone/>
+            </a:pPr>
+            <a:r>
+              <a:rPr lang="en-US" sz="1050" dirty="0">
+                <a:solidFill>
+                  <a:srgbClr val="5A7184"/>
+                </a:solidFill>
+                <a:latin typeface="Malgun Gothic" pitchFamily="34" charset="0"/>
+                <a:ea typeface="Malgun Gothic" pitchFamily="34" charset="-122"/>
+                <a:cs typeface="Malgun Gothic" pitchFamily="34" charset="-120"/>
+              </a:rPr>
+              <a:t>▶</a:t>
+            </a:r>
+            <a:endParaRPr lang="en-US" sz="1050" dirty="0"/>
+          </a:p>
+        </p:txBody>
+      </p:sp>
+      <p:sp>
+        <p:nvSpPr>
+          <p:cNvPr id="33" name="Text 29"/>
+          <p:cNvSpPr/>
+          <p:nvPr/>
+        </p:nvSpPr>
+        <p:spPr>
+          <a:xfrm>
+            <a:off x="9875520" y="4718304"/>
+            <a:ext cx="1682496" cy="731520"/>
+          </a:xfrm>
+          <a:prstGeom prst="roundRect">
+            <a:avLst>
+              <a:gd name="adj" fmla="val 8750"/>
+            </a:avLst>
+          </a:prstGeom>
+          <a:solidFill>
+            <a:srgbClr val="FFFFFF"/>
+          </a:solidFill>
+          <a:ln w="12700">
+            <a:solidFill>
+              <a:srgbClr val="DCE4E9"/>
+            </a:solidFill>
+          </a:ln>
+        </p:spPr>
+        <p:txBody>
+          <a:bodyPr wrap="square" lIns="0" tIns="0" rIns="0" bIns="0" rtlCol="0" anchor="ctr"/>
+          <a:lstStyle/>
+          <a:p>
+            <a:pPr algn="ctr" indent="0" marL="0">
+              <a:lnSpc>
+                <a:spcPct val="105000"/>
+              </a:lnSpc>
+              <a:buNone/>
+            </a:pPr>
+            <a:r>
+              <a:rPr lang="en-US" sz="1200" b="1" dirty="0">
+                <a:solidFill>
+                  <a:srgbClr val="17313B"/>
+                </a:solidFill>
+                <a:latin typeface="Malgun Gothic" pitchFamily="34" charset="0"/>
+                <a:ea typeface="Malgun Gothic" pitchFamily="34" charset="-122"/>
+                <a:cs typeface="Malgun Gothic" pitchFamily="34" charset="-120"/>
+              </a:rPr>
+              <a:t>텔레메트리</a:t>
+            </a:r>
+            <a:endParaRPr lang="en-US" sz="1200" dirty="0"/>
+          </a:p>
+          <a:p>
+            <a:pPr algn="ctr" indent="0" marL="0">
+              <a:lnSpc>
+                <a:spcPct val="105000"/>
+              </a:lnSpc>
+              <a:buNone/>
+            </a:pPr>
+            <a:r>
+              <a:rPr lang="en-US" sz="950" dirty="0">
+                <a:solidFill>
+                  <a:srgbClr val="5A7184"/>
+                </a:solidFill>
+                <a:latin typeface="Malgun Gothic" pitchFamily="34" charset="0"/>
+                <a:ea typeface="Malgun Gothic" pitchFamily="34" charset="-122"/>
+                <a:cs typeface="Malgun Gothic" pitchFamily="34" charset="-120"/>
+              </a:rPr>
+              <a:t>지속 개선 루프</a:t>
+            </a:r>
+            <a:endParaRPr lang="en-US" sz="1200" dirty="0"/>
+          </a:p>
+        </p:txBody>
+      </p:sp>
+      <p:sp>
+        <p:nvSpPr>
+          <p:cNvPr id="34" name="Text 30"/>
+          <p:cNvSpPr/>
+          <p:nvPr/>
+        </p:nvSpPr>
+        <p:spPr>
+          <a:xfrm>
+            <a:off x="457200" y="5742432"/>
+            <a:ext cx="11274552" cy="274320"/>
+          </a:xfrm>
+          <a:prstGeom prst="rect">
+            <a:avLst/>
+          </a:prstGeom>
+          <a:noFill/>
+          <a:ln/>
+        </p:spPr>
+        <p:txBody>
+          <a:bodyPr wrap="square" lIns="0" tIns="0" rIns="0" bIns="0" rtlCol="0" anchor="ctr"/>
+          <a:lstStyle/>
+          <a:p>
+            <a:pPr algn="ctr" indent="0" marL="0">
+              <a:buNone/>
+            </a:pPr>
+            <a:r>
+              <a:rPr lang="en-US" sz="1200" i="1" dirty="0">
+                <a:solidFill>
+                  <a:srgbClr val="5A7184"/>
+                </a:solidFill>
+                <a:latin typeface="Malgun Gothic" pitchFamily="34" charset="0"/>
+                <a:ea typeface="Malgun Gothic" pitchFamily="34" charset="-122"/>
+                <a:cs typeface="Malgun Gothic" pitchFamily="34" charset="-120"/>
+              </a:rPr>
+              <a:t>Captive 고객의 요구를 삼성 완제품 생태계 안에 수용한다 — Binding secures demand · FDP standardizes · System SW creates value</a:t>
+            </a:r>
+            <a:endParaRPr lang="en-US" sz="1200" dirty="0"/>
+          </a:p>
+        </p:txBody>
+      </p:sp>
+    </p:spTree>
+  </p:cSld>
+  <p:clrMapOvr>
+    <a:masterClrMapping/>
+  </p:clrMapOvr>
+</p:sld>
+</file>
+
+<file path=ppt/slides/slide5.xml><?xml version="1.0" encoding="utf-8"?>
+<p:sld xmlns:a="http://schemas.openxmlformats.org/drawingml/2006/main" xmlns:r="http://schemas.openxmlformats.org/officeDocument/2006/relationships" xmlns:p="http://schemas.openxmlformats.org/presentationml/2006/main">
+  <p:cSld name="Slide 5">
+    <p:spTree>
+      <p:nvGrpSpPr>
+        <p:cNvPr id="1" name=""/>
+        <p:cNvGrpSpPr/>
+        <p:nvPr/>
+      </p:nvGrpSpPr>
+      <p:grpSpPr>
+        <a:xfrm>
+          <a:off x="0" y="0"/>
+          <a:ext cx="0" cy="0"/>
+          <a:chOff x="0" y="0"/>
+          <a:chExt cx="0" cy="0"/>
+        </a:xfrm>
+      </p:grpSpPr>
+      <p:sp>
+        <p:nvSpPr>
+          <p:cNvPr id="2" name="Text 0"/>
+          <p:cNvSpPr/>
+          <p:nvPr/>
+        </p:nvSpPr>
+        <p:spPr>
+          <a:xfrm>
+            <a:off x="457200" y="237744"/>
+            <a:ext cx="9765792" cy="566928"/>
+          </a:xfrm>
+          <a:prstGeom prst="rect">
+            <a:avLst/>
+          </a:prstGeom>
+          <a:noFill/>
+          <a:ln/>
+        </p:spPr>
+        <p:txBody>
+          <a:bodyPr wrap="square" lIns="0" tIns="0" rIns="0" bIns="0" rtlCol="0" anchor="ctr"/>
+          <a:lstStyle/>
+          <a:p>
+            <a:pPr indent="0" marL="0">
+              <a:buNone/>
+            </a:pPr>
+            <a:r>
+              <a:rPr lang="en-US" sz="3200" b="1" dirty="0">
+                <a:solidFill>
+                  <a:srgbClr val="17313B"/>
+                </a:solidFill>
+                <a:latin typeface="Malgun Gothic" pitchFamily="34" charset="0"/>
+                <a:ea typeface="Malgun Gothic" pitchFamily="34" charset="-122"/>
+                <a:cs typeface="Malgun Gothic" pitchFamily="34" charset="-120"/>
+              </a:rPr>
+              <a:t>제품·기술 축 — FDP Host–SSD 통합 플랫폼</a:t>
+            </a:r>
+            <a:endParaRPr lang="en-US" sz="3200" dirty="0"/>
+          </a:p>
+        </p:txBody>
+      </p:sp>
+      <p:sp>
+        <p:nvSpPr>
+          <p:cNvPr id="3" name="Text 1"/>
+          <p:cNvSpPr/>
+          <p:nvPr/>
+        </p:nvSpPr>
+        <p:spPr>
+          <a:xfrm>
+            <a:off x="10268712" y="310896"/>
+            <a:ext cx="1463040" cy="420624"/>
+          </a:xfrm>
+          <a:prstGeom prst="roundRect">
+            <a:avLst>
+              <a:gd name="adj" fmla="val 21739"/>
+            </a:avLst>
+          </a:prstGeom>
+          <a:solidFill>
+            <a:srgbClr val="EFF3F5"/>
+          </a:solidFill>
+          <a:ln/>
+        </p:spPr>
+        <p:txBody>
+          <a:bodyPr wrap="square" lIns="0" tIns="0" rIns="0" bIns="0" rtlCol="0" anchor="ctr"/>
+          <a:lstStyle/>
+          <a:p>
+            <a:pPr algn="ctr" indent="0" marL="0">
+              <a:buNone/>
+            </a:pPr>
+            <a:r>
+              <a:rPr lang="en-US" sz="1400" b="1" dirty="0">
+                <a:solidFill>
+                  <a:srgbClr val="5A7184"/>
+                </a:solidFill>
+                <a:latin typeface="Malgun Gothic" pitchFamily="34" charset="0"/>
+                <a:ea typeface="Malgun Gothic" pitchFamily="34" charset="-122"/>
+                <a:cs typeface="Malgun Gothic" pitchFamily="34" charset="-120"/>
+              </a:rPr>
+              <a:t>제품 축 ②</a:t>
+            </a:r>
+            <a:endParaRPr lang="en-US" sz="1400" dirty="0"/>
+          </a:p>
+        </p:txBody>
+      </p:sp>
+      <p:sp>
+        <p:nvSpPr>
+          <p:cNvPr id="4" name="Text 2"/>
+          <p:cNvSpPr/>
+          <p:nvPr/>
+        </p:nvSpPr>
+        <p:spPr>
+          <a:xfrm>
+            <a:off x="457200" y="6510528"/>
+            <a:ext cx="6949440" cy="256032"/>
+          </a:xfrm>
+          <a:prstGeom prst="rect">
+            <a:avLst/>
+          </a:prstGeom>
+          <a:noFill/>
+          <a:ln/>
+        </p:spPr>
+        <p:txBody>
+          <a:bodyPr wrap="square" lIns="0" tIns="0" rIns="0" bIns="0" rtlCol="0" anchor="ctr"/>
+          <a:lstStyle/>
+          <a:p>
+            <a:pPr indent="0" marL="0">
+              <a:buNone/>
+            </a:pPr>
+            <a:r>
+              <a:rPr lang="en-US" sz="1000" dirty="0">
+                <a:solidFill>
+                  <a:srgbClr val="5A7184"/>
+                </a:solidFill>
+                <a:latin typeface="Malgun Gothic" pitchFamily="34" charset="0"/>
+                <a:ea typeface="Malgun Gothic" pitchFamily="34" charset="-122"/>
+                <a:cs typeface="Malgun Gothic" pitchFamily="34" charset="-120"/>
+              </a:rPr>
+              <a:t>삼성전자 메모리사업부 · 개발실 체질 전환 전략 요약 · 2026-07-24</a:t>
+            </a:r>
+            <a:endParaRPr lang="en-US" sz="1000" dirty="0"/>
+          </a:p>
+        </p:txBody>
+      </p:sp>
+      <p:sp>
+        <p:nvSpPr>
+          <p:cNvPr id="5" name="Text 3"/>
+          <p:cNvSpPr/>
+          <p:nvPr/>
+        </p:nvSpPr>
+        <p:spPr>
+          <a:xfrm>
+            <a:off x="7589520" y="6510528"/>
+            <a:ext cx="4142232" cy="256032"/>
+          </a:xfrm>
+          <a:prstGeom prst="rect">
+            <a:avLst/>
+          </a:prstGeom>
+          <a:noFill/>
+          <a:ln/>
+        </p:spPr>
+        <p:txBody>
+          <a:bodyPr wrap="square" lIns="0" tIns="0" rIns="0" bIns="0" rtlCol="0" anchor="ctr"/>
+          <a:lstStyle/>
+          <a:p>
+            <a:pPr algn="r" indent="0" marL="0">
+              <a:buNone/>
+            </a:pPr>
+            <a:r>
+              <a:rPr lang="en-US" sz="1000" dirty="0">
+                <a:solidFill>
+                  <a:srgbClr val="5A7184"/>
+                </a:solidFill>
+                <a:latin typeface="Malgun Gothic" pitchFamily="34" charset="0"/>
+                <a:ea typeface="Malgun Gothic" pitchFamily="34" charset="-122"/>
+                <a:cs typeface="Malgun Gothic" pitchFamily="34" charset="-120"/>
+              </a:rPr>
+              <a:t>원천: wiki/strategies/fdp-host-ssd-platform.md</a:t>
+            </a:r>
+            <a:endParaRPr lang="en-US" sz="1000" dirty="0"/>
+          </a:p>
+        </p:txBody>
+      </p:sp>
+      <p:sp>
+        <p:nvSpPr>
+          <p:cNvPr id="6" name="Text 4"/>
+          <p:cNvSpPr/>
+          <p:nvPr/>
+        </p:nvSpPr>
+        <p:spPr>
+          <a:xfrm>
+            <a:off x="457200" y="859536"/>
+            <a:ext cx="7315200" cy="310896"/>
+          </a:xfrm>
+          <a:prstGeom prst="rect">
+            <a:avLst/>
+          </a:prstGeom>
+          <a:noFill/>
+          <a:ln/>
+        </p:spPr>
+        <p:txBody>
+          <a:bodyPr wrap="square" lIns="0" tIns="0" rIns="0" bIns="0" rtlCol="0" anchor="ctr"/>
+          <a:lstStyle/>
+          <a:p>
+            <a:pPr indent="0" marL="0">
+              <a:buNone/>
+            </a:pPr>
+            <a:r>
+              <a:rPr lang="en-US" sz="1600" b="1" dirty="0">
+                <a:solidFill>
+                  <a:srgbClr val="17313B"/>
+                </a:solidFill>
+                <a:latin typeface="Malgun Gothic" pitchFamily="34" charset="0"/>
+                <a:ea typeface="Malgun Gothic" pitchFamily="34" charset="-122"/>
+                <a:cs typeface="Malgun Gothic" pitchFamily="34" charset="-120"/>
+              </a:rPr>
+              <a:t>실행전략 6종 — Samsung FDP Enablement</a:t>
+            </a:r>
+            <a:endParaRPr lang="en-US" sz="1600" dirty="0"/>
+          </a:p>
+        </p:txBody>
+      </p:sp>
+      <p:sp>
+        <p:nvSpPr>
+          <p:cNvPr id="7" name="Shape 5"/>
+          <p:cNvSpPr/>
+          <p:nvPr/>
+        </p:nvSpPr>
+        <p:spPr>
+          <a:xfrm>
+            <a:off x="457200" y="1280160"/>
+            <a:ext cx="3602736" cy="1737360"/>
+          </a:xfrm>
+          <a:prstGeom prst="roundRect">
+            <a:avLst>
+              <a:gd name="adj" fmla="val 4737"/>
+            </a:avLst>
+          </a:prstGeom>
+          <a:solidFill>
+            <a:srgbClr val="F5F7F8"/>
+          </a:solidFill>
+          <a:ln/>
+        </p:spPr>
+      </p:sp>
+      <p:sp>
+        <p:nvSpPr>
+          <p:cNvPr id="8" name="Shape 6"/>
+          <p:cNvSpPr/>
+          <p:nvPr/>
+        </p:nvSpPr>
+        <p:spPr>
+          <a:xfrm>
+            <a:off x="640080" y="1444752"/>
+            <a:ext cx="402336" cy="402336"/>
+          </a:xfrm>
+          <a:prstGeom prst="ellipse">
+            <a:avLst/>
+          </a:prstGeom>
+          <a:solidFill>
+            <a:srgbClr val="0E6BA8"/>
+          </a:solidFill>
+          <a:ln/>
+        </p:spPr>
+      </p:sp>
+      <p:pic>
+        <p:nvPicPr>
+          <p:cNvPr id="9" name="Image 0" descr="preencoded.png">    </p:cNvPr>
+          <p:cNvPicPr>
+            <a:picLocks noChangeAspect="1"/>
+          </p:cNvPicPr>
+          <p:nvPr/>
+        </p:nvPicPr>
+        <p:blipFill>
+          <a:blip r:embed="rId1"/>
+          <a:stretch>
+            <a:fillRect/>
+          </a:stretch>
+        </p:blipFill>
+        <p:spPr>
+          <a:xfrm>
+            <a:off x="736641" y="1541313"/>
+            <a:ext cx="209215" cy="209215"/>
+          </a:xfrm>
+          <a:prstGeom prst="rect">
+            <a:avLst/>
+          </a:prstGeom>
+        </p:spPr>
+      </p:pic>
+      <p:sp>
+        <p:nvSpPr>
+          <p:cNvPr id="10" name="Text 7"/>
+          <p:cNvSpPr/>
+          <p:nvPr/>
+        </p:nvSpPr>
+        <p:spPr>
+          <a:xfrm>
+            <a:off x="1152144" y="1463040"/>
+            <a:ext cx="2743200" cy="365760"/>
+          </a:xfrm>
+          <a:prstGeom prst="rect">
+            <a:avLst/>
+          </a:prstGeom>
+          <a:noFill/>
+          <a:ln/>
+        </p:spPr>
+        <p:txBody>
+          <a:bodyPr wrap="square" lIns="0" tIns="0" rIns="0" bIns="0" rtlCol="0" anchor="ctr"/>
+          <a:lstStyle/>
+          <a:p>
+            <a:pPr indent="0" marL="0">
+              <a:buNone/>
+            </a:pPr>
+            <a:r>
+              <a:rPr lang="en-US" sz="1400" b="1" dirty="0">
+                <a:solidFill>
+                  <a:srgbClr val="17313B"/>
+                </a:solidFill>
+                <a:latin typeface="Malgun Gothic" pitchFamily="34" charset="0"/>
+                <a:ea typeface="Malgun Gothic" pitchFamily="34" charset="-122"/>
+                <a:cs typeface="Malgun Gothic" pitchFamily="34" charset="-120"/>
+              </a:rPr>
+              <a:t>1. Enablement Platform</a:t>
+            </a:r>
+            <a:endParaRPr lang="en-US" sz="1400" dirty="0"/>
+          </a:p>
+        </p:txBody>
+      </p:sp>
+      <p:sp>
+        <p:nvSpPr>
+          <p:cNvPr id="11" name="Text 8"/>
+          <p:cNvSpPr/>
+          <p:nvPr/>
+        </p:nvSpPr>
+        <p:spPr>
+          <a:xfrm>
+            <a:off x="658368" y="1956816"/>
+            <a:ext cx="3200400" cy="969264"/>
+          </a:xfrm>
+          <a:prstGeom prst="rect">
+            <a:avLst/>
+          </a:prstGeom>
+          <a:noFill/>
+          <a:ln/>
+        </p:spPr>
+        <p:txBody>
+          <a:bodyPr wrap="square" lIns="0" tIns="0" rIns="0" bIns="0" rtlCol="0" anchor="t"/>
+          <a:lstStyle/>
+          <a:p>
+            <a:pPr indent="0" marL="0">
+              <a:lnSpc>
+                <a:spcPct val="112000"/>
+              </a:lnSpc>
+              <a:buNone/>
+            </a:pPr>
+            <a:r>
+              <a:rPr lang="en-US" sz="1050" dirty="0">
+                <a:solidFill>
+                  <a:srgbClr val="5A7184"/>
+                </a:solidFill>
+                <a:latin typeface="Malgun Gothic" pitchFamily="34" charset="0"/>
+                <a:ea typeface="Malgun Gothic" pitchFamily="34" charset="-122"/>
+                <a:cs typeface="Malgun Gothic" pitchFamily="34" charset="-120"/>
+              </a:rPr>
+              <a:t>FDP SDK·공통 라이브러리 (Linux·io_uring·SPDK) · Workload Profiler(trace→추천 RUH·예상 WAF) · Emulator/Digital Twin</a:t>
+            </a:r>
+            <a:endParaRPr lang="en-US" sz="1050" dirty="0"/>
+          </a:p>
+        </p:txBody>
+      </p:sp>
+      <p:sp>
+        <p:nvSpPr>
+          <p:cNvPr id="12" name="Shape 9"/>
+          <p:cNvSpPr/>
+          <p:nvPr/>
+        </p:nvSpPr>
+        <p:spPr>
+          <a:xfrm>
+            <a:off x="4297680" y="1280160"/>
+            <a:ext cx="3602736" cy="1737360"/>
+          </a:xfrm>
+          <a:prstGeom prst="roundRect">
+            <a:avLst>
+              <a:gd name="adj" fmla="val 4737"/>
+            </a:avLst>
+          </a:prstGeom>
+          <a:solidFill>
+            <a:srgbClr val="F5F7F8"/>
+          </a:solidFill>
+          <a:ln/>
+        </p:spPr>
+      </p:sp>
+      <p:sp>
+        <p:nvSpPr>
+          <p:cNvPr id="13" name="Shape 10"/>
+          <p:cNvSpPr/>
+          <p:nvPr/>
+        </p:nvSpPr>
+        <p:spPr>
+          <a:xfrm>
+            <a:off x="4480560" y="1444752"/>
+            <a:ext cx="402336" cy="402336"/>
+          </a:xfrm>
+          <a:prstGeom prst="ellipse">
+            <a:avLst/>
+          </a:prstGeom>
+          <a:solidFill>
+            <a:srgbClr val="028090"/>
+          </a:solidFill>
+          <a:ln/>
+        </p:spPr>
+      </p:sp>
+      <p:pic>
+        <p:nvPicPr>
+          <p:cNvPr id="14" name="Image 1" descr="preencoded.png">    </p:cNvPr>
+          <p:cNvPicPr>
+            <a:picLocks noChangeAspect="1"/>
+          </p:cNvPicPr>
+          <p:nvPr/>
+        </p:nvPicPr>
+        <p:blipFill>
+          <a:blip r:embed="rId2"/>
+          <a:stretch>
+            <a:fillRect/>
+          </a:stretch>
+        </p:blipFill>
+        <p:spPr>
+          <a:xfrm>
+            <a:off x="4577121" y="1541313"/>
+            <a:ext cx="209215" cy="209215"/>
+          </a:xfrm>
+          <a:prstGeom prst="rect">
+            <a:avLst/>
+          </a:prstGeom>
+        </p:spPr>
+      </p:pic>
+      <p:sp>
+        <p:nvSpPr>
+          <p:cNvPr id="15" name="Text 11"/>
+          <p:cNvSpPr/>
+          <p:nvPr/>
+        </p:nvSpPr>
+        <p:spPr>
+          <a:xfrm>
+            <a:off x="4992624" y="1463040"/>
+            <a:ext cx="2743200" cy="365760"/>
+          </a:xfrm>
+          <a:prstGeom prst="rect">
+            <a:avLst/>
+          </a:prstGeom>
+          <a:noFill/>
+          <a:ln/>
+        </p:spPr>
+        <p:txBody>
+          <a:bodyPr wrap="square" lIns="0" tIns="0" rIns="0" bIns="0" rtlCol="0" anchor="ctr"/>
+          <a:lstStyle/>
+          <a:p>
+            <a:pPr indent="0" marL="0">
+              <a:buNone/>
+            </a:pPr>
+            <a:r>
+              <a:rPr lang="en-US" sz="1400" b="1" dirty="0">
+                <a:solidFill>
+                  <a:srgbClr val="17313B"/>
+                </a:solidFill>
+                <a:latin typeface="Malgun Gothic" pitchFamily="34" charset="0"/>
+                <a:ea typeface="Malgun Gothic" pitchFamily="34" charset="-122"/>
+                <a:cs typeface="Malgun Gothic" pitchFamily="34" charset="-120"/>
+              </a:rPr>
+              <a:t>2. 표준 워크로드 프로파일</a:t>
+            </a:r>
+            <a:endParaRPr lang="en-US" sz="1400" dirty="0"/>
+          </a:p>
+        </p:txBody>
+      </p:sp>
+      <p:sp>
+        <p:nvSpPr>
+          <p:cNvPr id="16" name="Text 12"/>
+          <p:cNvSpPr/>
+          <p:nvPr/>
+        </p:nvSpPr>
+        <p:spPr>
+          <a:xfrm>
+            <a:off x="4498848" y="1956816"/>
+            <a:ext cx="3200400" cy="969264"/>
+          </a:xfrm>
+          <a:prstGeom prst="rect">
+            <a:avLst/>
+          </a:prstGeom>
+          <a:noFill/>
+          <a:ln/>
+        </p:spPr>
+        <p:txBody>
+          <a:bodyPr wrap="square" lIns="0" tIns="0" rIns="0" bIns="0" rtlCol="0" anchor="t"/>
+          <a:lstStyle/>
+          <a:p>
+            <a:pPr indent="0" marL="0">
+              <a:lnSpc>
+                <a:spcPct val="112000"/>
+              </a:lnSpc>
+              <a:buNone/>
+            </a:pPr>
+            <a:r>
+              <a:rPr lang="en-US" sz="1050" dirty="0">
+                <a:solidFill>
+                  <a:srgbClr val="5A7184"/>
+                </a:solidFill>
+                <a:latin typeface="Malgun Gothic" pitchFamily="34" charset="0"/>
+                <a:ea typeface="Malgun Gothic" pitchFamily="34" charset="-122"/>
+                <a:cs typeface="Malgun Gothic" pitchFamily="34" charset="-120"/>
+              </a:rPr>
+              <a:t>Cache·KV·DB·Multi-tenant·Vector·Checkpoint·QLC 7종 — 펌웨어 공통화와 고객별 최적화 양립</a:t>
+            </a:r>
+            <a:endParaRPr lang="en-US" sz="1050" dirty="0"/>
+          </a:p>
+        </p:txBody>
+      </p:sp>
+      <p:sp>
+        <p:nvSpPr>
+          <p:cNvPr id="17" name="Shape 13"/>
+          <p:cNvSpPr/>
+          <p:nvPr/>
+        </p:nvSpPr>
+        <p:spPr>
+          <a:xfrm>
+            <a:off x="8138160" y="1280160"/>
+            <a:ext cx="3602736" cy="1737360"/>
+          </a:xfrm>
+          <a:prstGeom prst="roundRect">
+            <a:avLst>
+              <a:gd name="adj" fmla="val 4737"/>
+            </a:avLst>
+          </a:prstGeom>
+          <a:solidFill>
+            <a:srgbClr val="F5F7F8"/>
+          </a:solidFill>
+          <a:ln/>
+        </p:spPr>
+      </p:sp>
+      <p:sp>
+        <p:nvSpPr>
+          <p:cNvPr id="18" name="Shape 14"/>
+          <p:cNvSpPr/>
+          <p:nvPr/>
+        </p:nvSpPr>
+        <p:spPr>
+          <a:xfrm>
+            <a:off x="8321040" y="1444752"/>
+            <a:ext cx="402336" cy="402336"/>
+          </a:xfrm>
+          <a:prstGeom prst="ellipse">
+            <a:avLst/>
+          </a:prstGeom>
+          <a:solidFill>
+            <a:srgbClr val="02A878"/>
+          </a:solidFill>
+          <a:ln/>
+        </p:spPr>
+      </p:sp>
+      <p:pic>
+        <p:nvPicPr>
+          <p:cNvPr id="19" name="Image 2" descr="preencoded.png">    </p:cNvPr>
+          <p:cNvPicPr>
+            <a:picLocks noChangeAspect="1"/>
+          </p:cNvPicPr>
+          <p:nvPr/>
+        </p:nvPicPr>
+        <p:blipFill>
+          <a:blip r:embed="rId3"/>
+          <a:stretch>
+            <a:fillRect/>
+          </a:stretch>
+        </p:blipFill>
+        <p:spPr>
+          <a:xfrm>
+            <a:off x="8417601" y="1541313"/>
+            <a:ext cx="209215" cy="209215"/>
+          </a:xfrm>
+          <a:prstGeom prst="rect">
+            <a:avLst/>
+          </a:prstGeom>
+        </p:spPr>
+      </p:pic>
+      <p:sp>
+        <p:nvSpPr>
+          <p:cNvPr id="20" name="Text 15"/>
+          <p:cNvSpPr/>
+          <p:nvPr/>
+        </p:nvSpPr>
+        <p:spPr>
+          <a:xfrm>
+            <a:off x="8833104" y="1463040"/>
+            <a:ext cx="2743200" cy="365760"/>
+          </a:xfrm>
+          <a:prstGeom prst="rect">
+            <a:avLst/>
+          </a:prstGeom>
+          <a:noFill/>
+          <a:ln/>
+        </p:spPr>
+        <p:txBody>
+          <a:bodyPr wrap="square" lIns="0" tIns="0" rIns="0" bIns="0" rtlCol="0" anchor="ctr"/>
+          <a:lstStyle/>
+          <a:p>
+            <a:pPr indent="0" marL="0">
+              <a:buNone/>
+            </a:pPr>
+            <a:r>
+              <a:rPr lang="en-US" sz="1400" b="1" dirty="0">
+                <a:solidFill>
+                  <a:srgbClr val="17313B"/>
+                </a:solidFill>
+                <a:latin typeface="Malgun Gothic" pitchFamily="34" charset="0"/>
+                <a:ea typeface="Malgun Gothic" pitchFamily="34" charset="-122"/>
+                <a:cs typeface="Malgun Gothic" pitchFamily="34" charset="-120"/>
+              </a:rPr>
+              <a:t>3. End-to-End 공동검증</a:t>
+            </a:r>
+            <a:endParaRPr lang="en-US" sz="1400" dirty="0"/>
+          </a:p>
+        </p:txBody>
+      </p:sp>
+      <p:sp>
+        <p:nvSpPr>
+          <p:cNvPr id="21" name="Text 16"/>
+          <p:cNvSpPr/>
+          <p:nvPr/>
+        </p:nvSpPr>
+        <p:spPr>
+          <a:xfrm>
+            <a:off x="8339328" y="1956816"/>
+            <a:ext cx="3200400" cy="969264"/>
+          </a:xfrm>
+          <a:prstGeom prst="rect">
+            <a:avLst/>
+          </a:prstGeom>
+          <a:noFill/>
+          <a:ln/>
+        </p:spPr>
+        <p:txBody>
+          <a:bodyPr wrap="square" lIns="0" tIns="0" rIns="0" bIns="0" rtlCol="0" anchor="t"/>
+          <a:lstStyle/>
+          <a:p>
+            <a:pPr indent="0" marL="0">
+              <a:lnSpc>
+                <a:spcPct val="112000"/>
+              </a:lnSpc>
+              <a:buNone/>
+            </a:pPr>
+            <a:r>
+              <a:rPr lang="en-US" sz="1050" dirty="0">
+                <a:solidFill>
+                  <a:srgbClr val="5A7184"/>
+                </a:solidFill>
+                <a:latin typeface="Malgun Gothic" pitchFamily="34" charset="0"/>
+                <a:ea typeface="Malgun Gothic" pitchFamily="34" charset="-122"/>
+                <a:cs typeface="Malgun Gothic" pitchFamily="34" charset="-120"/>
+              </a:rPr>
+              <a:t>App→Host→SSD→NAND→텔레메트리 · 시스템 성과 지표(WAF·p999·격리·전력) · 고객 trace의 pre/post-silicon 재사용</a:t>
+            </a:r>
+            <a:endParaRPr lang="en-US" sz="1050" dirty="0"/>
+          </a:p>
+        </p:txBody>
+      </p:sp>
+      <p:sp>
+        <p:nvSpPr>
+          <p:cNvPr id="22" name="Shape 17"/>
+          <p:cNvSpPr/>
+          <p:nvPr/>
+        </p:nvSpPr>
+        <p:spPr>
+          <a:xfrm>
+            <a:off x="457200" y="3163824"/>
+            <a:ext cx="3602736" cy="1737360"/>
+          </a:xfrm>
+          <a:prstGeom prst="roundRect">
+            <a:avLst>
+              <a:gd name="adj" fmla="val 4737"/>
+            </a:avLst>
+          </a:prstGeom>
+          <a:solidFill>
+            <a:srgbClr val="F5F7F8"/>
+          </a:solidFill>
+          <a:ln/>
+        </p:spPr>
+      </p:sp>
+      <p:sp>
+        <p:nvSpPr>
+          <p:cNvPr id="23" name="Shape 18"/>
+          <p:cNvSpPr/>
+          <p:nvPr/>
+        </p:nvSpPr>
+        <p:spPr>
+          <a:xfrm>
+            <a:off x="640080" y="3328416"/>
+            <a:ext cx="402336" cy="402336"/>
+          </a:xfrm>
+          <a:prstGeom prst="ellipse">
+            <a:avLst/>
+          </a:prstGeom>
+          <a:solidFill>
+            <a:srgbClr val="4C7C94"/>
+          </a:solidFill>
+          <a:ln/>
+        </p:spPr>
+      </p:sp>
+      <p:pic>
+        <p:nvPicPr>
+          <p:cNvPr id="24" name="Image 3" descr="preencoded.png">    </p:cNvPr>
+          <p:cNvPicPr>
+            <a:picLocks noChangeAspect="1"/>
+          </p:cNvPicPr>
+          <p:nvPr/>
+        </p:nvPicPr>
+        <p:blipFill>
+          <a:blip r:embed="rId4"/>
+          <a:stretch>
+            <a:fillRect/>
+          </a:stretch>
+        </p:blipFill>
+        <p:spPr>
+          <a:xfrm>
+            <a:off x="736641" y="3424977"/>
+            <a:ext cx="209215" cy="209215"/>
+          </a:xfrm>
+          <a:prstGeom prst="rect">
+            <a:avLst/>
+          </a:prstGeom>
+        </p:spPr>
+      </p:pic>
+      <p:sp>
+        <p:nvSpPr>
+          <p:cNvPr id="25" name="Text 19"/>
+          <p:cNvSpPr/>
+          <p:nvPr/>
+        </p:nvSpPr>
+        <p:spPr>
+          <a:xfrm>
+            <a:off x="1152144" y="3346704"/>
+            <a:ext cx="2743200" cy="365760"/>
+          </a:xfrm>
+          <a:prstGeom prst="rect">
+            <a:avLst/>
+          </a:prstGeom>
+          <a:noFill/>
+          <a:ln/>
+        </p:spPr>
+        <p:txBody>
+          <a:bodyPr wrap="square" lIns="0" tIns="0" rIns="0" bIns="0" rtlCol="0" anchor="ctr"/>
+          <a:lstStyle/>
+          <a:p>
+            <a:pPr indent="0" marL="0">
+              <a:buNone/>
+            </a:pPr>
+            <a:r>
+              <a:rPr lang="en-US" sz="1400" b="1" dirty="0">
+                <a:solidFill>
+                  <a:srgbClr val="17313B"/>
+                </a:solidFill>
+                <a:latin typeface="Malgun Gothic" pitchFamily="34" charset="0"/>
+                <a:ea typeface="Malgun Gothic" pitchFamily="34" charset="-122"/>
+                <a:cs typeface="Malgun Gothic" pitchFamily="34" charset="-120"/>
+              </a:rPr>
+              <a:t>4. 고객 공동개발 조직</a:t>
+            </a:r>
+            <a:endParaRPr lang="en-US" sz="1400" dirty="0"/>
+          </a:p>
+        </p:txBody>
+      </p:sp>
+      <p:sp>
+        <p:nvSpPr>
+          <p:cNvPr id="26" name="Text 20"/>
+          <p:cNvSpPr/>
+          <p:nvPr/>
+        </p:nvSpPr>
+        <p:spPr>
+          <a:xfrm>
+            <a:off x="658368" y="3840480"/>
+            <a:ext cx="3200400" cy="969264"/>
+          </a:xfrm>
+          <a:prstGeom prst="rect">
+            <a:avLst/>
+          </a:prstGeom>
+          <a:noFill/>
+          <a:ln/>
+        </p:spPr>
+        <p:txBody>
+          <a:bodyPr wrap="square" lIns="0" tIns="0" rIns="0" bIns="0" rtlCol="0" anchor="t"/>
+          <a:lstStyle/>
+          <a:p>
+            <a:pPr indent="0" marL="0">
+              <a:lnSpc>
+                <a:spcPct val="112000"/>
+              </a:lnSpc>
+              <a:buNone/>
+            </a:pPr>
+            <a:r>
+              <a:rPr lang="en-US" sz="1050" dirty="0">
+                <a:solidFill>
+                  <a:srgbClr val="5A7184"/>
+                </a:solidFill>
+                <a:latin typeface="Malgun Gothic" pitchFamily="34" charset="0"/>
+                <a:ea typeface="Malgun Gothic" pitchFamily="34" charset="-122"/>
+                <a:cs typeface="Malgun Gothic" pitchFamily="34" charset="-120"/>
+              </a:rPr>
+              <a:t>Host SW · Workload Integration · Solution Engineering · E2E Validation — 기술지원이 아니라 제품 기획·개발 참여</a:t>
+            </a:r>
+            <a:endParaRPr lang="en-US" sz="1050" dirty="0"/>
+          </a:p>
+        </p:txBody>
+      </p:sp>
+      <p:sp>
+        <p:nvSpPr>
+          <p:cNvPr id="27" name="Shape 21"/>
+          <p:cNvSpPr/>
+          <p:nvPr/>
+        </p:nvSpPr>
+        <p:spPr>
+          <a:xfrm>
+            <a:off x="4297680" y="3163824"/>
+            <a:ext cx="3602736" cy="1737360"/>
+          </a:xfrm>
+          <a:prstGeom prst="roundRect">
+            <a:avLst>
+              <a:gd name="adj" fmla="val 4737"/>
+            </a:avLst>
+          </a:prstGeom>
+          <a:solidFill>
+            <a:srgbClr val="F5F7F8"/>
+          </a:solidFill>
+          <a:ln/>
+        </p:spPr>
+      </p:sp>
+      <p:sp>
+        <p:nvSpPr>
+          <p:cNvPr id="28" name="Shape 22"/>
+          <p:cNvSpPr/>
+          <p:nvPr/>
+        </p:nvSpPr>
+        <p:spPr>
+          <a:xfrm>
+            <a:off x="4480560" y="3328416"/>
+            <a:ext cx="402336" cy="402336"/>
+          </a:xfrm>
+          <a:prstGeom prst="ellipse">
+            <a:avLst/>
+          </a:prstGeom>
+          <a:solidFill>
+            <a:srgbClr val="0E6BA8"/>
+          </a:solidFill>
+          <a:ln/>
+        </p:spPr>
+      </p:sp>
+      <p:pic>
+        <p:nvPicPr>
+          <p:cNvPr id="29" name="Image 4" descr="preencoded.png">    </p:cNvPr>
+          <p:cNvPicPr>
+            <a:picLocks noChangeAspect="1"/>
+          </p:cNvPicPr>
+          <p:nvPr/>
+        </p:nvPicPr>
+        <p:blipFill>
+          <a:blip r:embed="rId5"/>
+          <a:stretch>
+            <a:fillRect/>
+          </a:stretch>
+        </p:blipFill>
+        <p:spPr>
+          <a:xfrm>
+            <a:off x="4577121" y="3424977"/>
+            <a:ext cx="209215" cy="209215"/>
+          </a:xfrm>
+          <a:prstGeom prst="rect">
+            <a:avLst/>
+          </a:prstGeom>
+        </p:spPr>
+      </p:pic>
+      <p:sp>
+        <p:nvSpPr>
+          <p:cNvPr id="30" name="Text 23"/>
+          <p:cNvSpPr/>
+          <p:nvPr/>
+        </p:nvSpPr>
+        <p:spPr>
+          <a:xfrm>
+            <a:off x="4992624" y="3346704"/>
+            <a:ext cx="2743200" cy="365760"/>
+          </a:xfrm>
+          <a:prstGeom prst="rect">
+            <a:avLst/>
+          </a:prstGeom>
+          <a:noFill/>
+          <a:ln/>
+        </p:spPr>
+        <p:txBody>
+          <a:bodyPr wrap="square" lIns="0" tIns="0" rIns="0" bIns="0" rtlCol="0" anchor="ctr"/>
+          <a:lstStyle/>
+          <a:p>
+            <a:pPr indent="0" marL="0">
+              <a:buNone/>
+            </a:pPr>
+            <a:r>
+              <a:rPr lang="en-US" sz="1400" b="1" dirty="0">
+                <a:solidFill>
+                  <a:srgbClr val="17313B"/>
+                </a:solidFill>
+                <a:latin typeface="Malgun Gothic" pitchFamily="34" charset="0"/>
+                <a:ea typeface="Malgun Gothic" pitchFamily="34" charset="-122"/>
+                <a:cs typeface="Malgun Gothic" pitchFamily="34" charset="-120"/>
+              </a:rPr>
+              <a:t>5. Binding 계약 기술협력</a:t>
+            </a:r>
+            <a:endParaRPr lang="en-US" sz="1400" dirty="0"/>
+          </a:p>
+        </p:txBody>
+      </p:sp>
+      <p:sp>
+        <p:nvSpPr>
+          <p:cNvPr id="31" name="Text 24"/>
+          <p:cNvSpPr/>
+          <p:nvPr/>
+        </p:nvSpPr>
+        <p:spPr>
+          <a:xfrm>
+            <a:off x="4498848" y="3840480"/>
+            <a:ext cx="3200400" cy="969264"/>
+          </a:xfrm>
+          <a:prstGeom prst="rect">
+            <a:avLst/>
+          </a:prstGeom>
+          <a:noFill/>
+          <a:ln/>
+        </p:spPr>
+        <p:txBody>
+          <a:bodyPr wrap="square" lIns="0" tIns="0" rIns="0" bIns="0" rtlCol="0" anchor="t"/>
+          <a:lstStyle/>
+          <a:p>
+            <a:pPr indent="0" marL="0">
+              <a:lnSpc>
+                <a:spcPct val="112000"/>
+              </a:lnSpc>
+              <a:buNone/>
+            </a:pPr>
+            <a:r>
+              <a:rPr lang="en-US" sz="1050" dirty="0">
+                <a:solidFill>
+                  <a:srgbClr val="5A7184"/>
+                </a:solidFill>
+                <a:latin typeface="Malgun Gothic" pitchFamily="34" charset="0"/>
+                <a:ea typeface="Malgun Gothic" pitchFamily="34" charset="-122"/>
+                <a:cs typeface="Malgun Gothic" pitchFamily="34" charset="-120"/>
+              </a:rPr>
+              <a:t>고객: 물량·trace 제공·공동 로드맵 ↔ 삼성: 공급능력·SDK·개선 목표 — 공동 플랫폼 계약으로 확장</a:t>
+            </a:r>
+            <a:endParaRPr lang="en-US" sz="1050" dirty="0"/>
+          </a:p>
+        </p:txBody>
+      </p:sp>
+      <p:sp>
+        <p:nvSpPr>
+          <p:cNvPr id="32" name="Shape 25"/>
+          <p:cNvSpPr/>
+          <p:nvPr/>
+        </p:nvSpPr>
+        <p:spPr>
+          <a:xfrm>
+            <a:off x="8138160" y="3163824"/>
+            <a:ext cx="3602736" cy="1737360"/>
+          </a:xfrm>
+          <a:prstGeom prst="roundRect">
+            <a:avLst>
+              <a:gd name="adj" fmla="val 4737"/>
+            </a:avLst>
+          </a:prstGeom>
+          <a:solidFill>
+            <a:srgbClr val="F5F7F8"/>
+          </a:solidFill>
+          <a:ln/>
+        </p:spPr>
+      </p:sp>
+      <p:sp>
+        <p:nvSpPr>
+          <p:cNvPr id="33" name="Shape 26"/>
+          <p:cNvSpPr/>
+          <p:nvPr/>
+        </p:nvSpPr>
+        <p:spPr>
+          <a:xfrm>
+            <a:off x="8321040" y="3328416"/>
+            <a:ext cx="402336" cy="402336"/>
+          </a:xfrm>
+          <a:prstGeom prst="ellipse">
+            <a:avLst/>
+          </a:prstGeom>
+          <a:solidFill>
+            <a:srgbClr val="028090"/>
+          </a:solidFill>
+          <a:ln/>
+        </p:spPr>
+      </p:sp>
+      <p:pic>
+        <p:nvPicPr>
+          <p:cNvPr id="34" name="Image 5" descr="preencoded.png">    </p:cNvPr>
+          <p:cNvPicPr>
+            <a:picLocks noChangeAspect="1"/>
+          </p:cNvPicPr>
+          <p:nvPr/>
+        </p:nvPicPr>
+        <p:blipFill>
+          <a:blip r:embed="rId6"/>
+          <a:stretch>
+            <a:fillRect/>
+          </a:stretch>
+        </p:blipFill>
+        <p:spPr>
+          <a:xfrm>
+            <a:off x="8417601" y="3424977"/>
+            <a:ext cx="209215" cy="209215"/>
+          </a:xfrm>
+          <a:prstGeom prst="rect">
+            <a:avLst/>
+          </a:prstGeom>
+        </p:spPr>
+      </p:pic>
+      <p:sp>
+        <p:nvSpPr>
+          <p:cNvPr id="35" name="Text 27"/>
+          <p:cNvSpPr/>
+          <p:nvPr/>
+        </p:nvSpPr>
+        <p:spPr>
+          <a:xfrm>
+            <a:off x="8833104" y="3346704"/>
+            <a:ext cx="2743200" cy="365760"/>
+          </a:xfrm>
+          <a:prstGeom prst="rect">
+            <a:avLst/>
+          </a:prstGeom>
+          <a:noFill/>
+          <a:ln/>
+        </p:spPr>
+        <p:txBody>
+          <a:bodyPr wrap="square" lIns="0" tIns="0" rIns="0" bIns="0" rtlCol="0" anchor="ctr"/>
+          <a:lstStyle/>
+          <a:p>
+            <a:pPr indent="0" marL="0">
+              <a:buNone/>
+            </a:pPr>
+            <a:r>
+              <a:rPr lang="en-US" sz="1400" b="1" dirty="0">
+                <a:solidFill>
+                  <a:srgbClr val="17313B"/>
+                </a:solidFill>
+                <a:latin typeface="Malgun Gothic" pitchFamily="34" charset="0"/>
+                <a:ea typeface="Malgun Gothic" pitchFamily="34" charset="-122"/>
+                <a:cs typeface="Malgun Gothic" pitchFamily="34" charset="-120"/>
+              </a:rPr>
+              <a:t>6. 오픈소스·차별화 경계</a:t>
+            </a:r>
+            <a:endParaRPr lang="en-US" sz="1400" dirty="0"/>
+          </a:p>
+        </p:txBody>
+      </p:sp>
+      <p:sp>
+        <p:nvSpPr>
+          <p:cNvPr id="36" name="Text 28"/>
+          <p:cNvSpPr/>
+          <p:nvPr/>
+        </p:nvSpPr>
+        <p:spPr>
+          <a:xfrm>
+            <a:off x="8339328" y="3840480"/>
+            <a:ext cx="3200400" cy="969264"/>
+          </a:xfrm>
+          <a:prstGeom prst="rect">
+            <a:avLst/>
+          </a:prstGeom>
+          <a:noFill/>
+          <a:ln/>
+        </p:spPr>
+        <p:txBody>
+          <a:bodyPr wrap="square" lIns="0" tIns="0" rIns="0" bIns="0" rtlCol="0" anchor="t"/>
+          <a:lstStyle/>
+          <a:p>
+            <a:pPr indent="0" marL="0">
+              <a:lnSpc>
+                <a:spcPct val="112000"/>
+              </a:lnSpc>
+              <a:buNone/>
+            </a:pPr>
+            <a:r>
+              <a:rPr lang="en-US" sz="1050" dirty="0">
+                <a:solidFill>
+                  <a:srgbClr val="5A7184"/>
+                </a:solidFill>
+                <a:latin typeface="Malgun Gothic" pitchFamily="34" charset="0"/>
+                <a:ea typeface="Malgun Gothic" pitchFamily="34" charset="-122"/>
+                <a:cs typeface="Malgun Gothic" pitchFamily="34" charset="-120"/>
+              </a:rPr>
+              <a:t>공개: 기본 라이브러리·연동·적합성 테스트 / 차별화: NAND·FTL 모델·정책 추천·예측 모델 — lock-in 우려 해소</a:t>
+            </a:r>
+            <a:endParaRPr lang="en-US" sz="1050" dirty="0"/>
+          </a:p>
+        </p:txBody>
+      </p:sp>
+      <p:sp>
+        <p:nvSpPr>
+          <p:cNvPr id="37" name="Shape 29"/>
+          <p:cNvSpPr/>
+          <p:nvPr/>
+        </p:nvSpPr>
+        <p:spPr>
+          <a:xfrm>
+            <a:off x="457200" y="5175504"/>
+            <a:ext cx="11274552" cy="822960"/>
+          </a:xfrm>
+          <a:prstGeom prst="roundRect">
+            <a:avLst>
+              <a:gd name="adj" fmla="val 8889"/>
+            </a:avLst>
+          </a:prstGeom>
+          <a:solidFill>
+            <a:srgbClr val="E8F6F0"/>
+          </a:solidFill>
+          <a:ln w="15875">
+            <a:solidFill>
+              <a:srgbClr val="02A878"/>
+            </a:solidFill>
+            <a:prstDash val="solid"/>
+          </a:ln>
+        </p:spPr>
+      </p:sp>
+      <p:pic>
+        <p:nvPicPr>
+          <p:cNvPr id="38" name="Image 6" descr="preencoded.png">    </p:cNvPr>
+          <p:cNvPicPr>
+            <a:picLocks noChangeAspect="1"/>
+          </p:cNvPicPr>
+          <p:nvPr/>
+        </p:nvPicPr>
+        <p:blipFill>
+          <a:blip r:embed="rId7"/>
+          <a:stretch>
+            <a:fillRect/>
+          </a:stretch>
+        </p:blipFill>
+        <p:spPr>
+          <a:xfrm>
+            <a:off x="658368" y="5404104"/>
+            <a:ext cx="365760" cy="365760"/>
+          </a:xfrm>
+          <a:prstGeom prst="rect">
+            <a:avLst/>
+          </a:prstGeom>
+        </p:spPr>
+      </p:pic>
+      <p:sp>
+        <p:nvSpPr>
+          <p:cNvPr id="39" name="Text 30"/>
+          <p:cNvSpPr/>
+          <p:nvPr/>
+        </p:nvSpPr>
+        <p:spPr>
+          <a:xfrm>
+            <a:off x="1152144" y="5175504"/>
+            <a:ext cx="10424160" cy="822960"/>
+          </a:xfrm>
+          <a:prstGeom prst="rect">
+            <a:avLst/>
+          </a:prstGeom>
+          <a:noFill/>
+          <a:ln/>
+        </p:spPr>
+        <p:txBody>
+          <a:bodyPr wrap="square" lIns="0" tIns="0" rIns="0" bIns="0" rtlCol="0" anchor="ctr"/>
+          <a:lstStyle/>
+          <a:p>
+            <a:pPr indent="0" marL="0">
+              <a:lnSpc>
+                <a:spcPct val="112000"/>
+              </a:lnSpc>
+              <a:buNone/>
+            </a:pPr>
+            <a:r>
+              <a:rPr lang="en-US" sz="1450" b="1" dirty="0">
+                <a:solidFill>
+                  <a:srgbClr val="17313B"/>
+                </a:solidFill>
+                <a:latin typeface="Malgun Gothic" pitchFamily="34" charset="0"/>
+                <a:ea typeface="Malgun Gothic" pitchFamily="34" charset="-122"/>
+                <a:cs typeface="Malgun Gothic" pitchFamily="34" charset="-120"/>
+              </a:rPr>
+              <a:t>핵심 KPI — 고객 시스템에서 FDP가 실제 활성화된 SSD 용량</a:t>
+            </a:r>
+            <a:endParaRPr lang="en-US" sz="1450" dirty="0"/>
+          </a:p>
+          <a:p>
+            <a:pPr indent="0" marL="0">
+              <a:lnSpc>
+                <a:spcPct val="112000"/>
+              </a:lnSpc>
+              <a:buNone/>
+            </a:pPr>
+            <a:r>
+              <a:rPr lang="en-US" sz="1100" dirty="0">
+                <a:solidFill>
+                  <a:srgbClr val="5A7184"/>
+                </a:solidFill>
+                <a:latin typeface="Malgun Gothic" pitchFamily="34" charset="0"/>
+                <a:ea typeface="Malgun Gothic" pitchFamily="34" charset="-122"/>
+                <a:cs typeface="Malgun Gothic" pitchFamily="34" charset="-120"/>
+              </a:rPr>
+              <a:t>지원 SSD 출하량만 세면 미사용 기능이 된다 · Captive SSD 계획에서 삼성 완제품으로 전환된 물량을 병행 추적 · WAF·p999·usable capacity 개선율</a:t>
+            </a:r>
+            <a:endParaRPr lang="en-US" sz="1450" dirty="0"/>
+          </a:p>
+        </p:txBody>
+      </p:sp>
+      <p:sp>
+        <p:nvSpPr>
+          <p:cNvPr id="40" name="Text 31"/>
+          <p:cNvSpPr/>
+          <p:nvPr/>
+        </p:nvSpPr>
+        <p:spPr>
+          <a:xfrm>
+            <a:off x="457200" y="6108192"/>
+            <a:ext cx="11274552" cy="256032"/>
+          </a:xfrm>
+          <a:prstGeom prst="rect">
+            <a:avLst/>
+          </a:prstGeom>
+          <a:noFill/>
+          <a:ln/>
+        </p:spPr>
+        <p:txBody>
+          <a:bodyPr wrap="square" lIns="0" tIns="0" rIns="0" bIns="0" rtlCol="0" anchor="ctr"/>
+          <a:lstStyle/>
+          <a:p>
+            <a:pPr algn="ctr" indent="0" marL="0">
+              <a:buNone/>
+            </a:pPr>
+            <a:r>
+              <a:rPr lang="en-US" sz="1200" i="1" dirty="0">
+                <a:solidFill>
+                  <a:srgbClr val="5A7184"/>
+                </a:solidFill>
+                <a:latin typeface="Malgun Gothic" pitchFamily="34" charset="0"/>
+                <a:ea typeface="Malgun Gothic" pitchFamily="34" charset="-122"/>
+                <a:cs typeface="Malgun Gothic" pitchFamily="34" charset="-120"/>
+              </a:rPr>
+              <a:t>실행 주체: 인재 축(FDE 스타)이 이 플랫폼을 들고 고객 아키텍처 안으로 들어간다</a:t>
+            </a:r>
+            <a:endParaRPr lang="en-US" sz="1200" dirty="0"/>
           </a:p>
         </p:txBody>
       </p:sp>

--- a/outputs/presentation/dev-transformation-summary.pptx
+++ b/outputs/presentation/dev-transformation-summary.pptx
@@ -10,9 +10,10 @@
     <p:sldId id="258" r:id="rId4"/>
     <p:sldId id="259" r:id="rId5"/>
     <p:sldId id="260" r:id="rId6"/>
+    <p:sldId id="261" r:id="rId7"/>
   </p:sldIdLst>
   <p:notesMasterIdLst>
-    <p:notesMasterId r:id="rId7"/>
+    <p:notesMasterId r:id="rId8"/>
   </p:notesMasterIdLst>
   <p:sldSz cx="12192000" cy="6858000"/>
   <p:notesSz cx="6858000" cy="12192000"/>
@@ -900,6 +901,94 @@
 </p:notes>
 </file>
 
+<file path=ppt/notesSlides/notesSlide6.xml><?xml version="1.0" encoding="utf-8"?>
+<p:notes xmlns:a="http://schemas.openxmlformats.org/drawingml/2006/main" xmlns:r="http://schemas.openxmlformats.org/officeDocument/2006/relationships" xmlns:p="http://schemas.openxmlformats.org/presentationml/2006/main">
+  <p:cSld>
+    <p:spTree>
+      <p:nvGrpSpPr>
+        <p:cNvPr id="1" name=""/>
+        <p:cNvGrpSpPr/>
+        <p:nvPr/>
+      </p:nvGrpSpPr>
+      <p:grpSpPr>
+        <a:xfrm>
+          <a:off x="0" y="0"/>
+          <a:ext cx="0" cy="0"/>
+          <a:chOff x="0" y="0"/>
+          <a:chExt cx="0" cy="0"/>
+        </a:xfrm>
+      </p:grpSpPr>
+      <p:sp>
+        <p:nvSpPr>
+          <p:cNvPr id="2" name="Slide Image Placeholder 1"/>
+          <p:cNvSpPr>
+            <a:spLocks noGrp="1" noRot="1" noChangeAspect="1"/>
+          </p:cNvSpPr>
+          <p:nvPr>
+            <p:ph type="sldImg"/>
+          </p:nvPr>
+        </p:nvSpPr>
+        <p:spPr/>
+      </p:sp>
+      <p:sp>
+        <p:nvSpPr>
+          <p:cNvPr id="3" name="Notes Placeholder 2"/>
+          <p:cNvSpPr>
+            <a:spLocks noGrp="1"/>
+          </p:cNvSpPr>
+          <p:nvPr>
+            <p:ph type="body" idx="1"/>
+          </p:nvPr>
+        </p:nvSpPr>
+        <p:spPr/>
+        <p:txBody>
+          <a:bodyPr/>
+          <a:lstStyle/>
+          <a:p>
+            <a:r>
+              <a:rPr lang="en-US" dirty="0"/>
+              <a:t/>
+            </a:r>
+            <a:endParaRPr lang="en-US" dirty="0"/>
+          </a:p>
+        </p:txBody>
+      </p:sp>
+      <p:sp>
+        <p:nvSpPr>
+          <p:cNvPr id="4" name="Slide Number Placeholder 3"/>
+          <p:cNvSpPr>
+            <a:spLocks noGrp="1"/>
+          </p:cNvSpPr>
+          <p:nvPr>
+            <p:ph type="sldNum" sz="quarter" idx="10"/>
+          </p:nvPr>
+        </p:nvSpPr>
+        <p:spPr/>
+        <p:txBody>
+          <a:bodyPr/>
+          <a:lstStyle/>
+          <a:p>
+            <a:fld id="{F7021451-1387-4CA6-816F-3879F97B5CBC}" type="slidenum">
+              <a:rPr lang="en-US"/>
+              <a:t>6</a:t>
+            </a:fld>
+            <a:endParaRPr lang="en-US"/>
+          </a:p>
+        </p:txBody>
+      </p:sp>
+    </p:spTree>
+    <p:extLst>
+      <p:ext uri="{BB962C8B-B14F-4D97-AF65-F5344CB8AC3E}">
+        <p14:creationId xmlns:p14="http://schemas.microsoft.com/office/powerpoint/2010/main" val="1024086991"/>
+      </p:ext>
+    </p:extLst>
+  </p:cSld>
+  <p:clrMapOvr>
+    <a:masterClrMapping/>
+  </p:clrMapOvr>
+</p:notes>
+</file>
+
 <file path=ppt/slideLayouts/slideLayout1.xml><?xml version="1.0" encoding="utf-8"?>
 <p:sldLayout xmlns:a="http://schemas.openxmlformats.org/drawingml/2006/main" xmlns:r="http://schemas.openxmlformats.org/officeDocument/2006/relationships" xmlns:p="http://schemas.openxmlformats.org/presentationml/2006/main" preserve="1">
   <p:cSld name="DEFAULT">
@@ -7623,12 +7712,12 @@
         </p:nvSpPr>
         <p:spPr>
           <a:xfrm>
-            <a:off x="457200" y="859536"/>
-            <a:ext cx="11274552" cy="512064"/>
+            <a:off x="457200" y="877824"/>
+            <a:ext cx="3602736" cy="914400"/>
           </a:xfrm>
           <a:prstGeom prst="roundRect">
             <a:avLst>
-              <a:gd name="adj" fmla="val 16071"/>
+              <a:gd name="adj" fmla="val 8000"/>
             </a:avLst>
           </a:prstGeom>
           <a:solidFill>
@@ -7641,10 +7730,13 @@
           <a:lstStyle/>
           <a:p>
             <a:pPr algn="ctr" indent="0" marL="0">
-              <a:buNone/>
-            </a:pPr>
-            <a:r>
-              <a:rPr lang="en-US" sz="1650" i="1" dirty="0">
+              <a:lnSpc>
+                <a:spcPct val="110000"/>
+              </a:lnSpc>
+              <a:buNone/>
+            </a:pPr>
+            <a:r>
+              <a:rPr lang="en-US" sz="1350" b="1" dirty="0">
                 <a:solidFill>
                   <a:srgbClr val="17313B"/>
                 </a:solidFill>
@@ -7652,34 +7744,777 @@
                 <a:ea typeface="Malgun Gothic" pitchFamily="34" charset="-122"/>
                 <a:cs typeface="Malgun Gothic" pitchFamily="34" charset="-120"/>
               </a:rPr>
-              <a:t>“Binding으로 수요를 확보하고, FDP로 제품을 표준화하며, 시스템 소프트웨어로 고객 워크로드를 연결한다”</a:t>
-            </a:r>
-            <a:endParaRPr lang="en-US" sz="1650" dirty="0"/>
-          </a:p>
-        </p:txBody>
-      </p:sp>
-      <p:sp>
-        <p:nvSpPr>
-          <p:cNvPr id="7" name="Shape 5"/>
-          <p:cNvSpPr/>
-          <p:nvPr/>
-        </p:nvSpPr>
-        <p:spPr>
-          <a:xfrm>
-            <a:off x="2011680" y="1517904"/>
-            <a:ext cx="3200400" cy="1371600"/>
+              <a:t>수주산업화 — Binding</a:t>
+            </a:r>
+            <a:endParaRPr lang="en-US" sz="1350" dirty="0"/>
+          </a:p>
+          <a:p>
+            <a:pPr algn="ctr" indent="0" marL="0">
+              <a:lnSpc>
+                <a:spcPct val="110000"/>
+              </a:lnSpc>
+              <a:buNone/>
+            </a:pPr>
+            <a:r>
+              <a:rPr lang="en-US" sz="1050" dirty="0">
+                <a:solidFill>
+                  <a:srgbClr val="5A7184"/>
+                </a:solidFill>
+                <a:latin typeface="Malgun Gothic" pitchFamily="34" charset="0"/>
+                <a:ea typeface="Malgun Gothic" pitchFamily="34" charset="-122"/>
+                <a:cs typeface="Malgun Gothic" pitchFamily="34" charset="-120"/>
+              </a:rPr>
+              <a:t>5년 take-or-pay·선수금 수백억$ — “메모리가 처음으로 바인딩” (이창수 인터뷰)</a:t>
+            </a:r>
+            <a:endParaRPr lang="en-US" sz="1350" dirty="0"/>
+          </a:p>
+        </p:txBody>
+      </p:sp>
+      <p:sp>
+        <p:nvSpPr>
+          <p:cNvPr id="7" name="Text 5"/>
+          <p:cNvSpPr/>
+          <p:nvPr/>
+        </p:nvSpPr>
+        <p:spPr>
+          <a:xfrm>
+            <a:off x="4297680" y="877824"/>
+            <a:ext cx="3602736" cy="914400"/>
           </a:xfrm>
           <a:prstGeom prst="roundRect">
             <a:avLst>
-              <a:gd name="adj" fmla="val 6667"/>
+              <a:gd name="adj" fmla="val 8000"/>
             </a:avLst>
           </a:prstGeom>
           <a:solidFill>
             <a:srgbClr val="F5F7F8"/>
           </a:solidFill>
-          <a:ln w="15875">
+          <a:ln/>
+        </p:spPr>
+        <p:txBody>
+          <a:bodyPr wrap="square" lIns="0" tIns="0" rIns="0" bIns="0" rtlCol="0" anchor="ctr"/>
+          <a:lstStyle/>
+          <a:p>
+            <a:pPr algn="ctr" indent="0" marL="0">
+              <a:lnSpc>
+                <a:spcPct val="110000"/>
+              </a:lnSpc>
+              <a:buNone/>
+            </a:pPr>
+            <a:r>
+              <a:rPr lang="en-US" sz="1350" b="1" dirty="0">
+                <a:solidFill>
+                  <a:srgbClr val="17313B"/>
+                </a:solidFill>
+                <a:latin typeface="Malgun Gothic" pitchFamily="34" charset="0"/>
+                <a:ea typeface="Malgun Gothic" pitchFamily="34" charset="-122"/>
+                <a:cs typeface="Malgun Gothic" pitchFamily="34" charset="-120"/>
+              </a:rPr>
+              <a:t>수요 지배</a:t>
+            </a:r>
+            <a:endParaRPr lang="en-US" sz="1350" dirty="0"/>
+          </a:p>
+          <a:p>
+            <a:pPr algn="ctr" indent="0" marL="0">
+              <a:lnSpc>
+                <a:spcPct val="110000"/>
+              </a:lnSpc>
+              <a:buNone/>
+            </a:pPr>
+            <a:r>
+              <a:rPr lang="en-US" sz="1050" dirty="0">
+                <a:solidFill>
+                  <a:srgbClr val="5A7184"/>
+                </a:solidFill>
+                <a:latin typeface="Malgun Gothic" pitchFamily="34" charset="0"/>
+                <a:ea typeface="Malgun Gothic" pitchFamily="34" charset="-122"/>
+                <a:cs typeface="Malgun Gothic" pitchFamily="34" charset="-120"/>
+              </a:rPr>
+              <a:t>하이퍼스케일러가 글로벌 enterprise SSD의 ~55% 소비 — 소수 고객이 규칙을 정한다</a:t>
+            </a:r>
+            <a:endParaRPr lang="en-US" sz="1350" dirty="0"/>
+          </a:p>
+        </p:txBody>
+      </p:sp>
+      <p:sp>
+        <p:nvSpPr>
+          <p:cNvPr id="8" name="Text 6"/>
+          <p:cNvSpPr/>
+          <p:nvPr/>
+        </p:nvSpPr>
+        <p:spPr>
+          <a:xfrm>
+            <a:off x="8138160" y="877824"/>
+            <a:ext cx="3602736" cy="914400"/>
+          </a:xfrm>
+          <a:prstGeom prst="roundRect">
+            <a:avLst>
+              <a:gd name="adj" fmla="val 8000"/>
+            </a:avLst>
+          </a:prstGeom>
+          <a:solidFill>
+            <a:srgbClr val="F5F7F8"/>
+          </a:solidFill>
+          <a:ln/>
+        </p:spPr>
+        <p:txBody>
+          <a:bodyPr wrap="square" lIns="0" tIns="0" rIns="0" bIns="0" rtlCol="0" anchor="ctr"/>
+          <a:lstStyle/>
+          <a:p>
+            <a:pPr algn="ctr" indent="0" marL="0">
+              <a:lnSpc>
+                <a:spcPct val="110000"/>
+              </a:lnSpc>
+              <a:buNone/>
+            </a:pPr>
+            <a:r>
+              <a:rPr lang="en-US" sz="1350" b="1" dirty="0">
+                <a:solidFill>
+                  <a:srgbClr val="17313B"/>
+                </a:solidFill>
+                <a:latin typeface="Malgun Gothic" pitchFamily="34" charset="0"/>
+                <a:ea typeface="Malgun Gothic" pitchFamily="34" charset="-122"/>
+                <a:cs typeface="Malgun Gothic" pitchFamily="34" charset="-120"/>
+              </a:rPr>
+              <a:t>통제권 상승</a:t>
+            </a:r>
+            <a:endParaRPr lang="en-US" sz="1350" dirty="0"/>
+          </a:p>
+          <a:p>
+            <a:pPr algn="ctr" indent="0" marL="0">
+              <a:lnSpc>
+                <a:spcPct val="110000"/>
+              </a:lnSpc>
+              <a:buNone/>
+            </a:pPr>
+            <a:r>
+              <a:rPr lang="en-US" sz="1050" dirty="0">
+                <a:solidFill>
+                  <a:srgbClr val="5A7184"/>
+                </a:solidFill>
+                <a:latin typeface="Malgun Gothic" pitchFamily="34" charset="0"/>
+                <a:ea typeface="Malgun Gothic" pitchFamily="34" charset="-122"/>
+                <a:cs typeface="Malgun Gothic" pitchFamily="34" charset="-120"/>
+              </a:rPr>
+              <a:t>고객이 완제품 → 펌웨어 → 컨트롤러 → 표준·웨이퍼로 스토리지를 내재화</a:t>
+            </a:r>
+            <a:endParaRPr lang="en-US" sz="1350" dirty="0"/>
+          </a:p>
+        </p:txBody>
+      </p:sp>
+      <p:sp>
+        <p:nvSpPr>
+          <p:cNvPr id="9" name="Text 7"/>
+          <p:cNvSpPr/>
+          <p:nvPr/>
+        </p:nvSpPr>
+        <p:spPr>
+          <a:xfrm>
+            <a:off x="457200" y="1956816"/>
+            <a:ext cx="8229600" cy="274320"/>
+          </a:xfrm>
+          <a:prstGeom prst="rect">
+            <a:avLst/>
+          </a:prstGeom>
+          <a:noFill/>
+          <a:ln/>
+        </p:spPr>
+        <p:txBody>
+          <a:bodyPr wrap="square" lIns="0" tIns="0" rIns="0" bIns="0" rtlCol="0" anchor="ctr"/>
+          <a:lstStyle/>
+          <a:p>
+            <a:pPr indent="0" marL="0">
+              <a:buNone/>
+            </a:pPr>
+            <a:r>
+              <a:rPr lang="en-US" sz="1500" b="1" dirty="0">
+                <a:solidFill>
+                  <a:srgbClr val="17313B"/>
+                </a:solidFill>
+                <a:latin typeface="Malgun Gothic" pitchFamily="34" charset="0"/>
+                <a:ea typeface="Malgun Gothic" pitchFamily="34" charset="-122"/>
+                <a:cs typeface="Malgun Gothic" pitchFamily="34" charset="-120"/>
+              </a:rPr>
+              <a:t>Captive SSD 위상 변화 — 고객 통제권의 단계 상승 (불가역)</a:t>
+            </a:r>
+            <a:endParaRPr lang="en-US" sz="1500" dirty="0"/>
+          </a:p>
+        </p:txBody>
+      </p:sp>
+      <p:sp>
+        <p:nvSpPr>
+          <p:cNvPr id="10" name="Shape 8"/>
+          <p:cNvSpPr/>
+          <p:nvPr/>
+        </p:nvSpPr>
+        <p:spPr>
+          <a:xfrm>
+            <a:off x="640080" y="4407408"/>
+            <a:ext cx="1225296" cy="621792"/>
+          </a:xfrm>
+          <a:prstGeom prst="roundRect">
+            <a:avLst>
+              <a:gd name="adj" fmla="val 7353"/>
+            </a:avLst>
+          </a:prstGeom>
+          <a:solidFill>
+            <a:srgbClr val="C7D3DB"/>
+          </a:solidFill>
+          <a:ln/>
+        </p:spPr>
+      </p:sp>
+      <p:sp>
+        <p:nvSpPr>
+          <p:cNvPr id="11" name="Text 9"/>
+          <p:cNvSpPr/>
+          <p:nvPr/>
+        </p:nvSpPr>
+        <p:spPr>
+          <a:xfrm>
+            <a:off x="640080" y="4443984"/>
+            <a:ext cx="1225296" cy="274320"/>
+          </a:xfrm>
+          <a:prstGeom prst="rect">
+            <a:avLst/>
+          </a:prstGeom>
+          <a:noFill/>
+          <a:ln/>
+        </p:spPr>
+        <p:txBody>
+          <a:bodyPr wrap="square" lIns="0" tIns="0" rIns="0" bIns="0" rtlCol="0" anchor="ctr"/>
+          <a:lstStyle/>
+          <a:p>
+            <a:pPr algn="ctr" indent="0" marL="0">
+              <a:buNone/>
+            </a:pPr>
+            <a:r>
+              <a:rPr lang="en-US" sz="1300" b="1" dirty="0">
+                <a:solidFill>
+                  <a:srgbClr val="17313B"/>
+                </a:solidFill>
+                <a:latin typeface="Malgun Gothic" pitchFamily="34" charset="0"/>
+                <a:ea typeface="Malgun Gothic" pitchFamily="34" charset="-122"/>
+                <a:cs typeface="Malgun Gothic" pitchFamily="34" charset="-120"/>
+              </a:rPr>
+              <a:t>1</a:t>
+            </a:r>
+            <a:endParaRPr lang="en-US" sz="1300" dirty="0"/>
+          </a:p>
+        </p:txBody>
+      </p:sp>
+      <p:sp>
+        <p:nvSpPr>
+          <p:cNvPr id="12" name="Text 10"/>
+          <p:cNvSpPr/>
+          <p:nvPr/>
+        </p:nvSpPr>
+        <p:spPr>
+          <a:xfrm>
+            <a:off x="512064" y="4114800"/>
+            <a:ext cx="1481328" cy="256032"/>
+          </a:xfrm>
+          <a:prstGeom prst="rect">
+            <a:avLst/>
+          </a:prstGeom>
+          <a:noFill/>
+          <a:ln/>
+        </p:spPr>
+        <p:txBody>
+          <a:bodyPr wrap="square" lIns="0" tIns="0" rIns="0" bIns="0" rtlCol="0" anchor="ctr"/>
+          <a:lstStyle/>
+          <a:p>
+            <a:pPr algn="ctr" indent="0" marL="0">
+              <a:buNone/>
+            </a:pPr>
+            <a:r>
+              <a:rPr lang="en-US" sz="1100" b="1" dirty="0">
+                <a:solidFill>
+                  <a:srgbClr val="17313B"/>
+                </a:solidFill>
+                <a:latin typeface="Malgun Gothic" pitchFamily="34" charset="0"/>
+                <a:ea typeface="Malgun Gothic" pitchFamily="34" charset="-122"/>
+                <a:cs typeface="Malgun Gothic" pitchFamily="34" charset="-120"/>
+              </a:rPr>
+              <a:t>완제품 구매</a:t>
+            </a:r>
+            <a:endParaRPr lang="en-US" sz="1100" dirty="0"/>
+          </a:p>
+        </p:txBody>
+      </p:sp>
+      <p:sp>
+        <p:nvSpPr>
+          <p:cNvPr id="13" name="Text 11"/>
+          <p:cNvSpPr/>
+          <p:nvPr/>
+        </p:nvSpPr>
+        <p:spPr>
+          <a:xfrm>
+            <a:off x="640080" y="5084064"/>
+            <a:ext cx="1225296" cy="237744"/>
+          </a:xfrm>
+          <a:prstGeom prst="rect">
+            <a:avLst/>
+          </a:prstGeom>
+          <a:noFill/>
+          <a:ln/>
+        </p:spPr>
+        <p:txBody>
+          <a:bodyPr wrap="square" lIns="0" tIns="0" rIns="0" bIns="0" rtlCol="0" anchor="ctr"/>
+          <a:lstStyle/>
+          <a:p>
+            <a:pPr algn="ctr" indent="0" marL="0">
+              <a:buNone/>
+            </a:pPr>
+            <a:r>
+              <a:rPr lang="en-US" sz="1050" dirty="0">
+                <a:solidFill>
+                  <a:srgbClr val="5A7184"/>
+                </a:solidFill>
+                <a:latin typeface="Malgun Gothic" pitchFamily="34" charset="0"/>
+                <a:ea typeface="Malgun Gothic" pitchFamily="34" charset="-122"/>
+                <a:cs typeface="Malgun Gothic" pitchFamily="34" charset="-120"/>
+              </a:rPr>
+              <a:t>~2016</a:t>
+            </a:r>
+            <a:endParaRPr lang="en-US" sz="1050" dirty="0"/>
+          </a:p>
+        </p:txBody>
+      </p:sp>
+      <p:sp>
+        <p:nvSpPr>
+          <p:cNvPr id="14" name="Shape 12"/>
+          <p:cNvSpPr/>
+          <p:nvPr/>
+        </p:nvSpPr>
+        <p:spPr>
+          <a:xfrm>
+            <a:off x="2121408" y="3785616"/>
+            <a:ext cx="1225296" cy="1243584"/>
+          </a:xfrm>
+          <a:prstGeom prst="roundRect">
+            <a:avLst>
+              <a:gd name="adj" fmla="val 3731"/>
+            </a:avLst>
+          </a:prstGeom>
+          <a:solidFill>
+            <a:srgbClr val="9DBACB"/>
+          </a:solidFill>
+          <a:ln/>
+        </p:spPr>
+      </p:sp>
+      <p:sp>
+        <p:nvSpPr>
+          <p:cNvPr id="15" name="Text 13"/>
+          <p:cNvSpPr/>
+          <p:nvPr/>
+        </p:nvSpPr>
+        <p:spPr>
+          <a:xfrm>
+            <a:off x="2121408" y="3822192"/>
+            <a:ext cx="1225296" cy="274320"/>
+          </a:xfrm>
+          <a:prstGeom prst="rect">
+            <a:avLst/>
+          </a:prstGeom>
+          <a:noFill/>
+          <a:ln/>
+        </p:spPr>
+        <p:txBody>
+          <a:bodyPr wrap="square" lIns="0" tIns="0" rIns="0" bIns="0" rtlCol="0" anchor="ctr"/>
+          <a:lstStyle/>
+          <a:p>
+            <a:pPr algn="ctr" indent="0" marL="0">
+              <a:buNone/>
+            </a:pPr>
+            <a:r>
+              <a:rPr lang="en-US" sz="1300" b="1" dirty="0">
+                <a:solidFill>
+                  <a:srgbClr val="17313B"/>
+                </a:solidFill>
+                <a:latin typeface="Malgun Gothic" pitchFamily="34" charset="0"/>
+                <a:ea typeface="Malgun Gothic" pitchFamily="34" charset="-122"/>
+                <a:cs typeface="Malgun Gothic" pitchFamily="34" charset="-120"/>
+              </a:rPr>
+              <a:t>2</a:t>
+            </a:r>
+            <a:endParaRPr lang="en-US" sz="1300" dirty="0"/>
+          </a:p>
+        </p:txBody>
+      </p:sp>
+      <p:sp>
+        <p:nvSpPr>
+          <p:cNvPr id="16" name="Text 14"/>
+          <p:cNvSpPr/>
+          <p:nvPr/>
+        </p:nvSpPr>
+        <p:spPr>
+          <a:xfrm>
+            <a:off x="1993392" y="3493008"/>
+            <a:ext cx="1481328" cy="256032"/>
+          </a:xfrm>
+          <a:prstGeom prst="rect">
+            <a:avLst/>
+          </a:prstGeom>
+          <a:noFill/>
+          <a:ln/>
+        </p:spPr>
+        <p:txBody>
+          <a:bodyPr wrap="square" lIns="0" tIns="0" rIns="0" bIns="0" rtlCol="0" anchor="ctr"/>
+          <a:lstStyle/>
+          <a:p>
+            <a:pPr algn="ctr" indent="0" marL="0">
+              <a:buNone/>
+            </a:pPr>
+            <a:r>
+              <a:rPr lang="en-US" sz="1100" b="1" dirty="0">
+                <a:solidFill>
+                  <a:srgbClr val="17313B"/>
+                </a:solidFill>
+                <a:latin typeface="Malgun Gothic" pitchFamily="34" charset="0"/>
+                <a:ea typeface="Malgun Gothic" pitchFamily="34" charset="-122"/>
+                <a:cs typeface="Malgun Gothic" pitchFamily="34" charset="-120"/>
+              </a:rPr>
+              <a:t>커스텀 펌웨어</a:t>
+            </a:r>
+            <a:endParaRPr lang="en-US" sz="1100" dirty="0"/>
+          </a:p>
+        </p:txBody>
+      </p:sp>
+      <p:sp>
+        <p:nvSpPr>
+          <p:cNvPr id="17" name="Text 15"/>
+          <p:cNvSpPr/>
+          <p:nvPr/>
+        </p:nvSpPr>
+        <p:spPr>
+          <a:xfrm>
+            <a:off x="2121408" y="5084064"/>
+            <a:ext cx="1225296" cy="237744"/>
+          </a:xfrm>
+          <a:prstGeom prst="rect">
+            <a:avLst/>
+          </a:prstGeom>
+          <a:noFill/>
+          <a:ln/>
+        </p:spPr>
+        <p:txBody>
+          <a:bodyPr wrap="square" lIns="0" tIns="0" rIns="0" bIns="0" rtlCol="0" anchor="ctr"/>
+          <a:lstStyle/>
+          <a:p>
+            <a:pPr algn="ctr" indent="0" marL="0">
+              <a:buNone/>
+            </a:pPr>
+            <a:r>
+              <a:rPr lang="en-US" sz="1050" dirty="0">
+                <a:solidFill>
+                  <a:srgbClr val="5A7184"/>
+                </a:solidFill>
+                <a:latin typeface="Malgun Gothic" pitchFamily="34" charset="0"/>
+                <a:ea typeface="Malgun Gothic" pitchFamily="34" charset="-122"/>
+                <a:cs typeface="Malgun Gothic" pitchFamily="34" charset="-120"/>
+              </a:rPr>
+              <a:t>2017~20</a:t>
+            </a:r>
+            <a:endParaRPr lang="en-US" sz="1050" dirty="0"/>
+          </a:p>
+        </p:txBody>
+      </p:sp>
+      <p:sp>
+        <p:nvSpPr>
+          <p:cNvPr id="18" name="Shape 16"/>
+          <p:cNvSpPr/>
+          <p:nvPr/>
+        </p:nvSpPr>
+        <p:spPr>
+          <a:xfrm>
+            <a:off x="3602736" y="3163824"/>
+            <a:ext cx="1225296" cy="1865376"/>
+          </a:xfrm>
+          <a:prstGeom prst="roundRect">
+            <a:avLst>
+              <a:gd name="adj" fmla="val 3731"/>
+            </a:avLst>
+          </a:prstGeom>
+          <a:solidFill>
+            <a:srgbClr val="4C7C94"/>
+          </a:solidFill>
+          <a:ln/>
+        </p:spPr>
+      </p:sp>
+      <p:sp>
+        <p:nvSpPr>
+          <p:cNvPr id="19" name="Text 17"/>
+          <p:cNvSpPr/>
+          <p:nvPr/>
+        </p:nvSpPr>
+        <p:spPr>
+          <a:xfrm>
+            <a:off x="3602736" y="3200400"/>
+            <a:ext cx="1225296" cy="274320"/>
+          </a:xfrm>
+          <a:prstGeom prst="rect">
+            <a:avLst/>
+          </a:prstGeom>
+          <a:noFill/>
+          <a:ln/>
+        </p:spPr>
+        <p:txBody>
+          <a:bodyPr wrap="square" lIns="0" tIns="0" rIns="0" bIns="0" rtlCol="0" anchor="ctr"/>
+          <a:lstStyle/>
+          <a:p>
+            <a:pPr algn="ctr" indent="0" marL="0">
+              <a:buNone/>
+            </a:pPr>
+            <a:r>
+              <a:rPr lang="en-US" sz="1300" b="1" dirty="0">
+                <a:solidFill>
+                  <a:srgbClr val="FFFFFF"/>
+                </a:solidFill>
+                <a:latin typeface="Malgun Gothic" pitchFamily="34" charset="0"/>
+                <a:ea typeface="Malgun Gothic" pitchFamily="34" charset="-122"/>
+                <a:cs typeface="Malgun Gothic" pitchFamily="34" charset="-120"/>
+              </a:rPr>
+              <a:t>3</a:t>
+            </a:r>
+            <a:endParaRPr lang="en-US" sz="1300" dirty="0"/>
+          </a:p>
+        </p:txBody>
+      </p:sp>
+      <p:sp>
+        <p:nvSpPr>
+          <p:cNvPr id="20" name="Text 18"/>
+          <p:cNvSpPr/>
+          <p:nvPr/>
+        </p:nvSpPr>
+        <p:spPr>
+          <a:xfrm>
+            <a:off x="3474720" y="2871216"/>
+            <a:ext cx="1481328" cy="256032"/>
+          </a:xfrm>
+          <a:prstGeom prst="rect">
+            <a:avLst/>
+          </a:prstGeom>
+          <a:noFill/>
+          <a:ln/>
+        </p:spPr>
+        <p:txBody>
+          <a:bodyPr wrap="square" lIns="0" tIns="0" rIns="0" bIns="0" rtlCol="0" anchor="ctr"/>
+          <a:lstStyle/>
+          <a:p>
+            <a:pPr algn="ctr" indent="0" marL="0">
+              <a:buNone/>
+            </a:pPr>
+            <a:r>
+              <a:rPr lang="en-US" sz="1100" b="1" dirty="0">
+                <a:solidFill>
+                  <a:srgbClr val="17313B"/>
+                </a:solidFill>
+                <a:latin typeface="Malgun Gothic" pitchFamily="34" charset="0"/>
+                <a:ea typeface="Malgun Gothic" pitchFamily="34" charset="-122"/>
+                <a:cs typeface="Malgun Gothic" pitchFamily="34" charset="-120"/>
+              </a:rPr>
+              <a:t>자체 컨트롤러</a:t>
+            </a:r>
+            <a:endParaRPr lang="en-US" sz="1100" dirty="0"/>
+          </a:p>
+        </p:txBody>
+      </p:sp>
+      <p:sp>
+        <p:nvSpPr>
+          <p:cNvPr id="21" name="Text 19"/>
+          <p:cNvSpPr/>
+          <p:nvPr/>
+        </p:nvSpPr>
+        <p:spPr>
+          <a:xfrm>
+            <a:off x="3602736" y="5084064"/>
+            <a:ext cx="1225296" cy="237744"/>
+          </a:xfrm>
+          <a:prstGeom prst="rect">
+            <a:avLst/>
+          </a:prstGeom>
+          <a:noFill/>
+          <a:ln/>
+        </p:spPr>
+        <p:txBody>
+          <a:bodyPr wrap="square" lIns="0" tIns="0" rIns="0" bIns="0" rtlCol="0" anchor="ctr"/>
+          <a:lstStyle/>
+          <a:p>
+            <a:pPr algn="ctr" indent="0" marL="0">
+              <a:buNone/>
+            </a:pPr>
+            <a:r>
+              <a:rPr lang="en-US" sz="1050" dirty="0">
+                <a:solidFill>
+                  <a:srgbClr val="5A7184"/>
+                </a:solidFill>
+                <a:latin typeface="Malgun Gothic" pitchFamily="34" charset="0"/>
+                <a:ea typeface="Malgun Gothic" pitchFamily="34" charset="-122"/>
+                <a:cs typeface="Malgun Gothic" pitchFamily="34" charset="-120"/>
+              </a:rPr>
+              <a:t>2021~</a:t>
+            </a:r>
+            <a:endParaRPr lang="en-US" sz="1050" dirty="0"/>
+          </a:p>
+        </p:txBody>
+      </p:sp>
+      <p:sp>
+        <p:nvSpPr>
+          <p:cNvPr id="22" name="Shape 20"/>
+          <p:cNvSpPr/>
+          <p:nvPr/>
+        </p:nvSpPr>
+        <p:spPr>
+          <a:xfrm>
+            <a:off x="5084064" y="2542032"/>
+            <a:ext cx="1225296" cy="2487168"/>
+          </a:xfrm>
+          <a:prstGeom prst="roundRect">
+            <a:avLst>
+              <a:gd name="adj" fmla="val 3731"/>
+            </a:avLst>
+          </a:prstGeom>
+          <a:solidFill>
+            <a:srgbClr val="028090"/>
+          </a:solidFill>
+          <a:ln/>
+        </p:spPr>
+      </p:sp>
+      <p:sp>
+        <p:nvSpPr>
+          <p:cNvPr id="23" name="Text 21"/>
+          <p:cNvSpPr/>
+          <p:nvPr/>
+        </p:nvSpPr>
+        <p:spPr>
+          <a:xfrm>
+            <a:off x="5084064" y="2578608"/>
+            <a:ext cx="1225296" cy="274320"/>
+          </a:xfrm>
+          <a:prstGeom prst="rect">
+            <a:avLst/>
+          </a:prstGeom>
+          <a:noFill/>
+          <a:ln/>
+        </p:spPr>
+        <p:txBody>
+          <a:bodyPr wrap="square" lIns="0" tIns="0" rIns="0" bIns="0" rtlCol="0" anchor="ctr"/>
+          <a:lstStyle/>
+          <a:p>
+            <a:pPr algn="ctr" indent="0" marL="0">
+              <a:buNone/>
+            </a:pPr>
+            <a:r>
+              <a:rPr lang="en-US" sz="1300" b="1" dirty="0">
+                <a:solidFill>
+                  <a:srgbClr val="FFFFFF"/>
+                </a:solidFill>
+                <a:latin typeface="Malgun Gothic" pitchFamily="34" charset="0"/>
+                <a:ea typeface="Malgun Gothic" pitchFamily="34" charset="-122"/>
+                <a:cs typeface="Malgun Gothic" pitchFamily="34" charset="-120"/>
+              </a:rPr>
+              <a:t>4</a:t>
+            </a:r>
+            <a:endParaRPr lang="en-US" sz="1300" dirty="0"/>
+          </a:p>
+        </p:txBody>
+      </p:sp>
+      <p:sp>
+        <p:nvSpPr>
+          <p:cNvPr id="24" name="Text 22"/>
+          <p:cNvSpPr/>
+          <p:nvPr/>
+        </p:nvSpPr>
+        <p:spPr>
+          <a:xfrm>
+            <a:off x="4956048" y="2249424"/>
+            <a:ext cx="1481328" cy="256032"/>
+          </a:xfrm>
+          <a:prstGeom prst="rect">
+            <a:avLst/>
+          </a:prstGeom>
+          <a:noFill/>
+          <a:ln/>
+        </p:spPr>
+        <p:txBody>
+          <a:bodyPr wrap="square" lIns="0" tIns="0" rIns="0" bIns="0" rtlCol="0" anchor="ctr"/>
+          <a:lstStyle/>
+          <a:p>
+            <a:pPr algn="ctr" indent="0" marL="0">
+              <a:buNone/>
+            </a:pPr>
+            <a:r>
+              <a:rPr lang="en-US" sz="1100" b="1" dirty="0">
+                <a:solidFill>
+                  <a:srgbClr val="17313B"/>
+                </a:solidFill>
+                <a:latin typeface="Malgun Gothic" pitchFamily="34" charset="0"/>
+                <a:ea typeface="Malgun Gothic" pitchFamily="34" charset="-122"/>
+                <a:cs typeface="Malgun Gothic" pitchFamily="34" charset="-120"/>
+              </a:rPr>
+              <a:t>표준·웨이퍼</a:t>
+            </a:r>
+            <a:endParaRPr lang="en-US" sz="1100" dirty="0"/>
+          </a:p>
+        </p:txBody>
+      </p:sp>
+      <p:sp>
+        <p:nvSpPr>
+          <p:cNvPr id="25" name="Text 23"/>
+          <p:cNvSpPr/>
+          <p:nvPr/>
+        </p:nvSpPr>
+        <p:spPr>
+          <a:xfrm>
+            <a:off x="5084064" y="5084064"/>
+            <a:ext cx="1225296" cy="237744"/>
+          </a:xfrm>
+          <a:prstGeom prst="rect">
+            <a:avLst/>
+          </a:prstGeom>
+          <a:noFill/>
+          <a:ln/>
+        </p:spPr>
+        <p:txBody>
+          <a:bodyPr wrap="square" lIns="0" tIns="0" rIns="0" bIns="0" rtlCol="0" anchor="ctr"/>
+          <a:lstStyle/>
+          <a:p>
+            <a:pPr algn="ctr" indent="0" marL="0">
+              <a:buNone/>
+            </a:pPr>
+            <a:r>
+              <a:rPr lang="en-US" sz="1050" dirty="0">
+                <a:solidFill>
+                  <a:srgbClr val="5A7184"/>
+                </a:solidFill>
+                <a:latin typeface="Malgun Gothic" pitchFamily="34" charset="0"/>
+                <a:ea typeface="Malgun Gothic" pitchFamily="34" charset="-122"/>
+                <a:cs typeface="Malgun Gothic" pitchFamily="34" charset="-120"/>
+              </a:rPr>
+              <a:t>2022~26</a:t>
+            </a:r>
+            <a:endParaRPr lang="en-US" sz="1050" dirty="0"/>
+          </a:p>
+        </p:txBody>
+      </p:sp>
+      <p:sp>
+        <p:nvSpPr>
+          <p:cNvPr id="26" name="Shape 24"/>
+          <p:cNvSpPr/>
+          <p:nvPr/>
+        </p:nvSpPr>
+        <p:spPr>
+          <a:xfrm>
+            <a:off x="548640" y="5029200"/>
+            <a:ext cx="6126480" cy="0"/>
+          </a:xfrm>
+          <a:prstGeom prst="line">
+            <a:avLst/>
+          </a:prstGeom>
+          <a:noFill/>
+          <a:ln w="19050">
             <a:solidFill>
-              <a:srgbClr val="DCE4E9"/>
+              <a:srgbClr val="C4CFD6"/>
             </a:solidFill>
             <a:prstDash val="solid"/>
           </a:ln>
@@ -7687,14 +8522,14 @@
       </p:sp>
       <p:sp>
         <p:nvSpPr>
-          <p:cNvPr id="8" name="Shape 6"/>
-          <p:cNvSpPr/>
-          <p:nvPr/>
-        </p:nvSpPr>
-        <p:spPr>
-          <a:xfrm>
-            <a:off x="3401568" y="1645920"/>
-            <a:ext cx="420624" cy="420624"/>
+          <p:cNvPr id="27" name="Text 25"/>
+          <p:cNvSpPr/>
+          <p:nvPr/>
+        </p:nvSpPr>
+        <p:spPr>
+          <a:xfrm>
+            <a:off x="7040880" y="2441448"/>
+            <a:ext cx="274320" cy="274320"/>
           </a:xfrm>
           <a:prstGeom prst="ellipse">
             <a:avLst/>
@@ -7704,137 +8539,15 @@
           </a:solidFill>
           <a:ln/>
         </p:spPr>
-      </p:sp>
-      <p:pic>
-        <p:nvPicPr>
-          <p:cNvPr id="9" name="Image 0" descr="preencoded.png">    </p:cNvPr>
-          <p:cNvPicPr>
-            <a:picLocks noChangeAspect="1"/>
-          </p:cNvPicPr>
-          <p:nvPr/>
-        </p:nvPicPr>
-        <p:blipFill>
-          <a:blip r:embed="rId1"/>
-          <a:stretch>
-            <a:fillRect/>
-          </a:stretch>
-        </p:blipFill>
-        <p:spPr>
-          <a:xfrm>
-            <a:off x="3502518" y="1746870"/>
-            <a:ext cx="218724" cy="218724"/>
-          </a:xfrm>
-          <a:prstGeom prst="rect">
-            <a:avLst/>
-          </a:prstGeom>
-        </p:spPr>
-      </p:pic>
-      <p:sp>
-        <p:nvSpPr>
-          <p:cNvPr id="10" name="Text 7"/>
-          <p:cNvSpPr/>
-          <p:nvPr/>
-        </p:nvSpPr>
-        <p:spPr>
-          <a:xfrm>
-            <a:off x="2103120" y="2103120"/>
-            <a:ext cx="3017520" cy="329184"/>
-          </a:xfrm>
-          <a:prstGeom prst="rect">
-            <a:avLst/>
-          </a:prstGeom>
-          <a:noFill/>
-          <a:ln/>
-        </p:spPr>
-        <p:txBody>
-          <a:bodyPr wrap="square" lIns="0" tIns="0" rIns="0" bIns="0" rtlCol="0" anchor="ctr"/>
-          <a:lstStyle/>
-          <a:p>
-            <a:pPr algn="ctr" indent="0" marL="0">
-              <a:buNone/>
-            </a:pPr>
-            <a:r>
-              <a:rPr lang="en-US" sz="1900" b="1" dirty="0">
-                <a:solidFill>
-                  <a:srgbClr val="5A7184"/>
-                </a:solidFill>
-                <a:latin typeface="Malgun Gothic" pitchFamily="34" charset="0"/>
-                <a:ea typeface="Malgun Gothic" pitchFamily="34" charset="-122"/>
-                <a:cs typeface="Malgun Gothic" pitchFamily="34" charset="-120"/>
-              </a:rPr>
-              <a:t>FDP SSD 공급자</a:t>
-            </a:r>
-            <a:endParaRPr lang="en-US" sz="1900" dirty="0"/>
-          </a:p>
-        </p:txBody>
-      </p:sp>
-      <p:sp>
-        <p:nvSpPr>
-          <p:cNvPr id="11" name="Text 8"/>
-          <p:cNvSpPr/>
-          <p:nvPr/>
-        </p:nvSpPr>
-        <p:spPr>
-          <a:xfrm>
-            <a:off x="2103120" y="2468880"/>
-            <a:ext cx="3017520" cy="256032"/>
-          </a:xfrm>
-          <a:prstGeom prst="rect">
-            <a:avLst/>
-          </a:prstGeom>
-          <a:noFill/>
-          <a:ln/>
-        </p:spPr>
-        <p:txBody>
-          <a:bodyPr wrap="square" lIns="0" tIns="0" rIns="0" bIns="0" rtlCol="0" anchor="ctr"/>
-          <a:lstStyle/>
-          <a:p>
-            <a:pPr algn="ctr" indent="0" marL="0">
-              <a:buNone/>
-            </a:pPr>
-            <a:r>
-              <a:rPr lang="en-US" sz="1150" dirty="0">
-                <a:solidFill>
-                  <a:srgbClr val="5A7184"/>
-                </a:solidFill>
-                <a:latin typeface="Malgun Gothic" pitchFamily="34" charset="0"/>
-                <a:ea typeface="Malgun Gothic" pitchFamily="34" charset="-122"/>
-                <a:cs typeface="Malgun Gothic" pitchFamily="34" charset="-120"/>
-              </a:rPr>
-              <a:t>여러 공급사 중 하나 · 가격 경쟁 노출</a:t>
-            </a:r>
-            <a:endParaRPr lang="en-US" sz="1150" dirty="0"/>
-          </a:p>
-        </p:txBody>
-      </p:sp>
-      <p:sp>
-        <p:nvSpPr>
-          <p:cNvPr id="12" name="Text 9"/>
-          <p:cNvSpPr/>
-          <p:nvPr/>
-        </p:nvSpPr>
-        <p:spPr>
-          <a:xfrm>
-            <a:off x="5285232" y="1792224"/>
-            <a:ext cx="1591056" cy="822960"/>
-          </a:xfrm>
-          <a:prstGeom prst="rightArrow">
-            <a:avLst/>
-          </a:prstGeom>
-          <a:solidFill>
-            <a:srgbClr val="028090"/>
-          </a:solidFill>
-          <a:ln/>
-        </p:spPr>
-        <p:txBody>
-          <a:bodyPr wrap="square" lIns="0" tIns="0" rIns="0" bIns="0" rtlCol="0" anchor="ctr"/>
-          <a:lstStyle/>
-          <a:p>
-            <a:pPr algn="ctr" indent="0" marL="0">
-              <a:buNone/>
-            </a:pPr>
-            <a:r>
-              <a:rPr lang="en-US" sz="1200" b="1" dirty="0">
+        <p:txBody>
+          <a:bodyPr wrap="square" lIns="0" tIns="0" rIns="0" bIns="0" rtlCol="0" anchor="ctr"/>
+          <a:lstStyle/>
+          <a:p>
+            <a:pPr algn="ctr" indent="0" marL="0">
+              <a:buNone/>
+            </a:pPr>
+            <a:r>
+              <a:rPr lang="en-US" sz="1100" b="1" dirty="0">
                 <a:solidFill>
                   <a:srgbClr val="FFFFFF"/>
                 </a:solidFill>
@@ -7842,171 +8555,22 @@
                 <a:ea typeface="Malgun Gothic" pitchFamily="34" charset="-122"/>
                 <a:cs typeface="Malgun Gothic" pitchFamily="34" charset="-120"/>
               </a:rPr>
-              <a:t>+ 시스템 SW</a:t>
-            </a:r>
-            <a:endParaRPr lang="en-US" sz="1200" dirty="0"/>
-          </a:p>
-        </p:txBody>
-      </p:sp>
-      <p:sp>
-        <p:nvSpPr>
-          <p:cNvPr id="13" name="Shape 10"/>
-          <p:cNvSpPr/>
-          <p:nvPr/>
-        </p:nvSpPr>
-        <p:spPr>
-          <a:xfrm>
-            <a:off x="6949440" y="1517904"/>
-            <a:ext cx="3200400" cy="1371600"/>
-          </a:xfrm>
-          <a:prstGeom prst="roundRect">
-            <a:avLst>
-              <a:gd name="adj" fmla="val 6667"/>
-            </a:avLst>
-          </a:prstGeom>
-          <a:solidFill>
-            <a:srgbClr val="E8F6F0"/>
-          </a:solidFill>
-          <a:ln w="19050">
-            <a:solidFill>
-              <a:srgbClr val="02A878"/>
-            </a:solidFill>
-            <a:prstDash val="solid"/>
-          </a:ln>
-        </p:spPr>
-      </p:sp>
-      <p:sp>
-        <p:nvSpPr>
-          <p:cNvPr id="14" name="Shape 11"/>
-          <p:cNvSpPr/>
-          <p:nvPr/>
-        </p:nvSpPr>
-        <p:spPr>
-          <a:xfrm>
-            <a:off x="8339328" y="1645920"/>
-            <a:ext cx="420624" cy="420624"/>
-          </a:xfrm>
-          <a:prstGeom prst="ellipse">
-            <a:avLst/>
-          </a:prstGeom>
-          <a:solidFill>
-            <a:srgbClr val="02A878"/>
-          </a:solidFill>
-          <a:ln/>
-        </p:spPr>
-      </p:sp>
-      <p:pic>
-        <p:nvPicPr>
-          <p:cNvPr id="15" name="Image 1" descr="preencoded.png">    </p:cNvPr>
-          <p:cNvPicPr>
-            <a:picLocks noChangeAspect="1"/>
-          </p:cNvPicPr>
-          <p:nvPr/>
-        </p:nvPicPr>
-        <p:blipFill>
-          <a:blip r:embed="rId2"/>
-          <a:stretch>
-            <a:fillRect/>
-          </a:stretch>
-        </p:blipFill>
-        <p:spPr>
-          <a:xfrm>
-            <a:off x="8440278" y="1746870"/>
-            <a:ext cx="218724" cy="218724"/>
-          </a:xfrm>
-          <a:prstGeom prst="rect">
-            <a:avLst/>
-          </a:prstGeom>
-        </p:spPr>
-      </p:pic>
-      <p:sp>
-        <p:nvSpPr>
-          <p:cNvPr id="16" name="Text 12"/>
-          <p:cNvSpPr/>
-          <p:nvPr/>
-        </p:nvSpPr>
-        <p:spPr>
-          <a:xfrm>
-            <a:off x="7040880" y="2103120"/>
-            <a:ext cx="3017520" cy="329184"/>
-          </a:xfrm>
-          <a:prstGeom prst="rect">
-            <a:avLst/>
-          </a:prstGeom>
-          <a:noFill/>
-          <a:ln/>
-        </p:spPr>
-        <p:txBody>
-          <a:bodyPr wrap="square" lIns="0" tIns="0" rIns="0" bIns="0" rtlCol="0" anchor="ctr"/>
-          <a:lstStyle/>
-          <a:p>
-            <a:pPr algn="ctr" indent="0" marL="0">
-              <a:buNone/>
-            </a:pPr>
-            <a:r>
-              <a:rPr lang="en-US" sz="1900" b="1" dirty="0">
-                <a:solidFill>
-                  <a:srgbClr val="02A878"/>
-                </a:solidFill>
-                <a:latin typeface="Malgun Gothic" pitchFamily="34" charset="0"/>
-                <a:ea typeface="Malgun Gothic" pitchFamily="34" charset="-122"/>
-                <a:cs typeface="Malgun Gothic" pitchFamily="34" charset="-120"/>
-              </a:rPr>
-              <a:t>통합 솔루션 제공자</a:t>
-            </a:r>
-            <a:endParaRPr lang="en-US" sz="1900" dirty="0"/>
-          </a:p>
-        </p:txBody>
-      </p:sp>
-      <p:sp>
-        <p:nvSpPr>
-          <p:cNvPr id="17" name="Text 13"/>
-          <p:cNvSpPr/>
-          <p:nvPr/>
-        </p:nvSpPr>
-        <p:spPr>
-          <a:xfrm>
-            <a:off x="6949440" y="2468880"/>
-            <a:ext cx="3200400" cy="256032"/>
-          </a:xfrm>
-          <a:prstGeom prst="rect">
-            <a:avLst/>
-          </a:prstGeom>
-          <a:noFill/>
-          <a:ln/>
-        </p:spPr>
-        <p:txBody>
-          <a:bodyPr wrap="square" lIns="0" tIns="0" rIns="0" bIns="0" rtlCol="0" anchor="ctr"/>
-          <a:lstStyle/>
-          <a:p>
-            <a:pPr algn="ctr" indent="0" marL="0">
-              <a:buNone/>
-            </a:pPr>
-            <a:r>
-              <a:rPr lang="en-US" sz="1150" dirty="0">
-                <a:solidFill>
-                  <a:srgbClr val="17313B"/>
-                </a:solidFill>
-                <a:latin typeface="Malgun Gothic" pitchFamily="34" charset="0"/>
-                <a:ea typeface="Malgun Gothic" pitchFamily="34" charset="-122"/>
-                <a:cs typeface="Malgun Gothic" pitchFamily="34" charset="-120"/>
-              </a:rPr>
-              <a:t>Host SDK · Profiler · End-to-End 검증</a:t>
-            </a:r>
-            <a:endParaRPr lang="en-US" sz="1150" dirty="0"/>
-          </a:p>
-        </p:txBody>
-      </p:sp>
-      <p:sp>
-        <p:nvSpPr>
-          <p:cNvPr id="18" name="Text 14"/>
-          <p:cNvSpPr/>
-          <p:nvPr/>
-        </p:nvSpPr>
-        <p:spPr>
-          <a:xfrm>
-            <a:off x="457200" y="3035808"/>
-            <a:ext cx="5486400" cy="256032"/>
+              <a:t>1</a:t>
+            </a:r>
+            <a:endParaRPr lang="en-US" sz="1100" dirty="0"/>
+          </a:p>
+        </p:txBody>
+      </p:sp>
+      <p:sp>
+        <p:nvSpPr>
+          <p:cNvPr id="28" name="Text 26"/>
+          <p:cNvSpPr/>
+          <p:nvPr/>
+        </p:nvSpPr>
+        <p:spPr>
+          <a:xfrm>
+            <a:off x="7424928" y="2395728"/>
+            <a:ext cx="4206240" cy="603504"/>
           </a:xfrm>
           <a:prstGeom prst="rect">
             <a:avLst/>
@@ -8019,297 +8583,13 @@
           <a:lstStyle/>
           <a:p>
             <a:pPr indent="0" marL="0">
-              <a:buNone/>
-            </a:pPr>
-            <a:r>
-              <a:rPr lang="en-US" sz="1400" b="1" dirty="0">
-                <a:solidFill>
-                  <a:srgbClr val="17313B"/>
-                </a:solidFill>
-                <a:latin typeface="Malgun Gothic" pitchFamily="34" charset="0"/>
-                <a:ea typeface="Malgun Gothic" pitchFamily="34" charset="-122"/>
-                <a:cs typeface="Malgun Gothic" pitchFamily="34" charset="-120"/>
-              </a:rPr>
-              <a:t>왜 시스템 소프트웨어인가</a:t>
-            </a:r>
-            <a:endParaRPr lang="en-US" sz="1400" dirty="0"/>
-          </a:p>
-        </p:txBody>
-      </p:sp>
-      <p:sp>
-        <p:nvSpPr>
-          <p:cNvPr id="19" name="Text 15"/>
-          <p:cNvSpPr/>
-          <p:nvPr/>
-        </p:nvSpPr>
-        <p:spPr>
-          <a:xfrm>
-            <a:off x="457200" y="3328416"/>
-            <a:ext cx="3602736" cy="877824"/>
-          </a:xfrm>
-          <a:prstGeom prst="roundRect">
-            <a:avLst>
-              <a:gd name="adj" fmla="val 8333"/>
-            </a:avLst>
-          </a:prstGeom>
-          <a:solidFill>
-            <a:srgbClr val="F5F7F8"/>
-          </a:solidFill>
-          <a:ln/>
-        </p:spPr>
-        <p:txBody>
-          <a:bodyPr wrap="square" lIns="0" tIns="0" rIns="0" bIns="0" rtlCol="0" anchor="ctr"/>
-          <a:lstStyle/>
-          <a:p>
-            <a:pPr algn="ctr" indent="0" marL="0">
-              <a:lnSpc>
-                <a:spcPct val="110000"/>
-              </a:lnSpc>
-              <a:buNone/>
-            </a:pPr>
-            <a:r>
-              <a:rPr lang="en-US" sz="1350" b="1" dirty="0">
-                <a:solidFill>
-                  <a:srgbClr val="17313B"/>
-                </a:solidFill>
-                <a:latin typeface="Malgun Gothic" pitchFamily="34" charset="0"/>
-                <a:ea typeface="Malgun Gothic" pitchFamily="34" charset="-122"/>
-                <a:cs typeface="Malgun Gothic" pitchFamily="34" charset="-120"/>
-              </a:rPr>
-              <a:t>FDP는 인터페이스일 뿐</a:t>
-            </a:r>
-            <a:endParaRPr lang="en-US" sz="1350" dirty="0"/>
-          </a:p>
-          <a:p>
-            <a:pPr algn="ctr" indent="0" marL="0">
-              <a:lnSpc>
-                <a:spcPct val="110000"/>
-              </a:lnSpc>
-              <a:buNone/>
-            </a:pPr>
-            <a:r>
-              <a:rPr lang="en-US" sz="1050" dirty="0">
-                <a:solidFill>
-                  <a:srgbClr val="5A7184"/>
-                </a:solidFill>
-                <a:latin typeface="Malgun Gothic" pitchFamily="34" charset="0"/>
-                <a:ea typeface="Malgun Gothic" pitchFamily="34" charset="-122"/>
-                <a:cs typeface="Malgun Gothic" pitchFamily="34" charset="-120"/>
-              </a:rPr>
-              <a:t>SSD는 hot/cold·수명·테넌트를 모른다 — 정보는 DB·캐시 등 상위 SW에 있다</a:t>
-            </a:r>
-            <a:endParaRPr lang="en-US" sz="1350" dirty="0"/>
-          </a:p>
-        </p:txBody>
-      </p:sp>
-      <p:sp>
-        <p:nvSpPr>
-          <p:cNvPr id="20" name="Text 16"/>
-          <p:cNvSpPr/>
-          <p:nvPr/>
-        </p:nvSpPr>
-        <p:spPr>
-          <a:xfrm>
-            <a:off x="4297680" y="3328416"/>
-            <a:ext cx="3602736" cy="877824"/>
-          </a:xfrm>
-          <a:prstGeom prst="roundRect">
-            <a:avLst>
-              <a:gd name="adj" fmla="val 8333"/>
-            </a:avLst>
-          </a:prstGeom>
-          <a:solidFill>
-            <a:srgbClr val="F5F7F8"/>
-          </a:solidFill>
-          <a:ln/>
-        </p:spPr>
-        <p:txBody>
-          <a:bodyPr wrap="square" lIns="0" tIns="0" rIns="0" bIns="0" rtlCol="0" anchor="ctr"/>
-          <a:lstStyle/>
-          <a:p>
-            <a:pPr algn="ctr" indent="0" marL="0">
-              <a:lnSpc>
-                <a:spcPct val="110000"/>
-              </a:lnSpc>
-              <a:buNone/>
-            </a:pPr>
-            <a:r>
-              <a:rPr lang="en-US" sz="1350" b="1" dirty="0">
-                <a:solidFill>
-                  <a:srgbClr val="17313B"/>
-                </a:solidFill>
-                <a:latin typeface="Malgun Gothic" pitchFamily="34" charset="0"/>
-                <a:ea typeface="Malgun Gothic" pitchFamily="34" charset="-122"/>
-                <a:cs typeface="Malgun Gothic" pitchFamily="34" charset="-120"/>
-              </a:rPr>
-              <a:t>Captive SSD 확대</a:t>
-            </a:r>
-            <a:endParaRPr lang="en-US" sz="1350" dirty="0"/>
-          </a:p>
-          <a:p>
-            <a:pPr algn="ctr" indent="0" marL="0">
-              <a:lnSpc>
-                <a:spcPct val="110000"/>
-              </a:lnSpc>
-              <a:buNone/>
-            </a:pPr>
-            <a:r>
-              <a:rPr lang="en-US" sz="1050" dirty="0">
-                <a:solidFill>
-                  <a:srgbClr val="5A7184"/>
-                </a:solidFill>
-                <a:latin typeface="Malgun Gothic" pitchFamily="34" charset="0"/>
-                <a:ea typeface="Malgun Gothic" pitchFamily="34" charset="-122"/>
-                <a:cs typeface="Malgun Gothic" pitchFamily="34" charset="-120"/>
-              </a:rPr>
-              <a:t>NAND 공급에만 머물면 완제품 SSD의 부가가치를 잃는다</a:t>
-            </a:r>
-            <a:endParaRPr lang="en-US" sz="1350" dirty="0"/>
-          </a:p>
-        </p:txBody>
-      </p:sp>
-      <p:sp>
-        <p:nvSpPr>
-          <p:cNvPr id="21" name="Text 17"/>
-          <p:cNvSpPr/>
-          <p:nvPr/>
-        </p:nvSpPr>
-        <p:spPr>
-          <a:xfrm>
-            <a:off x="8138160" y="3328416"/>
-            <a:ext cx="3602736" cy="877824"/>
-          </a:xfrm>
-          <a:prstGeom prst="roundRect">
-            <a:avLst>
-              <a:gd name="adj" fmla="val 8333"/>
-            </a:avLst>
-          </a:prstGeom>
-          <a:solidFill>
-            <a:srgbClr val="F5F7F8"/>
-          </a:solidFill>
-          <a:ln/>
-        </p:spPr>
-        <p:txBody>
-          <a:bodyPr wrap="square" lIns="0" tIns="0" rIns="0" bIns="0" rtlCol="0" anchor="ctr"/>
-          <a:lstStyle/>
-          <a:p>
-            <a:pPr algn="ctr" indent="0" marL="0">
-              <a:lnSpc>
-                <a:spcPct val="110000"/>
-              </a:lnSpc>
-              <a:buNone/>
-            </a:pPr>
-            <a:r>
-              <a:rPr lang="en-US" sz="1350" b="1" dirty="0">
-                <a:solidFill>
-                  <a:srgbClr val="17313B"/>
-                </a:solidFill>
-                <a:latin typeface="Malgun Gothic" pitchFamily="34" charset="0"/>
-                <a:ea typeface="Malgun Gothic" pitchFamily="34" charset="-122"/>
-                <a:cs typeface="Malgun Gothic" pitchFamily="34" charset="-120"/>
-              </a:rPr>
-              <a:t>커스텀 파편화</a:t>
-            </a:r>
-            <a:endParaRPr lang="en-US" sz="1350" dirty="0"/>
-          </a:p>
-          <a:p>
-            <a:pPr algn="ctr" indent="0" marL="0">
-              <a:lnSpc>
-                <a:spcPct val="110000"/>
-              </a:lnSpc>
-              <a:buNone/>
-            </a:pPr>
-            <a:r>
-              <a:rPr lang="en-US" sz="1050" dirty="0">
-                <a:solidFill>
-                  <a:srgbClr val="5A7184"/>
-                </a:solidFill>
-                <a:latin typeface="Malgun Gothic" pitchFamily="34" charset="0"/>
-                <a:ea typeface="Malgun Gothic" pitchFamily="34" charset="-122"/>
-                <a:cs typeface="Malgun Gothic" pitchFamily="34" charset="-120"/>
-              </a:rPr>
-              <a:t>고객별 커스텀 SSD 개발은 제품·펌웨어를 파편화시킨다</a:t>
-            </a:r>
-            <a:endParaRPr lang="en-US" sz="1350" dirty="0"/>
-          </a:p>
-        </p:txBody>
-      </p:sp>
-      <p:sp>
-        <p:nvSpPr>
-          <p:cNvPr id="22" name="Text 18"/>
-          <p:cNvSpPr/>
-          <p:nvPr/>
-        </p:nvSpPr>
-        <p:spPr>
-          <a:xfrm>
-            <a:off x="457200" y="4425696"/>
-            <a:ext cx="5486400" cy="256032"/>
-          </a:xfrm>
-          <a:prstGeom prst="rect">
-            <a:avLst/>
-          </a:prstGeom>
-          <a:noFill/>
-          <a:ln/>
-        </p:spPr>
-        <p:txBody>
-          <a:bodyPr wrap="square" lIns="0" tIns="0" rIns="0" bIns="0" rtlCol="0" anchor="ctr"/>
-          <a:lstStyle/>
-          <a:p>
-            <a:pPr indent="0" marL="0">
-              <a:buNone/>
-            </a:pPr>
-            <a:r>
-              <a:rPr lang="en-US" sz="1400" b="1" dirty="0">
-                <a:solidFill>
-                  <a:srgbClr val="17313B"/>
-                </a:solidFill>
-                <a:latin typeface="Malgun Gothic" pitchFamily="34" charset="0"/>
-                <a:ea typeface="Malgun Gothic" pitchFamily="34" charset="-122"/>
-                <a:cs typeface="Malgun Gothic" pitchFamily="34" charset="-120"/>
-              </a:rPr>
-              <a:t>전체 전략 구조 — 6요소</a:t>
-            </a:r>
-            <a:endParaRPr lang="en-US" sz="1400" dirty="0"/>
-          </a:p>
-        </p:txBody>
-      </p:sp>
-      <p:sp>
-        <p:nvSpPr>
-          <p:cNvPr id="23" name="Text 19"/>
-          <p:cNvSpPr/>
-          <p:nvPr/>
-        </p:nvSpPr>
-        <p:spPr>
-          <a:xfrm>
-            <a:off x="457200" y="4718304"/>
-            <a:ext cx="1682496" cy="731520"/>
-          </a:xfrm>
-          <a:prstGeom prst="roundRect">
-            <a:avLst>
-              <a:gd name="adj" fmla="val 8750"/>
-            </a:avLst>
-          </a:prstGeom>
-          <a:solidFill>
-            <a:srgbClr val="FFFFFF"/>
-          </a:solidFill>
-          <a:ln w="12700">
-            <a:solidFill>
-              <a:srgbClr val="DCE4E9"/>
-            </a:solidFill>
-          </a:ln>
-        </p:spPr>
-        <p:txBody>
-          <a:bodyPr wrap="square" lIns="0" tIns="0" rIns="0" bIns="0" rtlCol="0" anchor="ctr"/>
-          <a:lstStyle/>
-          <a:p>
-            <a:pPr algn="ctr" indent="0" marL="0">
               <a:lnSpc>
                 <a:spcPct val="105000"/>
               </a:lnSpc>
               <a:buNone/>
             </a:pPr>
             <a:r>
-              <a:rPr lang="en-US" sz="1200" b="1" dirty="0">
+              <a:rPr lang="en-US" sz="1100" dirty="0">
                 <a:solidFill>
                   <a:srgbClr val="17313B"/>
                 </a:solidFill>
@@ -8317,108 +8597,165 @@
                 <a:ea typeface="Malgun Gothic" pitchFamily="34" charset="-122"/>
                 <a:cs typeface="Malgun Gothic" pitchFamily="34" charset="-120"/>
               </a:rPr>
-              <a:t>Binding 계약</a:t>
-            </a:r>
-            <a:endParaRPr lang="en-US" sz="1200" dirty="0"/>
-          </a:p>
-          <a:p>
-            <a:pPr algn="ctr" indent="0" marL="0">
+              <a:t>벤더 표준품 조달 — 통제권 없음</a:t>
+            </a:r>
+            <a:endParaRPr lang="en-US" sz="1100" dirty="0"/>
+          </a:p>
+        </p:txBody>
+      </p:sp>
+      <p:sp>
+        <p:nvSpPr>
+          <p:cNvPr id="29" name="Text 27"/>
+          <p:cNvSpPr/>
+          <p:nvPr/>
+        </p:nvSpPr>
+        <p:spPr>
+          <a:xfrm>
+            <a:off x="7040880" y="3118104"/>
+            <a:ext cx="274320" cy="274320"/>
+          </a:xfrm>
+          <a:prstGeom prst="ellipse">
+            <a:avLst/>
+          </a:prstGeom>
+          <a:solidFill>
+            <a:srgbClr val="5A7184"/>
+          </a:solidFill>
+          <a:ln/>
+        </p:spPr>
+        <p:txBody>
+          <a:bodyPr wrap="square" lIns="0" tIns="0" rIns="0" bIns="0" rtlCol="0" anchor="ctr"/>
+          <a:lstStyle/>
+          <a:p>
+            <a:pPr algn="ctr" indent="0" marL="0">
+              <a:buNone/>
+            </a:pPr>
+            <a:r>
+              <a:rPr lang="en-US" sz="1100" b="1" dirty="0">
+                <a:solidFill>
+                  <a:srgbClr val="FFFFFF"/>
+                </a:solidFill>
+                <a:latin typeface="Malgun Gothic" pitchFamily="34" charset="0"/>
+                <a:ea typeface="Malgun Gothic" pitchFamily="34" charset="-122"/>
+                <a:cs typeface="Malgun Gothic" pitchFamily="34" charset="-120"/>
+              </a:rPr>
+              <a:t>2</a:t>
+            </a:r>
+            <a:endParaRPr lang="en-US" sz="1100" dirty="0"/>
+          </a:p>
+        </p:txBody>
+      </p:sp>
+      <p:sp>
+        <p:nvSpPr>
+          <p:cNvPr id="30" name="Text 28"/>
+          <p:cNvSpPr/>
+          <p:nvPr/>
+        </p:nvSpPr>
+        <p:spPr>
+          <a:xfrm>
+            <a:off x="7424928" y="3072384"/>
+            <a:ext cx="4206240" cy="603504"/>
+          </a:xfrm>
+          <a:prstGeom prst="rect">
+            <a:avLst/>
+          </a:prstGeom>
+          <a:noFill/>
+          <a:ln/>
+        </p:spPr>
+        <p:txBody>
+          <a:bodyPr wrap="square" lIns="0" tIns="0" rIns="0" bIns="0" rtlCol="0" anchor="ctr"/>
+          <a:lstStyle/>
+          <a:p>
+            <a:pPr indent="0" marL="0">
               <a:lnSpc>
                 <a:spcPct val="105000"/>
               </a:lnSpc>
               <a:buNone/>
             </a:pPr>
             <a:r>
-              <a:rPr lang="en-US" sz="950" dirty="0">
-                <a:solidFill>
-                  <a:srgbClr val="5A7184"/>
-                </a:solidFill>
-                <a:latin typeface="Malgun Gothic" pitchFamily="34" charset="0"/>
-                <a:ea typeface="Malgun Gothic" pitchFamily="34" charset="-122"/>
-                <a:cs typeface="Malgun Gothic" pitchFamily="34" charset="-120"/>
-              </a:rPr>
-              <a:t>장기 물량 확보</a:t>
-            </a:r>
-            <a:endParaRPr lang="en-US" sz="1200" dirty="0"/>
-          </a:p>
-        </p:txBody>
-      </p:sp>
-      <p:sp>
-        <p:nvSpPr>
-          <p:cNvPr id="24" name="Text 20"/>
-          <p:cNvSpPr/>
-          <p:nvPr/>
-        </p:nvSpPr>
-        <p:spPr>
-          <a:xfrm>
-            <a:off x="2139696" y="4718304"/>
-            <a:ext cx="201168" cy="731520"/>
-          </a:xfrm>
-          <a:prstGeom prst="rect">
-            <a:avLst/>
-          </a:prstGeom>
-          <a:noFill/>
-          <a:ln/>
-        </p:spPr>
-        <p:txBody>
-          <a:bodyPr wrap="square" lIns="0" tIns="0" rIns="0" bIns="0" rtlCol="0" anchor="ctr"/>
-          <a:lstStyle/>
-          <a:p>
-            <a:pPr algn="ctr" indent="0" marL="0">
-              <a:buNone/>
-            </a:pPr>
-            <a:r>
-              <a:rPr lang="en-US" sz="1050" dirty="0">
-                <a:solidFill>
-                  <a:srgbClr val="5A7184"/>
-                </a:solidFill>
-                <a:latin typeface="Malgun Gothic" pitchFamily="34" charset="0"/>
-                <a:ea typeface="Malgun Gothic" pitchFamily="34" charset="-122"/>
-                <a:cs typeface="Malgun Gothic" pitchFamily="34" charset="-120"/>
-              </a:rPr>
-              <a:t>▶</a:t>
-            </a:r>
-            <a:endParaRPr lang="en-US" sz="1050" dirty="0"/>
-          </a:p>
-        </p:txBody>
-      </p:sp>
-      <p:sp>
-        <p:nvSpPr>
-          <p:cNvPr id="25" name="Text 21"/>
-          <p:cNvSpPr/>
-          <p:nvPr/>
-        </p:nvSpPr>
-        <p:spPr>
-          <a:xfrm>
-            <a:off x="2340864" y="4718304"/>
-            <a:ext cx="1682496" cy="731520"/>
-          </a:xfrm>
-          <a:prstGeom prst="roundRect">
-            <a:avLst>
-              <a:gd name="adj" fmla="val 8750"/>
-            </a:avLst>
-          </a:prstGeom>
-          <a:solidFill>
-            <a:srgbClr val="FFFFFF"/>
-          </a:solidFill>
-          <a:ln w="12700">
-            <a:solidFill>
-              <a:srgbClr val="DCE4E9"/>
-            </a:solidFill>
-          </a:ln>
-        </p:spPr>
-        <p:txBody>
-          <a:bodyPr wrap="square" lIns="0" tIns="0" rIns="0" bIns="0" rtlCol="0" anchor="ctr"/>
-          <a:lstStyle/>
-          <a:p>
-            <a:pPr algn="ctr" indent="0" marL="0">
+              <a:rPr lang="en-US" sz="1100" dirty="0">
+                <a:solidFill>
+                  <a:srgbClr val="17313B"/>
+                </a:solidFill>
+                <a:latin typeface="Malgun Gothic" pitchFamily="34" charset="0"/>
+                <a:ea typeface="Malgun Gothic" pitchFamily="34" charset="-122"/>
+                <a:cs typeface="Malgun Gothic" pitchFamily="34" charset="-120"/>
+              </a:rPr>
+              <a:t>OCP 스토리지 스펙 · 고객별 펌웨어 브랜치 관행</a:t>
+            </a:r>
+            <a:endParaRPr lang="en-US" sz="1100" dirty="0"/>
+          </a:p>
+        </p:txBody>
+      </p:sp>
+      <p:sp>
+        <p:nvSpPr>
+          <p:cNvPr id="31" name="Text 29"/>
+          <p:cNvSpPr/>
+          <p:nvPr/>
+        </p:nvSpPr>
+        <p:spPr>
+          <a:xfrm>
+            <a:off x="7040880" y="3794760"/>
+            <a:ext cx="274320" cy="274320"/>
+          </a:xfrm>
+          <a:prstGeom prst="ellipse">
+            <a:avLst/>
+          </a:prstGeom>
+          <a:solidFill>
+            <a:srgbClr val="5A7184"/>
+          </a:solidFill>
+          <a:ln/>
+        </p:spPr>
+        <p:txBody>
+          <a:bodyPr wrap="square" lIns="0" tIns="0" rIns="0" bIns="0" rtlCol="0" anchor="ctr"/>
+          <a:lstStyle/>
+          <a:p>
+            <a:pPr algn="ctr" indent="0" marL="0">
+              <a:buNone/>
+            </a:pPr>
+            <a:r>
+              <a:rPr lang="en-US" sz="1100" b="1" dirty="0">
+                <a:solidFill>
+                  <a:srgbClr val="FFFFFF"/>
+                </a:solidFill>
+                <a:latin typeface="Malgun Gothic" pitchFamily="34" charset="0"/>
+                <a:ea typeface="Malgun Gothic" pitchFamily="34" charset="-122"/>
+                <a:cs typeface="Malgun Gothic" pitchFamily="34" charset="-120"/>
+              </a:rPr>
+              <a:t>3</a:t>
+            </a:r>
+            <a:endParaRPr lang="en-US" sz="1100" dirty="0"/>
+          </a:p>
+        </p:txBody>
+      </p:sp>
+      <p:sp>
+        <p:nvSpPr>
+          <p:cNvPr id="32" name="Text 30"/>
+          <p:cNvSpPr/>
+          <p:nvPr/>
+        </p:nvSpPr>
+        <p:spPr>
+          <a:xfrm>
+            <a:off x="7424928" y="3749040"/>
+            <a:ext cx="4206240" cy="603504"/>
+          </a:xfrm>
+          <a:prstGeom prst="rect">
+            <a:avLst/>
+          </a:prstGeom>
+          <a:noFill/>
+          <a:ln/>
+        </p:spPr>
+        <p:txBody>
+          <a:bodyPr wrap="square" lIns="0" tIns="0" rIns="0" bIns="0" rtlCol="0" anchor="ctr"/>
+          <a:lstStyle/>
+          <a:p>
+            <a:pPr indent="0" marL="0">
               <a:lnSpc>
                 <a:spcPct val="105000"/>
               </a:lnSpc>
               <a:buNone/>
             </a:pPr>
             <a:r>
-              <a:rPr lang="en-US" sz="1200" b="1" dirty="0">
+              <a:rPr lang="en-US" sz="1100" dirty="0">
                 <a:solidFill>
                   <a:srgbClr val="17313B"/>
                 </a:solidFill>
@@ -8426,19 +8763,160 @@
                 <a:ea typeface="Malgun Gothic" pitchFamily="34" charset="-122"/>
                 <a:cs typeface="Malgun Gothic" pitchFamily="34" charset="-120"/>
               </a:rPr>
-              <a:t>FDP 표준 SSD</a:t>
-            </a:r>
-            <a:endParaRPr lang="en-US" sz="1200" dirty="0"/>
-          </a:p>
-          <a:p>
-            <a:pPr algn="ctr" indent="0" marL="0">
+              <a:t>AWS Nitro SSD(’21) — 자체 컨트롤러 자작 SSD</a:t>
+            </a:r>
+            <a:endParaRPr lang="en-US" sz="1100" dirty="0"/>
+          </a:p>
+        </p:txBody>
+      </p:sp>
+      <p:sp>
+        <p:nvSpPr>
+          <p:cNvPr id="33" name="Text 31"/>
+          <p:cNvSpPr/>
+          <p:nvPr/>
+        </p:nvSpPr>
+        <p:spPr>
+          <a:xfrm>
+            <a:off x="7040880" y="4471416"/>
+            <a:ext cx="274320" cy="274320"/>
+          </a:xfrm>
+          <a:prstGeom prst="ellipse">
+            <a:avLst/>
+          </a:prstGeom>
+          <a:solidFill>
+            <a:srgbClr val="028090"/>
+          </a:solidFill>
+          <a:ln/>
+        </p:spPr>
+        <p:txBody>
+          <a:bodyPr wrap="square" lIns="0" tIns="0" rIns="0" bIns="0" rtlCol="0" anchor="ctr"/>
+          <a:lstStyle/>
+          <a:p>
+            <a:pPr algn="ctr" indent="0" marL="0">
+              <a:buNone/>
+            </a:pPr>
+            <a:r>
+              <a:rPr lang="en-US" sz="1100" b="1" dirty="0">
+                <a:solidFill>
+                  <a:srgbClr val="FFFFFF"/>
+                </a:solidFill>
+                <a:latin typeface="Malgun Gothic" pitchFamily="34" charset="0"/>
+                <a:ea typeface="Malgun Gothic" pitchFamily="34" charset="-122"/>
+                <a:cs typeface="Malgun Gothic" pitchFamily="34" charset="-120"/>
+              </a:rPr>
+              <a:t>4</a:t>
+            </a:r>
+            <a:endParaRPr lang="en-US" sz="1100" dirty="0"/>
+          </a:p>
+        </p:txBody>
+      </p:sp>
+      <p:sp>
+        <p:nvSpPr>
+          <p:cNvPr id="34" name="Text 32"/>
+          <p:cNvSpPr/>
+          <p:nvPr/>
+        </p:nvSpPr>
+        <p:spPr>
+          <a:xfrm>
+            <a:off x="7424928" y="4425696"/>
+            <a:ext cx="4206240" cy="603504"/>
+          </a:xfrm>
+          <a:prstGeom prst="rect">
+            <a:avLst/>
+          </a:prstGeom>
+          <a:noFill/>
+          <a:ln/>
+        </p:spPr>
+        <p:txBody>
+          <a:bodyPr wrap="square" lIns="0" tIns="0" rIns="0" bIns="0" rtlCol="0" anchor="ctr"/>
+          <a:lstStyle/>
+          <a:p>
+            <a:pPr indent="0" marL="0">
               <a:lnSpc>
                 <a:spcPct val="105000"/>
               </a:lnSpc>
               <a:buNone/>
             </a:pPr>
             <a:r>
-              <a:rPr lang="en-US" sz="950" dirty="0">
+              <a:rPr lang="en-US" sz="1100" dirty="0">
+                <a:solidFill>
+                  <a:srgbClr val="17313B"/>
+                </a:solidFill>
+                <a:latin typeface="Malgun Gothic" pitchFamily="34" charset="0"/>
+                <a:ea typeface="Malgun Gothic" pitchFamily="34" charset="-122"/>
+                <a:cs typeface="Malgun Gothic" pitchFamily="34" charset="-120"/>
+              </a:rPr>
+              <a:t>FDP 표준 비준(’23) — Meta·Google 주도·삼성 공동 · NAND 웨이퍼 다년 계약</a:t>
+            </a:r>
+            <a:endParaRPr lang="en-US" sz="1100" dirty="0"/>
+          </a:p>
+        </p:txBody>
+      </p:sp>
+      <p:sp>
+        <p:nvSpPr>
+          <p:cNvPr id="35" name="Text 33"/>
+          <p:cNvSpPr/>
+          <p:nvPr/>
+        </p:nvSpPr>
+        <p:spPr>
+          <a:xfrm>
+            <a:off x="457200" y="5541264"/>
+            <a:ext cx="3602736" cy="365760"/>
+          </a:xfrm>
+          <a:prstGeom prst="rect">
+            <a:avLst/>
+          </a:prstGeom>
+          <a:noFill/>
+          <a:ln/>
+        </p:spPr>
+        <p:txBody>
+          <a:bodyPr wrap="square" lIns="0" tIns="0" rIns="0" bIns="0" rtlCol="0" anchor="ctr"/>
+          <a:lstStyle/>
+          <a:p>
+            <a:pPr algn="ctr" indent="0" marL="0">
+              <a:buNone/>
+            </a:pPr>
+            <a:r>
+              <a:rPr lang="en-US" sz="2200" b="1" dirty="0">
+                <a:solidFill>
+                  <a:srgbClr val="17313B"/>
+                </a:solidFill>
+                <a:latin typeface="Malgun Gothic" pitchFamily="34" charset="0"/>
+                <a:ea typeface="Malgun Gothic" pitchFamily="34" charset="-122"/>
+                <a:cs typeface="Malgun Gothic" pitchFamily="34" charset="-120"/>
+              </a:rPr>
+              <a:t>~55%</a:t>
+            </a:r>
+            <a:endParaRPr lang="en-US" sz="2200" dirty="0"/>
+          </a:p>
+        </p:txBody>
+      </p:sp>
+      <p:sp>
+        <p:nvSpPr>
+          <p:cNvPr id="36" name="Text 34"/>
+          <p:cNvSpPr/>
+          <p:nvPr/>
+        </p:nvSpPr>
+        <p:spPr>
+          <a:xfrm>
+            <a:off x="457200" y="5925312"/>
+            <a:ext cx="3602736" cy="256032"/>
+          </a:xfrm>
+          <a:prstGeom prst="rect">
+            <a:avLst/>
+          </a:prstGeom>
+          <a:noFill/>
+          <a:ln/>
+        </p:spPr>
+        <p:txBody>
+          <a:bodyPr wrap="square" lIns="0" tIns="0" rIns="0" bIns="0" rtlCol="0" anchor="ctr"/>
+          <a:lstStyle/>
+          <a:p>
+            <a:pPr algn="ctr" indent="0" marL="0">
+              <a:buNone/>
+            </a:pPr>
+            <a:r>
+              <a:rPr lang="en-US" sz="1050" dirty="0">
                 <a:solidFill>
                   <a:srgbClr val="5A7184"/>
                 </a:solidFill>
@@ -8446,22 +8924,61 @@
                 <a:ea typeface="Malgun Gothic" pitchFamily="34" charset="-122"/>
                 <a:cs typeface="Malgun Gothic" pitchFamily="34" charset="-120"/>
               </a:rPr>
-              <a:t>공통 인터페이스</a:t>
-            </a:r>
-            <a:endParaRPr lang="en-US" sz="1200" dirty="0"/>
-          </a:p>
-        </p:txBody>
-      </p:sp>
-      <p:sp>
-        <p:nvSpPr>
-          <p:cNvPr id="26" name="Text 22"/>
-          <p:cNvSpPr/>
-          <p:nvPr/>
-        </p:nvSpPr>
-        <p:spPr>
-          <a:xfrm>
-            <a:off x="4023360" y="4718304"/>
-            <a:ext cx="201168" cy="731520"/>
+              <a:t>하이퍼스케일러의 enterprise SSD 수요 비중</a:t>
+            </a:r>
+            <a:endParaRPr lang="en-US" sz="1050" dirty="0"/>
+          </a:p>
+        </p:txBody>
+      </p:sp>
+      <p:sp>
+        <p:nvSpPr>
+          <p:cNvPr id="37" name="Text 35"/>
+          <p:cNvSpPr/>
+          <p:nvPr/>
+        </p:nvSpPr>
+        <p:spPr>
+          <a:xfrm>
+            <a:off x="4297680" y="5541264"/>
+            <a:ext cx="3602736" cy="365760"/>
+          </a:xfrm>
+          <a:prstGeom prst="rect">
+            <a:avLst/>
+          </a:prstGeom>
+          <a:noFill/>
+          <a:ln/>
+        </p:spPr>
+        <p:txBody>
+          <a:bodyPr wrap="square" lIns="0" tIns="0" rIns="0" bIns="0" rtlCol="0" anchor="ctr"/>
+          <a:lstStyle/>
+          <a:p>
+            <a:pPr algn="ctr" indent="0" marL="0">
+              <a:buNone/>
+            </a:pPr>
+            <a:r>
+              <a:rPr lang="en-US" sz="2200" b="1" dirty="0">
+                <a:solidFill>
+                  <a:srgbClr val="17313B"/>
+                </a:solidFill>
+                <a:latin typeface="Malgun Gothic" pitchFamily="34" charset="0"/>
+                <a:ea typeface="Malgun Gothic" pitchFamily="34" charset="-122"/>
+                <a:cs typeface="Malgun Gothic" pitchFamily="34" charset="-120"/>
+              </a:rPr>
+              <a:t>+246%</a:t>
+            </a:r>
+            <a:endParaRPr lang="en-US" sz="2200" dirty="0"/>
+          </a:p>
+        </p:txBody>
+      </p:sp>
+      <p:sp>
+        <p:nvSpPr>
+          <p:cNvPr id="38" name="Text 36"/>
+          <p:cNvSpPr/>
+          <p:nvPr/>
+        </p:nvSpPr>
+        <p:spPr>
+          <a:xfrm>
+            <a:off x="4297680" y="5925312"/>
+            <a:ext cx="3602736" cy="256032"/>
           </a:xfrm>
           <a:prstGeom prst="rect">
             <a:avLst/>
@@ -8485,7 +9002,7 @@
                 <a:ea typeface="Malgun Gothic" pitchFamily="34" charset="-122"/>
                 <a:cs typeface="Malgun Gothic" pitchFamily="34" charset="-120"/>
               </a:rPr>
-              <a:t>▶</a:t>
+              <a:t>NAND 웨이퍼 가격 (vs Q1’25) — 웨이퍼 직구매 경쟁</a:t>
             </a:r>
             <a:endParaRPr lang="en-US" sz="1050" dirty="0"/>
           </a:p>
@@ -8493,61 +9010,69 @@
       </p:sp>
       <p:sp>
         <p:nvSpPr>
-          <p:cNvPr id="27" name="Text 23"/>
-          <p:cNvSpPr/>
-          <p:nvPr/>
-        </p:nvSpPr>
-        <p:spPr>
-          <a:xfrm>
-            <a:off x="4224528" y="4718304"/>
-            <a:ext cx="1682496" cy="731520"/>
-          </a:xfrm>
-          <a:prstGeom prst="roundRect">
-            <a:avLst>
-              <a:gd name="adj" fmla="val 8750"/>
-            </a:avLst>
-          </a:prstGeom>
-          <a:solidFill>
-            <a:srgbClr val="E8F6F0"/>
-          </a:solidFill>
-          <a:ln w="15875">
-            <a:solidFill>
-              <a:srgbClr val="02A878"/>
-            </a:solidFill>
-          </a:ln>
-        </p:spPr>
-        <p:txBody>
-          <a:bodyPr wrap="square" lIns="0" tIns="0" rIns="0" bIns="0" rtlCol="0" anchor="ctr"/>
-          <a:lstStyle/>
-          <a:p>
-            <a:pPr algn="ctr" indent="0" marL="0">
-              <a:lnSpc>
-                <a:spcPct val="105000"/>
-              </a:lnSpc>
-              <a:buNone/>
-            </a:pPr>
-            <a:r>
-              <a:rPr lang="en-US" sz="1200" b="1" dirty="0">
-                <a:solidFill>
-                  <a:srgbClr val="02A878"/>
-                </a:solidFill>
-                <a:latin typeface="Malgun Gothic" pitchFamily="34" charset="0"/>
-                <a:ea typeface="Malgun Gothic" pitchFamily="34" charset="-122"/>
-                <a:cs typeface="Malgun Gothic" pitchFamily="34" charset="-120"/>
-              </a:rPr>
-              <a:t>시스템 SW</a:t>
-            </a:r>
-            <a:endParaRPr lang="en-US" sz="1200" dirty="0"/>
-          </a:p>
-          <a:p>
-            <a:pPr algn="ctr" indent="0" marL="0">
-              <a:lnSpc>
-                <a:spcPct val="105000"/>
-              </a:lnSpc>
-              <a:buNone/>
-            </a:pPr>
-            <a:r>
-              <a:rPr lang="en-US" sz="950" dirty="0">
+          <p:cNvPr id="39" name="Text 37"/>
+          <p:cNvSpPr/>
+          <p:nvPr/>
+        </p:nvSpPr>
+        <p:spPr>
+          <a:xfrm>
+            <a:off x="8138160" y="5541264"/>
+            <a:ext cx="3602736" cy="365760"/>
+          </a:xfrm>
+          <a:prstGeom prst="rect">
+            <a:avLst/>
+          </a:prstGeom>
+          <a:noFill/>
+          <a:ln/>
+        </p:spPr>
+        <p:txBody>
+          <a:bodyPr wrap="square" lIns="0" tIns="0" rIns="0" bIns="0" rtlCol="0" anchor="ctr"/>
+          <a:lstStyle/>
+          <a:p>
+            <a:pPr algn="ctr" indent="0" marL="0">
+              <a:buNone/>
+            </a:pPr>
+            <a:r>
+              <a:rPr lang="en-US" sz="2200" b="1" dirty="0">
+                <a:solidFill>
+                  <a:srgbClr val="028090"/>
+                </a:solidFill>
+                <a:latin typeface="Malgun Gothic" pitchFamily="34" charset="0"/>
+                <a:ea typeface="Malgun Gothic" pitchFamily="34" charset="-122"/>
+                <a:cs typeface="Malgun Gothic" pitchFamily="34" charset="-120"/>
+              </a:rPr>
+              <a:t>6개월</a:t>
+            </a:r>
+            <a:endParaRPr lang="en-US" sz="2200" dirty="0"/>
+          </a:p>
+        </p:txBody>
+      </p:sp>
+      <p:sp>
+        <p:nvSpPr>
+          <p:cNvPr id="40" name="Text 38"/>
+          <p:cNvSpPr/>
+          <p:nvPr/>
+        </p:nvSpPr>
+        <p:spPr>
+          <a:xfrm>
+            <a:off x="8138160" y="5925312"/>
+            <a:ext cx="3602736" cy="256032"/>
+          </a:xfrm>
+          <a:prstGeom prst="rect">
+            <a:avLst/>
+          </a:prstGeom>
+          <a:noFill/>
+          <a:ln/>
+        </p:spPr>
+        <p:txBody>
+          <a:bodyPr wrap="square" lIns="0" tIns="0" rIns="0" bIns="0" rtlCol="0" anchor="ctr"/>
+          <a:lstStyle/>
+          <a:p>
+            <a:pPr algn="ctr" indent="0" marL="0">
+              <a:buNone/>
+            </a:pPr>
+            <a:r>
+              <a:rPr lang="en-US" sz="1050" dirty="0">
                 <a:solidFill>
                   <a:srgbClr val="5A7184"/>
                 </a:solidFill>
@@ -8555,375 +9080,9 @@
                 <a:ea typeface="Malgun Gothic" pitchFamily="34" charset="-122"/>
                 <a:cs typeface="Malgun Gothic" pitchFamily="34" charset="-120"/>
               </a:rPr>
-              <a:t>워크로드→정책 변환</a:t>
-            </a:r>
-            <a:endParaRPr lang="en-US" sz="1200" dirty="0"/>
-          </a:p>
-        </p:txBody>
-      </p:sp>
-      <p:sp>
-        <p:nvSpPr>
-          <p:cNvPr id="28" name="Text 24"/>
-          <p:cNvSpPr/>
-          <p:nvPr/>
-        </p:nvSpPr>
-        <p:spPr>
-          <a:xfrm>
-            <a:off x="5907024" y="4718304"/>
-            <a:ext cx="201168" cy="731520"/>
-          </a:xfrm>
-          <a:prstGeom prst="rect">
-            <a:avLst/>
-          </a:prstGeom>
-          <a:noFill/>
-          <a:ln/>
-        </p:spPr>
-        <p:txBody>
-          <a:bodyPr wrap="square" lIns="0" tIns="0" rIns="0" bIns="0" rtlCol="0" anchor="ctr"/>
-          <a:lstStyle/>
-          <a:p>
-            <a:pPr algn="ctr" indent="0" marL="0">
-              <a:buNone/>
-            </a:pPr>
-            <a:r>
-              <a:rPr lang="en-US" sz="1050" dirty="0">
-                <a:solidFill>
-                  <a:srgbClr val="5A7184"/>
-                </a:solidFill>
-                <a:latin typeface="Malgun Gothic" pitchFamily="34" charset="0"/>
-                <a:ea typeface="Malgun Gothic" pitchFamily="34" charset="-122"/>
-                <a:cs typeface="Malgun Gothic" pitchFamily="34" charset="-120"/>
-              </a:rPr>
-              <a:t>▶</a:t>
+              <a:t>FDP 표준 비준 소요 — 고객(Meta·Google) 주도 속도</a:t>
             </a:r>
             <a:endParaRPr lang="en-US" sz="1050" dirty="0"/>
-          </a:p>
-        </p:txBody>
-      </p:sp>
-      <p:sp>
-        <p:nvSpPr>
-          <p:cNvPr id="29" name="Text 25"/>
-          <p:cNvSpPr/>
-          <p:nvPr/>
-        </p:nvSpPr>
-        <p:spPr>
-          <a:xfrm>
-            <a:off x="6108192" y="4718304"/>
-            <a:ext cx="1682496" cy="731520"/>
-          </a:xfrm>
-          <a:prstGeom prst="roundRect">
-            <a:avLst>
-              <a:gd name="adj" fmla="val 8750"/>
-            </a:avLst>
-          </a:prstGeom>
-          <a:solidFill>
-            <a:srgbClr val="FFFFFF"/>
-          </a:solidFill>
-          <a:ln w="12700">
-            <a:solidFill>
-              <a:srgbClr val="DCE4E9"/>
-            </a:solidFill>
-          </a:ln>
-        </p:spPr>
-        <p:txBody>
-          <a:bodyPr wrap="square" lIns="0" tIns="0" rIns="0" bIns="0" rtlCol="0" anchor="ctr"/>
-          <a:lstStyle/>
-          <a:p>
-            <a:pPr algn="ctr" indent="0" marL="0">
-              <a:lnSpc>
-                <a:spcPct val="105000"/>
-              </a:lnSpc>
-              <a:buNone/>
-            </a:pPr>
-            <a:r>
-              <a:rPr lang="en-US" sz="1200" b="1" dirty="0">
-                <a:solidFill>
-                  <a:srgbClr val="17313B"/>
-                </a:solidFill>
-                <a:latin typeface="Malgun Gothic" pitchFamily="34" charset="0"/>
-                <a:ea typeface="Malgun Gothic" pitchFamily="34" charset="-122"/>
-                <a:cs typeface="Malgun Gothic" pitchFamily="34" charset="-120"/>
-              </a:rPr>
-              <a:t>E2E 검증</a:t>
-            </a:r>
-            <a:endParaRPr lang="en-US" sz="1200" dirty="0"/>
-          </a:p>
-          <a:p>
-            <a:pPr algn="ctr" indent="0" marL="0">
-              <a:lnSpc>
-                <a:spcPct val="105000"/>
-              </a:lnSpc>
-              <a:buNone/>
-            </a:pPr>
-            <a:r>
-              <a:rPr lang="en-US" sz="950" dirty="0">
-                <a:solidFill>
-                  <a:srgbClr val="5A7184"/>
-                </a:solidFill>
-                <a:latin typeface="Malgun Gothic" pitchFamily="34" charset="0"/>
-                <a:ea typeface="Malgun Gothic" pitchFamily="34" charset="-122"/>
-                <a:cs typeface="Malgun Gothic" pitchFamily="34" charset="-120"/>
-              </a:rPr>
-              <a:t>TCO 개선 보장</a:t>
-            </a:r>
-            <a:endParaRPr lang="en-US" sz="1200" dirty="0"/>
-          </a:p>
-        </p:txBody>
-      </p:sp>
-      <p:sp>
-        <p:nvSpPr>
-          <p:cNvPr id="30" name="Text 26"/>
-          <p:cNvSpPr/>
-          <p:nvPr/>
-        </p:nvSpPr>
-        <p:spPr>
-          <a:xfrm>
-            <a:off x="7790688" y="4718304"/>
-            <a:ext cx="201168" cy="731520"/>
-          </a:xfrm>
-          <a:prstGeom prst="rect">
-            <a:avLst/>
-          </a:prstGeom>
-          <a:noFill/>
-          <a:ln/>
-        </p:spPr>
-        <p:txBody>
-          <a:bodyPr wrap="square" lIns="0" tIns="0" rIns="0" bIns="0" rtlCol="0" anchor="ctr"/>
-          <a:lstStyle/>
-          <a:p>
-            <a:pPr algn="ctr" indent="0" marL="0">
-              <a:buNone/>
-            </a:pPr>
-            <a:r>
-              <a:rPr lang="en-US" sz="1050" dirty="0">
-                <a:solidFill>
-                  <a:srgbClr val="5A7184"/>
-                </a:solidFill>
-                <a:latin typeface="Malgun Gothic" pitchFamily="34" charset="0"/>
-                <a:ea typeface="Malgun Gothic" pitchFamily="34" charset="-122"/>
-                <a:cs typeface="Malgun Gothic" pitchFamily="34" charset="-120"/>
-              </a:rPr>
-              <a:t>▶</a:t>
-            </a:r>
-            <a:endParaRPr lang="en-US" sz="1050" dirty="0"/>
-          </a:p>
-        </p:txBody>
-      </p:sp>
-      <p:sp>
-        <p:nvSpPr>
-          <p:cNvPr id="31" name="Text 27"/>
-          <p:cNvSpPr/>
-          <p:nvPr/>
-        </p:nvSpPr>
-        <p:spPr>
-          <a:xfrm>
-            <a:off x="7991856" y="4718304"/>
-            <a:ext cx="1682496" cy="731520"/>
-          </a:xfrm>
-          <a:prstGeom prst="roundRect">
-            <a:avLst>
-              <a:gd name="adj" fmla="val 8750"/>
-            </a:avLst>
-          </a:prstGeom>
-          <a:solidFill>
-            <a:srgbClr val="FFFFFF"/>
-          </a:solidFill>
-          <a:ln w="12700">
-            <a:solidFill>
-              <a:srgbClr val="DCE4E9"/>
-            </a:solidFill>
-          </a:ln>
-        </p:spPr>
-        <p:txBody>
-          <a:bodyPr wrap="square" lIns="0" tIns="0" rIns="0" bIns="0" rtlCol="0" anchor="ctr"/>
-          <a:lstStyle/>
-          <a:p>
-            <a:pPr algn="ctr" indent="0" marL="0">
-              <a:lnSpc>
-                <a:spcPct val="105000"/>
-              </a:lnSpc>
-              <a:buNone/>
-            </a:pPr>
-            <a:r>
-              <a:rPr lang="en-US" sz="1200" b="1" dirty="0">
-                <a:solidFill>
-                  <a:srgbClr val="17313B"/>
-                </a:solidFill>
-                <a:latin typeface="Malgun Gothic" pitchFamily="34" charset="0"/>
-                <a:ea typeface="Malgun Gothic" pitchFamily="34" charset="-122"/>
-                <a:cs typeface="Malgun Gothic" pitchFamily="34" charset="-120"/>
-              </a:rPr>
-              <a:t>고객 공동개발</a:t>
-            </a:r>
-            <a:endParaRPr lang="en-US" sz="1200" dirty="0"/>
-          </a:p>
-          <a:p>
-            <a:pPr algn="ctr" indent="0" marL="0">
-              <a:lnSpc>
-                <a:spcPct val="105000"/>
-              </a:lnSpc>
-              <a:buNone/>
-            </a:pPr>
-            <a:r>
-              <a:rPr lang="en-US" sz="950" dirty="0">
-                <a:solidFill>
-                  <a:srgbClr val="5A7184"/>
-                </a:solidFill>
-                <a:latin typeface="Malgun Gothic" pitchFamily="34" charset="0"/>
-                <a:ea typeface="Malgun Gothic" pitchFamily="34" charset="-122"/>
-                <a:cs typeface="Malgun Gothic" pitchFamily="34" charset="-120"/>
-              </a:rPr>
-              <a:t>장기 관계 구축</a:t>
-            </a:r>
-            <a:endParaRPr lang="en-US" sz="1200" dirty="0"/>
-          </a:p>
-        </p:txBody>
-      </p:sp>
-      <p:sp>
-        <p:nvSpPr>
-          <p:cNvPr id="32" name="Text 28"/>
-          <p:cNvSpPr/>
-          <p:nvPr/>
-        </p:nvSpPr>
-        <p:spPr>
-          <a:xfrm>
-            <a:off x="9674352" y="4718304"/>
-            <a:ext cx="201168" cy="731520"/>
-          </a:xfrm>
-          <a:prstGeom prst="rect">
-            <a:avLst/>
-          </a:prstGeom>
-          <a:noFill/>
-          <a:ln/>
-        </p:spPr>
-        <p:txBody>
-          <a:bodyPr wrap="square" lIns="0" tIns="0" rIns="0" bIns="0" rtlCol="0" anchor="ctr"/>
-          <a:lstStyle/>
-          <a:p>
-            <a:pPr algn="ctr" indent="0" marL="0">
-              <a:buNone/>
-            </a:pPr>
-            <a:r>
-              <a:rPr lang="en-US" sz="1050" dirty="0">
-                <a:solidFill>
-                  <a:srgbClr val="5A7184"/>
-                </a:solidFill>
-                <a:latin typeface="Malgun Gothic" pitchFamily="34" charset="0"/>
-                <a:ea typeface="Malgun Gothic" pitchFamily="34" charset="-122"/>
-                <a:cs typeface="Malgun Gothic" pitchFamily="34" charset="-120"/>
-              </a:rPr>
-              <a:t>▶</a:t>
-            </a:r>
-            <a:endParaRPr lang="en-US" sz="1050" dirty="0"/>
-          </a:p>
-        </p:txBody>
-      </p:sp>
-      <p:sp>
-        <p:nvSpPr>
-          <p:cNvPr id="33" name="Text 29"/>
-          <p:cNvSpPr/>
-          <p:nvPr/>
-        </p:nvSpPr>
-        <p:spPr>
-          <a:xfrm>
-            <a:off x="9875520" y="4718304"/>
-            <a:ext cx="1682496" cy="731520"/>
-          </a:xfrm>
-          <a:prstGeom prst="roundRect">
-            <a:avLst>
-              <a:gd name="adj" fmla="val 8750"/>
-            </a:avLst>
-          </a:prstGeom>
-          <a:solidFill>
-            <a:srgbClr val="FFFFFF"/>
-          </a:solidFill>
-          <a:ln w="12700">
-            <a:solidFill>
-              <a:srgbClr val="DCE4E9"/>
-            </a:solidFill>
-          </a:ln>
-        </p:spPr>
-        <p:txBody>
-          <a:bodyPr wrap="square" lIns="0" tIns="0" rIns="0" bIns="0" rtlCol="0" anchor="ctr"/>
-          <a:lstStyle/>
-          <a:p>
-            <a:pPr algn="ctr" indent="0" marL="0">
-              <a:lnSpc>
-                <a:spcPct val="105000"/>
-              </a:lnSpc>
-              <a:buNone/>
-            </a:pPr>
-            <a:r>
-              <a:rPr lang="en-US" sz="1200" b="1" dirty="0">
-                <a:solidFill>
-                  <a:srgbClr val="17313B"/>
-                </a:solidFill>
-                <a:latin typeface="Malgun Gothic" pitchFamily="34" charset="0"/>
-                <a:ea typeface="Malgun Gothic" pitchFamily="34" charset="-122"/>
-                <a:cs typeface="Malgun Gothic" pitchFamily="34" charset="-120"/>
-              </a:rPr>
-              <a:t>텔레메트리</a:t>
-            </a:r>
-            <a:endParaRPr lang="en-US" sz="1200" dirty="0"/>
-          </a:p>
-          <a:p>
-            <a:pPr algn="ctr" indent="0" marL="0">
-              <a:lnSpc>
-                <a:spcPct val="105000"/>
-              </a:lnSpc>
-              <a:buNone/>
-            </a:pPr>
-            <a:r>
-              <a:rPr lang="en-US" sz="950" dirty="0">
-                <a:solidFill>
-                  <a:srgbClr val="5A7184"/>
-                </a:solidFill>
-                <a:latin typeface="Malgun Gothic" pitchFamily="34" charset="0"/>
-                <a:ea typeface="Malgun Gothic" pitchFamily="34" charset="-122"/>
-                <a:cs typeface="Malgun Gothic" pitchFamily="34" charset="-120"/>
-              </a:rPr>
-              <a:t>지속 개선 루프</a:t>
-            </a:r>
-            <a:endParaRPr lang="en-US" sz="1200" dirty="0"/>
-          </a:p>
-        </p:txBody>
-      </p:sp>
-      <p:sp>
-        <p:nvSpPr>
-          <p:cNvPr id="34" name="Text 30"/>
-          <p:cNvSpPr/>
-          <p:nvPr/>
-        </p:nvSpPr>
-        <p:spPr>
-          <a:xfrm>
-            <a:off x="457200" y="5742432"/>
-            <a:ext cx="11274552" cy="274320"/>
-          </a:xfrm>
-          <a:prstGeom prst="rect">
-            <a:avLst/>
-          </a:prstGeom>
-          <a:noFill/>
-          <a:ln/>
-        </p:spPr>
-        <p:txBody>
-          <a:bodyPr wrap="square" lIns="0" tIns="0" rIns="0" bIns="0" rtlCol="0" anchor="ctr"/>
-          <a:lstStyle/>
-          <a:p>
-            <a:pPr algn="ctr" indent="0" marL="0">
-              <a:buNone/>
-            </a:pPr>
-            <a:r>
-              <a:rPr lang="en-US" sz="1200" i="1" dirty="0">
-                <a:solidFill>
-                  <a:srgbClr val="5A7184"/>
-                </a:solidFill>
-                <a:latin typeface="Malgun Gothic" pitchFamily="34" charset="0"/>
-                <a:ea typeface="Malgun Gothic" pitchFamily="34" charset="-122"/>
-                <a:cs typeface="Malgun Gothic" pitchFamily="34" charset="-120"/>
-              </a:rPr>
-              <a:t>Captive 고객의 요구를 삼성 완제품 생태계 안에 수용한다 — Binding secures demand · FDP standardizes · System SW creates value</a:t>
-            </a:r>
-            <a:endParaRPr lang="en-US" sz="1200" dirty="0"/>
           </a:p>
         </p:txBody>
       </p:sp>
@@ -9120,8 +9279,8 @@
         </p:nvSpPr>
         <p:spPr>
           <a:xfrm>
-            <a:off x="457200" y="859536"/>
-            <a:ext cx="7315200" cy="310896"/>
+            <a:off x="457200" y="841248"/>
+            <a:ext cx="11274552" cy="274320"/>
           </a:xfrm>
           <a:prstGeom prst="rect">
             <a:avLst/>
@@ -9137,17 +9296,17 @@
               <a:buNone/>
             </a:pPr>
             <a:r>
-              <a:rPr lang="en-US" sz="1600" b="1" dirty="0">
-                <a:solidFill>
-                  <a:srgbClr val="17313B"/>
-                </a:solidFill>
-                <a:latin typeface="Malgun Gothic" pitchFamily="34" charset="0"/>
-                <a:ea typeface="Malgun Gothic" pitchFamily="34" charset="-122"/>
-                <a:cs typeface="Malgun Gothic" pitchFamily="34" charset="-120"/>
-              </a:rPr>
-              <a:t>실행전략 6종 — Samsung FDP Enablement</a:t>
-            </a:r>
-            <a:endParaRPr lang="en-US" sz="1600" dirty="0"/>
+              <a:rPr lang="en-US" sz="1300" dirty="0">
+                <a:solidFill>
+                  <a:srgbClr val="5A7184"/>
+                </a:solidFill>
+                <a:latin typeface="Malgun Gothic" pitchFamily="34" charset="0"/>
+                <a:ea typeface="Malgun Gothic" pitchFamily="34" charset="-122"/>
+                <a:cs typeface="Malgun Gothic" pitchFamily="34" charset="-120"/>
+              </a:rPr>
+              <a:t>교차점에서 검토한 선택지 4개 — 평가 기준: 부가가치 방어 · 펌웨어 공통화 · 통제권 흐름 정합 · 차별화 지속성</a:t>
+            </a:r>
+            <a:endParaRPr lang="en-US" sz="1300" dirty="0"/>
           </a:p>
         </p:txBody>
       </p:sp>
@@ -9159,43 +9318,848 @@
         </p:nvSpPr>
         <p:spPr>
           <a:xfrm>
-            <a:off x="457200" y="1280160"/>
-            <a:ext cx="3602736" cy="1737360"/>
+            <a:off x="457200" y="1243584"/>
+            <a:ext cx="5541264" cy="1938528"/>
           </a:xfrm>
           <a:prstGeom prst="roundRect">
             <a:avLst>
-              <a:gd name="adj" fmla="val 4737"/>
+              <a:gd name="adj" fmla="val 4245"/>
             </a:avLst>
           </a:prstGeom>
           <a:solidFill>
             <a:srgbClr val="F5F7F8"/>
           </a:solidFill>
-          <a:ln/>
-        </p:spPr>
-      </p:sp>
-      <p:sp>
-        <p:nvSpPr>
-          <p:cNvPr id="8" name="Shape 6"/>
-          <p:cNvSpPr/>
-          <p:nvPr/>
-        </p:nvSpPr>
-        <p:spPr>
-          <a:xfrm>
-            <a:off x="640080" y="1444752"/>
-            <a:ext cx="402336" cy="402336"/>
+          <a:ln w="12700">
+            <a:solidFill>
+              <a:srgbClr val="DCE4E9"/>
+            </a:solidFill>
+            <a:prstDash val="solid"/>
+          </a:ln>
+        </p:spPr>
+      </p:sp>
+      <p:sp>
+        <p:nvSpPr>
+          <p:cNvPr id="8" name="Text 6"/>
+          <p:cNvSpPr/>
+          <p:nvPr/>
+        </p:nvSpPr>
+        <p:spPr>
+          <a:xfrm>
+            <a:off x="676656" y="1444752"/>
+            <a:ext cx="365760" cy="365760"/>
           </a:xfrm>
           <a:prstGeom prst="ellipse">
             <a:avLst/>
           </a:prstGeom>
           <a:solidFill>
-            <a:srgbClr val="0E6BA8"/>
-          </a:solidFill>
-          <a:ln/>
+            <a:srgbClr val="B9C7D1"/>
+          </a:solidFill>
+          <a:ln/>
+        </p:spPr>
+        <p:txBody>
+          <a:bodyPr wrap="square" lIns="0" tIns="0" rIns="0" bIns="0" rtlCol="0" anchor="ctr"/>
+          <a:lstStyle/>
+          <a:p>
+            <a:pPr algn="ctr" indent="0" marL="0">
+              <a:buNone/>
+            </a:pPr>
+            <a:r>
+              <a:rPr lang="en-US" sz="1600" b="1" dirty="0">
+                <a:solidFill>
+                  <a:srgbClr val="FFFFFF"/>
+                </a:solidFill>
+                <a:latin typeface="Malgun Gothic" pitchFamily="34" charset="0"/>
+                <a:ea typeface="Malgun Gothic" pitchFamily="34" charset="-122"/>
+                <a:cs typeface="Malgun Gothic" pitchFamily="34" charset="-120"/>
+              </a:rPr>
+              <a:t>✕</a:t>
+            </a:r>
+            <a:endParaRPr lang="en-US" sz="1600" dirty="0"/>
+          </a:p>
+        </p:txBody>
+      </p:sp>
+      <p:sp>
+        <p:nvSpPr>
+          <p:cNvPr id="9" name="Text 7"/>
+          <p:cNvSpPr/>
+          <p:nvPr/>
+        </p:nvSpPr>
+        <p:spPr>
+          <a:xfrm>
+            <a:off x="1170432" y="1444752"/>
+            <a:ext cx="4663440" cy="365760"/>
+          </a:xfrm>
+          <a:prstGeom prst="rect">
+            <a:avLst/>
+          </a:prstGeom>
+          <a:noFill/>
+          <a:ln/>
+        </p:spPr>
+        <p:txBody>
+          <a:bodyPr wrap="square" lIns="0" tIns="0" rIns="0" bIns="0" rtlCol="0" anchor="ctr"/>
+          <a:lstStyle/>
+          <a:p>
+            <a:pPr indent="0" marL="0">
+              <a:buNone/>
+            </a:pPr>
+            <a:r>
+              <a:rPr lang="en-US" sz="1650" b="1" dirty="0">
+                <a:solidFill>
+                  <a:srgbClr val="17313B"/>
+                </a:solidFill>
+                <a:latin typeface="Malgun Gothic" pitchFamily="34" charset="0"/>
+                <a:ea typeface="Malgun Gothic" pitchFamily="34" charset="-122"/>
+                <a:cs typeface="Malgun Gothic" pitchFamily="34" charset="-120"/>
+              </a:rPr>
+              <a:t>A. 컴포넌트 후퇴</a:t>
+            </a:r>
+            <a:endParaRPr lang="en-US" sz="1650" dirty="0"/>
+          </a:p>
+        </p:txBody>
+      </p:sp>
+      <p:sp>
+        <p:nvSpPr>
+          <p:cNvPr id="10" name="Text 8"/>
+          <p:cNvSpPr/>
+          <p:nvPr/>
+        </p:nvSpPr>
+        <p:spPr>
+          <a:xfrm>
+            <a:off x="713232" y="1938528"/>
+            <a:ext cx="5029200" cy="310896"/>
+          </a:xfrm>
+          <a:prstGeom prst="rect">
+            <a:avLst/>
+          </a:prstGeom>
+          <a:noFill/>
+          <a:ln/>
+        </p:spPr>
+        <p:txBody>
+          <a:bodyPr wrap="square" lIns="0" tIns="0" rIns="0" bIns="0" rtlCol="0" anchor="ctr"/>
+          <a:lstStyle/>
+          <a:p>
+            <a:pPr indent="0" marL="0">
+              <a:buNone/>
+            </a:pPr>
+            <a:r>
+              <a:rPr lang="en-US" sz="1200" dirty="0">
+                <a:solidFill>
+                  <a:srgbClr val="5A7184"/>
+                </a:solidFill>
+                <a:latin typeface="Malgun Gothic" pitchFamily="34" charset="0"/>
+                <a:ea typeface="Malgun Gothic" pitchFamily="34" charset="-122"/>
+                <a:cs typeface="Malgun Gothic" pitchFamily="34" charset="-120"/>
+              </a:rPr>
+              <a:t>NAND·웨이퍼 공급에 집중, 완제품은 고객에 위임</a:t>
+            </a:r>
+            <a:endParaRPr lang="en-US" sz="1200" dirty="0"/>
+          </a:p>
+        </p:txBody>
+      </p:sp>
+      <p:sp>
+        <p:nvSpPr>
+          <p:cNvPr id="11" name="Text 9"/>
+          <p:cNvSpPr/>
+          <p:nvPr/>
+        </p:nvSpPr>
+        <p:spPr>
+          <a:xfrm>
+            <a:off x="713232" y="2286000"/>
+            <a:ext cx="5029200" cy="804672"/>
+          </a:xfrm>
+          <a:prstGeom prst="rect">
+            <a:avLst/>
+          </a:prstGeom>
+          <a:noFill/>
+          <a:ln/>
+        </p:spPr>
+        <p:txBody>
+          <a:bodyPr wrap="square" lIns="0" tIns="0" rIns="0" bIns="0" rtlCol="0" anchor="t"/>
+          <a:lstStyle/>
+          <a:p>
+            <a:pPr indent="0" marL="0">
+              <a:lnSpc>
+                <a:spcPct val="112000"/>
+              </a:lnSpc>
+              <a:buNone/>
+            </a:pPr>
+            <a:r>
+              <a:rPr lang="en-US" sz="1200" b="1" dirty="0">
+                <a:solidFill>
+                  <a:srgbClr val="8A9BA8"/>
+                </a:solidFill>
+                <a:latin typeface="Malgun Gothic" pitchFamily="34" charset="0"/>
+                <a:ea typeface="Malgun Gothic" pitchFamily="34" charset="-122"/>
+                <a:cs typeface="Malgun Gothic" pitchFamily="34" charset="-120"/>
+              </a:rPr>
+              <a:t>탈락  </a:t>
+            </a:r>
+            <a:pPr indent="0" marL="0">
+              <a:lnSpc>
+                <a:spcPct val="112000"/>
+              </a:lnSpc>
+              <a:buNone/>
+            </a:pPr>
+            <a:r>
+              <a:rPr lang="en-US" sz="1200" dirty="0">
+                <a:solidFill>
+                  <a:srgbClr val="17313B"/>
+                </a:solidFill>
+                <a:latin typeface="Malgun Gothic" pitchFamily="34" charset="0"/>
+                <a:ea typeface="Malgun Gothic" pitchFamily="34" charset="-122"/>
+                <a:cs typeface="Malgun Gothic" pitchFamily="34" charset="-120"/>
+              </a:rPr>
+              <a:t>물량은 지키나 완제품 부가가치 영구 상실 — 커머디티 공급자 고착</a:t>
+            </a:r>
+            <a:endParaRPr lang="en-US" sz="1200" dirty="0"/>
+          </a:p>
+        </p:txBody>
+      </p:sp>
+      <p:sp>
+        <p:nvSpPr>
+          <p:cNvPr id="12" name="Shape 10"/>
+          <p:cNvSpPr/>
+          <p:nvPr/>
+        </p:nvSpPr>
+        <p:spPr>
+          <a:xfrm>
+            <a:off x="6190488" y="1243584"/>
+            <a:ext cx="5541264" cy="1938528"/>
+          </a:xfrm>
+          <a:prstGeom prst="roundRect">
+            <a:avLst>
+              <a:gd name="adj" fmla="val 4245"/>
+            </a:avLst>
+          </a:prstGeom>
+          <a:solidFill>
+            <a:srgbClr val="F5F7F8"/>
+          </a:solidFill>
+          <a:ln w="12700">
+            <a:solidFill>
+              <a:srgbClr val="DCE4E9"/>
+            </a:solidFill>
+            <a:prstDash val="solid"/>
+          </a:ln>
+        </p:spPr>
+      </p:sp>
+      <p:sp>
+        <p:nvSpPr>
+          <p:cNvPr id="13" name="Text 11"/>
+          <p:cNvSpPr/>
+          <p:nvPr/>
+        </p:nvSpPr>
+        <p:spPr>
+          <a:xfrm>
+            <a:off x="6409944" y="1444752"/>
+            <a:ext cx="365760" cy="365760"/>
+          </a:xfrm>
+          <a:prstGeom prst="ellipse">
+            <a:avLst/>
+          </a:prstGeom>
+          <a:solidFill>
+            <a:srgbClr val="B9C7D1"/>
+          </a:solidFill>
+          <a:ln/>
+        </p:spPr>
+        <p:txBody>
+          <a:bodyPr wrap="square" lIns="0" tIns="0" rIns="0" bIns="0" rtlCol="0" anchor="ctr"/>
+          <a:lstStyle/>
+          <a:p>
+            <a:pPr algn="ctr" indent="0" marL="0">
+              <a:buNone/>
+            </a:pPr>
+            <a:r>
+              <a:rPr lang="en-US" sz="1600" b="1" dirty="0">
+                <a:solidFill>
+                  <a:srgbClr val="FFFFFF"/>
+                </a:solidFill>
+                <a:latin typeface="Malgun Gothic" pitchFamily="34" charset="0"/>
+                <a:ea typeface="Malgun Gothic" pitchFamily="34" charset="-122"/>
+                <a:cs typeface="Malgun Gothic" pitchFamily="34" charset="-120"/>
+              </a:rPr>
+              <a:t>✕</a:t>
+            </a:r>
+            <a:endParaRPr lang="en-US" sz="1600" dirty="0"/>
+          </a:p>
+        </p:txBody>
+      </p:sp>
+      <p:sp>
+        <p:nvSpPr>
+          <p:cNvPr id="14" name="Text 12"/>
+          <p:cNvSpPr/>
+          <p:nvPr/>
+        </p:nvSpPr>
+        <p:spPr>
+          <a:xfrm>
+            <a:off x="6903720" y="1444752"/>
+            <a:ext cx="4663440" cy="365760"/>
+          </a:xfrm>
+          <a:prstGeom prst="rect">
+            <a:avLst/>
+          </a:prstGeom>
+          <a:noFill/>
+          <a:ln/>
+        </p:spPr>
+        <p:txBody>
+          <a:bodyPr wrap="square" lIns="0" tIns="0" rIns="0" bIns="0" rtlCol="0" anchor="ctr"/>
+          <a:lstStyle/>
+          <a:p>
+            <a:pPr indent="0" marL="0">
+              <a:buNone/>
+            </a:pPr>
+            <a:r>
+              <a:rPr lang="en-US" sz="1650" b="1" dirty="0">
+                <a:solidFill>
+                  <a:srgbClr val="17313B"/>
+                </a:solidFill>
+                <a:latin typeface="Malgun Gothic" pitchFamily="34" charset="0"/>
+                <a:ea typeface="Malgun Gothic" pitchFamily="34" charset="-122"/>
+                <a:cs typeface="Malgun Gothic" pitchFamily="34" charset="-120"/>
+              </a:rPr>
+              <a:t>B. 풀커스텀 대응</a:t>
+            </a:r>
+            <a:endParaRPr lang="en-US" sz="1650" dirty="0"/>
+          </a:p>
+        </p:txBody>
+      </p:sp>
+      <p:sp>
+        <p:nvSpPr>
+          <p:cNvPr id="15" name="Text 13"/>
+          <p:cNvSpPr/>
+          <p:nvPr/>
+        </p:nvSpPr>
+        <p:spPr>
+          <a:xfrm>
+            <a:off x="6446520" y="1938528"/>
+            <a:ext cx="5029200" cy="310896"/>
+          </a:xfrm>
+          <a:prstGeom prst="rect">
+            <a:avLst/>
+          </a:prstGeom>
+          <a:noFill/>
+          <a:ln/>
+        </p:spPr>
+        <p:txBody>
+          <a:bodyPr wrap="square" lIns="0" tIns="0" rIns="0" bIns="0" rtlCol="0" anchor="ctr"/>
+          <a:lstStyle/>
+          <a:p>
+            <a:pPr indent="0" marL="0">
+              <a:buNone/>
+            </a:pPr>
+            <a:r>
+              <a:rPr lang="en-US" sz="1200" dirty="0">
+                <a:solidFill>
+                  <a:srgbClr val="5A7184"/>
+                </a:solidFill>
+                <a:latin typeface="Malgun Gothic" pitchFamily="34" charset="0"/>
+                <a:ea typeface="Malgun Gothic" pitchFamily="34" charset="-122"/>
+                <a:cs typeface="Malgun Gothic" pitchFamily="34" charset="-120"/>
+              </a:rPr>
+              <a:t>고객별 커스텀 SSD·펌웨어 전면 개발</a:t>
+            </a:r>
+            <a:endParaRPr lang="en-US" sz="1200" dirty="0"/>
+          </a:p>
+        </p:txBody>
+      </p:sp>
+      <p:sp>
+        <p:nvSpPr>
+          <p:cNvPr id="16" name="Text 14"/>
+          <p:cNvSpPr/>
+          <p:nvPr/>
+        </p:nvSpPr>
+        <p:spPr>
+          <a:xfrm>
+            <a:off x="6446520" y="2286000"/>
+            <a:ext cx="5029200" cy="804672"/>
+          </a:xfrm>
+          <a:prstGeom prst="rect">
+            <a:avLst/>
+          </a:prstGeom>
+          <a:noFill/>
+          <a:ln/>
+        </p:spPr>
+        <p:txBody>
+          <a:bodyPr wrap="square" lIns="0" tIns="0" rIns="0" bIns="0" rtlCol="0" anchor="t"/>
+          <a:lstStyle/>
+          <a:p>
+            <a:pPr indent="0" marL="0">
+              <a:lnSpc>
+                <a:spcPct val="112000"/>
+              </a:lnSpc>
+              <a:buNone/>
+            </a:pPr>
+            <a:r>
+              <a:rPr lang="en-US" sz="1200" b="1" dirty="0">
+                <a:solidFill>
+                  <a:srgbClr val="8A9BA8"/>
+                </a:solidFill>
+                <a:latin typeface="Malgun Gothic" pitchFamily="34" charset="0"/>
+                <a:ea typeface="Malgun Gothic" pitchFamily="34" charset="-122"/>
+                <a:cs typeface="Malgun Gothic" pitchFamily="34" charset="-120"/>
+              </a:rPr>
+              <a:t>탈락  </a:t>
+            </a:r>
+            <a:pPr indent="0" marL="0">
+              <a:lnSpc>
+                <a:spcPct val="112000"/>
+              </a:lnSpc>
+              <a:buNone/>
+            </a:pPr>
+            <a:r>
+              <a:rPr lang="en-US" sz="1200" dirty="0">
+                <a:solidFill>
+                  <a:srgbClr val="17313B"/>
+                </a:solidFill>
+                <a:latin typeface="Malgun Gothic" pitchFamily="34" charset="0"/>
+                <a:ea typeface="Malgun Gothic" pitchFamily="34" charset="-122"/>
+                <a:cs typeface="Malgun Gothic" pitchFamily="34" charset="-120"/>
+              </a:rPr>
+              <a:t>제품·펌웨어 파편화 — “커스텀 소싱·컨트랙은 파운드리 모델, 우리가 안 해본 것” (최장석)</a:t>
+            </a:r>
+            <a:endParaRPr lang="en-US" sz="1200" dirty="0"/>
+          </a:p>
+        </p:txBody>
+      </p:sp>
+      <p:sp>
+        <p:nvSpPr>
+          <p:cNvPr id="17" name="Shape 15"/>
+          <p:cNvSpPr/>
+          <p:nvPr/>
+        </p:nvSpPr>
+        <p:spPr>
+          <a:xfrm>
+            <a:off x="457200" y="3328416"/>
+            <a:ext cx="5541264" cy="1938528"/>
+          </a:xfrm>
+          <a:prstGeom prst="roundRect">
+            <a:avLst>
+              <a:gd name="adj" fmla="val 4245"/>
+            </a:avLst>
+          </a:prstGeom>
+          <a:solidFill>
+            <a:srgbClr val="F5F7F8"/>
+          </a:solidFill>
+          <a:ln w="12700">
+            <a:solidFill>
+              <a:srgbClr val="DCE4E9"/>
+            </a:solidFill>
+            <a:prstDash val="solid"/>
+          </a:ln>
+        </p:spPr>
+      </p:sp>
+      <p:sp>
+        <p:nvSpPr>
+          <p:cNvPr id="18" name="Text 16"/>
+          <p:cNvSpPr/>
+          <p:nvPr/>
+        </p:nvSpPr>
+        <p:spPr>
+          <a:xfrm>
+            <a:off x="676656" y="3529584"/>
+            <a:ext cx="365760" cy="365760"/>
+          </a:xfrm>
+          <a:prstGeom prst="ellipse">
+            <a:avLst/>
+          </a:prstGeom>
+          <a:solidFill>
+            <a:srgbClr val="B9C7D1"/>
+          </a:solidFill>
+          <a:ln/>
+        </p:spPr>
+        <p:txBody>
+          <a:bodyPr wrap="square" lIns="0" tIns="0" rIns="0" bIns="0" rtlCol="0" anchor="ctr"/>
+          <a:lstStyle/>
+          <a:p>
+            <a:pPr algn="ctr" indent="0" marL="0">
+              <a:buNone/>
+            </a:pPr>
+            <a:r>
+              <a:rPr lang="en-US" sz="1600" b="1" dirty="0">
+                <a:solidFill>
+                  <a:srgbClr val="FFFFFF"/>
+                </a:solidFill>
+                <a:latin typeface="Malgun Gothic" pitchFamily="34" charset="0"/>
+                <a:ea typeface="Malgun Gothic" pitchFamily="34" charset="-122"/>
+                <a:cs typeface="Malgun Gothic" pitchFamily="34" charset="-120"/>
+              </a:rPr>
+              <a:t>✕</a:t>
+            </a:r>
+            <a:endParaRPr lang="en-US" sz="1600" dirty="0"/>
+          </a:p>
+        </p:txBody>
+      </p:sp>
+      <p:sp>
+        <p:nvSpPr>
+          <p:cNvPr id="19" name="Text 17"/>
+          <p:cNvSpPr/>
+          <p:nvPr/>
+        </p:nvSpPr>
+        <p:spPr>
+          <a:xfrm>
+            <a:off x="1170432" y="3529584"/>
+            <a:ext cx="4663440" cy="365760"/>
+          </a:xfrm>
+          <a:prstGeom prst="rect">
+            <a:avLst/>
+          </a:prstGeom>
+          <a:noFill/>
+          <a:ln/>
+        </p:spPr>
+        <p:txBody>
+          <a:bodyPr wrap="square" lIns="0" tIns="0" rIns="0" bIns="0" rtlCol="0" anchor="ctr"/>
+          <a:lstStyle/>
+          <a:p>
+            <a:pPr indent="0" marL="0">
+              <a:buNone/>
+            </a:pPr>
+            <a:r>
+              <a:rPr lang="en-US" sz="1650" b="1" dirty="0">
+                <a:solidFill>
+                  <a:srgbClr val="17313B"/>
+                </a:solidFill>
+                <a:latin typeface="Malgun Gothic" pitchFamily="34" charset="0"/>
+                <a:ea typeface="Malgun Gothic" pitchFamily="34" charset="-122"/>
+                <a:cs typeface="Malgun Gothic" pitchFamily="34" charset="-120"/>
+              </a:rPr>
+              <a:t>C. FDP 표준 SSD만 공급</a:t>
+            </a:r>
+            <a:endParaRPr lang="en-US" sz="1650" dirty="0"/>
+          </a:p>
+        </p:txBody>
+      </p:sp>
+      <p:sp>
+        <p:nvSpPr>
+          <p:cNvPr id="20" name="Text 18"/>
+          <p:cNvSpPr/>
+          <p:nvPr/>
+        </p:nvSpPr>
+        <p:spPr>
+          <a:xfrm>
+            <a:off x="713232" y="4023360"/>
+            <a:ext cx="5029200" cy="310896"/>
+          </a:xfrm>
+          <a:prstGeom prst="rect">
+            <a:avLst/>
+          </a:prstGeom>
+          <a:noFill/>
+          <a:ln/>
+        </p:spPr>
+        <p:txBody>
+          <a:bodyPr wrap="square" lIns="0" tIns="0" rIns="0" bIns="0" rtlCol="0" anchor="ctr"/>
+          <a:lstStyle/>
+          <a:p>
+            <a:pPr indent="0" marL="0">
+              <a:buNone/>
+            </a:pPr>
+            <a:r>
+              <a:rPr lang="en-US" sz="1200" dirty="0">
+                <a:solidFill>
+                  <a:srgbClr val="5A7184"/>
+                </a:solidFill>
+                <a:latin typeface="Malgun Gothic" pitchFamily="34" charset="0"/>
+                <a:ea typeface="Malgun Gothic" pitchFamily="34" charset="-122"/>
+                <a:cs typeface="Malgun Gothic" pitchFamily="34" charset="-120"/>
+              </a:rPr>
+              <a:t>표준 지원 하드웨어만 제공, 통합은 고객 몫</a:t>
+            </a:r>
+            <a:endParaRPr lang="en-US" sz="1200" dirty="0"/>
+          </a:p>
+        </p:txBody>
+      </p:sp>
+      <p:sp>
+        <p:nvSpPr>
+          <p:cNvPr id="21" name="Text 19"/>
+          <p:cNvSpPr/>
+          <p:nvPr/>
+        </p:nvSpPr>
+        <p:spPr>
+          <a:xfrm>
+            <a:off x="713232" y="4370832"/>
+            <a:ext cx="5029200" cy="804672"/>
+          </a:xfrm>
+          <a:prstGeom prst="rect">
+            <a:avLst/>
+          </a:prstGeom>
+          <a:noFill/>
+          <a:ln/>
+        </p:spPr>
+        <p:txBody>
+          <a:bodyPr wrap="square" lIns="0" tIns="0" rIns="0" bIns="0" rtlCol="0" anchor="t"/>
+          <a:lstStyle/>
+          <a:p>
+            <a:pPr indent="0" marL="0">
+              <a:lnSpc>
+                <a:spcPct val="112000"/>
+              </a:lnSpc>
+              <a:buNone/>
+            </a:pPr>
+            <a:r>
+              <a:rPr lang="en-US" sz="1200" b="1" dirty="0">
+                <a:solidFill>
+                  <a:srgbClr val="8A9BA8"/>
+                </a:solidFill>
+                <a:latin typeface="Malgun Gothic" pitchFamily="34" charset="0"/>
+                <a:ea typeface="Malgun Gothic" pitchFamily="34" charset="-122"/>
+                <a:cs typeface="Malgun Gothic" pitchFamily="34" charset="-120"/>
+              </a:rPr>
+              <a:t>탈락  </a:t>
+            </a:r>
+            <a:pPr indent="0" marL="0">
+              <a:lnSpc>
+                <a:spcPct val="112000"/>
+              </a:lnSpc>
+              <a:buNone/>
+            </a:pPr>
+            <a:r>
+              <a:rPr lang="en-US" sz="1200" dirty="0">
+                <a:solidFill>
+                  <a:srgbClr val="17313B"/>
+                </a:solidFill>
+                <a:latin typeface="Malgun Gothic" pitchFamily="34" charset="0"/>
+                <a:ea typeface="Malgun Gothic" pitchFamily="34" charset="-122"/>
+                <a:cs typeface="Malgun Gothic" pitchFamily="34" charset="-120"/>
+              </a:rPr>
+              <a:t>“FDP 지원 여러 공급사 중 하나” — 차별화 없이 가격 경쟁 회귀</a:t>
+            </a:r>
+            <a:endParaRPr lang="en-US" sz="1200" dirty="0"/>
+          </a:p>
+        </p:txBody>
+      </p:sp>
+      <p:sp>
+        <p:nvSpPr>
+          <p:cNvPr id="22" name="Shape 20"/>
+          <p:cNvSpPr/>
+          <p:nvPr/>
+        </p:nvSpPr>
+        <p:spPr>
+          <a:xfrm>
+            <a:off x="6190488" y="3328416"/>
+            <a:ext cx="5541264" cy="1938528"/>
+          </a:xfrm>
+          <a:prstGeom prst="roundRect">
+            <a:avLst>
+              <a:gd name="adj" fmla="val 4245"/>
+            </a:avLst>
+          </a:prstGeom>
+          <a:solidFill>
+            <a:srgbClr val="E8F6F0"/>
+          </a:solidFill>
+          <a:ln w="19050">
+            <a:solidFill>
+              <a:srgbClr val="02A878"/>
+            </a:solidFill>
+            <a:prstDash val="solid"/>
+          </a:ln>
+        </p:spPr>
+      </p:sp>
+      <p:sp>
+        <p:nvSpPr>
+          <p:cNvPr id="23" name="Text 21"/>
+          <p:cNvSpPr/>
+          <p:nvPr/>
+        </p:nvSpPr>
+        <p:spPr>
+          <a:xfrm>
+            <a:off x="6409944" y="3529584"/>
+            <a:ext cx="365760" cy="365760"/>
+          </a:xfrm>
+          <a:prstGeom prst="ellipse">
+            <a:avLst/>
+          </a:prstGeom>
+          <a:solidFill>
+            <a:srgbClr val="02A878"/>
+          </a:solidFill>
+          <a:ln/>
+        </p:spPr>
+        <p:txBody>
+          <a:bodyPr wrap="square" lIns="0" tIns="0" rIns="0" bIns="0" rtlCol="0" anchor="ctr"/>
+          <a:lstStyle/>
+          <a:p>
+            <a:pPr algn="ctr" indent="0" marL="0">
+              <a:buNone/>
+            </a:pPr>
+            <a:r>
+              <a:rPr lang="en-US" sz="1600" b="1" dirty="0">
+                <a:solidFill>
+                  <a:srgbClr val="FFFFFF"/>
+                </a:solidFill>
+                <a:latin typeface="Malgun Gothic" pitchFamily="34" charset="0"/>
+                <a:ea typeface="Malgun Gothic" pitchFamily="34" charset="-122"/>
+                <a:cs typeface="Malgun Gothic" pitchFamily="34" charset="-120"/>
+              </a:rPr>
+              <a:t>✓</a:t>
+            </a:r>
+            <a:endParaRPr lang="en-US" sz="1600" dirty="0"/>
+          </a:p>
+        </p:txBody>
+      </p:sp>
+      <p:sp>
+        <p:nvSpPr>
+          <p:cNvPr id="24" name="Text 22"/>
+          <p:cNvSpPr/>
+          <p:nvPr/>
+        </p:nvSpPr>
+        <p:spPr>
+          <a:xfrm>
+            <a:off x="6903720" y="3529584"/>
+            <a:ext cx="4663440" cy="365760"/>
+          </a:xfrm>
+          <a:prstGeom prst="rect">
+            <a:avLst/>
+          </a:prstGeom>
+          <a:noFill/>
+          <a:ln/>
+        </p:spPr>
+        <p:txBody>
+          <a:bodyPr wrap="square" lIns="0" tIns="0" rIns="0" bIns="0" rtlCol="0" anchor="ctr"/>
+          <a:lstStyle/>
+          <a:p>
+            <a:pPr indent="0" marL="0">
+              <a:buNone/>
+            </a:pPr>
+            <a:r>
+              <a:rPr lang="en-US" sz="1650" b="1" dirty="0">
+                <a:solidFill>
+                  <a:srgbClr val="02A878"/>
+                </a:solidFill>
+                <a:latin typeface="Malgun Gothic" pitchFamily="34" charset="0"/>
+                <a:ea typeface="Malgun Gothic" pitchFamily="34" charset="-122"/>
+                <a:cs typeface="Malgun Gothic" pitchFamily="34" charset="-120"/>
+              </a:rPr>
+              <a:t>D. FDP 표준 + 시스템 SW 플랫폼</a:t>
+            </a:r>
+            <a:endParaRPr lang="en-US" sz="1650" dirty="0"/>
+          </a:p>
+        </p:txBody>
+      </p:sp>
+      <p:sp>
+        <p:nvSpPr>
+          <p:cNvPr id="25" name="Text 23"/>
+          <p:cNvSpPr/>
+          <p:nvPr/>
+        </p:nvSpPr>
+        <p:spPr>
+          <a:xfrm>
+            <a:off x="6446520" y="4023360"/>
+            <a:ext cx="5029200" cy="310896"/>
+          </a:xfrm>
+          <a:prstGeom prst="rect">
+            <a:avLst/>
+          </a:prstGeom>
+          <a:noFill/>
+          <a:ln/>
+        </p:spPr>
+        <p:txBody>
+          <a:bodyPr wrap="square" lIns="0" tIns="0" rIns="0" bIns="0" rtlCol="0" anchor="ctr"/>
+          <a:lstStyle/>
+          <a:p>
+            <a:pPr indent="0" marL="0">
+              <a:buNone/>
+            </a:pPr>
+            <a:r>
+              <a:rPr lang="en-US" sz="1200" dirty="0">
+                <a:solidFill>
+                  <a:srgbClr val="5A7184"/>
+                </a:solidFill>
+                <a:latin typeface="Malgun Gothic" pitchFamily="34" charset="0"/>
+                <a:ea typeface="Malgun Gothic" pitchFamily="34" charset="-122"/>
+                <a:cs typeface="Malgun Gothic" pitchFamily="34" charset="-120"/>
+              </a:rPr>
+              <a:t>공통 펌웨어 + Host SDK·Profiler·E2E 검증 제공</a:t>
+            </a:r>
+            <a:endParaRPr lang="en-US" sz="1200" dirty="0"/>
+          </a:p>
+        </p:txBody>
+      </p:sp>
+      <p:sp>
+        <p:nvSpPr>
+          <p:cNvPr id="26" name="Text 24"/>
+          <p:cNvSpPr/>
+          <p:nvPr/>
+        </p:nvSpPr>
+        <p:spPr>
+          <a:xfrm>
+            <a:off x="6446520" y="4370832"/>
+            <a:ext cx="5029200" cy="804672"/>
+          </a:xfrm>
+          <a:prstGeom prst="rect">
+            <a:avLst/>
+          </a:prstGeom>
+          <a:noFill/>
+          <a:ln/>
+        </p:spPr>
+        <p:txBody>
+          <a:bodyPr wrap="square" lIns="0" tIns="0" rIns="0" bIns="0" rtlCol="0" anchor="t"/>
+          <a:lstStyle/>
+          <a:p>
+            <a:pPr indent="0" marL="0">
+              <a:lnSpc>
+                <a:spcPct val="112000"/>
+              </a:lnSpc>
+              <a:buNone/>
+            </a:pPr>
+            <a:r>
+              <a:rPr lang="en-US" sz="1200" b="1" dirty="0">
+                <a:solidFill>
+                  <a:srgbClr val="02A878"/>
+                </a:solidFill>
+                <a:latin typeface="Malgun Gothic" pitchFamily="34" charset="0"/>
+                <a:ea typeface="Malgun Gothic" pitchFamily="34" charset="-122"/>
+                <a:cs typeface="Malgun Gothic" pitchFamily="34" charset="-120"/>
+              </a:rPr>
+              <a:t>채택  </a:t>
+            </a:r>
+            <a:pPr indent="0" marL="0">
+              <a:lnSpc>
+                <a:spcPct val="112000"/>
+              </a:lnSpc>
+              <a:buNone/>
+            </a:pPr>
+            <a:r>
+              <a:rPr lang="en-US" sz="1200" dirty="0">
+                <a:solidFill>
+                  <a:srgbClr val="17313B"/>
+                </a:solidFill>
+                <a:latin typeface="Malgun Gothic" pitchFamily="34" charset="0"/>
+                <a:ea typeface="Malgun Gothic" pitchFamily="34" charset="-122"/>
+                <a:cs typeface="Malgun Gothic" pitchFamily="34" charset="-120"/>
+              </a:rPr>
+              <a:t>유일하게 4개 기준 동시 충족 — 통제권 흐름 위에서 부가가치 재정의</a:t>
+            </a:r>
+            <a:endParaRPr lang="en-US" sz="1200" dirty="0"/>
+          </a:p>
+        </p:txBody>
+      </p:sp>
+      <p:sp>
+        <p:nvSpPr>
+          <p:cNvPr id="27" name="Shape 25"/>
+          <p:cNvSpPr/>
+          <p:nvPr/>
+        </p:nvSpPr>
+        <p:spPr>
+          <a:xfrm>
+            <a:off x="457200" y="5413248"/>
+            <a:ext cx="11274552" cy="713232"/>
+          </a:xfrm>
+          <a:prstGeom prst="roundRect">
+            <a:avLst>
+              <a:gd name="adj" fmla="val 10256"/>
+            </a:avLst>
+          </a:prstGeom>
+          <a:solidFill>
+            <a:srgbClr val="E8F6F0"/>
+          </a:solidFill>
+          <a:ln w="15875">
+            <a:solidFill>
+              <a:srgbClr val="02A878"/>
+            </a:solidFill>
+            <a:prstDash val="solid"/>
+          </a:ln>
         </p:spPr>
       </p:sp>
       <p:pic>
         <p:nvPicPr>
-          <p:cNvPr id="9" name="Image 0" descr="preencoded.png">    </p:cNvPr>
+          <p:cNvPr id="28" name="Image 0" descr="preencoded.png">    </p:cNvPr>
           <p:cNvPicPr>
             <a:picLocks noChangeAspect="1"/>
           </p:cNvPicPr>
@@ -9209,8 +10173,8 @@
         </p:blipFill>
         <p:spPr>
           <a:xfrm>
-            <a:off x="736641" y="1541313"/>
-            <a:ext cx="209215" cy="209215"/>
+            <a:off x="658368" y="5586984"/>
+            <a:ext cx="365760" cy="365760"/>
           </a:xfrm>
           <a:prstGeom prst="rect">
             <a:avLst/>
@@ -9219,62 +10183,23 @@
       </p:pic>
       <p:sp>
         <p:nvSpPr>
-          <p:cNvPr id="10" name="Text 7"/>
-          <p:cNvSpPr/>
-          <p:nvPr/>
-        </p:nvSpPr>
-        <p:spPr>
-          <a:xfrm>
-            <a:off x="1152144" y="1463040"/>
-            <a:ext cx="2743200" cy="365760"/>
-          </a:xfrm>
-          <a:prstGeom prst="rect">
-            <a:avLst/>
-          </a:prstGeom>
-          <a:noFill/>
-          <a:ln/>
-        </p:spPr>
-        <p:txBody>
-          <a:bodyPr wrap="square" lIns="0" tIns="0" rIns="0" bIns="0" rtlCol="0" anchor="ctr"/>
-          <a:lstStyle/>
-          <a:p>
-            <a:pPr indent="0" marL="0">
-              <a:buNone/>
-            </a:pPr>
-            <a:r>
-              <a:rPr lang="en-US" sz="1400" b="1" dirty="0">
-                <a:solidFill>
-                  <a:srgbClr val="17313B"/>
-                </a:solidFill>
-                <a:latin typeface="Malgun Gothic" pitchFamily="34" charset="0"/>
-                <a:ea typeface="Malgun Gothic" pitchFamily="34" charset="-122"/>
-                <a:cs typeface="Malgun Gothic" pitchFamily="34" charset="-120"/>
-              </a:rPr>
-              <a:t>1. Enablement Platform</a:t>
-            </a:r>
-            <a:endParaRPr lang="en-US" sz="1400" dirty="0"/>
-          </a:p>
-        </p:txBody>
-      </p:sp>
-      <p:sp>
-        <p:nvSpPr>
-          <p:cNvPr id="11" name="Text 8"/>
-          <p:cNvSpPr/>
-          <p:nvPr/>
-        </p:nvSpPr>
-        <p:spPr>
-          <a:xfrm>
-            <a:off x="658368" y="1956816"/>
-            <a:ext cx="3200400" cy="969264"/>
-          </a:xfrm>
-          <a:prstGeom prst="rect">
-            <a:avLst/>
-          </a:prstGeom>
-          <a:noFill/>
-          <a:ln/>
-        </p:spPr>
-        <p:txBody>
-          <a:bodyPr wrap="square" lIns="0" tIns="0" rIns="0" bIns="0" rtlCol="0" anchor="t"/>
+          <p:cNvPr id="29" name="Text 26"/>
+          <p:cNvSpPr/>
+          <p:nvPr/>
+        </p:nvSpPr>
+        <p:spPr>
+          <a:xfrm>
+            <a:off x="1152144" y="5413248"/>
+            <a:ext cx="10424160" cy="713232"/>
+          </a:xfrm>
+          <a:prstGeom prst="rect">
+            <a:avLst/>
+          </a:prstGeom>
+          <a:noFill/>
+          <a:ln/>
+        </p:spPr>
+        <p:txBody>
+          <a:bodyPr wrap="square" lIns="0" tIns="0" rIns="0" bIns="0" rtlCol="0" anchor="ctr"/>
           <a:lstStyle/>
           <a:p>
             <a:pPr indent="0" marL="0">
@@ -9284,7 +10209,27 @@
               <a:buNone/>
             </a:pPr>
             <a:r>
-              <a:rPr lang="en-US" sz="1050" dirty="0">
+              <a:rPr lang="en-US" sz="1400" b="1" dirty="0">
+                <a:solidFill>
+                  <a:srgbClr val="17313B"/>
+                </a:solidFill>
+                <a:latin typeface="Malgun Gothic" pitchFamily="34" charset="0"/>
+                <a:ea typeface="Malgun Gothic" pitchFamily="34" charset="-122"/>
+                <a:cs typeface="Malgun Gothic" pitchFamily="34" charset="-120"/>
+              </a:rPr>
+              <a:t>선택 논리 — 부가가치는 고객이 가져간 계층 아래(웨이퍼)가 아니라, 아직 풀지 못한 계층 위에서 만든다</a:t>
+            </a:r>
+            <a:endParaRPr lang="en-US" sz="1400" dirty="0"/>
+          </a:p>
+          <a:p>
+            <a:pPr indent="0" marL="0">
+              <a:lnSpc>
+                <a:spcPct val="112000"/>
+              </a:lnSpc>
+              <a:buNone/>
+            </a:pPr>
+            <a:r>
+              <a:rPr lang="en-US" sz="1100" dirty="0">
                 <a:solidFill>
                   <a:srgbClr val="5A7184"/>
                 </a:solidFill>
@@ -9292,57 +10237,1061 @@
                 <a:ea typeface="Malgun Gothic" pitchFamily="34" charset="-122"/>
                 <a:cs typeface="Malgun Gothic" pitchFamily="34" charset="-120"/>
               </a:rPr>
-              <a:t>FDP SDK·공통 라이브러리 (Linux·io_uring·SPDK) · Workload Profiler(trace→추천 RUH·예상 WAF) · Emulator/Digital Twin</a:t>
-            </a:r>
-            <a:endParaRPr lang="en-US" sz="1050" dirty="0"/>
-          </a:p>
-        </p:txBody>
-      </p:sp>
-      <p:sp>
-        <p:nvSpPr>
-          <p:cNvPr id="12" name="Shape 9"/>
-          <p:cNvSpPr/>
-          <p:nvPr/>
-        </p:nvSpPr>
-        <p:spPr>
-          <a:xfrm>
-            <a:off x="4297680" y="1280160"/>
-            <a:ext cx="3602736" cy="1737360"/>
+              <a:t>워크로드 ↔ FDP 정책 변환이 그 계층 — 삼성은 FDP 표준의 공동 주도자로서 이 계층을 선점할 위치에 있다</a:t>
+            </a:r>
+            <a:endParaRPr lang="en-US" sz="1400" dirty="0"/>
+          </a:p>
+        </p:txBody>
+      </p:sp>
+    </p:spTree>
+  </p:cSld>
+  <p:clrMapOvr>
+    <a:masterClrMapping/>
+  </p:clrMapOvr>
+</p:sld>
+</file>
+
+<file path=ppt/slides/slide6.xml><?xml version="1.0" encoding="utf-8"?>
+<p:sld xmlns:a="http://schemas.openxmlformats.org/drawingml/2006/main" xmlns:r="http://schemas.openxmlformats.org/officeDocument/2006/relationships" xmlns:p="http://schemas.openxmlformats.org/presentationml/2006/main">
+  <p:cSld name="Slide 6">
+    <p:spTree>
+      <p:nvGrpSpPr>
+        <p:cNvPr id="1" name=""/>
+        <p:cNvGrpSpPr/>
+        <p:nvPr/>
+      </p:nvGrpSpPr>
+      <p:grpSpPr>
+        <a:xfrm>
+          <a:off x="0" y="0"/>
+          <a:ext cx="0" cy="0"/>
+          <a:chOff x="0" y="0"/>
+          <a:chExt cx="0" cy="0"/>
+        </a:xfrm>
+      </p:grpSpPr>
+      <p:sp>
+        <p:nvSpPr>
+          <p:cNvPr id="2" name="Text 0"/>
+          <p:cNvSpPr/>
+          <p:nvPr/>
+        </p:nvSpPr>
+        <p:spPr>
+          <a:xfrm>
+            <a:off x="457200" y="237744"/>
+            <a:ext cx="9765792" cy="566928"/>
+          </a:xfrm>
+          <a:prstGeom prst="rect">
+            <a:avLst/>
+          </a:prstGeom>
+          <a:noFill/>
+          <a:ln/>
+        </p:spPr>
+        <p:txBody>
+          <a:bodyPr wrap="square" lIns="0" tIns="0" rIns="0" bIns="0" rtlCol="0" anchor="ctr"/>
+          <a:lstStyle/>
+          <a:p>
+            <a:pPr indent="0" marL="0">
+              <a:buNone/>
+            </a:pPr>
+            <a:r>
+              <a:rPr lang="en-US" sz="3200" b="1" dirty="0">
+                <a:solidFill>
+                  <a:srgbClr val="17313B"/>
+                </a:solidFill>
+                <a:latin typeface="Malgun Gothic" pitchFamily="34" charset="0"/>
+                <a:ea typeface="Malgun Gothic" pitchFamily="34" charset="-122"/>
+                <a:cs typeface="Malgun Gothic" pitchFamily="34" charset="-120"/>
+              </a:rPr>
+              <a:t>제품·기술 축 — FDP Host–SSD 통합 플랫폼</a:t>
+            </a:r>
+            <a:endParaRPr lang="en-US" sz="3200" dirty="0"/>
+          </a:p>
+        </p:txBody>
+      </p:sp>
+      <p:sp>
+        <p:nvSpPr>
+          <p:cNvPr id="3" name="Text 1"/>
+          <p:cNvSpPr/>
+          <p:nvPr/>
+        </p:nvSpPr>
+        <p:spPr>
+          <a:xfrm>
+            <a:off x="10268712" y="310896"/>
+            <a:ext cx="1463040" cy="420624"/>
           </a:xfrm>
           <a:prstGeom prst="roundRect">
             <a:avLst>
-              <a:gd name="adj" fmla="val 4737"/>
+              <a:gd name="adj" fmla="val 21739"/>
             </a:avLst>
           </a:prstGeom>
           <a:solidFill>
+            <a:srgbClr val="EFF3F5"/>
+          </a:solidFill>
+          <a:ln/>
+        </p:spPr>
+        <p:txBody>
+          <a:bodyPr wrap="square" lIns="0" tIns="0" rIns="0" bIns="0" rtlCol="0" anchor="ctr"/>
+          <a:lstStyle/>
+          <a:p>
+            <a:pPr algn="ctr" indent="0" marL="0">
+              <a:buNone/>
+            </a:pPr>
+            <a:r>
+              <a:rPr lang="en-US" sz="1400" b="1" dirty="0">
+                <a:solidFill>
+                  <a:srgbClr val="5A7184"/>
+                </a:solidFill>
+                <a:latin typeface="Malgun Gothic" pitchFamily="34" charset="0"/>
+                <a:ea typeface="Malgun Gothic" pitchFamily="34" charset="-122"/>
+                <a:cs typeface="Malgun Gothic" pitchFamily="34" charset="-120"/>
+              </a:rPr>
+              <a:t>제품 축 ③</a:t>
+            </a:r>
+            <a:endParaRPr lang="en-US" sz="1400" dirty="0"/>
+          </a:p>
+        </p:txBody>
+      </p:sp>
+      <p:sp>
+        <p:nvSpPr>
+          <p:cNvPr id="4" name="Text 2"/>
+          <p:cNvSpPr/>
+          <p:nvPr/>
+        </p:nvSpPr>
+        <p:spPr>
+          <a:xfrm>
+            <a:off x="457200" y="6510528"/>
+            <a:ext cx="6949440" cy="256032"/>
+          </a:xfrm>
+          <a:prstGeom prst="rect">
+            <a:avLst/>
+          </a:prstGeom>
+          <a:noFill/>
+          <a:ln/>
+        </p:spPr>
+        <p:txBody>
+          <a:bodyPr wrap="square" lIns="0" tIns="0" rIns="0" bIns="0" rtlCol="0" anchor="ctr"/>
+          <a:lstStyle/>
+          <a:p>
+            <a:pPr indent="0" marL="0">
+              <a:buNone/>
+            </a:pPr>
+            <a:r>
+              <a:rPr lang="en-US" sz="1000" dirty="0">
+                <a:solidFill>
+                  <a:srgbClr val="5A7184"/>
+                </a:solidFill>
+                <a:latin typeface="Malgun Gothic" pitchFamily="34" charset="0"/>
+                <a:ea typeface="Malgun Gothic" pitchFamily="34" charset="-122"/>
+                <a:cs typeface="Malgun Gothic" pitchFamily="34" charset="-120"/>
+              </a:rPr>
+              <a:t>삼성전자 메모리사업부 · 개발실 체질 전환 전략 요약 · 2026-07-24</a:t>
+            </a:r>
+            <a:endParaRPr lang="en-US" sz="1000" dirty="0"/>
+          </a:p>
+        </p:txBody>
+      </p:sp>
+      <p:sp>
+        <p:nvSpPr>
+          <p:cNvPr id="5" name="Text 3"/>
+          <p:cNvSpPr/>
+          <p:nvPr/>
+        </p:nvSpPr>
+        <p:spPr>
+          <a:xfrm>
+            <a:off x="7589520" y="6510528"/>
+            <a:ext cx="4142232" cy="256032"/>
+          </a:xfrm>
+          <a:prstGeom prst="rect">
+            <a:avLst/>
+          </a:prstGeom>
+          <a:noFill/>
+          <a:ln/>
+        </p:spPr>
+        <p:txBody>
+          <a:bodyPr wrap="square" lIns="0" tIns="0" rIns="0" bIns="0" rtlCol="0" anchor="ctr"/>
+          <a:lstStyle/>
+          <a:p>
+            <a:pPr algn="r" indent="0" marL="0">
+              <a:buNone/>
+            </a:pPr>
+            <a:r>
+              <a:rPr lang="en-US" sz="1000" dirty="0">
+                <a:solidFill>
+                  <a:srgbClr val="5A7184"/>
+                </a:solidFill>
+                <a:latin typeface="Malgun Gothic" pitchFamily="34" charset="0"/>
+                <a:ea typeface="Malgun Gothic" pitchFamily="34" charset="-122"/>
+                <a:cs typeface="Malgun Gothic" pitchFamily="34" charset="-120"/>
+              </a:rPr>
+              <a:t>원천: wiki/strategies/fdp-host-ssd-platform.md</a:t>
+            </a:r>
+            <a:endParaRPr lang="en-US" sz="1000" dirty="0"/>
+          </a:p>
+        </p:txBody>
+      </p:sp>
+      <p:sp>
+        <p:nvSpPr>
+          <p:cNvPr id="6" name="Text 4"/>
+          <p:cNvSpPr/>
+          <p:nvPr/>
+        </p:nvSpPr>
+        <p:spPr>
+          <a:xfrm>
+            <a:off x="457200" y="859536"/>
+            <a:ext cx="11274552" cy="548640"/>
+          </a:xfrm>
+          <a:prstGeom prst="roundRect">
+            <a:avLst>
+              <a:gd name="adj" fmla="val 15000"/>
+            </a:avLst>
+          </a:prstGeom>
+          <a:solidFill>
             <a:srgbClr val="F5F7F8"/>
           </a:solidFill>
           <a:ln/>
         </p:spPr>
-      </p:sp>
-      <p:sp>
-        <p:nvSpPr>
-          <p:cNvPr id="13" name="Shape 10"/>
-          <p:cNvSpPr/>
-          <p:nvPr/>
-        </p:nvSpPr>
-        <p:spPr>
-          <a:xfrm>
-            <a:off x="4480560" y="1444752"/>
-            <a:ext cx="402336" cy="402336"/>
+        <p:txBody>
+          <a:bodyPr wrap="square" lIns="0" tIns="0" rIns="0" bIns="0" rtlCol="0" anchor="ctr"/>
+          <a:lstStyle/>
+          <a:p>
+            <a:pPr algn="ctr" indent="0" marL="0">
+              <a:buNone/>
+            </a:pPr>
+            <a:r>
+              <a:rPr lang="en-US" sz="1500" b="1" dirty="0">
+                <a:solidFill>
+                  <a:srgbClr val="17313B"/>
+                </a:solidFill>
+                <a:latin typeface="Malgun Gothic" pitchFamily="34" charset="0"/>
+                <a:ea typeface="Malgun Gothic" pitchFamily="34" charset="-122"/>
+                <a:cs typeface="Malgun Gothic" pitchFamily="34" charset="-120"/>
+              </a:rPr>
+              <a:t>FDP SSD 공급자 → FDP 기반 Host–SSD 통합 솔루션 제공자   </a:t>
+            </a:r>
+            <a:pPr algn="ctr" indent="0" marL="0">
+              <a:buNone/>
+            </a:pPr>
+            <a:r>
+              <a:rPr lang="en-US" sz="1250" i="1" dirty="0">
+                <a:solidFill>
+                  <a:srgbClr val="5A7184"/>
+                </a:solidFill>
+                <a:latin typeface="Malgun Gothic" pitchFamily="34" charset="0"/>
+                <a:ea typeface="Malgun Gothic" pitchFamily="34" charset="-122"/>
+                <a:cs typeface="Malgun Gothic" pitchFamily="34" charset="-120"/>
+              </a:rPr>
+              <a:t>“Binding으로 수요 확보 · FDP로 표준화 · 시스템 SW로 연결”</a:t>
+            </a:r>
+            <a:endParaRPr lang="en-US" sz="1500" dirty="0"/>
+          </a:p>
+        </p:txBody>
+      </p:sp>
+      <p:sp>
+        <p:nvSpPr>
+          <p:cNvPr id="7" name="Text 5"/>
+          <p:cNvSpPr/>
+          <p:nvPr/>
+        </p:nvSpPr>
+        <p:spPr>
+          <a:xfrm>
+            <a:off x="457200" y="1554480"/>
+            <a:ext cx="1682496" cy="713232"/>
+          </a:xfrm>
+          <a:prstGeom prst="roundRect">
+            <a:avLst>
+              <a:gd name="adj" fmla="val 8974"/>
+            </a:avLst>
+          </a:prstGeom>
+          <a:solidFill>
+            <a:srgbClr val="FFFFFF"/>
+          </a:solidFill>
+          <a:ln w="12700">
+            <a:solidFill>
+              <a:srgbClr val="DCE4E9"/>
+            </a:solidFill>
+          </a:ln>
+        </p:spPr>
+        <p:txBody>
+          <a:bodyPr wrap="square" lIns="0" tIns="0" rIns="0" bIns="0" rtlCol="0" anchor="ctr"/>
+          <a:lstStyle/>
+          <a:p>
+            <a:pPr algn="ctr" indent="0" marL="0">
+              <a:lnSpc>
+                <a:spcPct val="105000"/>
+              </a:lnSpc>
+              <a:buNone/>
+            </a:pPr>
+            <a:r>
+              <a:rPr lang="en-US" sz="1200" b="1" dirty="0">
+                <a:solidFill>
+                  <a:srgbClr val="17313B"/>
+                </a:solidFill>
+                <a:latin typeface="Malgun Gothic" pitchFamily="34" charset="0"/>
+                <a:ea typeface="Malgun Gothic" pitchFamily="34" charset="-122"/>
+                <a:cs typeface="Malgun Gothic" pitchFamily="34" charset="-120"/>
+              </a:rPr>
+              <a:t>Binding 계약</a:t>
+            </a:r>
+            <a:endParaRPr lang="en-US" sz="1200" dirty="0"/>
+          </a:p>
+          <a:p>
+            <a:pPr algn="ctr" indent="0" marL="0">
+              <a:lnSpc>
+                <a:spcPct val="105000"/>
+              </a:lnSpc>
+              <a:buNone/>
+            </a:pPr>
+            <a:r>
+              <a:rPr lang="en-US" sz="950" dirty="0">
+                <a:solidFill>
+                  <a:srgbClr val="5A7184"/>
+                </a:solidFill>
+                <a:latin typeface="Malgun Gothic" pitchFamily="34" charset="0"/>
+                <a:ea typeface="Malgun Gothic" pitchFamily="34" charset="-122"/>
+                <a:cs typeface="Malgun Gothic" pitchFamily="34" charset="-120"/>
+              </a:rPr>
+              <a:t>장기 물량 확보</a:t>
+            </a:r>
+            <a:endParaRPr lang="en-US" sz="1200" dirty="0"/>
+          </a:p>
+        </p:txBody>
+      </p:sp>
+      <p:sp>
+        <p:nvSpPr>
+          <p:cNvPr id="8" name="Text 6"/>
+          <p:cNvSpPr/>
+          <p:nvPr/>
+        </p:nvSpPr>
+        <p:spPr>
+          <a:xfrm>
+            <a:off x="2139696" y="1554480"/>
+            <a:ext cx="201168" cy="713232"/>
+          </a:xfrm>
+          <a:prstGeom prst="rect">
+            <a:avLst/>
+          </a:prstGeom>
+          <a:noFill/>
+          <a:ln/>
+        </p:spPr>
+        <p:txBody>
+          <a:bodyPr wrap="square" lIns="0" tIns="0" rIns="0" bIns="0" rtlCol="0" anchor="ctr"/>
+          <a:lstStyle/>
+          <a:p>
+            <a:pPr algn="ctr" indent="0" marL="0">
+              <a:buNone/>
+            </a:pPr>
+            <a:r>
+              <a:rPr lang="en-US" sz="1050" dirty="0">
+                <a:solidFill>
+                  <a:srgbClr val="5A7184"/>
+                </a:solidFill>
+                <a:latin typeface="Malgun Gothic" pitchFamily="34" charset="0"/>
+                <a:ea typeface="Malgun Gothic" pitchFamily="34" charset="-122"/>
+                <a:cs typeface="Malgun Gothic" pitchFamily="34" charset="-120"/>
+              </a:rPr>
+              <a:t>▶</a:t>
+            </a:r>
+            <a:endParaRPr lang="en-US" sz="1050" dirty="0"/>
+          </a:p>
+        </p:txBody>
+      </p:sp>
+      <p:sp>
+        <p:nvSpPr>
+          <p:cNvPr id="9" name="Text 7"/>
+          <p:cNvSpPr/>
+          <p:nvPr/>
+        </p:nvSpPr>
+        <p:spPr>
+          <a:xfrm>
+            <a:off x="2340864" y="1554480"/>
+            <a:ext cx="1682496" cy="713232"/>
+          </a:xfrm>
+          <a:prstGeom prst="roundRect">
+            <a:avLst>
+              <a:gd name="adj" fmla="val 8974"/>
+            </a:avLst>
+          </a:prstGeom>
+          <a:solidFill>
+            <a:srgbClr val="FFFFFF"/>
+          </a:solidFill>
+          <a:ln w="12700">
+            <a:solidFill>
+              <a:srgbClr val="DCE4E9"/>
+            </a:solidFill>
+          </a:ln>
+        </p:spPr>
+        <p:txBody>
+          <a:bodyPr wrap="square" lIns="0" tIns="0" rIns="0" bIns="0" rtlCol="0" anchor="ctr"/>
+          <a:lstStyle/>
+          <a:p>
+            <a:pPr algn="ctr" indent="0" marL="0">
+              <a:lnSpc>
+                <a:spcPct val="105000"/>
+              </a:lnSpc>
+              <a:buNone/>
+            </a:pPr>
+            <a:r>
+              <a:rPr lang="en-US" sz="1200" b="1" dirty="0">
+                <a:solidFill>
+                  <a:srgbClr val="17313B"/>
+                </a:solidFill>
+                <a:latin typeface="Malgun Gothic" pitchFamily="34" charset="0"/>
+                <a:ea typeface="Malgun Gothic" pitchFamily="34" charset="-122"/>
+                <a:cs typeface="Malgun Gothic" pitchFamily="34" charset="-120"/>
+              </a:rPr>
+              <a:t>FDP 표준 SSD</a:t>
+            </a:r>
+            <a:endParaRPr lang="en-US" sz="1200" dirty="0"/>
+          </a:p>
+          <a:p>
+            <a:pPr algn="ctr" indent="0" marL="0">
+              <a:lnSpc>
+                <a:spcPct val="105000"/>
+              </a:lnSpc>
+              <a:buNone/>
+            </a:pPr>
+            <a:r>
+              <a:rPr lang="en-US" sz="950" dirty="0">
+                <a:solidFill>
+                  <a:srgbClr val="5A7184"/>
+                </a:solidFill>
+                <a:latin typeface="Malgun Gothic" pitchFamily="34" charset="0"/>
+                <a:ea typeface="Malgun Gothic" pitchFamily="34" charset="-122"/>
+                <a:cs typeface="Malgun Gothic" pitchFamily="34" charset="-120"/>
+              </a:rPr>
+              <a:t>공통 인터페이스</a:t>
+            </a:r>
+            <a:endParaRPr lang="en-US" sz="1200" dirty="0"/>
+          </a:p>
+        </p:txBody>
+      </p:sp>
+      <p:sp>
+        <p:nvSpPr>
+          <p:cNvPr id="10" name="Text 8"/>
+          <p:cNvSpPr/>
+          <p:nvPr/>
+        </p:nvSpPr>
+        <p:spPr>
+          <a:xfrm>
+            <a:off x="4023360" y="1554480"/>
+            <a:ext cx="201168" cy="713232"/>
+          </a:xfrm>
+          <a:prstGeom prst="rect">
+            <a:avLst/>
+          </a:prstGeom>
+          <a:noFill/>
+          <a:ln/>
+        </p:spPr>
+        <p:txBody>
+          <a:bodyPr wrap="square" lIns="0" tIns="0" rIns="0" bIns="0" rtlCol="0" anchor="ctr"/>
+          <a:lstStyle/>
+          <a:p>
+            <a:pPr algn="ctr" indent="0" marL="0">
+              <a:buNone/>
+            </a:pPr>
+            <a:r>
+              <a:rPr lang="en-US" sz="1050" dirty="0">
+                <a:solidFill>
+                  <a:srgbClr val="5A7184"/>
+                </a:solidFill>
+                <a:latin typeface="Malgun Gothic" pitchFamily="34" charset="0"/>
+                <a:ea typeface="Malgun Gothic" pitchFamily="34" charset="-122"/>
+                <a:cs typeface="Malgun Gothic" pitchFamily="34" charset="-120"/>
+              </a:rPr>
+              <a:t>▶</a:t>
+            </a:r>
+            <a:endParaRPr lang="en-US" sz="1050" dirty="0"/>
+          </a:p>
+        </p:txBody>
+      </p:sp>
+      <p:sp>
+        <p:nvSpPr>
+          <p:cNvPr id="11" name="Text 9"/>
+          <p:cNvSpPr/>
+          <p:nvPr/>
+        </p:nvSpPr>
+        <p:spPr>
+          <a:xfrm>
+            <a:off x="4224528" y="1554480"/>
+            <a:ext cx="1682496" cy="713232"/>
+          </a:xfrm>
+          <a:prstGeom prst="roundRect">
+            <a:avLst>
+              <a:gd name="adj" fmla="val 8974"/>
+            </a:avLst>
+          </a:prstGeom>
+          <a:solidFill>
+            <a:srgbClr val="E8F6F0"/>
+          </a:solidFill>
+          <a:ln w="15875">
+            <a:solidFill>
+              <a:srgbClr val="02A878"/>
+            </a:solidFill>
+          </a:ln>
+        </p:spPr>
+        <p:txBody>
+          <a:bodyPr wrap="square" lIns="0" tIns="0" rIns="0" bIns="0" rtlCol="0" anchor="ctr"/>
+          <a:lstStyle/>
+          <a:p>
+            <a:pPr algn="ctr" indent="0" marL="0">
+              <a:lnSpc>
+                <a:spcPct val="105000"/>
+              </a:lnSpc>
+              <a:buNone/>
+            </a:pPr>
+            <a:r>
+              <a:rPr lang="en-US" sz="1200" b="1" dirty="0">
+                <a:solidFill>
+                  <a:srgbClr val="02A878"/>
+                </a:solidFill>
+                <a:latin typeface="Malgun Gothic" pitchFamily="34" charset="0"/>
+                <a:ea typeface="Malgun Gothic" pitchFamily="34" charset="-122"/>
+                <a:cs typeface="Malgun Gothic" pitchFamily="34" charset="-120"/>
+              </a:rPr>
+              <a:t>시스템 SW</a:t>
+            </a:r>
+            <a:endParaRPr lang="en-US" sz="1200" dirty="0"/>
+          </a:p>
+          <a:p>
+            <a:pPr algn="ctr" indent="0" marL="0">
+              <a:lnSpc>
+                <a:spcPct val="105000"/>
+              </a:lnSpc>
+              <a:buNone/>
+            </a:pPr>
+            <a:r>
+              <a:rPr lang="en-US" sz="950" dirty="0">
+                <a:solidFill>
+                  <a:srgbClr val="5A7184"/>
+                </a:solidFill>
+                <a:latin typeface="Malgun Gothic" pitchFamily="34" charset="0"/>
+                <a:ea typeface="Malgun Gothic" pitchFamily="34" charset="-122"/>
+                <a:cs typeface="Malgun Gothic" pitchFamily="34" charset="-120"/>
+              </a:rPr>
+              <a:t>워크로드→정책 변환</a:t>
+            </a:r>
+            <a:endParaRPr lang="en-US" sz="1200" dirty="0"/>
+          </a:p>
+        </p:txBody>
+      </p:sp>
+      <p:sp>
+        <p:nvSpPr>
+          <p:cNvPr id="12" name="Text 10"/>
+          <p:cNvSpPr/>
+          <p:nvPr/>
+        </p:nvSpPr>
+        <p:spPr>
+          <a:xfrm>
+            <a:off x="5907024" y="1554480"/>
+            <a:ext cx="201168" cy="713232"/>
+          </a:xfrm>
+          <a:prstGeom prst="rect">
+            <a:avLst/>
+          </a:prstGeom>
+          <a:noFill/>
+          <a:ln/>
+        </p:spPr>
+        <p:txBody>
+          <a:bodyPr wrap="square" lIns="0" tIns="0" rIns="0" bIns="0" rtlCol="0" anchor="ctr"/>
+          <a:lstStyle/>
+          <a:p>
+            <a:pPr algn="ctr" indent="0" marL="0">
+              <a:buNone/>
+            </a:pPr>
+            <a:r>
+              <a:rPr lang="en-US" sz="1050" dirty="0">
+                <a:solidFill>
+                  <a:srgbClr val="5A7184"/>
+                </a:solidFill>
+                <a:latin typeface="Malgun Gothic" pitchFamily="34" charset="0"/>
+                <a:ea typeface="Malgun Gothic" pitchFamily="34" charset="-122"/>
+                <a:cs typeface="Malgun Gothic" pitchFamily="34" charset="-120"/>
+              </a:rPr>
+              <a:t>▶</a:t>
+            </a:r>
+            <a:endParaRPr lang="en-US" sz="1050" dirty="0"/>
+          </a:p>
+        </p:txBody>
+      </p:sp>
+      <p:sp>
+        <p:nvSpPr>
+          <p:cNvPr id="13" name="Text 11"/>
+          <p:cNvSpPr/>
+          <p:nvPr/>
+        </p:nvSpPr>
+        <p:spPr>
+          <a:xfrm>
+            <a:off x="6108192" y="1554480"/>
+            <a:ext cx="1682496" cy="713232"/>
+          </a:xfrm>
+          <a:prstGeom prst="roundRect">
+            <a:avLst>
+              <a:gd name="adj" fmla="val 8974"/>
+            </a:avLst>
+          </a:prstGeom>
+          <a:solidFill>
+            <a:srgbClr val="FFFFFF"/>
+          </a:solidFill>
+          <a:ln w="12700">
+            <a:solidFill>
+              <a:srgbClr val="DCE4E9"/>
+            </a:solidFill>
+          </a:ln>
+        </p:spPr>
+        <p:txBody>
+          <a:bodyPr wrap="square" lIns="0" tIns="0" rIns="0" bIns="0" rtlCol="0" anchor="ctr"/>
+          <a:lstStyle/>
+          <a:p>
+            <a:pPr algn="ctr" indent="0" marL="0">
+              <a:lnSpc>
+                <a:spcPct val="105000"/>
+              </a:lnSpc>
+              <a:buNone/>
+            </a:pPr>
+            <a:r>
+              <a:rPr lang="en-US" sz="1200" b="1" dirty="0">
+                <a:solidFill>
+                  <a:srgbClr val="17313B"/>
+                </a:solidFill>
+                <a:latin typeface="Malgun Gothic" pitchFamily="34" charset="0"/>
+                <a:ea typeface="Malgun Gothic" pitchFamily="34" charset="-122"/>
+                <a:cs typeface="Malgun Gothic" pitchFamily="34" charset="-120"/>
+              </a:rPr>
+              <a:t>E2E 검증</a:t>
+            </a:r>
+            <a:endParaRPr lang="en-US" sz="1200" dirty="0"/>
+          </a:p>
+          <a:p>
+            <a:pPr algn="ctr" indent="0" marL="0">
+              <a:lnSpc>
+                <a:spcPct val="105000"/>
+              </a:lnSpc>
+              <a:buNone/>
+            </a:pPr>
+            <a:r>
+              <a:rPr lang="en-US" sz="950" dirty="0">
+                <a:solidFill>
+                  <a:srgbClr val="5A7184"/>
+                </a:solidFill>
+                <a:latin typeface="Malgun Gothic" pitchFamily="34" charset="0"/>
+                <a:ea typeface="Malgun Gothic" pitchFamily="34" charset="-122"/>
+                <a:cs typeface="Malgun Gothic" pitchFamily="34" charset="-120"/>
+              </a:rPr>
+              <a:t>TCO 개선 보장</a:t>
+            </a:r>
+            <a:endParaRPr lang="en-US" sz="1200" dirty="0"/>
+          </a:p>
+        </p:txBody>
+      </p:sp>
+      <p:sp>
+        <p:nvSpPr>
+          <p:cNvPr id="14" name="Text 12"/>
+          <p:cNvSpPr/>
+          <p:nvPr/>
+        </p:nvSpPr>
+        <p:spPr>
+          <a:xfrm>
+            <a:off x="7790688" y="1554480"/>
+            <a:ext cx="201168" cy="713232"/>
+          </a:xfrm>
+          <a:prstGeom prst="rect">
+            <a:avLst/>
+          </a:prstGeom>
+          <a:noFill/>
+          <a:ln/>
+        </p:spPr>
+        <p:txBody>
+          <a:bodyPr wrap="square" lIns="0" tIns="0" rIns="0" bIns="0" rtlCol="0" anchor="ctr"/>
+          <a:lstStyle/>
+          <a:p>
+            <a:pPr algn="ctr" indent="0" marL="0">
+              <a:buNone/>
+            </a:pPr>
+            <a:r>
+              <a:rPr lang="en-US" sz="1050" dirty="0">
+                <a:solidFill>
+                  <a:srgbClr val="5A7184"/>
+                </a:solidFill>
+                <a:latin typeface="Malgun Gothic" pitchFamily="34" charset="0"/>
+                <a:ea typeface="Malgun Gothic" pitchFamily="34" charset="-122"/>
+                <a:cs typeface="Malgun Gothic" pitchFamily="34" charset="-120"/>
+              </a:rPr>
+              <a:t>▶</a:t>
+            </a:r>
+            <a:endParaRPr lang="en-US" sz="1050" dirty="0"/>
+          </a:p>
+        </p:txBody>
+      </p:sp>
+      <p:sp>
+        <p:nvSpPr>
+          <p:cNvPr id="15" name="Text 13"/>
+          <p:cNvSpPr/>
+          <p:nvPr/>
+        </p:nvSpPr>
+        <p:spPr>
+          <a:xfrm>
+            <a:off x="7991856" y="1554480"/>
+            <a:ext cx="1682496" cy="713232"/>
+          </a:xfrm>
+          <a:prstGeom prst="roundRect">
+            <a:avLst>
+              <a:gd name="adj" fmla="val 8974"/>
+            </a:avLst>
+          </a:prstGeom>
+          <a:solidFill>
+            <a:srgbClr val="FFFFFF"/>
+          </a:solidFill>
+          <a:ln w="12700">
+            <a:solidFill>
+              <a:srgbClr val="DCE4E9"/>
+            </a:solidFill>
+          </a:ln>
+        </p:spPr>
+        <p:txBody>
+          <a:bodyPr wrap="square" lIns="0" tIns="0" rIns="0" bIns="0" rtlCol="0" anchor="ctr"/>
+          <a:lstStyle/>
+          <a:p>
+            <a:pPr algn="ctr" indent="0" marL="0">
+              <a:lnSpc>
+                <a:spcPct val="105000"/>
+              </a:lnSpc>
+              <a:buNone/>
+            </a:pPr>
+            <a:r>
+              <a:rPr lang="en-US" sz="1200" b="1" dirty="0">
+                <a:solidFill>
+                  <a:srgbClr val="17313B"/>
+                </a:solidFill>
+                <a:latin typeface="Malgun Gothic" pitchFamily="34" charset="0"/>
+                <a:ea typeface="Malgun Gothic" pitchFamily="34" charset="-122"/>
+                <a:cs typeface="Malgun Gothic" pitchFamily="34" charset="-120"/>
+              </a:rPr>
+              <a:t>고객 공동개발</a:t>
+            </a:r>
+            <a:endParaRPr lang="en-US" sz="1200" dirty="0"/>
+          </a:p>
+          <a:p>
+            <a:pPr algn="ctr" indent="0" marL="0">
+              <a:lnSpc>
+                <a:spcPct val="105000"/>
+              </a:lnSpc>
+              <a:buNone/>
+            </a:pPr>
+            <a:r>
+              <a:rPr lang="en-US" sz="950" dirty="0">
+                <a:solidFill>
+                  <a:srgbClr val="5A7184"/>
+                </a:solidFill>
+                <a:latin typeface="Malgun Gothic" pitchFamily="34" charset="0"/>
+                <a:ea typeface="Malgun Gothic" pitchFamily="34" charset="-122"/>
+                <a:cs typeface="Malgun Gothic" pitchFamily="34" charset="-120"/>
+              </a:rPr>
+              <a:t>장기 관계 구축</a:t>
+            </a:r>
+            <a:endParaRPr lang="en-US" sz="1200" dirty="0"/>
+          </a:p>
+        </p:txBody>
+      </p:sp>
+      <p:sp>
+        <p:nvSpPr>
+          <p:cNvPr id="16" name="Text 14"/>
+          <p:cNvSpPr/>
+          <p:nvPr/>
+        </p:nvSpPr>
+        <p:spPr>
+          <a:xfrm>
+            <a:off x="9674352" y="1554480"/>
+            <a:ext cx="201168" cy="713232"/>
+          </a:xfrm>
+          <a:prstGeom prst="rect">
+            <a:avLst/>
+          </a:prstGeom>
+          <a:noFill/>
+          <a:ln/>
+        </p:spPr>
+        <p:txBody>
+          <a:bodyPr wrap="square" lIns="0" tIns="0" rIns="0" bIns="0" rtlCol="0" anchor="ctr"/>
+          <a:lstStyle/>
+          <a:p>
+            <a:pPr algn="ctr" indent="0" marL="0">
+              <a:buNone/>
+            </a:pPr>
+            <a:r>
+              <a:rPr lang="en-US" sz="1050" dirty="0">
+                <a:solidFill>
+                  <a:srgbClr val="5A7184"/>
+                </a:solidFill>
+                <a:latin typeface="Malgun Gothic" pitchFamily="34" charset="0"/>
+                <a:ea typeface="Malgun Gothic" pitchFamily="34" charset="-122"/>
+                <a:cs typeface="Malgun Gothic" pitchFamily="34" charset="-120"/>
+              </a:rPr>
+              <a:t>▶</a:t>
+            </a:r>
+            <a:endParaRPr lang="en-US" sz="1050" dirty="0"/>
+          </a:p>
+        </p:txBody>
+      </p:sp>
+      <p:sp>
+        <p:nvSpPr>
+          <p:cNvPr id="17" name="Text 15"/>
+          <p:cNvSpPr/>
+          <p:nvPr/>
+        </p:nvSpPr>
+        <p:spPr>
+          <a:xfrm>
+            <a:off x="9875520" y="1554480"/>
+            <a:ext cx="1682496" cy="713232"/>
+          </a:xfrm>
+          <a:prstGeom prst="roundRect">
+            <a:avLst>
+              <a:gd name="adj" fmla="val 8974"/>
+            </a:avLst>
+          </a:prstGeom>
+          <a:solidFill>
+            <a:srgbClr val="FFFFFF"/>
+          </a:solidFill>
+          <a:ln w="12700">
+            <a:solidFill>
+              <a:srgbClr val="DCE4E9"/>
+            </a:solidFill>
+          </a:ln>
+        </p:spPr>
+        <p:txBody>
+          <a:bodyPr wrap="square" lIns="0" tIns="0" rIns="0" bIns="0" rtlCol="0" anchor="ctr"/>
+          <a:lstStyle/>
+          <a:p>
+            <a:pPr algn="ctr" indent="0" marL="0">
+              <a:lnSpc>
+                <a:spcPct val="105000"/>
+              </a:lnSpc>
+              <a:buNone/>
+            </a:pPr>
+            <a:r>
+              <a:rPr lang="en-US" sz="1200" b="1" dirty="0">
+                <a:solidFill>
+                  <a:srgbClr val="17313B"/>
+                </a:solidFill>
+                <a:latin typeface="Malgun Gothic" pitchFamily="34" charset="0"/>
+                <a:ea typeface="Malgun Gothic" pitchFamily="34" charset="-122"/>
+                <a:cs typeface="Malgun Gothic" pitchFamily="34" charset="-120"/>
+              </a:rPr>
+              <a:t>텔레메트리</a:t>
+            </a:r>
+            <a:endParaRPr lang="en-US" sz="1200" dirty="0"/>
+          </a:p>
+          <a:p>
+            <a:pPr algn="ctr" indent="0" marL="0">
+              <a:lnSpc>
+                <a:spcPct val="105000"/>
+              </a:lnSpc>
+              <a:buNone/>
+            </a:pPr>
+            <a:r>
+              <a:rPr lang="en-US" sz="950" dirty="0">
+                <a:solidFill>
+                  <a:srgbClr val="5A7184"/>
+                </a:solidFill>
+                <a:latin typeface="Malgun Gothic" pitchFamily="34" charset="0"/>
+                <a:ea typeface="Malgun Gothic" pitchFamily="34" charset="-122"/>
+                <a:cs typeface="Malgun Gothic" pitchFamily="34" charset="-120"/>
+              </a:rPr>
+              <a:t>지속 개선 루프</a:t>
+            </a:r>
+            <a:endParaRPr lang="en-US" sz="1200" dirty="0"/>
+          </a:p>
+        </p:txBody>
+      </p:sp>
+      <p:sp>
+        <p:nvSpPr>
+          <p:cNvPr id="18" name="Shape 16"/>
+          <p:cNvSpPr/>
+          <p:nvPr/>
+        </p:nvSpPr>
+        <p:spPr>
+          <a:xfrm>
+            <a:off x="457200" y="2432304"/>
+            <a:ext cx="3602736" cy="1389888"/>
+          </a:xfrm>
+          <a:prstGeom prst="roundRect">
+            <a:avLst>
+              <a:gd name="adj" fmla="val 5921"/>
+            </a:avLst>
+          </a:prstGeom>
+          <a:solidFill>
+            <a:srgbClr val="F5F7F8"/>
+          </a:solidFill>
+          <a:ln/>
+        </p:spPr>
+      </p:sp>
+      <p:sp>
+        <p:nvSpPr>
+          <p:cNvPr id="19" name="Shape 17"/>
+          <p:cNvSpPr/>
+          <p:nvPr/>
+        </p:nvSpPr>
+        <p:spPr>
+          <a:xfrm>
+            <a:off x="621792" y="2578608"/>
+            <a:ext cx="365760" cy="365760"/>
           </a:xfrm>
           <a:prstGeom prst="ellipse">
             <a:avLst/>
           </a:prstGeom>
           <a:solidFill>
-            <a:srgbClr val="028090"/>
+            <a:srgbClr val="0E6BA8"/>
           </a:solidFill>
           <a:ln/>
         </p:spPr>
       </p:sp>
       <p:pic>
         <p:nvPicPr>
-          <p:cNvPr id="14" name="Image 1" descr="preencoded.png">    </p:cNvPr>
+          <p:cNvPr id="20" name="Image 0" descr="preencoded.png">    </p:cNvPr>
+          <p:cNvPicPr>
+            <a:picLocks noChangeAspect="1"/>
+          </p:cNvPicPr>
+          <p:nvPr/>
+        </p:nvPicPr>
+        <p:blipFill>
+          <a:blip r:embed="rId1"/>
+          <a:stretch>
+            <a:fillRect/>
+          </a:stretch>
+        </p:blipFill>
+        <p:spPr>
+          <a:xfrm>
+            <a:off x="709574" y="2666390"/>
+            <a:ext cx="190195" cy="190195"/>
+          </a:xfrm>
+          <a:prstGeom prst="rect">
+            <a:avLst/>
+          </a:prstGeom>
+        </p:spPr>
+      </p:pic>
+      <p:sp>
+        <p:nvSpPr>
+          <p:cNvPr id="21" name="Text 18"/>
+          <p:cNvSpPr/>
+          <p:nvPr/>
+        </p:nvSpPr>
+        <p:spPr>
+          <a:xfrm>
+            <a:off x="1078992" y="2578608"/>
+            <a:ext cx="2834640" cy="329184"/>
+          </a:xfrm>
+          <a:prstGeom prst="rect">
+            <a:avLst/>
+          </a:prstGeom>
+          <a:noFill/>
+          <a:ln/>
+        </p:spPr>
+        <p:txBody>
+          <a:bodyPr wrap="square" lIns="0" tIns="0" rIns="0" bIns="0" rtlCol="0" anchor="ctr"/>
+          <a:lstStyle/>
+          <a:p>
+            <a:pPr indent="0" marL="0">
+              <a:buNone/>
+            </a:pPr>
+            <a:r>
+              <a:rPr lang="en-US" sz="1300" b="1" dirty="0">
+                <a:solidFill>
+                  <a:srgbClr val="17313B"/>
+                </a:solidFill>
+                <a:latin typeface="Malgun Gothic" pitchFamily="34" charset="0"/>
+                <a:ea typeface="Malgun Gothic" pitchFamily="34" charset="-122"/>
+                <a:cs typeface="Malgun Gothic" pitchFamily="34" charset="-120"/>
+              </a:rPr>
+              <a:t>1. Enablement Platform</a:t>
+            </a:r>
+            <a:endParaRPr lang="en-US" sz="1300" dirty="0"/>
+          </a:p>
+        </p:txBody>
+      </p:sp>
+      <p:sp>
+        <p:nvSpPr>
+          <p:cNvPr id="22" name="Text 19"/>
+          <p:cNvSpPr/>
+          <p:nvPr/>
+        </p:nvSpPr>
+        <p:spPr>
+          <a:xfrm>
+            <a:off x="640080" y="2999232"/>
+            <a:ext cx="3255264" cy="768096"/>
+          </a:xfrm>
+          <a:prstGeom prst="rect">
+            <a:avLst/>
+          </a:prstGeom>
+          <a:noFill/>
+          <a:ln/>
+        </p:spPr>
+        <p:txBody>
+          <a:bodyPr wrap="square" lIns="0" tIns="0" rIns="0" bIns="0" rtlCol="0" anchor="t"/>
+          <a:lstStyle/>
+          <a:p>
+            <a:pPr indent="0" marL="0">
+              <a:lnSpc>
+                <a:spcPct val="110000"/>
+              </a:lnSpc>
+              <a:buNone/>
+            </a:pPr>
+            <a:r>
+              <a:rPr lang="en-US" sz="1000" dirty="0">
+                <a:solidFill>
+                  <a:srgbClr val="5A7184"/>
+                </a:solidFill>
+                <a:latin typeface="Malgun Gothic" pitchFamily="34" charset="0"/>
+                <a:ea typeface="Malgun Gothic" pitchFamily="34" charset="-122"/>
+                <a:cs typeface="Malgun Gothic" pitchFamily="34" charset="-120"/>
+              </a:rPr>
+              <a:t>SDK·라이브러리(Linux·SPDK) · Workload Profiler · Emulator/Digital Twin</a:t>
+            </a:r>
+            <a:endParaRPr lang="en-US" sz="1000" dirty="0"/>
+          </a:p>
+        </p:txBody>
+      </p:sp>
+      <p:sp>
+        <p:nvSpPr>
+          <p:cNvPr id="23" name="Shape 20"/>
+          <p:cNvSpPr/>
+          <p:nvPr/>
+        </p:nvSpPr>
+        <p:spPr>
+          <a:xfrm>
+            <a:off x="4297680" y="2432304"/>
+            <a:ext cx="3602736" cy="1389888"/>
+          </a:xfrm>
+          <a:prstGeom prst="roundRect">
+            <a:avLst>
+              <a:gd name="adj" fmla="val 5921"/>
+            </a:avLst>
+          </a:prstGeom>
+          <a:solidFill>
+            <a:srgbClr val="F5F7F8"/>
+          </a:solidFill>
+          <a:ln/>
+        </p:spPr>
+      </p:sp>
+      <p:sp>
+        <p:nvSpPr>
+          <p:cNvPr id="24" name="Shape 21"/>
+          <p:cNvSpPr/>
+          <p:nvPr/>
+        </p:nvSpPr>
+        <p:spPr>
+          <a:xfrm>
+            <a:off x="4462272" y="2578608"/>
+            <a:ext cx="365760" cy="365760"/>
+          </a:xfrm>
+          <a:prstGeom prst="ellipse">
+            <a:avLst/>
+          </a:prstGeom>
+          <a:solidFill>
+            <a:srgbClr val="028090"/>
+          </a:solidFill>
+          <a:ln/>
+        </p:spPr>
+      </p:sp>
+      <p:pic>
+        <p:nvPicPr>
+          <p:cNvPr id="25" name="Image 1" descr="preencoded.png">    </p:cNvPr>
           <p:cNvPicPr>
             <a:picLocks noChangeAspect="1"/>
           </p:cNvPicPr>
@@ -9356,8 +11305,8 @@
         </p:blipFill>
         <p:spPr>
           <a:xfrm>
-            <a:off x="4577121" y="1541313"/>
-            <a:ext cx="209215" cy="209215"/>
+            <a:off x="4550054" y="2666390"/>
+            <a:ext cx="190195" cy="190195"/>
           </a:xfrm>
           <a:prstGeom prst="rect">
             <a:avLst/>
@@ -9366,14 +11315,14 @@
       </p:pic>
       <p:sp>
         <p:nvSpPr>
-          <p:cNvPr id="15" name="Text 11"/>
-          <p:cNvSpPr/>
-          <p:nvPr/>
-        </p:nvSpPr>
-        <p:spPr>
-          <a:xfrm>
-            <a:off x="4992624" y="1463040"/>
-            <a:ext cx="2743200" cy="365760"/>
+          <p:cNvPr id="26" name="Text 22"/>
+          <p:cNvSpPr/>
+          <p:nvPr/>
+        </p:nvSpPr>
+        <p:spPr>
+          <a:xfrm>
+            <a:off x="4919472" y="2578608"/>
+            <a:ext cx="2834640" cy="329184"/>
           </a:xfrm>
           <a:prstGeom prst="rect">
             <a:avLst/>
@@ -9389,7 +11338,7 @@
               <a:buNone/>
             </a:pPr>
             <a:r>
-              <a:rPr lang="en-US" sz="1400" b="1" dirty="0">
+              <a:rPr lang="en-US" sz="1300" b="1" dirty="0">
                 <a:solidFill>
                   <a:srgbClr val="17313B"/>
                 </a:solidFill>
@@ -9397,22 +11346,22 @@
                 <a:ea typeface="Malgun Gothic" pitchFamily="34" charset="-122"/>
                 <a:cs typeface="Malgun Gothic" pitchFamily="34" charset="-120"/>
               </a:rPr>
-              <a:t>2. 표준 워크로드 프로파일</a:t>
-            </a:r>
-            <a:endParaRPr lang="en-US" sz="1400" dirty="0"/>
-          </a:p>
-        </p:txBody>
-      </p:sp>
-      <p:sp>
-        <p:nvSpPr>
-          <p:cNvPr id="16" name="Text 12"/>
-          <p:cNvSpPr/>
-          <p:nvPr/>
-        </p:nvSpPr>
-        <p:spPr>
-          <a:xfrm>
-            <a:off x="4498848" y="1956816"/>
-            <a:ext cx="3200400" cy="969264"/>
+              <a:t>2. 표준 프로파일 7종</a:t>
+            </a:r>
+            <a:endParaRPr lang="en-US" sz="1300" dirty="0"/>
+          </a:p>
+        </p:txBody>
+      </p:sp>
+      <p:sp>
+        <p:nvSpPr>
+          <p:cNvPr id="27" name="Text 23"/>
+          <p:cNvSpPr/>
+          <p:nvPr/>
+        </p:nvSpPr>
+        <p:spPr>
+          <a:xfrm>
+            <a:off x="4480560" y="2999232"/>
+            <a:ext cx="3255264" cy="768096"/>
           </a:xfrm>
           <a:prstGeom prst="rect">
             <a:avLst/>
@@ -9426,12 +11375,12 @@
           <a:p>
             <a:pPr indent="0" marL="0">
               <a:lnSpc>
-                <a:spcPct val="112000"/>
+                <a:spcPct val="110000"/>
               </a:lnSpc>
               <a:buNone/>
             </a:pPr>
             <a:r>
-              <a:rPr lang="en-US" sz="1050" dirty="0">
+              <a:rPr lang="en-US" sz="1000" dirty="0">
                 <a:solidFill>
                   <a:srgbClr val="5A7184"/>
                 </a:solidFill>
@@ -9439,26 +11388,26 @@
                 <a:ea typeface="Malgun Gothic" pitchFamily="34" charset="-122"/>
                 <a:cs typeface="Malgun Gothic" pitchFamily="34" charset="-120"/>
               </a:rPr>
-              <a:t>Cache·KV·DB·Multi-tenant·Vector·Checkpoint·QLC 7종 — 펌웨어 공통화와 고객별 최적화 양립</a:t>
-            </a:r>
-            <a:endParaRPr lang="en-US" sz="1050" dirty="0"/>
-          </a:p>
-        </p:txBody>
-      </p:sp>
-      <p:sp>
-        <p:nvSpPr>
-          <p:cNvPr id="17" name="Shape 13"/>
-          <p:cNvSpPr/>
-          <p:nvPr/>
-        </p:nvSpPr>
-        <p:spPr>
-          <a:xfrm>
-            <a:off x="8138160" y="1280160"/>
-            <a:ext cx="3602736" cy="1737360"/>
+              <a:t>Cache·KV·DB·Multi-tenant·Vector·Checkpoint·QLC — 펌웨어 공통화+고객 최적화</a:t>
+            </a:r>
+            <a:endParaRPr lang="en-US" sz="1000" dirty="0"/>
+          </a:p>
+        </p:txBody>
+      </p:sp>
+      <p:sp>
+        <p:nvSpPr>
+          <p:cNvPr id="28" name="Shape 24"/>
+          <p:cNvSpPr/>
+          <p:nvPr/>
+        </p:nvSpPr>
+        <p:spPr>
+          <a:xfrm>
+            <a:off x="8138160" y="2432304"/>
+            <a:ext cx="3602736" cy="1389888"/>
           </a:xfrm>
           <a:prstGeom prst="roundRect">
             <a:avLst>
-              <a:gd name="adj" fmla="val 4737"/>
+              <a:gd name="adj" fmla="val 5921"/>
             </a:avLst>
           </a:prstGeom>
           <a:solidFill>
@@ -9469,14 +11418,14 @@
       </p:sp>
       <p:sp>
         <p:nvSpPr>
-          <p:cNvPr id="18" name="Shape 14"/>
-          <p:cNvSpPr/>
-          <p:nvPr/>
-        </p:nvSpPr>
-        <p:spPr>
-          <a:xfrm>
-            <a:off x="8321040" y="1444752"/>
-            <a:ext cx="402336" cy="402336"/>
+          <p:cNvPr id="29" name="Shape 25"/>
+          <p:cNvSpPr/>
+          <p:nvPr/>
+        </p:nvSpPr>
+        <p:spPr>
+          <a:xfrm>
+            <a:off x="8302752" y="2578608"/>
+            <a:ext cx="365760" cy="365760"/>
           </a:xfrm>
           <a:prstGeom prst="ellipse">
             <a:avLst/>
@@ -9489,7 +11438,7 @@
       </p:sp>
       <p:pic>
         <p:nvPicPr>
-          <p:cNvPr id="19" name="Image 2" descr="preencoded.png">    </p:cNvPr>
+          <p:cNvPr id="30" name="Image 2" descr="preencoded.png">    </p:cNvPr>
           <p:cNvPicPr>
             <a:picLocks noChangeAspect="1"/>
           </p:cNvPicPr>
@@ -9503,8 +11452,8 @@
         </p:blipFill>
         <p:spPr>
           <a:xfrm>
-            <a:off x="8417601" y="1541313"/>
-            <a:ext cx="209215" cy="209215"/>
+            <a:off x="8390534" y="2666390"/>
+            <a:ext cx="190195" cy="190195"/>
           </a:xfrm>
           <a:prstGeom prst="rect">
             <a:avLst/>
@@ -9513,14 +11462,14 @@
       </p:pic>
       <p:sp>
         <p:nvSpPr>
-          <p:cNvPr id="20" name="Text 15"/>
-          <p:cNvSpPr/>
-          <p:nvPr/>
-        </p:nvSpPr>
-        <p:spPr>
-          <a:xfrm>
-            <a:off x="8833104" y="1463040"/>
-            <a:ext cx="2743200" cy="365760"/>
+          <p:cNvPr id="31" name="Text 26"/>
+          <p:cNvSpPr/>
+          <p:nvPr/>
+        </p:nvSpPr>
+        <p:spPr>
+          <a:xfrm>
+            <a:off x="8759952" y="2578608"/>
+            <a:ext cx="2834640" cy="329184"/>
           </a:xfrm>
           <a:prstGeom prst="rect">
             <a:avLst/>
@@ -9536,7 +11485,7 @@
               <a:buNone/>
             </a:pPr>
             <a:r>
-              <a:rPr lang="en-US" sz="1400" b="1" dirty="0">
+              <a:rPr lang="en-US" sz="1300" b="1" dirty="0">
                 <a:solidFill>
                   <a:srgbClr val="17313B"/>
                 </a:solidFill>
@@ -9544,22 +11493,22 @@
                 <a:ea typeface="Malgun Gothic" pitchFamily="34" charset="-122"/>
                 <a:cs typeface="Malgun Gothic" pitchFamily="34" charset="-120"/>
               </a:rPr>
-              <a:t>3. End-to-End 공동검증</a:t>
-            </a:r>
-            <a:endParaRPr lang="en-US" sz="1400" dirty="0"/>
-          </a:p>
-        </p:txBody>
-      </p:sp>
-      <p:sp>
-        <p:nvSpPr>
-          <p:cNvPr id="21" name="Text 16"/>
-          <p:cNvSpPr/>
-          <p:nvPr/>
-        </p:nvSpPr>
-        <p:spPr>
-          <a:xfrm>
-            <a:off x="8339328" y="1956816"/>
-            <a:ext cx="3200400" cy="969264"/>
+              <a:t>3. E2E 공동검증</a:t>
+            </a:r>
+            <a:endParaRPr lang="en-US" sz="1300" dirty="0"/>
+          </a:p>
+        </p:txBody>
+      </p:sp>
+      <p:sp>
+        <p:nvSpPr>
+          <p:cNvPr id="32" name="Text 27"/>
+          <p:cNvSpPr/>
+          <p:nvPr/>
+        </p:nvSpPr>
+        <p:spPr>
+          <a:xfrm>
+            <a:off x="8321040" y="2999232"/>
+            <a:ext cx="3255264" cy="768096"/>
           </a:xfrm>
           <a:prstGeom prst="rect">
             <a:avLst/>
@@ -9573,12 +11522,12 @@
           <a:p>
             <a:pPr indent="0" marL="0">
               <a:lnSpc>
-                <a:spcPct val="112000"/>
+                <a:spcPct val="110000"/>
               </a:lnSpc>
               <a:buNone/>
             </a:pPr>
             <a:r>
-              <a:rPr lang="en-US" sz="1050" dirty="0">
+              <a:rPr lang="en-US" sz="1000" dirty="0">
                 <a:solidFill>
                   <a:srgbClr val="5A7184"/>
                 </a:solidFill>
@@ -9586,26 +11535,26 @@
                 <a:ea typeface="Malgun Gothic" pitchFamily="34" charset="-122"/>
                 <a:cs typeface="Malgun Gothic" pitchFamily="34" charset="-120"/>
               </a:rPr>
-              <a:t>App→Host→SSD→NAND→텔레메트리 · 시스템 성과 지표(WAF·p999·격리·전력) · 고객 trace의 pre/post-silicon 재사용</a:t>
-            </a:r>
-            <a:endParaRPr lang="en-US" sz="1050" dirty="0"/>
-          </a:p>
-        </p:txBody>
-      </p:sp>
-      <p:sp>
-        <p:nvSpPr>
-          <p:cNvPr id="22" name="Shape 17"/>
-          <p:cNvSpPr/>
-          <p:nvPr/>
-        </p:nvSpPr>
-        <p:spPr>
-          <a:xfrm>
-            <a:off x="457200" y="3163824"/>
-            <a:ext cx="3602736" cy="1737360"/>
+              <a:t>App→Host→SSD→NAND · WAF·p999·격리·전력 · trace의 pre/post-silicon 재사용</a:t>
+            </a:r>
+            <a:endParaRPr lang="en-US" sz="1000" dirty="0"/>
+          </a:p>
+        </p:txBody>
+      </p:sp>
+      <p:sp>
+        <p:nvSpPr>
+          <p:cNvPr id="33" name="Shape 28"/>
+          <p:cNvSpPr/>
+          <p:nvPr/>
+        </p:nvSpPr>
+        <p:spPr>
+          <a:xfrm>
+            <a:off x="457200" y="3950208"/>
+            <a:ext cx="3602736" cy="1389888"/>
           </a:xfrm>
           <a:prstGeom prst="roundRect">
             <a:avLst>
-              <a:gd name="adj" fmla="val 4737"/>
+              <a:gd name="adj" fmla="val 5921"/>
             </a:avLst>
           </a:prstGeom>
           <a:solidFill>
@@ -9616,14 +11565,14 @@
       </p:sp>
       <p:sp>
         <p:nvSpPr>
-          <p:cNvPr id="23" name="Shape 18"/>
-          <p:cNvSpPr/>
-          <p:nvPr/>
-        </p:nvSpPr>
-        <p:spPr>
-          <a:xfrm>
-            <a:off x="640080" y="3328416"/>
-            <a:ext cx="402336" cy="402336"/>
+          <p:cNvPr id="34" name="Shape 29"/>
+          <p:cNvSpPr/>
+          <p:nvPr/>
+        </p:nvSpPr>
+        <p:spPr>
+          <a:xfrm>
+            <a:off x="621792" y="4096512"/>
+            <a:ext cx="365760" cy="365760"/>
           </a:xfrm>
           <a:prstGeom prst="ellipse">
             <a:avLst/>
@@ -9636,7 +11585,7 @@
       </p:sp>
       <p:pic>
         <p:nvPicPr>
-          <p:cNvPr id="24" name="Image 3" descr="preencoded.png">    </p:cNvPr>
+          <p:cNvPr id="35" name="Image 3" descr="preencoded.png">    </p:cNvPr>
           <p:cNvPicPr>
             <a:picLocks noChangeAspect="1"/>
           </p:cNvPicPr>
@@ -9650,8 +11599,8 @@
         </p:blipFill>
         <p:spPr>
           <a:xfrm>
-            <a:off x="736641" y="3424977"/>
-            <a:ext cx="209215" cy="209215"/>
+            <a:off x="709574" y="4184294"/>
+            <a:ext cx="190195" cy="190195"/>
           </a:xfrm>
           <a:prstGeom prst="rect">
             <a:avLst/>
@@ -9660,14 +11609,14 @@
       </p:pic>
       <p:sp>
         <p:nvSpPr>
-          <p:cNvPr id="25" name="Text 19"/>
-          <p:cNvSpPr/>
-          <p:nvPr/>
-        </p:nvSpPr>
-        <p:spPr>
-          <a:xfrm>
-            <a:off x="1152144" y="3346704"/>
-            <a:ext cx="2743200" cy="365760"/>
+          <p:cNvPr id="36" name="Text 30"/>
+          <p:cNvSpPr/>
+          <p:nvPr/>
+        </p:nvSpPr>
+        <p:spPr>
+          <a:xfrm>
+            <a:off x="1078992" y="4096512"/>
+            <a:ext cx="2834640" cy="329184"/>
           </a:xfrm>
           <a:prstGeom prst="rect">
             <a:avLst/>
@@ -9683,7 +11632,7 @@
               <a:buNone/>
             </a:pPr>
             <a:r>
-              <a:rPr lang="en-US" sz="1400" b="1" dirty="0">
+              <a:rPr lang="en-US" sz="1300" b="1" dirty="0">
                 <a:solidFill>
                   <a:srgbClr val="17313B"/>
                 </a:solidFill>
@@ -9693,20 +11642,20 @@
               </a:rPr>
               <a:t>4. 고객 공동개발 조직</a:t>
             </a:r>
-            <a:endParaRPr lang="en-US" sz="1400" dirty="0"/>
-          </a:p>
-        </p:txBody>
-      </p:sp>
-      <p:sp>
-        <p:nvSpPr>
-          <p:cNvPr id="26" name="Text 20"/>
-          <p:cNvSpPr/>
-          <p:nvPr/>
-        </p:nvSpPr>
-        <p:spPr>
-          <a:xfrm>
-            <a:off x="658368" y="3840480"/>
-            <a:ext cx="3200400" cy="969264"/>
+            <a:endParaRPr lang="en-US" sz="1300" dirty="0"/>
+          </a:p>
+        </p:txBody>
+      </p:sp>
+      <p:sp>
+        <p:nvSpPr>
+          <p:cNvPr id="37" name="Text 31"/>
+          <p:cNvSpPr/>
+          <p:nvPr/>
+        </p:nvSpPr>
+        <p:spPr>
+          <a:xfrm>
+            <a:off x="640080" y="4517136"/>
+            <a:ext cx="3255264" cy="768096"/>
           </a:xfrm>
           <a:prstGeom prst="rect">
             <a:avLst/>
@@ -9720,12 +11669,12 @@
           <a:p>
             <a:pPr indent="0" marL="0">
               <a:lnSpc>
-                <a:spcPct val="112000"/>
+                <a:spcPct val="110000"/>
               </a:lnSpc>
               <a:buNone/>
             </a:pPr>
             <a:r>
-              <a:rPr lang="en-US" sz="1050" dirty="0">
+              <a:rPr lang="en-US" sz="1000" dirty="0">
                 <a:solidFill>
                   <a:srgbClr val="5A7184"/>
                 </a:solidFill>
@@ -9733,26 +11682,26 @@
                 <a:ea typeface="Malgun Gothic" pitchFamily="34" charset="-122"/>
                 <a:cs typeface="Malgun Gothic" pitchFamily="34" charset="-120"/>
               </a:rPr>
-              <a:t>Host SW · Workload Integration · Solution Engineering · E2E Validation — 기술지원이 아니라 제품 기획·개발 참여</a:t>
-            </a:r>
-            <a:endParaRPr lang="en-US" sz="1050" dirty="0"/>
-          </a:p>
-        </p:txBody>
-      </p:sp>
-      <p:sp>
-        <p:nvSpPr>
-          <p:cNvPr id="27" name="Shape 21"/>
-          <p:cNvSpPr/>
-          <p:nvPr/>
-        </p:nvSpPr>
-        <p:spPr>
-          <a:xfrm>
-            <a:off x="4297680" y="3163824"/>
-            <a:ext cx="3602736" cy="1737360"/>
+              <a:t>Host SW·Workload Integration·Solution Eng·Validation — 제품 기획 참여</a:t>
+            </a:r>
+            <a:endParaRPr lang="en-US" sz="1000" dirty="0"/>
+          </a:p>
+        </p:txBody>
+      </p:sp>
+      <p:sp>
+        <p:nvSpPr>
+          <p:cNvPr id="38" name="Shape 32"/>
+          <p:cNvSpPr/>
+          <p:nvPr/>
+        </p:nvSpPr>
+        <p:spPr>
+          <a:xfrm>
+            <a:off x="4297680" y="3950208"/>
+            <a:ext cx="3602736" cy="1389888"/>
           </a:xfrm>
           <a:prstGeom prst="roundRect">
             <a:avLst>
-              <a:gd name="adj" fmla="val 4737"/>
+              <a:gd name="adj" fmla="val 5921"/>
             </a:avLst>
           </a:prstGeom>
           <a:solidFill>
@@ -9763,14 +11712,14 @@
       </p:sp>
       <p:sp>
         <p:nvSpPr>
-          <p:cNvPr id="28" name="Shape 22"/>
-          <p:cNvSpPr/>
-          <p:nvPr/>
-        </p:nvSpPr>
-        <p:spPr>
-          <a:xfrm>
-            <a:off x="4480560" y="3328416"/>
-            <a:ext cx="402336" cy="402336"/>
+          <p:cNvPr id="39" name="Shape 33"/>
+          <p:cNvSpPr/>
+          <p:nvPr/>
+        </p:nvSpPr>
+        <p:spPr>
+          <a:xfrm>
+            <a:off x="4462272" y="4096512"/>
+            <a:ext cx="365760" cy="365760"/>
           </a:xfrm>
           <a:prstGeom prst="ellipse">
             <a:avLst/>
@@ -9783,7 +11732,7 @@
       </p:sp>
       <p:pic>
         <p:nvPicPr>
-          <p:cNvPr id="29" name="Image 4" descr="preencoded.png">    </p:cNvPr>
+          <p:cNvPr id="40" name="Image 4" descr="preencoded.png">    </p:cNvPr>
           <p:cNvPicPr>
             <a:picLocks noChangeAspect="1"/>
           </p:cNvPicPr>
@@ -9797,8 +11746,8 @@
         </p:blipFill>
         <p:spPr>
           <a:xfrm>
-            <a:off x="4577121" y="3424977"/>
-            <a:ext cx="209215" cy="209215"/>
+            <a:off x="4550054" y="4184294"/>
+            <a:ext cx="190195" cy="190195"/>
           </a:xfrm>
           <a:prstGeom prst="rect">
             <a:avLst/>
@@ -9807,14 +11756,14 @@
       </p:pic>
       <p:sp>
         <p:nvSpPr>
-          <p:cNvPr id="30" name="Text 23"/>
-          <p:cNvSpPr/>
-          <p:nvPr/>
-        </p:nvSpPr>
-        <p:spPr>
-          <a:xfrm>
-            <a:off x="4992624" y="3346704"/>
-            <a:ext cx="2743200" cy="365760"/>
+          <p:cNvPr id="41" name="Text 34"/>
+          <p:cNvSpPr/>
+          <p:nvPr/>
+        </p:nvSpPr>
+        <p:spPr>
+          <a:xfrm>
+            <a:off x="4919472" y="4096512"/>
+            <a:ext cx="2834640" cy="329184"/>
           </a:xfrm>
           <a:prstGeom prst="rect">
             <a:avLst/>
@@ -9830,7 +11779,7 @@
               <a:buNone/>
             </a:pPr>
             <a:r>
-              <a:rPr lang="en-US" sz="1400" b="1" dirty="0">
+              <a:rPr lang="en-US" sz="1300" b="1" dirty="0">
                 <a:solidFill>
                   <a:srgbClr val="17313B"/>
                 </a:solidFill>
@@ -9838,22 +11787,22 @@
                 <a:ea typeface="Malgun Gothic" pitchFamily="34" charset="-122"/>
                 <a:cs typeface="Malgun Gothic" pitchFamily="34" charset="-120"/>
               </a:rPr>
-              <a:t>5. Binding 계약 기술협력</a:t>
-            </a:r>
-            <a:endParaRPr lang="en-US" sz="1400" dirty="0"/>
-          </a:p>
-        </p:txBody>
-      </p:sp>
-      <p:sp>
-        <p:nvSpPr>
-          <p:cNvPr id="31" name="Text 24"/>
-          <p:cNvSpPr/>
-          <p:nvPr/>
-        </p:nvSpPr>
-        <p:spPr>
-          <a:xfrm>
-            <a:off x="4498848" y="3840480"/>
-            <a:ext cx="3200400" cy="969264"/>
+              <a:t>5. Binding 기술협력</a:t>
+            </a:r>
+            <a:endParaRPr lang="en-US" sz="1300" dirty="0"/>
+          </a:p>
+        </p:txBody>
+      </p:sp>
+      <p:sp>
+        <p:nvSpPr>
+          <p:cNvPr id="42" name="Text 35"/>
+          <p:cNvSpPr/>
+          <p:nvPr/>
+        </p:nvSpPr>
+        <p:spPr>
+          <a:xfrm>
+            <a:off x="4480560" y="4517136"/>
+            <a:ext cx="3255264" cy="768096"/>
           </a:xfrm>
           <a:prstGeom prst="rect">
             <a:avLst/>
@@ -9867,12 +11816,12 @@
           <a:p>
             <a:pPr indent="0" marL="0">
               <a:lnSpc>
-                <a:spcPct val="112000"/>
+                <a:spcPct val="110000"/>
               </a:lnSpc>
               <a:buNone/>
             </a:pPr>
             <a:r>
-              <a:rPr lang="en-US" sz="1050" dirty="0">
+              <a:rPr lang="en-US" sz="1000" dirty="0">
                 <a:solidFill>
                   <a:srgbClr val="5A7184"/>
                 </a:solidFill>
@@ -9880,26 +11829,26 @@
                 <a:ea typeface="Malgun Gothic" pitchFamily="34" charset="-122"/>
                 <a:cs typeface="Malgun Gothic" pitchFamily="34" charset="-120"/>
               </a:rPr>
-              <a:t>고객: 물량·trace 제공·공동 로드맵 ↔ 삼성: 공급능력·SDK·개선 목표 — 공동 플랫폼 계약으로 확장</a:t>
-            </a:r>
-            <a:endParaRPr lang="en-US" sz="1050" dirty="0"/>
-          </a:p>
-        </p:txBody>
-      </p:sp>
-      <p:sp>
-        <p:nvSpPr>
-          <p:cNvPr id="32" name="Shape 25"/>
-          <p:cNvSpPr/>
-          <p:nvPr/>
-        </p:nvSpPr>
-        <p:spPr>
-          <a:xfrm>
-            <a:off x="8138160" y="3163824"/>
-            <a:ext cx="3602736" cy="1737360"/>
+              <a:t>물량·trace·공동 로드맵 ↔ 공급능력·SDK·개선 목표 — 공동 플랫폼 계약</a:t>
+            </a:r>
+            <a:endParaRPr lang="en-US" sz="1000" dirty="0"/>
+          </a:p>
+        </p:txBody>
+      </p:sp>
+      <p:sp>
+        <p:nvSpPr>
+          <p:cNvPr id="43" name="Shape 36"/>
+          <p:cNvSpPr/>
+          <p:nvPr/>
+        </p:nvSpPr>
+        <p:spPr>
+          <a:xfrm>
+            <a:off x="8138160" y="3950208"/>
+            <a:ext cx="3602736" cy="1389888"/>
           </a:xfrm>
           <a:prstGeom prst="roundRect">
             <a:avLst>
-              <a:gd name="adj" fmla="val 4737"/>
+              <a:gd name="adj" fmla="val 5921"/>
             </a:avLst>
           </a:prstGeom>
           <a:solidFill>
@@ -9910,14 +11859,14 @@
       </p:sp>
       <p:sp>
         <p:nvSpPr>
-          <p:cNvPr id="33" name="Shape 26"/>
-          <p:cNvSpPr/>
-          <p:nvPr/>
-        </p:nvSpPr>
-        <p:spPr>
-          <a:xfrm>
-            <a:off x="8321040" y="3328416"/>
-            <a:ext cx="402336" cy="402336"/>
+          <p:cNvPr id="44" name="Shape 37"/>
+          <p:cNvSpPr/>
+          <p:nvPr/>
+        </p:nvSpPr>
+        <p:spPr>
+          <a:xfrm>
+            <a:off x="8302752" y="4096512"/>
+            <a:ext cx="365760" cy="365760"/>
           </a:xfrm>
           <a:prstGeom prst="ellipse">
             <a:avLst/>
@@ -9930,7 +11879,7 @@
       </p:sp>
       <p:pic>
         <p:nvPicPr>
-          <p:cNvPr id="34" name="Image 5" descr="preencoded.png">    </p:cNvPr>
+          <p:cNvPr id="45" name="Image 5" descr="preencoded.png">    </p:cNvPr>
           <p:cNvPicPr>
             <a:picLocks noChangeAspect="1"/>
           </p:cNvPicPr>
@@ -9944,8 +11893,8 @@
         </p:blipFill>
         <p:spPr>
           <a:xfrm>
-            <a:off x="8417601" y="3424977"/>
-            <a:ext cx="209215" cy="209215"/>
+            <a:off x="8390534" y="4184294"/>
+            <a:ext cx="190195" cy="190195"/>
           </a:xfrm>
           <a:prstGeom prst="rect">
             <a:avLst/>
@@ -9954,14 +11903,14 @@
       </p:pic>
       <p:sp>
         <p:nvSpPr>
-          <p:cNvPr id="35" name="Text 27"/>
-          <p:cNvSpPr/>
-          <p:nvPr/>
-        </p:nvSpPr>
-        <p:spPr>
-          <a:xfrm>
-            <a:off x="8833104" y="3346704"/>
-            <a:ext cx="2743200" cy="365760"/>
+          <p:cNvPr id="46" name="Text 38"/>
+          <p:cNvSpPr/>
+          <p:nvPr/>
+        </p:nvSpPr>
+        <p:spPr>
+          <a:xfrm>
+            <a:off x="8759952" y="4096512"/>
+            <a:ext cx="2834640" cy="329184"/>
           </a:xfrm>
           <a:prstGeom prst="rect">
             <a:avLst/>
@@ -9977,7 +11926,7 @@
               <a:buNone/>
             </a:pPr>
             <a:r>
-              <a:rPr lang="en-US" sz="1400" b="1" dirty="0">
+              <a:rPr lang="en-US" sz="1300" b="1" dirty="0">
                 <a:solidFill>
                   <a:srgbClr val="17313B"/>
                 </a:solidFill>
@@ -9987,20 +11936,20 @@
               </a:rPr>
               <a:t>6. 오픈소스·차별화 경계</a:t>
             </a:r>
-            <a:endParaRPr lang="en-US" sz="1400" dirty="0"/>
-          </a:p>
-        </p:txBody>
-      </p:sp>
-      <p:sp>
-        <p:nvSpPr>
-          <p:cNvPr id="36" name="Text 28"/>
-          <p:cNvSpPr/>
-          <p:nvPr/>
-        </p:nvSpPr>
-        <p:spPr>
-          <a:xfrm>
-            <a:off x="8339328" y="3840480"/>
-            <a:ext cx="3200400" cy="969264"/>
+            <a:endParaRPr lang="en-US" sz="1300" dirty="0"/>
+          </a:p>
+        </p:txBody>
+      </p:sp>
+      <p:sp>
+        <p:nvSpPr>
+          <p:cNvPr id="47" name="Text 39"/>
+          <p:cNvSpPr/>
+          <p:nvPr/>
+        </p:nvSpPr>
+        <p:spPr>
+          <a:xfrm>
+            <a:off x="8321040" y="4517136"/>
+            <a:ext cx="3255264" cy="768096"/>
           </a:xfrm>
           <a:prstGeom prst="rect">
             <a:avLst/>
@@ -10014,12 +11963,12 @@
           <a:p>
             <a:pPr indent="0" marL="0">
               <a:lnSpc>
-                <a:spcPct val="112000"/>
+                <a:spcPct val="110000"/>
               </a:lnSpc>
               <a:buNone/>
             </a:pPr>
             <a:r>
-              <a:rPr lang="en-US" sz="1050" dirty="0">
+              <a:rPr lang="en-US" sz="1000" dirty="0">
                 <a:solidFill>
                   <a:srgbClr val="5A7184"/>
                 </a:solidFill>
@@ -10027,26 +11976,26 @@
                 <a:ea typeface="Malgun Gothic" pitchFamily="34" charset="-122"/>
                 <a:cs typeface="Malgun Gothic" pitchFamily="34" charset="-120"/>
               </a:rPr>
-              <a:t>공개: 기본 라이브러리·연동·적합성 테스트 / 차별화: NAND·FTL 모델·정책 추천·예측 모델 — lock-in 우려 해소</a:t>
-            </a:r>
-            <a:endParaRPr lang="en-US" sz="1050" dirty="0"/>
-          </a:p>
-        </p:txBody>
-      </p:sp>
-      <p:sp>
-        <p:nvSpPr>
-          <p:cNvPr id="37" name="Shape 29"/>
-          <p:cNvSpPr/>
-          <p:nvPr/>
-        </p:nvSpPr>
-        <p:spPr>
-          <a:xfrm>
-            <a:off x="457200" y="5175504"/>
-            <a:ext cx="11274552" cy="822960"/>
+              <a:t>공개: 라이브러리·연동·적합성 / 차별화: FTL 모델·정책 추천·예측</a:t>
+            </a:r>
+            <a:endParaRPr lang="en-US" sz="1000" dirty="0"/>
+          </a:p>
+        </p:txBody>
+      </p:sp>
+      <p:sp>
+        <p:nvSpPr>
+          <p:cNvPr id="48" name="Shape 40"/>
+          <p:cNvSpPr/>
+          <p:nvPr/>
+        </p:nvSpPr>
+        <p:spPr>
+          <a:xfrm>
+            <a:off x="457200" y="5522976"/>
+            <a:ext cx="11274552" cy="658368"/>
           </a:xfrm>
           <a:prstGeom prst="roundRect">
             <a:avLst>
-              <a:gd name="adj" fmla="val 8889"/>
+              <a:gd name="adj" fmla="val 11111"/>
             </a:avLst>
           </a:prstGeom>
           <a:solidFill>
@@ -10062,7 +12011,7 @@
       </p:sp>
       <p:pic>
         <p:nvPicPr>
-          <p:cNvPr id="38" name="Image 6" descr="preencoded.png">    </p:cNvPr>
+          <p:cNvPr id="49" name="Image 6" descr="preencoded.png">    </p:cNvPr>
           <p:cNvPicPr>
             <a:picLocks noChangeAspect="1"/>
           </p:cNvPicPr>
@@ -10076,7 +12025,7 @@
         </p:blipFill>
         <p:spPr>
           <a:xfrm>
-            <a:off x="658368" y="5404104"/>
+            <a:off x="658368" y="5669280"/>
             <a:ext cx="365760" cy="365760"/>
           </a:xfrm>
           <a:prstGeom prst="rect">
@@ -10086,14 +12035,14 @@
       </p:pic>
       <p:sp>
         <p:nvSpPr>
-          <p:cNvPr id="39" name="Text 30"/>
-          <p:cNvSpPr/>
-          <p:nvPr/>
-        </p:nvSpPr>
-        <p:spPr>
-          <a:xfrm>
-            <a:off x="1152144" y="5175504"/>
-            <a:ext cx="10424160" cy="822960"/>
+          <p:cNvPr id="50" name="Text 41"/>
+          <p:cNvSpPr/>
+          <p:nvPr/>
+        </p:nvSpPr>
+        <p:spPr>
+          <a:xfrm>
+            <a:off x="1152144" y="5522976"/>
+            <a:ext cx="10424160" cy="658368"/>
           </a:xfrm>
           <a:prstGeom prst="rect">
             <a:avLst/>
@@ -10112,7 +12061,7 @@
               <a:buNone/>
             </a:pPr>
             <a:r>
-              <a:rPr lang="en-US" sz="1450" b="1" dirty="0">
+              <a:rPr lang="en-US" sz="1350" b="1" dirty="0">
                 <a:solidFill>
                   <a:srgbClr val="17313B"/>
                 </a:solidFill>
@@ -10120,9 +12069,9 @@
                 <a:ea typeface="Malgun Gothic" pitchFamily="34" charset="-122"/>
                 <a:cs typeface="Malgun Gothic" pitchFamily="34" charset="-120"/>
               </a:rPr>
-              <a:t>핵심 KPI — 고객 시스템에서 FDP가 실제 활성화된 SSD 용량</a:t>
-            </a:r>
-            <a:endParaRPr lang="en-US" sz="1450" dirty="0"/>
+              <a:t>핵심 KPI — 고객 시스템에서 FDP가 실제 활성화된 SSD 용량 · Captive→삼성 완제품 전환 물량</a:t>
+            </a:r>
+            <a:endParaRPr lang="en-US" sz="1350" dirty="0"/>
           </a:p>
           <a:p>
             <a:pPr indent="0" marL="0">
@@ -10132,7 +12081,7 @@
               <a:buNone/>
             </a:pPr>
             <a:r>
-              <a:rPr lang="en-US" sz="1100" dirty="0">
+              <a:rPr lang="en-US" sz="1050" dirty="0">
                 <a:solidFill>
                   <a:srgbClr val="5A7184"/>
                 </a:solidFill>
@@ -10140,48 +12089,9 @@
                 <a:ea typeface="Malgun Gothic" pitchFamily="34" charset="-122"/>
                 <a:cs typeface="Malgun Gothic" pitchFamily="34" charset="-120"/>
               </a:rPr>
-              <a:t>지원 SSD 출하량만 세면 미사용 기능이 된다 · Captive SSD 계획에서 삼성 완제품으로 전환된 물량을 병행 추적 · WAF·p999·usable capacity 개선율</a:t>
-            </a:r>
-            <a:endParaRPr lang="en-US" sz="1450" dirty="0"/>
-          </a:p>
-        </p:txBody>
-      </p:sp>
-      <p:sp>
-        <p:nvSpPr>
-          <p:cNvPr id="40" name="Text 31"/>
-          <p:cNvSpPr/>
-          <p:nvPr/>
-        </p:nvSpPr>
-        <p:spPr>
-          <a:xfrm>
-            <a:off x="457200" y="6108192"/>
-            <a:ext cx="11274552" cy="256032"/>
-          </a:xfrm>
-          <a:prstGeom prst="rect">
-            <a:avLst/>
-          </a:prstGeom>
-          <a:noFill/>
-          <a:ln/>
-        </p:spPr>
-        <p:txBody>
-          <a:bodyPr wrap="square" lIns="0" tIns="0" rIns="0" bIns="0" rtlCol="0" anchor="ctr"/>
-          <a:lstStyle/>
-          <a:p>
-            <a:pPr algn="ctr" indent="0" marL="0">
-              <a:buNone/>
-            </a:pPr>
-            <a:r>
-              <a:rPr lang="en-US" sz="1200" i="1" dirty="0">
-                <a:solidFill>
-                  <a:srgbClr val="5A7184"/>
-                </a:solidFill>
-                <a:latin typeface="Malgun Gothic" pitchFamily="34" charset="0"/>
-                <a:ea typeface="Malgun Gothic" pitchFamily="34" charset="-122"/>
-                <a:cs typeface="Malgun Gothic" pitchFamily="34" charset="-120"/>
-              </a:rPr>
-              <a:t>실행 주체: 인재 축(FDE 스타)이 이 플랫폼을 들고 고객 아키텍처 안으로 들어간다</a:t>
-            </a:r>
-            <a:endParaRPr lang="en-US" sz="1200" dirty="0"/>
+              <a:t>실행 주체: 인재 축(FDE 스타)이 이 플랫폼을 들고 고객 아키텍처 안으로 들어간다 — 단계: 기본 도구 → 전략 고객 공동검증 → 상용 플랫폼화 → Host Control 확장</a:t>
+            </a:r>
+            <a:endParaRPr lang="en-US" sz="1350" dirty="0"/>
           </a:p>
         </p:txBody>
       </p:sp>

--- a/outputs/presentation/dev-transformation-summary.pptx
+++ b/outputs/presentation/dev-transformation-summary.pptx
@@ -11,9 +11,10 @@
     <p:sldId id="259" r:id="rId5"/>
     <p:sldId id="260" r:id="rId6"/>
     <p:sldId id="261" r:id="rId7"/>
+    <p:sldId id="262" r:id="rId8"/>
   </p:sldIdLst>
   <p:notesMasterIdLst>
-    <p:notesMasterId r:id="rId8"/>
+    <p:notesMasterId r:id="rId9"/>
   </p:notesMasterIdLst>
   <p:sldSz cx="12192000" cy="6858000"/>
   <p:notesSz cx="6858000" cy="12192000"/>
@@ -989,6 +990,94 @@
 </p:notes>
 </file>
 
+<file path=ppt/notesSlides/notesSlide7.xml><?xml version="1.0" encoding="utf-8"?>
+<p:notes xmlns:a="http://schemas.openxmlformats.org/drawingml/2006/main" xmlns:r="http://schemas.openxmlformats.org/officeDocument/2006/relationships" xmlns:p="http://schemas.openxmlformats.org/presentationml/2006/main">
+  <p:cSld>
+    <p:spTree>
+      <p:nvGrpSpPr>
+        <p:cNvPr id="1" name=""/>
+        <p:cNvGrpSpPr/>
+        <p:nvPr/>
+      </p:nvGrpSpPr>
+      <p:grpSpPr>
+        <a:xfrm>
+          <a:off x="0" y="0"/>
+          <a:ext cx="0" cy="0"/>
+          <a:chOff x="0" y="0"/>
+          <a:chExt cx="0" cy="0"/>
+        </a:xfrm>
+      </p:grpSpPr>
+      <p:sp>
+        <p:nvSpPr>
+          <p:cNvPr id="2" name="Slide Image Placeholder 1"/>
+          <p:cNvSpPr>
+            <a:spLocks noGrp="1" noRot="1" noChangeAspect="1"/>
+          </p:cNvSpPr>
+          <p:nvPr>
+            <p:ph type="sldImg"/>
+          </p:nvPr>
+        </p:nvSpPr>
+        <p:spPr/>
+      </p:sp>
+      <p:sp>
+        <p:nvSpPr>
+          <p:cNvPr id="3" name="Notes Placeholder 2"/>
+          <p:cNvSpPr>
+            <a:spLocks noGrp="1"/>
+          </p:cNvSpPr>
+          <p:nvPr>
+            <p:ph type="body" idx="1"/>
+          </p:nvPr>
+        </p:nvSpPr>
+        <p:spPr/>
+        <p:txBody>
+          <a:bodyPr/>
+          <a:lstStyle/>
+          <a:p>
+            <a:r>
+              <a:rPr lang="en-US" dirty="0"/>
+              <a:t/>
+            </a:r>
+            <a:endParaRPr lang="en-US" dirty="0"/>
+          </a:p>
+        </p:txBody>
+      </p:sp>
+      <p:sp>
+        <p:nvSpPr>
+          <p:cNvPr id="4" name="Slide Number Placeholder 3"/>
+          <p:cNvSpPr>
+            <a:spLocks noGrp="1"/>
+          </p:cNvSpPr>
+          <p:nvPr>
+            <p:ph type="sldNum" sz="quarter" idx="10"/>
+          </p:nvPr>
+        </p:nvSpPr>
+        <p:spPr/>
+        <p:txBody>
+          <a:bodyPr/>
+          <a:lstStyle/>
+          <a:p>
+            <a:fld id="{F7021451-1387-4CA6-816F-3879F97B5CBC}" type="slidenum">
+              <a:rPr lang="en-US"/>
+              <a:t>7</a:t>
+            </a:fld>
+            <a:endParaRPr lang="en-US"/>
+          </a:p>
+        </p:txBody>
+      </p:sp>
+    </p:spTree>
+    <p:extLst>
+      <p:ext uri="{BB962C8B-B14F-4D97-AF65-F5344CB8AC3E}">
+        <p14:creationId xmlns:p14="http://schemas.microsoft.com/office/powerpoint/2010/main" val="1024086991"/>
+      </p:ext>
+    </p:extLst>
+  </p:cSld>
+  <p:clrMapOvr>
+    <a:masterClrMapping/>
+  </p:clrMapOvr>
+</p:notes>
+</file>
+
 <file path=ppt/slideLayouts/slideLayout1.xml><?xml version="1.0" encoding="utf-8"?>
 <p:sldLayout xmlns:a="http://schemas.openxmlformats.org/drawingml/2006/main" xmlns:r="http://schemas.openxmlformats.org/officeDocument/2006/relationships" xmlns:p="http://schemas.openxmlformats.org/presentationml/2006/main" preserve="1">
   <p:cSld name="DEFAULT">
@@ -12092,6 +12181,1340 @@
               <a:t>실행 주체: 인재 축(FDE 스타)이 이 플랫폼을 들고 고객 아키텍처 안으로 들어간다 — 단계: 기본 도구 → 전략 고객 공동검증 → 상용 플랫폼화 → Host Control 확장</a:t>
             </a:r>
             <a:endParaRPr lang="en-US" sz="1350" dirty="0"/>
+          </a:p>
+        </p:txBody>
+      </p:sp>
+    </p:spTree>
+  </p:cSld>
+  <p:clrMapOvr>
+    <a:masterClrMapping/>
+  </p:clrMapOvr>
+</p:sld>
+</file>
+
+<file path=ppt/slides/slide7.xml><?xml version="1.0" encoding="utf-8"?>
+<p:sld xmlns:a="http://schemas.openxmlformats.org/drawingml/2006/main" xmlns:r="http://schemas.openxmlformats.org/officeDocument/2006/relationships" xmlns:p="http://schemas.openxmlformats.org/presentationml/2006/main">
+  <p:cSld name="Slide 7">
+    <p:spTree>
+      <p:nvGrpSpPr>
+        <p:cNvPr id="1" name=""/>
+        <p:cNvGrpSpPr/>
+        <p:nvPr/>
+      </p:nvGrpSpPr>
+      <p:grpSpPr>
+        <a:xfrm>
+          <a:off x="0" y="0"/>
+          <a:ext cx="0" cy="0"/>
+          <a:chOff x="0" y="0"/>
+          <a:chExt cx="0" cy="0"/>
+        </a:xfrm>
+      </p:grpSpPr>
+      <p:sp>
+        <p:nvSpPr>
+          <p:cNvPr id="2" name="Text 0"/>
+          <p:cNvSpPr/>
+          <p:nvPr/>
+        </p:nvSpPr>
+        <p:spPr>
+          <a:xfrm>
+            <a:off x="457200" y="237744"/>
+            <a:ext cx="9765792" cy="566928"/>
+          </a:xfrm>
+          <a:prstGeom prst="rect">
+            <a:avLst/>
+          </a:prstGeom>
+          <a:noFill/>
+          <a:ln/>
+        </p:spPr>
+        <p:txBody>
+          <a:bodyPr wrap="square" lIns="0" tIns="0" rIns="0" bIns="0" rtlCol="0" anchor="ctr"/>
+          <a:lstStyle/>
+          <a:p>
+            <a:pPr indent="0" marL="0">
+              <a:buNone/>
+            </a:pPr>
+            <a:r>
+              <a:rPr lang="en-US" sz="3200" b="1" dirty="0">
+                <a:solidFill>
+                  <a:srgbClr val="17313B"/>
+                </a:solidFill>
+                <a:latin typeface="Malgun Gothic" pitchFamily="34" charset="0"/>
+                <a:ea typeface="Malgun Gothic" pitchFamily="34" charset="-122"/>
+                <a:cs typeface="Malgun Gothic" pitchFamily="34" charset="-120"/>
+              </a:rPr>
+              <a:t>제품·기술 축 — FDP Host–SSD 통합 플랫폼</a:t>
+            </a:r>
+            <a:endParaRPr lang="en-US" sz="3200" dirty="0"/>
+          </a:p>
+        </p:txBody>
+      </p:sp>
+      <p:sp>
+        <p:nvSpPr>
+          <p:cNvPr id="3" name="Text 1"/>
+          <p:cNvSpPr/>
+          <p:nvPr/>
+        </p:nvSpPr>
+        <p:spPr>
+          <a:xfrm>
+            <a:off x="10268712" y="310896"/>
+            <a:ext cx="1463040" cy="420624"/>
+          </a:xfrm>
+          <a:prstGeom prst="roundRect">
+            <a:avLst>
+              <a:gd name="adj" fmla="val 21739"/>
+            </a:avLst>
+          </a:prstGeom>
+          <a:solidFill>
+            <a:srgbClr val="EFF3F5"/>
+          </a:solidFill>
+          <a:ln/>
+        </p:spPr>
+        <p:txBody>
+          <a:bodyPr wrap="square" lIns="0" tIns="0" rIns="0" bIns="0" rtlCol="0" anchor="ctr"/>
+          <a:lstStyle/>
+          <a:p>
+            <a:pPr algn="ctr" indent="0" marL="0">
+              <a:buNone/>
+            </a:pPr>
+            <a:r>
+              <a:rPr lang="en-US" sz="1400" b="1" dirty="0">
+                <a:solidFill>
+                  <a:srgbClr val="5A7184"/>
+                </a:solidFill>
+                <a:latin typeface="Malgun Gothic" pitchFamily="34" charset="0"/>
+                <a:ea typeface="Malgun Gothic" pitchFamily="34" charset="-122"/>
+                <a:cs typeface="Malgun Gothic" pitchFamily="34" charset="-120"/>
+              </a:rPr>
+              <a:t>제품 축 ④</a:t>
+            </a:r>
+            <a:endParaRPr lang="en-US" sz="1400" dirty="0"/>
+          </a:p>
+        </p:txBody>
+      </p:sp>
+      <p:sp>
+        <p:nvSpPr>
+          <p:cNvPr id="4" name="Text 2"/>
+          <p:cNvSpPr/>
+          <p:nvPr/>
+        </p:nvSpPr>
+        <p:spPr>
+          <a:xfrm>
+            <a:off x="457200" y="6510528"/>
+            <a:ext cx="6949440" cy="256032"/>
+          </a:xfrm>
+          <a:prstGeom prst="rect">
+            <a:avLst/>
+          </a:prstGeom>
+          <a:noFill/>
+          <a:ln/>
+        </p:spPr>
+        <p:txBody>
+          <a:bodyPr wrap="square" lIns="0" tIns="0" rIns="0" bIns="0" rtlCol="0" anchor="ctr"/>
+          <a:lstStyle/>
+          <a:p>
+            <a:pPr indent="0" marL="0">
+              <a:buNone/>
+            </a:pPr>
+            <a:r>
+              <a:rPr lang="en-US" sz="1000" dirty="0">
+                <a:solidFill>
+                  <a:srgbClr val="5A7184"/>
+                </a:solidFill>
+                <a:latin typeface="Malgun Gothic" pitchFamily="34" charset="0"/>
+                <a:ea typeface="Malgun Gothic" pitchFamily="34" charset="-122"/>
+                <a:cs typeface="Malgun Gothic" pitchFamily="34" charset="-120"/>
+              </a:rPr>
+              <a:t>삼성전자 메모리사업부 · 개발실 체질 전환 전략 요약 · 2026-07-24</a:t>
+            </a:r>
+            <a:endParaRPr lang="en-US" sz="1000" dirty="0"/>
+          </a:p>
+        </p:txBody>
+      </p:sp>
+      <p:sp>
+        <p:nvSpPr>
+          <p:cNvPr id="5" name="Text 3"/>
+          <p:cNvSpPr/>
+          <p:nvPr/>
+        </p:nvSpPr>
+        <p:spPr>
+          <a:xfrm>
+            <a:off x="7589520" y="6510528"/>
+            <a:ext cx="4142232" cy="256032"/>
+          </a:xfrm>
+          <a:prstGeom prst="rect">
+            <a:avLst/>
+          </a:prstGeom>
+          <a:noFill/>
+          <a:ln/>
+        </p:spPr>
+        <p:txBody>
+          <a:bodyPr wrap="square" lIns="0" tIns="0" rIns="0" bIns="0" rtlCol="0" anchor="ctr"/>
+          <a:lstStyle/>
+          <a:p>
+            <a:pPr algn="r" indent="0" marL="0">
+              <a:buNone/>
+            </a:pPr>
+            <a:r>
+              <a:rPr lang="en-US" sz="1000" dirty="0">
+                <a:solidFill>
+                  <a:srgbClr val="5A7184"/>
+                </a:solidFill>
+                <a:latin typeface="Malgun Gothic" pitchFamily="34" charset="0"/>
+                <a:ea typeface="Malgun Gothic" pitchFamily="34" charset="-122"/>
+                <a:cs typeface="Malgun Gothic" pitchFamily="34" charset="-120"/>
+              </a:rPr>
+              <a:t>원천: wiki/strategies/fdp-host-ssd-platform.md</a:t>
+            </a:r>
+            <a:endParaRPr lang="en-US" sz="1000" dirty="0"/>
+          </a:p>
+        </p:txBody>
+      </p:sp>
+      <p:sp>
+        <p:nvSpPr>
+          <p:cNvPr id="6" name="Text 4"/>
+          <p:cNvSpPr/>
+          <p:nvPr/>
+        </p:nvSpPr>
+        <p:spPr>
+          <a:xfrm>
+            <a:off x="457200" y="822960"/>
+            <a:ext cx="11274552" cy="274320"/>
+          </a:xfrm>
+          <a:prstGeom prst="rect">
+            <a:avLst/>
+          </a:prstGeom>
+          <a:noFill/>
+          <a:ln/>
+        </p:spPr>
+        <p:txBody>
+          <a:bodyPr wrap="square" lIns="0" tIns="0" rIns="0" bIns="0" rtlCol="0" anchor="ctr"/>
+          <a:lstStyle/>
+          <a:p>
+            <a:pPr indent="0" marL="0">
+              <a:buNone/>
+            </a:pPr>
+            <a:r>
+              <a:rPr lang="en-US" sz="1300" b="1" dirty="0">
+                <a:solidFill>
+                  <a:srgbClr val="028090"/>
+                </a:solidFill>
+                <a:latin typeface="Malgun Gothic" pitchFamily="34" charset="0"/>
+                <a:ea typeface="Malgun Gothic" pitchFamily="34" charset="-122"/>
+                <a:cs typeface="Malgun Gothic" pitchFamily="34" charset="-120"/>
+              </a:rPr>
+              <a:t>실행전략  </a:t>
+            </a:r>
+            <a:pPr indent="0" marL="0">
+              <a:buNone/>
+            </a:pPr>
+            <a:r>
+              <a:rPr lang="en-US" sz="1300" i="1" dirty="0">
+                <a:solidFill>
+                  <a:srgbClr val="5A7184"/>
+                </a:solidFill>
+                <a:latin typeface="Malgun Gothic" pitchFamily="34" charset="0"/>
+                <a:ea typeface="Malgun Gothic" pitchFamily="34" charset="-122"/>
+                <a:cs typeface="Malgun Gothic" pitchFamily="34" charset="-120"/>
+              </a:rPr>
+              <a:t>SCA로 다가가고 · FDP로 제공하고 · FDE로 협업한다: 워크로드가 들어올수록 전환비용이 커지는 락인 플라이휠</a:t>
+            </a:r>
+            <a:endParaRPr lang="en-US" sz="1300" dirty="0"/>
+          </a:p>
+        </p:txBody>
+      </p:sp>
+      <p:sp>
+        <p:nvSpPr>
+          <p:cNvPr id="7" name="Text 5"/>
+          <p:cNvSpPr/>
+          <p:nvPr/>
+        </p:nvSpPr>
+        <p:spPr>
+          <a:xfrm>
+            <a:off x="1755648" y="1298448"/>
+            <a:ext cx="1024128" cy="1024128"/>
+          </a:xfrm>
+          <a:prstGeom prst="ellipse">
+            <a:avLst/>
+          </a:prstGeom>
+          <a:solidFill>
+            <a:srgbClr val="5A7184"/>
+          </a:solidFill>
+          <a:ln/>
+        </p:spPr>
+        <p:txBody>
+          <a:bodyPr wrap="square" lIns="0" tIns="0" rIns="0" bIns="0" rtlCol="0" anchor="ctr"/>
+          <a:lstStyle/>
+          <a:p>
+            <a:pPr algn="ctr" indent="0" marL="0">
+              <a:lnSpc>
+                <a:spcPct val="100000"/>
+              </a:lnSpc>
+              <a:buNone/>
+            </a:pPr>
+            <a:r>
+              <a:rPr lang="en-US" sz="1600" b="1" dirty="0">
+                <a:solidFill>
+                  <a:srgbClr val="FFFFFF"/>
+                </a:solidFill>
+                <a:latin typeface="Malgun Gothic" pitchFamily="34" charset="0"/>
+                <a:ea typeface="Malgun Gothic" pitchFamily="34" charset="-122"/>
+                <a:cs typeface="Malgun Gothic" pitchFamily="34" charset="-120"/>
+              </a:rPr>
+              <a:t>SCA</a:t>
+            </a:r>
+            <a:endParaRPr lang="en-US" sz="1600" dirty="0"/>
+          </a:p>
+          <a:p>
+            <a:pPr algn="ctr" indent="0" marL="0">
+              <a:lnSpc>
+                <a:spcPct val="100000"/>
+              </a:lnSpc>
+              <a:buNone/>
+            </a:pPr>
+            <a:r>
+              <a:rPr lang="en-US" sz="1050" dirty="0">
+                <a:solidFill>
+                  <a:srgbClr val="FFFFFF"/>
+                </a:solidFill>
+                <a:latin typeface="Malgun Gothic" pitchFamily="34" charset="0"/>
+                <a:ea typeface="Malgun Gothic" pitchFamily="34" charset="-122"/>
+                <a:cs typeface="Malgun Gothic" pitchFamily="34" charset="-120"/>
+              </a:rPr>
+              <a:t>다가간다</a:t>
+            </a:r>
+            <a:endParaRPr lang="en-US" sz="1600" dirty="0"/>
+          </a:p>
+        </p:txBody>
+      </p:sp>
+      <p:sp>
+        <p:nvSpPr>
+          <p:cNvPr id="8" name="Text 6"/>
+          <p:cNvSpPr/>
+          <p:nvPr/>
+        </p:nvSpPr>
+        <p:spPr>
+          <a:xfrm>
+            <a:off x="658368" y="3346704"/>
+            <a:ext cx="1024128" cy="1024128"/>
+          </a:xfrm>
+          <a:prstGeom prst="ellipse">
+            <a:avLst/>
+          </a:prstGeom>
+          <a:solidFill>
+            <a:srgbClr val="028090"/>
+          </a:solidFill>
+          <a:ln/>
+        </p:spPr>
+        <p:txBody>
+          <a:bodyPr wrap="square" lIns="0" tIns="0" rIns="0" bIns="0" rtlCol="0" anchor="ctr"/>
+          <a:lstStyle/>
+          <a:p>
+            <a:pPr algn="ctr" indent="0" marL="0">
+              <a:lnSpc>
+                <a:spcPct val="100000"/>
+              </a:lnSpc>
+              <a:buNone/>
+            </a:pPr>
+            <a:r>
+              <a:rPr lang="en-US" sz="1600" b="1" dirty="0">
+                <a:solidFill>
+                  <a:srgbClr val="FFFFFF"/>
+                </a:solidFill>
+                <a:latin typeface="Malgun Gothic" pitchFamily="34" charset="0"/>
+                <a:ea typeface="Malgun Gothic" pitchFamily="34" charset="-122"/>
+                <a:cs typeface="Malgun Gothic" pitchFamily="34" charset="-120"/>
+              </a:rPr>
+              <a:t>FDP</a:t>
+            </a:r>
+            <a:endParaRPr lang="en-US" sz="1600" dirty="0"/>
+          </a:p>
+          <a:p>
+            <a:pPr algn="ctr" indent="0" marL="0">
+              <a:lnSpc>
+                <a:spcPct val="100000"/>
+              </a:lnSpc>
+              <a:buNone/>
+            </a:pPr>
+            <a:r>
+              <a:rPr lang="en-US" sz="1050" dirty="0">
+                <a:solidFill>
+                  <a:srgbClr val="FFFFFF"/>
+                </a:solidFill>
+                <a:latin typeface="Malgun Gothic" pitchFamily="34" charset="0"/>
+                <a:ea typeface="Malgun Gothic" pitchFamily="34" charset="-122"/>
+                <a:cs typeface="Malgun Gothic" pitchFamily="34" charset="-120"/>
+              </a:rPr>
+              <a:t>제공한다</a:t>
+            </a:r>
+            <a:endParaRPr lang="en-US" sz="1600" dirty="0"/>
+          </a:p>
+        </p:txBody>
+      </p:sp>
+      <p:sp>
+        <p:nvSpPr>
+          <p:cNvPr id="9" name="Text 7"/>
+          <p:cNvSpPr/>
+          <p:nvPr/>
+        </p:nvSpPr>
+        <p:spPr>
+          <a:xfrm>
+            <a:off x="2852928" y="3346704"/>
+            <a:ext cx="1024128" cy="1024128"/>
+          </a:xfrm>
+          <a:prstGeom prst="ellipse">
+            <a:avLst/>
+          </a:prstGeom>
+          <a:solidFill>
+            <a:srgbClr val="02A878"/>
+          </a:solidFill>
+          <a:ln/>
+        </p:spPr>
+        <p:txBody>
+          <a:bodyPr wrap="square" lIns="0" tIns="0" rIns="0" bIns="0" rtlCol="0" anchor="ctr"/>
+          <a:lstStyle/>
+          <a:p>
+            <a:pPr algn="ctr" indent="0" marL="0">
+              <a:lnSpc>
+                <a:spcPct val="100000"/>
+              </a:lnSpc>
+              <a:buNone/>
+            </a:pPr>
+            <a:r>
+              <a:rPr lang="en-US" sz="1600" b="1" dirty="0">
+                <a:solidFill>
+                  <a:srgbClr val="FFFFFF"/>
+                </a:solidFill>
+                <a:latin typeface="Malgun Gothic" pitchFamily="34" charset="0"/>
+                <a:ea typeface="Malgun Gothic" pitchFamily="34" charset="-122"/>
+                <a:cs typeface="Malgun Gothic" pitchFamily="34" charset="-120"/>
+              </a:rPr>
+              <a:t>FDE</a:t>
+            </a:r>
+            <a:endParaRPr lang="en-US" sz="1600" dirty="0"/>
+          </a:p>
+          <a:p>
+            <a:pPr algn="ctr" indent="0" marL="0">
+              <a:lnSpc>
+                <a:spcPct val="100000"/>
+              </a:lnSpc>
+              <a:buNone/>
+            </a:pPr>
+            <a:r>
+              <a:rPr lang="en-US" sz="1050" dirty="0">
+                <a:solidFill>
+                  <a:srgbClr val="FFFFFF"/>
+                </a:solidFill>
+                <a:latin typeface="Malgun Gothic" pitchFamily="34" charset="0"/>
+                <a:ea typeface="Malgun Gothic" pitchFamily="34" charset="-122"/>
+                <a:cs typeface="Malgun Gothic" pitchFamily="34" charset="-120"/>
+              </a:rPr>
+              <a:t>협업한다</a:t>
+            </a:r>
+            <a:endParaRPr lang="en-US" sz="1600" dirty="0"/>
+          </a:p>
+        </p:txBody>
+      </p:sp>
+      <p:sp>
+        <p:nvSpPr>
+          <p:cNvPr id="10" name="Shape 8"/>
+          <p:cNvSpPr/>
+          <p:nvPr/>
+        </p:nvSpPr>
+        <p:spPr>
+          <a:xfrm flipH="1">
+            <a:off x="1170432" y="2304288"/>
+            <a:ext cx="402336" cy="1005840"/>
+          </a:xfrm>
+          <a:prstGeom prst="line">
+            <a:avLst/>
+          </a:prstGeom>
+          <a:noFill/>
+          <a:ln w="25400">
+            <a:solidFill>
+              <a:srgbClr val="C4CFD6"/>
+            </a:solidFill>
+            <a:prstDash val="solid"/>
+            <a:tailEnd type="triangle"/>
+          </a:ln>
+        </p:spPr>
+      </p:sp>
+      <p:sp>
+        <p:nvSpPr>
+          <p:cNvPr id="11" name="Shape 9"/>
+          <p:cNvSpPr/>
+          <p:nvPr/>
+        </p:nvSpPr>
+        <p:spPr>
+          <a:xfrm>
+            <a:off x="1773936" y="3858768"/>
+            <a:ext cx="987552" cy="914"/>
+          </a:xfrm>
+          <a:prstGeom prst="line">
+            <a:avLst/>
+          </a:prstGeom>
+          <a:noFill/>
+          <a:ln w="25400">
+            <a:solidFill>
+              <a:srgbClr val="C4CFD6"/>
+            </a:solidFill>
+            <a:prstDash val="solid"/>
+            <a:tailEnd type="triangle"/>
+          </a:ln>
+        </p:spPr>
+      </p:sp>
+      <p:sp>
+        <p:nvSpPr>
+          <p:cNvPr id="12" name="Shape 10"/>
+          <p:cNvSpPr/>
+          <p:nvPr/>
+        </p:nvSpPr>
+        <p:spPr>
+          <a:xfrm flipH="1" flipV="1">
+            <a:off x="2907792" y="2286000"/>
+            <a:ext cx="457200" cy="1024128"/>
+          </a:xfrm>
+          <a:prstGeom prst="line">
+            <a:avLst/>
+          </a:prstGeom>
+          <a:noFill/>
+          <a:ln w="25400">
+            <a:solidFill>
+              <a:srgbClr val="C4CFD6"/>
+            </a:solidFill>
+            <a:prstDash val="solid"/>
+            <a:tailEnd type="triangle"/>
+          </a:ln>
+        </p:spPr>
+      </p:sp>
+      <p:sp>
+        <p:nvSpPr>
+          <p:cNvPr id="13" name="Text 11"/>
+          <p:cNvSpPr/>
+          <p:nvPr/>
+        </p:nvSpPr>
+        <p:spPr>
+          <a:xfrm>
+            <a:off x="1554480" y="2724912"/>
+            <a:ext cx="1426464" cy="768096"/>
+          </a:xfrm>
+          <a:prstGeom prst="roundRect">
+            <a:avLst>
+              <a:gd name="adj" fmla="val 9524"/>
+            </a:avLst>
+          </a:prstGeom>
+          <a:solidFill>
+            <a:srgbClr val="E8F6F0"/>
+          </a:solidFill>
+          <a:ln w="15875">
+            <a:solidFill>
+              <a:srgbClr val="02A878"/>
+            </a:solidFill>
+          </a:ln>
+        </p:spPr>
+        <p:txBody>
+          <a:bodyPr wrap="square" lIns="0" tIns="0" rIns="0" bIns="0" rtlCol="0" anchor="ctr"/>
+          <a:lstStyle/>
+          <a:p>
+            <a:pPr algn="ctr" indent="0" marL="0">
+              <a:lnSpc>
+                <a:spcPct val="105000"/>
+              </a:lnSpc>
+              <a:buNone/>
+            </a:pPr>
+            <a:r>
+              <a:rPr lang="en-US" sz="1150" b="1" dirty="0">
+                <a:solidFill>
+                  <a:srgbClr val="17313B"/>
+                </a:solidFill>
+                <a:latin typeface="Malgun Gothic" pitchFamily="34" charset="0"/>
+                <a:ea typeface="Malgun Gothic" pitchFamily="34" charset="-122"/>
+                <a:cs typeface="Malgun Gothic" pitchFamily="34" charset="-120"/>
+              </a:rPr>
+              <a:t>고객 락인</a:t>
+            </a:r>
+            <a:endParaRPr lang="en-US" sz="1150" dirty="0"/>
+          </a:p>
+          <a:p>
+            <a:pPr algn="ctr" indent="0" marL="0">
+              <a:lnSpc>
+                <a:spcPct val="105000"/>
+              </a:lnSpc>
+              <a:buNone/>
+            </a:pPr>
+            <a:r>
+              <a:rPr lang="en-US" sz="1150" b="1" dirty="0">
+                <a:solidFill>
+                  <a:srgbClr val="17313B"/>
+                </a:solidFill>
+                <a:latin typeface="Malgun Gothic" pitchFamily="34" charset="0"/>
+                <a:ea typeface="Malgun Gothic" pitchFamily="34" charset="-122"/>
+                <a:cs typeface="Malgun Gothic" pitchFamily="34" charset="-120"/>
+              </a:rPr>
+              <a:t>다운턴 방어</a:t>
+            </a:r>
+            <a:endParaRPr lang="en-US" sz="1150" dirty="0"/>
+          </a:p>
+        </p:txBody>
+      </p:sp>
+      <p:sp>
+        <p:nvSpPr>
+          <p:cNvPr id="14" name="Text 12"/>
+          <p:cNvSpPr/>
+          <p:nvPr/>
+        </p:nvSpPr>
+        <p:spPr>
+          <a:xfrm>
+            <a:off x="457200" y="4754880"/>
+            <a:ext cx="3785616" cy="1371600"/>
+          </a:xfrm>
+          <a:prstGeom prst="roundRect">
+            <a:avLst>
+              <a:gd name="adj" fmla="val 5333"/>
+            </a:avLst>
+          </a:prstGeom>
+          <a:solidFill>
+            <a:srgbClr val="F5F7F8"/>
+          </a:solidFill>
+          <a:ln/>
+        </p:spPr>
+        <p:txBody>
+          <a:bodyPr wrap="square" lIns="1524" tIns="1524" rIns="1524" bIns="1524" rtlCol="0" anchor="ctr"/>
+          <a:lstStyle/>
+          <a:p>
+            <a:pPr algn="l" indent="0" marL="0">
+              <a:lnSpc>
+                <a:spcPct val="115000"/>
+              </a:lnSpc>
+              <a:buNone/>
+            </a:pPr>
+            <a:r>
+              <a:rPr lang="en-US" sz="1250" b="1" dirty="0">
+                <a:solidFill>
+                  <a:srgbClr val="17313B"/>
+                </a:solidFill>
+                <a:latin typeface="Malgun Gothic" pitchFamily="34" charset="0"/>
+                <a:ea typeface="Malgun Gothic" pitchFamily="34" charset="-122"/>
+                <a:cs typeface="Malgun Gothic" pitchFamily="34" charset="-120"/>
+              </a:rPr>
+              <a:t>락인 플라이휠</a:t>
+            </a:r>
+            <a:endParaRPr lang="en-US" sz="1250" dirty="0"/>
+          </a:p>
+          <a:p>
+            <a:pPr algn="l" indent="0" marL="0">
+              <a:lnSpc>
+                <a:spcPct val="115000"/>
+              </a:lnSpc>
+              <a:buNone/>
+            </a:pPr>
+            <a:r>
+              <a:rPr lang="en-US" sz="1050" dirty="0">
+                <a:solidFill>
+                  <a:srgbClr val="5A7184"/>
+                </a:solidFill>
+                <a:latin typeface="Malgun Gothic" pitchFamily="34" charset="0"/>
+                <a:ea typeface="Malgun Gothic" pitchFamily="34" charset="-122"/>
+                <a:cs typeface="Malgun Gothic" pitchFamily="34" charset="-120"/>
+              </a:rPr>
+              <a:t>워크로드 유입 → 최적화 심화 → 전환비용 증가. 계약이 끝나도 갈아타기 어려운 관계가 다운턴의 방어벽이 된다</a:t>
+            </a:r>
+            <a:endParaRPr lang="en-US" sz="1250" dirty="0"/>
+          </a:p>
+        </p:txBody>
+      </p:sp>
+      <p:sp>
+        <p:nvSpPr>
+          <p:cNvPr id="15" name="Shape 13"/>
+          <p:cNvSpPr/>
+          <p:nvPr/>
+        </p:nvSpPr>
+        <p:spPr>
+          <a:xfrm>
+            <a:off x="4434840" y="1207008"/>
+            <a:ext cx="7296912" cy="1645920"/>
+          </a:xfrm>
+          <a:prstGeom prst="roundRect">
+            <a:avLst>
+              <a:gd name="adj" fmla="val 5000"/>
+            </a:avLst>
+          </a:prstGeom>
+          <a:solidFill>
+            <a:srgbClr val="F5F7F8"/>
+          </a:solidFill>
+          <a:ln/>
+        </p:spPr>
+      </p:sp>
+      <p:sp>
+        <p:nvSpPr>
+          <p:cNvPr id="16" name="Text 14"/>
+          <p:cNvSpPr/>
+          <p:nvPr/>
+        </p:nvSpPr>
+        <p:spPr>
+          <a:xfrm>
+            <a:off x="4599432" y="1353312"/>
+            <a:ext cx="329184" cy="329184"/>
+          </a:xfrm>
+          <a:prstGeom prst="ellipse">
+            <a:avLst/>
+          </a:prstGeom>
+          <a:solidFill>
+            <a:srgbClr val="17313B"/>
+          </a:solidFill>
+          <a:ln/>
+        </p:spPr>
+        <p:txBody>
+          <a:bodyPr wrap="square" lIns="0" tIns="0" rIns="0" bIns="0" rtlCol="0" anchor="ctr"/>
+          <a:lstStyle/>
+          <a:p>
+            <a:pPr algn="ctr" indent="0" marL="0">
+              <a:buNone/>
+            </a:pPr>
+            <a:r>
+              <a:rPr lang="en-US" sz="1500" b="1" dirty="0">
+                <a:solidFill>
+                  <a:srgbClr val="FFFFFF"/>
+                </a:solidFill>
+                <a:latin typeface="Malgun Gothic" pitchFamily="34" charset="0"/>
+                <a:ea typeface="Malgun Gothic" pitchFamily="34" charset="-122"/>
+                <a:cs typeface="Malgun Gothic" pitchFamily="34" charset="-120"/>
+              </a:rPr>
+              <a:t>1</a:t>
+            </a:r>
+            <a:endParaRPr lang="en-US" sz="1500" dirty="0"/>
+          </a:p>
+        </p:txBody>
+      </p:sp>
+      <p:sp>
+        <p:nvSpPr>
+          <p:cNvPr id="17" name="Shape 15"/>
+          <p:cNvSpPr/>
+          <p:nvPr/>
+        </p:nvSpPr>
+        <p:spPr>
+          <a:xfrm>
+            <a:off x="5020056" y="1325880"/>
+            <a:ext cx="384048" cy="384048"/>
+          </a:xfrm>
+          <a:prstGeom prst="ellipse">
+            <a:avLst/>
+          </a:prstGeom>
+          <a:solidFill>
+            <a:srgbClr val="028090"/>
+          </a:solidFill>
+          <a:ln/>
+        </p:spPr>
+      </p:sp>
+      <p:pic>
+        <p:nvPicPr>
+          <p:cNvPr id="18" name="Image 0" descr="preencoded.png">    </p:cNvPr>
+          <p:cNvPicPr>
+            <a:picLocks noChangeAspect="1"/>
+          </p:cNvPicPr>
+          <p:nvPr/>
+        </p:nvPicPr>
+        <p:blipFill>
+          <a:blip r:embed="rId1"/>
+          <a:stretch>
+            <a:fillRect/>
+          </a:stretch>
+        </p:blipFill>
+        <p:spPr>
+          <a:xfrm>
+            <a:off x="5112228" y="1418052"/>
+            <a:ext cx="199705" cy="199705"/>
+          </a:xfrm>
+          <a:prstGeom prst="rect">
+            <a:avLst/>
+          </a:prstGeom>
+        </p:spPr>
+      </p:pic>
+      <p:sp>
+        <p:nvSpPr>
+          <p:cNvPr id="19" name="Text 16"/>
+          <p:cNvSpPr/>
+          <p:nvPr/>
+        </p:nvSpPr>
+        <p:spPr>
+          <a:xfrm>
+            <a:off x="5532120" y="1335024"/>
+            <a:ext cx="6035040" cy="365760"/>
+          </a:xfrm>
+          <a:prstGeom prst="rect">
+            <a:avLst/>
+          </a:prstGeom>
+          <a:noFill/>
+          <a:ln/>
+        </p:spPr>
+        <p:txBody>
+          <a:bodyPr wrap="square" lIns="0" tIns="0" rIns="0" bIns="0" rtlCol="0" anchor="ctr"/>
+          <a:lstStyle/>
+          <a:p>
+            <a:pPr indent="0" marL="0">
+              <a:buNone/>
+            </a:pPr>
+            <a:r>
+              <a:rPr lang="en-US" sz="1400" b="1" dirty="0">
+                <a:solidFill>
+                  <a:srgbClr val="17313B"/>
+                </a:solidFill>
+                <a:latin typeface="Malgun Gothic" pitchFamily="34" charset="0"/>
+                <a:ea typeface="Malgun Gothic" pitchFamily="34" charset="-122"/>
+                <a:cs typeface="Malgun Gothic" pitchFamily="34" charset="-120"/>
+              </a:rPr>
+              <a:t>협상력의 창이 열려 있을 때 워크로드 교환을 제안한다</a:t>
+            </a:r>
+            <a:endParaRPr lang="en-US" sz="1400" dirty="0"/>
+          </a:p>
+        </p:txBody>
+      </p:sp>
+      <p:sp>
+        <p:nvSpPr>
+          <p:cNvPr id="20" name="Text 17"/>
+          <p:cNvSpPr/>
+          <p:nvPr/>
+        </p:nvSpPr>
+        <p:spPr>
+          <a:xfrm>
+            <a:off x="4645152" y="1755648"/>
+            <a:ext cx="6903720" cy="1024128"/>
+          </a:xfrm>
+          <a:prstGeom prst="rect">
+            <a:avLst/>
+          </a:prstGeom>
+          <a:noFill/>
+          <a:ln/>
+        </p:spPr>
+        <p:txBody>
+          <a:bodyPr wrap="square" lIns="0" tIns="0" rIns="0" bIns="0" rtlCol="0" anchor="t"/>
+          <a:lstStyle/>
+          <a:p>
+            <a:pPr marL="342900" indent="-342900">
+              <a:lnSpc>
+                <a:spcPct val="108000"/>
+              </a:lnSpc>
+              <a:spcAft>
+                <a:spcPts val="400"/>
+              </a:spcAft>
+              <a:buSzPct val="100000"/>
+              <a:buChar char="•"/>
+            </a:pPr>
+            <a:r>
+              <a:rPr lang="en-US" sz="1050" dirty="0">
+                <a:solidFill>
+                  <a:srgbClr val="17313B"/>
+                </a:solidFill>
+                <a:latin typeface="Malgun Gothic" pitchFamily="34" charset="0"/>
+                <a:ea typeface="Malgun Gothic" pitchFamily="34" charset="-122"/>
+                <a:cs typeface="Malgun Gothic" pitchFamily="34" charset="-120"/>
+              </a:rPr>
+              <a:t>대상: 하이퍼스케일러 + 스토리지 박스 업체(Pure Storage·VAST Data·DDN)</a:t>
+            </a:r>
+            <a:endParaRPr lang="en-US" sz="1050" dirty="0"/>
+          </a:p>
+          <a:p>
+            <a:pPr marL="342900" indent="-342900">
+              <a:lnSpc>
+                <a:spcPct val="108000"/>
+              </a:lnSpc>
+              <a:spcAft>
+                <a:spcPts val="400"/>
+              </a:spcAft>
+              <a:buSzPct val="100000"/>
+              <a:buChar char="•"/>
+            </a:pPr>
+            <a:r>
+              <a:rPr lang="en-US" sz="1050" dirty="0">
+                <a:solidFill>
+                  <a:srgbClr val="17313B"/>
+                </a:solidFill>
+                <a:latin typeface="Malgun Gothic" pitchFamily="34" charset="0"/>
+                <a:ea typeface="Malgun Gothic" pitchFamily="34" charset="-122"/>
+                <a:cs typeface="Malgun Gothic" pitchFamily="34" charset="-120"/>
+              </a:rPr>
+              <a:t>딜 구조: 고객 워크로드 공유 ↔ 그 워크로드에 최적화한 FDP SSD 공급</a:t>
+            </a:r>
+            <a:endParaRPr lang="en-US" sz="1050" dirty="0"/>
+          </a:p>
+          <a:p>
+            <a:pPr marL="342900" indent="-342900">
+              <a:lnSpc>
+                <a:spcPct val="108000"/>
+              </a:lnSpc>
+              <a:spcAft>
+                <a:spcPts val="400"/>
+              </a:spcAft>
+              <a:buSzPct val="100000"/>
+              <a:buChar char="•"/>
+            </a:pPr>
+            <a:r>
+              <a:rPr lang="en-US" sz="1050" dirty="0">
+                <a:solidFill>
+                  <a:srgbClr val="17313B"/>
+                </a:solidFill>
+                <a:latin typeface="Malgun Gothic" pitchFamily="34" charset="0"/>
+                <a:ea typeface="Malgun Gothic" pitchFamily="34" charset="-122"/>
+                <a:cs typeface="Malgun Gothic" pitchFamily="34" charset="-120"/>
+              </a:rPr>
+              <a:t>고객 효익: 성능·수명 개선과 TCO 절감으로 거절하기 어려운 제안 (공급부족 국면 한정의 창)</a:t>
+            </a:r>
+            <a:endParaRPr lang="en-US" sz="1050" dirty="0"/>
+          </a:p>
+        </p:txBody>
+      </p:sp>
+      <p:sp>
+        <p:nvSpPr>
+          <p:cNvPr id="21" name="Shape 18"/>
+          <p:cNvSpPr/>
+          <p:nvPr/>
+        </p:nvSpPr>
+        <p:spPr>
+          <a:xfrm>
+            <a:off x="4434840" y="2980944"/>
+            <a:ext cx="7296912" cy="1645920"/>
+          </a:xfrm>
+          <a:prstGeom prst="roundRect">
+            <a:avLst>
+              <a:gd name="adj" fmla="val 5000"/>
+            </a:avLst>
+          </a:prstGeom>
+          <a:solidFill>
+            <a:srgbClr val="F5F7F8"/>
+          </a:solidFill>
+          <a:ln/>
+        </p:spPr>
+      </p:sp>
+      <p:sp>
+        <p:nvSpPr>
+          <p:cNvPr id="22" name="Text 19"/>
+          <p:cNvSpPr/>
+          <p:nvPr/>
+        </p:nvSpPr>
+        <p:spPr>
+          <a:xfrm>
+            <a:off x="4599432" y="3127248"/>
+            <a:ext cx="329184" cy="329184"/>
+          </a:xfrm>
+          <a:prstGeom prst="ellipse">
+            <a:avLst/>
+          </a:prstGeom>
+          <a:solidFill>
+            <a:srgbClr val="17313B"/>
+          </a:solidFill>
+          <a:ln/>
+        </p:spPr>
+        <p:txBody>
+          <a:bodyPr wrap="square" lIns="0" tIns="0" rIns="0" bIns="0" rtlCol="0" anchor="ctr"/>
+          <a:lstStyle/>
+          <a:p>
+            <a:pPr algn="ctr" indent="0" marL="0">
+              <a:buNone/>
+            </a:pPr>
+            <a:r>
+              <a:rPr lang="en-US" sz="1500" b="1" dirty="0">
+                <a:solidFill>
+                  <a:srgbClr val="FFFFFF"/>
+                </a:solidFill>
+                <a:latin typeface="Malgun Gothic" pitchFamily="34" charset="0"/>
+                <a:ea typeface="Malgun Gothic" pitchFamily="34" charset="-122"/>
+                <a:cs typeface="Malgun Gothic" pitchFamily="34" charset="-120"/>
+              </a:rPr>
+              <a:t>2</a:t>
+            </a:r>
+            <a:endParaRPr lang="en-US" sz="1500" dirty="0"/>
+          </a:p>
+        </p:txBody>
+      </p:sp>
+      <p:sp>
+        <p:nvSpPr>
+          <p:cNvPr id="23" name="Shape 20"/>
+          <p:cNvSpPr/>
+          <p:nvPr/>
+        </p:nvSpPr>
+        <p:spPr>
+          <a:xfrm>
+            <a:off x="5020056" y="3099816"/>
+            <a:ext cx="384048" cy="384048"/>
+          </a:xfrm>
+          <a:prstGeom prst="ellipse">
+            <a:avLst/>
+          </a:prstGeom>
+          <a:solidFill>
+            <a:srgbClr val="4C7C94"/>
+          </a:solidFill>
+          <a:ln/>
+        </p:spPr>
+      </p:sp>
+      <p:pic>
+        <p:nvPicPr>
+          <p:cNvPr id="24" name="Image 1" descr="preencoded.png">    </p:cNvPr>
+          <p:cNvPicPr>
+            <a:picLocks noChangeAspect="1"/>
+          </p:cNvPicPr>
+          <p:nvPr/>
+        </p:nvPicPr>
+        <p:blipFill>
+          <a:blip r:embed="rId2"/>
+          <a:stretch>
+            <a:fillRect/>
+          </a:stretch>
+        </p:blipFill>
+        <p:spPr>
+          <a:xfrm>
+            <a:off x="5112228" y="3191988"/>
+            <a:ext cx="199705" cy="199705"/>
+          </a:xfrm>
+          <a:prstGeom prst="rect">
+            <a:avLst/>
+          </a:prstGeom>
+        </p:spPr>
+      </p:pic>
+      <p:sp>
+        <p:nvSpPr>
+          <p:cNvPr id="25" name="Text 21"/>
+          <p:cNvSpPr/>
+          <p:nvPr/>
+        </p:nvSpPr>
+        <p:spPr>
+          <a:xfrm>
+            <a:off x="5532120" y="3108960"/>
+            <a:ext cx="6035040" cy="365760"/>
+          </a:xfrm>
+          <a:prstGeom prst="rect">
+            <a:avLst/>
+          </a:prstGeom>
+          <a:noFill/>
+          <a:ln/>
+        </p:spPr>
+        <p:txBody>
+          <a:bodyPr wrap="square" lIns="0" tIns="0" rIns="0" bIns="0" rtlCol="0" anchor="ctr"/>
+          <a:lstStyle/>
+          <a:p>
+            <a:pPr indent="0" marL="0">
+              <a:buNone/>
+            </a:pPr>
+            <a:r>
+              <a:rPr lang="en-US" sz="1400" b="1" dirty="0">
+                <a:solidFill>
+                  <a:srgbClr val="17313B"/>
+                </a:solidFill>
+                <a:latin typeface="Malgun Gothic" pitchFamily="34" charset="0"/>
+                <a:ea typeface="Malgun Gothic" pitchFamily="34" charset="-122"/>
+                <a:cs typeface="Malgun Gothic" pitchFamily="34" charset="-120"/>
+              </a:rPr>
+              <a:t>호스트를 이해하는 최적화 개발 역량을 채용·양성으로 확보한다</a:t>
+            </a:r>
+            <a:endParaRPr lang="en-US" sz="1400" dirty="0"/>
+          </a:p>
+        </p:txBody>
+      </p:sp>
+      <p:sp>
+        <p:nvSpPr>
+          <p:cNvPr id="26" name="Text 22"/>
+          <p:cNvSpPr/>
+          <p:nvPr/>
+        </p:nvSpPr>
+        <p:spPr>
+          <a:xfrm>
+            <a:off x="4645152" y="3529584"/>
+            <a:ext cx="6903720" cy="1024128"/>
+          </a:xfrm>
+          <a:prstGeom prst="rect">
+            <a:avLst/>
+          </a:prstGeom>
+          <a:noFill/>
+          <a:ln/>
+        </p:spPr>
+        <p:txBody>
+          <a:bodyPr wrap="square" lIns="0" tIns="0" rIns="0" bIns="0" rtlCol="0" anchor="t"/>
+          <a:lstStyle/>
+          <a:p>
+            <a:pPr marL="342900" indent="-342900">
+              <a:lnSpc>
+                <a:spcPct val="108000"/>
+              </a:lnSpc>
+              <a:spcAft>
+                <a:spcPts val="400"/>
+              </a:spcAft>
+              <a:buSzPct val="100000"/>
+              <a:buChar char="•"/>
+            </a:pPr>
+            <a:r>
+              <a:rPr lang="en-US" sz="1050" dirty="0">
+                <a:solidFill>
+                  <a:srgbClr val="17313B"/>
+                </a:solidFill>
+                <a:latin typeface="Malgun Gothic" pitchFamily="34" charset="0"/>
+                <a:ea typeface="Malgun Gothic" pitchFamily="34" charset="-122"/>
+                <a:cs typeface="Malgun Gothic" pitchFamily="34" charset="-120"/>
+              </a:rPr>
+              <a:t>전문가 5종: ① 커널 블록계층·io_uring·NVMe ② SPDK 유저스페이스 ③ DB·캐시 내부(RocksDB·CacheLib·Ceph) ④ 성능·워크로드 분석(fio·eBPF·WAF) ⑤ FTL·미디어 모델(사내 강점 브리지)</a:t>
+            </a:r>
+            <a:endParaRPr lang="en-US" sz="1050" dirty="0"/>
+          </a:p>
+          <a:p>
+            <a:pPr marL="342900" indent="-342900">
+              <a:lnSpc>
+                <a:spcPct val="108000"/>
+              </a:lnSpc>
+              <a:spcAft>
+                <a:spcPts val="400"/>
+              </a:spcAft>
+              <a:buSzPct val="100000"/>
+              <a:buChar char="•"/>
+            </a:pPr>
+            <a:r>
+              <a:rPr lang="en-US" sz="1050" dirty="0">
+                <a:solidFill>
+                  <a:srgbClr val="17313B"/>
+                </a:solidFill>
+                <a:latin typeface="Malgun Gothic" pitchFamily="34" charset="0"/>
+                <a:ea typeface="Malgun Gothic" pitchFamily="34" charset="-122"/>
+                <a:cs typeface="Malgun Gothic" pitchFamily="34" charset="-120"/>
+              </a:rPr>
+              <a:t>확보: 오픈소스 커미터·하이퍼스케일러 스토리지팀 출신 채용 + 사내 FW 인력의 호스트 SW 전환 트랙(오픈소스 기여를 평가에 반영)</a:t>
+            </a:r>
+            <a:endParaRPr lang="en-US" sz="1050" dirty="0"/>
+          </a:p>
+        </p:txBody>
+      </p:sp>
+      <p:sp>
+        <p:nvSpPr>
+          <p:cNvPr id="27" name="Shape 23"/>
+          <p:cNvSpPr/>
+          <p:nvPr/>
+        </p:nvSpPr>
+        <p:spPr>
+          <a:xfrm>
+            <a:off x="4434840" y="4754880"/>
+            <a:ext cx="7296912" cy="1645920"/>
+          </a:xfrm>
+          <a:prstGeom prst="roundRect">
+            <a:avLst>
+              <a:gd name="adj" fmla="val 5000"/>
+            </a:avLst>
+          </a:prstGeom>
+          <a:solidFill>
+            <a:srgbClr val="F5F7F8"/>
+          </a:solidFill>
+          <a:ln/>
+        </p:spPr>
+      </p:sp>
+      <p:sp>
+        <p:nvSpPr>
+          <p:cNvPr id="28" name="Text 24"/>
+          <p:cNvSpPr/>
+          <p:nvPr/>
+        </p:nvSpPr>
+        <p:spPr>
+          <a:xfrm>
+            <a:off x="4599432" y="4901184"/>
+            <a:ext cx="329184" cy="329184"/>
+          </a:xfrm>
+          <a:prstGeom prst="ellipse">
+            <a:avLst/>
+          </a:prstGeom>
+          <a:solidFill>
+            <a:srgbClr val="17313B"/>
+          </a:solidFill>
+          <a:ln/>
+        </p:spPr>
+        <p:txBody>
+          <a:bodyPr wrap="square" lIns="0" tIns="0" rIns="0" bIns="0" rtlCol="0" anchor="ctr"/>
+          <a:lstStyle/>
+          <a:p>
+            <a:pPr algn="ctr" indent="0" marL="0">
+              <a:buNone/>
+            </a:pPr>
+            <a:r>
+              <a:rPr lang="en-US" sz="1500" b="1" dirty="0">
+                <a:solidFill>
+                  <a:srgbClr val="FFFFFF"/>
+                </a:solidFill>
+                <a:latin typeface="Malgun Gothic" pitchFamily="34" charset="0"/>
+                <a:ea typeface="Malgun Gothic" pitchFamily="34" charset="-122"/>
+                <a:cs typeface="Malgun Gothic" pitchFamily="34" charset="-120"/>
+              </a:rPr>
+              <a:t>3</a:t>
+            </a:r>
+            <a:endParaRPr lang="en-US" sz="1500" dirty="0"/>
+          </a:p>
+        </p:txBody>
+      </p:sp>
+      <p:sp>
+        <p:nvSpPr>
+          <p:cNvPr id="29" name="Shape 25"/>
+          <p:cNvSpPr/>
+          <p:nvPr/>
+        </p:nvSpPr>
+        <p:spPr>
+          <a:xfrm>
+            <a:off x="5020056" y="4873752"/>
+            <a:ext cx="384048" cy="384048"/>
+          </a:xfrm>
+          <a:prstGeom prst="ellipse">
+            <a:avLst/>
+          </a:prstGeom>
+          <a:solidFill>
+            <a:srgbClr val="02A878"/>
+          </a:solidFill>
+          <a:ln/>
+        </p:spPr>
+      </p:sp>
+      <p:pic>
+        <p:nvPicPr>
+          <p:cNvPr id="30" name="Image 2" descr="preencoded.png">    </p:cNvPr>
+          <p:cNvPicPr>
+            <a:picLocks noChangeAspect="1"/>
+          </p:cNvPicPr>
+          <p:nvPr/>
+        </p:nvPicPr>
+        <p:blipFill>
+          <a:blip r:embed="rId3"/>
+          <a:stretch>
+            <a:fillRect/>
+          </a:stretch>
+        </p:blipFill>
+        <p:spPr>
+          <a:xfrm>
+            <a:off x="5112228" y="4965924"/>
+            <a:ext cx="199705" cy="199705"/>
+          </a:xfrm>
+          <a:prstGeom prst="rect">
+            <a:avLst/>
+          </a:prstGeom>
+        </p:spPr>
+      </p:pic>
+      <p:sp>
+        <p:nvSpPr>
+          <p:cNvPr id="31" name="Text 26"/>
+          <p:cNvSpPr/>
+          <p:nvPr/>
+        </p:nvSpPr>
+        <p:spPr>
+          <a:xfrm>
+            <a:off x="5532120" y="4882896"/>
+            <a:ext cx="6035040" cy="365760"/>
+          </a:xfrm>
+          <a:prstGeom prst="rect">
+            <a:avLst/>
+          </a:prstGeom>
+          <a:noFill/>
+          <a:ln/>
+        </p:spPr>
+        <p:txBody>
+          <a:bodyPr wrap="square" lIns="0" tIns="0" rIns="0" bIns="0" rtlCol="0" anchor="ctr"/>
+          <a:lstStyle/>
+          <a:p>
+            <a:pPr indent="0" marL="0">
+              <a:buNone/>
+            </a:pPr>
+            <a:r>
+              <a:rPr lang="en-US" sz="1400" b="1" dirty="0">
+                <a:solidFill>
+                  <a:srgbClr val="17313B"/>
+                </a:solidFill>
+                <a:latin typeface="Malgun Gothic" pitchFamily="34" charset="0"/>
+                <a:ea typeface="Malgun Gothic" pitchFamily="34" charset="-122"/>
+                <a:cs typeface="Malgun Gothic" pitchFamily="34" charset="-120"/>
+              </a:rPr>
+              <a:t>FDE를 고객 옆에 두고 FDP 생태계에 함께 기여한다</a:t>
+            </a:r>
+            <a:endParaRPr lang="en-US" sz="1400" dirty="0"/>
+          </a:p>
+        </p:txBody>
+      </p:sp>
+      <p:sp>
+        <p:nvSpPr>
+          <p:cNvPr id="32" name="Text 27"/>
+          <p:cNvSpPr/>
+          <p:nvPr/>
+        </p:nvSpPr>
+        <p:spPr>
+          <a:xfrm>
+            <a:off x="4645152" y="5303520"/>
+            <a:ext cx="6903720" cy="1024128"/>
+          </a:xfrm>
+          <a:prstGeom prst="rect">
+            <a:avLst/>
+          </a:prstGeom>
+          <a:noFill/>
+          <a:ln/>
+        </p:spPr>
+        <p:txBody>
+          <a:bodyPr wrap="square" lIns="0" tIns="0" rIns="0" bIns="0" rtlCol="0" anchor="t"/>
+          <a:lstStyle/>
+          <a:p>
+            <a:pPr marL="342900" indent="-342900">
+              <a:lnSpc>
+                <a:spcPct val="108000"/>
+              </a:lnSpc>
+              <a:spcAft>
+                <a:spcPts val="400"/>
+              </a:spcAft>
+              <a:buSzPct val="100000"/>
+              <a:buChar char="•"/>
+            </a:pPr>
+            <a:r>
+              <a:rPr lang="en-US" sz="1050" dirty="0">
+                <a:solidFill>
+                  <a:srgbClr val="17313B"/>
+                </a:solidFill>
+                <a:latin typeface="Malgun Gothic" pitchFamily="34" charset="0"/>
+                <a:ea typeface="Malgun Gothic" pitchFamily="34" charset="-122"/>
+                <a:cs typeface="Malgun Gothic" pitchFamily="34" charset="-120"/>
+              </a:rPr>
+              <a:t>채용: 실리콘밸리 현지 중심, 오픈소스 스토리지 기여자 우대, 영어 커뮤니케이션 필수</a:t>
+            </a:r>
+            <a:endParaRPr lang="en-US" sz="1050" dirty="0"/>
+          </a:p>
+          <a:p>
+            <a:pPr marL="342900" indent="-342900">
+              <a:lnSpc>
+                <a:spcPct val="108000"/>
+              </a:lnSpc>
+              <a:spcAft>
+                <a:spcPts val="400"/>
+              </a:spcAft>
+              <a:buSzPct val="100000"/>
+              <a:buChar char="•"/>
+            </a:pPr>
+            <a:r>
+              <a:rPr lang="en-US" sz="1050" dirty="0">
+                <a:solidFill>
+                  <a:srgbClr val="17313B"/>
+                </a:solidFill>
+                <a:latin typeface="Malgun Gothic" pitchFamily="34" charset="0"/>
+                <a:ea typeface="Malgun Gothic" pitchFamily="34" charset="-122"/>
+                <a:cs typeface="Malgun Gothic" pitchFamily="34" charset="-120"/>
+              </a:rPr>
+              <a:t>양성: 본사 엔지니어 미국 로테이션(6~12개월) + 현지 FDE 멘토 페어링</a:t>
+            </a:r>
+            <a:endParaRPr lang="en-US" sz="1050" dirty="0"/>
+          </a:p>
+          <a:p>
+            <a:pPr marL="342900" indent="-342900">
+              <a:lnSpc>
+                <a:spcPct val="108000"/>
+              </a:lnSpc>
+              <a:spcAft>
+                <a:spcPts val="400"/>
+              </a:spcAft>
+              <a:buSzPct val="100000"/>
+              <a:buChar char="•"/>
+            </a:pPr>
+            <a:r>
+              <a:rPr lang="en-US" sz="1050" dirty="0">
+                <a:solidFill>
+                  <a:srgbClr val="17313B"/>
+                </a:solidFill>
+                <a:latin typeface="Malgun Gothic" pitchFamily="34" charset="0"/>
+                <a:ea typeface="Malgun Gothic" pitchFamily="34" charset="-122"/>
+                <a:cs typeface="Malgun Gothic" pitchFamily="34" charset="-120"/>
+              </a:rPr>
+              <a:t>운영: 파일럿 1~2사 상주(Pod 소속·dual-ladder), outcome 평가(FDP 활성화 용량), 커널·SPDK·CacheLib 업스트림 기여로 호명</a:t>
+            </a:r>
+            <a:endParaRPr lang="en-US" sz="1050" dirty="0"/>
           </a:p>
         </p:txBody>
       </p:sp>

--- a/outputs/presentation/dev-transformation-summary.pptx
+++ b/outputs/presentation/dev-transformation-summary.pptx
@@ -7666,7 +7666,7 @@
                 <a:ea typeface="Malgun Gothic" pitchFamily="34" charset="-122"/>
                 <a:cs typeface="Malgun Gothic" pitchFamily="34" charset="-120"/>
               </a:rPr>
-              <a:t>제품·기술 축 — FDP Host–SSD 통합 플랫폼</a:t>
+              <a:t>제품·기술 축: FDP Host–SSD 통합 플랫폼</a:t>
             </a:r>
             <a:endParaRPr lang="en-US" sz="3200" dirty="0"/>
           </a:p>
@@ -9233,7 +9233,7 @@
                 <a:ea typeface="Malgun Gothic" pitchFamily="34" charset="-122"/>
                 <a:cs typeface="Malgun Gothic" pitchFamily="34" charset="-120"/>
               </a:rPr>
-              <a:t>제품·기술 축 — FDP Host–SSD 통합 플랫폼</a:t>
+              <a:t>제품·기술 축: FDP Host–SSD 통합 플랫폼</a:t>
             </a:r>
             <a:endParaRPr lang="en-US" sz="3200" dirty="0"/>
           </a:p>
@@ -10390,7 +10390,7 @@
                 <a:ea typeface="Malgun Gothic" pitchFamily="34" charset="-122"/>
                 <a:cs typeface="Malgun Gothic" pitchFamily="34" charset="-120"/>
               </a:rPr>
-              <a:t>제품·기술 축 — FDP Host–SSD 통합 플랫폼</a:t>
+              <a:t>제품·기술 축: FDP Host–SSD 통합 플랫폼</a:t>
             </a:r>
             <a:endParaRPr lang="en-US" sz="3200" dirty="0"/>
           </a:p>
@@ -12242,7 +12242,7 @@
                 <a:ea typeface="Malgun Gothic" pitchFamily="34" charset="-122"/>
                 <a:cs typeface="Malgun Gothic" pitchFamily="34" charset="-120"/>
               </a:rPr>
-              <a:t>제품·기술 축 — FDP Host–SSD 통합 플랫폼</a:t>
+              <a:t>제품·기술 축: FDP Host–SSD 통합 플랫폼</a:t>
             </a:r>
             <a:endParaRPr lang="en-US" sz="3200" dirty="0"/>
           </a:p>
@@ -12396,7 +12396,7 @@
             <a:r>
               <a:rPr lang="en-US" sz="1300" b="1" dirty="0">
                 <a:solidFill>
-                  <a:srgbClr val="028090"/>
+                  <a:srgbClr val="1428A0"/>
                 </a:solidFill>
                 <a:latin typeface="Malgun Gothic" pitchFamily="34" charset="0"/>
                 <a:ea typeface="Malgun Gothic" pitchFamily="34" charset="-122"/>
@@ -12408,15 +12408,15 @@
               <a:buNone/>
             </a:pPr>
             <a:r>
-              <a:rPr lang="en-US" sz="1300" i="1" dirty="0">
-                <a:solidFill>
-                  <a:srgbClr val="5A7184"/>
-                </a:solidFill>
-                <a:latin typeface="Malgun Gothic" pitchFamily="34" charset="0"/>
-                <a:ea typeface="Malgun Gothic" pitchFamily="34" charset="-122"/>
-                <a:cs typeface="Malgun Gothic" pitchFamily="34" charset="-120"/>
-              </a:rPr>
-              <a:t>SCA로 다가가고 · FDP로 제공하고 · FDE로 협업한다: 워크로드가 들어올수록 전환비용이 커지는 락인 플라이휠</a:t>
+              <a:rPr lang="en-US" sz="1300" dirty="0">
+                <a:solidFill>
+                  <a:srgbClr val="555555"/>
+                </a:solidFill>
+                <a:latin typeface="Malgun Gothic" pitchFamily="34" charset="0"/>
+                <a:ea typeface="Malgun Gothic" pitchFamily="34" charset="-122"/>
+                <a:cs typeface="Malgun Gothic" pitchFamily="34" charset="-120"/>
+              </a:rPr>
+              <a:t>SCA로 다가가고 · FDP로 제공하고 · FDE로 협업한다: 워크로드가 들어올수록 전환비용이 커지는 락인 플라이휠, 다운턴 피해 최소화</a:t>
             </a:r>
             <a:endParaRPr lang="en-US" sz="1300" dirty="0"/>
           </a:p>
@@ -12430,14 +12430,335 @@
         </p:nvSpPr>
         <p:spPr>
           <a:xfrm>
-            <a:off x="1755648" y="1298448"/>
-            <a:ext cx="1024128" cy="1024128"/>
+            <a:off x="457200" y="1188720"/>
+            <a:ext cx="310896" cy="310896"/>
           </a:xfrm>
           <a:prstGeom prst="ellipse">
             <a:avLst/>
           </a:prstGeom>
           <a:solidFill>
-            <a:srgbClr val="5A7184"/>
+            <a:srgbClr val="1428A0"/>
+          </a:solidFill>
+          <a:ln/>
+        </p:spPr>
+        <p:txBody>
+          <a:bodyPr wrap="square" lIns="0" tIns="0" rIns="0" bIns="0" rtlCol="0" anchor="ctr"/>
+          <a:lstStyle/>
+          <a:p>
+            <a:pPr algn="ctr" indent="0" marL="0">
+              <a:buNone/>
+            </a:pPr>
+            <a:r>
+              <a:rPr lang="en-US" sz="1400" b="1" dirty="0">
+                <a:solidFill>
+                  <a:srgbClr val="FFFFFF"/>
+                </a:solidFill>
+                <a:latin typeface="Malgun Gothic" pitchFamily="34" charset="0"/>
+                <a:ea typeface="Malgun Gothic" pitchFamily="34" charset="-122"/>
+                <a:cs typeface="Malgun Gothic" pitchFamily="34" charset="-120"/>
+              </a:rPr>
+              <a:t>1</a:t>
+            </a:r>
+            <a:endParaRPr lang="en-US" sz="1400" dirty="0"/>
+          </a:p>
+        </p:txBody>
+      </p:sp>
+      <p:sp>
+        <p:nvSpPr>
+          <p:cNvPr id="8" name="Text 6"/>
+          <p:cNvSpPr/>
+          <p:nvPr/>
+        </p:nvSpPr>
+        <p:spPr>
+          <a:xfrm>
+            <a:off x="859536" y="1170432"/>
+            <a:ext cx="3200400" cy="347472"/>
+          </a:xfrm>
+          <a:prstGeom prst="rect">
+            <a:avLst/>
+          </a:prstGeom>
+          <a:noFill/>
+          <a:ln/>
+        </p:spPr>
+        <p:txBody>
+          <a:bodyPr wrap="square" lIns="0" tIns="0" rIns="0" bIns="0" rtlCol="0" anchor="ctr"/>
+          <a:lstStyle/>
+          <a:p>
+            <a:pPr indent="0" marL="0">
+              <a:buNone/>
+            </a:pPr>
+            <a:r>
+              <a:rPr lang="en-US" sz="1400" b="1" dirty="0">
+                <a:solidFill>
+                  <a:srgbClr val="1A1A1A"/>
+                </a:solidFill>
+                <a:latin typeface="Malgun Gothic" pitchFamily="34" charset="0"/>
+                <a:ea typeface="Malgun Gothic" pitchFamily="34" charset="-122"/>
+                <a:cs typeface="Malgun Gothic" pitchFamily="34" charset="-120"/>
+              </a:rPr>
+              <a:t>락인 플라이휠</a:t>
+            </a:r>
+            <a:endParaRPr lang="en-US" sz="1400" dirty="0"/>
+          </a:p>
+        </p:txBody>
+      </p:sp>
+      <p:sp>
+        <p:nvSpPr>
+          <p:cNvPr id="9" name="Shape 7"/>
+          <p:cNvSpPr/>
+          <p:nvPr/>
+        </p:nvSpPr>
+        <p:spPr>
+          <a:xfrm>
+            <a:off x="457200" y="1627632"/>
+            <a:ext cx="3602736" cy="4626864"/>
+          </a:xfrm>
+          <a:prstGeom prst="roundRect">
+            <a:avLst>
+              <a:gd name="adj" fmla="val 2030"/>
+            </a:avLst>
+          </a:prstGeom>
+          <a:solidFill>
+            <a:srgbClr val="FFFFFF"/>
+          </a:solidFill>
+          <a:ln w="12700">
+            <a:solidFill>
+              <a:srgbClr val="D9D9D9"/>
+            </a:solidFill>
+            <a:prstDash val="solid"/>
+          </a:ln>
+        </p:spPr>
+      </p:sp>
+      <p:sp>
+        <p:nvSpPr>
+          <p:cNvPr id="10" name="Text 8"/>
+          <p:cNvSpPr/>
+          <p:nvPr/>
+        </p:nvSpPr>
+        <p:spPr>
+          <a:xfrm>
+            <a:off x="4297680" y="1188720"/>
+            <a:ext cx="310896" cy="310896"/>
+          </a:xfrm>
+          <a:prstGeom prst="ellipse">
+            <a:avLst/>
+          </a:prstGeom>
+          <a:solidFill>
+            <a:srgbClr val="1428A0"/>
+          </a:solidFill>
+          <a:ln/>
+        </p:spPr>
+        <p:txBody>
+          <a:bodyPr wrap="square" lIns="0" tIns="0" rIns="0" bIns="0" rtlCol="0" anchor="ctr"/>
+          <a:lstStyle/>
+          <a:p>
+            <a:pPr algn="ctr" indent="0" marL="0">
+              <a:buNone/>
+            </a:pPr>
+            <a:r>
+              <a:rPr lang="en-US" sz="1400" b="1" dirty="0">
+                <a:solidFill>
+                  <a:srgbClr val="FFFFFF"/>
+                </a:solidFill>
+                <a:latin typeface="Malgun Gothic" pitchFamily="34" charset="0"/>
+                <a:ea typeface="Malgun Gothic" pitchFamily="34" charset="-122"/>
+                <a:cs typeface="Malgun Gothic" pitchFamily="34" charset="-120"/>
+              </a:rPr>
+              <a:t>2</a:t>
+            </a:r>
+            <a:endParaRPr lang="en-US" sz="1400" dirty="0"/>
+          </a:p>
+        </p:txBody>
+      </p:sp>
+      <p:sp>
+        <p:nvSpPr>
+          <p:cNvPr id="11" name="Text 9"/>
+          <p:cNvSpPr/>
+          <p:nvPr/>
+        </p:nvSpPr>
+        <p:spPr>
+          <a:xfrm>
+            <a:off x="4700016" y="1170432"/>
+            <a:ext cx="3200400" cy="347472"/>
+          </a:xfrm>
+          <a:prstGeom prst="rect">
+            <a:avLst/>
+          </a:prstGeom>
+          <a:noFill/>
+          <a:ln/>
+        </p:spPr>
+        <p:txBody>
+          <a:bodyPr wrap="square" lIns="0" tIns="0" rIns="0" bIns="0" rtlCol="0" anchor="ctr"/>
+          <a:lstStyle/>
+          <a:p>
+            <a:pPr indent="0" marL="0">
+              <a:buNone/>
+            </a:pPr>
+            <a:r>
+              <a:rPr lang="en-US" sz="1400" b="1" dirty="0">
+                <a:solidFill>
+                  <a:srgbClr val="1A1A1A"/>
+                </a:solidFill>
+                <a:latin typeface="Malgun Gothic" pitchFamily="34" charset="0"/>
+                <a:ea typeface="Malgun Gothic" pitchFamily="34" charset="-122"/>
+                <a:cs typeface="Malgun Gothic" pitchFamily="34" charset="-120"/>
+              </a:rPr>
+              <a:t>SCA: Micron이 증명한 접근</a:t>
+            </a:r>
+            <a:endParaRPr lang="en-US" sz="1400" dirty="0"/>
+          </a:p>
+        </p:txBody>
+      </p:sp>
+      <p:sp>
+        <p:nvSpPr>
+          <p:cNvPr id="12" name="Shape 10"/>
+          <p:cNvSpPr/>
+          <p:nvPr/>
+        </p:nvSpPr>
+        <p:spPr>
+          <a:xfrm>
+            <a:off x="4297680" y="1627632"/>
+            <a:ext cx="3602736" cy="4626864"/>
+          </a:xfrm>
+          <a:prstGeom prst="roundRect">
+            <a:avLst>
+              <a:gd name="adj" fmla="val 2030"/>
+            </a:avLst>
+          </a:prstGeom>
+          <a:solidFill>
+            <a:srgbClr val="FFFFFF"/>
+          </a:solidFill>
+          <a:ln w="12700">
+            <a:solidFill>
+              <a:srgbClr val="D9D9D9"/>
+            </a:solidFill>
+            <a:prstDash val="solid"/>
+          </a:ln>
+        </p:spPr>
+      </p:sp>
+      <p:sp>
+        <p:nvSpPr>
+          <p:cNvPr id="13" name="Text 11"/>
+          <p:cNvSpPr/>
+          <p:nvPr/>
+        </p:nvSpPr>
+        <p:spPr>
+          <a:xfrm>
+            <a:off x="8129016" y="1188720"/>
+            <a:ext cx="310896" cy="310896"/>
+          </a:xfrm>
+          <a:prstGeom prst="ellipse">
+            <a:avLst/>
+          </a:prstGeom>
+          <a:solidFill>
+            <a:srgbClr val="1428A0"/>
+          </a:solidFill>
+          <a:ln/>
+        </p:spPr>
+        <p:txBody>
+          <a:bodyPr wrap="square" lIns="0" tIns="0" rIns="0" bIns="0" rtlCol="0" anchor="ctr"/>
+          <a:lstStyle/>
+          <a:p>
+            <a:pPr algn="ctr" indent="0" marL="0">
+              <a:buNone/>
+            </a:pPr>
+            <a:r>
+              <a:rPr lang="en-US" sz="1400" b="1" dirty="0">
+                <a:solidFill>
+                  <a:srgbClr val="FFFFFF"/>
+                </a:solidFill>
+                <a:latin typeface="Malgun Gothic" pitchFamily="34" charset="0"/>
+                <a:ea typeface="Malgun Gothic" pitchFamily="34" charset="-122"/>
+                <a:cs typeface="Malgun Gothic" pitchFamily="34" charset="-120"/>
+              </a:rPr>
+              <a:t>3</a:t>
+            </a:r>
+            <a:endParaRPr lang="en-US" sz="1400" dirty="0"/>
+          </a:p>
+        </p:txBody>
+      </p:sp>
+      <p:sp>
+        <p:nvSpPr>
+          <p:cNvPr id="14" name="Text 12"/>
+          <p:cNvSpPr/>
+          <p:nvPr/>
+        </p:nvSpPr>
+        <p:spPr>
+          <a:xfrm>
+            <a:off x="8531352" y="1170432"/>
+            <a:ext cx="3200400" cy="347472"/>
+          </a:xfrm>
+          <a:prstGeom prst="rect">
+            <a:avLst/>
+          </a:prstGeom>
+          <a:noFill/>
+          <a:ln/>
+        </p:spPr>
+        <p:txBody>
+          <a:bodyPr wrap="square" lIns="0" tIns="0" rIns="0" bIns="0" rtlCol="0" anchor="ctr"/>
+          <a:lstStyle/>
+          <a:p>
+            <a:pPr indent="0" marL="0">
+              <a:buNone/>
+            </a:pPr>
+            <a:r>
+              <a:rPr lang="en-US" sz="1400" b="1" dirty="0">
+                <a:solidFill>
+                  <a:srgbClr val="1A1A1A"/>
+                </a:solidFill>
+                <a:latin typeface="Malgun Gothic" pitchFamily="34" charset="0"/>
+                <a:ea typeface="Malgun Gothic" pitchFamily="34" charset="-122"/>
+                <a:cs typeface="Malgun Gothic" pitchFamily="34" charset="-120"/>
+              </a:rPr>
+              <a:t>FDP·FDE: 기술과 사람</a:t>
+            </a:r>
+            <a:endParaRPr lang="en-US" sz="1400" dirty="0"/>
+          </a:p>
+        </p:txBody>
+      </p:sp>
+      <p:sp>
+        <p:nvSpPr>
+          <p:cNvPr id="15" name="Shape 13"/>
+          <p:cNvSpPr/>
+          <p:nvPr/>
+        </p:nvSpPr>
+        <p:spPr>
+          <a:xfrm>
+            <a:off x="8129016" y="1627632"/>
+            <a:ext cx="3602736" cy="4626864"/>
+          </a:xfrm>
+          <a:prstGeom prst="roundRect">
+            <a:avLst>
+              <a:gd name="adj" fmla="val 2030"/>
+            </a:avLst>
+          </a:prstGeom>
+          <a:solidFill>
+            <a:srgbClr val="FFFFFF"/>
+          </a:solidFill>
+          <a:ln w="12700">
+            <a:solidFill>
+              <a:srgbClr val="D9D9D9"/>
+            </a:solidFill>
+            <a:prstDash val="solid"/>
+          </a:ln>
+        </p:spPr>
+      </p:sp>
+      <p:sp>
+        <p:nvSpPr>
+          <p:cNvPr id="16" name="Text 14"/>
+          <p:cNvSpPr/>
+          <p:nvPr/>
+        </p:nvSpPr>
+        <p:spPr>
+          <a:xfrm>
+            <a:off x="1828800" y="1828800"/>
+            <a:ext cx="877824" cy="877824"/>
+          </a:xfrm>
+          <a:prstGeom prst="ellipse">
+            <a:avLst/>
+          </a:prstGeom>
+          <a:solidFill>
+            <a:srgbClr val="1428A0"/>
           </a:solidFill>
           <a:ln/>
         </p:spPr>
@@ -12452,7 +12773,7 @@
               <a:buNone/>
             </a:pPr>
             <a:r>
-              <a:rPr lang="en-US" sz="1600" b="1" dirty="0">
+              <a:rPr lang="en-US" sz="1450" b="1" dirty="0">
                 <a:solidFill>
                   <a:srgbClr val="FFFFFF"/>
                 </a:solidFill>
@@ -12462,7 +12783,7 @@
               </a:rPr>
               <a:t>SCA</a:t>
             </a:r>
-            <a:endParaRPr lang="en-US" sz="1600" dirty="0"/>
+            <a:endParaRPr lang="en-US" sz="1450" dirty="0"/>
           </a:p>
           <a:p>
             <a:pPr algn="ctr" indent="0" marL="0">
@@ -12472,7 +12793,7 @@
               <a:buNone/>
             </a:pPr>
             <a:r>
-              <a:rPr lang="en-US" sz="1050" dirty="0">
+              <a:rPr lang="en-US" sz="950" dirty="0">
                 <a:solidFill>
                   <a:srgbClr val="FFFFFF"/>
                 </a:solidFill>
@@ -12482,26 +12803,26 @@
               </a:rPr>
               <a:t>다가간다</a:t>
             </a:r>
-            <a:endParaRPr lang="en-US" sz="1600" dirty="0"/>
-          </a:p>
-        </p:txBody>
-      </p:sp>
-      <p:sp>
-        <p:nvSpPr>
-          <p:cNvPr id="8" name="Text 6"/>
-          <p:cNvSpPr/>
-          <p:nvPr/>
-        </p:nvSpPr>
-        <p:spPr>
-          <a:xfrm>
-            <a:off x="658368" y="3346704"/>
-            <a:ext cx="1024128" cy="1024128"/>
+            <a:endParaRPr lang="en-US" sz="1450" dirty="0"/>
+          </a:p>
+        </p:txBody>
+      </p:sp>
+      <p:sp>
+        <p:nvSpPr>
+          <p:cNvPr id="17" name="Text 15"/>
+          <p:cNvSpPr/>
+          <p:nvPr/>
+        </p:nvSpPr>
+        <p:spPr>
+          <a:xfrm>
+            <a:off x="859536" y="3456432"/>
+            <a:ext cx="877824" cy="877824"/>
           </a:xfrm>
           <a:prstGeom prst="ellipse">
             <a:avLst/>
           </a:prstGeom>
           <a:solidFill>
-            <a:srgbClr val="028090"/>
+            <a:srgbClr val="3C5AC8"/>
           </a:solidFill>
           <a:ln/>
         </p:spPr>
@@ -12516,7 +12837,7 @@
               <a:buNone/>
             </a:pPr>
             <a:r>
-              <a:rPr lang="en-US" sz="1600" b="1" dirty="0">
+              <a:rPr lang="en-US" sz="1450" b="1" dirty="0">
                 <a:solidFill>
                   <a:srgbClr val="FFFFFF"/>
                 </a:solidFill>
@@ -12526,7 +12847,7 @@
               </a:rPr>
               <a:t>FDP</a:t>
             </a:r>
-            <a:endParaRPr lang="en-US" sz="1600" dirty="0"/>
+            <a:endParaRPr lang="en-US" sz="1450" dirty="0"/>
           </a:p>
           <a:p>
             <a:pPr algn="ctr" indent="0" marL="0">
@@ -12536,7 +12857,7 @@
               <a:buNone/>
             </a:pPr>
             <a:r>
-              <a:rPr lang="en-US" sz="1050" dirty="0">
+              <a:rPr lang="en-US" sz="950" dirty="0">
                 <a:solidFill>
                   <a:srgbClr val="FFFFFF"/>
                 </a:solidFill>
@@ -12546,26 +12867,26 @@
               </a:rPr>
               <a:t>제공한다</a:t>
             </a:r>
-            <a:endParaRPr lang="en-US" sz="1600" dirty="0"/>
-          </a:p>
-        </p:txBody>
-      </p:sp>
-      <p:sp>
-        <p:nvSpPr>
-          <p:cNvPr id="9" name="Text 7"/>
-          <p:cNvSpPr/>
-          <p:nvPr/>
-        </p:nvSpPr>
-        <p:spPr>
-          <a:xfrm>
-            <a:off x="2852928" y="3346704"/>
-            <a:ext cx="1024128" cy="1024128"/>
+            <a:endParaRPr lang="en-US" sz="1450" dirty="0"/>
+          </a:p>
+        </p:txBody>
+      </p:sp>
+      <p:sp>
+        <p:nvSpPr>
+          <p:cNvPr id="18" name="Text 16"/>
+          <p:cNvSpPr/>
+          <p:nvPr/>
+        </p:nvSpPr>
+        <p:spPr>
+          <a:xfrm>
+            <a:off x="2798064" y="3456432"/>
+            <a:ext cx="877824" cy="877824"/>
           </a:xfrm>
           <a:prstGeom prst="ellipse">
             <a:avLst/>
           </a:prstGeom>
           <a:solidFill>
-            <a:srgbClr val="02A878"/>
+            <a:srgbClr val="8FA0DC"/>
           </a:solidFill>
           <a:ln/>
         </p:spPr>
@@ -12580,7 +12901,7 @@
               <a:buNone/>
             </a:pPr>
             <a:r>
-              <a:rPr lang="en-US" sz="1600" b="1" dirty="0">
+              <a:rPr lang="en-US" sz="1450" b="1" dirty="0">
                 <a:solidFill>
                   <a:srgbClr val="FFFFFF"/>
                 </a:solidFill>
@@ -12590,7 +12911,7 @@
               </a:rPr>
               <a:t>FDE</a:t>
             </a:r>
-            <a:endParaRPr lang="en-US" sz="1600" dirty="0"/>
+            <a:endParaRPr lang="en-US" sz="1450" dirty="0"/>
           </a:p>
           <a:p>
             <a:pPr algn="ctr" indent="0" marL="0">
@@ -12600,7 +12921,7 @@
               <a:buNone/>
             </a:pPr>
             <a:r>
-              <a:rPr lang="en-US" sz="1050" dirty="0">
+              <a:rPr lang="en-US" sz="950" dirty="0">
                 <a:solidFill>
                   <a:srgbClr val="FFFFFF"/>
                 </a:solidFill>
@@ -12610,28 +12931,28 @@
               </a:rPr>
               <a:t>협업한다</a:t>
             </a:r>
-            <a:endParaRPr lang="en-US" sz="1600" dirty="0"/>
-          </a:p>
-        </p:txBody>
-      </p:sp>
-      <p:sp>
-        <p:nvSpPr>
-          <p:cNvPr id="10" name="Shape 8"/>
+            <a:endParaRPr lang="en-US" sz="1450" dirty="0"/>
+          </a:p>
+        </p:txBody>
+      </p:sp>
+      <p:sp>
+        <p:nvSpPr>
+          <p:cNvPr id="19" name="Shape 17"/>
           <p:cNvSpPr/>
           <p:nvPr/>
         </p:nvSpPr>
         <p:spPr>
           <a:xfrm flipH="1">
-            <a:off x="1170432" y="2304288"/>
-            <a:ext cx="402336" cy="1005840"/>
+            <a:off x="1371600" y="2706624"/>
+            <a:ext cx="329184" cy="713232"/>
           </a:xfrm>
           <a:prstGeom prst="line">
             <a:avLst/>
           </a:prstGeom>
           <a:noFill/>
-          <a:ln w="25400">
+          <a:ln w="22225">
             <a:solidFill>
-              <a:srgbClr val="C4CFD6"/>
+              <a:srgbClr val="B9C2DC"/>
             </a:solidFill>
             <a:prstDash val="solid"/>
             <a:tailEnd type="triangle"/>
@@ -12640,22 +12961,22 @@
       </p:sp>
       <p:sp>
         <p:nvSpPr>
-          <p:cNvPr id="11" name="Shape 9"/>
-          <p:cNvSpPr/>
-          <p:nvPr/>
-        </p:nvSpPr>
-        <p:spPr>
-          <a:xfrm>
-            <a:off x="1773936" y="3858768"/>
+          <p:cNvPr id="20" name="Shape 18"/>
+          <p:cNvSpPr/>
+          <p:nvPr/>
+        </p:nvSpPr>
+        <p:spPr>
+          <a:xfrm>
+            <a:off x="1773936" y="4059936"/>
             <a:ext cx="987552" cy="914"/>
           </a:xfrm>
           <a:prstGeom prst="line">
             <a:avLst/>
           </a:prstGeom>
           <a:noFill/>
-          <a:ln w="25400">
+          <a:ln w="22225">
             <a:solidFill>
-              <a:srgbClr val="C4CFD6"/>
+              <a:srgbClr val="B9C2DC"/>
             </a:solidFill>
             <a:prstDash val="solid"/>
             <a:tailEnd type="triangle"/>
@@ -12664,22 +12985,22 @@
       </p:sp>
       <p:sp>
         <p:nvSpPr>
-          <p:cNvPr id="12" name="Shape 10"/>
+          <p:cNvPr id="21" name="Shape 19"/>
           <p:cNvSpPr/>
           <p:nvPr/>
         </p:nvSpPr>
         <p:spPr>
           <a:xfrm flipH="1" flipV="1">
-            <a:off x="2907792" y="2286000"/>
-            <a:ext cx="457200" cy="1024128"/>
+            <a:off x="2834640" y="2706624"/>
+            <a:ext cx="384048" cy="713232"/>
           </a:xfrm>
           <a:prstGeom prst="line">
             <a:avLst/>
           </a:prstGeom>
           <a:noFill/>
-          <a:ln w="25400">
+          <a:ln w="22225">
             <a:solidFill>
-              <a:srgbClr val="C4CFD6"/>
+              <a:srgbClr val="B9C2DC"/>
             </a:solidFill>
             <a:prstDash val="solid"/>
             <a:tailEnd type="triangle"/>
@@ -12688,26 +13009,26 @@
       </p:sp>
       <p:sp>
         <p:nvSpPr>
-          <p:cNvPr id="13" name="Text 11"/>
-          <p:cNvSpPr/>
-          <p:nvPr/>
-        </p:nvSpPr>
-        <p:spPr>
-          <a:xfrm>
-            <a:off x="1554480" y="2724912"/>
-            <a:ext cx="1426464" cy="768096"/>
+          <p:cNvPr id="22" name="Text 20"/>
+          <p:cNvSpPr/>
+          <p:nvPr/>
+        </p:nvSpPr>
+        <p:spPr>
+          <a:xfrm>
+            <a:off x="1536192" y="2999232"/>
+            <a:ext cx="1463040" cy="566928"/>
           </a:xfrm>
           <a:prstGeom prst="roundRect">
             <a:avLst>
-              <a:gd name="adj" fmla="val 9524"/>
+              <a:gd name="adj" fmla="val 9677"/>
             </a:avLst>
           </a:prstGeom>
           <a:solidFill>
-            <a:srgbClr val="E8F6F0"/>
-          </a:solidFill>
-          <a:ln w="15875">
+            <a:srgbClr val="EEF1FA"/>
+          </a:solidFill>
+          <a:ln w="12700">
             <a:solidFill>
-              <a:srgbClr val="02A878"/>
+              <a:srgbClr val="1428A0"/>
             </a:solidFill>
           </a:ln>
         </p:spPr>
@@ -12717,14 +13038,14 @@
           <a:p>
             <a:pPr algn="ctr" indent="0" marL="0">
               <a:lnSpc>
-                <a:spcPct val="105000"/>
+                <a:spcPct val="100000"/>
               </a:lnSpc>
               <a:buNone/>
             </a:pPr>
             <a:r>
-              <a:rPr lang="en-US" sz="1150" b="1" dirty="0">
-                <a:solidFill>
-                  <a:srgbClr val="17313B"/>
+              <a:rPr lang="en-US" sz="1000" b="1" dirty="0">
+                <a:solidFill>
+                  <a:srgbClr val="1A1A1A"/>
                 </a:solidFill>
                 <a:latin typeface="Malgun Gothic" pitchFamily="34" charset="0"/>
                 <a:ea typeface="Malgun Gothic" pitchFamily="34" charset="-122"/>
@@ -12732,19 +13053,19 @@
               </a:rPr>
               <a:t>고객 락인</a:t>
             </a:r>
-            <a:endParaRPr lang="en-US" sz="1150" dirty="0"/>
+            <a:endParaRPr lang="en-US" sz="1000" dirty="0"/>
           </a:p>
           <a:p>
             <a:pPr algn="ctr" indent="0" marL="0">
               <a:lnSpc>
-                <a:spcPct val="105000"/>
+                <a:spcPct val="100000"/>
               </a:lnSpc>
               <a:buNone/>
             </a:pPr>
             <a:r>
-              <a:rPr lang="en-US" sz="1150" b="1" dirty="0">
-                <a:solidFill>
-                  <a:srgbClr val="17313B"/>
+              <a:rPr lang="en-US" sz="1000" b="1" dirty="0">
+                <a:solidFill>
+                  <a:srgbClr val="1A1A1A"/>
                 </a:solidFill>
                 <a:latin typeface="Malgun Gothic" pitchFamily="34" charset="0"/>
                 <a:ea typeface="Malgun Gothic" pitchFamily="34" charset="-122"/>
@@ -12752,56 +13073,230 @@
               </a:rPr>
               <a:t>다운턴 방어</a:t>
             </a:r>
-            <a:endParaRPr lang="en-US" sz="1150" dirty="0"/>
-          </a:p>
-        </p:txBody>
-      </p:sp>
-      <p:sp>
-        <p:nvSpPr>
-          <p:cNvPr id="14" name="Text 12"/>
-          <p:cNvSpPr/>
-          <p:nvPr/>
-        </p:nvSpPr>
-        <p:spPr>
-          <a:xfrm>
-            <a:off x="457200" y="4754880"/>
-            <a:ext cx="3785616" cy="1371600"/>
-          </a:xfrm>
-          <a:prstGeom prst="roundRect">
-            <a:avLst>
-              <a:gd name="adj" fmla="val 5333"/>
-            </a:avLst>
-          </a:prstGeom>
-          <a:solidFill>
-            <a:srgbClr val="F5F7F8"/>
-          </a:solidFill>
-          <a:ln/>
-        </p:spPr>
-        <p:txBody>
-          <a:bodyPr wrap="square" lIns="1524" tIns="1524" rIns="1524" bIns="1524" rtlCol="0" anchor="ctr"/>
-          <a:lstStyle/>
-          <a:p>
-            <a:pPr algn="l" indent="0" marL="0">
+            <a:endParaRPr lang="en-US" sz="1000" dirty="0"/>
+          </a:p>
+        </p:txBody>
+      </p:sp>
+      <p:sp>
+        <p:nvSpPr>
+          <p:cNvPr id="23" name="Text 21"/>
+          <p:cNvSpPr/>
+          <p:nvPr/>
+        </p:nvSpPr>
+        <p:spPr>
+          <a:xfrm>
+            <a:off x="658368" y="4572000"/>
+            <a:ext cx="3200400" cy="777240"/>
+          </a:xfrm>
+          <a:prstGeom prst="rect">
+            <a:avLst/>
+          </a:prstGeom>
+          <a:noFill/>
+          <a:ln/>
+        </p:spPr>
+        <p:txBody>
+          <a:bodyPr wrap="square" lIns="0" tIns="0" rIns="0" bIns="0" rtlCol="0" anchor="t"/>
+          <a:lstStyle/>
+          <a:p>
+            <a:pPr indent="0" marL="0">
               <a:lnSpc>
                 <a:spcPct val="115000"/>
               </a:lnSpc>
               <a:buNone/>
             </a:pPr>
             <a:r>
-              <a:rPr lang="en-US" sz="1250" b="1" dirty="0">
-                <a:solidFill>
-                  <a:srgbClr val="17313B"/>
-                </a:solidFill>
-                <a:latin typeface="Malgun Gothic" pitchFamily="34" charset="0"/>
-                <a:ea typeface="Malgun Gothic" pitchFamily="34" charset="-122"/>
-                <a:cs typeface="Malgun Gothic" pitchFamily="34" charset="-120"/>
-              </a:rPr>
-              <a:t>락인 플라이휠</a:t>
-            </a:r>
-            <a:endParaRPr lang="en-US" sz="1250" dirty="0"/>
-          </a:p>
-          <a:p>
-            <a:pPr algn="l" indent="0" marL="0">
+              <a:rPr lang="en-US" sz="1050" dirty="0">
+                <a:solidFill>
+                  <a:srgbClr val="555555"/>
+                </a:solidFill>
+                <a:latin typeface="Malgun Gothic" pitchFamily="34" charset="0"/>
+                <a:ea typeface="Malgun Gothic" pitchFamily="34" charset="-122"/>
+                <a:cs typeface="Malgun Gothic" pitchFamily="34" charset="-120"/>
+              </a:rPr>
+              <a:t>워크로드가 들어올수록 최적화가 깊어지고 전환비용이 커진다. 계약이 끝나도 갈아타기 어려운 관계가 다운턴의 방어벽이 된다</a:t>
+            </a:r>
+            <a:endParaRPr lang="en-US" sz="1050" dirty="0"/>
+          </a:p>
+        </p:txBody>
+      </p:sp>
+      <p:sp>
+        <p:nvSpPr>
+          <p:cNvPr id="24" name="Shape 22"/>
+          <p:cNvSpPr/>
+          <p:nvPr/>
+        </p:nvSpPr>
+        <p:spPr>
+          <a:xfrm>
+            <a:off x="658368" y="5431536"/>
+            <a:ext cx="3200400" cy="0"/>
+          </a:xfrm>
+          <a:prstGeom prst="line">
+            <a:avLst/>
+          </a:prstGeom>
+          <a:noFill/>
+          <a:ln w="9525">
+            <a:solidFill>
+              <a:srgbClr val="D9D9D9"/>
+            </a:solidFill>
+            <a:prstDash val="solid"/>
+          </a:ln>
+        </p:spPr>
+      </p:sp>
+      <p:sp>
+        <p:nvSpPr>
+          <p:cNvPr id="25" name="Text 23"/>
+          <p:cNvSpPr/>
+          <p:nvPr/>
+        </p:nvSpPr>
+        <p:spPr>
+          <a:xfrm>
+            <a:off x="658368" y="5522976"/>
+            <a:ext cx="3246120" cy="658368"/>
+          </a:xfrm>
+          <a:prstGeom prst="rect">
+            <a:avLst/>
+          </a:prstGeom>
+          <a:noFill/>
+          <a:ln/>
+        </p:spPr>
+        <p:txBody>
+          <a:bodyPr wrap="square" lIns="0" tIns="0" rIns="0" bIns="0" rtlCol="0" anchor="t"/>
+          <a:lstStyle/>
+          <a:p>
+            <a:pPr indent="0" marL="0">
+              <a:lnSpc>
+                <a:spcPct val="125000"/>
+              </a:lnSpc>
+              <a:buNone/>
+            </a:pPr>
+            <a:r>
+              <a:rPr lang="en-US" sz="950" b="1" dirty="0">
+                <a:solidFill>
+                  <a:srgbClr val="1428A0"/>
+                </a:solidFill>
+                <a:latin typeface="Malgun Gothic" pitchFamily="34" charset="0"/>
+                <a:ea typeface="Malgun Gothic" pitchFamily="34" charset="-122"/>
+                <a:cs typeface="Malgun Gothic" pitchFamily="34" charset="-120"/>
+              </a:rPr>
+              <a:t>SCA</a:t>
+            </a:r>
+            <a:pPr indent="0" marL="0">
+              <a:lnSpc>
+                <a:spcPct val="125000"/>
+              </a:lnSpc>
+              <a:buNone/>
+            </a:pPr>
+            <a:r>
+              <a:rPr lang="en-US" sz="950" dirty="0">
+                <a:solidFill>
+                  <a:srgbClr val="555555"/>
+                </a:solidFill>
+                <a:latin typeface="Malgun Gothic" pitchFamily="34" charset="0"/>
+                <a:ea typeface="Malgun Gothic" pitchFamily="34" charset="-122"/>
+                <a:cs typeface="Malgun Gothic" pitchFamily="34" charset="-120"/>
+              </a:rPr>
+              <a:t> Strategic Customer Agreement · 전략적 고객 계약</a:t>
+            </a:r>
+            <a:endParaRPr lang="en-US" sz="950" dirty="0"/>
+          </a:p>
+          <a:p>
+            <a:pPr indent="0" marL="0">
+              <a:lnSpc>
+                <a:spcPct val="125000"/>
+              </a:lnSpc>
+              <a:buNone/>
+            </a:pPr>
+            <a:r>
+              <a:rPr lang="en-US" sz="950" b="1" dirty="0">
+                <a:solidFill>
+                  <a:srgbClr val="1428A0"/>
+                </a:solidFill>
+                <a:latin typeface="Malgun Gothic" pitchFamily="34" charset="0"/>
+                <a:ea typeface="Malgun Gothic" pitchFamily="34" charset="-122"/>
+                <a:cs typeface="Malgun Gothic" pitchFamily="34" charset="-120"/>
+              </a:rPr>
+              <a:t>FDP</a:t>
+            </a:r>
+            <a:pPr indent="0" marL="0">
+              <a:lnSpc>
+                <a:spcPct val="125000"/>
+              </a:lnSpc>
+              <a:buNone/>
+            </a:pPr>
+            <a:r>
+              <a:rPr lang="en-US" sz="950" dirty="0">
+                <a:solidFill>
+                  <a:srgbClr val="555555"/>
+                </a:solidFill>
+                <a:latin typeface="Malgun Gothic" pitchFamily="34" charset="0"/>
+                <a:ea typeface="Malgun Gothic" pitchFamily="34" charset="-122"/>
+                <a:cs typeface="Malgun Gothic" pitchFamily="34" charset="-120"/>
+              </a:rPr>
+              <a:t> Flexible Data Placement · NVMe 데이터 배치 표준</a:t>
+            </a:r>
+            <a:endParaRPr lang="en-US" sz="950" dirty="0"/>
+          </a:p>
+          <a:p>
+            <a:pPr indent="0" marL="0">
+              <a:lnSpc>
+                <a:spcPct val="125000"/>
+              </a:lnSpc>
+              <a:buNone/>
+            </a:pPr>
+            <a:r>
+              <a:rPr lang="en-US" sz="950" b="1" dirty="0">
+                <a:solidFill>
+                  <a:srgbClr val="1428A0"/>
+                </a:solidFill>
+                <a:latin typeface="Malgun Gothic" pitchFamily="34" charset="0"/>
+                <a:ea typeface="Malgun Gothic" pitchFamily="34" charset="-122"/>
+                <a:cs typeface="Malgun Gothic" pitchFamily="34" charset="-120"/>
+              </a:rPr>
+              <a:t>FDE</a:t>
+            </a:r>
+            <a:pPr indent="0" marL="0">
+              <a:lnSpc>
+                <a:spcPct val="125000"/>
+              </a:lnSpc>
+              <a:buNone/>
+            </a:pPr>
+            <a:r>
+              <a:rPr lang="en-US" sz="950" dirty="0">
+                <a:solidFill>
+                  <a:srgbClr val="555555"/>
+                </a:solidFill>
+                <a:latin typeface="Malgun Gothic" pitchFamily="34" charset="0"/>
+                <a:ea typeface="Malgun Gothic" pitchFamily="34" charset="-122"/>
+                <a:cs typeface="Malgun Gothic" pitchFamily="34" charset="-120"/>
+              </a:rPr>
+              <a:t> Forward Deployed Engineer · 고객 상주 엔지니어</a:t>
+            </a:r>
+            <a:endParaRPr lang="en-US" sz="950" dirty="0"/>
+          </a:p>
+        </p:txBody>
+      </p:sp>
+      <p:sp>
+        <p:nvSpPr>
+          <p:cNvPr id="26" name="Text 24"/>
+          <p:cNvSpPr/>
+          <p:nvPr/>
+        </p:nvSpPr>
+        <p:spPr>
+          <a:xfrm>
+            <a:off x="4498848" y="1792224"/>
+            <a:ext cx="3200400" cy="1097280"/>
+          </a:xfrm>
+          <a:prstGeom prst="rect">
+            <a:avLst/>
+          </a:prstGeom>
+          <a:noFill/>
+          <a:ln/>
+        </p:spPr>
+        <p:txBody>
+          <a:bodyPr wrap="square" lIns="0" tIns="0" rIns="0" bIns="0" rtlCol="0" anchor="t"/>
+          <a:lstStyle/>
+          <a:p>
+            <a:pPr indent="0" marL="0">
               <a:lnSpc>
                 <a:spcPct val="115000"/>
               </a:lnSpc>
@@ -12810,135 +13305,94 @@
             <a:r>
               <a:rPr lang="en-US" sz="1050" dirty="0">
                 <a:solidFill>
-                  <a:srgbClr val="5A7184"/>
-                </a:solidFill>
-                <a:latin typeface="Malgun Gothic" pitchFamily="34" charset="0"/>
-                <a:ea typeface="Malgun Gothic" pitchFamily="34" charset="-122"/>
-                <a:cs typeface="Malgun Gothic" pitchFamily="34" charset="-120"/>
-              </a:rPr>
-              <a:t>워크로드 유입 → 최적화 심화 → 전환비용 증가. 계약이 끝나도 갈아타기 어려운 관계가 다운턴의 방어벽이 된다</a:t>
-            </a:r>
-            <a:endParaRPr lang="en-US" sz="1250" dirty="0"/>
-          </a:p>
-        </p:txBody>
-      </p:sp>
-      <p:sp>
-        <p:nvSpPr>
-          <p:cNvPr id="15" name="Shape 13"/>
-          <p:cNvSpPr/>
-          <p:nvPr/>
-        </p:nvSpPr>
-        <p:spPr>
-          <a:xfrm>
-            <a:off x="4434840" y="1207008"/>
-            <a:ext cx="7296912" cy="1645920"/>
+                  <a:srgbClr val="1A1A1A"/>
+                </a:solidFill>
+                <a:latin typeface="Malgun Gothic" pitchFamily="34" charset="0"/>
+                <a:ea typeface="Malgun Gothic" pitchFamily="34" charset="-122"/>
+                <a:cs typeface="Malgun Gothic" pitchFamily="34" charset="-120"/>
+              </a:rPr>
+              <a:t>공급부족 협상력의 창이 열려 있을 때 워크로드 교환을 제안한다: 고객이 워크로드를 공유하면 그 워크로드에 최적화한 FDP SSD를 공급. 성능·수명 개선과 TCO 절감으로 거절하기 어려운 딜</a:t>
+            </a:r>
+            <a:endParaRPr lang="en-US" sz="1050" dirty="0"/>
+          </a:p>
+        </p:txBody>
+      </p:sp>
+      <p:sp>
+        <p:nvSpPr>
+          <p:cNvPr id="27" name="Text 25"/>
+          <p:cNvSpPr/>
+          <p:nvPr/>
+        </p:nvSpPr>
+        <p:spPr>
+          <a:xfrm>
+            <a:off x="4498848" y="2926080"/>
+            <a:ext cx="3200400" cy="274320"/>
+          </a:xfrm>
+          <a:prstGeom prst="rect">
+            <a:avLst/>
+          </a:prstGeom>
+          <a:noFill/>
+          <a:ln/>
+        </p:spPr>
+        <p:txBody>
+          <a:bodyPr wrap="square" lIns="0" tIns="0" rIns="0" bIns="0" rtlCol="0" anchor="ctr"/>
+          <a:lstStyle/>
+          <a:p>
+            <a:pPr indent="0" marL="0">
+              <a:buNone/>
+            </a:pPr>
+            <a:r>
+              <a:rPr lang="en-US" sz="950" dirty="0">
+                <a:solidFill>
+                  <a:srgbClr val="555555"/>
+                </a:solidFill>
+                <a:latin typeface="Malgun Gothic" pitchFamily="34" charset="0"/>
+                <a:ea typeface="Malgun Gothic" pitchFamily="34" charset="-122"/>
+                <a:cs typeface="Malgun Gothic" pitchFamily="34" charset="-120"/>
+              </a:rPr>
+              <a:t>대상: 하이퍼스케일러 · Pure Storage · VAST Data · DDN</a:t>
+            </a:r>
+            <a:endParaRPr lang="en-US" sz="950" dirty="0"/>
+          </a:p>
+        </p:txBody>
+      </p:sp>
+      <p:sp>
+        <p:nvSpPr>
+          <p:cNvPr id="28" name="Shape 26"/>
+          <p:cNvSpPr/>
+          <p:nvPr/>
+        </p:nvSpPr>
+        <p:spPr>
+          <a:xfrm>
+            <a:off x="4480560" y="3291840"/>
+            <a:ext cx="3236976" cy="2798064"/>
           </a:xfrm>
           <a:prstGeom prst="roundRect">
             <a:avLst>
-              <a:gd name="adj" fmla="val 5000"/>
+              <a:gd name="adj" fmla="val 2288"/>
             </a:avLst>
           </a:prstGeom>
           <a:solidFill>
-            <a:srgbClr val="F5F7F8"/>
-          </a:solidFill>
-          <a:ln/>
-        </p:spPr>
-      </p:sp>
-      <p:sp>
-        <p:nvSpPr>
-          <p:cNvPr id="16" name="Text 14"/>
-          <p:cNvSpPr/>
-          <p:nvPr/>
-        </p:nvSpPr>
-        <p:spPr>
-          <a:xfrm>
-            <a:off x="4599432" y="1353312"/>
-            <a:ext cx="329184" cy="329184"/>
-          </a:xfrm>
-          <a:prstGeom prst="ellipse">
-            <a:avLst/>
-          </a:prstGeom>
-          <a:solidFill>
-            <a:srgbClr val="17313B"/>
-          </a:solidFill>
-          <a:ln/>
-        </p:spPr>
-        <p:txBody>
-          <a:bodyPr wrap="square" lIns="0" tIns="0" rIns="0" bIns="0" rtlCol="0" anchor="ctr"/>
-          <a:lstStyle/>
-          <a:p>
-            <a:pPr algn="ctr" indent="0" marL="0">
-              <a:buNone/>
-            </a:pPr>
-            <a:r>
-              <a:rPr lang="en-US" sz="1500" b="1" dirty="0">
-                <a:solidFill>
-                  <a:srgbClr val="FFFFFF"/>
-                </a:solidFill>
-                <a:latin typeface="Malgun Gothic" pitchFamily="34" charset="0"/>
-                <a:ea typeface="Malgun Gothic" pitchFamily="34" charset="-122"/>
-                <a:cs typeface="Malgun Gothic" pitchFamily="34" charset="-120"/>
-              </a:rPr>
-              <a:t>1</a:t>
-            </a:r>
-            <a:endParaRPr lang="en-US" sz="1500" dirty="0"/>
-          </a:p>
-        </p:txBody>
-      </p:sp>
-      <p:sp>
-        <p:nvSpPr>
-          <p:cNvPr id="17" name="Shape 15"/>
-          <p:cNvSpPr/>
-          <p:nvPr/>
-        </p:nvSpPr>
-        <p:spPr>
-          <a:xfrm>
-            <a:off x="5020056" y="1325880"/>
-            <a:ext cx="384048" cy="384048"/>
-          </a:xfrm>
-          <a:prstGeom prst="ellipse">
-            <a:avLst/>
-          </a:prstGeom>
-          <a:solidFill>
-            <a:srgbClr val="028090"/>
-          </a:solidFill>
-          <a:ln/>
-        </p:spPr>
-      </p:sp>
-      <p:pic>
-        <p:nvPicPr>
-          <p:cNvPr id="18" name="Image 0" descr="preencoded.png">    </p:cNvPr>
-          <p:cNvPicPr>
-            <a:picLocks noChangeAspect="1"/>
-          </p:cNvPicPr>
-          <p:nvPr/>
-        </p:nvPicPr>
-        <p:blipFill>
-          <a:blip r:embed="rId1"/>
-          <a:stretch>
-            <a:fillRect/>
-          </a:stretch>
-        </p:blipFill>
-        <p:spPr>
-          <a:xfrm>
-            <a:off x="5112228" y="1418052"/>
-            <a:ext cx="199705" cy="199705"/>
-          </a:xfrm>
-          <a:prstGeom prst="rect">
-            <a:avLst/>
-          </a:prstGeom>
-        </p:spPr>
-      </p:pic>
-      <p:sp>
-        <p:nvSpPr>
-          <p:cNvPr id="19" name="Text 16"/>
-          <p:cNvSpPr/>
-          <p:nvPr/>
-        </p:nvSpPr>
-        <p:spPr>
-          <a:xfrm>
-            <a:off x="5532120" y="1335024"/>
-            <a:ext cx="6035040" cy="365760"/>
+            <a:srgbClr val="EEF1FA"/>
+          </a:solidFill>
+          <a:ln w="15875">
+            <a:solidFill>
+              <a:srgbClr val="1428A0"/>
+            </a:solidFill>
+            <a:prstDash val="solid"/>
+          </a:ln>
+        </p:spPr>
+      </p:sp>
+      <p:sp>
+        <p:nvSpPr>
+          <p:cNvPr id="29" name="Text 27"/>
+          <p:cNvSpPr/>
+          <p:nvPr/>
+        </p:nvSpPr>
+        <p:spPr>
+          <a:xfrm>
+            <a:off x="4645152" y="3419856"/>
+            <a:ext cx="3017520" cy="274320"/>
           </a:xfrm>
           <a:prstGeom prst="rect">
             <a:avLst/>
@@ -12954,30 +13408,30 @@
               <a:buNone/>
             </a:pPr>
             <a:r>
-              <a:rPr lang="en-US" sz="1400" b="1" dirty="0">
-                <a:solidFill>
-                  <a:srgbClr val="17313B"/>
-                </a:solidFill>
-                <a:latin typeface="Malgun Gothic" pitchFamily="34" charset="0"/>
-                <a:ea typeface="Malgun Gothic" pitchFamily="34" charset="-122"/>
-                <a:cs typeface="Malgun Gothic" pitchFamily="34" charset="-120"/>
-              </a:rPr>
-              <a:t>협상력의 창이 열려 있을 때 워크로드 교환을 제안한다</a:t>
-            </a:r>
-            <a:endParaRPr lang="en-US" sz="1400" dirty="0"/>
-          </a:p>
-        </p:txBody>
-      </p:sp>
-      <p:sp>
-        <p:nvSpPr>
-          <p:cNvPr id="20" name="Text 17"/>
-          <p:cNvSpPr/>
-          <p:nvPr/>
-        </p:nvSpPr>
-        <p:spPr>
-          <a:xfrm>
-            <a:off x="4645152" y="1755648"/>
-            <a:ext cx="6903720" cy="1024128"/>
+              <a:rPr lang="en-US" sz="1150" b="1" dirty="0">
+                <a:solidFill>
+                  <a:srgbClr val="1428A0"/>
+                </a:solidFill>
+                <a:latin typeface="Malgun Gothic" pitchFamily="34" charset="0"/>
+                <a:ea typeface="Malgun Gothic" pitchFamily="34" charset="-122"/>
+                <a:cs typeface="Malgun Gothic" pitchFamily="34" charset="-120"/>
+              </a:rPr>
+              <a:t>선례: Micron ↔ Anthropic (’26.06)</a:t>
+            </a:r>
+            <a:endParaRPr lang="en-US" sz="1150" dirty="0"/>
+          </a:p>
+        </p:txBody>
+      </p:sp>
+      <p:sp>
+        <p:nvSpPr>
+          <p:cNvPr id="30" name="Text 28"/>
+          <p:cNvSpPr/>
+          <p:nvPr/>
+        </p:nvSpPr>
+        <p:spPr>
+          <a:xfrm>
+            <a:off x="4700016" y="3730752"/>
+            <a:ext cx="2962656" cy="1188720"/>
           </a:xfrm>
           <a:prstGeom prst="rect">
             <a:avLst/>
@@ -13000,17 +13454,17 @@
               <a:buChar char="•"/>
             </a:pPr>
             <a:r>
-              <a:rPr lang="en-US" sz="1050" dirty="0">
-                <a:solidFill>
-                  <a:srgbClr val="17313B"/>
-                </a:solidFill>
-                <a:latin typeface="Malgun Gothic" pitchFamily="34" charset="0"/>
-                <a:ea typeface="Malgun Gothic" pitchFamily="34" charset="-122"/>
-                <a:cs typeface="Malgun Gothic" pitchFamily="34" charset="-120"/>
-              </a:rPr>
-              <a:t>대상: 하이퍼스케일러 + 스토리지 박스 업체(Pure Storage·VAST Data·DDN)</a:t>
-            </a:r>
-            <a:endParaRPr lang="en-US" sz="1050" dirty="0"/>
+              <a:rPr lang="en-US" sz="1000" dirty="0">
+                <a:solidFill>
+                  <a:srgbClr val="1A1A1A"/>
+                </a:solidFill>
+                <a:latin typeface="Malgun Gothic" pitchFamily="34" charset="0"/>
+                <a:ea typeface="Malgun Gothic" pitchFamily="34" charset="-122"/>
+                <a:cs typeface="Malgun Gothic" pitchFamily="34" charset="-120"/>
+              </a:rPr>
+              <a:t>다년 공급 (HBM·DRAM·SSD 전 포트폴리오)</a:t>
+            </a:r>
+            <a:endParaRPr lang="en-US" sz="1000" dirty="0"/>
           </a:p>
           <a:p>
             <a:pPr marL="342900" indent="-342900">
@@ -13024,17 +13478,17 @@
               <a:buChar char="•"/>
             </a:pPr>
             <a:r>
-              <a:rPr lang="en-US" sz="1050" dirty="0">
-                <a:solidFill>
-                  <a:srgbClr val="17313B"/>
-                </a:solidFill>
-                <a:latin typeface="Malgun Gothic" pitchFamily="34" charset="0"/>
-                <a:ea typeface="Malgun Gothic" pitchFamily="34" charset="-122"/>
-                <a:cs typeface="Malgun Gothic" pitchFamily="34" charset="-120"/>
-              </a:rPr>
-              <a:t>딜 구조: 고객 워크로드 공유 ↔ 그 워크로드에 최적화한 FDP SSD 공급</a:t>
-            </a:r>
-            <a:endParaRPr lang="en-US" sz="1050" dirty="0"/>
+              <a:rPr lang="en-US" sz="1000" dirty="0">
+                <a:solidFill>
+                  <a:srgbClr val="1A1A1A"/>
+                </a:solidFill>
+                <a:latin typeface="Malgun Gothic" pitchFamily="34" charset="0"/>
+                <a:ea typeface="Malgun Gothic" pitchFamily="34" charset="-122"/>
+                <a:cs typeface="Malgun Gothic" pitchFamily="34" charset="-120"/>
+              </a:rPr>
+              <a:t>Claude 워크로드 공동 최적화</a:t>
+            </a:r>
+            <a:endParaRPr lang="en-US" sz="1000" dirty="0"/>
           </a:p>
           <a:p>
             <a:pPr marL="342900" indent="-342900">
@@ -13048,186 +13502,18 @@
               <a:buChar char="•"/>
             </a:pPr>
             <a:r>
-              <a:rPr lang="en-US" sz="1050" dirty="0">
-                <a:solidFill>
-                  <a:srgbClr val="17313B"/>
-                </a:solidFill>
-                <a:latin typeface="Malgun Gothic" pitchFamily="34" charset="0"/>
-                <a:ea typeface="Malgun Gothic" pitchFamily="34" charset="-122"/>
-                <a:cs typeface="Malgun Gothic" pitchFamily="34" charset="-120"/>
-              </a:rPr>
-              <a:t>고객 효익: 성능·수명 개선과 TCO 절감으로 거절하기 어려운 제안 (공급부족 국면 한정의 창)</a:t>
-            </a:r>
-            <a:endParaRPr lang="en-US" sz="1050" dirty="0"/>
-          </a:p>
-        </p:txBody>
-      </p:sp>
-      <p:sp>
-        <p:nvSpPr>
-          <p:cNvPr id="21" name="Shape 18"/>
-          <p:cNvSpPr/>
-          <p:nvPr/>
-        </p:nvSpPr>
-        <p:spPr>
-          <a:xfrm>
-            <a:off x="4434840" y="2980944"/>
-            <a:ext cx="7296912" cy="1645920"/>
-          </a:xfrm>
-          <a:prstGeom prst="roundRect">
-            <a:avLst>
-              <a:gd name="adj" fmla="val 5000"/>
-            </a:avLst>
-          </a:prstGeom>
-          <a:solidFill>
-            <a:srgbClr val="F5F7F8"/>
-          </a:solidFill>
-          <a:ln/>
-        </p:spPr>
-      </p:sp>
-      <p:sp>
-        <p:nvSpPr>
-          <p:cNvPr id="22" name="Text 19"/>
-          <p:cNvSpPr/>
-          <p:nvPr/>
-        </p:nvSpPr>
-        <p:spPr>
-          <a:xfrm>
-            <a:off x="4599432" y="3127248"/>
-            <a:ext cx="329184" cy="329184"/>
-          </a:xfrm>
-          <a:prstGeom prst="ellipse">
-            <a:avLst/>
-          </a:prstGeom>
-          <a:solidFill>
-            <a:srgbClr val="17313B"/>
-          </a:solidFill>
-          <a:ln/>
-        </p:spPr>
-        <p:txBody>
-          <a:bodyPr wrap="square" lIns="0" tIns="0" rIns="0" bIns="0" rtlCol="0" anchor="ctr"/>
-          <a:lstStyle/>
-          <a:p>
-            <a:pPr algn="ctr" indent="0" marL="0">
-              <a:buNone/>
-            </a:pPr>
-            <a:r>
-              <a:rPr lang="en-US" sz="1500" b="1" dirty="0">
-                <a:solidFill>
-                  <a:srgbClr val="FFFFFF"/>
-                </a:solidFill>
-                <a:latin typeface="Malgun Gothic" pitchFamily="34" charset="0"/>
-                <a:ea typeface="Malgun Gothic" pitchFamily="34" charset="-122"/>
-                <a:cs typeface="Malgun Gothic" pitchFamily="34" charset="-120"/>
-              </a:rPr>
-              <a:t>2</a:t>
-            </a:r>
-            <a:endParaRPr lang="en-US" sz="1500" dirty="0"/>
-          </a:p>
-        </p:txBody>
-      </p:sp>
-      <p:sp>
-        <p:nvSpPr>
-          <p:cNvPr id="23" name="Shape 20"/>
-          <p:cNvSpPr/>
-          <p:nvPr/>
-        </p:nvSpPr>
-        <p:spPr>
-          <a:xfrm>
-            <a:off x="5020056" y="3099816"/>
-            <a:ext cx="384048" cy="384048"/>
-          </a:xfrm>
-          <a:prstGeom prst="ellipse">
-            <a:avLst/>
-          </a:prstGeom>
-          <a:solidFill>
-            <a:srgbClr val="4C7C94"/>
-          </a:solidFill>
-          <a:ln/>
-        </p:spPr>
-      </p:sp>
-      <p:pic>
-        <p:nvPicPr>
-          <p:cNvPr id="24" name="Image 1" descr="preencoded.png">    </p:cNvPr>
-          <p:cNvPicPr>
-            <a:picLocks noChangeAspect="1"/>
-          </p:cNvPicPr>
-          <p:nvPr/>
-        </p:nvPicPr>
-        <p:blipFill>
-          <a:blip r:embed="rId2"/>
-          <a:stretch>
-            <a:fillRect/>
-          </a:stretch>
-        </p:blipFill>
-        <p:spPr>
-          <a:xfrm>
-            <a:off x="5112228" y="3191988"/>
-            <a:ext cx="199705" cy="199705"/>
-          </a:xfrm>
-          <a:prstGeom prst="rect">
-            <a:avLst/>
-          </a:prstGeom>
-        </p:spPr>
-      </p:pic>
-      <p:sp>
-        <p:nvSpPr>
-          <p:cNvPr id="25" name="Text 21"/>
-          <p:cNvSpPr/>
-          <p:nvPr/>
-        </p:nvSpPr>
-        <p:spPr>
-          <a:xfrm>
-            <a:off x="5532120" y="3108960"/>
-            <a:ext cx="6035040" cy="365760"/>
-          </a:xfrm>
-          <a:prstGeom prst="rect">
-            <a:avLst/>
-          </a:prstGeom>
-          <a:noFill/>
-          <a:ln/>
-        </p:spPr>
-        <p:txBody>
-          <a:bodyPr wrap="square" lIns="0" tIns="0" rIns="0" bIns="0" rtlCol="0" anchor="ctr"/>
-          <a:lstStyle/>
-          <a:p>
-            <a:pPr indent="0" marL="0">
-              <a:buNone/>
-            </a:pPr>
-            <a:r>
-              <a:rPr lang="en-US" sz="1400" b="1" dirty="0">
-                <a:solidFill>
-                  <a:srgbClr val="17313B"/>
-                </a:solidFill>
-                <a:latin typeface="Malgun Gothic" pitchFamily="34" charset="0"/>
-                <a:ea typeface="Malgun Gothic" pitchFamily="34" charset="-122"/>
-                <a:cs typeface="Malgun Gothic" pitchFamily="34" charset="-120"/>
-              </a:rPr>
-              <a:t>호스트를 이해하는 최적화 개발 역량을 채용·양성으로 확보한다</a:t>
-            </a:r>
-            <a:endParaRPr lang="en-US" sz="1400" dirty="0"/>
-          </a:p>
-        </p:txBody>
-      </p:sp>
-      <p:sp>
-        <p:nvSpPr>
-          <p:cNvPr id="26" name="Text 22"/>
-          <p:cNvSpPr/>
-          <p:nvPr/>
-        </p:nvSpPr>
-        <p:spPr>
-          <a:xfrm>
-            <a:off x="4645152" y="3529584"/>
-            <a:ext cx="6903720" cy="1024128"/>
-          </a:xfrm>
-          <a:prstGeom prst="rect">
-            <a:avLst/>
-          </a:prstGeom>
-          <a:noFill/>
-          <a:ln/>
-        </p:spPr>
-        <p:txBody>
-          <a:bodyPr wrap="square" lIns="0" tIns="0" rIns="0" bIns="0" rtlCol="0" anchor="t"/>
-          <a:lstStyle/>
+              <a:rPr lang="en-US" sz="1000" dirty="0">
+                <a:solidFill>
+                  <a:srgbClr val="1A1A1A"/>
+                </a:solidFill>
+                <a:latin typeface="Malgun Gothic" pitchFamily="34" charset="0"/>
+                <a:ea typeface="Malgun Gothic" pitchFamily="34" charset="-122"/>
+                <a:cs typeface="Malgun Gothic" pitchFamily="34" charset="-120"/>
+              </a:rPr>
+              <a:t>운영 통합 (Micron 전사에 Claude 배치)</a:t>
+            </a:r>
+            <a:endParaRPr lang="en-US" sz="1000" dirty="0"/>
+          </a:p>
           <a:p>
             <a:pPr marL="342900" indent="-342900">
               <a:lnSpc>
@@ -13240,39 +13526,138 @@
               <a:buChar char="•"/>
             </a:pPr>
             <a:r>
-              <a:rPr lang="en-US" sz="1050" dirty="0">
-                <a:solidFill>
-                  <a:srgbClr val="17313B"/>
-                </a:solidFill>
-                <a:latin typeface="Malgun Gothic" pitchFamily="34" charset="0"/>
-                <a:ea typeface="Malgun Gothic" pitchFamily="34" charset="-122"/>
-                <a:cs typeface="Malgun Gothic" pitchFamily="34" charset="-120"/>
-              </a:rPr>
-              <a:t>전문가 5종: ① 커널 블록계층·io_uring·NVMe ② SPDK 유저스페이스 ③ DB·캐시 내부(RocksDB·CacheLib·Ceph) ④ 성능·워크로드 분석(fio·eBPF·WAF) ⑤ FTL·미디어 모델(사내 강점 브리지)</a:t>
+              <a:rPr lang="en-US" sz="1000" dirty="0">
+                <a:solidFill>
+                  <a:srgbClr val="1A1A1A"/>
+                </a:solidFill>
+                <a:latin typeface="Malgun Gothic" pitchFamily="34" charset="0"/>
+                <a:ea typeface="Malgun Gothic" pitchFamily="34" charset="-122"/>
+                <a:cs typeface="Malgun Gothic" pitchFamily="34" charset="-120"/>
+              </a:rPr>
+              <a:t>자본 연계 (Series H 전략 투자)</a:t>
+            </a:r>
+            <a:endParaRPr lang="en-US" sz="1000" dirty="0"/>
+          </a:p>
+        </p:txBody>
+      </p:sp>
+      <p:sp>
+        <p:nvSpPr>
+          <p:cNvPr id="31" name="Text 29"/>
+          <p:cNvSpPr/>
+          <p:nvPr/>
+        </p:nvSpPr>
+        <p:spPr>
+          <a:xfrm>
+            <a:off x="4645152" y="5029200"/>
+            <a:ext cx="2962656" cy="457200"/>
+          </a:xfrm>
+          <a:prstGeom prst="rect">
+            <a:avLst/>
+          </a:prstGeom>
+          <a:noFill/>
+          <a:ln/>
+        </p:spPr>
+        <p:txBody>
+          <a:bodyPr wrap="square" lIns="0" tIns="0" rIns="0" bIns="0" rtlCol="0" anchor="ctr"/>
+          <a:lstStyle/>
+          <a:p>
+            <a:pPr indent="0" marL="0">
+              <a:lnSpc>
+                <a:spcPct val="110000"/>
+              </a:lnSpc>
+              <a:buNone/>
+            </a:pPr>
+            <a:r>
+              <a:rPr lang="en-US" sz="1050" b="1" dirty="0">
+                <a:solidFill>
+                  <a:srgbClr val="1A1A1A"/>
+                </a:solidFill>
+                <a:latin typeface="Malgun Gothic" pitchFamily="34" charset="0"/>
+                <a:ea typeface="Malgun Gothic" pitchFamily="34" charset="-122"/>
+                <a:cs typeface="Malgun Gothic" pitchFamily="34" charset="-120"/>
+              </a:rPr>
+              <a:t>전략적 고객 계약 16건 · 최소 매출 $100B · 예치금 $22B</a:t>
             </a:r>
             <a:endParaRPr lang="en-US" sz="1050" dirty="0"/>
           </a:p>
-          <a:p>
-            <a:pPr marL="342900" indent="-342900">
+        </p:txBody>
+      </p:sp>
+      <p:sp>
+        <p:nvSpPr>
+          <p:cNvPr id="32" name="Text 30"/>
+          <p:cNvSpPr/>
+          <p:nvPr/>
+        </p:nvSpPr>
+        <p:spPr>
+          <a:xfrm>
+            <a:off x="4645152" y="5541264"/>
+            <a:ext cx="2999232" cy="475488"/>
+          </a:xfrm>
+          <a:prstGeom prst="rect">
+            <a:avLst/>
+          </a:prstGeom>
+          <a:noFill/>
+          <a:ln/>
+        </p:spPr>
+        <p:txBody>
+          <a:bodyPr wrap="square" lIns="0" tIns="0" rIns="0" bIns="0" rtlCol="0" anchor="ctr"/>
+          <a:lstStyle/>
+          <a:p>
+            <a:pPr indent="0" marL="0">
               <a:lnSpc>
-                <a:spcPct val="108000"/>
+                <a:spcPct val="112000"/>
               </a:lnSpc>
-              <a:spcAft>
-                <a:spcPts val="400"/>
-              </a:spcAft>
-              <a:buSzPct val="100000"/>
-              <a:buChar char="•"/>
-            </a:pPr>
-            <a:r>
-              <a:rPr lang="en-US" sz="1050" dirty="0">
-                <a:solidFill>
-                  <a:srgbClr val="17313B"/>
-                </a:solidFill>
-                <a:latin typeface="Malgun Gothic" pitchFamily="34" charset="0"/>
-                <a:ea typeface="Malgun Gothic" pitchFamily="34" charset="-122"/>
-                <a:cs typeface="Malgun Gothic" pitchFamily="34" charset="-120"/>
-              </a:rPr>
-              <a:t>확보: 오픈소스 커미터·하이퍼스케일러 스토리지팀 출신 채용 + 사내 FW 인력의 호스트 SW 전환 트랙(오픈소스 기여를 평가에 반영)</a:t>
+              <a:buNone/>
+            </a:pPr>
+            <a:r>
+              <a:rPr lang="en-US" sz="1000" i="1" dirty="0">
+                <a:solidFill>
+                  <a:srgbClr val="555555"/>
+                </a:solidFill>
+                <a:latin typeface="Malgun Gothic" pitchFamily="34" charset="0"/>
+                <a:ea typeface="Malgun Gothic" pitchFamily="34" charset="-122"/>
+                <a:cs typeface="Malgun Gothic" pitchFamily="34" charset="-120"/>
+              </a:rPr>
+              <a:t>워크로드를 열고 공급을 잠근 계약. 우리가 맺으려는 관계의 실물 견본이다</a:t>
+            </a:r>
+            <a:endParaRPr lang="en-US" sz="1000" dirty="0"/>
+          </a:p>
+        </p:txBody>
+      </p:sp>
+      <p:sp>
+        <p:nvSpPr>
+          <p:cNvPr id="33" name="Text 31"/>
+          <p:cNvSpPr/>
+          <p:nvPr/>
+        </p:nvSpPr>
+        <p:spPr>
+          <a:xfrm>
+            <a:off x="8330184" y="1773936"/>
+            <a:ext cx="3200400" cy="256032"/>
+          </a:xfrm>
+          <a:prstGeom prst="rect">
+            <a:avLst/>
+          </a:prstGeom>
+          <a:noFill/>
+          <a:ln/>
+        </p:spPr>
+        <p:txBody>
+          <a:bodyPr wrap="square" lIns="0" tIns="0" rIns="0" bIns="0" rtlCol="0" anchor="ctr"/>
+          <a:lstStyle/>
+          <a:p>
+            <a:pPr indent="0" marL="0">
+              <a:buNone/>
+            </a:pPr>
+            <a:r>
+              <a:rPr lang="en-US" sz="1050" b="1" dirty="0">
+                <a:solidFill>
+                  <a:srgbClr val="1428A0"/>
+                </a:solidFill>
+                <a:latin typeface="Malgun Gothic" pitchFamily="34" charset="0"/>
+                <a:ea typeface="Malgun Gothic" pitchFamily="34" charset="-122"/>
+                <a:cs typeface="Malgun Gothic" pitchFamily="34" charset="-120"/>
+              </a:rPr>
+              <a:t>추가로 필요한 기술 (기존 SSD 기술 대비)</a:t>
             </a:r>
             <a:endParaRPr lang="en-US" sz="1050" dirty="0"/>
           </a:p>
@@ -13280,54 +13665,154 @@
       </p:sp>
       <p:sp>
         <p:nvSpPr>
-          <p:cNvPr id="27" name="Shape 23"/>
-          <p:cNvSpPr/>
-          <p:nvPr/>
-        </p:nvSpPr>
-        <p:spPr>
-          <a:xfrm>
-            <a:off x="4434840" y="4754880"/>
-            <a:ext cx="7296912" cy="1645920"/>
+          <p:cNvPr id="34" name="Text 32"/>
+          <p:cNvSpPr/>
+          <p:nvPr/>
+        </p:nvSpPr>
+        <p:spPr>
+          <a:xfrm>
+            <a:off x="8330184" y="2066544"/>
+            <a:ext cx="3200400" cy="329184"/>
           </a:xfrm>
           <a:prstGeom prst="roundRect">
             <a:avLst>
-              <a:gd name="adj" fmla="val 5000"/>
+              <a:gd name="adj" fmla="val 13889"/>
             </a:avLst>
           </a:prstGeom>
           <a:solidFill>
-            <a:srgbClr val="F5F7F8"/>
-          </a:solidFill>
-          <a:ln/>
-        </p:spPr>
-      </p:sp>
-      <p:sp>
-        <p:nvSpPr>
-          <p:cNvPr id="28" name="Text 24"/>
-          <p:cNvSpPr/>
-          <p:nvPr/>
-        </p:nvSpPr>
-        <p:spPr>
-          <a:xfrm>
-            <a:off x="4599432" y="4901184"/>
-            <a:ext cx="329184" cy="329184"/>
-          </a:xfrm>
-          <a:prstGeom prst="ellipse">
-            <a:avLst/>
-          </a:prstGeom>
-          <a:solidFill>
-            <a:srgbClr val="17313B"/>
-          </a:solidFill>
-          <a:ln/>
-        </p:spPr>
-        <p:txBody>
-          <a:bodyPr wrap="square" lIns="0" tIns="0" rIns="0" bIns="0" rtlCol="0" anchor="ctr"/>
-          <a:lstStyle/>
-          <a:p>
-            <a:pPr algn="ctr" indent="0" marL="0">
-              <a:buNone/>
-            </a:pPr>
-            <a:r>
-              <a:rPr lang="en-US" sz="1500" b="1" dirty="0">
+            <a:srgbClr val="F4F4F6"/>
+          </a:solidFill>
+          <a:ln/>
+        </p:spPr>
+        <p:txBody>
+          <a:bodyPr wrap="square" lIns="1016" tIns="1016" rIns="1016" bIns="1016" rtlCol="0" anchor="ctr"/>
+          <a:lstStyle/>
+          <a:p>
+            <a:pPr indent="0" marL="0">
+              <a:buNone/>
+            </a:pPr>
+            <a:r>
+              <a:rPr lang="en-US" sz="950" b="1" dirty="0">
+                <a:solidFill>
+                  <a:srgbClr val="555555"/>
+                </a:solidFill>
+                <a:latin typeface="Malgun Gothic" pitchFamily="34" charset="0"/>
+                <a:ea typeface="Malgun Gothic" pitchFamily="34" charset="-122"/>
+                <a:cs typeface="Malgun Gothic" pitchFamily="34" charset="-120"/>
+              </a:rPr>
+              <a:t>기존  </a:t>
+            </a:r>
+            <a:pPr indent="0" marL="0">
+              <a:buNone/>
+            </a:pPr>
+            <a:r>
+              <a:rPr lang="en-US" sz="950" dirty="0">
+                <a:solidFill>
+                  <a:srgbClr val="555555"/>
+                </a:solidFill>
+                <a:latin typeface="Malgun Gothic" pitchFamily="34" charset="0"/>
+                <a:ea typeface="Malgun Gothic" pitchFamily="34" charset="-122"/>
+                <a:cs typeface="Malgun Gothic" pitchFamily="34" charset="-120"/>
+              </a:rPr>
+              <a:t>NAND · 컨트롤러 · 펌웨어 · 수율</a:t>
+            </a:r>
+            <a:endParaRPr lang="en-US" sz="950" dirty="0"/>
+          </a:p>
+        </p:txBody>
+      </p:sp>
+      <p:sp>
+        <p:nvSpPr>
+          <p:cNvPr id="35" name="Text 33"/>
+          <p:cNvSpPr/>
+          <p:nvPr/>
+        </p:nvSpPr>
+        <p:spPr>
+          <a:xfrm>
+            <a:off x="8330184" y="2450592"/>
+            <a:ext cx="3200400" cy="749808"/>
+          </a:xfrm>
+          <a:prstGeom prst="roundRect">
+            <a:avLst>
+              <a:gd name="adj" fmla="val 6098"/>
+            </a:avLst>
+          </a:prstGeom>
+          <a:solidFill>
+            <a:srgbClr val="EEF1FA"/>
+          </a:solidFill>
+          <a:ln/>
+        </p:spPr>
+        <p:txBody>
+          <a:bodyPr wrap="square" lIns="1016" tIns="1016" rIns="1016" bIns="1016" rtlCol="0" anchor="ctr"/>
+          <a:lstStyle/>
+          <a:p>
+            <a:pPr indent="0" marL="0">
+              <a:lnSpc>
+                <a:spcPct val="112000"/>
+              </a:lnSpc>
+              <a:buNone/>
+            </a:pPr>
+            <a:r>
+              <a:rPr lang="en-US" sz="950" b="1" dirty="0">
+                <a:solidFill>
+                  <a:srgbClr val="1428A0"/>
+                </a:solidFill>
+                <a:latin typeface="Malgun Gothic" pitchFamily="34" charset="0"/>
+                <a:ea typeface="Malgun Gothic" pitchFamily="34" charset="-122"/>
+                <a:cs typeface="Malgun Gothic" pitchFamily="34" charset="-120"/>
+              </a:rPr>
+              <a:t>추가  </a:t>
+            </a:r>
+            <a:pPr indent="0" marL="0">
+              <a:lnSpc>
+                <a:spcPct val="112000"/>
+              </a:lnSpc>
+              <a:buNone/>
+            </a:pPr>
+            <a:r>
+              <a:rPr lang="en-US" sz="950" dirty="0">
+                <a:solidFill>
+                  <a:srgbClr val="1A1A1A"/>
+                </a:solidFill>
+                <a:latin typeface="Malgun Gothic" pitchFamily="34" charset="0"/>
+                <a:ea typeface="Malgun Gothic" pitchFamily="34" charset="-122"/>
+                <a:cs typeface="Malgun Gothic" pitchFamily="34" charset="-120"/>
+              </a:rPr>
+              <a:t>커널 블록계층·io_uring·NVMe / SPDK / DB·캐시 내부 (RocksDB·CacheLib·Ceph) / 워크로드 분석 (fio·eBPF·WAF)</a:t>
+            </a:r>
+            <a:endParaRPr lang="en-US" sz="950" dirty="0"/>
+          </a:p>
+        </p:txBody>
+      </p:sp>
+      <p:sp>
+        <p:nvSpPr>
+          <p:cNvPr id="36" name="Text 34"/>
+          <p:cNvSpPr/>
+          <p:nvPr/>
+        </p:nvSpPr>
+        <p:spPr>
+          <a:xfrm>
+            <a:off x="8330184" y="3401568"/>
+            <a:ext cx="566928" cy="292608"/>
+          </a:xfrm>
+          <a:prstGeom prst="roundRect">
+            <a:avLst>
+              <a:gd name="adj" fmla="val 15625"/>
+            </a:avLst>
+          </a:prstGeom>
+          <a:solidFill>
+            <a:srgbClr val="1428A0"/>
+          </a:solidFill>
+          <a:ln/>
+        </p:spPr>
+        <p:txBody>
+          <a:bodyPr wrap="square" lIns="0" tIns="0" rIns="0" bIns="0" rtlCol="0" anchor="ctr"/>
+          <a:lstStyle/>
+          <a:p>
+            <a:pPr algn="ctr" indent="0" marL="0">
+              <a:buNone/>
+            </a:pPr>
+            <a:r>
+              <a:rPr lang="en-US" sz="1000" b="1" dirty="0">
                 <a:solidFill>
                   <a:srgbClr val="FFFFFF"/>
                 </a:solidFill>
@@ -13335,105 +13820,107 @@
                 <a:ea typeface="Malgun Gothic" pitchFamily="34" charset="-122"/>
                 <a:cs typeface="Malgun Gothic" pitchFamily="34" charset="-120"/>
               </a:rPr>
-              <a:t>3</a:t>
-            </a:r>
-            <a:endParaRPr lang="en-US" sz="1500" dirty="0"/>
-          </a:p>
-        </p:txBody>
-      </p:sp>
-      <p:sp>
-        <p:nvSpPr>
-          <p:cNvPr id="29" name="Shape 25"/>
-          <p:cNvSpPr/>
-          <p:nvPr/>
-        </p:nvSpPr>
-        <p:spPr>
-          <a:xfrm>
-            <a:off x="5020056" y="4873752"/>
-            <a:ext cx="384048" cy="384048"/>
-          </a:xfrm>
-          <a:prstGeom prst="ellipse">
-            <a:avLst/>
-          </a:prstGeom>
-          <a:solidFill>
-            <a:srgbClr val="02A878"/>
-          </a:solidFill>
-          <a:ln/>
-        </p:spPr>
-      </p:sp>
-      <p:pic>
-        <p:nvPicPr>
-          <p:cNvPr id="30" name="Image 2" descr="preencoded.png">    </p:cNvPr>
-          <p:cNvPicPr>
-            <a:picLocks noChangeAspect="1"/>
-          </p:cNvPicPr>
-          <p:nvPr/>
-        </p:nvPicPr>
-        <p:blipFill>
-          <a:blip r:embed="rId3"/>
-          <a:stretch>
-            <a:fillRect/>
-          </a:stretch>
-        </p:blipFill>
-        <p:spPr>
-          <a:xfrm>
-            <a:off x="5112228" y="4965924"/>
-            <a:ext cx="199705" cy="199705"/>
-          </a:xfrm>
-          <a:prstGeom prst="rect">
-            <a:avLst/>
-          </a:prstGeom>
-        </p:spPr>
-      </p:pic>
-      <p:sp>
-        <p:nvSpPr>
-          <p:cNvPr id="31" name="Text 26"/>
-          <p:cNvSpPr/>
-          <p:nvPr/>
-        </p:nvSpPr>
-        <p:spPr>
-          <a:xfrm>
-            <a:off x="5532120" y="4882896"/>
-            <a:ext cx="6035040" cy="365760"/>
-          </a:xfrm>
-          <a:prstGeom prst="rect">
-            <a:avLst/>
-          </a:prstGeom>
-          <a:noFill/>
-          <a:ln/>
-        </p:spPr>
-        <p:txBody>
-          <a:bodyPr wrap="square" lIns="0" tIns="0" rIns="0" bIns="0" rtlCol="0" anchor="ctr"/>
+              <a:t>채용</a:t>
+            </a:r>
+            <a:endParaRPr lang="en-US" sz="1000" dirty="0"/>
+          </a:p>
+        </p:txBody>
+      </p:sp>
+      <p:sp>
+        <p:nvSpPr>
+          <p:cNvPr id="37" name="Text 35"/>
+          <p:cNvSpPr/>
+          <p:nvPr/>
+        </p:nvSpPr>
+        <p:spPr>
+          <a:xfrm>
+            <a:off x="9006840" y="3383280"/>
+            <a:ext cx="2578608" cy="859536"/>
+          </a:xfrm>
+          <a:prstGeom prst="rect">
+            <a:avLst/>
+          </a:prstGeom>
+          <a:noFill/>
+          <a:ln/>
+        </p:spPr>
+        <p:txBody>
+          <a:bodyPr wrap="square" lIns="0" tIns="0" rIns="0" bIns="0" rtlCol="0" anchor="t"/>
           <a:lstStyle/>
           <a:p>
             <a:pPr indent="0" marL="0">
-              <a:buNone/>
-            </a:pPr>
-            <a:r>
-              <a:rPr lang="en-US" sz="1400" b="1" dirty="0">
-                <a:solidFill>
-                  <a:srgbClr val="17313B"/>
-                </a:solidFill>
-                <a:latin typeface="Malgun Gothic" pitchFamily="34" charset="0"/>
-                <a:ea typeface="Malgun Gothic" pitchFamily="34" charset="-122"/>
-                <a:cs typeface="Malgun Gothic" pitchFamily="34" charset="-120"/>
-              </a:rPr>
-              <a:t>FDE를 고객 옆에 두고 FDP 생태계에 함께 기여한다</a:t>
-            </a:r>
-            <a:endParaRPr lang="en-US" sz="1400" dirty="0"/>
-          </a:p>
-        </p:txBody>
-      </p:sp>
-      <p:sp>
-        <p:nvSpPr>
-          <p:cNvPr id="32" name="Text 27"/>
-          <p:cNvSpPr/>
-          <p:nvPr/>
-        </p:nvSpPr>
-        <p:spPr>
-          <a:xfrm>
-            <a:off x="4645152" y="5303520"/>
-            <a:ext cx="6903720" cy="1024128"/>
+              <a:lnSpc>
+                <a:spcPct val="112000"/>
+              </a:lnSpc>
+              <a:buNone/>
+            </a:pPr>
+            <a:r>
+              <a:rPr lang="en-US" sz="1000" dirty="0">
+                <a:solidFill>
+                  <a:srgbClr val="1A1A1A"/>
+                </a:solidFill>
+                <a:latin typeface="Malgun Gothic" pitchFamily="34" charset="0"/>
+                <a:ea typeface="Malgun Gothic" pitchFamily="34" charset="-122"/>
+                <a:cs typeface="Malgun Gothic" pitchFamily="34" charset="-120"/>
+              </a:rPr>
+              <a:t>실리콘밸리 현지 중심, 오픈소스 스토리지 기여자 우대, 영어 커뮤니케이션 필수</a:t>
+            </a:r>
+            <a:endParaRPr lang="en-US" sz="1000" dirty="0"/>
+          </a:p>
+        </p:txBody>
+      </p:sp>
+      <p:sp>
+        <p:nvSpPr>
+          <p:cNvPr id="38" name="Text 36"/>
+          <p:cNvSpPr/>
+          <p:nvPr/>
+        </p:nvSpPr>
+        <p:spPr>
+          <a:xfrm>
+            <a:off x="8330184" y="4315968"/>
+            <a:ext cx="566928" cy="292608"/>
+          </a:xfrm>
+          <a:prstGeom prst="roundRect">
+            <a:avLst>
+              <a:gd name="adj" fmla="val 15625"/>
+            </a:avLst>
+          </a:prstGeom>
+          <a:solidFill>
+            <a:srgbClr val="1428A0"/>
+          </a:solidFill>
+          <a:ln/>
+        </p:spPr>
+        <p:txBody>
+          <a:bodyPr wrap="square" lIns="0" tIns="0" rIns="0" bIns="0" rtlCol="0" anchor="ctr"/>
+          <a:lstStyle/>
+          <a:p>
+            <a:pPr algn="ctr" indent="0" marL="0">
+              <a:buNone/>
+            </a:pPr>
+            <a:r>
+              <a:rPr lang="en-US" sz="1000" b="1" dirty="0">
+                <a:solidFill>
+                  <a:srgbClr val="FFFFFF"/>
+                </a:solidFill>
+                <a:latin typeface="Malgun Gothic" pitchFamily="34" charset="0"/>
+                <a:ea typeface="Malgun Gothic" pitchFamily="34" charset="-122"/>
+                <a:cs typeface="Malgun Gothic" pitchFamily="34" charset="-120"/>
+              </a:rPr>
+              <a:t>양성</a:t>
+            </a:r>
+            <a:endParaRPr lang="en-US" sz="1000" dirty="0"/>
+          </a:p>
+        </p:txBody>
+      </p:sp>
+      <p:sp>
+        <p:nvSpPr>
+          <p:cNvPr id="39" name="Text 37"/>
+          <p:cNvSpPr/>
+          <p:nvPr/>
+        </p:nvSpPr>
+        <p:spPr>
+          <a:xfrm>
+            <a:off x="9006840" y="4297680"/>
+            <a:ext cx="2578608" cy="859536"/>
           </a:xfrm>
           <a:prstGeom prst="rect">
             <a:avLst/>
@@ -13445,76 +13932,109 @@
           <a:bodyPr wrap="square" lIns="0" tIns="0" rIns="0" bIns="0" rtlCol="0" anchor="t"/>
           <a:lstStyle/>
           <a:p>
-            <a:pPr marL="342900" indent="-342900">
+            <a:pPr indent="0" marL="0">
               <a:lnSpc>
-                <a:spcPct val="108000"/>
+                <a:spcPct val="112000"/>
               </a:lnSpc>
-              <a:spcAft>
-                <a:spcPts val="400"/>
-              </a:spcAft>
-              <a:buSzPct val="100000"/>
-              <a:buChar char="•"/>
-            </a:pPr>
-            <a:r>
-              <a:rPr lang="en-US" sz="1050" dirty="0">
-                <a:solidFill>
-                  <a:srgbClr val="17313B"/>
-                </a:solidFill>
-                <a:latin typeface="Malgun Gothic" pitchFamily="34" charset="0"/>
-                <a:ea typeface="Malgun Gothic" pitchFamily="34" charset="-122"/>
-                <a:cs typeface="Malgun Gothic" pitchFamily="34" charset="-120"/>
-              </a:rPr>
-              <a:t>채용: 실리콘밸리 현지 중심, 오픈소스 스토리지 기여자 우대, 영어 커뮤니케이션 필수</a:t>
-            </a:r>
-            <a:endParaRPr lang="en-US" sz="1050" dirty="0"/>
-          </a:p>
-          <a:p>
-            <a:pPr marL="342900" indent="-342900">
+              <a:buNone/>
+            </a:pPr>
+            <a:r>
+              <a:rPr lang="en-US" sz="1000" dirty="0">
+                <a:solidFill>
+                  <a:srgbClr val="1A1A1A"/>
+                </a:solidFill>
+                <a:latin typeface="Malgun Gothic" pitchFamily="34" charset="0"/>
+                <a:ea typeface="Malgun Gothic" pitchFamily="34" charset="-122"/>
+                <a:cs typeface="Malgun Gothic" pitchFamily="34" charset="-120"/>
+              </a:rPr>
+              <a:t>본사 엔지니어 미국 로테이션 6~12개월 + 현지 FDE 멘토 페어링, 사내 FW 인력의 호스트 SW 전환 트랙</a:t>
+            </a:r>
+            <a:endParaRPr lang="en-US" sz="1000" dirty="0"/>
+          </a:p>
+        </p:txBody>
+      </p:sp>
+      <p:sp>
+        <p:nvSpPr>
+          <p:cNvPr id="40" name="Text 38"/>
+          <p:cNvSpPr/>
+          <p:nvPr/>
+        </p:nvSpPr>
+        <p:spPr>
+          <a:xfrm>
+            <a:off x="8330184" y="5230368"/>
+            <a:ext cx="566928" cy="292608"/>
+          </a:xfrm>
+          <a:prstGeom prst="roundRect">
+            <a:avLst>
+              <a:gd name="adj" fmla="val 15625"/>
+            </a:avLst>
+          </a:prstGeom>
+          <a:solidFill>
+            <a:srgbClr val="1428A0"/>
+          </a:solidFill>
+          <a:ln/>
+        </p:spPr>
+        <p:txBody>
+          <a:bodyPr wrap="square" lIns="0" tIns="0" rIns="0" bIns="0" rtlCol="0" anchor="ctr"/>
+          <a:lstStyle/>
+          <a:p>
+            <a:pPr algn="ctr" indent="0" marL="0">
+              <a:buNone/>
+            </a:pPr>
+            <a:r>
+              <a:rPr lang="en-US" sz="1000" b="1" dirty="0">
+                <a:solidFill>
+                  <a:srgbClr val="FFFFFF"/>
+                </a:solidFill>
+                <a:latin typeface="Malgun Gothic" pitchFamily="34" charset="0"/>
+                <a:ea typeface="Malgun Gothic" pitchFamily="34" charset="-122"/>
+                <a:cs typeface="Malgun Gothic" pitchFamily="34" charset="-120"/>
+              </a:rPr>
+              <a:t>운영</a:t>
+            </a:r>
+            <a:endParaRPr lang="en-US" sz="1000" dirty="0"/>
+          </a:p>
+        </p:txBody>
+      </p:sp>
+      <p:sp>
+        <p:nvSpPr>
+          <p:cNvPr id="41" name="Text 39"/>
+          <p:cNvSpPr/>
+          <p:nvPr/>
+        </p:nvSpPr>
+        <p:spPr>
+          <a:xfrm>
+            <a:off x="9006840" y="5212080"/>
+            <a:ext cx="2578608" cy="859536"/>
+          </a:xfrm>
+          <a:prstGeom prst="rect">
+            <a:avLst/>
+          </a:prstGeom>
+          <a:noFill/>
+          <a:ln/>
+        </p:spPr>
+        <p:txBody>
+          <a:bodyPr wrap="square" lIns="0" tIns="0" rIns="0" bIns="0" rtlCol="0" anchor="t"/>
+          <a:lstStyle/>
+          <a:p>
+            <a:pPr indent="0" marL="0">
               <a:lnSpc>
-                <a:spcPct val="108000"/>
+                <a:spcPct val="112000"/>
               </a:lnSpc>
-              <a:spcAft>
-                <a:spcPts val="400"/>
-              </a:spcAft>
-              <a:buSzPct val="100000"/>
-              <a:buChar char="•"/>
-            </a:pPr>
-            <a:r>
-              <a:rPr lang="en-US" sz="1050" dirty="0">
-                <a:solidFill>
-                  <a:srgbClr val="17313B"/>
-                </a:solidFill>
-                <a:latin typeface="Malgun Gothic" pitchFamily="34" charset="0"/>
-                <a:ea typeface="Malgun Gothic" pitchFamily="34" charset="-122"/>
-                <a:cs typeface="Malgun Gothic" pitchFamily="34" charset="-120"/>
-              </a:rPr>
-              <a:t>양성: 본사 엔지니어 미국 로테이션(6~12개월) + 현지 FDE 멘토 페어링</a:t>
-            </a:r>
-            <a:endParaRPr lang="en-US" sz="1050" dirty="0"/>
-          </a:p>
-          <a:p>
-            <a:pPr marL="342900" indent="-342900">
-              <a:lnSpc>
-                <a:spcPct val="108000"/>
-              </a:lnSpc>
-              <a:spcAft>
-                <a:spcPts val="400"/>
-              </a:spcAft>
-              <a:buSzPct val="100000"/>
-              <a:buChar char="•"/>
-            </a:pPr>
-            <a:r>
-              <a:rPr lang="en-US" sz="1050" dirty="0">
-                <a:solidFill>
-                  <a:srgbClr val="17313B"/>
-                </a:solidFill>
-                <a:latin typeface="Malgun Gothic" pitchFamily="34" charset="0"/>
-                <a:ea typeface="Malgun Gothic" pitchFamily="34" charset="-122"/>
-                <a:cs typeface="Malgun Gothic" pitchFamily="34" charset="-120"/>
-              </a:rPr>
-              <a:t>운영: 파일럿 1~2사 상주(Pod 소속·dual-ladder), outcome 평가(FDP 활성화 용량), 커널·SPDK·CacheLib 업스트림 기여로 호명</a:t>
-            </a:r>
-            <a:endParaRPr lang="en-US" sz="1050" dirty="0"/>
+              <a:buNone/>
+            </a:pPr>
+            <a:r>
+              <a:rPr lang="en-US" sz="1000" dirty="0">
+                <a:solidFill>
+                  <a:srgbClr val="1A1A1A"/>
+                </a:solidFill>
+                <a:latin typeface="Malgun Gothic" pitchFamily="34" charset="0"/>
+                <a:ea typeface="Malgun Gothic" pitchFamily="34" charset="-122"/>
+                <a:cs typeface="Malgun Gothic" pitchFamily="34" charset="-120"/>
+              </a:rPr>
+              <a:t>파일럿 1~2사 상주 (Pod 소속·dual-ladder), 평가는 outcome (FDP 활성화 용량), 커널·SPDK·CacheLib 업스트림 기여</a:t>
+            </a:r>
+            <a:endParaRPr lang="en-US" sz="1000" dirty="0"/>
           </a:p>
         </p:txBody>
       </p:sp>

--- a/outputs/presentation/dev-transformation-summary.pptx
+++ b/outputs/presentation/dev-transformation-summary.pptx
@@ -13791,7 +13791,74 @@
         </p:nvSpPr>
         <p:spPr>
           <a:xfrm>
-            <a:off x="8330184" y="3401568"/>
+            <a:off x="8330184" y="3310128"/>
+            <a:ext cx="3200400" cy="694944"/>
+          </a:xfrm>
+          <a:prstGeom prst="roundRect">
+            <a:avLst>
+              <a:gd name="adj" fmla="val 6579"/>
+            </a:avLst>
+          </a:prstGeom>
+          <a:solidFill>
+            <a:srgbClr val="EEF1FA"/>
+          </a:solidFill>
+          <a:ln w="12700">
+            <a:solidFill>
+              <a:srgbClr val="1428A0"/>
+            </a:solidFill>
+          </a:ln>
+        </p:spPr>
+        <p:txBody>
+          <a:bodyPr wrap="square" lIns="1016" tIns="1016" rIns="1016" bIns="1016" rtlCol="0" anchor="ctr"/>
+          <a:lstStyle/>
+          <a:p>
+            <a:pPr indent="0" marL="0">
+              <a:lnSpc>
+                <a:spcPct val="110000"/>
+              </a:lnSpc>
+              <a:buNone/>
+            </a:pPr>
+            <a:r>
+              <a:rPr lang="en-US" sz="950" b="1" dirty="0">
+                <a:solidFill>
+                  <a:srgbClr val="1428A0"/>
+                </a:solidFill>
+                <a:latin typeface="Malgun Gothic" pitchFamily="34" charset="0"/>
+                <a:ea typeface="Malgun Gothic" pitchFamily="34" charset="-122"/>
+                <a:cs typeface="Malgun Gothic" pitchFamily="34" charset="-120"/>
+              </a:rPr>
+              <a:t>FDE 선례  </a:t>
+            </a:r>
+            <a:pPr indent="0" marL="0">
+              <a:lnSpc>
+                <a:spcPct val="110000"/>
+              </a:lnSpc>
+              <a:buNone/>
+            </a:pPr>
+            <a:r>
+              <a:rPr lang="en-US" sz="950" dirty="0">
+                <a:solidFill>
+                  <a:srgbClr val="1A1A1A"/>
+                </a:solidFill>
+                <a:latin typeface="Malgun Gothic" pitchFamily="34" charset="0"/>
+                <a:ea typeface="Malgun Gothic" pitchFamily="34" charset="-122"/>
+                <a:cs typeface="Malgun Gothic" pitchFamily="34" charset="-120"/>
+              </a:rPr>
+              <a:t>Palantir가 창안한 직군 (코드명 Delta, 640% 주가 동력으로 회자) · Anthropic·OpenAI도 엔터프라이즈 GTM으로 채택</a:t>
+            </a:r>
+            <a:endParaRPr lang="en-US" sz="950" dirty="0"/>
+          </a:p>
+        </p:txBody>
+      </p:sp>
+      <p:sp>
+        <p:nvSpPr>
+          <p:cNvPr id="37" name="Text 35"/>
+          <p:cNvSpPr/>
+          <p:nvPr/>
+        </p:nvSpPr>
+        <p:spPr>
+          <a:xfrm>
+            <a:off x="8330184" y="4133088"/>
             <a:ext cx="566928" cy="292608"/>
           </a:xfrm>
           <a:prstGeom prst="roundRect">
@@ -13828,14 +13895,14 @@
       </p:sp>
       <p:sp>
         <p:nvSpPr>
-          <p:cNvPr id="37" name="Text 35"/>
-          <p:cNvSpPr/>
-          <p:nvPr/>
-        </p:nvSpPr>
-        <p:spPr>
-          <a:xfrm>
-            <a:off x="9006840" y="3383280"/>
-            <a:ext cx="2578608" cy="859536"/>
+          <p:cNvPr id="38" name="Text 36"/>
+          <p:cNvSpPr/>
+          <p:nvPr/>
+        </p:nvSpPr>
+        <p:spPr>
+          <a:xfrm>
+            <a:off x="9006840" y="4114800"/>
+            <a:ext cx="2578608" cy="658368"/>
           </a:xfrm>
           <a:prstGeom prst="rect">
             <a:avLst/>
@@ -13862,7 +13929,7 @@
                 <a:ea typeface="Malgun Gothic" pitchFamily="34" charset="-122"/>
                 <a:cs typeface="Malgun Gothic" pitchFamily="34" charset="-120"/>
               </a:rPr>
-              <a:t>실리콘밸리 현지 중심, 오픈소스 스토리지 기여자 우대, 영어 커뮤니케이션 필수</a:t>
+              <a:t>실리콘밸리 현지, 오픈소스 스토리지 기여자 우대, 영어 필수</a:t>
             </a:r>
             <a:endParaRPr lang="en-US" sz="1000" dirty="0"/>
           </a:p>
@@ -13870,13 +13937,13 @@
       </p:sp>
       <p:sp>
         <p:nvSpPr>
-          <p:cNvPr id="38" name="Text 36"/>
-          <p:cNvSpPr/>
-          <p:nvPr/>
-        </p:nvSpPr>
-        <p:spPr>
-          <a:xfrm>
-            <a:off x="8330184" y="4315968"/>
+          <p:cNvPr id="39" name="Text 37"/>
+          <p:cNvSpPr/>
+          <p:nvPr/>
+        </p:nvSpPr>
+        <p:spPr>
+          <a:xfrm>
+            <a:off x="8330184" y="4846320"/>
             <a:ext cx="566928" cy="292608"/>
           </a:xfrm>
           <a:prstGeom prst="roundRect">
@@ -13913,14 +13980,14 @@
       </p:sp>
       <p:sp>
         <p:nvSpPr>
-          <p:cNvPr id="39" name="Text 37"/>
-          <p:cNvSpPr/>
-          <p:nvPr/>
-        </p:nvSpPr>
-        <p:spPr>
-          <a:xfrm>
-            <a:off x="9006840" y="4297680"/>
-            <a:ext cx="2578608" cy="859536"/>
+          <p:cNvPr id="40" name="Text 38"/>
+          <p:cNvSpPr/>
+          <p:nvPr/>
+        </p:nvSpPr>
+        <p:spPr>
+          <a:xfrm>
+            <a:off x="9006840" y="4828032"/>
+            <a:ext cx="2578608" cy="658368"/>
           </a:xfrm>
           <a:prstGeom prst="rect">
             <a:avLst/>
@@ -13947,7 +14014,7 @@
                 <a:ea typeface="Malgun Gothic" pitchFamily="34" charset="-122"/>
                 <a:cs typeface="Malgun Gothic" pitchFamily="34" charset="-120"/>
               </a:rPr>
-              <a:t>본사 엔지니어 미국 로테이션 6~12개월 + 현지 FDE 멘토 페어링, 사내 FW 인력의 호스트 SW 전환 트랙</a:t>
+              <a:t>본사 엔지니어 미국 로테이션 6~12개월 + 현지 FDE 멘토 페어링</a:t>
             </a:r>
             <a:endParaRPr lang="en-US" sz="1000" dirty="0"/>
           </a:p>
@@ -13955,13 +14022,13 @@
       </p:sp>
       <p:sp>
         <p:nvSpPr>
-          <p:cNvPr id="40" name="Text 38"/>
-          <p:cNvSpPr/>
-          <p:nvPr/>
-        </p:nvSpPr>
-        <p:spPr>
-          <a:xfrm>
-            <a:off x="8330184" y="5230368"/>
+          <p:cNvPr id="41" name="Text 39"/>
+          <p:cNvSpPr/>
+          <p:nvPr/>
+        </p:nvSpPr>
+        <p:spPr>
+          <a:xfrm>
+            <a:off x="8330184" y="5559552"/>
             <a:ext cx="566928" cy="292608"/>
           </a:xfrm>
           <a:prstGeom prst="roundRect">
@@ -13998,14 +14065,14 @@
       </p:sp>
       <p:sp>
         <p:nvSpPr>
-          <p:cNvPr id="41" name="Text 39"/>
-          <p:cNvSpPr/>
-          <p:nvPr/>
-        </p:nvSpPr>
-        <p:spPr>
-          <a:xfrm>
-            <a:off x="9006840" y="5212080"/>
-            <a:ext cx="2578608" cy="859536"/>
+          <p:cNvPr id="42" name="Text 40"/>
+          <p:cNvSpPr/>
+          <p:nvPr/>
+        </p:nvSpPr>
+        <p:spPr>
+          <a:xfrm>
+            <a:off x="9006840" y="5541264"/>
+            <a:ext cx="2578608" cy="658368"/>
           </a:xfrm>
           <a:prstGeom prst="rect">
             <a:avLst/>
@@ -14032,7 +14099,7 @@
                 <a:ea typeface="Malgun Gothic" pitchFamily="34" charset="-122"/>
                 <a:cs typeface="Malgun Gothic" pitchFamily="34" charset="-120"/>
               </a:rPr>
-              <a:t>파일럿 1~2사 상주 (Pod 소속·dual-ladder), 평가는 outcome (FDP 활성화 용량), 커널·SPDK·CacheLib 업스트림 기여</a:t>
+              <a:t>파일럿 1~2사 상주 (Pod 소속), outcome 평가 (활성화 용량), 업스트림 기여</a:t>
             </a:r>
             <a:endParaRPr lang="en-US" sz="1000" dirty="0"/>
           </a:p>

--- a/outputs/presentation/dev-transformation-summary.pptx
+++ b/outputs/presentation/dev-transformation-summary.pptx
@@ -12,9 +12,11 @@
     <p:sldId id="260" r:id="rId6"/>
     <p:sldId id="261" r:id="rId7"/>
     <p:sldId id="262" r:id="rId8"/>
+    <p:sldId id="263" r:id="rId9"/>
+    <p:sldId id="264" r:id="rId10"/>
   </p:sldIdLst>
   <p:notesMasterIdLst>
-    <p:notesMasterId r:id="rId9"/>
+    <p:notesMasterId r:id="rId11"/>
   </p:notesMasterIdLst>
   <p:sldSz cx="12192000" cy="6858000"/>
   <p:notesSz cx="6858000" cy="12192000"/>
@@ -1078,6 +1080,182 @@
 </p:notes>
 </file>
 
+<file path=ppt/notesSlides/notesSlide8.xml><?xml version="1.0" encoding="utf-8"?>
+<p:notes xmlns:a="http://schemas.openxmlformats.org/drawingml/2006/main" xmlns:r="http://schemas.openxmlformats.org/officeDocument/2006/relationships" xmlns:p="http://schemas.openxmlformats.org/presentationml/2006/main">
+  <p:cSld>
+    <p:spTree>
+      <p:nvGrpSpPr>
+        <p:cNvPr id="1" name=""/>
+        <p:cNvGrpSpPr/>
+        <p:nvPr/>
+      </p:nvGrpSpPr>
+      <p:grpSpPr>
+        <a:xfrm>
+          <a:off x="0" y="0"/>
+          <a:ext cx="0" cy="0"/>
+          <a:chOff x="0" y="0"/>
+          <a:chExt cx="0" cy="0"/>
+        </a:xfrm>
+      </p:grpSpPr>
+      <p:sp>
+        <p:nvSpPr>
+          <p:cNvPr id="2" name="Slide Image Placeholder 1"/>
+          <p:cNvSpPr>
+            <a:spLocks noGrp="1" noRot="1" noChangeAspect="1"/>
+          </p:cNvSpPr>
+          <p:nvPr>
+            <p:ph type="sldImg"/>
+          </p:nvPr>
+        </p:nvSpPr>
+        <p:spPr/>
+      </p:sp>
+      <p:sp>
+        <p:nvSpPr>
+          <p:cNvPr id="3" name="Notes Placeholder 2"/>
+          <p:cNvSpPr>
+            <a:spLocks noGrp="1"/>
+          </p:cNvSpPr>
+          <p:nvPr>
+            <p:ph type="body" idx="1"/>
+          </p:nvPr>
+        </p:nvSpPr>
+        <p:spPr/>
+        <p:txBody>
+          <a:bodyPr/>
+          <a:lstStyle/>
+          <a:p>
+            <a:r>
+              <a:rPr lang="en-US" dirty="0"/>
+              <a:t/>
+            </a:r>
+            <a:endParaRPr lang="en-US" dirty="0"/>
+          </a:p>
+        </p:txBody>
+      </p:sp>
+      <p:sp>
+        <p:nvSpPr>
+          <p:cNvPr id="4" name="Slide Number Placeholder 3"/>
+          <p:cNvSpPr>
+            <a:spLocks noGrp="1"/>
+          </p:cNvSpPr>
+          <p:nvPr>
+            <p:ph type="sldNum" sz="quarter" idx="10"/>
+          </p:nvPr>
+        </p:nvSpPr>
+        <p:spPr/>
+        <p:txBody>
+          <a:bodyPr/>
+          <a:lstStyle/>
+          <a:p>
+            <a:fld id="{F7021451-1387-4CA6-816F-3879F97B5CBC}" type="slidenum">
+              <a:rPr lang="en-US"/>
+              <a:t>8</a:t>
+            </a:fld>
+            <a:endParaRPr lang="en-US"/>
+          </a:p>
+        </p:txBody>
+      </p:sp>
+    </p:spTree>
+    <p:extLst>
+      <p:ext uri="{BB962C8B-B14F-4D97-AF65-F5344CB8AC3E}">
+        <p14:creationId xmlns:p14="http://schemas.microsoft.com/office/powerpoint/2010/main" val="1024086991"/>
+      </p:ext>
+    </p:extLst>
+  </p:cSld>
+  <p:clrMapOvr>
+    <a:masterClrMapping/>
+  </p:clrMapOvr>
+</p:notes>
+</file>
+
+<file path=ppt/notesSlides/notesSlide9.xml><?xml version="1.0" encoding="utf-8"?>
+<p:notes xmlns:a="http://schemas.openxmlformats.org/drawingml/2006/main" xmlns:r="http://schemas.openxmlformats.org/officeDocument/2006/relationships" xmlns:p="http://schemas.openxmlformats.org/presentationml/2006/main">
+  <p:cSld>
+    <p:spTree>
+      <p:nvGrpSpPr>
+        <p:cNvPr id="1" name=""/>
+        <p:cNvGrpSpPr/>
+        <p:nvPr/>
+      </p:nvGrpSpPr>
+      <p:grpSpPr>
+        <a:xfrm>
+          <a:off x="0" y="0"/>
+          <a:ext cx="0" cy="0"/>
+          <a:chOff x="0" y="0"/>
+          <a:chExt cx="0" cy="0"/>
+        </a:xfrm>
+      </p:grpSpPr>
+      <p:sp>
+        <p:nvSpPr>
+          <p:cNvPr id="2" name="Slide Image Placeholder 1"/>
+          <p:cNvSpPr>
+            <a:spLocks noGrp="1" noRot="1" noChangeAspect="1"/>
+          </p:cNvSpPr>
+          <p:nvPr>
+            <p:ph type="sldImg"/>
+          </p:nvPr>
+        </p:nvSpPr>
+        <p:spPr/>
+      </p:sp>
+      <p:sp>
+        <p:nvSpPr>
+          <p:cNvPr id="3" name="Notes Placeholder 2"/>
+          <p:cNvSpPr>
+            <a:spLocks noGrp="1"/>
+          </p:cNvSpPr>
+          <p:nvPr>
+            <p:ph type="body" idx="1"/>
+          </p:nvPr>
+        </p:nvSpPr>
+        <p:spPr/>
+        <p:txBody>
+          <a:bodyPr/>
+          <a:lstStyle/>
+          <a:p>
+            <a:r>
+              <a:rPr lang="en-US" dirty="0"/>
+              <a:t/>
+            </a:r>
+            <a:endParaRPr lang="en-US" dirty="0"/>
+          </a:p>
+        </p:txBody>
+      </p:sp>
+      <p:sp>
+        <p:nvSpPr>
+          <p:cNvPr id="4" name="Slide Number Placeholder 3"/>
+          <p:cNvSpPr>
+            <a:spLocks noGrp="1"/>
+          </p:cNvSpPr>
+          <p:nvPr>
+            <p:ph type="sldNum" sz="quarter" idx="10"/>
+          </p:nvPr>
+        </p:nvSpPr>
+        <p:spPr/>
+        <p:txBody>
+          <a:bodyPr/>
+          <a:lstStyle/>
+          <a:p>
+            <a:fld id="{F7021451-1387-4CA6-816F-3879F97B5CBC}" type="slidenum">
+              <a:rPr lang="en-US"/>
+              <a:t>9</a:t>
+            </a:fld>
+            <a:endParaRPr lang="en-US"/>
+          </a:p>
+        </p:txBody>
+      </p:sp>
+    </p:spTree>
+    <p:extLst>
+      <p:ext uri="{BB962C8B-B14F-4D97-AF65-F5344CB8AC3E}">
+        <p14:creationId xmlns:p14="http://schemas.microsoft.com/office/powerpoint/2010/main" val="1024086991"/>
+      </p:ext>
+    </p:extLst>
+  </p:cSld>
+  <p:clrMapOvr>
+    <a:masterClrMapping/>
+  </p:clrMapOvr>
+</p:notes>
+</file>
+
 <file path=ppt/slideLayouts/slideLayout1.xml><?xml version="1.0" encoding="utf-8"?>
 <p:sldLayout xmlns:a="http://schemas.openxmlformats.org/drawingml/2006/main" xmlns:r="http://schemas.openxmlformats.org/officeDocument/2006/relationships" xmlns:p="http://schemas.openxmlformats.org/presentationml/2006/main" preserve="1">
   <p:cSld name="DEFAULT">
@@ -12195,6 +12373,4263 @@
 <file path=ppt/slides/slide7.xml><?xml version="1.0" encoding="utf-8"?>
 <p:sld xmlns:a="http://schemas.openxmlformats.org/drawingml/2006/main" xmlns:r="http://schemas.openxmlformats.org/officeDocument/2006/relationships" xmlns:p="http://schemas.openxmlformats.org/presentationml/2006/main">
   <p:cSld name="Slide 7">
+    <p:spTree>
+      <p:nvGrpSpPr>
+        <p:cNvPr id="1" name=""/>
+        <p:cNvGrpSpPr/>
+        <p:nvPr/>
+      </p:nvGrpSpPr>
+      <p:grpSpPr>
+        <a:xfrm>
+          <a:off x="0" y="0"/>
+          <a:ext cx="0" cy="0"/>
+          <a:chOff x="0" y="0"/>
+          <a:chExt cx="0" cy="0"/>
+        </a:xfrm>
+      </p:grpSpPr>
+      <p:sp>
+        <p:nvSpPr>
+          <p:cNvPr id="2" name="Text 0"/>
+          <p:cNvSpPr/>
+          <p:nvPr/>
+        </p:nvSpPr>
+        <p:spPr>
+          <a:xfrm>
+            <a:off x="457200" y="237744"/>
+            <a:ext cx="9765792" cy="566928"/>
+          </a:xfrm>
+          <a:prstGeom prst="rect">
+            <a:avLst/>
+          </a:prstGeom>
+          <a:noFill/>
+          <a:ln/>
+        </p:spPr>
+        <p:txBody>
+          <a:bodyPr wrap="square" lIns="0" tIns="0" rIns="0" bIns="0" rtlCol="0" anchor="ctr"/>
+          <a:lstStyle/>
+          <a:p>
+            <a:pPr indent="0" marL="0">
+              <a:buNone/>
+            </a:pPr>
+            <a:r>
+              <a:rPr lang="en-US" sz="3200" b="1" dirty="0">
+                <a:solidFill>
+                  <a:srgbClr val="17313B"/>
+                </a:solidFill>
+                <a:latin typeface="Malgun Gothic" pitchFamily="34" charset="0"/>
+                <a:ea typeface="Malgun Gothic" pitchFamily="34" charset="-122"/>
+                <a:cs typeface="Malgun Gothic" pitchFamily="34" charset="-120"/>
+              </a:rPr>
+              <a:t>2023 다운턴: 깊이는 고객 구조가 결정했다</a:t>
+            </a:r>
+            <a:endParaRPr lang="en-US" sz="3200" dirty="0"/>
+          </a:p>
+        </p:txBody>
+      </p:sp>
+      <p:sp>
+        <p:nvSpPr>
+          <p:cNvPr id="3" name="Text 1"/>
+          <p:cNvSpPr/>
+          <p:nvPr/>
+        </p:nvSpPr>
+        <p:spPr>
+          <a:xfrm>
+            <a:off x="10268712" y="310896"/>
+            <a:ext cx="1463040" cy="420624"/>
+          </a:xfrm>
+          <a:prstGeom prst="roundRect">
+            <a:avLst>
+              <a:gd name="adj" fmla="val 21739"/>
+            </a:avLst>
+          </a:prstGeom>
+          <a:solidFill>
+            <a:srgbClr val="EFF3F5"/>
+          </a:solidFill>
+          <a:ln/>
+        </p:spPr>
+        <p:txBody>
+          <a:bodyPr wrap="square" lIns="0" tIns="0" rIns="0" bIns="0" rtlCol="0" anchor="ctr"/>
+          <a:lstStyle/>
+          <a:p>
+            <a:pPr algn="ctr" indent="0" marL="0">
+              <a:buNone/>
+            </a:pPr>
+            <a:r>
+              <a:rPr lang="en-US" sz="1400" b="1" dirty="0">
+                <a:solidFill>
+                  <a:srgbClr val="5A7184"/>
+                </a:solidFill>
+                <a:latin typeface="Malgun Gothic" pitchFamily="34" charset="0"/>
+                <a:ea typeface="Malgun Gothic" pitchFamily="34" charset="-122"/>
+                <a:cs typeface="Malgun Gothic" pitchFamily="34" charset="-120"/>
+              </a:rPr>
+              <a:t>배경 ①</a:t>
+            </a:r>
+            <a:endParaRPr lang="en-US" sz="1400" dirty="0"/>
+          </a:p>
+        </p:txBody>
+      </p:sp>
+      <p:sp>
+        <p:nvSpPr>
+          <p:cNvPr id="4" name="Text 2"/>
+          <p:cNvSpPr/>
+          <p:nvPr/>
+        </p:nvSpPr>
+        <p:spPr>
+          <a:xfrm>
+            <a:off x="457200" y="6510528"/>
+            <a:ext cx="6949440" cy="256032"/>
+          </a:xfrm>
+          <a:prstGeom prst="rect">
+            <a:avLst/>
+          </a:prstGeom>
+          <a:noFill/>
+          <a:ln/>
+        </p:spPr>
+        <p:txBody>
+          <a:bodyPr wrap="square" lIns="0" tIns="0" rIns="0" bIns="0" rtlCol="0" anchor="ctr"/>
+          <a:lstStyle/>
+          <a:p>
+            <a:pPr indent="0" marL="0">
+              <a:buNone/>
+            </a:pPr>
+            <a:r>
+              <a:rPr lang="en-US" sz="1000" dirty="0">
+                <a:solidFill>
+                  <a:srgbClr val="5A7184"/>
+                </a:solidFill>
+                <a:latin typeface="Malgun Gothic" pitchFamily="34" charset="0"/>
+                <a:ea typeface="Malgun Gothic" pitchFamily="34" charset="-122"/>
+                <a:cs typeface="Malgun Gothic" pitchFamily="34" charset="-120"/>
+              </a:rPr>
+              <a:t>삼성전자 메모리사업부 · 개발실 체질 전환 전략 요약 · 2026-07-24</a:t>
+            </a:r>
+            <a:endParaRPr lang="en-US" sz="1000" dirty="0"/>
+          </a:p>
+        </p:txBody>
+      </p:sp>
+      <p:sp>
+        <p:nvSpPr>
+          <p:cNvPr id="5" name="Text 3"/>
+          <p:cNvSpPr/>
+          <p:nvPr/>
+        </p:nvSpPr>
+        <p:spPr>
+          <a:xfrm>
+            <a:off x="7589520" y="6510528"/>
+            <a:ext cx="4142232" cy="256032"/>
+          </a:xfrm>
+          <a:prstGeom prst="rect">
+            <a:avLst/>
+          </a:prstGeom>
+          <a:noFill/>
+          <a:ln/>
+        </p:spPr>
+        <p:txBody>
+          <a:bodyPr wrap="square" lIns="0" tIns="0" rIns="0" bIns="0" rtlCol="0" anchor="ctr"/>
+          <a:lstStyle/>
+          <a:p>
+            <a:pPr algn="r" indent="0" marL="0">
+              <a:buNone/>
+            </a:pPr>
+            <a:r>
+              <a:rPr lang="en-US" sz="1000" dirty="0">
+                <a:solidFill>
+                  <a:srgbClr val="5A7184"/>
+                </a:solidFill>
+                <a:latin typeface="Malgun Gothic" pitchFamily="34" charset="0"/>
+                <a:ea typeface="Malgun Gothic" pitchFamily="34" charset="-122"/>
+                <a:cs typeface="Malgun Gothic" pitchFamily="34" charset="-120"/>
+              </a:rPr>
+              <a:t>원천: wiki/strategies/fdp-host-ssd-platform.md</a:t>
+            </a:r>
+            <a:endParaRPr lang="en-US" sz="1000" dirty="0"/>
+          </a:p>
+        </p:txBody>
+      </p:sp>
+      <p:sp>
+        <p:nvSpPr>
+          <p:cNvPr id="6" name="Text 4"/>
+          <p:cNvSpPr/>
+          <p:nvPr/>
+        </p:nvSpPr>
+        <p:spPr>
+          <a:xfrm>
+            <a:off x="457200" y="822960"/>
+            <a:ext cx="11274552" cy="274320"/>
+          </a:xfrm>
+          <a:prstGeom prst="rect">
+            <a:avLst/>
+          </a:prstGeom>
+          <a:noFill/>
+          <a:ln/>
+        </p:spPr>
+        <p:txBody>
+          <a:bodyPr wrap="square" lIns="0" tIns="0" rIns="0" bIns="0" rtlCol="0" anchor="ctr"/>
+          <a:lstStyle/>
+          <a:p>
+            <a:pPr indent="0" marL="0">
+              <a:buNone/>
+            </a:pPr>
+            <a:r>
+              <a:rPr lang="en-US" sz="1300" b="1" dirty="0">
+                <a:solidFill>
+                  <a:srgbClr val="1428A0"/>
+                </a:solidFill>
+                <a:latin typeface="Malgun Gothic" pitchFamily="34" charset="0"/>
+                <a:ea typeface="Malgun Gothic" pitchFamily="34" charset="-122"/>
+                <a:cs typeface="Malgun Gothic" pitchFamily="34" charset="-120"/>
+              </a:rPr>
+              <a:t>배경  </a:t>
+            </a:r>
+            <a:pPr indent="0" marL="0">
+              <a:buNone/>
+            </a:pPr>
+            <a:r>
+              <a:rPr lang="en-US" sz="1300" dirty="0">
+                <a:solidFill>
+                  <a:srgbClr val="555555"/>
+                </a:solidFill>
+                <a:latin typeface="Malgun Gothic" pitchFamily="34" charset="0"/>
+                <a:ea typeface="Malgun Gothic" pitchFamily="34" charset="-122"/>
+                <a:cs typeface="Malgun Gothic" pitchFamily="34" charset="-120"/>
+              </a:rPr>
+              <a:t>서버 노출이 큰 벤더일수록 깊게 맞았다: 문제는 총수요가 아니라 수요의 형태 변화, 답은 다변화가 아니라 니즈 적중 (Solidigm)</a:t>
+            </a:r>
+            <a:endParaRPr lang="en-US" sz="1300" dirty="0"/>
+          </a:p>
+        </p:txBody>
+      </p:sp>
+      <p:sp>
+        <p:nvSpPr>
+          <p:cNvPr id="7" name="Text 5"/>
+          <p:cNvSpPr/>
+          <p:nvPr/>
+        </p:nvSpPr>
+        <p:spPr>
+          <a:xfrm>
+            <a:off x="457200" y="1188720"/>
+            <a:ext cx="310896" cy="310896"/>
+          </a:xfrm>
+          <a:prstGeom prst="ellipse">
+            <a:avLst/>
+          </a:prstGeom>
+          <a:solidFill>
+            <a:srgbClr val="1428A0"/>
+          </a:solidFill>
+          <a:ln/>
+        </p:spPr>
+        <p:txBody>
+          <a:bodyPr wrap="square" lIns="0" tIns="0" rIns="0" bIns="0" rtlCol="0" anchor="ctr"/>
+          <a:lstStyle/>
+          <a:p>
+            <a:pPr algn="ctr" indent="0" marL="0">
+              <a:buNone/>
+            </a:pPr>
+            <a:r>
+              <a:rPr lang="en-US" sz="1400" b="1" dirty="0">
+                <a:solidFill>
+                  <a:srgbClr val="FFFFFF"/>
+                </a:solidFill>
+                <a:latin typeface="Malgun Gothic" pitchFamily="34" charset="0"/>
+                <a:ea typeface="Malgun Gothic" pitchFamily="34" charset="-122"/>
+                <a:cs typeface="Malgun Gothic" pitchFamily="34" charset="-120"/>
+              </a:rPr>
+              <a:t>1</a:t>
+            </a:r>
+            <a:endParaRPr lang="en-US" sz="1400" dirty="0"/>
+          </a:p>
+        </p:txBody>
+      </p:sp>
+      <p:sp>
+        <p:nvSpPr>
+          <p:cNvPr id="8" name="Text 6"/>
+          <p:cNvSpPr/>
+          <p:nvPr/>
+        </p:nvSpPr>
+        <p:spPr>
+          <a:xfrm>
+            <a:off x="859536" y="1170432"/>
+            <a:ext cx="3200400" cy="347472"/>
+          </a:xfrm>
+          <a:prstGeom prst="rect">
+            <a:avLst/>
+          </a:prstGeom>
+          <a:noFill/>
+          <a:ln/>
+        </p:spPr>
+        <p:txBody>
+          <a:bodyPr wrap="square" lIns="0" tIns="0" rIns="0" bIns="0" rtlCol="0" anchor="ctr"/>
+          <a:lstStyle/>
+          <a:p>
+            <a:pPr indent="0" marL="0">
+              <a:buNone/>
+            </a:pPr>
+            <a:r>
+              <a:rPr lang="en-US" sz="1350" b="1" dirty="0">
+                <a:solidFill>
+                  <a:srgbClr val="1A1A1A"/>
+                </a:solidFill>
+                <a:latin typeface="Malgun Gothic" pitchFamily="34" charset="0"/>
+                <a:ea typeface="Malgun Gothic" pitchFamily="34" charset="-122"/>
+                <a:cs typeface="Malgun Gothic" pitchFamily="34" charset="-120"/>
+              </a:rPr>
+              <a:t>낙폭: 피크(2Q22)→저점(1Q23)</a:t>
+            </a:r>
+            <a:endParaRPr lang="en-US" sz="1350" dirty="0"/>
+          </a:p>
+        </p:txBody>
+      </p:sp>
+      <p:sp>
+        <p:nvSpPr>
+          <p:cNvPr id="9" name="Shape 7"/>
+          <p:cNvSpPr/>
+          <p:nvPr/>
+        </p:nvSpPr>
+        <p:spPr>
+          <a:xfrm>
+            <a:off x="457200" y="1627632"/>
+            <a:ext cx="3602736" cy="4626864"/>
+          </a:xfrm>
+          <a:prstGeom prst="roundRect">
+            <a:avLst>
+              <a:gd name="adj" fmla="val 2030"/>
+            </a:avLst>
+          </a:prstGeom>
+          <a:solidFill>
+            <a:srgbClr val="FFFFFF"/>
+          </a:solidFill>
+          <a:ln w="12700">
+            <a:solidFill>
+              <a:srgbClr val="D9D9D9"/>
+            </a:solidFill>
+            <a:prstDash val="solid"/>
+          </a:ln>
+        </p:spPr>
+      </p:sp>
+      <p:sp>
+        <p:nvSpPr>
+          <p:cNvPr id="10" name="Text 8"/>
+          <p:cNvSpPr/>
+          <p:nvPr/>
+        </p:nvSpPr>
+        <p:spPr>
+          <a:xfrm>
+            <a:off x="4297680" y="1188720"/>
+            <a:ext cx="310896" cy="310896"/>
+          </a:xfrm>
+          <a:prstGeom prst="ellipse">
+            <a:avLst/>
+          </a:prstGeom>
+          <a:solidFill>
+            <a:srgbClr val="1428A0"/>
+          </a:solidFill>
+          <a:ln/>
+        </p:spPr>
+        <p:txBody>
+          <a:bodyPr wrap="square" lIns="0" tIns="0" rIns="0" bIns="0" rtlCol="0" anchor="ctr"/>
+          <a:lstStyle/>
+          <a:p>
+            <a:pPr algn="ctr" indent="0" marL="0">
+              <a:buNone/>
+            </a:pPr>
+            <a:r>
+              <a:rPr lang="en-US" sz="1400" b="1" dirty="0">
+                <a:solidFill>
+                  <a:srgbClr val="FFFFFF"/>
+                </a:solidFill>
+                <a:latin typeface="Malgun Gothic" pitchFamily="34" charset="0"/>
+                <a:ea typeface="Malgun Gothic" pitchFamily="34" charset="-122"/>
+                <a:cs typeface="Malgun Gothic" pitchFamily="34" charset="-120"/>
+              </a:rPr>
+              <a:t>2</a:t>
+            </a:r>
+            <a:endParaRPr lang="en-US" sz="1400" dirty="0"/>
+          </a:p>
+        </p:txBody>
+      </p:sp>
+      <p:sp>
+        <p:nvSpPr>
+          <p:cNvPr id="11" name="Text 9"/>
+          <p:cNvSpPr/>
+          <p:nvPr/>
+        </p:nvSpPr>
+        <p:spPr>
+          <a:xfrm>
+            <a:off x="4700016" y="1170432"/>
+            <a:ext cx="3200400" cy="347472"/>
+          </a:xfrm>
+          <a:prstGeom prst="rect">
+            <a:avLst/>
+          </a:prstGeom>
+          <a:noFill/>
+          <a:ln/>
+        </p:spPr>
+        <p:txBody>
+          <a:bodyPr wrap="square" lIns="0" tIns="0" rIns="0" bIns="0" rtlCol="0" anchor="ctr"/>
+          <a:lstStyle/>
+          <a:p>
+            <a:pPr indent="0" marL="0">
+              <a:buNone/>
+            </a:pPr>
+            <a:r>
+              <a:rPr lang="en-US" sz="1350" b="1" dirty="0">
+                <a:solidFill>
+                  <a:srgbClr val="1A1A1A"/>
+                </a:solidFill>
+                <a:latin typeface="Malgun Gothic" pitchFamily="34" charset="0"/>
+                <a:ea typeface="Malgun Gothic" pitchFamily="34" charset="-122"/>
+                <a:cs typeface="Malgun Gothic" pitchFamily="34" charset="-120"/>
+              </a:rPr>
+              <a:t>원인: 서버·고객 노출</a:t>
+            </a:r>
+            <a:endParaRPr lang="en-US" sz="1350" dirty="0"/>
+          </a:p>
+        </p:txBody>
+      </p:sp>
+      <p:sp>
+        <p:nvSpPr>
+          <p:cNvPr id="12" name="Shape 10"/>
+          <p:cNvSpPr/>
+          <p:nvPr/>
+        </p:nvSpPr>
+        <p:spPr>
+          <a:xfrm>
+            <a:off x="4297680" y="1627632"/>
+            <a:ext cx="3602736" cy="4626864"/>
+          </a:xfrm>
+          <a:prstGeom prst="roundRect">
+            <a:avLst>
+              <a:gd name="adj" fmla="val 2030"/>
+            </a:avLst>
+          </a:prstGeom>
+          <a:solidFill>
+            <a:srgbClr val="FFFFFF"/>
+          </a:solidFill>
+          <a:ln w="12700">
+            <a:solidFill>
+              <a:srgbClr val="D9D9D9"/>
+            </a:solidFill>
+            <a:prstDash val="solid"/>
+          </a:ln>
+        </p:spPr>
+      </p:sp>
+      <p:sp>
+        <p:nvSpPr>
+          <p:cNvPr id="13" name="Text 11"/>
+          <p:cNvSpPr/>
+          <p:nvPr/>
+        </p:nvSpPr>
+        <p:spPr>
+          <a:xfrm>
+            <a:off x="8129016" y="1188720"/>
+            <a:ext cx="310896" cy="310896"/>
+          </a:xfrm>
+          <a:prstGeom prst="ellipse">
+            <a:avLst/>
+          </a:prstGeom>
+          <a:solidFill>
+            <a:srgbClr val="1428A0"/>
+          </a:solidFill>
+          <a:ln/>
+        </p:spPr>
+        <p:txBody>
+          <a:bodyPr wrap="square" lIns="0" tIns="0" rIns="0" bIns="0" rtlCol="0" anchor="ctr"/>
+          <a:lstStyle/>
+          <a:p>
+            <a:pPr algn="ctr" indent="0" marL="0">
+              <a:buNone/>
+            </a:pPr>
+            <a:r>
+              <a:rPr lang="en-US" sz="1400" b="1" dirty="0">
+                <a:solidFill>
+                  <a:srgbClr val="FFFFFF"/>
+                </a:solidFill>
+                <a:latin typeface="Malgun Gothic" pitchFamily="34" charset="0"/>
+                <a:ea typeface="Malgun Gothic" pitchFamily="34" charset="-122"/>
+                <a:cs typeface="Malgun Gothic" pitchFamily="34" charset="-120"/>
+              </a:rPr>
+              <a:t>3</a:t>
+            </a:r>
+            <a:endParaRPr lang="en-US" sz="1400" dirty="0"/>
+          </a:p>
+        </p:txBody>
+      </p:sp>
+      <p:sp>
+        <p:nvSpPr>
+          <p:cNvPr id="14" name="Text 12"/>
+          <p:cNvSpPr/>
+          <p:nvPr/>
+        </p:nvSpPr>
+        <p:spPr>
+          <a:xfrm>
+            <a:off x="8531352" y="1170432"/>
+            <a:ext cx="3200400" cy="347472"/>
+          </a:xfrm>
+          <a:prstGeom prst="rect">
+            <a:avLst/>
+          </a:prstGeom>
+          <a:noFill/>
+          <a:ln/>
+        </p:spPr>
+        <p:txBody>
+          <a:bodyPr wrap="square" lIns="0" tIns="0" rIns="0" bIns="0" rtlCol="0" anchor="ctr"/>
+          <a:lstStyle/>
+          <a:p>
+            <a:pPr indent="0" marL="0">
+              <a:buNone/>
+            </a:pPr>
+            <a:r>
+              <a:rPr lang="en-US" sz="1350" b="1" dirty="0">
+                <a:solidFill>
+                  <a:srgbClr val="1A1A1A"/>
+                </a:solidFill>
+                <a:latin typeface="Malgun Gothic" pitchFamily="34" charset="0"/>
+                <a:ea typeface="Malgun Gothic" pitchFamily="34" charset="-122"/>
+                <a:cs typeface="Malgun Gothic" pitchFamily="34" charset="-120"/>
+              </a:rPr>
+              <a:t>재배분, 그리고 반증</a:t>
+            </a:r>
+            <a:endParaRPr lang="en-US" sz="1350" dirty="0"/>
+          </a:p>
+        </p:txBody>
+      </p:sp>
+      <p:sp>
+        <p:nvSpPr>
+          <p:cNvPr id="15" name="Shape 13"/>
+          <p:cNvSpPr/>
+          <p:nvPr/>
+        </p:nvSpPr>
+        <p:spPr>
+          <a:xfrm>
+            <a:off x="8129016" y="1627632"/>
+            <a:ext cx="3602736" cy="4626864"/>
+          </a:xfrm>
+          <a:prstGeom prst="roundRect">
+            <a:avLst>
+              <a:gd name="adj" fmla="val 2030"/>
+            </a:avLst>
+          </a:prstGeom>
+          <a:solidFill>
+            <a:srgbClr val="FFFFFF"/>
+          </a:solidFill>
+          <a:ln w="12700">
+            <a:solidFill>
+              <a:srgbClr val="D9D9D9"/>
+            </a:solidFill>
+            <a:prstDash val="solid"/>
+          </a:ln>
+        </p:spPr>
+      </p:sp>
+      <p:sp>
+        <p:nvSpPr>
+          <p:cNvPr id="16" name="Shape 14"/>
+          <p:cNvSpPr/>
+          <p:nvPr/>
+        </p:nvSpPr>
+        <p:spPr>
+          <a:xfrm>
+            <a:off x="658368" y="2212848"/>
+            <a:ext cx="3200400" cy="0"/>
+          </a:xfrm>
+          <a:prstGeom prst="line">
+            <a:avLst/>
+          </a:prstGeom>
+          <a:noFill/>
+          <a:ln w="12700">
+            <a:solidFill>
+              <a:srgbClr val="555555"/>
+            </a:solidFill>
+            <a:prstDash val="solid"/>
+          </a:ln>
+        </p:spPr>
+      </p:sp>
+      <p:sp>
+        <p:nvSpPr>
+          <p:cNvPr id="17" name="Text 15"/>
+          <p:cNvSpPr/>
+          <p:nvPr/>
+        </p:nvSpPr>
+        <p:spPr>
+          <a:xfrm>
+            <a:off x="658368" y="1938528"/>
+            <a:ext cx="822960" cy="237744"/>
+          </a:xfrm>
+          <a:prstGeom prst="rect">
+            <a:avLst/>
+          </a:prstGeom>
+          <a:noFill/>
+          <a:ln/>
+        </p:spPr>
+        <p:txBody>
+          <a:bodyPr wrap="square" lIns="0" tIns="0" rIns="0" bIns="0" rtlCol="0" anchor="ctr"/>
+          <a:lstStyle/>
+          <a:p>
+            <a:pPr algn="ctr" indent="0" marL="0">
+              <a:buNone/>
+            </a:pPr>
+            <a:r>
+              <a:rPr lang="en-US" sz="1050" b="1" dirty="0">
+                <a:solidFill>
+                  <a:srgbClr val="1A1A1A"/>
+                </a:solidFill>
+                <a:latin typeface="Malgun Gothic" pitchFamily="34" charset="0"/>
+                <a:ea typeface="Malgun Gothic" pitchFamily="34" charset="-122"/>
+                <a:cs typeface="Malgun Gothic" pitchFamily="34" charset="-120"/>
+              </a:rPr>
+              <a:t>삼성</a:t>
+            </a:r>
+            <a:endParaRPr lang="en-US" sz="1050" dirty="0"/>
+          </a:p>
+        </p:txBody>
+      </p:sp>
+      <p:sp>
+        <p:nvSpPr>
+          <p:cNvPr id="18" name="Shape 16"/>
+          <p:cNvSpPr/>
+          <p:nvPr/>
+        </p:nvSpPr>
+        <p:spPr>
+          <a:xfrm>
+            <a:off x="786384" y="2212848"/>
+            <a:ext cx="548640" cy="1685109"/>
+          </a:xfrm>
+          <a:prstGeom prst="roundRect">
+            <a:avLst>
+              <a:gd name="adj" fmla="val 5000"/>
+            </a:avLst>
+          </a:prstGeom>
+          <a:solidFill>
+            <a:srgbClr val="1428A0"/>
+          </a:solidFill>
+          <a:ln/>
+        </p:spPr>
+      </p:sp>
+      <p:sp>
+        <p:nvSpPr>
+          <p:cNvPr id="19" name="Text 17"/>
+          <p:cNvSpPr/>
+          <p:nvPr/>
+        </p:nvSpPr>
+        <p:spPr>
+          <a:xfrm>
+            <a:off x="658368" y="3925389"/>
+            <a:ext cx="822960" cy="256032"/>
+          </a:xfrm>
+          <a:prstGeom prst="rect">
+            <a:avLst/>
+          </a:prstGeom>
+          <a:noFill/>
+          <a:ln/>
+        </p:spPr>
+        <p:txBody>
+          <a:bodyPr wrap="square" lIns="0" tIns="0" rIns="0" bIns="0" rtlCol="0" anchor="ctr"/>
+          <a:lstStyle/>
+          <a:p>
+            <a:pPr algn="ctr" indent="0" marL="0">
+              <a:buNone/>
+            </a:pPr>
+            <a:r>
+              <a:rPr lang="en-US" sz="1250" b="1" dirty="0">
+                <a:solidFill>
+                  <a:srgbClr val="1428A0"/>
+                </a:solidFill>
+                <a:latin typeface="Malgun Gothic" pitchFamily="34" charset="0"/>
+                <a:ea typeface="Malgun Gothic" pitchFamily="34" charset="-122"/>
+                <a:cs typeface="Malgun Gothic" pitchFamily="34" charset="-120"/>
+              </a:rPr>
+              <a:t>-54%</a:t>
+            </a:r>
+            <a:endParaRPr lang="en-US" sz="1250" dirty="0"/>
+          </a:p>
+        </p:txBody>
+      </p:sp>
+      <p:sp>
+        <p:nvSpPr>
+          <p:cNvPr id="20" name="Text 18"/>
+          <p:cNvSpPr/>
+          <p:nvPr/>
+        </p:nvSpPr>
+        <p:spPr>
+          <a:xfrm>
+            <a:off x="1435608" y="1938528"/>
+            <a:ext cx="822960" cy="237744"/>
+          </a:xfrm>
+          <a:prstGeom prst="rect">
+            <a:avLst/>
+          </a:prstGeom>
+          <a:noFill/>
+          <a:ln/>
+        </p:spPr>
+        <p:txBody>
+          <a:bodyPr wrap="square" lIns="0" tIns="0" rIns="0" bIns="0" rtlCol="0" anchor="ctr"/>
+          <a:lstStyle/>
+          <a:p>
+            <a:pPr algn="ctr" indent="0" marL="0">
+              <a:buNone/>
+            </a:pPr>
+            <a:r>
+              <a:rPr lang="en-US" sz="1050" b="1" dirty="0">
+                <a:solidFill>
+                  <a:srgbClr val="1A1A1A"/>
+                </a:solidFill>
+                <a:latin typeface="Malgun Gothic" pitchFamily="34" charset="0"/>
+                <a:ea typeface="Malgun Gothic" pitchFamily="34" charset="-122"/>
+                <a:cs typeface="Malgun Gothic" pitchFamily="34" charset="-120"/>
+              </a:rPr>
+              <a:t>SK그룹</a:t>
+            </a:r>
+            <a:endParaRPr lang="en-US" sz="1050" dirty="0"/>
+          </a:p>
+        </p:txBody>
+      </p:sp>
+      <p:sp>
+        <p:nvSpPr>
+          <p:cNvPr id="21" name="Shape 19"/>
+          <p:cNvSpPr/>
+          <p:nvPr/>
+        </p:nvSpPr>
+        <p:spPr>
+          <a:xfrm>
+            <a:off x="1563624" y="2212848"/>
+            <a:ext cx="548640" cy="1965960"/>
+          </a:xfrm>
+          <a:prstGeom prst="roundRect">
+            <a:avLst>
+              <a:gd name="adj" fmla="val 5000"/>
+            </a:avLst>
+          </a:prstGeom>
+          <a:solidFill>
+            <a:srgbClr val="B9C2D0"/>
+          </a:solidFill>
+          <a:ln/>
+        </p:spPr>
+      </p:sp>
+      <p:sp>
+        <p:nvSpPr>
+          <p:cNvPr id="22" name="Text 20"/>
+          <p:cNvSpPr/>
+          <p:nvPr/>
+        </p:nvSpPr>
+        <p:spPr>
+          <a:xfrm>
+            <a:off x="1435608" y="4206240"/>
+            <a:ext cx="822960" cy="256032"/>
+          </a:xfrm>
+          <a:prstGeom prst="rect">
+            <a:avLst/>
+          </a:prstGeom>
+          <a:noFill/>
+          <a:ln/>
+        </p:spPr>
+        <p:txBody>
+          <a:bodyPr wrap="square" lIns="0" tIns="0" rIns="0" bIns="0" rtlCol="0" anchor="ctr"/>
+          <a:lstStyle/>
+          <a:p>
+            <a:pPr algn="ctr" indent="0" marL="0">
+              <a:buNone/>
+            </a:pPr>
+            <a:r>
+              <a:rPr lang="en-US" sz="1250" b="1" dirty="0">
+                <a:solidFill>
+                  <a:srgbClr val="555555"/>
+                </a:solidFill>
+                <a:latin typeface="Malgun Gothic" pitchFamily="34" charset="0"/>
+                <a:ea typeface="Malgun Gothic" pitchFamily="34" charset="-122"/>
+                <a:cs typeface="Malgun Gothic" pitchFamily="34" charset="-120"/>
+              </a:rPr>
+              <a:t>-63%</a:t>
+            </a:r>
+            <a:endParaRPr lang="en-US" sz="1250" dirty="0"/>
+          </a:p>
+        </p:txBody>
+      </p:sp>
+      <p:sp>
+        <p:nvSpPr>
+          <p:cNvPr id="23" name="Text 21"/>
+          <p:cNvSpPr/>
+          <p:nvPr/>
+        </p:nvSpPr>
+        <p:spPr>
+          <a:xfrm>
+            <a:off x="2212848" y="1938528"/>
+            <a:ext cx="822960" cy="237744"/>
+          </a:xfrm>
+          <a:prstGeom prst="rect">
+            <a:avLst/>
+          </a:prstGeom>
+          <a:noFill/>
+          <a:ln/>
+        </p:spPr>
+        <p:txBody>
+          <a:bodyPr wrap="square" lIns="0" tIns="0" rIns="0" bIns="0" rtlCol="0" anchor="ctr"/>
+          <a:lstStyle/>
+          <a:p>
+            <a:pPr algn="ctr" indent="0" marL="0">
+              <a:buNone/>
+            </a:pPr>
+            <a:r>
+              <a:rPr lang="en-US" sz="1050" b="1" dirty="0">
+                <a:solidFill>
+                  <a:srgbClr val="1A1A1A"/>
+                </a:solidFill>
+                <a:latin typeface="Malgun Gothic" pitchFamily="34" charset="0"/>
+                <a:ea typeface="Malgun Gothic" pitchFamily="34" charset="-122"/>
+                <a:cs typeface="Malgun Gothic" pitchFamily="34" charset="-120"/>
+              </a:rPr>
+              <a:t>WDC</a:t>
+            </a:r>
+            <a:endParaRPr lang="en-US" sz="1050" dirty="0"/>
+          </a:p>
+        </p:txBody>
+      </p:sp>
+      <p:sp>
+        <p:nvSpPr>
+          <p:cNvPr id="24" name="Shape 22"/>
+          <p:cNvSpPr/>
+          <p:nvPr/>
+        </p:nvSpPr>
+        <p:spPr>
+          <a:xfrm>
+            <a:off x="2340864" y="2212848"/>
+            <a:ext cx="548640" cy="1404257"/>
+          </a:xfrm>
+          <a:prstGeom prst="roundRect">
+            <a:avLst>
+              <a:gd name="adj" fmla="val 5000"/>
+            </a:avLst>
+          </a:prstGeom>
+          <a:solidFill>
+            <a:srgbClr val="B9C2D0"/>
+          </a:solidFill>
+          <a:ln/>
+        </p:spPr>
+      </p:sp>
+      <p:sp>
+        <p:nvSpPr>
+          <p:cNvPr id="25" name="Text 23"/>
+          <p:cNvSpPr/>
+          <p:nvPr/>
+        </p:nvSpPr>
+        <p:spPr>
+          <a:xfrm>
+            <a:off x="2212848" y="3644537"/>
+            <a:ext cx="822960" cy="256032"/>
+          </a:xfrm>
+          <a:prstGeom prst="rect">
+            <a:avLst/>
+          </a:prstGeom>
+          <a:noFill/>
+          <a:ln/>
+        </p:spPr>
+        <p:txBody>
+          <a:bodyPr wrap="square" lIns="0" tIns="0" rIns="0" bIns="0" rtlCol="0" anchor="ctr"/>
+          <a:lstStyle/>
+          <a:p>
+            <a:pPr algn="ctr" indent="0" marL="0">
+              <a:buNone/>
+            </a:pPr>
+            <a:r>
+              <a:rPr lang="en-US" sz="1250" b="1" dirty="0">
+                <a:solidFill>
+                  <a:srgbClr val="555555"/>
+                </a:solidFill>
+                <a:latin typeface="Malgun Gothic" pitchFamily="34" charset="0"/>
+                <a:ea typeface="Malgun Gothic" pitchFamily="34" charset="-122"/>
+                <a:cs typeface="Malgun Gothic" pitchFamily="34" charset="-120"/>
+              </a:rPr>
+              <a:t>-45%</a:t>
+            </a:r>
+            <a:endParaRPr lang="en-US" sz="1250" dirty="0"/>
+          </a:p>
+        </p:txBody>
+      </p:sp>
+      <p:sp>
+        <p:nvSpPr>
+          <p:cNvPr id="26" name="Text 24"/>
+          <p:cNvSpPr/>
+          <p:nvPr/>
+        </p:nvSpPr>
+        <p:spPr>
+          <a:xfrm>
+            <a:off x="2990088" y="1938528"/>
+            <a:ext cx="822960" cy="237744"/>
+          </a:xfrm>
+          <a:prstGeom prst="rect">
+            <a:avLst/>
+          </a:prstGeom>
+          <a:noFill/>
+          <a:ln/>
+        </p:spPr>
+        <p:txBody>
+          <a:bodyPr wrap="square" lIns="0" tIns="0" rIns="0" bIns="0" rtlCol="0" anchor="ctr"/>
+          <a:lstStyle/>
+          <a:p>
+            <a:pPr algn="ctr" indent="0" marL="0">
+              <a:buNone/>
+            </a:pPr>
+            <a:r>
+              <a:rPr lang="en-US" sz="1050" b="1" dirty="0">
+                <a:solidFill>
+                  <a:srgbClr val="1A1A1A"/>
+                </a:solidFill>
+                <a:latin typeface="Malgun Gothic" pitchFamily="34" charset="0"/>
+                <a:ea typeface="Malgun Gothic" pitchFamily="34" charset="-122"/>
+                <a:cs typeface="Malgun Gothic" pitchFamily="34" charset="-120"/>
+              </a:rPr>
+              <a:t>Kioxia</a:t>
+            </a:r>
+            <a:endParaRPr lang="en-US" sz="1050" dirty="0"/>
+          </a:p>
+        </p:txBody>
+      </p:sp>
+      <p:sp>
+        <p:nvSpPr>
+          <p:cNvPr id="27" name="Shape 25"/>
+          <p:cNvSpPr/>
+          <p:nvPr/>
+        </p:nvSpPr>
+        <p:spPr>
+          <a:xfrm>
+            <a:off x="3118104" y="2212848"/>
+            <a:ext cx="548640" cy="1092200"/>
+          </a:xfrm>
+          <a:prstGeom prst="roundRect">
+            <a:avLst>
+              <a:gd name="adj" fmla="val 5000"/>
+            </a:avLst>
+          </a:prstGeom>
+          <a:solidFill>
+            <a:srgbClr val="B9C2D0"/>
+          </a:solidFill>
+          <a:ln/>
+        </p:spPr>
+      </p:sp>
+      <p:sp>
+        <p:nvSpPr>
+          <p:cNvPr id="28" name="Text 26"/>
+          <p:cNvSpPr/>
+          <p:nvPr/>
+        </p:nvSpPr>
+        <p:spPr>
+          <a:xfrm>
+            <a:off x="2990088" y="3332480"/>
+            <a:ext cx="822960" cy="256032"/>
+          </a:xfrm>
+          <a:prstGeom prst="rect">
+            <a:avLst/>
+          </a:prstGeom>
+          <a:noFill/>
+          <a:ln/>
+        </p:spPr>
+        <p:txBody>
+          <a:bodyPr wrap="square" lIns="0" tIns="0" rIns="0" bIns="0" rtlCol="0" anchor="ctr"/>
+          <a:lstStyle/>
+          <a:p>
+            <a:pPr algn="ctr" indent="0" marL="0">
+              <a:buNone/>
+            </a:pPr>
+            <a:r>
+              <a:rPr lang="en-US" sz="1250" b="1" dirty="0">
+                <a:solidFill>
+                  <a:srgbClr val="555555"/>
+                </a:solidFill>
+                <a:latin typeface="Malgun Gothic" pitchFamily="34" charset="0"/>
+                <a:ea typeface="Malgun Gothic" pitchFamily="34" charset="-122"/>
+                <a:cs typeface="Malgun Gothic" pitchFamily="34" charset="-120"/>
+              </a:rPr>
+              <a:t>-35%</a:t>
+            </a:r>
+            <a:endParaRPr lang="en-US" sz="1250" dirty="0"/>
+          </a:p>
+        </p:txBody>
+      </p:sp>
+      <p:sp>
+        <p:nvSpPr>
+          <p:cNvPr id="29" name="Text 27"/>
+          <p:cNvSpPr/>
+          <p:nvPr/>
+        </p:nvSpPr>
+        <p:spPr>
+          <a:xfrm>
+            <a:off x="658368" y="4864608"/>
+            <a:ext cx="3200400" cy="566928"/>
+          </a:xfrm>
+          <a:prstGeom prst="roundRect">
+            <a:avLst>
+              <a:gd name="adj" fmla="val 8065"/>
+            </a:avLst>
+          </a:prstGeom>
+          <a:solidFill>
+            <a:srgbClr val="F4F4F6"/>
+          </a:solidFill>
+          <a:ln/>
+        </p:spPr>
+        <p:txBody>
+          <a:bodyPr wrap="square" lIns="1016" tIns="1016" rIns="1016" bIns="1016" rtlCol="0" anchor="ctr"/>
+          <a:lstStyle/>
+          <a:p>
+            <a:pPr indent="0" marL="0">
+              <a:lnSpc>
+                <a:spcPct val="110000"/>
+              </a:lnSpc>
+              <a:buNone/>
+            </a:pPr>
+            <a:r>
+              <a:rPr lang="en-US" sz="1000" b="1" dirty="0">
+                <a:solidFill>
+                  <a:srgbClr val="1428A0"/>
+                </a:solidFill>
+                <a:latin typeface="Malgun Gothic" pitchFamily="34" charset="0"/>
+                <a:ea typeface="Malgun Gothic" pitchFamily="34" charset="-122"/>
+                <a:cs typeface="Malgun Gothic" pitchFamily="34" charset="-120"/>
+              </a:rPr>
+              <a:t>진앙은 SSD  </a:t>
+            </a:r>
+            <a:pPr indent="0" marL="0">
+              <a:lnSpc>
+                <a:spcPct val="110000"/>
+              </a:lnSpc>
+              <a:buNone/>
+            </a:pPr>
+            <a:r>
+              <a:rPr lang="en-US" sz="1000" dirty="0">
+                <a:solidFill>
+                  <a:srgbClr val="1A1A1A"/>
+                </a:solidFill>
+                <a:latin typeface="Malgun Gothic" pitchFamily="34" charset="0"/>
+                <a:ea typeface="Malgun Gothic" pitchFamily="34" charset="-122"/>
+                <a:cs typeface="Malgun Gothic" pitchFamily="34" charset="-120"/>
+              </a:rPr>
+              <a:t>산업 매출 중 SSD 기여 50%+ → 20~25% (4Q22→1Q23)</a:t>
+            </a:r>
+            <a:endParaRPr lang="en-US" sz="1000" dirty="0"/>
+          </a:p>
+        </p:txBody>
+      </p:sp>
+      <p:sp>
+        <p:nvSpPr>
+          <p:cNvPr id="30" name="Text 28"/>
+          <p:cNvSpPr/>
+          <p:nvPr/>
+        </p:nvSpPr>
+        <p:spPr>
+          <a:xfrm>
+            <a:off x="658368" y="5541264"/>
+            <a:ext cx="3200400" cy="365760"/>
+          </a:xfrm>
+          <a:prstGeom prst="rect">
+            <a:avLst/>
+          </a:prstGeom>
+          <a:noFill/>
+          <a:ln/>
+        </p:spPr>
+        <p:txBody>
+          <a:bodyPr wrap="square" lIns="0" tIns="0" rIns="0" bIns="0" rtlCol="0" anchor="ctr"/>
+          <a:lstStyle/>
+          <a:p>
+            <a:pPr indent="0" marL="0">
+              <a:lnSpc>
+                <a:spcPct val="110000"/>
+              </a:lnSpc>
+              <a:buNone/>
+            </a:pPr>
+            <a:r>
+              <a:rPr lang="en-US" sz="900" dirty="0">
+                <a:solidFill>
+                  <a:srgbClr val="555555"/>
+                </a:solidFill>
+                <a:latin typeface="Malgun Gothic" pitchFamily="34" charset="0"/>
+                <a:ea typeface="Malgun Gothic" pitchFamily="34" charset="-122"/>
+                <a:cs typeface="Malgun Gothic" pitchFamily="34" charset="-120"/>
+              </a:rPr>
+              <a:t>분기 매출 피크·저점 기준, TrendForce 분기 데이터 합성. Micron은 회계분기 차이로 제외</a:t>
+            </a:r>
+            <a:endParaRPr lang="en-US" sz="900" dirty="0"/>
+          </a:p>
+        </p:txBody>
+      </p:sp>
+      <p:sp>
+        <p:nvSpPr>
+          <p:cNvPr id="31" name="Text 29"/>
+          <p:cNvSpPr/>
+          <p:nvPr/>
+        </p:nvSpPr>
+        <p:spPr>
+          <a:xfrm>
+            <a:off x="4498848" y="1773936"/>
+            <a:ext cx="3200400" cy="256032"/>
+          </a:xfrm>
+          <a:prstGeom prst="rect">
+            <a:avLst/>
+          </a:prstGeom>
+          <a:noFill/>
+          <a:ln/>
+        </p:spPr>
+        <p:txBody>
+          <a:bodyPr wrap="square" lIns="0" tIns="0" rIns="0" bIns="0" rtlCol="0" anchor="ctr"/>
+          <a:lstStyle/>
+          <a:p>
+            <a:pPr indent="0" marL="0">
+              <a:buNone/>
+            </a:pPr>
+            <a:r>
+              <a:rPr lang="en-US" sz="1050" b="1" dirty="0">
+                <a:solidFill>
+                  <a:srgbClr val="1428A0"/>
+                </a:solidFill>
+                <a:latin typeface="Malgun Gothic" pitchFamily="34" charset="0"/>
+                <a:ea typeface="Malgun Gothic" pitchFamily="34" charset="-122"/>
+                <a:cs typeface="Malgun Gothic" pitchFamily="34" charset="-120"/>
+              </a:rPr>
+              <a:t>Enterprise SSD 매출 점유, 4Q22 (시장 $3.79B)</a:t>
+            </a:r>
+            <a:endParaRPr lang="en-US" sz="1050" dirty="0"/>
+          </a:p>
+        </p:txBody>
+      </p:sp>
+      <p:sp>
+        <p:nvSpPr>
+          <p:cNvPr id="32" name="Text 30"/>
+          <p:cNvSpPr/>
+          <p:nvPr/>
+        </p:nvSpPr>
+        <p:spPr>
+          <a:xfrm>
+            <a:off x="4498848" y="2157984"/>
+            <a:ext cx="868680" cy="274320"/>
+          </a:xfrm>
+          <a:prstGeom prst="rect">
+            <a:avLst/>
+          </a:prstGeom>
+          <a:noFill/>
+          <a:ln/>
+        </p:spPr>
+        <p:txBody>
+          <a:bodyPr wrap="square" lIns="0" tIns="0" rIns="0" bIns="0" rtlCol="0" anchor="ctr"/>
+          <a:lstStyle/>
+          <a:p>
+            <a:pPr indent="0" marL="0">
+              <a:buNone/>
+            </a:pPr>
+            <a:r>
+              <a:rPr lang="en-US" sz="1050" dirty="0">
+                <a:solidFill>
+                  <a:srgbClr val="1A1A1A"/>
+                </a:solidFill>
+                <a:latin typeface="Malgun Gothic" pitchFamily="34" charset="0"/>
+                <a:ea typeface="Malgun Gothic" pitchFamily="34" charset="-122"/>
+                <a:cs typeface="Malgun Gothic" pitchFamily="34" charset="-120"/>
+              </a:rPr>
+              <a:t>삼성</a:t>
+            </a:r>
+            <a:endParaRPr lang="en-US" sz="1050" dirty="0"/>
+          </a:p>
+        </p:txBody>
+      </p:sp>
+      <p:sp>
+        <p:nvSpPr>
+          <p:cNvPr id="33" name="Shape 31"/>
+          <p:cNvSpPr/>
+          <p:nvPr/>
+        </p:nvSpPr>
+        <p:spPr>
+          <a:xfrm>
+            <a:off x="5413248" y="2139696"/>
+            <a:ext cx="1828800" cy="292608"/>
+          </a:xfrm>
+          <a:prstGeom prst="roundRect">
+            <a:avLst>
+              <a:gd name="adj" fmla="val 9375"/>
+            </a:avLst>
+          </a:prstGeom>
+          <a:solidFill>
+            <a:srgbClr val="1428A0"/>
+          </a:solidFill>
+          <a:ln/>
+        </p:spPr>
+      </p:sp>
+      <p:sp>
+        <p:nvSpPr>
+          <p:cNvPr id="34" name="Text 32"/>
+          <p:cNvSpPr/>
+          <p:nvPr/>
+        </p:nvSpPr>
+        <p:spPr>
+          <a:xfrm>
+            <a:off x="7296912" y="2157984"/>
+            <a:ext cx="640080" cy="274320"/>
+          </a:xfrm>
+          <a:prstGeom prst="rect">
+            <a:avLst/>
+          </a:prstGeom>
+          <a:noFill/>
+          <a:ln/>
+        </p:spPr>
+        <p:txBody>
+          <a:bodyPr wrap="square" lIns="0" tIns="0" rIns="0" bIns="0" rtlCol="0" anchor="ctr"/>
+          <a:lstStyle/>
+          <a:p>
+            <a:pPr indent="0" marL="0">
+              <a:buNone/>
+            </a:pPr>
+            <a:r>
+              <a:rPr lang="en-US" sz="1100" b="1" dirty="0">
+                <a:solidFill>
+                  <a:srgbClr val="1428A0"/>
+                </a:solidFill>
+                <a:latin typeface="Malgun Gothic" pitchFamily="34" charset="0"/>
+                <a:ea typeface="Malgun Gothic" pitchFamily="34" charset="-122"/>
+                <a:cs typeface="Malgun Gothic" pitchFamily="34" charset="-120"/>
+              </a:rPr>
+              <a:t>46.9%</a:t>
+            </a:r>
+            <a:endParaRPr lang="en-US" sz="1100" dirty="0"/>
+          </a:p>
+        </p:txBody>
+      </p:sp>
+      <p:sp>
+        <p:nvSpPr>
+          <p:cNvPr id="35" name="Text 33"/>
+          <p:cNvSpPr/>
+          <p:nvPr/>
+        </p:nvSpPr>
+        <p:spPr>
+          <a:xfrm>
+            <a:off x="4498848" y="2651760"/>
+            <a:ext cx="868680" cy="274320"/>
+          </a:xfrm>
+          <a:prstGeom prst="rect">
+            <a:avLst/>
+          </a:prstGeom>
+          <a:noFill/>
+          <a:ln/>
+        </p:spPr>
+        <p:txBody>
+          <a:bodyPr wrap="square" lIns="0" tIns="0" rIns="0" bIns="0" rtlCol="0" anchor="ctr"/>
+          <a:lstStyle/>
+          <a:p>
+            <a:pPr indent="0" marL="0">
+              <a:buNone/>
+            </a:pPr>
+            <a:r>
+              <a:rPr lang="en-US" sz="1050" dirty="0">
+                <a:solidFill>
+                  <a:srgbClr val="1A1A1A"/>
+                </a:solidFill>
+                <a:latin typeface="Malgun Gothic" pitchFamily="34" charset="0"/>
+                <a:ea typeface="Malgun Gothic" pitchFamily="34" charset="-122"/>
+                <a:cs typeface="Malgun Gothic" pitchFamily="34" charset="-120"/>
+              </a:rPr>
+              <a:t>SK그룹</a:t>
+            </a:r>
+            <a:endParaRPr lang="en-US" sz="1050" dirty="0"/>
+          </a:p>
+        </p:txBody>
+      </p:sp>
+      <p:sp>
+        <p:nvSpPr>
+          <p:cNvPr id="36" name="Shape 34"/>
+          <p:cNvSpPr/>
+          <p:nvPr/>
+        </p:nvSpPr>
+        <p:spPr>
+          <a:xfrm>
+            <a:off x="5413248" y="2633472"/>
+            <a:ext cx="740878" cy="292608"/>
+          </a:xfrm>
+          <a:prstGeom prst="roundRect">
+            <a:avLst>
+              <a:gd name="adj" fmla="val 9375"/>
+            </a:avLst>
+          </a:prstGeom>
+          <a:solidFill>
+            <a:srgbClr val="B9C2D0"/>
+          </a:solidFill>
+          <a:ln/>
+        </p:spPr>
+      </p:sp>
+      <p:sp>
+        <p:nvSpPr>
+          <p:cNvPr id="37" name="Text 35"/>
+          <p:cNvSpPr/>
+          <p:nvPr/>
+        </p:nvSpPr>
+        <p:spPr>
+          <a:xfrm>
+            <a:off x="6208990" y="2651760"/>
+            <a:ext cx="640080" cy="274320"/>
+          </a:xfrm>
+          <a:prstGeom prst="rect">
+            <a:avLst/>
+          </a:prstGeom>
+          <a:noFill/>
+          <a:ln/>
+        </p:spPr>
+        <p:txBody>
+          <a:bodyPr wrap="square" lIns="0" tIns="0" rIns="0" bIns="0" rtlCol="0" anchor="ctr"/>
+          <a:lstStyle/>
+          <a:p>
+            <a:pPr indent="0" marL="0">
+              <a:buNone/>
+            </a:pPr>
+            <a:r>
+              <a:rPr lang="en-US" sz="1100" b="1" dirty="0">
+                <a:solidFill>
+                  <a:srgbClr val="555555"/>
+                </a:solidFill>
+                <a:latin typeface="Malgun Gothic" pitchFamily="34" charset="0"/>
+                <a:ea typeface="Malgun Gothic" pitchFamily="34" charset="-122"/>
+                <a:cs typeface="Malgun Gothic" pitchFamily="34" charset="-120"/>
+              </a:rPr>
+              <a:t>19%</a:t>
+            </a:r>
+            <a:endParaRPr lang="en-US" sz="1100" dirty="0"/>
+          </a:p>
+        </p:txBody>
+      </p:sp>
+      <p:sp>
+        <p:nvSpPr>
+          <p:cNvPr id="38" name="Text 36"/>
+          <p:cNvSpPr/>
+          <p:nvPr/>
+        </p:nvSpPr>
+        <p:spPr>
+          <a:xfrm>
+            <a:off x="4498848" y="3145536"/>
+            <a:ext cx="868680" cy="274320"/>
+          </a:xfrm>
+          <a:prstGeom prst="rect">
+            <a:avLst/>
+          </a:prstGeom>
+          <a:noFill/>
+          <a:ln/>
+        </p:spPr>
+        <p:txBody>
+          <a:bodyPr wrap="square" lIns="0" tIns="0" rIns="0" bIns="0" rtlCol="0" anchor="ctr"/>
+          <a:lstStyle/>
+          <a:p>
+            <a:pPr indent="0" marL="0">
+              <a:buNone/>
+            </a:pPr>
+            <a:r>
+              <a:rPr lang="en-US" sz="1050" dirty="0">
+                <a:solidFill>
+                  <a:srgbClr val="1A1A1A"/>
+                </a:solidFill>
+                <a:latin typeface="Malgun Gothic" pitchFamily="34" charset="0"/>
+                <a:ea typeface="Malgun Gothic" pitchFamily="34" charset="-122"/>
+                <a:cs typeface="Malgun Gothic" pitchFamily="34" charset="-120"/>
+              </a:rPr>
+              <a:t>Kioxia</a:t>
+            </a:r>
+            <a:endParaRPr lang="en-US" sz="1050" dirty="0"/>
+          </a:p>
+        </p:txBody>
+      </p:sp>
+      <p:sp>
+        <p:nvSpPr>
+          <p:cNvPr id="39" name="Shape 37"/>
+          <p:cNvSpPr/>
+          <p:nvPr/>
+        </p:nvSpPr>
+        <p:spPr>
+          <a:xfrm>
+            <a:off x="5413248" y="3127248"/>
+            <a:ext cx="506917" cy="292608"/>
+          </a:xfrm>
+          <a:prstGeom prst="roundRect">
+            <a:avLst>
+              <a:gd name="adj" fmla="val 9375"/>
+            </a:avLst>
+          </a:prstGeom>
+          <a:solidFill>
+            <a:srgbClr val="B9C2D0"/>
+          </a:solidFill>
+          <a:ln/>
+        </p:spPr>
+      </p:sp>
+      <p:sp>
+        <p:nvSpPr>
+          <p:cNvPr id="40" name="Text 38"/>
+          <p:cNvSpPr/>
+          <p:nvPr/>
+        </p:nvSpPr>
+        <p:spPr>
+          <a:xfrm>
+            <a:off x="5975029" y="3145536"/>
+            <a:ext cx="640080" cy="274320"/>
+          </a:xfrm>
+          <a:prstGeom prst="rect">
+            <a:avLst/>
+          </a:prstGeom>
+          <a:noFill/>
+          <a:ln/>
+        </p:spPr>
+        <p:txBody>
+          <a:bodyPr wrap="square" lIns="0" tIns="0" rIns="0" bIns="0" rtlCol="0" anchor="ctr"/>
+          <a:lstStyle/>
+          <a:p>
+            <a:pPr indent="0" marL="0">
+              <a:buNone/>
+            </a:pPr>
+            <a:r>
+              <a:rPr lang="en-US" sz="1100" b="1" dirty="0">
+                <a:solidFill>
+                  <a:srgbClr val="555555"/>
+                </a:solidFill>
+                <a:latin typeface="Malgun Gothic" pitchFamily="34" charset="0"/>
+                <a:ea typeface="Malgun Gothic" pitchFamily="34" charset="-122"/>
+                <a:cs typeface="Malgun Gothic" pitchFamily="34" charset="-120"/>
+              </a:rPr>
+              <a:t>13%</a:t>
+            </a:r>
+            <a:endParaRPr lang="en-US" sz="1100" dirty="0"/>
+          </a:p>
+        </p:txBody>
+      </p:sp>
+      <p:sp>
+        <p:nvSpPr>
+          <p:cNvPr id="41" name="Text 39"/>
+          <p:cNvSpPr/>
+          <p:nvPr/>
+        </p:nvSpPr>
+        <p:spPr>
+          <a:xfrm>
+            <a:off x="4498848" y="3749040"/>
+            <a:ext cx="3200400" cy="1371600"/>
+          </a:xfrm>
+          <a:prstGeom prst="rect">
+            <a:avLst/>
+          </a:prstGeom>
+          <a:noFill/>
+          <a:ln/>
+        </p:spPr>
+        <p:txBody>
+          <a:bodyPr wrap="square" lIns="0" tIns="0" rIns="0" bIns="0" rtlCol="0" anchor="t"/>
+          <a:lstStyle/>
+          <a:p>
+            <a:pPr indent="0" marL="0">
+              <a:lnSpc>
+                <a:spcPct val="120000"/>
+              </a:lnSpc>
+              <a:buNone/>
+            </a:pPr>
+            <a:r>
+              <a:rPr lang="en-US" sz="1050" dirty="0">
+                <a:solidFill>
+                  <a:srgbClr val="1A1A1A"/>
+                </a:solidFill>
+                <a:latin typeface="Malgun Gothic" pitchFamily="34" charset="0"/>
+                <a:ea typeface="Malgun Gothic" pitchFamily="34" charset="-122"/>
+                <a:cs typeface="Malgun Gothic" pitchFamily="34" charset="-120"/>
+              </a:rPr>
+              <a:t>노출 순위 = 낙폭 순위. 삼성은 enterprise SSD 1위로 하이퍼스케일러 노출 최대, SK그룹 -63%에는 서버 100%인 Solidigm 포함. 반면 Kioxia(모바일 중심)·WDC(리테일 중심)는 얕게 맞았다</a:t>
+            </a:r>
+            <a:endParaRPr lang="en-US" sz="1050" dirty="0"/>
+          </a:p>
+        </p:txBody>
+      </p:sp>
+      <p:sp>
+        <p:nvSpPr>
+          <p:cNvPr id="42" name="Text 40"/>
+          <p:cNvSpPr/>
+          <p:nvPr/>
+        </p:nvSpPr>
+        <p:spPr>
+          <a:xfrm>
+            <a:off x="4498848" y="5870448"/>
+            <a:ext cx="3200400" cy="274320"/>
+          </a:xfrm>
+          <a:prstGeom prst="rect">
+            <a:avLst/>
+          </a:prstGeom>
+          <a:noFill/>
+          <a:ln/>
+        </p:spPr>
+        <p:txBody>
+          <a:bodyPr wrap="square" lIns="0" tIns="0" rIns="0" bIns="0" rtlCol="0" anchor="ctr"/>
+          <a:lstStyle/>
+          <a:p>
+            <a:pPr indent="0" marL="0">
+              <a:buNone/>
+            </a:pPr>
+            <a:r>
+              <a:rPr lang="en-US" sz="900" dirty="0">
+                <a:solidFill>
+                  <a:srgbClr val="555555"/>
+                </a:solidFill>
+                <a:latin typeface="Malgun Gothic" pitchFamily="34" charset="0"/>
+                <a:ea typeface="Malgun Gothic" pitchFamily="34" charset="-122"/>
+                <a:cs typeface="Malgun Gothic" pitchFamily="34" charset="-120"/>
+              </a:rPr>
+              <a:t>출처: TrendForce enterprise SSD 4Q22 · Blocks &amp; Files</a:t>
+            </a:r>
+            <a:endParaRPr lang="en-US" sz="900" dirty="0"/>
+          </a:p>
+        </p:txBody>
+      </p:sp>
+      <p:sp>
+        <p:nvSpPr>
+          <p:cNvPr id="43" name="Text 41"/>
+          <p:cNvSpPr/>
+          <p:nvPr/>
+        </p:nvSpPr>
+        <p:spPr>
+          <a:xfrm>
+            <a:off x="8330184" y="1773936"/>
+            <a:ext cx="3200400" cy="256032"/>
+          </a:xfrm>
+          <a:prstGeom prst="rect">
+            <a:avLst/>
+          </a:prstGeom>
+          <a:noFill/>
+          <a:ln/>
+        </p:spPr>
+        <p:txBody>
+          <a:bodyPr wrap="square" lIns="0" tIns="0" rIns="0" bIns="0" rtlCol="0" anchor="ctr"/>
+          <a:lstStyle/>
+          <a:p>
+            <a:pPr indent="0" marL="0">
+              <a:buNone/>
+            </a:pPr>
+            <a:r>
+              <a:rPr lang="en-US" sz="1050" b="1" dirty="0">
+                <a:solidFill>
+                  <a:srgbClr val="1428A0"/>
+                </a:solidFill>
+                <a:latin typeface="Malgun Gothic" pitchFamily="34" charset="0"/>
+                <a:ea typeface="Malgun Gothic" pitchFamily="34" charset="-122"/>
+                <a:cs typeface="Malgun Gothic" pitchFamily="34" charset="-120"/>
+              </a:rPr>
+              <a:t>하이퍼스케일러 CapEx ($B, 각사 10-K)</a:t>
+            </a:r>
+            <a:endParaRPr lang="en-US" sz="1050" dirty="0"/>
+          </a:p>
+        </p:txBody>
+      </p:sp>
+      <p:sp>
+        <p:nvSpPr>
+          <p:cNvPr id="44" name="Shape 42"/>
+          <p:cNvSpPr/>
+          <p:nvPr/>
+        </p:nvSpPr>
+        <p:spPr>
+          <a:xfrm>
+            <a:off x="8330184" y="3346704"/>
+            <a:ext cx="3200400" cy="0"/>
+          </a:xfrm>
+          <a:prstGeom prst="line">
+            <a:avLst/>
+          </a:prstGeom>
+          <a:noFill/>
+          <a:ln w="12700">
+            <a:solidFill>
+              <a:srgbClr val="555555"/>
+            </a:solidFill>
+            <a:prstDash val="solid"/>
+          </a:ln>
+        </p:spPr>
+      </p:sp>
+      <p:sp>
+        <p:nvSpPr>
+          <p:cNvPr id="45" name="Shape 43"/>
+          <p:cNvSpPr/>
+          <p:nvPr/>
+        </p:nvSpPr>
+        <p:spPr>
+          <a:xfrm>
+            <a:off x="8476488" y="2211848"/>
+            <a:ext cx="256032" cy="1134856"/>
+          </a:xfrm>
+          <a:prstGeom prst="rect">
+            <a:avLst/>
+          </a:prstGeom>
+          <a:solidFill>
+            <a:srgbClr val="D6DCE8"/>
+          </a:solidFill>
+          <a:ln/>
+        </p:spPr>
+      </p:sp>
+      <p:sp>
+        <p:nvSpPr>
+          <p:cNvPr id="46" name="Shape 44"/>
+          <p:cNvSpPr/>
+          <p:nvPr/>
+        </p:nvSpPr>
+        <p:spPr>
+          <a:xfrm>
+            <a:off x="8769096" y="2165414"/>
+            <a:ext cx="256032" cy="1181291"/>
+          </a:xfrm>
+          <a:prstGeom prst="rect">
+            <a:avLst/>
+          </a:prstGeom>
+          <a:solidFill>
+            <a:srgbClr val="8FA0DC"/>
+          </a:solidFill>
+          <a:ln/>
+        </p:spPr>
+      </p:sp>
+      <p:sp>
+        <p:nvSpPr>
+          <p:cNvPr id="47" name="Shape 45"/>
+          <p:cNvSpPr/>
+          <p:nvPr/>
+        </p:nvSpPr>
+        <p:spPr>
+          <a:xfrm>
+            <a:off x="9061704" y="2367867"/>
+            <a:ext cx="256032" cy="978837"/>
+          </a:xfrm>
+          <a:prstGeom prst="rect">
+            <a:avLst/>
+          </a:prstGeom>
+          <a:solidFill>
+            <a:srgbClr val="1428A0"/>
+          </a:solidFill>
+          <a:ln/>
+        </p:spPr>
+      </p:sp>
+      <p:sp>
+        <p:nvSpPr>
+          <p:cNvPr id="48" name="Text 46"/>
+          <p:cNvSpPr/>
+          <p:nvPr/>
+        </p:nvSpPr>
+        <p:spPr>
+          <a:xfrm>
+            <a:off x="8339328" y="3383280"/>
+            <a:ext cx="1152144" cy="219456"/>
+          </a:xfrm>
+          <a:prstGeom prst="rect">
+            <a:avLst/>
+          </a:prstGeom>
+          <a:noFill/>
+          <a:ln/>
+        </p:spPr>
+        <p:txBody>
+          <a:bodyPr wrap="square" lIns="0" tIns="0" rIns="0" bIns="0" rtlCol="0" anchor="ctr"/>
+          <a:lstStyle/>
+          <a:p>
+            <a:pPr algn="ctr" indent="0" marL="0">
+              <a:buNone/>
+            </a:pPr>
+            <a:r>
+              <a:rPr lang="en-US" sz="950" dirty="0">
+                <a:solidFill>
+                  <a:srgbClr val="1A1A1A"/>
+                </a:solidFill>
+                <a:latin typeface="Malgun Gothic" pitchFamily="34" charset="0"/>
+                <a:ea typeface="Malgun Gothic" pitchFamily="34" charset="-122"/>
+                <a:cs typeface="Malgun Gothic" pitchFamily="34" charset="-120"/>
+              </a:rPr>
+              <a:t>Amazon</a:t>
+            </a:r>
+            <a:endParaRPr lang="en-US" sz="950" dirty="0"/>
+          </a:p>
+        </p:txBody>
+      </p:sp>
+      <p:sp>
+        <p:nvSpPr>
+          <p:cNvPr id="49" name="Shape 47"/>
+          <p:cNvSpPr/>
+          <p:nvPr/>
+        </p:nvSpPr>
+        <p:spPr>
+          <a:xfrm>
+            <a:off x="9518904" y="2990088"/>
+            <a:ext cx="256032" cy="356616"/>
+          </a:xfrm>
+          <a:prstGeom prst="rect">
+            <a:avLst/>
+          </a:prstGeom>
+          <a:solidFill>
+            <a:srgbClr val="D6DCE8"/>
+          </a:solidFill>
+          <a:ln/>
+        </p:spPr>
+      </p:sp>
+      <p:sp>
+        <p:nvSpPr>
+          <p:cNvPr id="50" name="Shape 48"/>
+          <p:cNvSpPr/>
+          <p:nvPr/>
+        </p:nvSpPr>
+        <p:spPr>
+          <a:xfrm>
+            <a:off x="9811512" y="2763488"/>
+            <a:ext cx="256032" cy="583216"/>
+          </a:xfrm>
+          <a:prstGeom prst="rect">
+            <a:avLst/>
+          </a:prstGeom>
+          <a:solidFill>
+            <a:srgbClr val="8FA0DC"/>
+          </a:solidFill>
+          <a:ln/>
+        </p:spPr>
+      </p:sp>
+      <p:sp>
+        <p:nvSpPr>
+          <p:cNvPr id="51" name="Shape 49"/>
+          <p:cNvSpPr/>
+          <p:nvPr/>
+        </p:nvSpPr>
+        <p:spPr>
+          <a:xfrm>
+            <a:off x="10104120" y="2824782"/>
+            <a:ext cx="256032" cy="521922"/>
+          </a:xfrm>
+          <a:prstGeom prst="rect">
+            <a:avLst/>
+          </a:prstGeom>
+          <a:solidFill>
+            <a:srgbClr val="1428A0"/>
+          </a:solidFill>
+          <a:ln/>
+        </p:spPr>
+      </p:sp>
+      <p:sp>
+        <p:nvSpPr>
+          <p:cNvPr id="52" name="Text 50"/>
+          <p:cNvSpPr/>
+          <p:nvPr/>
+        </p:nvSpPr>
+        <p:spPr>
+          <a:xfrm>
+            <a:off x="9381744" y="3383280"/>
+            <a:ext cx="1152144" cy="219456"/>
+          </a:xfrm>
+          <a:prstGeom prst="rect">
+            <a:avLst/>
+          </a:prstGeom>
+          <a:noFill/>
+          <a:ln/>
+        </p:spPr>
+        <p:txBody>
+          <a:bodyPr wrap="square" lIns="0" tIns="0" rIns="0" bIns="0" rtlCol="0" anchor="ctr"/>
+          <a:lstStyle/>
+          <a:p>
+            <a:pPr algn="ctr" indent="0" marL="0">
+              <a:buNone/>
+            </a:pPr>
+            <a:r>
+              <a:rPr lang="en-US" sz="950" dirty="0">
+                <a:solidFill>
+                  <a:srgbClr val="1A1A1A"/>
+                </a:solidFill>
+                <a:latin typeface="Malgun Gothic" pitchFamily="34" charset="0"/>
+                <a:ea typeface="Malgun Gothic" pitchFamily="34" charset="-122"/>
+                <a:cs typeface="Malgun Gothic" pitchFamily="34" charset="-120"/>
+              </a:rPr>
+              <a:t>Meta</a:t>
+            </a:r>
+            <a:endParaRPr lang="en-US" sz="950" dirty="0"/>
+          </a:p>
+        </p:txBody>
+      </p:sp>
+      <p:sp>
+        <p:nvSpPr>
+          <p:cNvPr id="53" name="Shape 51"/>
+          <p:cNvSpPr/>
+          <p:nvPr/>
+        </p:nvSpPr>
+        <p:spPr>
+          <a:xfrm>
+            <a:off x="10561320" y="2889790"/>
+            <a:ext cx="256032" cy="456914"/>
+          </a:xfrm>
+          <a:prstGeom prst="rect">
+            <a:avLst/>
+          </a:prstGeom>
+          <a:solidFill>
+            <a:srgbClr val="D6DCE8"/>
+          </a:solidFill>
+          <a:ln/>
+        </p:spPr>
+      </p:sp>
+      <p:sp>
+        <p:nvSpPr>
+          <p:cNvPr id="54" name="Shape 52"/>
+          <p:cNvSpPr/>
+          <p:nvPr/>
+        </p:nvSpPr>
+        <p:spPr>
+          <a:xfrm>
+            <a:off x="10853928" y="2761631"/>
+            <a:ext cx="256032" cy="585073"/>
+          </a:xfrm>
+          <a:prstGeom prst="rect">
+            <a:avLst/>
+          </a:prstGeom>
+          <a:solidFill>
+            <a:srgbClr val="8FA0DC"/>
+          </a:solidFill>
+          <a:ln/>
+        </p:spPr>
+      </p:sp>
+      <p:sp>
+        <p:nvSpPr>
+          <p:cNvPr id="55" name="Shape 53"/>
+          <p:cNvSpPr/>
+          <p:nvPr/>
+        </p:nvSpPr>
+        <p:spPr>
+          <a:xfrm>
+            <a:off x="11146536" y="2746772"/>
+            <a:ext cx="256032" cy="599932"/>
+          </a:xfrm>
+          <a:prstGeom prst="rect">
+            <a:avLst/>
+          </a:prstGeom>
+          <a:solidFill>
+            <a:srgbClr val="1428A0"/>
+          </a:solidFill>
+          <a:ln/>
+        </p:spPr>
+      </p:sp>
+      <p:sp>
+        <p:nvSpPr>
+          <p:cNvPr id="56" name="Text 54"/>
+          <p:cNvSpPr/>
+          <p:nvPr/>
+        </p:nvSpPr>
+        <p:spPr>
+          <a:xfrm>
+            <a:off x="10424160" y="3383280"/>
+            <a:ext cx="1152144" cy="219456"/>
+          </a:xfrm>
+          <a:prstGeom prst="rect">
+            <a:avLst/>
+          </a:prstGeom>
+          <a:noFill/>
+          <a:ln/>
+        </p:spPr>
+        <p:txBody>
+          <a:bodyPr wrap="square" lIns="0" tIns="0" rIns="0" bIns="0" rtlCol="0" anchor="ctr"/>
+          <a:lstStyle/>
+          <a:p>
+            <a:pPr algn="ctr" indent="0" marL="0">
+              <a:buNone/>
+            </a:pPr>
+            <a:r>
+              <a:rPr lang="en-US" sz="950" dirty="0">
+                <a:solidFill>
+                  <a:srgbClr val="1A1A1A"/>
+                </a:solidFill>
+                <a:latin typeface="Malgun Gothic" pitchFamily="34" charset="0"/>
+                <a:ea typeface="Malgun Gothic" pitchFamily="34" charset="-122"/>
+                <a:cs typeface="Malgun Gothic" pitchFamily="34" charset="-120"/>
+              </a:rPr>
+              <a:t>Alphabet</a:t>
+            </a:r>
+            <a:endParaRPr lang="en-US" sz="950" dirty="0"/>
+          </a:p>
+        </p:txBody>
+      </p:sp>
+      <p:sp>
+        <p:nvSpPr>
+          <p:cNvPr id="57" name="Text 55"/>
+          <p:cNvSpPr/>
+          <p:nvPr/>
+        </p:nvSpPr>
+        <p:spPr>
+          <a:xfrm>
+            <a:off x="8330184" y="3675888"/>
+            <a:ext cx="3200400" cy="713232"/>
+          </a:xfrm>
+          <a:prstGeom prst="rect">
+            <a:avLst/>
+          </a:prstGeom>
+          <a:noFill/>
+          <a:ln/>
+        </p:spPr>
+        <p:txBody>
+          <a:bodyPr wrap="square" lIns="0" tIns="0" rIns="0" bIns="0" rtlCol="0" anchor="t"/>
+          <a:lstStyle/>
+          <a:p>
+            <a:pPr indent="0" marL="0">
+              <a:lnSpc>
+                <a:spcPct val="115000"/>
+              </a:lnSpc>
+              <a:buNone/>
+            </a:pPr>
+            <a:r>
+              <a:rPr lang="en-US" sz="950" dirty="0">
+                <a:solidFill>
+                  <a:srgbClr val="555555"/>
+                </a:solidFill>
+                <a:latin typeface="Malgun Gothic" pitchFamily="34" charset="0"/>
+                <a:ea typeface="Malgun Gothic" pitchFamily="34" charset="-122"/>
+                <a:cs typeface="Malgun Gothic" pitchFamily="34" charset="-120"/>
+              </a:rPr>
+              <a:t>’21  ’22  ’23  ·  Amazon 창사 최초 감소(-17%), Meta -11%. 반면 AI 서버는 ’23 ~$50B로 서버 시장 가치의 ~23%: 총량이 아니라 재배분</a:t>
+            </a:r>
+            <a:endParaRPr lang="en-US" sz="950" dirty="0"/>
+          </a:p>
+        </p:txBody>
+      </p:sp>
+      <p:sp>
+        <p:nvSpPr>
+          <p:cNvPr id="58" name="Shape 56"/>
+          <p:cNvSpPr/>
+          <p:nvPr/>
+        </p:nvSpPr>
+        <p:spPr>
+          <a:xfrm>
+            <a:off x="8311896" y="4498848"/>
+            <a:ext cx="3236976" cy="1536192"/>
+          </a:xfrm>
+          <a:prstGeom prst="roundRect">
+            <a:avLst>
+              <a:gd name="adj" fmla="val 4167"/>
+            </a:avLst>
+          </a:prstGeom>
+          <a:solidFill>
+            <a:srgbClr val="EEF1FA"/>
+          </a:solidFill>
+          <a:ln w="15875">
+            <a:solidFill>
+              <a:srgbClr val="1428A0"/>
+            </a:solidFill>
+            <a:prstDash val="solid"/>
+          </a:ln>
+        </p:spPr>
+      </p:sp>
+      <p:sp>
+        <p:nvSpPr>
+          <p:cNvPr id="59" name="Text 57"/>
+          <p:cNvSpPr/>
+          <p:nvPr/>
+        </p:nvSpPr>
+        <p:spPr>
+          <a:xfrm>
+            <a:off x="8476488" y="4590288"/>
+            <a:ext cx="2926080" cy="1371600"/>
+          </a:xfrm>
+          <a:prstGeom prst="rect">
+            <a:avLst/>
+          </a:prstGeom>
+          <a:noFill/>
+          <a:ln/>
+        </p:spPr>
+        <p:txBody>
+          <a:bodyPr wrap="square" lIns="0" tIns="0" rIns="0" bIns="0" rtlCol="0" anchor="t"/>
+          <a:lstStyle/>
+          <a:p>
+            <a:pPr indent="0" marL="0">
+              <a:lnSpc>
+                <a:spcPct val="115000"/>
+              </a:lnSpc>
+              <a:buNone/>
+            </a:pPr>
+            <a:r>
+              <a:rPr lang="en-US" sz="1150" b="1" dirty="0">
+                <a:solidFill>
+                  <a:srgbClr val="1428A0"/>
+                </a:solidFill>
+                <a:latin typeface="Malgun Gothic" pitchFamily="34" charset="0"/>
+                <a:ea typeface="Malgun Gothic" pitchFamily="34" charset="-122"/>
+                <a:cs typeface="Malgun Gothic" pitchFamily="34" charset="-120"/>
+              </a:rPr>
+              <a:t>반증: Solidigm</a:t>
+            </a:r>
+            <a:endParaRPr lang="en-US" sz="1150" dirty="0"/>
+          </a:p>
+          <a:p>
+            <a:pPr indent="0" marL="0">
+              <a:lnSpc>
+                <a:spcPct val="115000"/>
+              </a:lnSpc>
+              <a:buNone/>
+            </a:pPr>
+            <a:r>
+              <a:rPr lang="en-US" sz="1000" dirty="0">
+                <a:solidFill>
+                  <a:srgbClr val="1A1A1A"/>
+                </a:solidFill>
+                <a:latin typeface="Malgun Gothic" pitchFamily="34" charset="0"/>
+                <a:ea typeface="Malgun Gothic" pitchFamily="34" charset="-122"/>
+                <a:cs typeface="Malgun Gothic" pitchFamily="34" charset="-120"/>
+              </a:rPr>
+              <a:t>낙폭 최심부(SK그룹)에서 ’23.07 61.44TB QLC 출시로 AI 스토리지 수요 적중, ’24 흑자 전환. 다변화(방어)가 아니라 니즈 적중(공격)이 다운턴을 이긴다</a:t>
+            </a:r>
+            <a:endParaRPr lang="en-US" sz="1150" dirty="0"/>
+          </a:p>
+        </p:txBody>
+      </p:sp>
+      <p:sp>
+        <p:nvSpPr>
+          <p:cNvPr id="60" name="Text 58"/>
+          <p:cNvSpPr/>
+          <p:nvPr/>
+        </p:nvSpPr>
+        <p:spPr>
+          <a:xfrm>
+            <a:off x="8330184" y="6053328"/>
+            <a:ext cx="3200400" cy="201168"/>
+          </a:xfrm>
+          <a:prstGeom prst="rect">
+            <a:avLst/>
+          </a:prstGeom>
+          <a:noFill/>
+          <a:ln/>
+        </p:spPr>
+        <p:txBody>
+          <a:bodyPr wrap="square" lIns="0" tIns="0" rIns="0" bIns="0" rtlCol="0" anchor="ctr"/>
+          <a:lstStyle/>
+          <a:p>
+            <a:pPr indent="0" marL="0">
+              <a:buNone/>
+            </a:pPr>
+            <a:r>
+              <a:rPr lang="en-US" sz="900" dirty="0">
+                <a:solidFill>
+                  <a:srgbClr val="555555"/>
+                </a:solidFill>
+                <a:latin typeface="Malgun Gothic" pitchFamily="34" charset="0"/>
+                <a:ea typeface="Malgun Gothic" pitchFamily="34" charset="-122"/>
+                <a:cs typeface="Malgun Gothic" pitchFamily="34" charset="-120"/>
+              </a:rPr>
+              <a:t>출처: 각사 10-K · Platformonomics · TrendForce</a:t>
+            </a:r>
+            <a:endParaRPr lang="en-US" sz="900" dirty="0"/>
+          </a:p>
+        </p:txBody>
+      </p:sp>
+    </p:spTree>
+  </p:cSld>
+  <p:clrMapOvr>
+    <a:masterClrMapping/>
+  </p:clrMapOvr>
+</p:sld>
+</file>
+
+<file path=ppt/slides/slide8.xml><?xml version="1.0" encoding="utf-8"?>
+<p:sld xmlns:a="http://schemas.openxmlformats.org/drawingml/2006/main" xmlns:r="http://schemas.openxmlformats.org/officeDocument/2006/relationships" xmlns:p="http://schemas.openxmlformats.org/presentationml/2006/main">
+  <p:cSld name="Slide 8">
+    <p:spTree>
+      <p:nvGrpSpPr>
+        <p:cNvPr id="1" name=""/>
+        <p:cNvGrpSpPr/>
+        <p:nvPr/>
+      </p:nvGrpSpPr>
+      <p:grpSpPr>
+        <a:xfrm>
+          <a:off x="0" y="0"/>
+          <a:ext cx="0" cy="0"/>
+          <a:chOff x="0" y="0"/>
+          <a:chExt cx="0" cy="0"/>
+        </a:xfrm>
+      </p:grpSpPr>
+      <p:sp>
+        <p:nvSpPr>
+          <p:cNvPr id="2" name="Text 0"/>
+          <p:cNvSpPr/>
+          <p:nvPr/>
+        </p:nvSpPr>
+        <p:spPr>
+          <a:xfrm>
+            <a:off x="457200" y="237744"/>
+            <a:ext cx="9765792" cy="566928"/>
+          </a:xfrm>
+          <a:prstGeom prst="rect">
+            <a:avLst/>
+          </a:prstGeom>
+          <a:noFill/>
+          <a:ln/>
+        </p:spPr>
+        <p:txBody>
+          <a:bodyPr wrap="square" lIns="0" tIns="0" rIns="0" bIns="0" rtlCol="0" anchor="ctr"/>
+          <a:lstStyle/>
+          <a:p>
+            <a:pPr indent="0" marL="0">
+              <a:buNone/>
+            </a:pPr>
+            <a:r>
+              <a:rPr lang="en-US" sz="3200" b="1" dirty="0">
+                <a:solidFill>
+                  <a:srgbClr val="17313B"/>
+                </a:solidFill>
+                <a:latin typeface="Malgun Gothic" pitchFamily="34" charset="0"/>
+                <a:ea typeface="Malgun Gothic" pitchFamily="34" charset="-122"/>
+                <a:cs typeface="Malgun Gothic" pitchFamily="34" charset="-120"/>
+              </a:rPr>
+              <a:t>KV Cache: 요구 내구성은 현 제품의 2~10배</a:t>
+            </a:r>
+            <a:endParaRPr lang="en-US" sz="3200" dirty="0"/>
+          </a:p>
+        </p:txBody>
+      </p:sp>
+      <p:sp>
+        <p:nvSpPr>
+          <p:cNvPr id="3" name="Text 1"/>
+          <p:cNvSpPr/>
+          <p:nvPr/>
+        </p:nvSpPr>
+        <p:spPr>
+          <a:xfrm>
+            <a:off x="10268712" y="310896"/>
+            <a:ext cx="1463040" cy="420624"/>
+          </a:xfrm>
+          <a:prstGeom prst="roundRect">
+            <a:avLst>
+              <a:gd name="adj" fmla="val 21739"/>
+            </a:avLst>
+          </a:prstGeom>
+          <a:solidFill>
+            <a:srgbClr val="EFF3F5"/>
+          </a:solidFill>
+          <a:ln/>
+        </p:spPr>
+        <p:txBody>
+          <a:bodyPr wrap="square" lIns="0" tIns="0" rIns="0" bIns="0" rtlCol="0" anchor="ctr"/>
+          <a:lstStyle/>
+          <a:p>
+            <a:pPr algn="ctr" indent="0" marL="0">
+              <a:buNone/>
+            </a:pPr>
+            <a:r>
+              <a:rPr lang="en-US" sz="1400" b="1" dirty="0">
+                <a:solidFill>
+                  <a:srgbClr val="5A7184"/>
+                </a:solidFill>
+                <a:latin typeface="Malgun Gothic" pitchFamily="34" charset="0"/>
+                <a:ea typeface="Malgun Gothic" pitchFamily="34" charset="-122"/>
+                <a:cs typeface="Malgun Gothic" pitchFamily="34" charset="-120"/>
+              </a:rPr>
+              <a:t>배경 ②</a:t>
+            </a:r>
+            <a:endParaRPr lang="en-US" sz="1400" dirty="0"/>
+          </a:p>
+        </p:txBody>
+      </p:sp>
+      <p:sp>
+        <p:nvSpPr>
+          <p:cNvPr id="4" name="Text 2"/>
+          <p:cNvSpPr/>
+          <p:nvPr/>
+        </p:nvSpPr>
+        <p:spPr>
+          <a:xfrm>
+            <a:off x="457200" y="6510528"/>
+            <a:ext cx="6949440" cy="256032"/>
+          </a:xfrm>
+          <a:prstGeom prst="rect">
+            <a:avLst/>
+          </a:prstGeom>
+          <a:noFill/>
+          <a:ln/>
+        </p:spPr>
+        <p:txBody>
+          <a:bodyPr wrap="square" lIns="0" tIns="0" rIns="0" bIns="0" rtlCol="0" anchor="ctr"/>
+          <a:lstStyle/>
+          <a:p>
+            <a:pPr indent="0" marL="0">
+              <a:buNone/>
+            </a:pPr>
+            <a:r>
+              <a:rPr lang="en-US" sz="1000" dirty="0">
+                <a:solidFill>
+                  <a:srgbClr val="5A7184"/>
+                </a:solidFill>
+                <a:latin typeface="Malgun Gothic" pitchFamily="34" charset="0"/>
+                <a:ea typeface="Malgun Gothic" pitchFamily="34" charset="-122"/>
+                <a:cs typeface="Malgun Gothic" pitchFamily="34" charset="-120"/>
+              </a:rPr>
+              <a:t>삼성전자 메모리사업부 · 개발실 체질 전환 전략 요약 · 2026-07-24</a:t>
+            </a:r>
+            <a:endParaRPr lang="en-US" sz="1000" dirty="0"/>
+          </a:p>
+        </p:txBody>
+      </p:sp>
+      <p:sp>
+        <p:nvSpPr>
+          <p:cNvPr id="5" name="Text 3"/>
+          <p:cNvSpPr/>
+          <p:nvPr/>
+        </p:nvSpPr>
+        <p:spPr>
+          <a:xfrm>
+            <a:off x="7589520" y="6510528"/>
+            <a:ext cx="4142232" cy="256032"/>
+          </a:xfrm>
+          <a:prstGeom prst="rect">
+            <a:avLst/>
+          </a:prstGeom>
+          <a:noFill/>
+          <a:ln/>
+        </p:spPr>
+        <p:txBody>
+          <a:bodyPr wrap="square" lIns="0" tIns="0" rIns="0" bIns="0" rtlCol="0" anchor="ctr"/>
+          <a:lstStyle/>
+          <a:p>
+            <a:pPr algn="r" indent="0" marL="0">
+              <a:buNone/>
+            </a:pPr>
+            <a:r>
+              <a:rPr lang="en-US" sz="1000" dirty="0">
+                <a:solidFill>
+                  <a:srgbClr val="5A7184"/>
+                </a:solidFill>
+                <a:latin typeface="Malgun Gothic" pitchFamily="34" charset="0"/>
+                <a:ea typeface="Malgun Gothic" pitchFamily="34" charset="-122"/>
+                <a:cs typeface="Malgun Gothic" pitchFamily="34" charset="-120"/>
+              </a:rPr>
+              <a:t>원천: wiki/strategies/fdp-host-ssd-platform.md</a:t>
+            </a:r>
+            <a:endParaRPr lang="en-US" sz="1000" dirty="0"/>
+          </a:p>
+        </p:txBody>
+      </p:sp>
+      <p:sp>
+        <p:nvSpPr>
+          <p:cNvPr id="6" name="Text 4"/>
+          <p:cNvSpPr/>
+          <p:nvPr/>
+        </p:nvSpPr>
+        <p:spPr>
+          <a:xfrm>
+            <a:off x="457200" y="822960"/>
+            <a:ext cx="11274552" cy="274320"/>
+          </a:xfrm>
+          <a:prstGeom prst="rect">
+            <a:avLst/>
+          </a:prstGeom>
+          <a:noFill/>
+          <a:ln/>
+        </p:spPr>
+        <p:txBody>
+          <a:bodyPr wrap="square" lIns="0" tIns="0" rIns="0" bIns="0" rtlCol="0" anchor="ctr"/>
+          <a:lstStyle/>
+          <a:p>
+            <a:pPr indent="0" marL="0">
+              <a:buNone/>
+            </a:pPr>
+            <a:r>
+              <a:rPr lang="en-US" sz="1300" b="1" dirty="0">
+                <a:solidFill>
+                  <a:srgbClr val="1428A0"/>
+                </a:solidFill>
+                <a:latin typeface="Malgun Gothic" pitchFamily="34" charset="0"/>
+                <a:ea typeface="Malgun Gothic" pitchFamily="34" charset="-122"/>
+                <a:cs typeface="Malgun Gothic" pitchFamily="34" charset="-120"/>
+              </a:rPr>
+              <a:t>니즈  </a:t>
+            </a:r>
+            <a:pPr indent="0" marL="0">
+              <a:buNone/>
+            </a:pPr>
+            <a:r>
+              <a:rPr lang="en-US" sz="1300" dirty="0">
+                <a:solidFill>
+                  <a:srgbClr val="555555"/>
+                </a:solidFill>
+                <a:latin typeface="Malgun Gothic" pitchFamily="34" charset="0"/>
+                <a:ea typeface="Malgun Gothic" pitchFamily="34" charset="-122"/>
+                <a:cs typeface="Malgun Gothic" pitchFamily="34" charset="-120"/>
+              </a:rPr>
+              <a:t>스토리지가 추론의 캐시 계층으로 승격된다: 수요는 폭증하고, 쓰기 내구성 요구는 현행 TLC·QLC 제품군을 넘는다</a:t>
+            </a:r>
+            <a:endParaRPr lang="en-US" sz="1300" dirty="0"/>
+          </a:p>
+        </p:txBody>
+      </p:sp>
+      <p:sp>
+        <p:nvSpPr>
+          <p:cNvPr id="7" name="Text 5"/>
+          <p:cNvSpPr/>
+          <p:nvPr/>
+        </p:nvSpPr>
+        <p:spPr>
+          <a:xfrm>
+            <a:off x="457200" y="1188720"/>
+            <a:ext cx="310896" cy="310896"/>
+          </a:xfrm>
+          <a:prstGeom prst="ellipse">
+            <a:avLst/>
+          </a:prstGeom>
+          <a:solidFill>
+            <a:srgbClr val="1428A0"/>
+          </a:solidFill>
+          <a:ln/>
+        </p:spPr>
+        <p:txBody>
+          <a:bodyPr wrap="square" lIns="0" tIns="0" rIns="0" bIns="0" rtlCol="0" anchor="ctr"/>
+          <a:lstStyle/>
+          <a:p>
+            <a:pPr algn="ctr" indent="0" marL="0">
+              <a:buNone/>
+            </a:pPr>
+            <a:r>
+              <a:rPr lang="en-US" sz="1400" b="1" dirty="0">
+                <a:solidFill>
+                  <a:srgbClr val="FFFFFF"/>
+                </a:solidFill>
+                <a:latin typeface="Malgun Gothic" pitchFamily="34" charset="0"/>
+                <a:ea typeface="Malgun Gothic" pitchFamily="34" charset="-122"/>
+                <a:cs typeface="Malgun Gothic" pitchFamily="34" charset="-120"/>
+              </a:rPr>
+              <a:t>1</a:t>
+            </a:r>
+            <a:endParaRPr lang="en-US" sz="1400" dirty="0"/>
+          </a:p>
+        </p:txBody>
+      </p:sp>
+      <p:sp>
+        <p:nvSpPr>
+          <p:cNvPr id="8" name="Text 6"/>
+          <p:cNvSpPr/>
+          <p:nvPr/>
+        </p:nvSpPr>
+        <p:spPr>
+          <a:xfrm>
+            <a:off x="859536" y="1170432"/>
+            <a:ext cx="3200400" cy="347472"/>
+          </a:xfrm>
+          <a:prstGeom prst="rect">
+            <a:avLst/>
+          </a:prstGeom>
+          <a:noFill/>
+          <a:ln/>
+        </p:spPr>
+        <p:txBody>
+          <a:bodyPr wrap="square" lIns="0" tIns="0" rIns="0" bIns="0" rtlCol="0" anchor="ctr"/>
+          <a:lstStyle/>
+          <a:p>
+            <a:pPr indent="0" marL="0">
+              <a:buNone/>
+            </a:pPr>
+            <a:r>
+              <a:rPr lang="en-US" sz="1350" b="1" dirty="0">
+                <a:solidFill>
+                  <a:srgbClr val="1A1A1A"/>
+                </a:solidFill>
+                <a:latin typeface="Malgun Gothic" pitchFamily="34" charset="0"/>
+                <a:ea typeface="Malgun Gothic" pitchFamily="34" charset="-122"/>
+                <a:cs typeface="Malgun Gothic" pitchFamily="34" charset="-120"/>
+              </a:rPr>
+              <a:t>신규 수요: KV Cache Offloading</a:t>
+            </a:r>
+            <a:endParaRPr lang="en-US" sz="1350" dirty="0"/>
+          </a:p>
+        </p:txBody>
+      </p:sp>
+      <p:sp>
+        <p:nvSpPr>
+          <p:cNvPr id="9" name="Shape 7"/>
+          <p:cNvSpPr/>
+          <p:nvPr/>
+        </p:nvSpPr>
+        <p:spPr>
+          <a:xfrm>
+            <a:off x="457200" y="1627632"/>
+            <a:ext cx="3602736" cy="4626864"/>
+          </a:xfrm>
+          <a:prstGeom prst="roundRect">
+            <a:avLst>
+              <a:gd name="adj" fmla="val 2030"/>
+            </a:avLst>
+          </a:prstGeom>
+          <a:solidFill>
+            <a:srgbClr val="FFFFFF"/>
+          </a:solidFill>
+          <a:ln w="12700">
+            <a:solidFill>
+              <a:srgbClr val="D9D9D9"/>
+            </a:solidFill>
+            <a:prstDash val="solid"/>
+          </a:ln>
+        </p:spPr>
+      </p:sp>
+      <p:sp>
+        <p:nvSpPr>
+          <p:cNvPr id="10" name="Text 8"/>
+          <p:cNvSpPr/>
+          <p:nvPr/>
+        </p:nvSpPr>
+        <p:spPr>
+          <a:xfrm>
+            <a:off x="4297680" y="1188720"/>
+            <a:ext cx="310896" cy="310896"/>
+          </a:xfrm>
+          <a:prstGeom prst="ellipse">
+            <a:avLst/>
+          </a:prstGeom>
+          <a:solidFill>
+            <a:srgbClr val="1428A0"/>
+          </a:solidFill>
+          <a:ln/>
+        </p:spPr>
+        <p:txBody>
+          <a:bodyPr wrap="square" lIns="0" tIns="0" rIns="0" bIns="0" rtlCol="0" anchor="ctr"/>
+          <a:lstStyle/>
+          <a:p>
+            <a:pPr algn="ctr" indent="0" marL="0">
+              <a:buNone/>
+            </a:pPr>
+            <a:r>
+              <a:rPr lang="en-US" sz="1400" b="1" dirty="0">
+                <a:solidFill>
+                  <a:srgbClr val="FFFFFF"/>
+                </a:solidFill>
+                <a:latin typeface="Malgun Gothic" pitchFamily="34" charset="0"/>
+                <a:ea typeface="Malgun Gothic" pitchFamily="34" charset="-122"/>
+                <a:cs typeface="Malgun Gothic" pitchFamily="34" charset="-120"/>
+              </a:rPr>
+              <a:t>2</a:t>
+            </a:r>
+            <a:endParaRPr lang="en-US" sz="1400" dirty="0"/>
+          </a:p>
+        </p:txBody>
+      </p:sp>
+      <p:sp>
+        <p:nvSpPr>
+          <p:cNvPr id="11" name="Text 9"/>
+          <p:cNvSpPr/>
+          <p:nvPr/>
+        </p:nvSpPr>
+        <p:spPr>
+          <a:xfrm>
+            <a:off x="4700016" y="1170432"/>
+            <a:ext cx="3200400" cy="347472"/>
+          </a:xfrm>
+          <a:prstGeom prst="rect">
+            <a:avLst/>
+          </a:prstGeom>
+          <a:noFill/>
+          <a:ln/>
+        </p:spPr>
+        <p:txBody>
+          <a:bodyPr wrap="square" lIns="0" tIns="0" rIns="0" bIns="0" rtlCol="0" anchor="ctr"/>
+          <a:lstStyle/>
+          <a:p>
+            <a:pPr indent="0" marL="0">
+              <a:buNone/>
+            </a:pPr>
+            <a:r>
+              <a:rPr lang="en-US" sz="1350" b="1" dirty="0">
+                <a:solidFill>
+                  <a:srgbClr val="1A1A1A"/>
+                </a:solidFill>
+                <a:latin typeface="Malgun Gothic" pitchFamily="34" charset="0"/>
+                <a:ea typeface="Malgun Gothic" pitchFamily="34" charset="-122"/>
+                <a:cs typeface="Malgun Gothic" pitchFamily="34" charset="-120"/>
+              </a:rPr>
+              <a:t>왜 write-intensive인가</a:t>
+            </a:r>
+            <a:endParaRPr lang="en-US" sz="1350" dirty="0"/>
+          </a:p>
+        </p:txBody>
+      </p:sp>
+      <p:sp>
+        <p:nvSpPr>
+          <p:cNvPr id="12" name="Shape 10"/>
+          <p:cNvSpPr/>
+          <p:nvPr/>
+        </p:nvSpPr>
+        <p:spPr>
+          <a:xfrm>
+            <a:off x="4297680" y="1627632"/>
+            <a:ext cx="3602736" cy="4626864"/>
+          </a:xfrm>
+          <a:prstGeom prst="roundRect">
+            <a:avLst>
+              <a:gd name="adj" fmla="val 2030"/>
+            </a:avLst>
+          </a:prstGeom>
+          <a:solidFill>
+            <a:srgbClr val="FFFFFF"/>
+          </a:solidFill>
+          <a:ln w="12700">
+            <a:solidFill>
+              <a:srgbClr val="D9D9D9"/>
+            </a:solidFill>
+            <a:prstDash val="solid"/>
+          </a:ln>
+        </p:spPr>
+      </p:sp>
+      <p:sp>
+        <p:nvSpPr>
+          <p:cNvPr id="13" name="Text 11"/>
+          <p:cNvSpPr/>
+          <p:nvPr/>
+        </p:nvSpPr>
+        <p:spPr>
+          <a:xfrm>
+            <a:off x="8129016" y="1188720"/>
+            <a:ext cx="310896" cy="310896"/>
+          </a:xfrm>
+          <a:prstGeom prst="ellipse">
+            <a:avLst/>
+          </a:prstGeom>
+          <a:solidFill>
+            <a:srgbClr val="1428A0"/>
+          </a:solidFill>
+          <a:ln/>
+        </p:spPr>
+        <p:txBody>
+          <a:bodyPr wrap="square" lIns="0" tIns="0" rIns="0" bIns="0" rtlCol="0" anchor="ctr"/>
+          <a:lstStyle/>
+          <a:p>
+            <a:pPr algn="ctr" indent="0" marL="0">
+              <a:buNone/>
+            </a:pPr>
+            <a:r>
+              <a:rPr lang="en-US" sz="1400" b="1" dirty="0">
+                <a:solidFill>
+                  <a:srgbClr val="FFFFFF"/>
+                </a:solidFill>
+                <a:latin typeface="Malgun Gothic" pitchFamily="34" charset="0"/>
+                <a:ea typeface="Malgun Gothic" pitchFamily="34" charset="-122"/>
+                <a:cs typeface="Malgun Gothic" pitchFamily="34" charset="-120"/>
+              </a:rPr>
+              <a:t>3</a:t>
+            </a:r>
+            <a:endParaRPr lang="en-US" sz="1400" dirty="0"/>
+          </a:p>
+        </p:txBody>
+      </p:sp>
+      <p:sp>
+        <p:nvSpPr>
+          <p:cNvPr id="14" name="Text 12"/>
+          <p:cNvSpPr/>
+          <p:nvPr/>
+        </p:nvSpPr>
+        <p:spPr>
+          <a:xfrm>
+            <a:off x="8531352" y="1170432"/>
+            <a:ext cx="3200400" cy="347472"/>
+          </a:xfrm>
+          <a:prstGeom prst="rect">
+            <a:avLst/>
+          </a:prstGeom>
+          <a:noFill/>
+          <a:ln/>
+        </p:spPr>
+        <p:txBody>
+          <a:bodyPr wrap="square" lIns="0" tIns="0" rIns="0" bIns="0" rtlCol="0" anchor="ctr"/>
+          <a:lstStyle/>
+          <a:p>
+            <a:pPr indent="0" marL="0">
+              <a:buNone/>
+            </a:pPr>
+            <a:r>
+              <a:rPr lang="en-US" sz="1350" b="1" dirty="0">
+                <a:solidFill>
+                  <a:srgbClr val="1A1A1A"/>
+                </a:solidFill>
+                <a:latin typeface="Malgun Gothic" pitchFamily="34" charset="0"/>
+                <a:ea typeface="Malgun Gothic" pitchFamily="34" charset="-122"/>
+                <a:cs typeface="Malgun Gothic" pitchFamily="34" charset="-120"/>
+              </a:rPr>
+              <a:t>DWPD 갭: 새 전략의 근거</a:t>
+            </a:r>
+            <a:endParaRPr lang="en-US" sz="1350" dirty="0"/>
+          </a:p>
+        </p:txBody>
+      </p:sp>
+      <p:sp>
+        <p:nvSpPr>
+          <p:cNvPr id="15" name="Shape 13"/>
+          <p:cNvSpPr/>
+          <p:nvPr/>
+        </p:nvSpPr>
+        <p:spPr>
+          <a:xfrm>
+            <a:off x="8129016" y="1627632"/>
+            <a:ext cx="3602736" cy="4626864"/>
+          </a:xfrm>
+          <a:prstGeom prst="roundRect">
+            <a:avLst>
+              <a:gd name="adj" fmla="val 2030"/>
+            </a:avLst>
+          </a:prstGeom>
+          <a:solidFill>
+            <a:srgbClr val="FFFFFF"/>
+          </a:solidFill>
+          <a:ln w="12700">
+            <a:solidFill>
+              <a:srgbClr val="D9D9D9"/>
+            </a:solidFill>
+            <a:prstDash val="solid"/>
+          </a:ln>
+        </p:spPr>
+      </p:sp>
+      <p:sp>
+        <p:nvSpPr>
+          <p:cNvPr id="16" name="Shape 14"/>
+          <p:cNvSpPr/>
+          <p:nvPr/>
+        </p:nvSpPr>
+        <p:spPr>
+          <a:xfrm>
+            <a:off x="1207008" y="1792224"/>
+            <a:ext cx="2103120" cy="292608"/>
+          </a:xfrm>
+          <a:prstGeom prst="roundRect">
+            <a:avLst>
+              <a:gd name="adj" fmla="val 12500"/>
+            </a:avLst>
+          </a:prstGeom>
+          <a:solidFill>
+            <a:srgbClr val="F4F4F6"/>
+          </a:solidFill>
+          <a:ln/>
+        </p:spPr>
+      </p:sp>
+      <p:sp>
+        <p:nvSpPr>
+          <p:cNvPr id="17" name="Text 15"/>
+          <p:cNvSpPr/>
+          <p:nvPr/>
+        </p:nvSpPr>
+        <p:spPr>
+          <a:xfrm>
+            <a:off x="1207008" y="1792224"/>
+            <a:ext cx="2103120" cy="292608"/>
+          </a:xfrm>
+          <a:prstGeom prst="rect">
+            <a:avLst/>
+          </a:prstGeom>
+          <a:noFill/>
+          <a:ln/>
+        </p:spPr>
+        <p:txBody>
+          <a:bodyPr wrap="square" lIns="0" tIns="0" rIns="0" bIns="0" rtlCol="0" anchor="ctr"/>
+          <a:lstStyle/>
+          <a:p>
+            <a:pPr algn="ctr" indent="0" marL="0">
+              <a:buNone/>
+            </a:pPr>
+            <a:r>
+              <a:rPr lang="en-US" sz="1000" dirty="0">
+                <a:solidFill>
+                  <a:srgbClr val="555555"/>
+                </a:solidFill>
+                <a:latin typeface="Malgun Gothic" pitchFamily="34" charset="0"/>
+                <a:ea typeface="Malgun Gothic" pitchFamily="34" charset="-122"/>
+                <a:cs typeface="Malgun Gothic" pitchFamily="34" charset="-120"/>
+              </a:rPr>
+              <a:t>GPU HBM</a:t>
+            </a:r>
+            <a:endParaRPr lang="en-US" sz="1000" dirty="0"/>
+          </a:p>
+        </p:txBody>
+      </p:sp>
+      <p:sp>
+        <p:nvSpPr>
+          <p:cNvPr id="18" name="Text 16"/>
+          <p:cNvSpPr/>
+          <p:nvPr/>
+        </p:nvSpPr>
+        <p:spPr>
+          <a:xfrm>
+            <a:off x="2121408" y="2066544"/>
+            <a:ext cx="274320" cy="146304"/>
+          </a:xfrm>
+          <a:prstGeom prst="rect">
+            <a:avLst/>
+          </a:prstGeom>
+          <a:noFill/>
+          <a:ln/>
+        </p:spPr>
+        <p:txBody>
+          <a:bodyPr wrap="square" lIns="0" tIns="0" rIns="0" bIns="0" rtlCol="0" anchor="ctr"/>
+          <a:lstStyle/>
+          <a:p>
+            <a:pPr algn="ctr" indent="0" marL="0">
+              <a:buNone/>
+            </a:pPr>
+            <a:r>
+              <a:rPr lang="en-US" sz="900" dirty="0">
+                <a:solidFill>
+                  <a:srgbClr val="555555"/>
+                </a:solidFill>
+                <a:latin typeface="Malgun Gothic" pitchFamily="34" charset="0"/>
+                <a:ea typeface="Malgun Gothic" pitchFamily="34" charset="-122"/>
+                <a:cs typeface="Malgun Gothic" pitchFamily="34" charset="-120"/>
+              </a:rPr>
+              <a:t>↓</a:t>
+            </a:r>
+            <a:endParaRPr lang="en-US" sz="900" dirty="0"/>
+          </a:p>
+        </p:txBody>
+      </p:sp>
+      <p:sp>
+        <p:nvSpPr>
+          <p:cNvPr id="19" name="Shape 17"/>
+          <p:cNvSpPr/>
+          <p:nvPr/>
+        </p:nvSpPr>
+        <p:spPr>
+          <a:xfrm>
+            <a:off x="1207008" y="2194560"/>
+            <a:ext cx="2103120" cy="292608"/>
+          </a:xfrm>
+          <a:prstGeom prst="roundRect">
+            <a:avLst>
+              <a:gd name="adj" fmla="val 12500"/>
+            </a:avLst>
+          </a:prstGeom>
+          <a:solidFill>
+            <a:srgbClr val="E5E9F2"/>
+          </a:solidFill>
+          <a:ln/>
+        </p:spPr>
+      </p:sp>
+      <p:sp>
+        <p:nvSpPr>
+          <p:cNvPr id="20" name="Text 18"/>
+          <p:cNvSpPr/>
+          <p:nvPr/>
+        </p:nvSpPr>
+        <p:spPr>
+          <a:xfrm>
+            <a:off x="1207008" y="2194560"/>
+            <a:ext cx="2103120" cy="292608"/>
+          </a:xfrm>
+          <a:prstGeom prst="rect">
+            <a:avLst/>
+          </a:prstGeom>
+          <a:noFill/>
+          <a:ln/>
+        </p:spPr>
+        <p:txBody>
+          <a:bodyPr wrap="square" lIns="0" tIns="0" rIns="0" bIns="0" rtlCol="0" anchor="ctr"/>
+          <a:lstStyle/>
+          <a:p>
+            <a:pPr algn="ctr" indent="0" marL="0">
+              <a:buNone/>
+            </a:pPr>
+            <a:r>
+              <a:rPr lang="en-US" sz="1000" dirty="0">
+                <a:solidFill>
+                  <a:srgbClr val="1A1A1A"/>
+                </a:solidFill>
+                <a:latin typeface="Malgun Gothic" pitchFamily="34" charset="0"/>
+                <a:ea typeface="Malgun Gothic" pitchFamily="34" charset="-122"/>
+                <a:cs typeface="Malgun Gothic" pitchFamily="34" charset="-120"/>
+              </a:rPr>
+              <a:t>호스트 DRAM</a:t>
+            </a:r>
+            <a:endParaRPr lang="en-US" sz="1000" dirty="0"/>
+          </a:p>
+        </p:txBody>
+      </p:sp>
+      <p:sp>
+        <p:nvSpPr>
+          <p:cNvPr id="21" name="Text 19"/>
+          <p:cNvSpPr/>
+          <p:nvPr/>
+        </p:nvSpPr>
+        <p:spPr>
+          <a:xfrm>
+            <a:off x="2121408" y="2468880"/>
+            <a:ext cx="274320" cy="146304"/>
+          </a:xfrm>
+          <a:prstGeom prst="rect">
+            <a:avLst/>
+          </a:prstGeom>
+          <a:noFill/>
+          <a:ln/>
+        </p:spPr>
+        <p:txBody>
+          <a:bodyPr wrap="square" lIns="0" tIns="0" rIns="0" bIns="0" rtlCol="0" anchor="ctr"/>
+          <a:lstStyle/>
+          <a:p>
+            <a:pPr algn="ctr" indent="0" marL="0">
+              <a:buNone/>
+            </a:pPr>
+            <a:r>
+              <a:rPr lang="en-US" sz="900" dirty="0">
+                <a:solidFill>
+                  <a:srgbClr val="555555"/>
+                </a:solidFill>
+                <a:latin typeface="Malgun Gothic" pitchFamily="34" charset="0"/>
+                <a:ea typeface="Malgun Gothic" pitchFamily="34" charset="-122"/>
+                <a:cs typeface="Malgun Gothic" pitchFamily="34" charset="-120"/>
+              </a:rPr>
+              <a:t>↓</a:t>
+            </a:r>
+            <a:endParaRPr lang="en-US" sz="900" dirty="0"/>
+          </a:p>
+        </p:txBody>
+      </p:sp>
+      <p:sp>
+        <p:nvSpPr>
+          <p:cNvPr id="22" name="Shape 20"/>
+          <p:cNvSpPr/>
+          <p:nvPr/>
+        </p:nvSpPr>
+        <p:spPr>
+          <a:xfrm>
+            <a:off x="1207008" y="2596896"/>
+            <a:ext cx="2103120" cy="292608"/>
+          </a:xfrm>
+          <a:prstGeom prst="roundRect">
+            <a:avLst>
+              <a:gd name="adj" fmla="val 12500"/>
+            </a:avLst>
+          </a:prstGeom>
+          <a:solidFill>
+            <a:srgbClr val="1428A0"/>
+          </a:solidFill>
+          <a:ln/>
+        </p:spPr>
+      </p:sp>
+      <p:sp>
+        <p:nvSpPr>
+          <p:cNvPr id="23" name="Text 21"/>
+          <p:cNvSpPr/>
+          <p:nvPr/>
+        </p:nvSpPr>
+        <p:spPr>
+          <a:xfrm>
+            <a:off x="1207008" y="2596896"/>
+            <a:ext cx="2103120" cy="292608"/>
+          </a:xfrm>
+          <a:prstGeom prst="rect">
+            <a:avLst/>
+          </a:prstGeom>
+          <a:noFill/>
+          <a:ln/>
+        </p:spPr>
+        <p:txBody>
+          <a:bodyPr wrap="square" lIns="0" tIns="0" rIns="0" bIns="0" rtlCol="0" anchor="ctr"/>
+          <a:lstStyle/>
+          <a:p>
+            <a:pPr algn="ctr" indent="0" marL="0">
+              <a:buNone/>
+            </a:pPr>
+            <a:r>
+              <a:rPr lang="en-US" sz="1000" b="1" dirty="0">
+                <a:solidFill>
+                  <a:srgbClr val="FFFFFF"/>
+                </a:solidFill>
+                <a:latin typeface="Malgun Gothic" pitchFamily="34" charset="0"/>
+                <a:ea typeface="Malgun Gothic" pitchFamily="34" charset="-122"/>
+                <a:cs typeface="Malgun Gothic" pitchFamily="34" charset="-120"/>
+              </a:rPr>
+              <a:t>SSD: KV 캐시 계층</a:t>
+            </a:r>
+            <a:endParaRPr lang="en-US" sz="1000" dirty="0"/>
+          </a:p>
+        </p:txBody>
+      </p:sp>
+      <p:sp>
+        <p:nvSpPr>
+          <p:cNvPr id="24" name="Text 22"/>
+          <p:cNvSpPr/>
+          <p:nvPr/>
+        </p:nvSpPr>
+        <p:spPr>
+          <a:xfrm>
+            <a:off x="658368" y="3054096"/>
+            <a:ext cx="3200400" cy="237744"/>
+          </a:xfrm>
+          <a:prstGeom prst="rect">
+            <a:avLst/>
+          </a:prstGeom>
+          <a:noFill/>
+          <a:ln/>
+        </p:spPr>
+        <p:txBody>
+          <a:bodyPr wrap="square" lIns="0" tIns="0" rIns="0" bIns="0" rtlCol="0" anchor="ctr"/>
+          <a:lstStyle/>
+          <a:p>
+            <a:pPr algn="ctr" indent="0" marL="0">
+              <a:buNone/>
+            </a:pPr>
+            <a:r>
+              <a:rPr lang="en-US" sz="900" dirty="0">
+                <a:solidFill>
+                  <a:srgbClr val="555555"/>
+                </a:solidFill>
+                <a:latin typeface="Malgun Gothic" pitchFamily="34" charset="0"/>
+                <a:ea typeface="Malgun Gothic" pitchFamily="34" charset="-122"/>
+                <a:cs typeface="Malgun Gothic" pitchFamily="34" charset="-120"/>
+              </a:rPr>
+              <a:t>Dynamo·CMX·LMCache·Mooncake가 SSD 계층 공식 지원</a:t>
+            </a:r>
+            <a:endParaRPr lang="en-US" sz="900" dirty="0"/>
+          </a:p>
+        </p:txBody>
+      </p:sp>
+      <p:sp>
+        <p:nvSpPr>
+          <p:cNvPr id="25" name="Shape 23"/>
+          <p:cNvSpPr/>
+          <p:nvPr/>
+        </p:nvSpPr>
+        <p:spPr>
+          <a:xfrm>
+            <a:off x="841248" y="4828032"/>
+            <a:ext cx="2651760" cy="0"/>
+          </a:xfrm>
+          <a:prstGeom prst="line">
+            <a:avLst/>
+          </a:prstGeom>
+          <a:noFill/>
+          <a:ln w="12700">
+            <a:solidFill>
+              <a:srgbClr val="555555"/>
+            </a:solidFill>
+            <a:prstDash val="solid"/>
+          </a:ln>
+        </p:spPr>
+      </p:sp>
+      <p:sp>
+        <p:nvSpPr>
+          <p:cNvPr id="26" name="Shape 24"/>
+          <p:cNvSpPr/>
+          <p:nvPr/>
+        </p:nvSpPr>
+        <p:spPr>
+          <a:xfrm>
+            <a:off x="1234440" y="4325112"/>
+            <a:ext cx="640080" cy="125730"/>
+          </a:xfrm>
+          <a:prstGeom prst="rect">
+            <a:avLst/>
+          </a:prstGeom>
+          <a:solidFill>
+            <a:srgbClr val="8FA0DC"/>
+          </a:solidFill>
+          <a:ln/>
+        </p:spPr>
+      </p:sp>
+      <p:sp>
+        <p:nvSpPr>
+          <p:cNvPr id="27" name="Shape 25"/>
+          <p:cNvSpPr/>
+          <p:nvPr/>
+        </p:nvSpPr>
+        <p:spPr>
+          <a:xfrm>
+            <a:off x="1234440" y="4450842"/>
+            <a:ext cx="640080" cy="377190"/>
+          </a:xfrm>
+          <a:prstGeom prst="rect">
+            <a:avLst/>
+          </a:prstGeom>
+          <a:solidFill>
+            <a:srgbClr val="1428A0"/>
+          </a:solidFill>
+          <a:ln/>
+        </p:spPr>
+      </p:sp>
+      <p:sp>
+        <p:nvSpPr>
+          <p:cNvPr id="28" name="Text 26"/>
+          <p:cNvSpPr/>
+          <p:nvPr/>
+        </p:nvSpPr>
+        <p:spPr>
+          <a:xfrm>
+            <a:off x="914400" y="4069080"/>
+            <a:ext cx="1280160" cy="237744"/>
+          </a:xfrm>
+          <a:prstGeom prst="rect">
+            <a:avLst/>
+          </a:prstGeom>
+          <a:noFill/>
+          <a:ln/>
+        </p:spPr>
+        <p:txBody>
+          <a:bodyPr wrap="square" lIns="0" tIns="0" rIns="0" bIns="0" rtlCol="0" anchor="ctr"/>
+          <a:lstStyle/>
+          <a:p>
+            <a:pPr algn="ctr" indent="0" marL="0">
+              <a:buNone/>
+            </a:pPr>
+            <a:r>
+              <a:rPr lang="en-US" sz="1050" b="1" dirty="0">
+                <a:solidFill>
+                  <a:srgbClr val="1428A0"/>
+                </a:solidFill>
+                <a:latin typeface="Malgun Gothic" pitchFamily="34" charset="0"/>
+                <a:ea typeface="Malgun Gothic" pitchFamily="34" charset="-122"/>
+                <a:cs typeface="Malgun Gothic" pitchFamily="34" charset="-120"/>
+              </a:rPr>
+              <a:t>75~100EB</a:t>
+            </a:r>
+            <a:endParaRPr lang="en-US" sz="1050" dirty="0"/>
+          </a:p>
+        </p:txBody>
+      </p:sp>
+      <p:sp>
+        <p:nvSpPr>
+          <p:cNvPr id="29" name="Text 27"/>
+          <p:cNvSpPr/>
+          <p:nvPr/>
+        </p:nvSpPr>
+        <p:spPr>
+          <a:xfrm>
+            <a:off x="1097280" y="4864608"/>
+            <a:ext cx="914400" cy="219456"/>
+          </a:xfrm>
+          <a:prstGeom prst="rect">
+            <a:avLst/>
+          </a:prstGeom>
+          <a:noFill/>
+          <a:ln/>
+        </p:spPr>
+        <p:txBody>
+          <a:bodyPr wrap="square" lIns="0" tIns="0" rIns="0" bIns="0" rtlCol="0" anchor="ctr"/>
+          <a:lstStyle/>
+          <a:p>
+            <a:pPr algn="ctr" indent="0" marL="0">
+              <a:buNone/>
+            </a:pPr>
+            <a:r>
+              <a:rPr lang="en-US" sz="1000" dirty="0">
+                <a:solidFill>
+                  <a:srgbClr val="1A1A1A"/>
+                </a:solidFill>
+                <a:latin typeface="Malgun Gothic" pitchFamily="34" charset="0"/>
+                <a:ea typeface="Malgun Gothic" pitchFamily="34" charset="-122"/>
+                <a:cs typeface="Malgun Gothic" pitchFamily="34" charset="-120"/>
+              </a:rPr>
+              <a:t>2027</a:t>
+            </a:r>
+            <a:endParaRPr lang="en-US" sz="1000" dirty="0"/>
+          </a:p>
+        </p:txBody>
+      </p:sp>
+      <p:sp>
+        <p:nvSpPr>
+          <p:cNvPr id="30" name="Shape 28"/>
+          <p:cNvSpPr/>
+          <p:nvPr/>
+        </p:nvSpPr>
+        <p:spPr>
+          <a:xfrm>
+            <a:off x="2468880" y="3822192"/>
+            <a:ext cx="640080" cy="251460"/>
+          </a:xfrm>
+          <a:prstGeom prst="rect">
+            <a:avLst/>
+          </a:prstGeom>
+          <a:solidFill>
+            <a:srgbClr val="8FA0DC"/>
+          </a:solidFill>
+          <a:ln/>
+        </p:spPr>
+      </p:sp>
+      <p:sp>
+        <p:nvSpPr>
+          <p:cNvPr id="31" name="Shape 29"/>
+          <p:cNvSpPr/>
+          <p:nvPr/>
+        </p:nvSpPr>
+        <p:spPr>
+          <a:xfrm>
+            <a:off x="2468880" y="4073652"/>
+            <a:ext cx="640080" cy="754380"/>
+          </a:xfrm>
+          <a:prstGeom prst="rect">
+            <a:avLst/>
+          </a:prstGeom>
+          <a:solidFill>
+            <a:srgbClr val="1428A0"/>
+          </a:solidFill>
+          <a:ln/>
+        </p:spPr>
+      </p:sp>
+      <p:sp>
+        <p:nvSpPr>
+          <p:cNvPr id="32" name="Text 30"/>
+          <p:cNvSpPr/>
+          <p:nvPr/>
+        </p:nvSpPr>
+        <p:spPr>
+          <a:xfrm>
+            <a:off x="2148840" y="3566160"/>
+            <a:ext cx="1280160" cy="237744"/>
+          </a:xfrm>
+          <a:prstGeom prst="rect">
+            <a:avLst/>
+          </a:prstGeom>
+          <a:noFill/>
+          <a:ln/>
+        </p:spPr>
+        <p:txBody>
+          <a:bodyPr wrap="square" lIns="0" tIns="0" rIns="0" bIns="0" rtlCol="0" anchor="ctr"/>
+          <a:lstStyle/>
+          <a:p>
+            <a:pPr algn="ctr" indent="0" marL="0">
+              <a:buNone/>
+            </a:pPr>
+            <a:r>
+              <a:rPr lang="en-US" sz="1050" b="1" dirty="0">
+                <a:solidFill>
+                  <a:srgbClr val="1428A0"/>
+                </a:solidFill>
+                <a:latin typeface="Malgun Gothic" pitchFamily="34" charset="0"/>
+                <a:ea typeface="Malgun Gothic" pitchFamily="34" charset="-122"/>
+                <a:cs typeface="Malgun Gothic" pitchFamily="34" charset="-120"/>
+              </a:rPr>
+              <a:t>150~200EB</a:t>
+            </a:r>
+            <a:endParaRPr lang="en-US" sz="1050" dirty="0"/>
+          </a:p>
+        </p:txBody>
+      </p:sp>
+      <p:sp>
+        <p:nvSpPr>
+          <p:cNvPr id="33" name="Text 31"/>
+          <p:cNvSpPr/>
+          <p:nvPr/>
+        </p:nvSpPr>
+        <p:spPr>
+          <a:xfrm>
+            <a:off x="2331720" y="4864608"/>
+            <a:ext cx="914400" cy="219456"/>
+          </a:xfrm>
+          <a:prstGeom prst="rect">
+            <a:avLst/>
+          </a:prstGeom>
+          <a:noFill/>
+          <a:ln/>
+        </p:spPr>
+        <p:txBody>
+          <a:bodyPr wrap="square" lIns="0" tIns="0" rIns="0" bIns="0" rtlCol="0" anchor="ctr"/>
+          <a:lstStyle/>
+          <a:p>
+            <a:pPr algn="ctr" indent="0" marL="0">
+              <a:buNone/>
+            </a:pPr>
+            <a:r>
+              <a:rPr lang="en-US" sz="1000" dirty="0">
+                <a:solidFill>
+                  <a:srgbClr val="1A1A1A"/>
+                </a:solidFill>
+                <a:latin typeface="Malgun Gothic" pitchFamily="34" charset="0"/>
+                <a:ea typeface="Malgun Gothic" pitchFamily="34" charset="-122"/>
+                <a:cs typeface="Malgun Gothic" pitchFamily="34" charset="-120"/>
+              </a:rPr>
+              <a:t>2028</a:t>
+            </a:r>
+            <a:endParaRPr lang="en-US" sz="1000" dirty="0"/>
+          </a:p>
+        </p:txBody>
+      </p:sp>
+      <p:sp>
+        <p:nvSpPr>
+          <p:cNvPr id="34" name="Text 32"/>
+          <p:cNvSpPr/>
+          <p:nvPr/>
+        </p:nvSpPr>
+        <p:spPr>
+          <a:xfrm>
+            <a:off x="658368" y="3218688"/>
+            <a:ext cx="3200400" cy="237744"/>
+          </a:xfrm>
+          <a:prstGeom prst="rect">
+            <a:avLst/>
+          </a:prstGeom>
+          <a:noFill/>
+          <a:ln/>
+        </p:spPr>
+        <p:txBody>
+          <a:bodyPr wrap="square" lIns="0" tIns="0" rIns="0" bIns="0" rtlCol="0" anchor="ctr"/>
+          <a:lstStyle/>
+          <a:p>
+            <a:pPr indent="0" marL="0">
+              <a:buNone/>
+            </a:pPr>
+            <a:r>
+              <a:rPr lang="en-US" sz="1050" b="1" dirty="0">
+                <a:solidFill>
+                  <a:srgbClr val="1428A0"/>
+                </a:solidFill>
+                <a:latin typeface="Malgun Gothic" pitchFamily="34" charset="0"/>
+                <a:ea typeface="Malgun Gothic" pitchFamily="34" charset="-122"/>
+                <a:cs typeface="Malgun Gothic" pitchFamily="34" charset="-120"/>
+              </a:rPr>
+              <a:t>KV cache 단독 NAND 추가 수요</a:t>
+            </a:r>
+            <a:endParaRPr lang="en-US" sz="1050" dirty="0"/>
+          </a:p>
+        </p:txBody>
+      </p:sp>
+      <p:sp>
+        <p:nvSpPr>
+          <p:cNvPr id="35" name="Text 33"/>
+          <p:cNvSpPr/>
+          <p:nvPr/>
+        </p:nvSpPr>
+        <p:spPr>
+          <a:xfrm>
+            <a:off x="658368" y="5230368"/>
+            <a:ext cx="3200400" cy="859536"/>
+          </a:xfrm>
+          <a:prstGeom prst="rect">
+            <a:avLst/>
+          </a:prstGeom>
+          <a:noFill/>
+          <a:ln/>
+        </p:spPr>
+        <p:txBody>
+          <a:bodyPr wrap="square" lIns="0" tIns="0" rIns="0" bIns="0" rtlCol="0" anchor="ctr"/>
+          <a:lstStyle/>
+          <a:p>
+            <a:pPr indent="0" marL="0">
+              <a:lnSpc>
+                <a:spcPct val="112000"/>
+              </a:lnSpc>
+              <a:buNone/>
+            </a:pPr>
+            <a:r>
+              <a:rPr lang="en-US" sz="2000" b="1" dirty="0">
+                <a:solidFill>
+                  <a:srgbClr val="1428A0"/>
+                </a:solidFill>
+                <a:latin typeface="Malgun Gothic" pitchFamily="34" charset="0"/>
+                <a:ea typeface="Malgun Gothic" pitchFamily="34" charset="-122"/>
+                <a:cs typeface="Malgun Gothic" pitchFamily="34" charset="-120"/>
+              </a:rPr>
+              <a:t>35%  </a:t>
+            </a:r>
+            <a:pPr indent="0" marL="0">
+              <a:lnSpc>
+                <a:spcPct val="112000"/>
+              </a:lnSpc>
+              <a:buNone/>
+            </a:pPr>
+            <a:r>
+              <a:rPr lang="en-US" sz="950" dirty="0">
+                <a:solidFill>
+                  <a:srgbClr val="555555"/>
+                </a:solidFill>
+                <a:latin typeface="Malgun Gothic" pitchFamily="34" charset="0"/>
+                <a:ea typeface="Malgun Gothic" pitchFamily="34" charset="-122"/>
+                <a:cs typeface="Malgun Gothic" pitchFamily="34" charset="-120"/>
+              </a:rPr>
+              <a:t>2030년 AI DC NAND 워크로드 중 KV cache 비중 (SanDisk, FMS 2026) · NVL144 랙 연 5만 대 기준 연 ~0.44EB</a:t>
+            </a:r>
+            <a:endParaRPr lang="en-US" sz="2000" dirty="0"/>
+          </a:p>
+        </p:txBody>
+      </p:sp>
+      <p:sp>
+        <p:nvSpPr>
+          <p:cNvPr id="36" name="Shape 34"/>
+          <p:cNvSpPr/>
+          <p:nvPr/>
+        </p:nvSpPr>
+        <p:spPr>
+          <a:xfrm>
+            <a:off x="4498848" y="1856232"/>
+            <a:ext cx="128016" cy="128016"/>
+          </a:xfrm>
+          <a:prstGeom prst="rect">
+            <a:avLst/>
+          </a:prstGeom>
+          <a:solidFill>
+            <a:srgbClr val="1428A0"/>
+          </a:solidFill>
+          <a:ln/>
+        </p:spPr>
+      </p:sp>
+      <p:sp>
+        <p:nvSpPr>
+          <p:cNvPr id="37" name="Text 35"/>
+          <p:cNvSpPr/>
+          <p:nvPr/>
+        </p:nvSpPr>
+        <p:spPr>
+          <a:xfrm>
+            <a:off x="4736592" y="1755648"/>
+            <a:ext cx="3017520" cy="731520"/>
+          </a:xfrm>
+          <a:prstGeom prst="rect">
+            <a:avLst/>
+          </a:prstGeom>
+          <a:noFill/>
+          <a:ln/>
+        </p:spPr>
+        <p:txBody>
+          <a:bodyPr wrap="square" lIns="0" tIns="0" rIns="0" bIns="0" rtlCol="0" anchor="t"/>
+          <a:lstStyle/>
+          <a:p>
+            <a:pPr indent="0" marL="0">
+              <a:lnSpc>
+                <a:spcPct val="112000"/>
+              </a:lnSpc>
+              <a:buNone/>
+            </a:pPr>
+            <a:r>
+              <a:rPr lang="en-US" sz="1100" b="1" dirty="0">
+                <a:solidFill>
+                  <a:srgbClr val="1A1A1A"/>
+                </a:solidFill>
+                <a:latin typeface="Malgun Gothic" pitchFamily="34" charset="0"/>
+                <a:ea typeface="Malgun Gothic" pitchFamily="34" charset="-122"/>
+                <a:cs typeface="Malgun Gothic" pitchFamily="34" charset="-120"/>
+              </a:rPr>
+              <a:t>세션마다 생성·갱신</a:t>
+            </a:r>
+            <a:endParaRPr lang="en-US" sz="1100" dirty="0"/>
+          </a:p>
+          <a:p>
+            <a:pPr indent="0" marL="0">
+              <a:lnSpc>
+                <a:spcPct val="112000"/>
+              </a:lnSpc>
+              <a:buNone/>
+            </a:pPr>
+            <a:r>
+              <a:rPr lang="en-US" sz="1000" dirty="0">
+                <a:solidFill>
+                  <a:srgbClr val="555555"/>
+                </a:solidFill>
+                <a:latin typeface="Malgun Gothic" pitchFamily="34" charset="0"/>
+                <a:ea typeface="Malgun Gothic" pitchFamily="34" charset="-122"/>
+                <a:cs typeface="Malgun Gothic" pitchFamily="34" charset="-120"/>
+              </a:rPr>
+              <a:t>요청이 곧 쓰기: 연속적 쓰기 부하</a:t>
+            </a:r>
+            <a:endParaRPr lang="en-US" sz="1100" dirty="0"/>
+          </a:p>
+        </p:txBody>
+      </p:sp>
+      <p:sp>
+        <p:nvSpPr>
+          <p:cNvPr id="38" name="Shape 36"/>
+          <p:cNvSpPr/>
+          <p:nvPr/>
+        </p:nvSpPr>
+        <p:spPr>
+          <a:xfrm>
+            <a:off x="4498848" y="2642616"/>
+            <a:ext cx="128016" cy="128016"/>
+          </a:xfrm>
+          <a:prstGeom prst="rect">
+            <a:avLst/>
+          </a:prstGeom>
+          <a:solidFill>
+            <a:srgbClr val="1428A0"/>
+          </a:solidFill>
+          <a:ln/>
+        </p:spPr>
+      </p:sp>
+      <p:sp>
+        <p:nvSpPr>
+          <p:cNvPr id="39" name="Text 37"/>
+          <p:cNvSpPr/>
+          <p:nvPr/>
+        </p:nvSpPr>
+        <p:spPr>
+          <a:xfrm>
+            <a:off x="4736592" y="2542032"/>
+            <a:ext cx="3017520" cy="731520"/>
+          </a:xfrm>
+          <a:prstGeom prst="rect">
+            <a:avLst/>
+          </a:prstGeom>
+          <a:noFill/>
+          <a:ln/>
+        </p:spPr>
+        <p:txBody>
+          <a:bodyPr wrap="square" lIns="0" tIns="0" rIns="0" bIns="0" rtlCol="0" anchor="t"/>
+          <a:lstStyle/>
+          <a:p>
+            <a:pPr indent="0" marL="0">
+              <a:lnSpc>
+                <a:spcPct val="112000"/>
+              </a:lnSpc>
+              <a:buNone/>
+            </a:pPr>
+            <a:r>
+              <a:rPr lang="en-US" sz="1100" b="1" dirty="0">
+                <a:solidFill>
+                  <a:srgbClr val="1A1A1A"/>
+                </a:solidFill>
+                <a:latin typeface="Malgun Gothic" pitchFamily="34" charset="0"/>
+                <a:ea typeface="Malgun Gothic" pitchFamily="34" charset="-122"/>
+                <a:cs typeface="Malgun Gothic" pitchFamily="34" charset="-120"/>
+              </a:rPr>
+              <a:t>짧고 제각각인 수명</a:t>
+            </a:r>
+            <a:endParaRPr lang="en-US" sz="1100" dirty="0"/>
+          </a:p>
+          <a:p>
+            <a:pPr indent="0" marL="0">
+              <a:lnSpc>
+                <a:spcPct val="112000"/>
+              </a:lnSpc>
+              <a:buNone/>
+            </a:pPr>
+            <a:r>
+              <a:rPr lang="en-US" sz="1000" dirty="0">
+                <a:solidFill>
+                  <a:srgbClr val="555555"/>
+                </a:solidFill>
+                <a:latin typeface="Malgun Gothic" pitchFamily="34" charset="0"/>
+                <a:ea typeface="Malgun Gothic" pitchFamily="34" charset="-122"/>
+                <a:cs typeface="Malgun Gothic" pitchFamily="34" charset="-120"/>
+              </a:rPr>
+              <a:t>블록별 라이프사이클이 모두 다르다</a:t>
+            </a:r>
+            <a:endParaRPr lang="en-US" sz="1100" dirty="0"/>
+          </a:p>
+        </p:txBody>
+      </p:sp>
+      <p:sp>
+        <p:nvSpPr>
+          <p:cNvPr id="40" name="Shape 38"/>
+          <p:cNvSpPr/>
+          <p:nvPr/>
+        </p:nvSpPr>
+        <p:spPr>
+          <a:xfrm>
+            <a:off x="4498848" y="3429000"/>
+            <a:ext cx="128016" cy="128016"/>
+          </a:xfrm>
+          <a:prstGeom prst="rect">
+            <a:avLst/>
+          </a:prstGeom>
+          <a:solidFill>
+            <a:srgbClr val="1428A0"/>
+          </a:solidFill>
+          <a:ln/>
+        </p:spPr>
+      </p:sp>
+      <p:sp>
+        <p:nvSpPr>
+          <p:cNvPr id="41" name="Text 39"/>
+          <p:cNvSpPr/>
+          <p:nvPr/>
+        </p:nvSpPr>
+        <p:spPr>
+          <a:xfrm>
+            <a:off x="4736592" y="3328416"/>
+            <a:ext cx="3017520" cy="731520"/>
+          </a:xfrm>
+          <a:prstGeom prst="rect">
+            <a:avLst/>
+          </a:prstGeom>
+          <a:noFill/>
+          <a:ln/>
+        </p:spPr>
+        <p:txBody>
+          <a:bodyPr wrap="square" lIns="0" tIns="0" rIns="0" bIns="0" rtlCol="0" anchor="t"/>
+          <a:lstStyle/>
+          <a:p>
+            <a:pPr indent="0" marL="0">
+              <a:lnSpc>
+                <a:spcPct val="112000"/>
+              </a:lnSpc>
+              <a:buNone/>
+            </a:pPr>
+            <a:r>
+              <a:rPr lang="en-US" sz="1100" b="1" dirty="0">
+                <a:solidFill>
+                  <a:srgbClr val="1A1A1A"/>
+                </a:solidFill>
+                <a:latin typeface="Malgun Gothic" pitchFamily="34" charset="0"/>
+                <a:ea typeface="Malgun Gothic" pitchFamily="34" charset="-122"/>
+                <a:cs typeface="Malgun Gothic" pitchFamily="34" charset="-120"/>
+              </a:rPr>
+              <a:t>비동기 무효화·재적재</a:t>
+            </a:r>
+            <a:endParaRPr lang="en-US" sz="1100" dirty="0"/>
+          </a:p>
+          <a:p>
+            <a:pPr indent="0" marL="0">
+              <a:lnSpc>
+                <a:spcPct val="112000"/>
+              </a:lnSpc>
+              <a:buNone/>
+            </a:pPr>
+            <a:r>
+              <a:rPr lang="en-US" sz="1000" dirty="0">
+                <a:solidFill>
+                  <a:srgbClr val="555555"/>
+                </a:solidFill>
+                <a:latin typeface="Malgun Gothic" pitchFamily="34" charset="0"/>
+                <a:ea typeface="Malgun Gothic" pitchFamily="34" charset="-122"/>
+                <a:cs typeface="Malgun Gothic" pitchFamily="34" charset="-120"/>
+              </a:rPr>
+              <a:t>퇴출과 재활성이 상시 반복</a:t>
+            </a:r>
+            <a:endParaRPr lang="en-US" sz="1100" dirty="0"/>
+          </a:p>
+        </p:txBody>
+      </p:sp>
+      <p:sp>
+        <p:nvSpPr>
+          <p:cNvPr id="42" name="Shape 40"/>
+          <p:cNvSpPr/>
+          <p:nvPr/>
+        </p:nvSpPr>
+        <p:spPr>
+          <a:xfrm>
+            <a:off x="4498848" y="4215384"/>
+            <a:ext cx="128016" cy="128016"/>
+          </a:xfrm>
+          <a:prstGeom prst="rect">
+            <a:avLst/>
+          </a:prstGeom>
+          <a:solidFill>
+            <a:srgbClr val="1428A0"/>
+          </a:solidFill>
+          <a:ln/>
+        </p:spPr>
+      </p:sp>
+      <p:sp>
+        <p:nvSpPr>
+          <p:cNvPr id="43" name="Text 41"/>
+          <p:cNvSpPr/>
+          <p:nvPr/>
+        </p:nvSpPr>
+        <p:spPr>
+          <a:xfrm>
+            <a:off x="4736592" y="4114800"/>
+            <a:ext cx="3017520" cy="731520"/>
+          </a:xfrm>
+          <a:prstGeom prst="rect">
+            <a:avLst/>
+          </a:prstGeom>
+          <a:noFill/>
+          <a:ln/>
+        </p:spPr>
+        <p:txBody>
+          <a:bodyPr wrap="square" lIns="0" tIns="0" rIns="0" bIns="0" rtlCol="0" anchor="t"/>
+          <a:lstStyle/>
+          <a:p>
+            <a:pPr indent="0" marL="0">
+              <a:lnSpc>
+                <a:spcPct val="112000"/>
+              </a:lnSpc>
+              <a:buNone/>
+            </a:pPr>
+            <a:r>
+              <a:rPr lang="en-US" sz="1100" b="1" dirty="0">
+                <a:solidFill>
+                  <a:srgbClr val="1A1A1A"/>
+                </a:solidFill>
+                <a:latin typeface="Malgun Gothic" pitchFamily="34" charset="0"/>
+                <a:ea typeface="Malgun Gothic" pitchFamily="34" charset="-122"/>
+                <a:cs typeface="Malgun Gothic" pitchFamily="34" charset="-120"/>
+              </a:rPr>
+              <a:t>멀티테넌트 혼합</a:t>
+            </a:r>
+            <a:endParaRPr lang="en-US" sz="1100" dirty="0"/>
+          </a:p>
+          <a:p>
+            <a:pPr indent="0" marL="0">
+              <a:lnSpc>
+                <a:spcPct val="112000"/>
+              </a:lnSpc>
+              <a:buNone/>
+            </a:pPr>
+            <a:r>
+              <a:rPr lang="en-US" sz="1000" dirty="0">
+                <a:solidFill>
+                  <a:srgbClr val="555555"/>
+                </a:solidFill>
+                <a:latin typeface="Malgun Gothic" pitchFamily="34" charset="0"/>
+                <a:ea typeface="Malgun Gothic" pitchFamily="34" charset="-122"/>
+                <a:cs typeface="Malgun Gothic" pitchFamily="34" charset="-120"/>
+              </a:rPr>
+              <a:t>GC 간섭으로 WAF 증폭</a:t>
+            </a:r>
+            <a:endParaRPr lang="en-US" sz="1100" dirty="0"/>
+          </a:p>
+        </p:txBody>
+      </p:sp>
+      <p:sp>
+        <p:nvSpPr>
+          <p:cNvPr id="44" name="Text 42"/>
+          <p:cNvSpPr/>
+          <p:nvPr/>
+        </p:nvSpPr>
+        <p:spPr>
+          <a:xfrm>
+            <a:off x="4498848" y="5029200"/>
+            <a:ext cx="3200400" cy="566928"/>
+          </a:xfrm>
+          <a:prstGeom prst="roundRect">
+            <a:avLst>
+              <a:gd name="adj" fmla="val 8065"/>
+            </a:avLst>
+          </a:prstGeom>
+          <a:solidFill>
+            <a:srgbClr val="F4F4F6"/>
+          </a:solidFill>
+          <a:ln/>
+        </p:spPr>
+        <p:txBody>
+          <a:bodyPr wrap="square" lIns="1016" tIns="1016" rIns="1016" bIns="1016" rtlCol="0" anchor="ctr"/>
+          <a:lstStyle/>
+          <a:p>
+            <a:pPr indent="0" marL="0">
+              <a:lnSpc>
+                <a:spcPct val="110000"/>
+              </a:lnSpc>
+              <a:buNone/>
+            </a:pPr>
+            <a:r>
+              <a:rPr lang="en-US" sz="1050" b="1" dirty="0">
+                <a:solidFill>
+                  <a:srgbClr val="1428A0"/>
+                </a:solidFill>
+                <a:latin typeface="Malgun Gothic" pitchFamily="34" charset="0"/>
+                <a:ea typeface="Malgun Gothic" pitchFamily="34" charset="-122"/>
+                <a:cs typeface="Malgun Gothic" pitchFamily="34" charset="-120"/>
+              </a:rPr>
+              <a:t>결과  </a:t>
+            </a:r>
+            <a:pPr indent="0" marL="0">
+              <a:lnSpc>
+                <a:spcPct val="110000"/>
+              </a:lnSpc>
+              <a:buNone/>
+            </a:pPr>
+            <a:r>
+              <a:rPr lang="en-US" sz="1050" dirty="0">
+                <a:solidFill>
+                  <a:srgbClr val="1A1A1A"/>
+                </a:solidFill>
+                <a:latin typeface="Malgun Gothic" pitchFamily="34" charset="0"/>
+                <a:ea typeface="Malgun Gothic" pitchFamily="34" charset="-122"/>
+                <a:cs typeface="Malgun Gothic" pitchFamily="34" charset="-120"/>
+              </a:rPr>
+              <a:t>일반 서버 앱 대비 월등한 쓰기 밀도: mixed-use 등급을 넘는 내구성 요구</a:t>
+            </a:r>
+            <a:endParaRPr lang="en-US" sz="1050" dirty="0"/>
+          </a:p>
+        </p:txBody>
+      </p:sp>
+      <p:sp>
+        <p:nvSpPr>
+          <p:cNvPr id="45" name="Text 43"/>
+          <p:cNvSpPr/>
+          <p:nvPr/>
+        </p:nvSpPr>
+        <p:spPr>
+          <a:xfrm>
+            <a:off x="4498848" y="5870448"/>
+            <a:ext cx="3200400" cy="237744"/>
+          </a:xfrm>
+          <a:prstGeom prst="rect">
+            <a:avLst/>
+          </a:prstGeom>
+          <a:noFill/>
+          <a:ln/>
+        </p:spPr>
+        <p:txBody>
+          <a:bodyPr wrap="square" lIns="0" tIns="0" rIns="0" bIns="0" rtlCol="0" anchor="ctr"/>
+          <a:lstStyle/>
+          <a:p>
+            <a:pPr indent="0" marL="0">
+              <a:buNone/>
+            </a:pPr>
+            <a:r>
+              <a:rPr lang="en-US" sz="900" dirty="0">
+                <a:solidFill>
+                  <a:srgbClr val="555555"/>
+                </a:solidFill>
+                <a:latin typeface="Malgun Gothic" pitchFamily="34" charset="0"/>
+                <a:ea typeface="Malgun Gothic" pitchFamily="34" charset="-122"/>
+                <a:cs typeface="Malgun Gothic" pitchFamily="34" charset="-120"/>
+              </a:rPr>
+              <a:t>출처: ScaleFlux 발표 · NVIDIA Dynamo 문서</a:t>
+            </a:r>
+            <a:endParaRPr lang="en-US" sz="900" dirty="0"/>
+          </a:p>
+        </p:txBody>
+      </p:sp>
+      <p:sp>
+        <p:nvSpPr>
+          <p:cNvPr id="46" name="Text 44"/>
+          <p:cNvSpPr/>
+          <p:nvPr/>
+        </p:nvSpPr>
+        <p:spPr>
+          <a:xfrm>
+            <a:off x="8330184" y="1773936"/>
+            <a:ext cx="3200400" cy="256032"/>
+          </a:xfrm>
+          <a:prstGeom prst="rect">
+            <a:avLst/>
+          </a:prstGeom>
+          <a:noFill/>
+          <a:ln/>
+        </p:spPr>
+        <p:txBody>
+          <a:bodyPr wrap="square" lIns="0" tIns="0" rIns="0" bIns="0" rtlCol="0" anchor="ctr"/>
+          <a:lstStyle/>
+          <a:p>
+            <a:pPr indent="0" marL="0">
+              <a:buNone/>
+            </a:pPr>
+            <a:r>
+              <a:rPr lang="en-US" sz="1050" b="1" dirty="0">
+                <a:solidFill>
+                  <a:srgbClr val="1428A0"/>
+                </a:solidFill>
+                <a:latin typeface="Malgun Gothic" pitchFamily="34" charset="0"/>
+                <a:ea typeface="Malgun Gothic" pitchFamily="34" charset="-122"/>
+                <a:cs typeface="Malgun Gothic" pitchFamily="34" charset="-120"/>
+              </a:rPr>
+              <a:t>요구 대비 2~10배 갭 (5년 보증 기준 DWPD)</a:t>
+            </a:r>
+            <a:endParaRPr lang="en-US" sz="1050" dirty="0"/>
+          </a:p>
+        </p:txBody>
+      </p:sp>
+      <p:sp>
+        <p:nvSpPr>
+          <p:cNvPr id="47" name="Shape 45"/>
+          <p:cNvSpPr/>
+          <p:nvPr/>
+        </p:nvSpPr>
+        <p:spPr>
+          <a:xfrm>
+            <a:off x="8275320" y="4370832"/>
+            <a:ext cx="3246120" cy="0"/>
+          </a:xfrm>
+          <a:prstGeom prst="line">
+            <a:avLst/>
+          </a:prstGeom>
+          <a:noFill/>
+          <a:ln w="12700">
+            <a:solidFill>
+              <a:srgbClr val="555555"/>
+            </a:solidFill>
+            <a:prstDash val="solid"/>
+          </a:ln>
+        </p:spPr>
+      </p:sp>
+      <p:sp>
+        <p:nvSpPr>
+          <p:cNvPr id="48" name="Shape 46"/>
+          <p:cNvSpPr/>
+          <p:nvPr/>
+        </p:nvSpPr>
+        <p:spPr>
+          <a:xfrm>
+            <a:off x="8412480" y="4244645"/>
+            <a:ext cx="566928" cy="126187"/>
+          </a:xfrm>
+          <a:prstGeom prst="rect">
+            <a:avLst/>
+          </a:prstGeom>
+          <a:solidFill>
+            <a:srgbClr val="B9C2D0"/>
+          </a:solidFill>
+          <a:ln/>
+        </p:spPr>
+      </p:sp>
+      <p:sp>
+        <p:nvSpPr>
+          <p:cNvPr id="49" name="Text 47"/>
+          <p:cNvSpPr/>
+          <p:nvPr/>
+        </p:nvSpPr>
+        <p:spPr>
+          <a:xfrm>
+            <a:off x="8229600" y="3988613"/>
+            <a:ext cx="914400" cy="237744"/>
+          </a:xfrm>
+          <a:prstGeom prst="rect">
+            <a:avLst/>
+          </a:prstGeom>
+          <a:noFill/>
+          <a:ln/>
+        </p:spPr>
+        <p:txBody>
+          <a:bodyPr wrap="square" lIns="0" tIns="0" rIns="0" bIns="0" rtlCol="0" anchor="ctr"/>
+          <a:lstStyle/>
+          <a:p>
+            <a:pPr algn="ctr" indent="0" marL="0">
+              <a:buNone/>
+            </a:pPr>
+            <a:r>
+              <a:rPr lang="en-US" sz="1100" b="1" dirty="0">
+                <a:solidFill>
+                  <a:srgbClr val="555555"/>
+                </a:solidFill>
+                <a:latin typeface="Malgun Gothic" pitchFamily="34" charset="0"/>
+                <a:ea typeface="Malgun Gothic" pitchFamily="34" charset="-122"/>
+                <a:cs typeface="Malgun Gothic" pitchFamily="34" charset="-120"/>
+              </a:rPr>
+              <a:t>0.6</a:t>
+            </a:r>
+            <a:endParaRPr lang="en-US" sz="1100" dirty="0"/>
+          </a:p>
+        </p:txBody>
+      </p:sp>
+      <p:sp>
+        <p:nvSpPr>
+          <p:cNvPr id="50" name="Text 48"/>
+          <p:cNvSpPr/>
+          <p:nvPr/>
+        </p:nvSpPr>
+        <p:spPr>
+          <a:xfrm>
+            <a:off x="8211312" y="4407408"/>
+            <a:ext cx="969264" cy="402336"/>
+          </a:xfrm>
+          <a:prstGeom prst="rect">
+            <a:avLst/>
+          </a:prstGeom>
+          <a:noFill/>
+          <a:ln/>
+        </p:spPr>
+        <p:txBody>
+          <a:bodyPr wrap="square" lIns="0" tIns="0" rIns="0" bIns="0" rtlCol="0" anchor="ctr"/>
+          <a:lstStyle/>
+          <a:p>
+            <a:pPr algn="ctr" indent="0" marL="0">
+              <a:lnSpc>
+                <a:spcPct val="100000"/>
+              </a:lnSpc>
+              <a:buNone/>
+            </a:pPr>
+            <a:r>
+              <a:rPr lang="en-US" sz="900" dirty="0">
+                <a:solidFill>
+                  <a:srgbClr val="1A1A1A"/>
+                </a:solidFill>
+                <a:latin typeface="Malgun Gothic" pitchFamily="34" charset="0"/>
+                <a:ea typeface="Malgun Gothic" pitchFamily="34" charset="-122"/>
+                <a:cs typeface="Malgun Gothic" pitchFamily="34" charset="-120"/>
+              </a:rPr>
+              <a:t>고용량 QLC</a:t>
+            </a:r>
+            <a:endParaRPr lang="en-US" sz="900" dirty="0"/>
+          </a:p>
+        </p:txBody>
+      </p:sp>
+      <p:sp>
+        <p:nvSpPr>
+          <p:cNvPr id="51" name="Shape 49"/>
+          <p:cNvSpPr/>
+          <p:nvPr/>
+        </p:nvSpPr>
+        <p:spPr>
+          <a:xfrm>
+            <a:off x="9208008" y="4160520"/>
+            <a:ext cx="566928" cy="210312"/>
+          </a:xfrm>
+          <a:prstGeom prst="rect">
+            <a:avLst/>
+          </a:prstGeom>
+          <a:solidFill>
+            <a:srgbClr val="B9C2D0"/>
+          </a:solidFill>
+          <a:ln/>
+        </p:spPr>
+      </p:sp>
+      <p:sp>
+        <p:nvSpPr>
+          <p:cNvPr id="52" name="Text 50"/>
+          <p:cNvSpPr/>
+          <p:nvPr/>
+        </p:nvSpPr>
+        <p:spPr>
+          <a:xfrm>
+            <a:off x="9025128" y="3904488"/>
+            <a:ext cx="914400" cy="237744"/>
+          </a:xfrm>
+          <a:prstGeom prst="rect">
+            <a:avLst/>
+          </a:prstGeom>
+          <a:noFill/>
+          <a:ln/>
+        </p:spPr>
+        <p:txBody>
+          <a:bodyPr wrap="square" lIns="0" tIns="0" rIns="0" bIns="0" rtlCol="0" anchor="ctr"/>
+          <a:lstStyle/>
+          <a:p>
+            <a:pPr algn="ctr" indent="0" marL="0">
+              <a:buNone/>
+            </a:pPr>
+            <a:r>
+              <a:rPr lang="en-US" sz="1100" b="1" dirty="0">
+                <a:solidFill>
+                  <a:srgbClr val="555555"/>
+                </a:solidFill>
+                <a:latin typeface="Malgun Gothic" pitchFamily="34" charset="0"/>
+                <a:ea typeface="Malgun Gothic" pitchFamily="34" charset="-122"/>
+                <a:cs typeface="Malgun Gothic" pitchFamily="34" charset="-120"/>
+              </a:rPr>
+              <a:t>1</a:t>
+            </a:r>
+            <a:endParaRPr lang="en-US" sz="1100" dirty="0"/>
+          </a:p>
+        </p:txBody>
+      </p:sp>
+      <p:sp>
+        <p:nvSpPr>
+          <p:cNvPr id="53" name="Text 51"/>
+          <p:cNvSpPr/>
+          <p:nvPr/>
+        </p:nvSpPr>
+        <p:spPr>
+          <a:xfrm>
+            <a:off x="9006840" y="4407408"/>
+            <a:ext cx="969264" cy="402336"/>
+          </a:xfrm>
+          <a:prstGeom prst="rect">
+            <a:avLst/>
+          </a:prstGeom>
+          <a:noFill/>
+          <a:ln/>
+        </p:spPr>
+        <p:txBody>
+          <a:bodyPr wrap="square" lIns="0" tIns="0" rIns="0" bIns="0" rtlCol="0" anchor="ctr"/>
+          <a:lstStyle/>
+          <a:p>
+            <a:pPr algn="ctr" indent="0" marL="0">
+              <a:lnSpc>
+                <a:spcPct val="100000"/>
+              </a:lnSpc>
+              <a:buNone/>
+            </a:pPr>
+            <a:r>
+              <a:rPr lang="en-US" sz="900" dirty="0">
+                <a:solidFill>
+                  <a:srgbClr val="1A1A1A"/>
+                </a:solidFill>
+                <a:latin typeface="Malgun Gothic" pitchFamily="34" charset="0"/>
+                <a:ea typeface="Malgun Gothic" pitchFamily="34" charset="-122"/>
+                <a:cs typeface="Malgun Gothic" pitchFamily="34" charset="-120"/>
+              </a:rPr>
+              <a:t>TLC RI</a:t>
+            </a:r>
+            <a:endParaRPr lang="en-US" sz="900" dirty="0"/>
+          </a:p>
+        </p:txBody>
+      </p:sp>
+      <p:sp>
+        <p:nvSpPr>
+          <p:cNvPr id="54" name="Shape 52"/>
+          <p:cNvSpPr/>
+          <p:nvPr/>
+        </p:nvSpPr>
+        <p:spPr>
+          <a:xfrm>
+            <a:off x="10003536" y="3739896"/>
+            <a:ext cx="566928" cy="630936"/>
+          </a:xfrm>
+          <a:prstGeom prst="rect">
+            <a:avLst/>
+          </a:prstGeom>
+          <a:solidFill>
+            <a:srgbClr val="B9C2D0"/>
+          </a:solidFill>
+          <a:ln/>
+        </p:spPr>
+      </p:sp>
+      <p:sp>
+        <p:nvSpPr>
+          <p:cNvPr id="55" name="Text 53"/>
+          <p:cNvSpPr/>
+          <p:nvPr/>
+        </p:nvSpPr>
+        <p:spPr>
+          <a:xfrm>
+            <a:off x="9820656" y="3483864"/>
+            <a:ext cx="914400" cy="237744"/>
+          </a:xfrm>
+          <a:prstGeom prst="rect">
+            <a:avLst/>
+          </a:prstGeom>
+          <a:noFill/>
+          <a:ln/>
+        </p:spPr>
+        <p:txBody>
+          <a:bodyPr wrap="square" lIns="0" tIns="0" rIns="0" bIns="0" rtlCol="0" anchor="ctr"/>
+          <a:lstStyle/>
+          <a:p>
+            <a:pPr algn="ctr" indent="0" marL="0">
+              <a:buNone/>
+            </a:pPr>
+            <a:r>
+              <a:rPr lang="en-US" sz="1100" b="1" dirty="0">
+                <a:solidFill>
+                  <a:srgbClr val="555555"/>
+                </a:solidFill>
+                <a:latin typeface="Malgun Gothic" pitchFamily="34" charset="0"/>
+                <a:ea typeface="Malgun Gothic" pitchFamily="34" charset="-122"/>
+                <a:cs typeface="Malgun Gothic" pitchFamily="34" charset="-120"/>
+              </a:rPr>
+              <a:t>3</a:t>
+            </a:r>
+            <a:endParaRPr lang="en-US" sz="1100" dirty="0"/>
+          </a:p>
+        </p:txBody>
+      </p:sp>
+      <p:sp>
+        <p:nvSpPr>
+          <p:cNvPr id="56" name="Text 54"/>
+          <p:cNvSpPr/>
+          <p:nvPr/>
+        </p:nvSpPr>
+        <p:spPr>
+          <a:xfrm>
+            <a:off x="9802368" y="4407408"/>
+            <a:ext cx="969264" cy="402336"/>
+          </a:xfrm>
+          <a:prstGeom prst="rect">
+            <a:avLst/>
+          </a:prstGeom>
+          <a:noFill/>
+          <a:ln/>
+        </p:spPr>
+        <p:txBody>
+          <a:bodyPr wrap="square" lIns="0" tIns="0" rIns="0" bIns="0" rtlCol="0" anchor="ctr"/>
+          <a:lstStyle/>
+          <a:p>
+            <a:pPr algn="ctr" indent="0" marL="0">
+              <a:lnSpc>
+                <a:spcPct val="100000"/>
+              </a:lnSpc>
+              <a:buNone/>
+            </a:pPr>
+            <a:r>
+              <a:rPr lang="en-US" sz="900" dirty="0">
+                <a:solidFill>
+                  <a:srgbClr val="1A1A1A"/>
+                </a:solidFill>
+                <a:latin typeface="Malgun Gothic" pitchFamily="34" charset="0"/>
+                <a:ea typeface="Malgun Gothic" pitchFamily="34" charset="-122"/>
+                <a:cs typeface="Malgun Gothic" pitchFamily="34" charset="-120"/>
+              </a:rPr>
+              <a:t>TLC MU</a:t>
+            </a:r>
+            <a:endParaRPr lang="en-US" sz="900" dirty="0"/>
+          </a:p>
+        </p:txBody>
+      </p:sp>
+      <p:sp>
+        <p:nvSpPr>
+          <p:cNvPr id="57" name="Shape 55"/>
+          <p:cNvSpPr/>
+          <p:nvPr/>
+        </p:nvSpPr>
+        <p:spPr>
+          <a:xfrm>
+            <a:off x="10799064" y="2267712"/>
+            <a:ext cx="566928" cy="630936"/>
+          </a:xfrm>
+          <a:prstGeom prst="rect">
+            <a:avLst/>
+          </a:prstGeom>
+          <a:solidFill>
+            <a:srgbClr val="8FA0DC"/>
+          </a:solidFill>
+          <a:ln/>
+        </p:spPr>
+      </p:sp>
+      <p:sp>
+        <p:nvSpPr>
+          <p:cNvPr id="58" name="Shape 56"/>
+          <p:cNvSpPr/>
+          <p:nvPr/>
+        </p:nvSpPr>
+        <p:spPr>
+          <a:xfrm>
+            <a:off x="10799064" y="2898648"/>
+            <a:ext cx="566928" cy="1472184"/>
+          </a:xfrm>
+          <a:prstGeom prst="rect">
+            <a:avLst/>
+          </a:prstGeom>
+          <a:solidFill>
+            <a:srgbClr val="1428A0"/>
+          </a:solidFill>
+          <a:ln/>
+        </p:spPr>
+      </p:sp>
+      <p:sp>
+        <p:nvSpPr>
+          <p:cNvPr id="59" name="Text 57"/>
+          <p:cNvSpPr/>
+          <p:nvPr/>
+        </p:nvSpPr>
+        <p:spPr>
+          <a:xfrm>
+            <a:off x="10616184" y="2011680"/>
+            <a:ext cx="914400" cy="237744"/>
+          </a:xfrm>
+          <a:prstGeom prst="rect">
+            <a:avLst/>
+          </a:prstGeom>
+          <a:noFill/>
+          <a:ln/>
+        </p:spPr>
+        <p:txBody>
+          <a:bodyPr wrap="square" lIns="0" tIns="0" rIns="0" bIns="0" rtlCol="0" anchor="ctr"/>
+          <a:lstStyle/>
+          <a:p>
+            <a:pPr algn="ctr" indent="0" marL="0">
+              <a:buNone/>
+            </a:pPr>
+            <a:r>
+              <a:rPr lang="en-US" sz="1100" b="1" dirty="0">
+                <a:solidFill>
+                  <a:srgbClr val="1428A0"/>
+                </a:solidFill>
+                <a:latin typeface="Malgun Gothic" pitchFamily="34" charset="0"/>
+                <a:ea typeface="Malgun Gothic" pitchFamily="34" charset="-122"/>
+                <a:cs typeface="Malgun Gothic" pitchFamily="34" charset="-120"/>
+              </a:rPr>
+              <a:t>7~10+</a:t>
+            </a:r>
+            <a:endParaRPr lang="en-US" sz="1100" dirty="0"/>
+          </a:p>
+        </p:txBody>
+      </p:sp>
+      <p:sp>
+        <p:nvSpPr>
+          <p:cNvPr id="60" name="Text 58"/>
+          <p:cNvSpPr/>
+          <p:nvPr/>
+        </p:nvSpPr>
+        <p:spPr>
+          <a:xfrm>
+            <a:off x="10597896" y="4407408"/>
+            <a:ext cx="969264" cy="402336"/>
+          </a:xfrm>
+          <a:prstGeom prst="rect">
+            <a:avLst/>
+          </a:prstGeom>
+          <a:noFill/>
+          <a:ln/>
+        </p:spPr>
+        <p:txBody>
+          <a:bodyPr wrap="square" lIns="0" tIns="0" rIns="0" bIns="0" rtlCol="0" anchor="ctr"/>
+          <a:lstStyle/>
+          <a:p>
+            <a:pPr algn="ctr" indent="0" marL="0">
+              <a:lnSpc>
+                <a:spcPct val="100000"/>
+              </a:lnSpc>
+              <a:buNone/>
+            </a:pPr>
+            <a:r>
+              <a:rPr lang="en-US" sz="900" dirty="0">
+                <a:solidFill>
+                  <a:srgbClr val="1A1A1A"/>
+                </a:solidFill>
+                <a:latin typeface="Malgun Gothic" pitchFamily="34" charset="0"/>
+                <a:ea typeface="Malgun Gothic" pitchFamily="34" charset="-122"/>
+                <a:cs typeface="Malgun Gothic" pitchFamily="34" charset="-120"/>
+              </a:rPr>
+              <a:t>KV cache 요구</a:t>
+            </a:r>
+            <a:endParaRPr lang="en-US" sz="900" dirty="0"/>
+          </a:p>
+        </p:txBody>
+      </p:sp>
+      <p:sp>
+        <p:nvSpPr>
+          <p:cNvPr id="61" name="Shape 59"/>
+          <p:cNvSpPr/>
+          <p:nvPr/>
+        </p:nvSpPr>
+        <p:spPr>
+          <a:xfrm>
+            <a:off x="8311896" y="5029200"/>
+            <a:ext cx="3236976" cy="1225296"/>
+          </a:xfrm>
+          <a:prstGeom prst="roundRect">
+            <a:avLst>
+              <a:gd name="adj" fmla="val 5224"/>
+            </a:avLst>
+          </a:prstGeom>
+          <a:solidFill>
+            <a:srgbClr val="EEF1FA"/>
+          </a:solidFill>
+          <a:ln w="15875">
+            <a:solidFill>
+              <a:srgbClr val="1428A0"/>
+            </a:solidFill>
+            <a:prstDash val="solid"/>
+          </a:ln>
+        </p:spPr>
+      </p:sp>
+      <p:sp>
+        <p:nvSpPr>
+          <p:cNvPr id="62" name="Text 60"/>
+          <p:cNvSpPr/>
+          <p:nvPr/>
+        </p:nvSpPr>
+        <p:spPr>
+          <a:xfrm>
+            <a:off x="8476488" y="5102352"/>
+            <a:ext cx="2926080" cy="1097280"/>
+          </a:xfrm>
+          <a:prstGeom prst="rect">
+            <a:avLst/>
+          </a:prstGeom>
+          <a:noFill/>
+          <a:ln/>
+        </p:spPr>
+        <p:txBody>
+          <a:bodyPr wrap="square" lIns="0" tIns="0" rIns="0" bIns="0" rtlCol="0" anchor="t"/>
+          <a:lstStyle/>
+          <a:p>
+            <a:pPr indent="0" marL="0">
+              <a:lnSpc>
+                <a:spcPct val="114000"/>
+              </a:lnSpc>
+              <a:buNone/>
+            </a:pPr>
+            <a:r>
+              <a:rPr lang="en-US" sz="1100" b="1" dirty="0">
+                <a:solidFill>
+                  <a:srgbClr val="1428A0"/>
+                </a:solidFill>
+                <a:latin typeface="Malgun Gothic" pitchFamily="34" charset="0"/>
+                <a:ea typeface="Malgun Gothic" pitchFamily="34" charset="-122"/>
+                <a:cs typeface="Malgun Gothic" pitchFamily="34" charset="-120"/>
+              </a:rPr>
+              <a:t>갭의 해법이 곧 전략</a:t>
+            </a:r>
+            <a:endParaRPr lang="en-US" sz="1100" dirty="0"/>
+          </a:p>
+          <a:p>
+            <a:pPr indent="0" marL="0">
+              <a:lnSpc>
+                <a:spcPct val="114000"/>
+              </a:lnSpc>
+              <a:buNone/>
+            </a:pPr>
+            <a:r>
+              <a:rPr lang="en-US" sz="950" dirty="0">
+                <a:solidFill>
+                  <a:srgbClr val="1A1A1A"/>
+                </a:solidFill>
+                <a:latin typeface="Malgun Gothic" pitchFamily="34" charset="0"/>
+                <a:ea typeface="Malgun Gothic" pitchFamily="34" charset="-122"/>
+                <a:cs typeface="Malgun Gothic" pitchFamily="34" charset="-120"/>
+              </a:rPr>
+              <a:t>FDP로 수명별 RUH 분리·WAF 절감 = 유효 DWPD 확보 (ScaleFlux도 FDP 200+ 스트림으로 7~10 DWPD 달성) + 고내구 설계. NVIDIA CMX 생태계와 직결</a:t>
+            </a:r>
+            <a:endParaRPr lang="en-US" sz="1100" dirty="0"/>
+          </a:p>
+        </p:txBody>
+      </p:sp>
+    </p:spTree>
+  </p:cSld>
+  <p:clrMapOvr>
+    <a:masterClrMapping/>
+  </p:clrMapOvr>
+</p:sld>
+</file>
+
+<file path=ppt/slides/slide9.xml><?xml version="1.0" encoding="utf-8"?>
+<p:sld xmlns:a="http://schemas.openxmlformats.org/drawingml/2006/main" xmlns:r="http://schemas.openxmlformats.org/officeDocument/2006/relationships" xmlns:p="http://schemas.openxmlformats.org/presentationml/2006/main">
+  <p:cSld name="Slide 9">
     <p:spTree>
       <p:nvGrpSpPr>
         <p:cNvPr id="1" name=""/>

--- a/outputs/presentation/dev-transformation-summary.pptx
+++ b/outputs/presentation/dev-transformation-summary.pptx
@@ -12594,7 +12594,7 @@
                 <a:ea typeface="Malgun Gothic" pitchFamily="34" charset="-122"/>
                 <a:cs typeface="Malgun Gothic" pitchFamily="34" charset="-120"/>
               </a:rPr>
-              <a:t>서버 노출이 큰 벤더일수록 깊게 맞았다: 문제는 총수요가 아니라 수요의 형태 변화, 답은 다변화가 아니라 니즈 적중 (Solidigm)</a:t>
+              <a:t>서버 노출이 큰 벤더일수록 깊게 맞았다. 총량이 아니라 수요 형태의 변화였고, 극복은 다변화가 아니라 니즈 적중이었다</a:t>
             </a:r>
             <a:endParaRPr lang="en-US" sz="1300" dirty="0"/>
           </a:p>
@@ -12674,7 +12674,7 @@
                 <a:ea typeface="Malgun Gothic" pitchFamily="34" charset="-122"/>
                 <a:cs typeface="Malgun Gothic" pitchFamily="34" charset="-120"/>
               </a:rPr>
-              <a:t>낙폭: 피크(2Q22)→저점(1Q23)</a:t>
+              <a:t>낙폭과 원인: 노출 = 깊이</a:t>
             </a:r>
             <a:endParaRPr lang="en-US" sz="1350" dirty="0"/>
           </a:p>
@@ -12781,7 +12781,7 @@
                 <a:ea typeface="Malgun Gothic" pitchFamily="34" charset="-122"/>
                 <a:cs typeface="Malgun Gothic" pitchFamily="34" charset="-120"/>
               </a:rPr>
-              <a:t>원인: 서버·고객 노출</a:t>
+              <a:t>재배분: CapEx vs AI 인프라</a:t>
             </a:r>
             <a:endParaRPr lang="en-US" sz="1350" dirty="0"/>
           </a:p>
@@ -12888,7 +12888,7 @@
                 <a:ea typeface="Malgun Gothic" pitchFamily="34" charset="-122"/>
                 <a:cs typeface="Malgun Gothic" pitchFamily="34" charset="-120"/>
               </a:rPr>
-              <a:t>재배분, 그리고 반증</a:t>
+              <a:t>니즈 적중: 대용량 QLC 경쟁</a:t>
             </a:r>
             <a:endParaRPr lang="en-US" sz="1350" dirty="0"/>
           </a:p>
@@ -12923,13 +12923,52 @@
       </p:sp>
       <p:sp>
         <p:nvSpPr>
-          <p:cNvPr id="16" name="Shape 14"/>
-          <p:cNvSpPr/>
-          <p:nvPr/>
-        </p:nvSpPr>
-        <p:spPr>
-          <a:xfrm>
-            <a:off x="658368" y="2212848"/>
+          <p:cNvPr id="16" name="Text 14"/>
+          <p:cNvSpPr/>
+          <p:nvPr/>
+        </p:nvSpPr>
+        <p:spPr>
+          <a:xfrm>
+            <a:off x="658368" y="1755648"/>
+            <a:ext cx="3200400" cy="237744"/>
+          </a:xfrm>
+          <a:prstGeom prst="rect">
+            <a:avLst/>
+          </a:prstGeom>
+          <a:noFill/>
+          <a:ln/>
+        </p:spPr>
+        <p:txBody>
+          <a:bodyPr wrap="square" lIns="0" tIns="0" rIns="0" bIns="0" rtlCol="0" anchor="ctr"/>
+          <a:lstStyle/>
+          <a:p>
+            <a:pPr indent="0" marL="0">
+              <a:buNone/>
+            </a:pPr>
+            <a:r>
+              <a:rPr lang="en-US" sz="1050" b="1" dirty="0">
+                <a:solidFill>
+                  <a:srgbClr val="1428A0"/>
+                </a:solidFill>
+                <a:latin typeface="Malgun Gothic" pitchFamily="34" charset="0"/>
+                <a:ea typeface="Malgun Gothic" pitchFamily="34" charset="-122"/>
+                <a:cs typeface="Malgun Gothic" pitchFamily="34" charset="-120"/>
+              </a:rPr>
+              <a:t>NAND 매출 낙폭: 피크(2Q22)→저점(1Q23)</a:t>
+            </a:r>
+            <a:endParaRPr lang="en-US" sz="1050" dirty="0"/>
+          </a:p>
+        </p:txBody>
+      </p:sp>
+      <p:sp>
+        <p:nvSpPr>
+          <p:cNvPr id="17" name="Shape 15"/>
+          <p:cNvSpPr/>
+          <p:nvPr/>
+        </p:nvSpPr>
+        <p:spPr>
+          <a:xfrm>
+            <a:off x="658368" y="2340864"/>
             <a:ext cx="3200400" cy="0"/>
           </a:xfrm>
           <a:prstGeom prst="line">
@@ -12946,30 +12985,30 @@
       </p:sp>
       <p:sp>
         <p:nvSpPr>
-          <p:cNvPr id="17" name="Text 15"/>
-          <p:cNvSpPr/>
-          <p:nvPr/>
-        </p:nvSpPr>
-        <p:spPr>
-          <a:xfrm>
-            <a:off x="658368" y="1938528"/>
-            <a:ext cx="822960" cy="237744"/>
-          </a:xfrm>
-          <a:prstGeom prst="rect">
-            <a:avLst/>
-          </a:prstGeom>
-          <a:noFill/>
-          <a:ln/>
-        </p:spPr>
-        <p:txBody>
-          <a:bodyPr wrap="square" lIns="0" tIns="0" rIns="0" bIns="0" rtlCol="0" anchor="ctr"/>
-          <a:lstStyle/>
-          <a:p>
-            <a:pPr algn="ctr" indent="0" marL="0">
-              <a:buNone/>
-            </a:pPr>
-            <a:r>
-              <a:rPr lang="en-US" sz="1050" b="1" dirty="0">
+          <p:cNvPr id="18" name="Text 16"/>
+          <p:cNvSpPr/>
+          <p:nvPr/>
+        </p:nvSpPr>
+        <p:spPr>
+          <a:xfrm>
+            <a:off x="658368" y="2084832"/>
+            <a:ext cx="822960" cy="219456"/>
+          </a:xfrm>
+          <a:prstGeom prst="rect">
+            <a:avLst/>
+          </a:prstGeom>
+          <a:noFill/>
+          <a:ln/>
+        </p:spPr>
+        <p:txBody>
+          <a:bodyPr wrap="square" lIns="0" tIns="0" rIns="0" bIns="0" rtlCol="0" anchor="ctr"/>
+          <a:lstStyle/>
+          <a:p>
+            <a:pPr algn="ctr" indent="0" marL="0">
+              <a:buNone/>
+            </a:pPr>
+            <a:r>
+              <a:rPr lang="en-US" sz="1000" b="1" dirty="0">
                 <a:solidFill>
                   <a:srgbClr val="1A1A1A"/>
                 </a:solidFill>
@@ -12979,20 +13018,20 @@
               </a:rPr>
               <a:t>삼성</a:t>
             </a:r>
-            <a:endParaRPr lang="en-US" sz="1050" dirty="0"/>
-          </a:p>
-        </p:txBody>
-      </p:sp>
-      <p:sp>
-        <p:nvSpPr>
-          <p:cNvPr id="18" name="Shape 16"/>
-          <p:cNvSpPr/>
-          <p:nvPr/>
-        </p:nvSpPr>
-        <p:spPr>
-          <a:xfrm>
-            <a:off x="786384" y="2212848"/>
-            <a:ext cx="548640" cy="1685109"/>
+            <a:endParaRPr lang="en-US" sz="1000" dirty="0"/>
+          </a:p>
+        </p:txBody>
+      </p:sp>
+      <p:sp>
+        <p:nvSpPr>
+          <p:cNvPr id="19" name="Shape 17"/>
+          <p:cNvSpPr/>
+          <p:nvPr/>
+        </p:nvSpPr>
+        <p:spPr>
+          <a:xfrm>
+            <a:off x="786384" y="2340864"/>
+            <a:ext cx="548640" cy="1050254"/>
           </a:xfrm>
           <a:prstGeom prst="roundRect">
             <a:avLst>
@@ -13007,30 +13046,30 @@
       </p:sp>
       <p:sp>
         <p:nvSpPr>
-          <p:cNvPr id="19" name="Text 17"/>
-          <p:cNvSpPr/>
-          <p:nvPr/>
-        </p:nvSpPr>
-        <p:spPr>
-          <a:xfrm>
-            <a:off x="658368" y="3925389"/>
-            <a:ext cx="822960" cy="256032"/>
-          </a:xfrm>
-          <a:prstGeom prst="rect">
-            <a:avLst/>
-          </a:prstGeom>
-          <a:noFill/>
-          <a:ln/>
-        </p:spPr>
-        <p:txBody>
-          <a:bodyPr wrap="square" lIns="0" tIns="0" rIns="0" bIns="0" rtlCol="0" anchor="ctr"/>
-          <a:lstStyle/>
-          <a:p>
-            <a:pPr algn="ctr" indent="0" marL="0">
-              <a:buNone/>
-            </a:pPr>
-            <a:r>
-              <a:rPr lang="en-US" sz="1250" b="1" dirty="0">
+          <p:cNvPr id="20" name="Text 18"/>
+          <p:cNvSpPr/>
+          <p:nvPr/>
+        </p:nvSpPr>
+        <p:spPr>
+          <a:xfrm>
+            <a:off x="658368" y="3409406"/>
+            <a:ext cx="822960" cy="237744"/>
+          </a:xfrm>
+          <a:prstGeom prst="rect">
+            <a:avLst/>
+          </a:prstGeom>
+          <a:noFill/>
+          <a:ln/>
+        </p:spPr>
+        <p:txBody>
+          <a:bodyPr wrap="square" lIns="0" tIns="0" rIns="0" bIns="0" rtlCol="0" anchor="ctr"/>
+          <a:lstStyle/>
+          <a:p>
+            <a:pPr algn="ctr" indent="0" marL="0">
+              <a:buNone/>
+            </a:pPr>
+            <a:r>
+              <a:rPr lang="en-US" sz="1200" b="1" dirty="0">
                 <a:solidFill>
                   <a:srgbClr val="1428A0"/>
                 </a:solidFill>
@@ -13040,36 +13079,36 @@
               </a:rPr>
               <a:t>-54%</a:t>
             </a:r>
-            <a:endParaRPr lang="en-US" sz="1250" dirty="0"/>
-          </a:p>
-        </p:txBody>
-      </p:sp>
-      <p:sp>
-        <p:nvSpPr>
-          <p:cNvPr id="20" name="Text 18"/>
-          <p:cNvSpPr/>
-          <p:nvPr/>
-        </p:nvSpPr>
-        <p:spPr>
-          <a:xfrm>
-            <a:off x="1435608" y="1938528"/>
-            <a:ext cx="822960" cy="237744"/>
-          </a:xfrm>
-          <a:prstGeom prst="rect">
-            <a:avLst/>
-          </a:prstGeom>
-          <a:noFill/>
-          <a:ln/>
-        </p:spPr>
-        <p:txBody>
-          <a:bodyPr wrap="square" lIns="0" tIns="0" rIns="0" bIns="0" rtlCol="0" anchor="ctr"/>
-          <a:lstStyle/>
-          <a:p>
-            <a:pPr algn="ctr" indent="0" marL="0">
-              <a:buNone/>
-            </a:pPr>
-            <a:r>
-              <a:rPr lang="en-US" sz="1050" b="1" dirty="0">
+            <a:endParaRPr lang="en-US" sz="1200" dirty="0"/>
+          </a:p>
+        </p:txBody>
+      </p:sp>
+      <p:sp>
+        <p:nvSpPr>
+          <p:cNvPr id="21" name="Text 19"/>
+          <p:cNvSpPr/>
+          <p:nvPr/>
+        </p:nvSpPr>
+        <p:spPr>
+          <a:xfrm>
+            <a:off x="1435608" y="2084832"/>
+            <a:ext cx="822960" cy="219456"/>
+          </a:xfrm>
+          <a:prstGeom prst="rect">
+            <a:avLst/>
+          </a:prstGeom>
+          <a:noFill/>
+          <a:ln/>
+        </p:spPr>
+        <p:txBody>
+          <a:bodyPr wrap="square" lIns="0" tIns="0" rIns="0" bIns="0" rtlCol="0" anchor="ctr"/>
+          <a:lstStyle/>
+          <a:p>
+            <a:pPr algn="ctr" indent="0" marL="0">
+              <a:buNone/>
+            </a:pPr>
+            <a:r>
+              <a:rPr lang="en-US" sz="1000" b="1" dirty="0">
                 <a:solidFill>
                   <a:srgbClr val="1A1A1A"/>
                 </a:solidFill>
@@ -13079,20 +13118,20 @@
               </a:rPr>
               <a:t>SK그룹</a:t>
             </a:r>
-            <a:endParaRPr lang="en-US" sz="1050" dirty="0"/>
-          </a:p>
-        </p:txBody>
-      </p:sp>
-      <p:sp>
-        <p:nvSpPr>
-          <p:cNvPr id="21" name="Shape 19"/>
-          <p:cNvSpPr/>
-          <p:nvPr/>
-        </p:nvSpPr>
-        <p:spPr>
-          <a:xfrm>
-            <a:off x="1563624" y="2212848"/>
-            <a:ext cx="548640" cy="1965960"/>
+            <a:endParaRPr lang="en-US" sz="1000" dirty="0"/>
+          </a:p>
+        </p:txBody>
+      </p:sp>
+      <p:sp>
+        <p:nvSpPr>
+          <p:cNvPr id="22" name="Shape 20"/>
+          <p:cNvSpPr/>
+          <p:nvPr/>
+        </p:nvSpPr>
+        <p:spPr>
+          <a:xfrm>
+            <a:off x="1563624" y="2340864"/>
+            <a:ext cx="548640" cy="1225296"/>
           </a:xfrm>
           <a:prstGeom prst="roundRect">
             <a:avLst>
@@ -13107,30 +13146,30 @@
       </p:sp>
       <p:sp>
         <p:nvSpPr>
-          <p:cNvPr id="22" name="Text 20"/>
-          <p:cNvSpPr/>
-          <p:nvPr/>
-        </p:nvSpPr>
-        <p:spPr>
-          <a:xfrm>
-            <a:off x="1435608" y="4206240"/>
-            <a:ext cx="822960" cy="256032"/>
-          </a:xfrm>
-          <a:prstGeom prst="rect">
-            <a:avLst/>
-          </a:prstGeom>
-          <a:noFill/>
-          <a:ln/>
-        </p:spPr>
-        <p:txBody>
-          <a:bodyPr wrap="square" lIns="0" tIns="0" rIns="0" bIns="0" rtlCol="0" anchor="ctr"/>
-          <a:lstStyle/>
-          <a:p>
-            <a:pPr algn="ctr" indent="0" marL="0">
-              <a:buNone/>
-            </a:pPr>
-            <a:r>
-              <a:rPr lang="en-US" sz="1250" b="1" dirty="0">
+          <p:cNvPr id="23" name="Text 21"/>
+          <p:cNvSpPr/>
+          <p:nvPr/>
+        </p:nvSpPr>
+        <p:spPr>
+          <a:xfrm>
+            <a:off x="1435608" y="3584448"/>
+            <a:ext cx="822960" cy="237744"/>
+          </a:xfrm>
+          <a:prstGeom prst="rect">
+            <a:avLst/>
+          </a:prstGeom>
+          <a:noFill/>
+          <a:ln/>
+        </p:spPr>
+        <p:txBody>
+          <a:bodyPr wrap="square" lIns="0" tIns="0" rIns="0" bIns="0" rtlCol="0" anchor="ctr"/>
+          <a:lstStyle/>
+          <a:p>
+            <a:pPr algn="ctr" indent="0" marL="0">
+              <a:buNone/>
+            </a:pPr>
+            <a:r>
+              <a:rPr lang="en-US" sz="1200" b="1" dirty="0">
                 <a:solidFill>
                   <a:srgbClr val="555555"/>
                 </a:solidFill>
@@ -13140,36 +13179,36 @@
               </a:rPr>
               <a:t>-63%</a:t>
             </a:r>
-            <a:endParaRPr lang="en-US" sz="1250" dirty="0"/>
-          </a:p>
-        </p:txBody>
-      </p:sp>
-      <p:sp>
-        <p:nvSpPr>
-          <p:cNvPr id="23" name="Text 21"/>
-          <p:cNvSpPr/>
-          <p:nvPr/>
-        </p:nvSpPr>
-        <p:spPr>
-          <a:xfrm>
-            <a:off x="2212848" y="1938528"/>
-            <a:ext cx="822960" cy="237744"/>
-          </a:xfrm>
-          <a:prstGeom prst="rect">
-            <a:avLst/>
-          </a:prstGeom>
-          <a:noFill/>
-          <a:ln/>
-        </p:spPr>
-        <p:txBody>
-          <a:bodyPr wrap="square" lIns="0" tIns="0" rIns="0" bIns="0" rtlCol="0" anchor="ctr"/>
-          <a:lstStyle/>
-          <a:p>
-            <a:pPr algn="ctr" indent="0" marL="0">
-              <a:buNone/>
-            </a:pPr>
-            <a:r>
-              <a:rPr lang="en-US" sz="1050" b="1" dirty="0">
+            <a:endParaRPr lang="en-US" sz="1200" dirty="0"/>
+          </a:p>
+        </p:txBody>
+      </p:sp>
+      <p:sp>
+        <p:nvSpPr>
+          <p:cNvPr id="24" name="Text 22"/>
+          <p:cNvSpPr/>
+          <p:nvPr/>
+        </p:nvSpPr>
+        <p:spPr>
+          <a:xfrm>
+            <a:off x="2212848" y="2084832"/>
+            <a:ext cx="822960" cy="219456"/>
+          </a:xfrm>
+          <a:prstGeom prst="rect">
+            <a:avLst/>
+          </a:prstGeom>
+          <a:noFill/>
+          <a:ln/>
+        </p:spPr>
+        <p:txBody>
+          <a:bodyPr wrap="square" lIns="0" tIns="0" rIns="0" bIns="0" rtlCol="0" anchor="ctr"/>
+          <a:lstStyle/>
+          <a:p>
+            <a:pPr algn="ctr" indent="0" marL="0">
+              <a:buNone/>
+            </a:pPr>
+            <a:r>
+              <a:rPr lang="en-US" sz="1000" b="1" dirty="0">
                 <a:solidFill>
                   <a:srgbClr val="1A1A1A"/>
                 </a:solidFill>
@@ -13179,20 +13218,20 @@
               </a:rPr>
               <a:t>WDC</a:t>
             </a:r>
-            <a:endParaRPr lang="en-US" sz="1050" dirty="0"/>
-          </a:p>
-        </p:txBody>
-      </p:sp>
-      <p:sp>
-        <p:nvSpPr>
-          <p:cNvPr id="24" name="Shape 22"/>
-          <p:cNvSpPr/>
-          <p:nvPr/>
-        </p:nvSpPr>
-        <p:spPr>
-          <a:xfrm>
-            <a:off x="2340864" y="2212848"/>
-            <a:ext cx="548640" cy="1404257"/>
+            <a:endParaRPr lang="en-US" sz="1000" dirty="0"/>
+          </a:p>
+        </p:txBody>
+      </p:sp>
+      <p:sp>
+        <p:nvSpPr>
+          <p:cNvPr id="25" name="Shape 23"/>
+          <p:cNvSpPr/>
+          <p:nvPr/>
+        </p:nvSpPr>
+        <p:spPr>
+          <a:xfrm>
+            <a:off x="2340864" y="2340864"/>
+            <a:ext cx="548640" cy="875211"/>
           </a:xfrm>
           <a:prstGeom prst="roundRect">
             <a:avLst>
@@ -13207,30 +13246,30 @@
       </p:sp>
       <p:sp>
         <p:nvSpPr>
-          <p:cNvPr id="25" name="Text 23"/>
-          <p:cNvSpPr/>
-          <p:nvPr/>
-        </p:nvSpPr>
-        <p:spPr>
-          <a:xfrm>
-            <a:off x="2212848" y="3644537"/>
-            <a:ext cx="822960" cy="256032"/>
-          </a:xfrm>
-          <a:prstGeom prst="rect">
-            <a:avLst/>
-          </a:prstGeom>
-          <a:noFill/>
-          <a:ln/>
-        </p:spPr>
-        <p:txBody>
-          <a:bodyPr wrap="square" lIns="0" tIns="0" rIns="0" bIns="0" rtlCol="0" anchor="ctr"/>
-          <a:lstStyle/>
-          <a:p>
-            <a:pPr algn="ctr" indent="0" marL="0">
-              <a:buNone/>
-            </a:pPr>
-            <a:r>
-              <a:rPr lang="en-US" sz="1250" b="1" dirty="0">
+          <p:cNvPr id="26" name="Text 24"/>
+          <p:cNvSpPr/>
+          <p:nvPr/>
+        </p:nvSpPr>
+        <p:spPr>
+          <a:xfrm>
+            <a:off x="2212848" y="3234363"/>
+            <a:ext cx="822960" cy="237744"/>
+          </a:xfrm>
+          <a:prstGeom prst="rect">
+            <a:avLst/>
+          </a:prstGeom>
+          <a:noFill/>
+          <a:ln/>
+        </p:spPr>
+        <p:txBody>
+          <a:bodyPr wrap="square" lIns="0" tIns="0" rIns="0" bIns="0" rtlCol="0" anchor="ctr"/>
+          <a:lstStyle/>
+          <a:p>
+            <a:pPr algn="ctr" indent="0" marL="0">
+              <a:buNone/>
+            </a:pPr>
+            <a:r>
+              <a:rPr lang="en-US" sz="1200" b="1" dirty="0">
                 <a:solidFill>
                   <a:srgbClr val="555555"/>
                 </a:solidFill>
@@ -13240,36 +13279,36 @@
               </a:rPr>
               <a:t>-45%</a:t>
             </a:r>
-            <a:endParaRPr lang="en-US" sz="1250" dirty="0"/>
-          </a:p>
-        </p:txBody>
-      </p:sp>
-      <p:sp>
-        <p:nvSpPr>
-          <p:cNvPr id="26" name="Text 24"/>
-          <p:cNvSpPr/>
-          <p:nvPr/>
-        </p:nvSpPr>
-        <p:spPr>
-          <a:xfrm>
-            <a:off x="2990088" y="1938528"/>
-            <a:ext cx="822960" cy="237744"/>
-          </a:xfrm>
-          <a:prstGeom prst="rect">
-            <a:avLst/>
-          </a:prstGeom>
-          <a:noFill/>
-          <a:ln/>
-        </p:spPr>
-        <p:txBody>
-          <a:bodyPr wrap="square" lIns="0" tIns="0" rIns="0" bIns="0" rtlCol="0" anchor="ctr"/>
-          <a:lstStyle/>
-          <a:p>
-            <a:pPr algn="ctr" indent="0" marL="0">
-              <a:buNone/>
-            </a:pPr>
-            <a:r>
-              <a:rPr lang="en-US" sz="1050" b="1" dirty="0">
+            <a:endParaRPr lang="en-US" sz="1200" dirty="0"/>
+          </a:p>
+        </p:txBody>
+      </p:sp>
+      <p:sp>
+        <p:nvSpPr>
+          <p:cNvPr id="27" name="Text 25"/>
+          <p:cNvSpPr/>
+          <p:nvPr/>
+        </p:nvSpPr>
+        <p:spPr>
+          <a:xfrm>
+            <a:off x="2990088" y="2084832"/>
+            <a:ext cx="822960" cy="219456"/>
+          </a:xfrm>
+          <a:prstGeom prst="rect">
+            <a:avLst/>
+          </a:prstGeom>
+          <a:noFill/>
+          <a:ln/>
+        </p:spPr>
+        <p:txBody>
+          <a:bodyPr wrap="square" lIns="0" tIns="0" rIns="0" bIns="0" rtlCol="0" anchor="ctr"/>
+          <a:lstStyle/>
+          <a:p>
+            <a:pPr algn="ctr" indent="0" marL="0">
+              <a:buNone/>
+            </a:pPr>
+            <a:r>
+              <a:rPr lang="en-US" sz="1000" b="1" dirty="0">
                 <a:solidFill>
                   <a:srgbClr val="1A1A1A"/>
                 </a:solidFill>
@@ -13279,20 +13318,20 @@
               </a:rPr>
               <a:t>Kioxia</a:t>
             </a:r>
-            <a:endParaRPr lang="en-US" sz="1050" dirty="0"/>
-          </a:p>
-        </p:txBody>
-      </p:sp>
-      <p:sp>
-        <p:nvSpPr>
-          <p:cNvPr id="27" name="Shape 25"/>
-          <p:cNvSpPr/>
-          <p:nvPr/>
-        </p:nvSpPr>
-        <p:spPr>
-          <a:xfrm>
-            <a:off x="3118104" y="2212848"/>
-            <a:ext cx="548640" cy="1092200"/>
+            <a:endParaRPr lang="en-US" sz="1000" dirty="0"/>
+          </a:p>
+        </p:txBody>
+      </p:sp>
+      <p:sp>
+        <p:nvSpPr>
+          <p:cNvPr id="28" name="Shape 26"/>
+          <p:cNvSpPr/>
+          <p:nvPr/>
+        </p:nvSpPr>
+        <p:spPr>
+          <a:xfrm>
+            <a:off x="3118104" y="2340864"/>
+            <a:ext cx="548640" cy="680720"/>
           </a:xfrm>
           <a:prstGeom prst="roundRect">
             <a:avLst>
@@ -13307,30 +13346,30 @@
       </p:sp>
       <p:sp>
         <p:nvSpPr>
-          <p:cNvPr id="28" name="Text 26"/>
-          <p:cNvSpPr/>
-          <p:nvPr/>
-        </p:nvSpPr>
-        <p:spPr>
-          <a:xfrm>
-            <a:off x="2990088" y="3332480"/>
-            <a:ext cx="822960" cy="256032"/>
-          </a:xfrm>
-          <a:prstGeom prst="rect">
-            <a:avLst/>
-          </a:prstGeom>
-          <a:noFill/>
-          <a:ln/>
-        </p:spPr>
-        <p:txBody>
-          <a:bodyPr wrap="square" lIns="0" tIns="0" rIns="0" bIns="0" rtlCol="0" anchor="ctr"/>
-          <a:lstStyle/>
-          <a:p>
-            <a:pPr algn="ctr" indent="0" marL="0">
-              <a:buNone/>
-            </a:pPr>
-            <a:r>
-              <a:rPr lang="en-US" sz="1250" b="1" dirty="0">
+          <p:cNvPr id="29" name="Text 27"/>
+          <p:cNvSpPr/>
+          <p:nvPr/>
+        </p:nvSpPr>
+        <p:spPr>
+          <a:xfrm>
+            <a:off x="2990088" y="3039872"/>
+            <a:ext cx="822960" cy="237744"/>
+          </a:xfrm>
+          <a:prstGeom prst="rect">
+            <a:avLst/>
+          </a:prstGeom>
+          <a:noFill/>
+          <a:ln/>
+        </p:spPr>
+        <p:txBody>
+          <a:bodyPr wrap="square" lIns="0" tIns="0" rIns="0" bIns="0" rtlCol="0" anchor="ctr"/>
+          <a:lstStyle/>
+          <a:p>
+            <a:pPr algn="ctr" indent="0" marL="0">
+              <a:buNone/>
+            </a:pPr>
+            <a:r>
+              <a:rPr lang="en-US" sz="1200" b="1" dirty="0">
                 <a:solidFill>
                   <a:srgbClr val="555555"/>
                 </a:solidFill>
@@ -13340,24 +13379,363 @@
               </a:rPr>
               <a:t>-35%</a:t>
             </a:r>
-            <a:endParaRPr lang="en-US" sz="1250" dirty="0"/>
-          </a:p>
-        </p:txBody>
-      </p:sp>
-      <p:sp>
-        <p:nvSpPr>
-          <p:cNvPr id="29" name="Text 27"/>
-          <p:cNvSpPr/>
-          <p:nvPr/>
-        </p:nvSpPr>
-        <p:spPr>
-          <a:xfrm>
-            <a:off x="658368" y="4864608"/>
-            <a:ext cx="3200400" cy="566928"/>
+            <a:endParaRPr lang="en-US" sz="1200" dirty="0"/>
+          </a:p>
+        </p:txBody>
+      </p:sp>
+      <p:sp>
+        <p:nvSpPr>
+          <p:cNvPr id="30" name="Text 28"/>
+          <p:cNvSpPr/>
+          <p:nvPr/>
+        </p:nvSpPr>
+        <p:spPr>
+          <a:xfrm>
+            <a:off x="658368" y="3913632"/>
+            <a:ext cx="3200400" cy="237744"/>
+          </a:xfrm>
+          <a:prstGeom prst="rect">
+            <a:avLst/>
+          </a:prstGeom>
+          <a:noFill/>
+          <a:ln/>
+        </p:spPr>
+        <p:txBody>
+          <a:bodyPr wrap="square" lIns="0" tIns="0" rIns="0" bIns="0" rtlCol="0" anchor="ctr"/>
+          <a:lstStyle/>
+          <a:p>
+            <a:pPr indent="0" marL="0">
+              <a:buNone/>
+            </a:pPr>
+            <a:r>
+              <a:rPr lang="en-US" sz="1050" b="1" dirty="0">
+                <a:solidFill>
+                  <a:srgbClr val="1428A0"/>
+                </a:solidFill>
+                <a:latin typeface="Malgun Gothic" pitchFamily="34" charset="0"/>
+                <a:ea typeface="Malgun Gothic" pitchFamily="34" charset="-122"/>
+                <a:cs typeface="Malgun Gothic" pitchFamily="34" charset="-120"/>
+              </a:rPr>
+              <a:t>원인: eSSD 점유(4Q22) = 서버 노출</a:t>
+            </a:r>
+            <a:endParaRPr lang="en-US" sz="1050" dirty="0"/>
+          </a:p>
+        </p:txBody>
+      </p:sp>
+      <p:sp>
+        <p:nvSpPr>
+          <p:cNvPr id="31" name="Text 29"/>
+          <p:cNvSpPr/>
+          <p:nvPr/>
+        </p:nvSpPr>
+        <p:spPr>
+          <a:xfrm>
+            <a:off x="658368" y="4187952"/>
+            <a:ext cx="868680" cy="237744"/>
+          </a:xfrm>
+          <a:prstGeom prst="rect">
+            <a:avLst/>
+          </a:prstGeom>
+          <a:noFill/>
+          <a:ln/>
+        </p:spPr>
+        <p:txBody>
+          <a:bodyPr wrap="square" lIns="0" tIns="0" rIns="0" bIns="0" rtlCol="0" anchor="ctr"/>
+          <a:lstStyle/>
+          <a:p>
+            <a:pPr indent="0" marL="0">
+              <a:buNone/>
+            </a:pPr>
+            <a:r>
+              <a:rPr lang="en-US" sz="950" dirty="0">
+                <a:solidFill>
+                  <a:srgbClr val="1A1A1A"/>
+                </a:solidFill>
+                <a:latin typeface="Malgun Gothic" pitchFamily="34" charset="0"/>
+                <a:ea typeface="Malgun Gothic" pitchFamily="34" charset="-122"/>
+                <a:cs typeface="Malgun Gothic" pitchFamily="34" charset="-120"/>
+              </a:rPr>
+              <a:t>삼성</a:t>
+            </a:r>
+            <a:endParaRPr lang="en-US" sz="950" dirty="0"/>
+          </a:p>
+        </p:txBody>
+      </p:sp>
+      <p:sp>
+        <p:nvSpPr>
+          <p:cNvPr id="32" name="Shape 30"/>
+          <p:cNvSpPr/>
+          <p:nvPr/>
+        </p:nvSpPr>
+        <p:spPr>
+          <a:xfrm>
+            <a:off x="1554480" y="4206240"/>
+            <a:ext cx="1554480" cy="201168"/>
           </a:xfrm>
           <a:prstGeom prst="roundRect">
             <a:avLst>
-              <a:gd name="adj" fmla="val 8065"/>
+              <a:gd name="adj" fmla="val 13636"/>
+            </a:avLst>
+          </a:prstGeom>
+          <a:solidFill>
+            <a:srgbClr val="1428A0"/>
+          </a:solidFill>
+          <a:ln/>
+        </p:spPr>
+      </p:sp>
+      <p:sp>
+        <p:nvSpPr>
+          <p:cNvPr id="33" name="Text 31"/>
+          <p:cNvSpPr/>
+          <p:nvPr/>
+        </p:nvSpPr>
+        <p:spPr>
+          <a:xfrm>
+            <a:off x="3163824" y="4187952"/>
+            <a:ext cx="640080" cy="237744"/>
+          </a:xfrm>
+          <a:prstGeom prst="rect">
+            <a:avLst/>
+          </a:prstGeom>
+          <a:noFill/>
+          <a:ln/>
+        </p:spPr>
+        <p:txBody>
+          <a:bodyPr wrap="square" lIns="0" tIns="0" rIns="0" bIns="0" rtlCol="0" anchor="ctr"/>
+          <a:lstStyle/>
+          <a:p>
+            <a:pPr indent="0" marL="0">
+              <a:buNone/>
+            </a:pPr>
+            <a:r>
+              <a:rPr lang="en-US" sz="1000" b="1" dirty="0">
+                <a:solidFill>
+                  <a:srgbClr val="1428A0"/>
+                </a:solidFill>
+                <a:latin typeface="Malgun Gothic" pitchFamily="34" charset="0"/>
+                <a:ea typeface="Malgun Gothic" pitchFamily="34" charset="-122"/>
+                <a:cs typeface="Malgun Gothic" pitchFamily="34" charset="-120"/>
+              </a:rPr>
+              <a:t>46.9%</a:t>
+            </a:r>
+            <a:endParaRPr lang="en-US" sz="1000" dirty="0"/>
+          </a:p>
+        </p:txBody>
+      </p:sp>
+      <p:sp>
+        <p:nvSpPr>
+          <p:cNvPr id="34" name="Text 32"/>
+          <p:cNvSpPr/>
+          <p:nvPr/>
+        </p:nvSpPr>
+        <p:spPr>
+          <a:xfrm>
+            <a:off x="658368" y="4498848"/>
+            <a:ext cx="868680" cy="237744"/>
+          </a:xfrm>
+          <a:prstGeom prst="rect">
+            <a:avLst/>
+          </a:prstGeom>
+          <a:noFill/>
+          <a:ln/>
+        </p:spPr>
+        <p:txBody>
+          <a:bodyPr wrap="square" lIns="0" tIns="0" rIns="0" bIns="0" rtlCol="0" anchor="ctr"/>
+          <a:lstStyle/>
+          <a:p>
+            <a:pPr indent="0" marL="0">
+              <a:buNone/>
+            </a:pPr>
+            <a:r>
+              <a:rPr lang="en-US" sz="950" dirty="0">
+                <a:solidFill>
+                  <a:srgbClr val="1A1A1A"/>
+                </a:solidFill>
+                <a:latin typeface="Malgun Gothic" pitchFamily="34" charset="0"/>
+                <a:ea typeface="Malgun Gothic" pitchFamily="34" charset="-122"/>
+                <a:cs typeface="Malgun Gothic" pitchFamily="34" charset="-120"/>
+              </a:rPr>
+              <a:t>SK그룹</a:t>
+            </a:r>
+            <a:endParaRPr lang="en-US" sz="950" dirty="0"/>
+          </a:p>
+        </p:txBody>
+      </p:sp>
+      <p:sp>
+        <p:nvSpPr>
+          <p:cNvPr id="35" name="Shape 33"/>
+          <p:cNvSpPr/>
+          <p:nvPr/>
+        </p:nvSpPr>
+        <p:spPr>
+          <a:xfrm>
+            <a:off x="1554480" y="4517136"/>
+            <a:ext cx="629747" cy="201168"/>
+          </a:xfrm>
+          <a:prstGeom prst="roundRect">
+            <a:avLst>
+              <a:gd name="adj" fmla="val 13636"/>
+            </a:avLst>
+          </a:prstGeom>
+          <a:solidFill>
+            <a:srgbClr val="B9C2D0"/>
+          </a:solidFill>
+          <a:ln/>
+        </p:spPr>
+      </p:sp>
+      <p:sp>
+        <p:nvSpPr>
+          <p:cNvPr id="36" name="Text 34"/>
+          <p:cNvSpPr/>
+          <p:nvPr/>
+        </p:nvSpPr>
+        <p:spPr>
+          <a:xfrm>
+            <a:off x="2239091" y="4498848"/>
+            <a:ext cx="640080" cy="237744"/>
+          </a:xfrm>
+          <a:prstGeom prst="rect">
+            <a:avLst/>
+          </a:prstGeom>
+          <a:noFill/>
+          <a:ln/>
+        </p:spPr>
+        <p:txBody>
+          <a:bodyPr wrap="square" lIns="0" tIns="0" rIns="0" bIns="0" rtlCol="0" anchor="ctr"/>
+          <a:lstStyle/>
+          <a:p>
+            <a:pPr indent="0" marL="0">
+              <a:buNone/>
+            </a:pPr>
+            <a:r>
+              <a:rPr lang="en-US" sz="1000" b="1" dirty="0">
+                <a:solidFill>
+                  <a:srgbClr val="555555"/>
+                </a:solidFill>
+                <a:latin typeface="Malgun Gothic" pitchFamily="34" charset="0"/>
+                <a:ea typeface="Malgun Gothic" pitchFamily="34" charset="-122"/>
+                <a:cs typeface="Malgun Gothic" pitchFamily="34" charset="-120"/>
+              </a:rPr>
+              <a:t>19%</a:t>
+            </a:r>
+            <a:endParaRPr lang="en-US" sz="1000" dirty="0"/>
+          </a:p>
+        </p:txBody>
+      </p:sp>
+      <p:sp>
+        <p:nvSpPr>
+          <p:cNvPr id="37" name="Text 35"/>
+          <p:cNvSpPr/>
+          <p:nvPr/>
+        </p:nvSpPr>
+        <p:spPr>
+          <a:xfrm>
+            <a:off x="658368" y="4809744"/>
+            <a:ext cx="868680" cy="237744"/>
+          </a:xfrm>
+          <a:prstGeom prst="rect">
+            <a:avLst/>
+          </a:prstGeom>
+          <a:noFill/>
+          <a:ln/>
+        </p:spPr>
+        <p:txBody>
+          <a:bodyPr wrap="square" lIns="0" tIns="0" rIns="0" bIns="0" rtlCol="0" anchor="ctr"/>
+          <a:lstStyle/>
+          <a:p>
+            <a:pPr indent="0" marL="0">
+              <a:buNone/>
+            </a:pPr>
+            <a:r>
+              <a:rPr lang="en-US" sz="950" dirty="0">
+                <a:solidFill>
+                  <a:srgbClr val="1A1A1A"/>
+                </a:solidFill>
+                <a:latin typeface="Malgun Gothic" pitchFamily="34" charset="0"/>
+                <a:ea typeface="Malgun Gothic" pitchFamily="34" charset="-122"/>
+                <a:cs typeface="Malgun Gothic" pitchFamily="34" charset="-120"/>
+              </a:rPr>
+              <a:t>Kioxia</a:t>
+            </a:r>
+            <a:endParaRPr lang="en-US" sz="950" dirty="0"/>
+          </a:p>
+        </p:txBody>
+      </p:sp>
+      <p:sp>
+        <p:nvSpPr>
+          <p:cNvPr id="38" name="Shape 36"/>
+          <p:cNvSpPr/>
+          <p:nvPr/>
+        </p:nvSpPr>
+        <p:spPr>
+          <a:xfrm>
+            <a:off x="1554480" y="4828032"/>
+            <a:ext cx="430879" cy="201168"/>
+          </a:xfrm>
+          <a:prstGeom prst="roundRect">
+            <a:avLst>
+              <a:gd name="adj" fmla="val 13636"/>
+            </a:avLst>
+          </a:prstGeom>
+          <a:solidFill>
+            <a:srgbClr val="B9C2D0"/>
+          </a:solidFill>
+          <a:ln/>
+        </p:spPr>
+      </p:sp>
+      <p:sp>
+        <p:nvSpPr>
+          <p:cNvPr id="39" name="Text 37"/>
+          <p:cNvSpPr/>
+          <p:nvPr/>
+        </p:nvSpPr>
+        <p:spPr>
+          <a:xfrm>
+            <a:off x="2040223" y="4809744"/>
+            <a:ext cx="640080" cy="237744"/>
+          </a:xfrm>
+          <a:prstGeom prst="rect">
+            <a:avLst/>
+          </a:prstGeom>
+          <a:noFill/>
+          <a:ln/>
+        </p:spPr>
+        <p:txBody>
+          <a:bodyPr wrap="square" lIns="0" tIns="0" rIns="0" bIns="0" rtlCol="0" anchor="ctr"/>
+          <a:lstStyle/>
+          <a:p>
+            <a:pPr indent="0" marL="0">
+              <a:buNone/>
+            </a:pPr>
+            <a:r>
+              <a:rPr lang="en-US" sz="1000" b="1" dirty="0">
+                <a:solidFill>
+                  <a:srgbClr val="555555"/>
+                </a:solidFill>
+                <a:latin typeface="Malgun Gothic" pitchFamily="34" charset="0"/>
+                <a:ea typeface="Malgun Gothic" pitchFamily="34" charset="-122"/>
+                <a:cs typeface="Malgun Gothic" pitchFamily="34" charset="-120"/>
+              </a:rPr>
+              <a:t>13%</a:t>
+            </a:r>
+            <a:endParaRPr lang="en-US" sz="1000" dirty="0"/>
+          </a:p>
+        </p:txBody>
+      </p:sp>
+      <p:sp>
+        <p:nvSpPr>
+          <p:cNvPr id="40" name="Text 38"/>
+          <p:cNvSpPr/>
+          <p:nvPr/>
+        </p:nvSpPr>
+        <p:spPr>
+          <a:xfrm>
+            <a:off x="658368" y="5193792"/>
+            <a:ext cx="3200400" cy="658368"/>
+          </a:xfrm>
+          <a:prstGeom prst="roundRect">
+            <a:avLst>
+              <a:gd name="adj" fmla="val 6944"/>
             </a:avLst>
           </a:prstGeom>
           <a:solidFill>
@@ -13371,12 +13749,12 @@
           <a:p>
             <a:pPr indent="0" marL="0">
               <a:lnSpc>
-                <a:spcPct val="110000"/>
+                <a:spcPct val="112000"/>
               </a:lnSpc>
               <a:buNone/>
             </a:pPr>
             <a:r>
-              <a:rPr lang="en-US" sz="1000" b="1" dirty="0">
+              <a:rPr lang="en-US" sz="950" b="1" dirty="0">
                 <a:solidFill>
                   <a:srgbClr val="1428A0"/>
                 </a:solidFill>
@@ -13384,16 +13762,16 @@
                 <a:ea typeface="Malgun Gothic" pitchFamily="34" charset="-122"/>
                 <a:cs typeface="Malgun Gothic" pitchFamily="34" charset="-120"/>
               </a:rPr>
-              <a:t>진앙은 SSD  </a:t>
+              <a:t>노출 순위 = 낙폭 순위.  </a:t>
             </a:r>
             <a:pPr indent="0" marL="0">
               <a:lnSpc>
-                <a:spcPct val="110000"/>
+                <a:spcPct val="112000"/>
               </a:lnSpc>
               <a:buNone/>
             </a:pPr>
             <a:r>
-              <a:rPr lang="en-US" sz="1000" dirty="0">
+              <a:rPr lang="en-US" sz="950" dirty="0">
                 <a:solidFill>
                   <a:srgbClr val="1A1A1A"/>
                 </a:solidFill>
@@ -13401,22 +13779,22 @@
                 <a:ea typeface="Malgun Gothic" pitchFamily="34" charset="-122"/>
                 <a:cs typeface="Malgun Gothic" pitchFamily="34" charset="-120"/>
               </a:rPr>
-              <a:t>산업 매출 중 SSD 기여 50%+ → 20~25% (4Q22→1Q23)</a:t>
-            </a:r>
-            <a:endParaRPr lang="en-US" sz="1000" dirty="0"/>
-          </a:p>
-        </p:txBody>
-      </p:sp>
-      <p:sp>
-        <p:nvSpPr>
-          <p:cNvPr id="30" name="Text 28"/>
-          <p:cNvSpPr/>
-          <p:nvPr/>
-        </p:nvSpPr>
-        <p:spPr>
-          <a:xfrm>
-            <a:off x="658368" y="5541264"/>
-            <a:ext cx="3200400" cy="365760"/>
+              <a:t>진앙은 SSD(산업 매출 기여 50%+→20~25% 붕괴), 삼성은 eSSD 1위로 노출 최대. SK -63%엔 서버 100% Solidigm 포함</a:t>
+            </a:r>
+            <a:endParaRPr lang="en-US" sz="950" dirty="0"/>
+          </a:p>
+        </p:txBody>
+      </p:sp>
+      <p:sp>
+        <p:nvSpPr>
+          <p:cNvPr id="41" name="Text 39"/>
+          <p:cNvSpPr/>
+          <p:nvPr/>
+        </p:nvSpPr>
+        <p:spPr>
+          <a:xfrm>
+            <a:off x="658368" y="5943600"/>
+            <a:ext cx="3200400" cy="274320"/>
           </a:xfrm>
           <a:prstGeom prst="rect">
             <a:avLst/>
@@ -13429,13 +13807,10 @@
           <a:lstStyle/>
           <a:p>
             <a:pPr indent="0" marL="0">
-              <a:lnSpc>
-                <a:spcPct val="110000"/>
-              </a:lnSpc>
-              <a:buNone/>
-            </a:pPr>
-            <a:r>
-              <a:rPr lang="en-US" sz="900" dirty="0">
+              <a:buNone/>
+            </a:pPr>
+            <a:r>
+              <a:rPr lang="en-US" sz="850" dirty="0">
                 <a:solidFill>
                   <a:srgbClr val="555555"/>
                 </a:solidFill>
@@ -13443,22 +13818,22 @@
                 <a:ea typeface="Malgun Gothic" pitchFamily="34" charset="-122"/>
                 <a:cs typeface="Malgun Gothic" pitchFamily="34" charset="-120"/>
               </a:rPr>
-              <a:t>분기 매출 피크·저점 기준, TrendForce 분기 데이터 합성. Micron은 회계분기 차이로 제외</a:t>
-            </a:r>
-            <a:endParaRPr lang="en-US" sz="900" dirty="0"/>
-          </a:p>
-        </p:txBody>
-      </p:sp>
-      <p:sp>
-        <p:nvSpPr>
-          <p:cNvPr id="31" name="Text 29"/>
-          <p:cNvSpPr/>
-          <p:nvPr/>
-        </p:nvSpPr>
-        <p:spPr>
-          <a:xfrm>
-            <a:off x="4498848" y="1773936"/>
-            <a:ext cx="3200400" cy="256032"/>
+              <a:t>출처: TrendForce 분기 데이터 합성(Micron 회계분기 차이 제외) · Blocks &amp; Files</a:t>
+            </a:r>
+            <a:endParaRPr lang="en-US" sz="850" dirty="0"/>
+          </a:p>
+        </p:txBody>
+      </p:sp>
+      <p:sp>
+        <p:nvSpPr>
+          <p:cNvPr id="42" name="Text 40"/>
+          <p:cNvSpPr/>
+          <p:nvPr/>
+        </p:nvSpPr>
+        <p:spPr>
+          <a:xfrm>
+            <a:off x="4498848" y="1755648"/>
+            <a:ext cx="3200400" cy="237744"/>
           </a:xfrm>
           <a:prstGeom prst="rect">
             <a:avLst/>
@@ -13482,7 +13857,7 @@
                 <a:ea typeface="Malgun Gothic" pitchFamily="34" charset="-122"/>
                 <a:cs typeface="Malgun Gothic" pitchFamily="34" charset="-120"/>
               </a:rPr>
-              <a:t>Enterprise SSD 매출 점유, 4Q22 (시장 $3.79B)</a:t>
+              <a:t>하이퍼스케일러 CapEx ($B, 각사 10-K)</a:t>
             </a:r>
             <a:endParaRPr lang="en-US" sz="1050" dirty="0"/>
           </a:p>
@@ -13490,433 +13865,13 @@
       </p:sp>
       <p:sp>
         <p:nvSpPr>
-          <p:cNvPr id="32" name="Text 30"/>
-          <p:cNvSpPr/>
-          <p:nvPr/>
-        </p:nvSpPr>
-        <p:spPr>
-          <a:xfrm>
-            <a:off x="4498848" y="2157984"/>
-            <a:ext cx="868680" cy="274320"/>
-          </a:xfrm>
-          <a:prstGeom prst="rect">
-            <a:avLst/>
-          </a:prstGeom>
-          <a:noFill/>
-          <a:ln/>
-        </p:spPr>
-        <p:txBody>
-          <a:bodyPr wrap="square" lIns="0" tIns="0" rIns="0" bIns="0" rtlCol="0" anchor="ctr"/>
-          <a:lstStyle/>
-          <a:p>
-            <a:pPr indent="0" marL="0">
-              <a:buNone/>
-            </a:pPr>
-            <a:r>
-              <a:rPr lang="en-US" sz="1050" dirty="0">
-                <a:solidFill>
-                  <a:srgbClr val="1A1A1A"/>
-                </a:solidFill>
-                <a:latin typeface="Malgun Gothic" pitchFamily="34" charset="0"/>
-                <a:ea typeface="Malgun Gothic" pitchFamily="34" charset="-122"/>
-                <a:cs typeface="Malgun Gothic" pitchFamily="34" charset="-120"/>
-              </a:rPr>
-              <a:t>삼성</a:t>
-            </a:r>
-            <a:endParaRPr lang="en-US" sz="1050" dirty="0"/>
-          </a:p>
-        </p:txBody>
-      </p:sp>
-      <p:sp>
-        <p:nvSpPr>
-          <p:cNvPr id="33" name="Shape 31"/>
-          <p:cNvSpPr/>
-          <p:nvPr/>
-        </p:nvSpPr>
-        <p:spPr>
-          <a:xfrm>
-            <a:off x="5413248" y="2139696"/>
-            <a:ext cx="1828800" cy="292608"/>
-          </a:xfrm>
-          <a:prstGeom prst="roundRect">
-            <a:avLst>
-              <a:gd name="adj" fmla="val 9375"/>
-            </a:avLst>
-          </a:prstGeom>
-          <a:solidFill>
-            <a:srgbClr val="1428A0"/>
-          </a:solidFill>
-          <a:ln/>
-        </p:spPr>
-      </p:sp>
-      <p:sp>
-        <p:nvSpPr>
-          <p:cNvPr id="34" name="Text 32"/>
-          <p:cNvSpPr/>
-          <p:nvPr/>
-        </p:nvSpPr>
-        <p:spPr>
-          <a:xfrm>
-            <a:off x="7296912" y="2157984"/>
-            <a:ext cx="640080" cy="274320"/>
-          </a:xfrm>
-          <a:prstGeom prst="rect">
-            <a:avLst/>
-          </a:prstGeom>
-          <a:noFill/>
-          <a:ln/>
-        </p:spPr>
-        <p:txBody>
-          <a:bodyPr wrap="square" lIns="0" tIns="0" rIns="0" bIns="0" rtlCol="0" anchor="ctr"/>
-          <a:lstStyle/>
-          <a:p>
-            <a:pPr indent="0" marL="0">
-              <a:buNone/>
-            </a:pPr>
-            <a:r>
-              <a:rPr lang="en-US" sz="1100" b="1" dirty="0">
-                <a:solidFill>
-                  <a:srgbClr val="1428A0"/>
-                </a:solidFill>
-                <a:latin typeface="Malgun Gothic" pitchFamily="34" charset="0"/>
-                <a:ea typeface="Malgun Gothic" pitchFamily="34" charset="-122"/>
-                <a:cs typeface="Malgun Gothic" pitchFamily="34" charset="-120"/>
-              </a:rPr>
-              <a:t>46.9%</a:t>
-            </a:r>
-            <a:endParaRPr lang="en-US" sz="1100" dirty="0"/>
-          </a:p>
-        </p:txBody>
-      </p:sp>
-      <p:sp>
-        <p:nvSpPr>
-          <p:cNvPr id="35" name="Text 33"/>
-          <p:cNvSpPr/>
-          <p:nvPr/>
-        </p:nvSpPr>
-        <p:spPr>
-          <a:xfrm>
-            <a:off x="4498848" y="2651760"/>
-            <a:ext cx="868680" cy="274320"/>
-          </a:xfrm>
-          <a:prstGeom prst="rect">
-            <a:avLst/>
-          </a:prstGeom>
-          <a:noFill/>
-          <a:ln/>
-        </p:spPr>
-        <p:txBody>
-          <a:bodyPr wrap="square" lIns="0" tIns="0" rIns="0" bIns="0" rtlCol="0" anchor="ctr"/>
-          <a:lstStyle/>
-          <a:p>
-            <a:pPr indent="0" marL="0">
-              <a:buNone/>
-            </a:pPr>
-            <a:r>
-              <a:rPr lang="en-US" sz="1050" dirty="0">
-                <a:solidFill>
-                  <a:srgbClr val="1A1A1A"/>
-                </a:solidFill>
-                <a:latin typeface="Malgun Gothic" pitchFamily="34" charset="0"/>
-                <a:ea typeface="Malgun Gothic" pitchFamily="34" charset="-122"/>
-                <a:cs typeface="Malgun Gothic" pitchFamily="34" charset="-120"/>
-              </a:rPr>
-              <a:t>SK그룹</a:t>
-            </a:r>
-            <a:endParaRPr lang="en-US" sz="1050" dirty="0"/>
-          </a:p>
-        </p:txBody>
-      </p:sp>
-      <p:sp>
-        <p:nvSpPr>
-          <p:cNvPr id="36" name="Shape 34"/>
-          <p:cNvSpPr/>
-          <p:nvPr/>
-        </p:nvSpPr>
-        <p:spPr>
-          <a:xfrm>
-            <a:off x="5413248" y="2633472"/>
-            <a:ext cx="740878" cy="292608"/>
-          </a:xfrm>
-          <a:prstGeom prst="roundRect">
-            <a:avLst>
-              <a:gd name="adj" fmla="val 9375"/>
-            </a:avLst>
-          </a:prstGeom>
-          <a:solidFill>
-            <a:srgbClr val="B9C2D0"/>
-          </a:solidFill>
-          <a:ln/>
-        </p:spPr>
-      </p:sp>
-      <p:sp>
-        <p:nvSpPr>
-          <p:cNvPr id="37" name="Text 35"/>
-          <p:cNvSpPr/>
-          <p:nvPr/>
-        </p:nvSpPr>
-        <p:spPr>
-          <a:xfrm>
-            <a:off x="6208990" y="2651760"/>
-            <a:ext cx="640080" cy="274320"/>
-          </a:xfrm>
-          <a:prstGeom prst="rect">
-            <a:avLst/>
-          </a:prstGeom>
-          <a:noFill/>
-          <a:ln/>
-        </p:spPr>
-        <p:txBody>
-          <a:bodyPr wrap="square" lIns="0" tIns="0" rIns="0" bIns="0" rtlCol="0" anchor="ctr"/>
-          <a:lstStyle/>
-          <a:p>
-            <a:pPr indent="0" marL="0">
-              <a:buNone/>
-            </a:pPr>
-            <a:r>
-              <a:rPr lang="en-US" sz="1100" b="1" dirty="0">
-                <a:solidFill>
-                  <a:srgbClr val="555555"/>
-                </a:solidFill>
-                <a:latin typeface="Malgun Gothic" pitchFamily="34" charset="0"/>
-                <a:ea typeface="Malgun Gothic" pitchFamily="34" charset="-122"/>
-                <a:cs typeface="Malgun Gothic" pitchFamily="34" charset="-120"/>
-              </a:rPr>
-              <a:t>19%</a:t>
-            </a:r>
-            <a:endParaRPr lang="en-US" sz="1100" dirty="0"/>
-          </a:p>
-        </p:txBody>
-      </p:sp>
-      <p:sp>
-        <p:nvSpPr>
-          <p:cNvPr id="38" name="Text 36"/>
-          <p:cNvSpPr/>
-          <p:nvPr/>
-        </p:nvSpPr>
-        <p:spPr>
-          <a:xfrm>
-            <a:off x="4498848" y="3145536"/>
-            <a:ext cx="868680" cy="274320"/>
-          </a:xfrm>
-          <a:prstGeom prst="rect">
-            <a:avLst/>
-          </a:prstGeom>
-          <a:noFill/>
-          <a:ln/>
-        </p:spPr>
-        <p:txBody>
-          <a:bodyPr wrap="square" lIns="0" tIns="0" rIns="0" bIns="0" rtlCol="0" anchor="ctr"/>
-          <a:lstStyle/>
-          <a:p>
-            <a:pPr indent="0" marL="0">
-              <a:buNone/>
-            </a:pPr>
-            <a:r>
-              <a:rPr lang="en-US" sz="1050" dirty="0">
-                <a:solidFill>
-                  <a:srgbClr val="1A1A1A"/>
-                </a:solidFill>
-                <a:latin typeface="Malgun Gothic" pitchFamily="34" charset="0"/>
-                <a:ea typeface="Malgun Gothic" pitchFamily="34" charset="-122"/>
-                <a:cs typeface="Malgun Gothic" pitchFamily="34" charset="-120"/>
-              </a:rPr>
-              <a:t>Kioxia</a:t>
-            </a:r>
-            <a:endParaRPr lang="en-US" sz="1050" dirty="0"/>
-          </a:p>
-        </p:txBody>
-      </p:sp>
-      <p:sp>
-        <p:nvSpPr>
-          <p:cNvPr id="39" name="Shape 37"/>
-          <p:cNvSpPr/>
-          <p:nvPr/>
-        </p:nvSpPr>
-        <p:spPr>
-          <a:xfrm>
-            <a:off x="5413248" y="3127248"/>
-            <a:ext cx="506917" cy="292608"/>
-          </a:xfrm>
-          <a:prstGeom prst="roundRect">
-            <a:avLst>
-              <a:gd name="adj" fmla="val 9375"/>
-            </a:avLst>
-          </a:prstGeom>
-          <a:solidFill>
-            <a:srgbClr val="B9C2D0"/>
-          </a:solidFill>
-          <a:ln/>
-        </p:spPr>
-      </p:sp>
-      <p:sp>
-        <p:nvSpPr>
-          <p:cNvPr id="40" name="Text 38"/>
-          <p:cNvSpPr/>
-          <p:nvPr/>
-        </p:nvSpPr>
-        <p:spPr>
-          <a:xfrm>
-            <a:off x="5975029" y="3145536"/>
-            <a:ext cx="640080" cy="274320"/>
-          </a:xfrm>
-          <a:prstGeom prst="rect">
-            <a:avLst/>
-          </a:prstGeom>
-          <a:noFill/>
-          <a:ln/>
-        </p:spPr>
-        <p:txBody>
-          <a:bodyPr wrap="square" lIns="0" tIns="0" rIns="0" bIns="0" rtlCol="0" anchor="ctr"/>
-          <a:lstStyle/>
-          <a:p>
-            <a:pPr indent="0" marL="0">
-              <a:buNone/>
-            </a:pPr>
-            <a:r>
-              <a:rPr lang="en-US" sz="1100" b="1" dirty="0">
-                <a:solidFill>
-                  <a:srgbClr val="555555"/>
-                </a:solidFill>
-                <a:latin typeface="Malgun Gothic" pitchFamily="34" charset="0"/>
-                <a:ea typeface="Malgun Gothic" pitchFamily="34" charset="-122"/>
-                <a:cs typeface="Malgun Gothic" pitchFamily="34" charset="-120"/>
-              </a:rPr>
-              <a:t>13%</a:t>
-            </a:r>
-            <a:endParaRPr lang="en-US" sz="1100" dirty="0"/>
-          </a:p>
-        </p:txBody>
-      </p:sp>
-      <p:sp>
-        <p:nvSpPr>
-          <p:cNvPr id="41" name="Text 39"/>
-          <p:cNvSpPr/>
-          <p:nvPr/>
-        </p:nvSpPr>
-        <p:spPr>
-          <a:xfrm>
-            <a:off x="4498848" y="3749040"/>
-            <a:ext cx="3200400" cy="1371600"/>
-          </a:xfrm>
-          <a:prstGeom prst="rect">
-            <a:avLst/>
-          </a:prstGeom>
-          <a:noFill/>
-          <a:ln/>
-        </p:spPr>
-        <p:txBody>
-          <a:bodyPr wrap="square" lIns="0" tIns="0" rIns="0" bIns="0" rtlCol="0" anchor="t"/>
-          <a:lstStyle/>
-          <a:p>
-            <a:pPr indent="0" marL="0">
-              <a:lnSpc>
-                <a:spcPct val="120000"/>
-              </a:lnSpc>
-              <a:buNone/>
-            </a:pPr>
-            <a:r>
-              <a:rPr lang="en-US" sz="1050" dirty="0">
-                <a:solidFill>
-                  <a:srgbClr val="1A1A1A"/>
-                </a:solidFill>
-                <a:latin typeface="Malgun Gothic" pitchFamily="34" charset="0"/>
-                <a:ea typeface="Malgun Gothic" pitchFamily="34" charset="-122"/>
-                <a:cs typeface="Malgun Gothic" pitchFamily="34" charset="-120"/>
-              </a:rPr>
-              <a:t>노출 순위 = 낙폭 순위. 삼성은 enterprise SSD 1위로 하이퍼스케일러 노출 최대, SK그룹 -63%에는 서버 100%인 Solidigm 포함. 반면 Kioxia(모바일 중심)·WDC(리테일 중심)는 얕게 맞았다</a:t>
-            </a:r>
-            <a:endParaRPr lang="en-US" sz="1050" dirty="0"/>
-          </a:p>
-        </p:txBody>
-      </p:sp>
-      <p:sp>
-        <p:nvSpPr>
-          <p:cNvPr id="42" name="Text 40"/>
-          <p:cNvSpPr/>
-          <p:nvPr/>
-        </p:nvSpPr>
-        <p:spPr>
-          <a:xfrm>
-            <a:off x="4498848" y="5870448"/>
-            <a:ext cx="3200400" cy="274320"/>
-          </a:xfrm>
-          <a:prstGeom prst="rect">
-            <a:avLst/>
-          </a:prstGeom>
-          <a:noFill/>
-          <a:ln/>
-        </p:spPr>
-        <p:txBody>
-          <a:bodyPr wrap="square" lIns="0" tIns="0" rIns="0" bIns="0" rtlCol="0" anchor="ctr"/>
-          <a:lstStyle/>
-          <a:p>
-            <a:pPr indent="0" marL="0">
-              <a:buNone/>
-            </a:pPr>
-            <a:r>
-              <a:rPr lang="en-US" sz="900" dirty="0">
-                <a:solidFill>
-                  <a:srgbClr val="555555"/>
-                </a:solidFill>
-                <a:latin typeface="Malgun Gothic" pitchFamily="34" charset="0"/>
-                <a:ea typeface="Malgun Gothic" pitchFamily="34" charset="-122"/>
-                <a:cs typeface="Malgun Gothic" pitchFamily="34" charset="-120"/>
-              </a:rPr>
-              <a:t>출처: TrendForce enterprise SSD 4Q22 · Blocks &amp; Files</a:t>
-            </a:r>
-            <a:endParaRPr lang="en-US" sz="900" dirty="0"/>
-          </a:p>
-        </p:txBody>
-      </p:sp>
-      <p:sp>
-        <p:nvSpPr>
-          <p:cNvPr id="43" name="Text 41"/>
-          <p:cNvSpPr/>
-          <p:nvPr/>
-        </p:nvSpPr>
-        <p:spPr>
-          <a:xfrm>
-            <a:off x="8330184" y="1773936"/>
-            <a:ext cx="3200400" cy="256032"/>
-          </a:xfrm>
-          <a:prstGeom prst="rect">
-            <a:avLst/>
-          </a:prstGeom>
-          <a:noFill/>
-          <a:ln/>
-        </p:spPr>
-        <p:txBody>
-          <a:bodyPr wrap="square" lIns="0" tIns="0" rIns="0" bIns="0" rtlCol="0" anchor="ctr"/>
-          <a:lstStyle/>
-          <a:p>
-            <a:pPr indent="0" marL="0">
-              <a:buNone/>
-            </a:pPr>
-            <a:r>
-              <a:rPr lang="en-US" sz="1050" b="1" dirty="0">
-                <a:solidFill>
-                  <a:srgbClr val="1428A0"/>
-                </a:solidFill>
-                <a:latin typeface="Malgun Gothic" pitchFamily="34" charset="0"/>
-                <a:ea typeface="Malgun Gothic" pitchFamily="34" charset="-122"/>
-                <a:cs typeface="Malgun Gothic" pitchFamily="34" charset="-120"/>
-              </a:rPr>
-              <a:t>하이퍼스케일러 CapEx ($B, 각사 10-K)</a:t>
-            </a:r>
-            <a:endParaRPr lang="en-US" sz="1050" dirty="0"/>
-          </a:p>
-        </p:txBody>
-      </p:sp>
-      <p:sp>
-        <p:nvSpPr>
-          <p:cNvPr id="44" name="Shape 42"/>
-          <p:cNvSpPr/>
-          <p:nvPr/>
-        </p:nvSpPr>
-        <p:spPr>
-          <a:xfrm>
-            <a:off x="8330184" y="3346704"/>
+          <p:cNvPr id="43" name="Shape 41"/>
+          <p:cNvSpPr/>
+          <p:nvPr/>
+        </p:nvSpPr>
+        <p:spPr>
+          <a:xfrm>
+            <a:off x="4498848" y="3200400"/>
             <a:ext cx="3200400" cy="0"/>
           </a:xfrm>
           <a:prstGeom prst="line">
@@ -13933,14 +13888,113 @@
       </p:sp>
       <p:sp>
         <p:nvSpPr>
+          <p:cNvPr id="44" name="Shape 42"/>
+          <p:cNvSpPr/>
+          <p:nvPr/>
+        </p:nvSpPr>
+        <p:spPr>
+          <a:xfrm>
+            <a:off x="4645152" y="2152841"/>
+            <a:ext cx="256032" cy="1047559"/>
+          </a:xfrm>
+          <a:prstGeom prst="rect">
+            <a:avLst/>
+          </a:prstGeom>
+          <a:solidFill>
+            <a:srgbClr val="D6DCE8"/>
+          </a:solidFill>
+          <a:ln/>
+        </p:spPr>
+      </p:sp>
+      <p:sp>
+        <p:nvSpPr>
           <p:cNvPr id="45" name="Shape 43"/>
           <p:cNvSpPr/>
           <p:nvPr/>
         </p:nvSpPr>
         <p:spPr>
           <a:xfrm>
-            <a:off x="8476488" y="2211848"/>
-            <a:ext cx="256032" cy="1134856"/>
+            <a:off x="4937760" y="2109978"/>
+            <a:ext cx="256032" cy="1090422"/>
+          </a:xfrm>
+          <a:prstGeom prst="rect">
+            <a:avLst/>
+          </a:prstGeom>
+          <a:solidFill>
+            <a:srgbClr val="8FA0DC"/>
+          </a:solidFill>
+          <a:ln/>
+        </p:spPr>
+      </p:sp>
+      <p:sp>
+        <p:nvSpPr>
+          <p:cNvPr id="46" name="Shape 44"/>
+          <p:cNvSpPr/>
+          <p:nvPr/>
+        </p:nvSpPr>
+        <p:spPr>
+          <a:xfrm>
+            <a:off x="5230368" y="2296859"/>
+            <a:ext cx="256032" cy="903542"/>
+          </a:xfrm>
+          <a:prstGeom prst="rect">
+            <a:avLst/>
+          </a:prstGeom>
+          <a:solidFill>
+            <a:srgbClr val="1428A0"/>
+          </a:solidFill>
+          <a:ln/>
+        </p:spPr>
+      </p:sp>
+      <p:sp>
+        <p:nvSpPr>
+          <p:cNvPr id="47" name="Text 45"/>
+          <p:cNvSpPr/>
+          <p:nvPr/>
+        </p:nvSpPr>
+        <p:spPr>
+          <a:xfrm>
+            <a:off x="4507992" y="3227832"/>
+            <a:ext cx="1152144" cy="201168"/>
+          </a:xfrm>
+          <a:prstGeom prst="rect">
+            <a:avLst/>
+          </a:prstGeom>
+          <a:noFill/>
+          <a:ln/>
+        </p:spPr>
+        <p:txBody>
+          <a:bodyPr wrap="square" lIns="0" tIns="0" rIns="0" bIns="0" rtlCol="0" anchor="ctr"/>
+          <a:lstStyle/>
+          <a:p>
+            <a:pPr algn="ctr" indent="0" marL="0">
+              <a:buNone/>
+            </a:pPr>
+            <a:r>
+              <a:rPr lang="en-US" sz="900" dirty="0">
+                <a:solidFill>
+                  <a:srgbClr val="1A1A1A"/>
+                </a:solidFill>
+                <a:latin typeface="Malgun Gothic" pitchFamily="34" charset="0"/>
+                <a:ea typeface="Malgun Gothic" pitchFamily="34" charset="-122"/>
+                <a:cs typeface="Malgun Gothic" pitchFamily="34" charset="-120"/>
+              </a:rPr>
+              <a:t>Amazon</a:t>
+            </a:r>
+            <a:endParaRPr lang="en-US" sz="900" dirty="0"/>
+          </a:p>
+        </p:txBody>
+      </p:sp>
+      <p:sp>
+        <p:nvSpPr>
+          <p:cNvPr id="48" name="Shape 46"/>
+          <p:cNvSpPr/>
+          <p:nvPr/>
+        </p:nvSpPr>
+        <p:spPr>
+          <a:xfrm>
+            <a:off x="5687568" y="2871216"/>
+            <a:ext cx="256032" cy="329184"/>
           </a:xfrm>
           <a:prstGeom prst="rect">
             <a:avLst/>
@@ -13953,14 +14007,14 @@
       </p:sp>
       <p:sp>
         <p:nvSpPr>
-          <p:cNvPr id="46" name="Shape 44"/>
-          <p:cNvSpPr/>
-          <p:nvPr/>
-        </p:nvSpPr>
-        <p:spPr>
-          <a:xfrm>
-            <a:off x="8769096" y="2165414"/>
-            <a:ext cx="256032" cy="1181291"/>
+          <p:cNvPr id="49" name="Shape 47"/>
+          <p:cNvSpPr/>
+          <p:nvPr/>
+        </p:nvSpPr>
+        <p:spPr>
+          <a:xfrm>
+            <a:off x="5980176" y="2662047"/>
+            <a:ext cx="256032" cy="538353"/>
           </a:xfrm>
           <a:prstGeom prst="rect">
             <a:avLst/>
@@ -13973,14 +14027,14 @@
       </p:sp>
       <p:sp>
         <p:nvSpPr>
-          <p:cNvPr id="47" name="Shape 45"/>
-          <p:cNvSpPr/>
-          <p:nvPr/>
-        </p:nvSpPr>
-        <p:spPr>
-          <a:xfrm>
-            <a:off x="9061704" y="2367867"/>
-            <a:ext cx="256032" cy="978837"/>
+          <p:cNvPr id="50" name="Shape 48"/>
+          <p:cNvSpPr/>
+          <p:nvPr/>
+        </p:nvSpPr>
+        <p:spPr>
+          <a:xfrm>
+            <a:off x="6272784" y="2718626"/>
+            <a:ext cx="256032" cy="481775"/>
           </a:xfrm>
           <a:prstGeom prst="rect">
             <a:avLst/>
@@ -13993,30 +14047,30 @@
       </p:sp>
       <p:sp>
         <p:nvSpPr>
-          <p:cNvPr id="48" name="Text 46"/>
-          <p:cNvSpPr/>
-          <p:nvPr/>
-        </p:nvSpPr>
-        <p:spPr>
-          <a:xfrm>
-            <a:off x="8339328" y="3383280"/>
-            <a:ext cx="1152144" cy="219456"/>
-          </a:xfrm>
-          <a:prstGeom prst="rect">
-            <a:avLst/>
-          </a:prstGeom>
-          <a:noFill/>
-          <a:ln/>
-        </p:spPr>
-        <p:txBody>
-          <a:bodyPr wrap="square" lIns="0" tIns="0" rIns="0" bIns="0" rtlCol="0" anchor="ctr"/>
-          <a:lstStyle/>
-          <a:p>
-            <a:pPr algn="ctr" indent="0" marL="0">
-              <a:buNone/>
-            </a:pPr>
-            <a:r>
-              <a:rPr lang="en-US" sz="950" dirty="0">
+          <p:cNvPr id="51" name="Text 49"/>
+          <p:cNvSpPr/>
+          <p:nvPr/>
+        </p:nvSpPr>
+        <p:spPr>
+          <a:xfrm>
+            <a:off x="5550408" y="3227832"/>
+            <a:ext cx="1152144" cy="201168"/>
+          </a:xfrm>
+          <a:prstGeom prst="rect">
+            <a:avLst/>
+          </a:prstGeom>
+          <a:noFill/>
+          <a:ln/>
+        </p:spPr>
+        <p:txBody>
+          <a:bodyPr wrap="square" lIns="0" tIns="0" rIns="0" bIns="0" rtlCol="0" anchor="ctr"/>
+          <a:lstStyle/>
+          <a:p>
+            <a:pPr algn="ctr" indent="0" marL="0">
+              <a:buNone/>
+            </a:pPr>
+            <a:r>
+              <a:rPr lang="en-US" sz="900" dirty="0">
                 <a:solidFill>
                   <a:srgbClr val="1A1A1A"/>
                 </a:solidFill>
@@ -14024,7 +14078,284 @@
                 <a:ea typeface="Malgun Gothic" pitchFamily="34" charset="-122"/>
                 <a:cs typeface="Malgun Gothic" pitchFamily="34" charset="-120"/>
               </a:rPr>
-              <a:t>Amazon</a:t>
+              <a:t>Meta</a:t>
+            </a:r>
+            <a:endParaRPr lang="en-US" sz="900" dirty="0"/>
+          </a:p>
+        </p:txBody>
+      </p:sp>
+      <p:sp>
+        <p:nvSpPr>
+          <p:cNvPr id="52" name="Shape 50"/>
+          <p:cNvSpPr/>
+          <p:nvPr/>
+        </p:nvSpPr>
+        <p:spPr>
+          <a:xfrm>
+            <a:off x="6729984" y="2778633"/>
+            <a:ext cx="256032" cy="421767"/>
+          </a:xfrm>
+          <a:prstGeom prst="rect">
+            <a:avLst/>
+          </a:prstGeom>
+          <a:solidFill>
+            <a:srgbClr val="D6DCE8"/>
+          </a:solidFill>
+          <a:ln/>
+        </p:spPr>
+      </p:sp>
+      <p:sp>
+        <p:nvSpPr>
+          <p:cNvPr id="53" name="Shape 51"/>
+          <p:cNvSpPr/>
+          <p:nvPr/>
+        </p:nvSpPr>
+        <p:spPr>
+          <a:xfrm>
+            <a:off x="7022592" y="2660333"/>
+            <a:ext cx="256032" cy="540068"/>
+          </a:xfrm>
+          <a:prstGeom prst="rect">
+            <a:avLst/>
+          </a:prstGeom>
+          <a:solidFill>
+            <a:srgbClr val="8FA0DC"/>
+          </a:solidFill>
+          <a:ln/>
+        </p:spPr>
+      </p:sp>
+      <p:sp>
+        <p:nvSpPr>
+          <p:cNvPr id="54" name="Shape 52"/>
+          <p:cNvSpPr/>
+          <p:nvPr/>
+        </p:nvSpPr>
+        <p:spPr>
+          <a:xfrm>
+            <a:off x="7315200" y="2646617"/>
+            <a:ext cx="256032" cy="553784"/>
+          </a:xfrm>
+          <a:prstGeom prst="rect">
+            <a:avLst/>
+          </a:prstGeom>
+          <a:solidFill>
+            <a:srgbClr val="1428A0"/>
+          </a:solidFill>
+          <a:ln/>
+        </p:spPr>
+      </p:sp>
+      <p:sp>
+        <p:nvSpPr>
+          <p:cNvPr id="55" name="Text 53"/>
+          <p:cNvSpPr/>
+          <p:nvPr/>
+        </p:nvSpPr>
+        <p:spPr>
+          <a:xfrm>
+            <a:off x="6592824" y="3227832"/>
+            <a:ext cx="1152144" cy="201168"/>
+          </a:xfrm>
+          <a:prstGeom prst="rect">
+            <a:avLst/>
+          </a:prstGeom>
+          <a:noFill/>
+          <a:ln/>
+        </p:spPr>
+        <p:txBody>
+          <a:bodyPr wrap="square" lIns="0" tIns="0" rIns="0" bIns="0" rtlCol="0" anchor="ctr"/>
+          <a:lstStyle/>
+          <a:p>
+            <a:pPr algn="ctr" indent="0" marL="0">
+              <a:buNone/>
+            </a:pPr>
+            <a:r>
+              <a:rPr lang="en-US" sz="900" dirty="0">
+                <a:solidFill>
+                  <a:srgbClr val="1A1A1A"/>
+                </a:solidFill>
+                <a:latin typeface="Malgun Gothic" pitchFamily="34" charset="0"/>
+                <a:ea typeface="Malgun Gothic" pitchFamily="34" charset="-122"/>
+                <a:cs typeface="Malgun Gothic" pitchFamily="34" charset="-120"/>
+              </a:rPr>
+              <a:t>Alphabet</a:t>
+            </a:r>
+            <a:endParaRPr lang="en-US" sz="900" dirty="0"/>
+          </a:p>
+        </p:txBody>
+      </p:sp>
+      <p:sp>
+        <p:nvSpPr>
+          <p:cNvPr id="56" name="Text 54"/>
+          <p:cNvSpPr/>
+          <p:nvPr/>
+        </p:nvSpPr>
+        <p:spPr>
+          <a:xfrm>
+            <a:off x="4498848" y="3493008"/>
+            <a:ext cx="3200400" cy="219456"/>
+          </a:xfrm>
+          <a:prstGeom prst="rect">
+            <a:avLst/>
+          </a:prstGeom>
+          <a:noFill/>
+          <a:ln/>
+        </p:spPr>
+        <p:txBody>
+          <a:bodyPr wrap="square" lIns="0" tIns="0" rIns="0" bIns="0" rtlCol="0" anchor="ctr"/>
+          <a:lstStyle/>
+          <a:p>
+            <a:pPr indent="0" marL="0">
+              <a:buNone/>
+            </a:pPr>
+            <a:r>
+              <a:rPr lang="en-US" sz="900" dirty="0">
+                <a:solidFill>
+                  <a:srgbClr val="555555"/>
+                </a:solidFill>
+                <a:latin typeface="Malgun Gothic" pitchFamily="34" charset="0"/>
+                <a:ea typeface="Malgun Gothic" pitchFamily="34" charset="-122"/>
+                <a:cs typeface="Malgun Gothic" pitchFamily="34" charset="-120"/>
+              </a:rPr>
+              <a:t>’21  ’22  ’23 · Amazon 창사 최초 -17%, Meta -11%</a:t>
+            </a:r>
+            <a:endParaRPr lang="en-US" sz="900" dirty="0"/>
+          </a:p>
+        </p:txBody>
+      </p:sp>
+      <p:sp>
+        <p:nvSpPr>
+          <p:cNvPr id="57" name="Text 55"/>
+          <p:cNvSpPr/>
+          <p:nvPr/>
+        </p:nvSpPr>
+        <p:spPr>
+          <a:xfrm>
+            <a:off x="4498848" y="3858768"/>
+            <a:ext cx="3200400" cy="237744"/>
+          </a:xfrm>
+          <a:prstGeom prst="rect">
+            <a:avLst/>
+          </a:prstGeom>
+          <a:noFill/>
+          <a:ln/>
+        </p:spPr>
+        <p:txBody>
+          <a:bodyPr wrap="square" lIns="0" tIns="0" rIns="0" bIns="0" rtlCol="0" anchor="ctr"/>
+          <a:lstStyle/>
+          <a:p>
+            <a:pPr indent="0" marL="0">
+              <a:buNone/>
+            </a:pPr>
+            <a:r>
+              <a:rPr lang="en-US" sz="1050" b="1" dirty="0">
+                <a:solidFill>
+                  <a:srgbClr val="1428A0"/>
+                </a:solidFill>
+                <a:latin typeface="Malgun Gothic" pitchFamily="34" charset="0"/>
+                <a:ea typeface="Malgun Gothic" pitchFamily="34" charset="-122"/>
+                <a:cs typeface="Malgun Gothic" pitchFamily="34" charset="-120"/>
+              </a:rPr>
+              <a:t>그중 AI 인프라: AI 서버 시장 가치 ($B)</a:t>
+            </a:r>
+            <a:endParaRPr lang="en-US" sz="1050" dirty="0"/>
+          </a:p>
+        </p:txBody>
+      </p:sp>
+      <p:sp>
+        <p:nvSpPr>
+          <p:cNvPr id="58" name="Text 56"/>
+          <p:cNvSpPr/>
+          <p:nvPr/>
+        </p:nvSpPr>
+        <p:spPr>
+          <a:xfrm>
+            <a:off x="4498848" y="4169664"/>
+            <a:ext cx="384048" cy="274320"/>
+          </a:xfrm>
+          <a:prstGeom prst="rect">
+            <a:avLst/>
+          </a:prstGeom>
+          <a:noFill/>
+          <a:ln/>
+        </p:spPr>
+        <p:txBody>
+          <a:bodyPr wrap="square" lIns="0" tIns="0" rIns="0" bIns="0" rtlCol="0" anchor="ctr"/>
+          <a:lstStyle/>
+          <a:p>
+            <a:pPr indent="0" marL="0">
+              <a:buNone/>
+            </a:pPr>
+            <a:r>
+              <a:rPr lang="en-US" sz="1000" b="1" dirty="0">
+                <a:solidFill>
+                  <a:srgbClr val="1A1A1A"/>
+                </a:solidFill>
+                <a:latin typeface="Malgun Gothic" pitchFamily="34" charset="0"/>
+                <a:ea typeface="Malgun Gothic" pitchFamily="34" charset="-122"/>
+                <a:cs typeface="Malgun Gothic" pitchFamily="34" charset="-120"/>
+              </a:rPr>
+              <a:t>’23</a:t>
+            </a:r>
+            <a:endParaRPr lang="en-US" sz="1000" dirty="0"/>
+          </a:p>
+        </p:txBody>
+      </p:sp>
+      <p:sp>
+        <p:nvSpPr>
+          <p:cNvPr id="59" name="Shape 57"/>
+          <p:cNvSpPr/>
+          <p:nvPr/>
+        </p:nvSpPr>
+        <p:spPr>
+          <a:xfrm>
+            <a:off x="4919472" y="4187952"/>
+            <a:ext cx="525658" cy="237744"/>
+          </a:xfrm>
+          <a:prstGeom prst="roundRect">
+            <a:avLst>
+              <a:gd name="adj" fmla="val 11538"/>
+            </a:avLst>
+          </a:prstGeom>
+          <a:solidFill>
+            <a:srgbClr val="8FA0DC"/>
+          </a:solidFill>
+          <a:ln/>
+        </p:spPr>
+      </p:sp>
+      <p:sp>
+        <p:nvSpPr>
+          <p:cNvPr id="60" name="Text 58"/>
+          <p:cNvSpPr/>
+          <p:nvPr/>
+        </p:nvSpPr>
+        <p:spPr>
+          <a:xfrm>
+            <a:off x="5499994" y="4169664"/>
+            <a:ext cx="2377440" cy="274320"/>
+          </a:xfrm>
+          <a:prstGeom prst="rect">
+            <a:avLst/>
+          </a:prstGeom>
+          <a:noFill/>
+          <a:ln/>
+        </p:spPr>
+        <p:txBody>
+          <a:bodyPr wrap="square" lIns="0" tIns="0" rIns="0" bIns="0" rtlCol="0" anchor="ctr"/>
+          <a:lstStyle/>
+          <a:p>
+            <a:pPr indent="0" marL="0">
+              <a:buNone/>
+            </a:pPr>
+            <a:r>
+              <a:rPr lang="en-US" sz="950" b="1" dirty="0">
+                <a:solidFill>
+                  <a:srgbClr val="555555"/>
+                </a:solidFill>
+                <a:latin typeface="Malgun Gothic" pitchFamily="34" charset="0"/>
+                <a:ea typeface="Malgun Gothic" pitchFamily="34" charset="-122"/>
+                <a:cs typeface="Malgun Gothic" pitchFamily="34" charset="-120"/>
+              </a:rPr>
+              <a:t>~50 · 서버 가치의 23%</a:t>
             </a:r>
             <a:endParaRPr lang="en-US" sz="950" dirty="0"/>
           </a:p>
@@ -14032,57 +14363,58 @@
       </p:sp>
       <p:sp>
         <p:nvSpPr>
-          <p:cNvPr id="49" name="Shape 47"/>
-          <p:cNvSpPr/>
-          <p:nvPr/>
-        </p:nvSpPr>
-        <p:spPr>
-          <a:xfrm>
-            <a:off x="9518904" y="2990088"/>
-            <a:ext cx="256032" cy="356616"/>
-          </a:xfrm>
-          <a:prstGeom prst="rect">
-            <a:avLst/>
-          </a:prstGeom>
-          <a:solidFill>
-            <a:srgbClr val="D6DCE8"/>
-          </a:solidFill>
-          <a:ln/>
-        </p:spPr>
-      </p:sp>
-      <p:sp>
-        <p:nvSpPr>
-          <p:cNvPr id="50" name="Shape 48"/>
-          <p:cNvSpPr/>
-          <p:nvPr/>
-        </p:nvSpPr>
-        <p:spPr>
-          <a:xfrm>
-            <a:off x="9811512" y="2763488"/>
-            <a:ext cx="256032" cy="583216"/>
-          </a:xfrm>
-          <a:prstGeom prst="rect">
-            <a:avLst/>
-          </a:prstGeom>
-          <a:solidFill>
-            <a:srgbClr val="8FA0DC"/>
-          </a:solidFill>
-          <a:ln/>
-        </p:spPr>
-      </p:sp>
-      <p:sp>
-        <p:nvSpPr>
-          <p:cNvPr id="51" name="Shape 49"/>
-          <p:cNvSpPr/>
-          <p:nvPr/>
-        </p:nvSpPr>
-        <p:spPr>
-          <a:xfrm>
-            <a:off x="10104120" y="2824782"/>
-            <a:ext cx="256032" cy="521922"/>
-          </a:xfrm>
-          <a:prstGeom prst="rect">
-            <a:avLst/>
+          <p:cNvPr id="61" name="Text 59"/>
+          <p:cNvSpPr/>
+          <p:nvPr/>
+        </p:nvSpPr>
+        <p:spPr>
+          <a:xfrm>
+            <a:off x="4498848" y="4535424"/>
+            <a:ext cx="384048" cy="274320"/>
+          </a:xfrm>
+          <a:prstGeom prst="rect">
+            <a:avLst/>
+          </a:prstGeom>
+          <a:noFill/>
+          <a:ln/>
+        </p:spPr>
+        <p:txBody>
+          <a:bodyPr wrap="square" lIns="0" tIns="0" rIns="0" bIns="0" rtlCol="0" anchor="ctr"/>
+          <a:lstStyle/>
+          <a:p>
+            <a:pPr indent="0" marL="0">
+              <a:buNone/>
+            </a:pPr>
+            <a:r>
+              <a:rPr lang="en-US" sz="1000" b="1" dirty="0">
+                <a:solidFill>
+                  <a:srgbClr val="1A1A1A"/>
+                </a:solidFill>
+                <a:latin typeface="Malgun Gothic" pitchFamily="34" charset="0"/>
+                <a:ea typeface="Malgun Gothic" pitchFamily="34" charset="-122"/>
+                <a:cs typeface="Malgun Gothic" pitchFamily="34" charset="-120"/>
+              </a:rPr>
+              <a:t>’24</a:t>
+            </a:r>
+            <a:endParaRPr lang="en-US" sz="1000" dirty="0"/>
+          </a:p>
+        </p:txBody>
+      </p:sp>
+      <p:sp>
+        <p:nvSpPr>
+          <p:cNvPr id="62" name="Shape 60"/>
+          <p:cNvSpPr/>
+          <p:nvPr/>
+        </p:nvSpPr>
+        <p:spPr>
+          <a:xfrm>
+            <a:off x="4919472" y="4553712"/>
+            <a:ext cx="1965960" cy="237744"/>
+          </a:xfrm>
+          <a:prstGeom prst="roundRect">
+            <a:avLst>
+              <a:gd name="adj" fmla="val 11538"/>
+            </a:avLst>
           </a:prstGeom>
           <a:solidFill>
             <a:srgbClr val="1428A0"/>
@@ -14092,38 +14424,38 @@
       </p:sp>
       <p:sp>
         <p:nvSpPr>
-          <p:cNvPr id="52" name="Text 50"/>
-          <p:cNvSpPr/>
-          <p:nvPr/>
-        </p:nvSpPr>
-        <p:spPr>
-          <a:xfrm>
-            <a:off x="9381744" y="3383280"/>
-            <a:ext cx="1152144" cy="219456"/>
-          </a:xfrm>
-          <a:prstGeom prst="rect">
-            <a:avLst/>
-          </a:prstGeom>
-          <a:noFill/>
-          <a:ln/>
-        </p:spPr>
-        <p:txBody>
-          <a:bodyPr wrap="square" lIns="0" tIns="0" rIns="0" bIns="0" rtlCol="0" anchor="ctr"/>
-          <a:lstStyle/>
-          <a:p>
-            <a:pPr algn="ctr" indent="0" marL="0">
-              <a:buNone/>
-            </a:pPr>
-            <a:r>
-              <a:rPr lang="en-US" sz="950" dirty="0">
-                <a:solidFill>
-                  <a:srgbClr val="1A1A1A"/>
-                </a:solidFill>
-                <a:latin typeface="Malgun Gothic" pitchFamily="34" charset="0"/>
-                <a:ea typeface="Malgun Gothic" pitchFamily="34" charset="-122"/>
-                <a:cs typeface="Malgun Gothic" pitchFamily="34" charset="-120"/>
-              </a:rPr>
-              <a:t>Meta</a:t>
+          <p:cNvPr id="63" name="Text 61"/>
+          <p:cNvSpPr/>
+          <p:nvPr/>
+        </p:nvSpPr>
+        <p:spPr>
+          <a:xfrm>
+            <a:off x="4992624" y="4535424"/>
+            <a:ext cx="2377440" cy="274320"/>
+          </a:xfrm>
+          <a:prstGeom prst="rect">
+            <a:avLst/>
+          </a:prstGeom>
+          <a:noFill/>
+          <a:ln/>
+        </p:spPr>
+        <p:txBody>
+          <a:bodyPr wrap="square" lIns="0" tIns="0" rIns="0" bIns="0" rtlCol="0" anchor="ctr"/>
+          <a:lstStyle/>
+          <a:p>
+            <a:pPr indent="0" marL="0">
+              <a:buNone/>
+            </a:pPr>
+            <a:r>
+              <a:rPr lang="en-US" sz="950" b="1" dirty="0">
+                <a:solidFill>
+                  <a:srgbClr val="FFFFFF"/>
+                </a:solidFill>
+                <a:latin typeface="Malgun Gothic" pitchFamily="34" charset="0"/>
+                <a:ea typeface="Malgun Gothic" pitchFamily="34" charset="-122"/>
+                <a:cs typeface="Malgun Gothic" pitchFamily="34" charset="-120"/>
+              </a:rPr>
+              <a:t>187 · 65%</a:t>
             </a:r>
             <a:endParaRPr lang="en-US" sz="950" dirty="0"/>
           </a:p>
@@ -14131,163 +14463,796 @@
       </p:sp>
       <p:sp>
         <p:nvSpPr>
-          <p:cNvPr id="53" name="Shape 51"/>
-          <p:cNvSpPr/>
-          <p:nvPr/>
-        </p:nvSpPr>
-        <p:spPr>
-          <a:xfrm>
-            <a:off x="10561320" y="2889790"/>
-            <a:ext cx="256032" cy="456914"/>
-          </a:xfrm>
-          <a:prstGeom prst="rect">
-            <a:avLst/>
-          </a:prstGeom>
-          <a:solidFill>
-            <a:srgbClr val="D6DCE8"/>
-          </a:solidFill>
-          <a:ln/>
-        </p:spPr>
-      </p:sp>
-      <p:sp>
-        <p:nvSpPr>
-          <p:cNvPr id="54" name="Shape 52"/>
-          <p:cNvSpPr/>
-          <p:nvPr/>
-        </p:nvSpPr>
-        <p:spPr>
-          <a:xfrm>
-            <a:off x="10853928" y="2761631"/>
-            <a:ext cx="256032" cy="585073"/>
-          </a:xfrm>
-          <a:prstGeom prst="rect">
-            <a:avLst/>
-          </a:prstGeom>
-          <a:solidFill>
-            <a:srgbClr val="8FA0DC"/>
-          </a:solidFill>
-          <a:ln/>
-        </p:spPr>
-      </p:sp>
-      <p:sp>
-        <p:nvSpPr>
-          <p:cNvPr id="55" name="Shape 53"/>
-          <p:cNvSpPr/>
-          <p:nvPr/>
-        </p:nvSpPr>
-        <p:spPr>
-          <a:xfrm>
-            <a:off x="11146536" y="2746772"/>
-            <a:ext cx="256032" cy="599932"/>
-          </a:xfrm>
-          <a:prstGeom prst="rect">
-            <a:avLst/>
-          </a:prstGeom>
-          <a:solidFill>
-            <a:srgbClr val="1428A0"/>
-          </a:solidFill>
-          <a:ln/>
-        </p:spPr>
-      </p:sp>
-      <p:sp>
-        <p:nvSpPr>
-          <p:cNvPr id="56" name="Text 54"/>
-          <p:cNvSpPr/>
-          <p:nvPr/>
-        </p:nvSpPr>
-        <p:spPr>
-          <a:xfrm>
-            <a:off x="10424160" y="3383280"/>
-            <a:ext cx="1152144" cy="219456"/>
-          </a:xfrm>
-          <a:prstGeom prst="rect">
-            <a:avLst/>
-          </a:prstGeom>
-          <a:noFill/>
-          <a:ln/>
-        </p:spPr>
-        <p:txBody>
-          <a:bodyPr wrap="square" lIns="0" tIns="0" rIns="0" bIns="0" rtlCol="0" anchor="ctr"/>
-          <a:lstStyle/>
-          <a:p>
-            <a:pPr algn="ctr" indent="0" marL="0">
-              <a:buNone/>
-            </a:pPr>
-            <a:r>
-              <a:rPr lang="en-US" sz="950" dirty="0">
-                <a:solidFill>
-                  <a:srgbClr val="1A1A1A"/>
-                </a:solidFill>
-                <a:latin typeface="Malgun Gothic" pitchFamily="34" charset="0"/>
-                <a:ea typeface="Malgun Gothic" pitchFamily="34" charset="-122"/>
-                <a:cs typeface="Malgun Gothic" pitchFamily="34" charset="-120"/>
-              </a:rPr>
-              <a:t>Alphabet</a:t>
-            </a:r>
-            <a:endParaRPr lang="en-US" sz="950" dirty="0"/>
-          </a:p>
-        </p:txBody>
-      </p:sp>
-      <p:sp>
-        <p:nvSpPr>
-          <p:cNvPr id="57" name="Text 55"/>
-          <p:cNvSpPr/>
-          <p:nvPr/>
-        </p:nvSpPr>
-        <p:spPr>
-          <a:xfrm>
-            <a:off x="8330184" y="3675888"/>
-            <a:ext cx="3200400" cy="713232"/>
-          </a:xfrm>
-          <a:prstGeom prst="rect">
-            <a:avLst/>
-          </a:prstGeom>
-          <a:noFill/>
-          <a:ln/>
-        </p:spPr>
-        <p:txBody>
-          <a:bodyPr wrap="square" lIns="0" tIns="0" rIns="0" bIns="0" rtlCol="0" anchor="t"/>
+          <p:cNvPr id="64" name="Text 62"/>
+          <p:cNvSpPr/>
+          <p:nvPr/>
+        </p:nvSpPr>
+        <p:spPr>
+          <a:xfrm>
+            <a:off x="4498848" y="5193792"/>
+            <a:ext cx="3200400" cy="658368"/>
+          </a:xfrm>
+          <a:prstGeom prst="roundRect">
+            <a:avLst>
+              <a:gd name="adj" fmla="val 6944"/>
+            </a:avLst>
+          </a:prstGeom>
+          <a:solidFill>
+            <a:srgbClr val="F4F4F6"/>
+          </a:solidFill>
+          <a:ln/>
+        </p:spPr>
+        <p:txBody>
+          <a:bodyPr wrap="square" lIns="1016" tIns="1016" rIns="1016" bIns="1016" rtlCol="0" anchor="ctr"/>
           <a:lstStyle/>
           <a:p>
             <a:pPr indent="0" marL="0">
               <a:lnSpc>
-                <a:spcPct val="115000"/>
+                <a:spcPct val="112000"/>
               </a:lnSpc>
               <a:buNone/>
             </a:pPr>
             <a:r>
+              <a:rPr lang="en-US" sz="950" b="1" dirty="0">
+                <a:solidFill>
+                  <a:srgbClr val="1428A0"/>
+                </a:solidFill>
+                <a:latin typeface="Malgun Gothic" pitchFamily="34" charset="0"/>
+                <a:ea typeface="Malgun Gothic" pitchFamily="34" charset="-122"/>
+                <a:cs typeface="Malgun Gothic" pitchFamily="34" charset="-120"/>
+              </a:rPr>
+              <a:t>총량이 아니라 재배분.  </a:t>
+            </a:r>
+            <a:pPr indent="0" marL="0">
+              <a:lnSpc>
+                <a:spcPct val="112000"/>
+              </a:lnSpc>
+              <a:buNone/>
+            </a:pPr>
+            <a:r>
               <a:rPr lang="en-US" sz="950" dirty="0">
                 <a:solidFill>
+                  <a:srgbClr val="1A1A1A"/>
+                </a:solidFill>
+                <a:latin typeface="Malgun Gothic" pitchFamily="34" charset="0"/>
+                <a:ea typeface="Malgun Gothic" pitchFamily="34" charset="-122"/>
+                <a:cs typeface="Malgun Gothic" pitchFamily="34" charset="-120"/>
+              </a:rPr>
+              <a:t>CapEx가 깎인 ’23에도 AI 서버 가치는 ~$50B(23%), ’24 $187B(65%)로 폭증. 일반 서버·스토리지향 수요만 꺼졌다</a:t>
+            </a:r>
+            <a:endParaRPr lang="en-US" sz="950" dirty="0"/>
+          </a:p>
+        </p:txBody>
+      </p:sp>
+      <p:sp>
+        <p:nvSpPr>
+          <p:cNvPr id="65" name="Text 63"/>
+          <p:cNvSpPr/>
+          <p:nvPr/>
+        </p:nvSpPr>
+        <p:spPr>
+          <a:xfrm>
+            <a:off x="4498848" y="5943600"/>
+            <a:ext cx="3200400" cy="274320"/>
+          </a:xfrm>
+          <a:prstGeom prst="rect">
+            <a:avLst/>
+          </a:prstGeom>
+          <a:noFill/>
+          <a:ln/>
+        </p:spPr>
+        <p:txBody>
+          <a:bodyPr wrap="square" lIns="0" tIns="0" rIns="0" bIns="0" rtlCol="0" anchor="ctr"/>
+          <a:lstStyle/>
+          <a:p>
+            <a:pPr indent="0" marL="0">
+              <a:buNone/>
+            </a:pPr>
+            <a:r>
+              <a:rPr lang="en-US" sz="850" dirty="0">
+                <a:solidFill>
                   <a:srgbClr val="555555"/>
                 </a:solidFill>
                 <a:latin typeface="Malgun Gothic" pitchFamily="34" charset="0"/>
                 <a:ea typeface="Malgun Gothic" pitchFamily="34" charset="-122"/>
                 <a:cs typeface="Malgun Gothic" pitchFamily="34" charset="-120"/>
               </a:rPr>
-              <a:t>’21  ’22  ’23  ·  Amazon 창사 최초 감소(-17%), Meta -11%. 반면 AI 서버는 ’23 ~$50B로 서버 시장 가치의 ~23%: 총량이 아니라 재배분</a:t>
-            </a:r>
-            <a:endParaRPr lang="en-US" sz="950" dirty="0"/>
-          </a:p>
-        </p:txBody>
-      </p:sp>
-      <p:sp>
-        <p:nvSpPr>
-          <p:cNvPr id="58" name="Shape 56"/>
-          <p:cNvSpPr/>
-          <p:nvPr/>
-        </p:nvSpPr>
-        <p:spPr>
-          <a:xfrm>
-            <a:off x="8311896" y="4498848"/>
-            <a:ext cx="3236976" cy="1536192"/>
-          </a:xfrm>
-          <a:prstGeom prst="roundRect">
-            <a:avLst>
-              <a:gd name="adj" fmla="val 4167"/>
-            </a:avLst>
-          </a:prstGeom>
-          <a:solidFill>
-            <a:srgbClr val="EEF1FA"/>
+              <a:t>출처: 각사 10-K · Platformonomics · TrendForce(’24.07)</a:t>
+            </a:r>
+            <a:endParaRPr lang="en-US" sz="850" dirty="0"/>
+          </a:p>
+        </p:txBody>
+      </p:sp>
+      <p:sp>
+        <p:nvSpPr>
+          <p:cNvPr id="66" name="Text 64"/>
+          <p:cNvSpPr/>
+          <p:nvPr/>
+        </p:nvSpPr>
+        <p:spPr>
+          <a:xfrm>
+            <a:off x="8330184" y="1755648"/>
+            <a:ext cx="3200400" cy="237744"/>
+          </a:xfrm>
+          <a:prstGeom prst="rect">
+            <a:avLst/>
+          </a:prstGeom>
+          <a:noFill/>
+          <a:ln/>
+        </p:spPr>
+        <p:txBody>
+          <a:bodyPr wrap="square" lIns="0" tIns="0" rIns="0" bIns="0" rtlCol="0" anchor="ctr"/>
+          <a:lstStyle/>
+          <a:p>
+            <a:pPr indent="0" marL="0">
+              <a:buNone/>
+            </a:pPr>
+            <a:r>
+              <a:rPr lang="en-US" sz="1050" b="1" dirty="0">
+                <a:solidFill>
+                  <a:srgbClr val="1428A0"/>
+                </a:solidFill>
+                <a:latin typeface="Malgun Gothic" pitchFamily="34" charset="0"/>
+                <a:ea typeface="Malgun Gothic" pitchFamily="34" charset="-122"/>
+                <a:cs typeface="Malgun Gothic" pitchFamily="34" charset="-120"/>
+              </a:rPr>
+              <a:t>대용량 QLC eSSD: 용량 × 출시 시점</a:t>
+            </a:r>
+            <a:endParaRPr lang="en-US" sz="1050" dirty="0"/>
+          </a:p>
+        </p:txBody>
+      </p:sp>
+      <p:sp>
+        <p:nvSpPr>
+          <p:cNvPr id="67" name="Text 65"/>
+          <p:cNvSpPr/>
+          <p:nvPr/>
+        </p:nvSpPr>
+        <p:spPr>
+          <a:xfrm>
+            <a:off x="8302752" y="2093976"/>
+            <a:ext cx="731520" cy="237744"/>
+          </a:xfrm>
+          <a:prstGeom prst="rect">
+            <a:avLst/>
+          </a:prstGeom>
+          <a:noFill/>
+          <a:ln/>
+        </p:spPr>
+        <p:txBody>
+          <a:bodyPr wrap="square" lIns="0" tIns="0" rIns="0" bIns="0" rtlCol="0" anchor="ctr"/>
+          <a:lstStyle/>
+          <a:p>
+            <a:pPr indent="0" marL="0">
+              <a:buNone/>
+            </a:pPr>
+            <a:r>
+              <a:rPr lang="en-US" sz="900" dirty="0">
+                <a:solidFill>
+                  <a:srgbClr val="1A1A1A"/>
+                </a:solidFill>
+                <a:latin typeface="Malgun Gothic" pitchFamily="34" charset="0"/>
+                <a:ea typeface="Malgun Gothic" pitchFamily="34" charset="-122"/>
+                <a:cs typeface="Malgun Gothic" pitchFamily="34" charset="-120"/>
+              </a:rPr>
+              <a:t>Solidigm</a:t>
+            </a:r>
+            <a:endParaRPr lang="en-US" sz="900" dirty="0"/>
+          </a:p>
+        </p:txBody>
+      </p:sp>
+      <p:sp>
+        <p:nvSpPr>
+          <p:cNvPr id="68" name="Shape 66"/>
+          <p:cNvSpPr/>
+          <p:nvPr/>
+        </p:nvSpPr>
+        <p:spPr>
+          <a:xfrm>
+            <a:off x="9052560" y="2212848"/>
+            <a:ext cx="2377440" cy="0"/>
+          </a:xfrm>
+          <a:prstGeom prst="line">
+            <a:avLst/>
+          </a:prstGeom>
+          <a:noFill/>
+          <a:ln w="9525">
+            <a:solidFill>
+              <a:srgbClr val="D9D9D9"/>
+            </a:solidFill>
+            <a:prstDash val="solid"/>
+          </a:ln>
+        </p:spPr>
+      </p:sp>
+      <p:sp>
+        <p:nvSpPr>
+          <p:cNvPr id="69" name="Text 67"/>
+          <p:cNvSpPr/>
+          <p:nvPr/>
+        </p:nvSpPr>
+        <p:spPr>
+          <a:xfrm>
+            <a:off x="8302752" y="2642616"/>
+            <a:ext cx="731520" cy="237744"/>
+          </a:xfrm>
+          <a:prstGeom prst="rect">
+            <a:avLst/>
+          </a:prstGeom>
+          <a:noFill/>
+          <a:ln/>
+        </p:spPr>
+        <p:txBody>
+          <a:bodyPr wrap="square" lIns="0" tIns="0" rIns="0" bIns="0" rtlCol="0" anchor="ctr"/>
+          <a:lstStyle/>
+          <a:p>
+            <a:pPr indent="0" marL="0">
+              <a:buNone/>
+            </a:pPr>
+            <a:r>
+              <a:rPr lang="en-US" sz="900" b="1" dirty="0">
+                <a:solidFill>
+                  <a:srgbClr val="1428A0"/>
+                </a:solidFill>
+                <a:latin typeface="Malgun Gothic" pitchFamily="34" charset="0"/>
+                <a:ea typeface="Malgun Gothic" pitchFamily="34" charset="-122"/>
+                <a:cs typeface="Malgun Gothic" pitchFamily="34" charset="-120"/>
+              </a:rPr>
+              <a:t>삼성</a:t>
+            </a:r>
+            <a:endParaRPr lang="en-US" sz="900" dirty="0"/>
+          </a:p>
+        </p:txBody>
+      </p:sp>
+      <p:sp>
+        <p:nvSpPr>
+          <p:cNvPr id="70" name="Shape 68"/>
+          <p:cNvSpPr/>
+          <p:nvPr/>
+        </p:nvSpPr>
+        <p:spPr>
+          <a:xfrm>
+            <a:off x="9052560" y="2761488"/>
+            <a:ext cx="2377440" cy="0"/>
+          </a:xfrm>
+          <a:prstGeom prst="line">
+            <a:avLst/>
+          </a:prstGeom>
+          <a:noFill/>
+          <a:ln w="9525">
+            <a:solidFill>
+              <a:srgbClr val="D9D9D9"/>
+            </a:solidFill>
+            <a:prstDash val="solid"/>
+          </a:ln>
+        </p:spPr>
+      </p:sp>
+      <p:sp>
+        <p:nvSpPr>
+          <p:cNvPr id="71" name="Text 69"/>
+          <p:cNvSpPr/>
+          <p:nvPr/>
+        </p:nvSpPr>
+        <p:spPr>
+          <a:xfrm>
+            <a:off x="8302752" y="3191256"/>
+            <a:ext cx="731520" cy="237744"/>
+          </a:xfrm>
+          <a:prstGeom prst="rect">
+            <a:avLst/>
+          </a:prstGeom>
+          <a:noFill/>
+          <a:ln/>
+        </p:spPr>
+        <p:txBody>
+          <a:bodyPr wrap="square" lIns="0" tIns="0" rIns="0" bIns="0" rtlCol="0" anchor="ctr"/>
+          <a:lstStyle/>
+          <a:p>
+            <a:pPr indent="0" marL="0">
+              <a:buNone/>
+            </a:pPr>
+            <a:r>
+              <a:rPr lang="en-US" sz="900" dirty="0">
+                <a:solidFill>
+                  <a:srgbClr val="1A1A1A"/>
+                </a:solidFill>
+                <a:latin typeface="Malgun Gothic" pitchFamily="34" charset="0"/>
+                <a:ea typeface="Malgun Gothic" pitchFamily="34" charset="-122"/>
+                <a:cs typeface="Malgun Gothic" pitchFamily="34" charset="-120"/>
+              </a:rPr>
+              <a:t>Micron</a:t>
+            </a:r>
+            <a:endParaRPr lang="en-US" sz="900" dirty="0"/>
+          </a:p>
+        </p:txBody>
+      </p:sp>
+      <p:sp>
+        <p:nvSpPr>
+          <p:cNvPr id="72" name="Shape 70"/>
+          <p:cNvSpPr/>
+          <p:nvPr/>
+        </p:nvSpPr>
+        <p:spPr>
+          <a:xfrm>
+            <a:off x="9052560" y="3310128"/>
+            <a:ext cx="2377440" cy="0"/>
+          </a:xfrm>
+          <a:prstGeom prst="line">
+            <a:avLst/>
+          </a:prstGeom>
+          <a:noFill/>
+          <a:ln w="9525">
+            <a:solidFill>
+              <a:srgbClr val="D9D9D9"/>
+            </a:solidFill>
+            <a:prstDash val="solid"/>
+          </a:ln>
+        </p:spPr>
+      </p:sp>
+      <p:sp>
+        <p:nvSpPr>
+          <p:cNvPr id="73" name="Text 71"/>
+          <p:cNvSpPr/>
+          <p:nvPr/>
+        </p:nvSpPr>
+        <p:spPr>
+          <a:xfrm>
+            <a:off x="8302752" y="3739896"/>
+            <a:ext cx="731520" cy="237744"/>
+          </a:xfrm>
+          <a:prstGeom prst="rect">
+            <a:avLst/>
+          </a:prstGeom>
+          <a:noFill/>
+          <a:ln/>
+        </p:spPr>
+        <p:txBody>
+          <a:bodyPr wrap="square" lIns="0" tIns="0" rIns="0" bIns="0" rtlCol="0" anchor="ctr"/>
+          <a:lstStyle/>
+          <a:p>
+            <a:pPr indent="0" marL="0">
+              <a:buNone/>
+            </a:pPr>
+            <a:r>
+              <a:rPr lang="en-US" sz="900" dirty="0">
+                <a:solidFill>
+                  <a:srgbClr val="1A1A1A"/>
+                </a:solidFill>
+                <a:latin typeface="Malgun Gothic" pitchFamily="34" charset="0"/>
+                <a:ea typeface="Malgun Gothic" pitchFamily="34" charset="-122"/>
+                <a:cs typeface="Malgun Gothic" pitchFamily="34" charset="-120"/>
+              </a:rPr>
+              <a:t>Kioxia</a:t>
+            </a:r>
+            <a:endParaRPr lang="en-US" sz="900" dirty="0"/>
+          </a:p>
+        </p:txBody>
+      </p:sp>
+      <p:sp>
+        <p:nvSpPr>
+          <p:cNvPr id="74" name="Shape 72"/>
+          <p:cNvSpPr/>
+          <p:nvPr/>
+        </p:nvSpPr>
+        <p:spPr>
+          <a:xfrm>
+            <a:off x="9052560" y="3858768"/>
+            <a:ext cx="2377440" cy="0"/>
+          </a:xfrm>
+          <a:prstGeom prst="line">
+            <a:avLst/>
+          </a:prstGeom>
+          <a:noFill/>
+          <a:ln w="9525">
+            <a:solidFill>
+              <a:srgbClr val="D9D9D9"/>
+            </a:solidFill>
+            <a:prstDash val="solid"/>
+          </a:ln>
+        </p:spPr>
+      </p:sp>
+      <p:sp>
+        <p:nvSpPr>
+          <p:cNvPr id="75" name="Text 73"/>
+          <p:cNvSpPr/>
+          <p:nvPr/>
+        </p:nvSpPr>
+        <p:spPr>
+          <a:xfrm>
+            <a:off x="8869680" y="4023360"/>
+            <a:ext cx="365760" cy="182880"/>
+          </a:xfrm>
+          <a:prstGeom prst="rect">
+            <a:avLst/>
+          </a:prstGeom>
+          <a:noFill/>
+          <a:ln/>
+        </p:spPr>
+        <p:txBody>
+          <a:bodyPr wrap="square" lIns="0" tIns="0" rIns="0" bIns="0" rtlCol="0" anchor="ctr"/>
+          <a:lstStyle/>
+          <a:p>
+            <a:pPr algn="ctr" indent="0" marL="0">
+              <a:buNone/>
+            </a:pPr>
+            <a:r>
+              <a:rPr lang="en-US" sz="850" dirty="0">
+                <a:solidFill>
+                  <a:srgbClr val="555555"/>
+                </a:solidFill>
+                <a:latin typeface="Malgun Gothic" pitchFamily="34" charset="0"/>
+                <a:ea typeface="Malgun Gothic" pitchFamily="34" charset="-122"/>
+                <a:cs typeface="Malgun Gothic" pitchFamily="34" charset="-120"/>
+              </a:rPr>
+              <a:t>’23</a:t>
+            </a:r>
+            <a:endParaRPr lang="en-US" sz="850" dirty="0"/>
+          </a:p>
+        </p:txBody>
+      </p:sp>
+      <p:sp>
+        <p:nvSpPr>
+          <p:cNvPr id="76" name="Text 74"/>
+          <p:cNvSpPr/>
+          <p:nvPr/>
+        </p:nvSpPr>
+        <p:spPr>
+          <a:xfrm>
+            <a:off x="9464040" y="4023360"/>
+            <a:ext cx="365760" cy="182880"/>
+          </a:xfrm>
+          <a:prstGeom prst="rect">
+            <a:avLst/>
+          </a:prstGeom>
+          <a:noFill/>
+          <a:ln/>
+        </p:spPr>
+        <p:txBody>
+          <a:bodyPr wrap="square" lIns="0" tIns="0" rIns="0" bIns="0" rtlCol="0" anchor="ctr"/>
+          <a:lstStyle/>
+          <a:p>
+            <a:pPr algn="ctr" indent="0" marL="0">
+              <a:buNone/>
+            </a:pPr>
+            <a:r>
+              <a:rPr lang="en-US" sz="850" dirty="0">
+                <a:solidFill>
+                  <a:srgbClr val="555555"/>
+                </a:solidFill>
+                <a:latin typeface="Malgun Gothic" pitchFamily="34" charset="0"/>
+                <a:ea typeface="Malgun Gothic" pitchFamily="34" charset="-122"/>
+                <a:cs typeface="Malgun Gothic" pitchFamily="34" charset="-120"/>
+              </a:rPr>
+              <a:t>’24</a:t>
+            </a:r>
+            <a:endParaRPr lang="en-US" sz="850" dirty="0"/>
+          </a:p>
+        </p:txBody>
+      </p:sp>
+      <p:sp>
+        <p:nvSpPr>
+          <p:cNvPr id="77" name="Text 75"/>
+          <p:cNvSpPr/>
+          <p:nvPr/>
+        </p:nvSpPr>
+        <p:spPr>
+          <a:xfrm>
+            <a:off x="10058400" y="4023360"/>
+            <a:ext cx="365760" cy="182880"/>
+          </a:xfrm>
+          <a:prstGeom prst="rect">
+            <a:avLst/>
+          </a:prstGeom>
+          <a:noFill/>
+          <a:ln/>
+        </p:spPr>
+        <p:txBody>
+          <a:bodyPr wrap="square" lIns="0" tIns="0" rIns="0" bIns="0" rtlCol="0" anchor="ctr"/>
+          <a:lstStyle/>
+          <a:p>
+            <a:pPr algn="ctr" indent="0" marL="0">
+              <a:buNone/>
+            </a:pPr>
+            <a:r>
+              <a:rPr lang="en-US" sz="850" dirty="0">
+                <a:solidFill>
+                  <a:srgbClr val="555555"/>
+                </a:solidFill>
+                <a:latin typeface="Malgun Gothic" pitchFamily="34" charset="0"/>
+                <a:ea typeface="Malgun Gothic" pitchFamily="34" charset="-122"/>
+                <a:cs typeface="Malgun Gothic" pitchFamily="34" charset="-120"/>
+              </a:rPr>
+              <a:t>’25</a:t>
+            </a:r>
+            <a:endParaRPr lang="en-US" sz="850" dirty="0"/>
+          </a:p>
+        </p:txBody>
+      </p:sp>
+      <p:sp>
+        <p:nvSpPr>
+          <p:cNvPr id="78" name="Text 76"/>
+          <p:cNvSpPr/>
+          <p:nvPr/>
+        </p:nvSpPr>
+        <p:spPr>
+          <a:xfrm>
+            <a:off x="10652760" y="4023360"/>
+            <a:ext cx="365760" cy="182880"/>
+          </a:xfrm>
+          <a:prstGeom prst="rect">
+            <a:avLst/>
+          </a:prstGeom>
+          <a:noFill/>
+          <a:ln/>
+        </p:spPr>
+        <p:txBody>
+          <a:bodyPr wrap="square" lIns="0" tIns="0" rIns="0" bIns="0" rtlCol="0" anchor="ctr"/>
+          <a:lstStyle/>
+          <a:p>
+            <a:pPr algn="ctr" indent="0" marL="0">
+              <a:buNone/>
+            </a:pPr>
+            <a:r>
+              <a:rPr lang="en-US" sz="850" dirty="0">
+                <a:solidFill>
+                  <a:srgbClr val="555555"/>
+                </a:solidFill>
+                <a:latin typeface="Malgun Gothic" pitchFamily="34" charset="0"/>
+                <a:ea typeface="Malgun Gothic" pitchFamily="34" charset="-122"/>
+                <a:cs typeface="Malgun Gothic" pitchFamily="34" charset="-120"/>
+              </a:rPr>
+              <a:t>’26</a:t>
+            </a:r>
+            <a:endParaRPr lang="en-US" sz="850" dirty="0"/>
+          </a:p>
+        </p:txBody>
+      </p:sp>
+      <p:sp>
+        <p:nvSpPr>
+          <p:cNvPr id="79" name="Shape 77"/>
+          <p:cNvSpPr/>
+          <p:nvPr/>
+        </p:nvSpPr>
+        <p:spPr>
+          <a:xfrm>
+            <a:off x="9314078" y="2153412"/>
+            <a:ext cx="118872" cy="118872"/>
+          </a:xfrm>
+          <a:prstGeom prst="ellipse">
+            <a:avLst/>
+          </a:prstGeom>
+          <a:solidFill>
+            <a:srgbClr val="555555"/>
+          </a:solidFill>
+          <a:ln w="15875">
+            <a:solidFill>
+              <a:srgbClr val="555555"/>
+            </a:solidFill>
+            <a:prstDash val="solid"/>
+          </a:ln>
+        </p:spPr>
+      </p:sp>
+      <p:sp>
+        <p:nvSpPr>
+          <p:cNvPr id="80" name="Text 78"/>
+          <p:cNvSpPr/>
+          <p:nvPr/>
+        </p:nvSpPr>
+        <p:spPr>
+          <a:xfrm>
+            <a:off x="9053474" y="1901952"/>
+            <a:ext cx="640080" cy="182880"/>
+          </a:xfrm>
+          <a:prstGeom prst="rect">
+            <a:avLst/>
+          </a:prstGeom>
+          <a:noFill/>
+          <a:ln/>
+        </p:spPr>
+        <p:txBody>
+          <a:bodyPr wrap="square" lIns="0" tIns="0" rIns="0" bIns="0" rtlCol="0" anchor="ctr"/>
+          <a:lstStyle/>
+          <a:p>
+            <a:pPr algn="ctr" indent="0" marL="0">
+              <a:buNone/>
+            </a:pPr>
+            <a:r>
+              <a:rPr lang="en-US" sz="800" b="1" dirty="0">
+                <a:solidFill>
+                  <a:srgbClr val="555555"/>
+                </a:solidFill>
+                <a:latin typeface="Malgun Gothic" pitchFamily="34" charset="0"/>
+                <a:ea typeface="Malgun Gothic" pitchFamily="34" charset="-122"/>
+                <a:cs typeface="Malgun Gothic" pitchFamily="34" charset="-120"/>
+              </a:rPr>
+              <a:t>61T</a:t>
+            </a:r>
+            <a:endParaRPr lang="en-US" sz="800" dirty="0"/>
+          </a:p>
+        </p:txBody>
+      </p:sp>
+      <p:sp>
+        <p:nvSpPr>
+          <p:cNvPr id="81" name="Text 79"/>
+          <p:cNvSpPr/>
+          <p:nvPr/>
+        </p:nvSpPr>
+        <p:spPr>
+          <a:xfrm>
+            <a:off x="9053474" y="2286000"/>
+            <a:ext cx="640080" cy="164592"/>
+          </a:xfrm>
+          <a:prstGeom prst="rect">
+            <a:avLst/>
+          </a:prstGeom>
+          <a:noFill/>
+          <a:ln/>
+        </p:spPr>
+        <p:txBody>
+          <a:bodyPr wrap="square" lIns="0" tIns="0" rIns="0" bIns="0" rtlCol="0" anchor="ctr"/>
+          <a:lstStyle/>
+          <a:p>
+            <a:pPr algn="ctr" indent="0" marL="0">
+              <a:buNone/>
+            </a:pPr>
+            <a:r>
+              <a:rPr lang="en-US" sz="750" dirty="0">
+                <a:solidFill>
+                  <a:srgbClr val="555555"/>
+                </a:solidFill>
+                <a:latin typeface="Malgun Gothic" pitchFamily="34" charset="0"/>
+                <a:ea typeface="Malgun Gothic" pitchFamily="34" charset="-122"/>
+                <a:cs typeface="Malgun Gothic" pitchFamily="34" charset="-120"/>
+              </a:rPr>
+              <a:t>’23.07</a:t>
+            </a:r>
+            <a:endParaRPr lang="en-US" sz="750" dirty="0"/>
+          </a:p>
+        </p:txBody>
+      </p:sp>
+      <p:sp>
+        <p:nvSpPr>
+          <p:cNvPr id="82" name="Shape 80"/>
+          <p:cNvSpPr/>
+          <p:nvPr/>
+        </p:nvSpPr>
+        <p:spPr>
+          <a:xfrm>
+            <a:off x="10104577" y="2153412"/>
+            <a:ext cx="118872" cy="118872"/>
+          </a:xfrm>
+          <a:prstGeom prst="ellipse">
+            <a:avLst/>
+          </a:prstGeom>
+          <a:solidFill>
+            <a:srgbClr val="555555"/>
+          </a:solidFill>
+          <a:ln w="15875">
+            <a:solidFill>
+              <a:srgbClr val="555555"/>
+            </a:solidFill>
+            <a:prstDash val="solid"/>
+          </a:ln>
+        </p:spPr>
+      </p:sp>
+      <p:sp>
+        <p:nvSpPr>
+          <p:cNvPr id="83" name="Text 81"/>
+          <p:cNvSpPr/>
+          <p:nvPr/>
+        </p:nvSpPr>
+        <p:spPr>
+          <a:xfrm>
+            <a:off x="9843973" y="1901952"/>
+            <a:ext cx="640080" cy="182880"/>
+          </a:xfrm>
+          <a:prstGeom prst="rect">
+            <a:avLst/>
+          </a:prstGeom>
+          <a:noFill/>
+          <a:ln/>
+        </p:spPr>
+        <p:txBody>
+          <a:bodyPr wrap="square" lIns="0" tIns="0" rIns="0" bIns="0" rtlCol="0" anchor="ctr"/>
+          <a:lstStyle/>
+          <a:p>
+            <a:pPr algn="ctr" indent="0" marL="0">
+              <a:buNone/>
+            </a:pPr>
+            <a:r>
+              <a:rPr lang="en-US" sz="800" b="1" dirty="0">
+                <a:solidFill>
+                  <a:srgbClr val="555555"/>
+                </a:solidFill>
+                <a:latin typeface="Malgun Gothic" pitchFamily="34" charset="0"/>
+                <a:ea typeface="Malgun Gothic" pitchFamily="34" charset="-122"/>
+                <a:cs typeface="Malgun Gothic" pitchFamily="34" charset="-120"/>
+              </a:rPr>
+              <a:t>122T</a:t>
+            </a:r>
+            <a:endParaRPr lang="en-US" sz="800" dirty="0"/>
+          </a:p>
+        </p:txBody>
+      </p:sp>
+      <p:sp>
+        <p:nvSpPr>
+          <p:cNvPr id="84" name="Shape 82"/>
+          <p:cNvSpPr/>
+          <p:nvPr/>
+        </p:nvSpPr>
+        <p:spPr>
+          <a:xfrm>
+            <a:off x="11192256" y="2153412"/>
+            <a:ext cx="118872" cy="118872"/>
+          </a:xfrm>
+          <a:prstGeom prst="ellipse">
+            <a:avLst/>
+          </a:prstGeom>
+          <a:solidFill>
+            <a:srgbClr val="FFFFFF"/>
+          </a:solidFill>
+          <a:ln w="15875">
+            <a:solidFill>
+              <a:srgbClr val="555555"/>
+            </a:solidFill>
+            <a:prstDash val="solid"/>
+          </a:ln>
+        </p:spPr>
+      </p:sp>
+      <p:sp>
+        <p:nvSpPr>
+          <p:cNvPr id="85" name="Text 83"/>
+          <p:cNvSpPr/>
+          <p:nvPr/>
+        </p:nvSpPr>
+        <p:spPr>
+          <a:xfrm>
+            <a:off x="10931652" y="1901952"/>
+            <a:ext cx="640080" cy="182880"/>
+          </a:xfrm>
+          <a:prstGeom prst="rect">
+            <a:avLst/>
+          </a:prstGeom>
+          <a:noFill/>
+          <a:ln/>
+        </p:spPr>
+        <p:txBody>
+          <a:bodyPr wrap="square" lIns="0" tIns="0" rIns="0" bIns="0" rtlCol="0" anchor="ctr"/>
+          <a:lstStyle/>
+          <a:p>
+            <a:pPr algn="ctr" indent="0" marL="0">
+              <a:buNone/>
+            </a:pPr>
+            <a:r>
+              <a:rPr lang="en-US" sz="800" b="1" dirty="0">
+                <a:solidFill>
+                  <a:srgbClr val="555555"/>
+                </a:solidFill>
+                <a:latin typeface="Malgun Gothic" pitchFamily="34" charset="0"/>
+                <a:ea typeface="Malgun Gothic" pitchFamily="34" charset="-122"/>
+                <a:cs typeface="Malgun Gothic" pitchFamily="34" charset="-120"/>
+              </a:rPr>
+              <a:t>245T</a:t>
+            </a:r>
+            <a:endParaRPr lang="en-US" sz="800" dirty="0"/>
+          </a:p>
+        </p:txBody>
+      </p:sp>
+      <p:sp>
+        <p:nvSpPr>
+          <p:cNvPr id="86" name="Shape 84"/>
+          <p:cNvSpPr/>
+          <p:nvPr/>
+        </p:nvSpPr>
+        <p:spPr>
+          <a:xfrm>
+            <a:off x="9884664" y="2702052"/>
+            <a:ext cx="118872" cy="118872"/>
+          </a:xfrm>
+          <a:prstGeom prst="ellipse">
+            <a:avLst/>
+          </a:prstGeom>
+          <a:solidFill>
+            <a:srgbClr val="1428A0"/>
           </a:solidFill>
           <a:ln w="15875">
             <a:solidFill>
@@ -14299,14 +15264,428 @@
       </p:sp>
       <p:sp>
         <p:nvSpPr>
-          <p:cNvPr id="59" name="Text 57"/>
-          <p:cNvSpPr/>
-          <p:nvPr/>
-        </p:nvSpPr>
-        <p:spPr>
-          <a:xfrm>
-            <a:off x="8476488" y="4590288"/>
-            <a:ext cx="2926080" cy="1371600"/>
+          <p:cNvPr id="87" name="Text 85"/>
+          <p:cNvSpPr/>
+          <p:nvPr/>
+        </p:nvSpPr>
+        <p:spPr>
+          <a:xfrm>
+            <a:off x="9624060" y="2450592"/>
+            <a:ext cx="640080" cy="182880"/>
+          </a:xfrm>
+          <a:prstGeom prst="rect">
+            <a:avLst/>
+          </a:prstGeom>
+          <a:noFill/>
+          <a:ln/>
+        </p:spPr>
+        <p:txBody>
+          <a:bodyPr wrap="square" lIns="0" tIns="0" rIns="0" bIns="0" rtlCol="0" anchor="ctr"/>
+          <a:lstStyle/>
+          <a:p>
+            <a:pPr algn="ctr" indent="0" marL="0">
+              <a:buNone/>
+            </a:pPr>
+            <a:r>
+              <a:rPr lang="en-US" sz="800" b="1" dirty="0">
+                <a:solidFill>
+                  <a:srgbClr val="1428A0"/>
+                </a:solidFill>
+                <a:latin typeface="Malgun Gothic" pitchFamily="34" charset="0"/>
+                <a:ea typeface="Malgun Gothic" pitchFamily="34" charset="-122"/>
+                <a:cs typeface="Malgun Gothic" pitchFamily="34" charset="-120"/>
+              </a:rPr>
+              <a:t>61T</a:t>
+            </a:r>
+            <a:endParaRPr lang="en-US" sz="800" dirty="0"/>
+          </a:p>
+        </p:txBody>
+      </p:sp>
+      <p:sp>
+        <p:nvSpPr>
+          <p:cNvPr id="88" name="Shape 86"/>
+          <p:cNvSpPr/>
+          <p:nvPr/>
+        </p:nvSpPr>
+        <p:spPr>
+          <a:xfrm>
+            <a:off x="10092690" y="2702052"/>
+            <a:ext cx="118872" cy="118872"/>
+          </a:xfrm>
+          <a:prstGeom prst="ellipse">
+            <a:avLst/>
+          </a:prstGeom>
+          <a:solidFill>
+            <a:srgbClr val="FFFFFF"/>
+          </a:solidFill>
+          <a:ln w="15875">
+            <a:solidFill>
+              <a:srgbClr val="1428A0"/>
+            </a:solidFill>
+            <a:prstDash val="solid"/>
+          </a:ln>
+        </p:spPr>
+      </p:sp>
+      <p:sp>
+        <p:nvSpPr>
+          <p:cNvPr id="89" name="Text 87"/>
+          <p:cNvSpPr/>
+          <p:nvPr/>
+        </p:nvSpPr>
+        <p:spPr>
+          <a:xfrm>
+            <a:off x="9832086" y="2834640"/>
+            <a:ext cx="640080" cy="182880"/>
+          </a:xfrm>
+          <a:prstGeom prst="rect">
+            <a:avLst/>
+          </a:prstGeom>
+          <a:noFill/>
+          <a:ln/>
+        </p:spPr>
+        <p:txBody>
+          <a:bodyPr wrap="square" lIns="0" tIns="0" rIns="0" bIns="0" rtlCol="0" anchor="ctr"/>
+          <a:lstStyle/>
+          <a:p>
+            <a:pPr algn="ctr" indent="0" marL="0">
+              <a:buNone/>
+            </a:pPr>
+            <a:r>
+              <a:rPr lang="en-US" sz="800" b="1" dirty="0">
+                <a:solidFill>
+                  <a:srgbClr val="1428A0"/>
+                </a:solidFill>
+                <a:latin typeface="Malgun Gothic" pitchFamily="34" charset="0"/>
+                <a:ea typeface="Malgun Gothic" pitchFamily="34" charset="-122"/>
+                <a:cs typeface="Malgun Gothic" pitchFamily="34" charset="-120"/>
+              </a:rPr>
+              <a:t>122T</a:t>
+            </a:r>
+            <a:endParaRPr lang="en-US" sz="800" dirty="0"/>
+          </a:p>
+        </p:txBody>
+      </p:sp>
+      <p:sp>
+        <p:nvSpPr>
+          <p:cNvPr id="90" name="Shape 88"/>
+          <p:cNvSpPr/>
+          <p:nvPr/>
+        </p:nvSpPr>
+        <p:spPr>
+          <a:xfrm>
+            <a:off x="10597896" y="3250692"/>
+            <a:ext cx="118872" cy="118872"/>
+          </a:xfrm>
+          <a:prstGeom prst="ellipse">
+            <a:avLst/>
+          </a:prstGeom>
+          <a:solidFill>
+            <a:srgbClr val="FFFFFF"/>
+          </a:solidFill>
+          <a:ln w="15875">
+            <a:solidFill>
+              <a:srgbClr val="555555"/>
+            </a:solidFill>
+            <a:prstDash val="solid"/>
+          </a:ln>
+        </p:spPr>
+      </p:sp>
+      <p:sp>
+        <p:nvSpPr>
+          <p:cNvPr id="91" name="Text 89"/>
+          <p:cNvSpPr/>
+          <p:nvPr/>
+        </p:nvSpPr>
+        <p:spPr>
+          <a:xfrm>
+            <a:off x="10337292" y="2999232"/>
+            <a:ext cx="640080" cy="182880"/>
+          </a:xfrm>
+          <a:prstGeom prst="rect">
+            <a:avLst/>
+          </a:prstGeom>
+          <a:noFill/>
+          <a:ln/>
+        </p:spPr>
+        <p:txBody>
+          <a:bodyPr wrap="square" lIns="0" tIns="0" rIns="0" bIns="0" rtlCol="0" anchor="ctr"/>
+          <a:lstStyle/>
+          <a:p>
+            <a:pPr algn="ctr" indent="0" marL="0">
+              <a:buNone/>
+            </a:pPr>
+            <a:r>
+              <a:rPr lang="en-US" sz="800" b="1" dirty="0">
+                <a:solidFill>
+                  <a:srgbClr val="555555"/>
+                </a:solidFill>
+                <a:latin typeface="Malgun Gothic" pitchFamily="34" charset="0"/>
+                <a:ea typeface="Malgun Gothic" pitchFamily="34" charset="-122"/>
+                <a:cs typeface="Malgun Gothic" pitchFamily="34" charset="-120"/>
+              </a:rPr>
+              <a:t>122T</a:t>
+            </a:r>
+            <a:endParaRPr lang="en-US" sz="800" dirty="0"/>
+          </a:p>
+        </p:txBody>
+      </p:sp>
+      <p:sp>
+        <p:nvSpPr>
+          <p:cNvPr id="92" name="Shape 90"/>
+          <p:cNvSpPr/>
+          <p:nvPr/>
+        </p:nvSpPr>
+        <p:spPr>
+          <a:xfrm>
+            <a:off x="10984230" y="3250692"/>
+            <a:ext cx="118872" cy="118872"/>
+          </a:xfrm>
+          <a:prstGeom prst="ellipse">
+            <a:avLst/>
+          </a:prstGeom>
+          <a:solidFill>
+            <a:srgbClr val="555555"/>
+          </a:solidFill>
+          <a:ln w="15875">
+            <a:solidFill>
+              <a:srgbClr val="555555"/>
+            </a:solidFill>
+            <a:prstDash val="solid"/>
+          </a:ln>
+        </p:spPr>
+      </p:sp>
+      <p:sp>
+        <p:nvSpPr>
+          <p:cNvPr id="93" name="Text 91"/>
+          <p:cNvSpPr/>
+          <p:nvPr/>
+        </p:nvSpPr>
+        <p:spPr>
+          <a:xfrm>
+            <a:off x="10723626" y="3383280"/>
+            <a:ext cx="640080" cy="182880"/>
+          </a:xfrm>
+          <a:prstGeom prst="rect">
+            <a:avLst/>
+          </a:prstGeom>
+          <a:noFill/>
+          <a:ln/>
+        </p:spPr>
+        <p:txBody>
+          <a:bodyPr wrap="square" lIns="0" tIns="0" rIns="0" bIns="0" rtlCol="0" anchor="ctr"/>
+          <a:lstStyle/>
+          <a:p>
+            <a:pPr algn="ctr" indent="0" marL="0">
+              <a:buNone/>
+            </a:pPr>
+            <a:r>
+              <a:rPr lang="en-US" sz="800" b="1" dirty="0">
+                <a:solidFill>
+                  <a:srgbClr val="555555"/>
+                </a:solidFill>
+                <a:latin typeface="Malgun Gothic" pitchFamily="34" charset="0"/>
+                <a:ea typeface="Malgun Gothic" pitchFamily="34" charset="-122"/>
+                <a:cs typeface="Malgun Gothic" pitchFamily="34" charset="-120"/>
+              </a:rPr>
+              <a:t>245T</a:t>
+            </a:r>
+            <a:endParaRPr lang="en-US" sz="800" dirty="0"/>
+          </a:p>
+        </p:txBody>
+      </p:sp>
+      <p:sp>
+        <p:nvSpPr>
+          <p:cNvPr id="94" name="Text 92"/>
+          <p:cNvSpPr/>
+          <p:nvPr/>
+        </p:nvSpPr>
+        <p:spPr>
+          <a:xfrm>
+            <a:off x="10723626" y="3547872"/>
+            <a:ext cx="640080" cy="164592"/>
+          </a:xfrm>
+          <a:prstGeom prst="rect">
+            <a:avLst/>
+          </a:prstGeom>
+          <a:noFill/>
+          <a:ln/>
+        </p:spPr>
+        <p:txBody>
+          <a:bodyPr wrap="square" lIns="0" tIns="0" rIns="0" bIns="0" rtlCol="0" anchor="ctr"/>
+          <a:lstStyle/>
+          <a:p>
+            <a:pPr algn="ctr" indent="0" marL="0">
+              <a:buNone/>
+            </a:pPr>
+            <a:r>
+              <a:rPr lang="en-US" sz="750" dirty="0">
+                <a:solidFill>
+                  <a:srgbClr val="555555"/>
+                </a:solidFill>
+                <a:latin typeface="Malgun Gothic" pitchFamily="34" charset="0"/>
+                <a:ea typeface="Malgun Gothic" pitchFamily="34" charset="-122"/>
+                <a:cs typeface="Malgun Gothic" pitchFamily="34" charset="-120"/>
+              </a:rPr>
+              <a:t>’26.05</a:t>
+            </a:r>
+            <a:endParaRPr lang="en-US" sz="750" dirty="0"/>
+          </a:p>
+        </p:txBody>
+      </p:sp>
+      <p:sp>
+        <p:nvSpPr>
+          <p:cNvPr id="95" name="Shape 93"/>
+          <p:cNvSpPr/>
+          <p:nvPr/>
+        </p:nvSpPr>
+        <p:spPr>
+          <a:xfrm>
+            <a:off x="10479024" y="3799332"/>
+            <a:ext cx="118872" cy="118872"/>
+          </a:xfrm>
+          <a:prstGeom prst="ellipse">
+            <a:avLst/>
+          </a:prstGeom>
+          <a:solidFill>
+            <a:srgbClr val="FFFFFF"/>
+          </a:solidFill>
+          <a:ln w="15875">
+            <a:solidFill>
+              <a:srgbClr val="555555"/>
+            </a:solidFill>
+            <a:prstDash val="solid"/>
+          </a:ln>
+        </p:spPr>
+      </p:sp>
+      <p:sp>
+        <p:nvSpPr>
+          <p:cNvPr id="96" name="Text 94"/>
+          <p:cNvSpPr/>
+          <p:nvPr/>
+        </p:nvSpPr>
+        <p:spPr>
+          <a:xfrm>
+            <a:off x="10218420" y="3547872"/>
+            <a:ext cx="640080" cy="182880"/>
+          </a:xfrm>
+          <a:prstGeom prst="rect">
+            <a:avLst/>
+          </a:prstGeom>
+          <a:noFill/>
+          <a:ln/>
+        </p:spPr>
+        <p:txBody>
+          <a:bodyPr wrap="square" lIns="0" tIns="0" rIns="0" bIns="0" rtlCol="0" anchor="ctr"/>
+          <a:lstStyle/>
+          <a:p>
+            <a:pPr algn="ctr" indent="0" marL="0">
+              <a:buNone/>
+            </a:pPr>
+            <a:r>
+              <a:rPr lang="en-US" sz="800" b="1" dirty="0">
+                <a:solidFill>
+                  <a:srgbClr val="555555"/>
+                </a:solidFill>
+                <a:latin typeface="Malgun Gothic" pitchFamily="34" charset="0"/>
+                <a:ea typeface="Malgun Gothic" pitchFamily="34" charset="-122"/>
+                <a:cs typeface="Malgun Gothic" pitchFamily="34" charset="-120"/>
+              </a:rPr>
+              <a:t>245T</a:t>
+            </a:r>
+            <a:endParaRPr lang="en-US" sz="800" dirty="0"/>
+          </a:p>
+        </p:txBody>
+      </p:sp>
+      <p:sp>
+        <p:nvSpPr>
+          <p:cNvPr id="97" name="Text 95"/>
+          <p:cNvSpPr/>
+          <p:nvPr/>
+        </p:nvSpPr>
+        <p:spPr>
+          <a:xfrm>
+            <a:off x="8330184" y="4261104"/>
+            <a:ext cx="3200400" cy="201168"/>
+          </a:xfrm>
+          <a:prstGeom prst="rect">
+            <a:avLst/>
+          </a:prstGeom>
+          <a:noFill/>
+          <a:ln/>
+        </p:spPr>
+        <p:txBody>
+          <a:bodyPr wrap="square" lIns="0" tIns="0" rIns="0" bIns="0" rtlCol="0" anchor="ctr"/>
+          <a:lstStyle/>
+          <a:p>
+            <a:pPr algn="ctr" indent="0" marL="0">
+              <a:buNone/>
+            </a:pPr>
+            <a:r>
+              <a:rPr lang="en-US" sz="850" dirty="0">
+                <a:solidFill>
+                  <a:srgbClr val="1A1A1A"/>
+                </a:solidFill>
+                <a:latin typeface="Malgun Gothic" pitchFamily="34" charset="0"/>
+                <a:ea typeface="Malgun Gothic" pitchFamily="34" charset="-122"/>
+                <a:cs typeface="Malgun Gothic" pitchFamily="34" charset="-120"/>
+              </a:rPr>
+              <a:t>● 출하    </a:t>
+            </a:r>
+            <a:pPr algn="ctr" indent="0" marL="0">
+              <a:buNone/>
+            </a:pPr>
+            <a:r>
+              <a:rPr lang="en-US" sz="850" dirty="0">
+                <a:solidFill>
+                  <a:srgbClr val="555555"/>
+                </a:solidFill>
+                <a:latin typeface="Malgun Gothic" pitchFamily="34" charset="0"/>
+                <a:ea typeface="Malgun Gothic" pitchFamily="34" charset="-122"/>
+                <a:cs typeface="Malgun Gothic" pitchFamily="34" charset="-120"/>
+              </a:rPr>
+              <a:t>○ 샘플·전시·예정</a:t>
+            </a:r>
+            <a:endParaRPr lang="en-US" sz="850" dirty="0"/>
+          </a:p>
+        </p:txBody>
+      </p:sp>
+      <p:sp>
+        <p:nvSpPr>
+          <p:cNvPr id="98" name="Shape 96"/>
+          <p:cNvSpPr/>
+          <p:nvPr/>
+        </p:nvSpPr>
+        <p:spPr>
+          <a:xfrm>
+            <a:off x="8311896" y="4553712"/>
+            <a:ext cx="3236976" cy="1335024"/>
+          </a:xfrm>
+          <a:prstGeom prst="roundRect">
+            <a:avLst>
+              <a:gd name="adj" fmla="val 4795"/>
+            </a:avLst>
+          </a:prstGeom>
+          <a:solidFill>
+            <a:srgbClr val="EEF1FA"/>
+          </a:solidFill>
+          <a:ln w="15875">
+            <a:solidFill>
+              <a:srgbClr val="1428A0"/>
+            </a:solidFill>
+            <a:prstDash val="solid"/>
+          </a:ln>
+        </p:spPr>
+      </p:sp>
+      <p:sp>
+        <p:nvSpPr>
+          <p:cNvPr id="99" name="Text 97"/>
+          <p:cNvSpPr/>
+          <p:nvPr/>
+        </p:nvSpPr>
+        <p:spPr>
+          <a:xfrm>
+            <a:off x="8476488" y="4645152"/>
+            <a:ext cx="2926080" cy="1188720"/>
           </a:xfrm>
           <a:prstGeom prst="rect">
             <a:avLst/>
@@ -14320,12 +15699,12 @@
           <a:p>
             <a:pPr indent="0" marL="0">
               <a:lnSpc>
-                <a:spcPct val="115000"/>
+                <a:spcPct val="114000"/>
               </a:lnSpc>
               <a:buNone/>
             </a:pPr>
             <a:r>
-              <a:rPr lang="en-US" sz="1150" b="1" dirty="0">
+              <a:rPr lang="en-US" sz="1100" b="1" dirty="0">
                 <a:solidFill>
                   <a:srgbClr val="1428A0"/>
                 </a:solidFill>
@@ -14333,19 +15712,19 @@
                 <a:ea typeface="Malgun Gothic" pitchFamily="34" charset="-122"/>
                 <a:cs typeface="Malgun Gothic" pitchFamily="34" charset="-120"/>
               </a:rPr>
-              <a:t>반증: Solidigm</a:t>
-            </a:r>
-            <a:endParaRPr lang="en-US" sz="1150" dirty="0"/>
+              <a:t>니즈 적중의 실증, 그리고 삼성의 갭</a:t>
+            </a:r>
+            <a:endParaRPr lang="en-US" sz="1100" dirty="0"/>
           </a:p>
           <a:p>
             <a:pPr indent="0" marL="0">
               <a:lnSpc>
-                <a:spcPct val="115000"/>
+                <a:spcPct val="114000"/>
               </a:lnSpc>
               <a:buNone/>
             </a:pPr>
             <a:r>
-              <a:rPr lang="en-US" sz="1000" dirty="0">
+              <a:rPr lang="en-US" sz="950" dirty="0">
                 <a:solidFill>
                   <a:srgbClr val="1A1A1A"/>
                 </a:solidFill>
@@ -14353,22 +15732,22 @@
                 <a:ea typeface="Malgun Gothic" pitchFamily="34" charset="-122"/>
                 <a:cs typeface="Malgun Gothic" pitchFamily="34" charset="-120"/>
               </a:rPr>
-              <a:t>낙폭 최심부(SK그룹)에서 ’23.07 61.44TB QLC 출시로 AI 스토리지 수요 적중, ’24 흑자 전환. 다변화(방어)가 아니라 니즈 적중(공격)이 다운턴을 이긴다</a:t>
-            </a:r>
-            <a:endParaRPr lang="en-US" sz="1150" dirty="0"/>
-          </a:p>
-        </p:txBody>
-      </p:sp>
-      <p:sp>
-        <p:nvSpPr>
-          <p:cNvPr id="60" name="Text 58"/>
-          <p:cNvSpPr/>
-          <p:nvPr/>
-        </p:nvSpPr>
-        <p:spPr>
-          <a:xfrm>
-            <a:off x="8330184" y="6053328"/>
-            <a:ext cx="3200400" cy="201168"/>
+              <a:t>Solidigm은 61TB를 12개월 선행하며 최심부에서 2024 흑자 전환. 삼성은 61TB 1년 후발에 122TB는 전시 단계, 245TB 첫 출하도 Micron. 다음 니즈(KV cache)는 선행해야 한다</a:t>
+            </a:r>
+            <a:endParaRPr lang="en-US" sz="1100" dirty="0"/>
+          </a:p>
+        </p:txBody>
+      </p:sp>
+      <p:sp>
+        <p:nvSpPr>
+          <p:cNvPr id="100" name="Text 98"/>
+          <p:cNvSpPr/>
+          <p:nvPr/>
+        </p:nvSpPr>
+        <p:spPr>
+          <a:xfrm>
+            <a:off x="8330184" y="5961888"/>
+            <a:ext cx="3200400" cy="219456"/>
           </a:xfrm>
           <a:prstGeom prst="rect">
             <a:avLst/>
@@ -14384,7 +15763,7 @@
               <a:buNone/>
             </a:pPr>
             <a:r>
-              <a:rPr lang="en-US" sz="900" dirty="0">
+              <a:rPr lang="en-US" sz="850" dirty="0">
                 <a:solidFill>
                   <a:srgbClr val="555555"/>
                 </a:solidFill>
@@ -14392,9 +15771,9 @@
                 <a:ea typeface="Malgun Gothic" pitchFamily="34" charset="-122"/>
                 <a:cs typeface="Malgun Gothic" pitchFamily="34" charset="-120"/>
               </a:rPr>
-              <a:t>출처: 각사 10-K · Platformonomics · TrendForce</a:t>
-            </a:r>
-            <a:endParaRPr lang="en-US" sz="900" dirty="0"/>
+              <a:t>출처: Blocks &amp; Files · AnandTech · TechPowerUp · TechRadar</a:t>
+            </a:r>
+            <a:endParaRPr lang="en-US" sz="850" dirty="0"/>
           </a:p>
         </p:txBody>
       </p:sp>
@@ -14456,7 +15835,7 @@
                 <a:ea typeface="Malgun Gothic" pitchFamily="34" charset="-122"/>
                 <a:cs typeface="Malgun Gothic" pitchFamily="34" charset="-120"/>
               </a:rPr>
-              <a:t>KV Cache: 요구 내구성은 현 제품의 2~10배</a:t>
+              <a:t>KV Cache: RUH 25배·내구성 2~10배 갭</a:t>
             </a:r>
             <a:endParaRPr lang="en-US" sz="3200" dirty="0"/>
           </a:p>
@@ -14630,7 +16009,7 @@
                 <a:ea typeface="Malgun Gothic" pitchFamily="34" charset="-122"/>
                 <a:cs typeface="Malgun Gothic" pitchFamily="34" charset="-120"/>
               </a:rPr>
-              <a:t>스토리지가 추론의 캐시 계층으로 승격된다: 수요는 폭증하고, 쓰기 내구성 요구는 현행 TLC·QLC 제품군을 넘는다</a:t>
+              <a:t>스토리지가 추론의 캐시 계층으로 승격된다: 수요는 폭증하고, 스트림 분리(RUH)·쓰기 내구성 요구는 현행 제품군을 넘는다</a:t>
             </a:r>
             <a:endParaRPr lang="en-US" sz="1300" dirty="0"/>
           </a:p>
@@ -14817,7 +16196,7 @@
                 <a:ea typeface="Malgun Gothic" pitchFamily="34" charset="-122"/>
                 <a:cs typeface="Malgun Gothic" pitchFamily="34" charset="-120"/>
               </a:rPr>
-              <a:t>왜 write-intensive인가</a:t>
+              <a:t>RUH 갭: 현행 2~8 vs 요구 200+</a:t>
             </a:r>
             <a:endParaRPr lang="en-US" sz="1350" dirty="0"/>
           </a:p>
@@ -15616,361 +16995,26 @@
       </p:sp>
       <p:sp>
         <p:nvSpPr>
-          <p:cNvPr id="36" name="Shape 34"/>
-          <p:cNvSpPr/>
-          <p:nvPr/>
-        </p:nvSpPr>
-        <p:spPr>
-          <a:xfrm>
-            <a:off x="4498848" y="1856232"/>
-            <a:ext cx="128016" cy="128016"/>
-          </a:xfrm>
-          <a:prstGeom prst="rect">
-            <a:avLst/>
-          </a:prstGeom>
-          <a:solidFill>
-            <a:srgbClr val="1428A0"/>
-          </a:solidFill>
-          <a:ln/>
-        </p:spPr>
-      </p:sp>
-      <p:sp>
-        <p:nvSpPr>
-          <p:cNvPr id="37" name="Text 35"/>
-          <p:cNvSpPr/>
-          <p:nvPr/>
-        </p:nvSpPr>
-        <p:spPr>
-          <a:xfrm>
-            <a:off x="4736592" y="1755648"/>
-            <a:ext cx="3017520" cy="731520"/>
-          </a:xfrm>
-          <a:prstGeom prst="rect">
-            <a:avLst/>
-          </a:prstGeom>
-          <a:noFill/>
-          <a:ln/>
-        </p:spPr>
-        <p:txBody>
-          <a:bodyPr wrap="square" lIns="0" tIns="0" rIns="0" bIns="0" rtlCol="0" anchor="t"/>
+          <p:cNvPr id="36" name="Text 34"/>
+          <p:cNvSpPr/>
+          <p:nvPr/>
+        </p:nvSpPr>
+        <p:spPr>
+          <a:xfrm>
+            <a:off x="4498848" y="1773936"/>
+            <a:ext cx="3200400" cy="256032"/>
+          </a:xfrm>
+          <a:prstGeom prst="rect">
+            <a:avLst/>
+          </a:prstGeom>
+          <a:noFill/>
+          <a:ln/>
+        </p:spPr>
+        <p:txBody>
+          <a:bodyPr wrap="square" lIns="0" tIns="0" rIns="0" bIns="0" rtlCol="0" anchor="ctr"/>
           <a:lstStyle/>
           <a:p>
             <a:pPr indent="0" marL="0">
-              <a:lnSpc>
-                <a:spcPct val="112000"/>
-              </a:lnSpc>
-              <a:buNone/>
-            </a:pPr>
-            <a:r>
-              <a:rPr lang="en-US" sz="1100" b="1" dirty="0">
-                <a:solidFill>
-                  <a:srgbClr val="1A1A1A"/>
-                </a:solidFill>
-                <a:latin typeface="Malgun Gothic" pitchFamily="34" charset="0"/>
-                <a:ea typeface="Malgun Gothic" pitchFamily="34" charset="-122"/>
-                <a:cs typeface="Malgun Gothic" pitchFamily="34" charset="-120"/>
-              </a:rPr>
-              <a:t>세션마다 생성·갱신</a:t>
-            </a:r>
-            <a:endParaRPr lang="en-US" sz="1100" dirty="0"/>
-          </a:p>
-          <a:p>
-            <a:pPr indent="0" marL="0">
-              <a:lnSpc>
-                <a:spcPct val="112000"/>
-              </a:lnSpc>
-              <a:buNone/>
-            </a:pPr>
-            <a:r>
-              <a:rPr lang="en-US" sz="1000" dirty="0">
-                <a:solidFill>
-                  <a:srgbClr val="555555"/>
-                </a:solidFill>
-                <a:latin typeface="Malgun Gothic" pitchFamily="34" charset="0"/>
-                <a:ea typeface="Malgun Gothic" pitchFamily="34" charset="-122"/>
-                <a:cs typeface="Malgun Gothic" pitchFamily="34" charset="-120"/>
-              </a:rPr>
-              <a:t>요청이 곧 쓰기: 연속적 쓰기 부하</a:t>
-            </a:r>
-            <a:endParaRPr lang="en-US" sz="1100" dirty="0"/>
-          </a:p>
-        </p:txBody>
-      </p:sp>
-      <p:sp>
-        <p:nvSpPr>
-          <p:cNvPr id="38" name="Shape 36"/>
-          <p:cNvSpPr/>
-          <p:nvPr/>
-        </p:nvSpPr>
-        <p:spPr>
-          <a:xfrm>
-            <a:off x="4498848" y="2642616"/>
-            <a:ext cx="128016" cy="128016"/>
-          </a:xfrm>
-          <a:prstGeom prst="rect">
-            <a:avLst/>
-          </a:prstGeom>
-          <a:solidFill>
-            <a:srgbClr val="1428A0"/>
-          </a:solidFill>
-          <a:ln/>
-        </p:spPr>
-      </p:sp>
-      <p:sp>
-        <p:nvSpPr>
-          <p:cNvPr id="39" name="Text 37"/>
-          <p:cNvSpPr/>
-          <p:nvPr/>
-        </p:nvSpPr>
-        <p:spPr>
-          <a:xfrm>
-            <a:off x="4736592" y="2542032"/>
-            <a:ext cx="3017520" cy="731520"/>
-          </a:xfrm>
-          <a:prstGeom prst="rect">
-            <a:avLst/>
-          </a:prstGeom>
-          <a:noFill/>
-          <a:ln/>
-        </p:spPr>
-        <p:txBody>
-          <a:bodyPr wrap="square" lIns="0" tIns="0" rIns="0" bIns="0" rtlCol="0" anchor="t"/>
-          <a:lstStyle/>
-          <a:p>
-            <a:pPr indent="0" marL="0">
-              <a:lnSpc>
-                <a:spcPct val="112000"/>
-              </a:lnSpc>
-              <a:buNone/>
-            </a:pPr>
-            <a:r>
-              <a:rPr lang="en-US" sz="1100" b="1" dirty="0">
-                <a:solidFill>
-                  <a:srgbClr val="1A1A1A"/>
-                </a:solidFill>
-                <a:latin typeface="Malgun Gothic" pitchFamily="34" charset="0"/>
-                <a:ea typeface="Malgun Gothic" pitchFamily="34" charset="-122"/>
-                <a:cs typeface="Malgun Gothic" pitchFamily="34" charset="-120"/>
-              </a:rPr>
-              <a:t>짧고 제각각인 수명</a:t>
-            </a:r>
-            <a:endParaRPr lang="en-US" sz="1100" dirty="0"/>
-          </a:p>
-          <a:p>
-            <a:pPr indent="0" marL="0">
-              <a:lnSpc>
-                <a:spcPct val="112000"/>
-              </a:lnSpc>
-              <a:buNone/>
-            </a:pPr>
-            <a:r>
-              <a:rPr lang="en-US" sz="1000" dirty="0">
-                <a:solidFill>
-                  <a:srgbClr val="555555"/>
-                </a:solidFill>
-                <a:latin typeface="Malgun Gothic" pitchFamily="34" charset="0"/>
-                <a:ea typeface="Malgun Gothic" pitchFamily="34" charset="-122"/>
-                <a:cs typeface="Malgun Gothic" pitchFamily="34" charset="-120"/>
-              </a:rPr>
-              <a:t>블록별 라이프사이클이 모두 다르다</a:t>
-            </a:r>
-            <a:endParaRPr lang="en-US" sz="1100" dirty="0"/>
-          </a:p>
-        </p:txBody>
-      </p:sp>
-      <p:sp>
-        <p:nvSpPr>
-          <p:cNvPr id="40" name="Shape 38"/>
-          <p:cNvSpPr/>
-          <p:nvPr/>
-        </p:nvSpPr>
-        <p:spPr>
-          <a:xfrm>
-            <a:off x="4498848" y="3429000"/>
-            <a:ext cx="128016" cy="128016"/>
-          </a:xfrm>
-          <a:prstGeom prst="rect">
-            <a:avLst/>
-          </a:prstGeom>
-          <a:solidFill>
-            <a:srgbClr val="1428A0"/>
-          </a:solidFill>
-          <a:ln/>
-        </p:spPr>
-      </p:sp>
-      <p:sp>
-        <p:nvSpPr>
-          <p:cNvPr id="41" name="Text 39"/>
-          <p:cNvSpPr/>
-          <p:nvPr/>
-        </p:nvSpPr>
-        <p:spPr>
-          <a:xfrm>
-            <a:off x="4736592" y="3328416"/>
-            <a:ext cx="3017520" cy="731520"/>
-          </a:xfrm>
-          <a:prstGeom prst="rect">
-            <a:avLst/>
-          </a:prstGeom>
-          <a:noFill/>
-          <a:ln/>
-        </p:spPr>
-        <p:txBody>
-          <a:bodyPr wrap="square" lIns="0" tIns="0" rIns="0" bIns="0" rtlCol="0" anchor="t"/>
-          <a:lstStyle/>
-          <a:p>
-            <a:pPr indent="0" marL="0">
-              <a:lnSpc>
-                <a:spcPct val="112000"/>
-              </a:lnSpc>
-              <a:buNone/>
-            </a:pPr>
-            <a:r>
-              <a:rPr lang="en-US" sz="1100" b="1" dirty="0">
-                <a:solidFill>
-                  <a:srgbClr val="1A1A1A"/>
-                </a:solidFill>
-                <a:latin typeface="Malgun Gothic" pitchFamily="34" charset="0"/>
-                <a:ea typeface="Malgun Gothic" pitchFamily="34" charset="-122"/>
-                <a:cs typeface="Malgun Gothic" pitchFamily="34" charset="-120"/>
-              </a:rPr>
-              <a:t>비동기 무효화·재적재</a:t>
-            </a:r>
-            <a:endParaRPr lang="en-US" sz="1100" dirty="0"/>
-          </a:p>
-          <a:p>
-            <a:pPr indent="0" marL="0">
-              <a:lnSpc>
-                <a:spcPct val="112000"/>
-              </a:lnSpc>
-              <a:buNone/>
-            </a:pPr>
-            <a:r>
-              <a:rPr lang="en-US" sz="1000" dirty="0">
-                <a:solidFill>
-                  <a:srgbClr val="555555"/>
-                </a:solidFill>
-                <a:latin typeface="Malgun Gothic" pitchFamily="34" charset="0"/>
-                <a:ea typeface="Malgun Gothic" pitchFamily="34" charset="-122"/>
-                <a:cs typeface="Malgun Gothic" pitchFamily="34" charset="-120"/>
-              </a:rPr>
-              <a:t>퇴출과 재활성이 상시 반복</a:t>
-            </a:r>
-            <a:endParaRPr lang="en-US" sz="1100" dirty="0"/>
-          </a:p>
-        </p:txBody>
-      </p:sp>
-      <p:sp>
-        <p:nvSpPr>
-          <p:cNvPr id="42" name="Shape 40"/>
-          <p:cNvSpPr/>
-          <p:nvPr/>
-        </p:nvSpPr>
-        <p:spPr>
-          <a:xfrm>
-            <a:off x="4498848" y="4215384"/>
-            <a:ext cx="128016" cy="128016"/>
-          </a:xfrm>
-          <a:prstGeom prst="rect">
-            <a:avLst/>
-          </a:prstGeom>
-          <a:solidFill>
-            <a:srgbClr val="1428A0"/>
-          </a:solidFill>
-          <a:ln/>
-        </p:spPr>
-      </p:sp>
-      <p:sp>
-        <p:nvSpPr>
-          <p:cNvPr id="43" name="Text 41"/>
-          <p:cNvSpPr/>
-          <p:nvPr/>
-        </p:nvSpPr>
-        <p:spPr>
-          <a:xfrm>
-            <a:off x="4736592" y="4114800"/>
-            <a:ext cx="3017520" cy="731520"/>
-          </a:xfrm>
-          <a:prstGeom prst="rect">
-            <a:avLst/>
-          </a:prstGeom>
-          <a:noFill/>
-          <a:ln/>
-        </p:spPr>
-        <p:txBody>
-          <a:bodyPr wrap="square" lIns="0" tIns="0" rIns="0" bIns="0" rtlCol="0" anchor="t"/>
-          <a:lstStyle/>
-          <a:p>
-            <a:pPr indent="0" marL="0">
-              <a:lnSpc>
-                <a:spcPct val="112000"/>
-              </a:lnSpc>
-              <a:buNone/>
-            </a:pPr>
-            <a:r>
-              <a:rPr lang="en-US" sz="1100" b="1" dirty="0">
-                <a:solidFill>
-                  <a:srgbClr val="1A1A1A"/>
-                </a:solidFill>
-                <a:latin typeface="Malgun Gothic" pitchFamily="34" charset="0"/>
-                <a:ea typeface="Malgun Gothic" pitchFamily="34" charset="-122"/>
-                <a:cs typeface="Malgun Gothic" pitchFamily="34" charset="-120"/>
-              </a:rPr>
-              <a:t>멀티테넌트 혼합</a:t>
-            </a:r>
-            <a:endParaRPr lang="en-US" sz="1100" dirty="0"/>
-          </a:p>
-          <a:p>
-            <a:pPr indent="0" marL="0">
-              <a:lnSpc>
-                <a:spcPct val="112000"/>
-              </a:lnSpc>
-              <a:buNone/>
-            </a:pPr>
-            <a:r>
-              <a:rPr lang="en-US" sz="1000" dirty="0">
-                <a:solidFill>
-                  <a:srgbClr val="555555"/>
-                </a:solidFill>
-                <a:latin typeface="Malgun Gothic" pitchFamily="34" charset="0"/>
-                <a:ea typeface="Malgun Gothic" pitchFamily="34" charset="-122"/>
-                <a:cs typeface="Malgun Gothic" pitchFamily="34" charset="-120"/>
-              </a:rPr>
-              <a:t>GC 간섭으로 WAF 증폭</a:t>
-            </a:r>
-            <a:endParaRPr lang="en-US" sz="1100" dirty="0"/>
-          </a:p>
-        </p:txBody>
-      </p:sp>
-      <p:sp>
-        <p:nvSpPr>
-          <p:cNvPr id="44" name="Text 42"/>
-          <p:cNvSpPr/>
-          <p:nvPr/>
-        </p:nvSpPr>
-        <p:spPr>
-          <a:xfrm>
-            <a:off x="4498848" y="5029200"/>
-            <a:ext cx="3200400" cy="566928"/>
-          </a:xfrm>
-          <a:prstGeom prst="roundRect">
-            <a:avLst>
-              <a:gd name="adj" fmla="val 8065"/>
-            </a:avLst>
-          </a:prstGeom>
-          <a:solidFill>
-            <a:srgbClr val="F4F4F6"/>
-          </a:solidFill>
-          <a:ln/>
-        </p:spPr>
-        <p:txBody>
-          <a:bodyPr wrap="square" lIns="1016" tIns="1016" rIns="1016" bIns="1016" rtlCol="0" anchor="ctr"/>
-          <a:lstStyle/>
-          <a:p>
-            <a:pPr indent="0" marL="0">
-              <a:lnSpc>
-                <a:spcPct val="110000"/>
-              </a:lnSpc>
               <a:buNone/>
             </a:pPr>
             <a:r>
@@ -15982,24 +17026,7 @@
                 <a:ea typeface="Malgun Gothic" pitchFamily="34" charset="-122"/>
                 <a:cs typeface="Malgun Gothic" pitchFamily="34" charset="-120"/>
               </a:rPr>
-              <a:t>결과  </a:t>
-            </a:r>
-            <a:pPr indent="0" marL="0">
-              <a:lnSpc>
-                <a:spcPct val="110000"/>
-              </a:lnSpc>
-              <a:buNone/>
-            </a:pPr>
-            <a:r>
-              <a:rPr lang="en-US" sz="1050" dirty="0">
-                <a:solidFill>
-                  <a:srgbClr val="1A1A1A"/>
-                </a:solidFill>
-                <a:latin typeface="Malgun Gothic" pitchFamily="34" charset="0"/>
-                <a:ea typeface="Malgun Gothic" pitchFamily="34" charset="-122"/>
-                <a:cs typeface="Malgun Gothic" pitchFamily="34" charset="-120"/>
-              </a:rPr>
-              <a:t>일반 서버 앱 대비 월등한 쓰기 밀도: mixed-use 등급을 넘는 내구성 요구</a:t>
+              <a:t>FDP 쓰기 스트림(RUH) 수</a:t>
             </a:r>
             <a:endParaRPr lang="en-US" sz="1050" dirty="0"/>
           </a:p>
@@ -16007,92 +17034,14 @@
       </p:sp>
       <p:sp>
         <p:nvSpPr>
-          <p:cNvPr id="45" name="Text 43"/>
-          <p:cNvSpPr/>
-          <p:nvPr/>
-        </p:nvSpPr>
-        <p:spPr>
-          <a:xfrm>
-            <a:off x="4498848" y="5870448"/>
-            <a:ext cx="3200400" cy="237744"/>
-          </a:xfrm>
-          <a:prstGeom prst="rect">
-            <a:avLst/>
-          </a:prstGeom>
-          <a:noFill/>
-          <a:ln/>
-        </p:spPr>
-        <p:txBody>
-          <a:bodyPr wrap="square" lIns="0" tIns="0" rIns="0" bIns="0" rtlCol="0" anchor="ctr"/>
-          <a:lstStyle/>
-          <a:p>
-            <a:pPr indent="0" marL="0">
-              <a:buNone/>
-            </a:pPr>
-            <a:r>
-              <a:rPr lang="en-US" sz="900" dirty="0">
-                <a:solidFill>
-                  <a:srgbClr val="555555"/>
-                </a:solidFill>
-                <a:latin typeface="Malgun Gothic" pitchFamily="34" charset="0"/>
-                <a:ea typeface="Malgun Gothic" pitchFamily="34" charset="-122"/>
-                <a:cs typeface="Malgun Gothic" pitchFamily="34" charset="-120"/>
-              </a:rPr>
-              <a:t>출처: ScaleFlux 발표 · NVIDIA Dynamo 문서</a:t>
-            </a:r>
-            <a:endParaRPr lang="en-US" sz="900" dirty="0"/>
-          </a:p>
-        </p:txBody>
-      </p:sp>
-      <p:sp>
-        <p:nvSpPr>
-          <p:cNvPr id="46" name="Text 44"/>
-          <p:cNvSpPr/>
-          <p:nvPr/>
-        </p:nvSpPr>
-        <p:spPr>
-          <a:xfrm>
-            <a:off x="8330184" y="1773936"/>
-            <a:ext cx="3200400" cy="256032"/>
-          </a:xfrm>
-          <a:prstGeom prst="rect">
-            <a:avLst/>
-          </a:prstGeom>
-          <a:noFill/>
-          <a:ln/>
-        </p:spPr>
-        <p:txBody>
-          <a:bodyPr wrap="square" lIns="0" tIns="0" rIns="0" bIns="0" rtlCol="0" anchor="ctr"/>
-          <a:lstStyle/>
-          <a:p>
-            <a:pPr indent="0" marL="0">
-              <a:buNone/>
-            </a:pPr>
-            <a:r>
-              <a:rPr lang="en-US" sz="1050" b="1" dirty="0">
-                <a:solidFill>
-                  <a:srgbClr val="1428A0"/>
-                </a:solidFill>
-                <a:latin typeface="Malgun Gothic" pitchFamily="34" charset="0"/>
-                <a:ea typeface="Malgun Gothic" pitchFamily="34" charset="-122"/>
-                <a:cs typeface="Malgun Gothic" pitchFamily="34" charset="-120"/>
-              </a:rPr>
-              <a:t>요구 대비 2~10배 갭 (5년 보증 기준 DWPD)</a:t>
-            </a:r>
-            <a:endParaRPr lang="en-US" sz="1050" dirty="0"/>
-          </a:p>
-        </p:txBody>
-      </p:sp>
-      <p:sp>
-        <p:nvSpPr>
-          <p:cNvPr id="47" name="Shape 45"/>
-          <p:cNvSpPr/>
-          <p:nvPr/>
-        </p:nvSpPr>
-        <p:spPr>
-          <a:xfrm>
-            <a:off x="8275320" y="4370832"/>
-            <a:ext cx="3246120" cy="0"/>
+          <p:cNvPr id="37" name="Shape 35"/>
+          <p:cNvSpPr/>
+          <p:nvPr/>
+        </p:nvSpPr>
+        <p:spPr>
+          <a:xfrm>
+            <a:off x="4498848" y="4206240"/>
+            <a:ext cx="3200400" cy="0"/>
           </a:xfrm>
           <a:prstGeom prst="line">
             <a:avLst/>
@@ -16108,7 +17057,448 @@
       </p:sp>
       <p:sp>
         <p:nvSpPr>
-          <p:cNvPr id="48" name="Shape 46"/>
+          <p:cNvPr id="38" name="Shape 36"/>
+          <p:cNvSpPr/>
+          <p:nvPr/>
+        </p:nvSpPr>
+        <p:spPr>
+          <a:xfrm>
+            <a:off x="4892040" y="4129430"/>
+            <a:ext cx="777240" cy="76810"/>
+          </a:xfrm>
+          <a:prstGeom prst="rect">
+            <a:avLst/>
+          </a:prstGeom>
+          <a:solidFill>
+            <a:srgbClr val="B9C2D0"/>
+          </a:solidFill>
+          <a:ln/>
+        </p:spPr>
+      </p:sp>
+      <p:sp>
+        <p:nvSpPr>
+          <p:cNvPr id="39" name="Text 37"/>
+          <p:cNvSpPr/>
+          <p:nvPr/>
+        </p:nvSpPr>
+        <p:spPr>
+          <a:xfrm>
+            <a:off x="4663440" y="3836822"/>
+            <a:ext cx="1234440" cy="256032"/>
+          </a:xfrm>
+          <a:prstGeom prst="rect">
+            <a:avLst/>
+          </a:prstGeom>
+          <a:noFill/>
+          <a:ln/>
+        </p:spPr>
+        <p:txBody>
+          <a:bodyPr wrap="square" lIns="0" tIns="0" rIns="0" bIns="0" rtlCol="0" anchor="ctr"/>
+          <a:lstStyle/>
+          <a:p>
+            <a:pPr algn="ctr" indent="0" marL="0">
+              <a:buNone/>
+            </a:pPr>
+            <a:r>
+              <a:rPr lang="en-US" sz="1250" b="1" dirty="0">
+                <a:solidFill>
+                  <a:srgbClr val="555555"/>
+                </a:solidFill>
+                <a:latin typeface="Malgun Gothic" pitchFamily="34" charset="0"/>
+                <a:ea typeface="Malgun Gothic" pitchFamily="34" charset="-122"/>
+                <a:cs typeface="Malgun Gothic" pitchFamily="34" charset="-120"/>
+              </a:rPr>
+              <a:t>2~8</a:t>
+            </a:r>
+            <a:endParaRPr lang="en-US" sz="1250" dirty="0"/>
+          </a:p>
+        </p:txBody>
+      </p:sp>
+      <p:sp>
+        <p:nvSpPr>
+          <p:cNvPr id="40" name="Text 38"/>
+          <p:cNvSpPr/>
+          <p:nvPr/>
+        </p:nvSpPr>
+        <p:spPr>
+          <a:xfrm>
+            <a:off x="4572000" y="4261104"/>
+            <a:ext cx="1417320" cy="219456"/>
+          </a:xfrm>
+          <a:prstGeom prst="rect">
+            <a:avLst/>
+          </a:prstGeom>
+          <a:noFill/>
+          <a:ln/>
+        </p:spPr>
+        <p:txBody>
+          <a:bodyPr wrap="square" lIns="0" tIns="0" rIns="0" bIns="0" rtlCol="0" anchor="ctr"/>
+          <a:lstStyle/>
+          <a:p>
+            <a:pPr algn="ctr" indent="0" marL="0">
+              <a:buNone/>
+            </a:pPr>
+            <a:r>
+              <a:rPr lang="en-US" sz="950" dirty="0">
+                <a:solidFill>
+                  <a:srgbClr val="1A1A1A"/>
+                </a:solidFill>
+                <a:latin typeface="Malgun Gothic" pitchFamily="34" charset="0"/>
+                <a:ea typeface="Malgun Gothic" pitchFamily="34" charset="-122"/>
+                <a:cs typeface="Malgun Gothic" pitchFamily="34" charset="-120"/>
+              </a:rPr>
+              <a:t>현행 FDP SSD</a:t>
+            </a:r>
+            <a:endParaRPr lang="en-US" sz="950" dirty="0"/>
+          </a:p>
+        </p:txBody>
+      </p:sp>
+      <p:sp>
+        <p:nvSpPr>
+          <p:cNvPr id="41" name="Shape 39"/>
+          <p:cNvSpPr/>
+          <p:nvPr/>
+        </p:nvSpPr>
+        <p:spPr>
+          <a:xfrm>
+            <a:off x="6446520" y="2286000"/>
+            <a:ext cx="777240" cy="1920240"/>
+          </a:xfrm>
+          <a:prstGeom prst="rect">
+            <a:avLst/>
+          </a:prstGeom>
+          <a:solidFill>
+            <a:srgbClr val="1428A0"/>
+          </a:solidFill>
+          <a:ln/>
+        </p:spPr>
+      </p:sp>
+      <p:sp>
+        <p:nvSpPr>
+          <p:cNvPr id="42" name="Text 40"/>
+          <p:cNvSpPr/>
+          <p:nvPr/>
+        </p:nvSpPr>
+        <p:spPr>
+          <a:xfrm>
+            <a:off x="6217920" y="1993392"/>
+            <a:ext cx="1234440" cy="256032"/>
+          </a:xfrm>
+          <a:prstGeom prst="rect">
+            <a:avLst/>
+          </a:prstGeom>
+          <a:noFill/>
+          <a:ln/>
+        </p:spPr>
+        <p:txBody>
+          <a:bodyPr wrap="square" lIns="0" tIns="0" rIns="0" bIns="0" rtlCol="0" anchor="ctr"/>
+          <a:lstStyle/>
+          <a:p>
+            <a:pPr algn="ctr" indent="0" marL="0">
+              <a:buNone/>
+            </a:pPr>
+            <a:r>
+              <a:rPr lang="en-US" sz="1250" b="1" dirty="0">
+                <a:solidFill>
+                  <a:srgbClr val="1428A0"/>
+                </a:solidFill>
+                <a:latin typeface="Malgun Gothic" pitchFamily="34" charset="0"/>
+                <a:ea typeface="Malgun Gothic" pitchFamily="34" charset="-122"/>
+                <a:cs typeface="Malgun Gothic" pitchFamily="34" charset="-120"/>
+              </a:rPr>
+              <a:t>200+</a:t>
+            </a:r>
+            <a:endParaRPr lang="en-US" sz="1250" dirty="0"/>
+          </a:p>
+        </p:txBody>
+      </p:sp>
+      <p:sp>
+        <p:nvSpPr>
+          <p:cNvPr id="43" name="Text 41"/>
+          <p:cNvSpPr/>
+          <p:nvPr/>
+        </p:nvSpPr>
+        <p:spPr>
+          <a:xfrm>
+            <a:off x="6126480" y="4261104"/>
+            <a:ext cx="1417320" cy="219456"/>
+          </a:xfrm>
+          <a:prstGeom prst="rect">
+            <a:avLst/>
+          </a:prstGeom>
+          <a:noFill/>
+          <a:ln/>
+        </p:spPr>
+        <p:txBody>
+          <a:bodyPr wrap="square" lIns="0" tIns="0" rIns="0" bIns="0" rtlCol="0" anchor="ctr"/>
+          <a:lstStyle/>
+          <a:p>
+            <a:pPr algn="ctr" indent="0" marL="0">
+              <a:buNone/>
+            </a:pPr>
+            <a:r>
+              <a:rPr lang="en-US" sz="950" dirty="0">
+                <a:solidFill>
+                  <a:srgbClr val="1A1A1A"/>
+                </a:solidFill>
+                <a:latin typeface="Malgun Gothic" pitchFamily="34" charset="0"/>
+                <a:ea typeface="Malgun Gothic" pitchFamily="34" charset="-122"/>
+                <a:cs typeface="Malgun Gothic" pitchFamily="34" charset="-120"/>
+              </a:rPr>
+              <a:t>CMX 오프로드 요구</a:t>
+            </a:r>
+            <a:endParaRPr lang="en-US" sz="950" dirty="0"/>
+          </a:p>
+        </p:txBody>
+      </p:sp>
+      <p:sp>
+        <p:nvSpPr>
+          <p:cNvPr id="44" name="Text 42"/>
+          <p:cNvSpPr/>
+          <p:nvPr/>
+        </p:nvSpPr>
+        <p:spPr>
+          <a:xfrm>
+            <a:off x="5349240" y="3063240"/>
+            <a:ext cx="914400" cy="274320"/>
+          </a:xfrm>
+          <a:prstGeom prst="rect">
+            <a:avLst/>
+          </a:prstGeom>
+          <a:noFill/>
+          <a:ln/>
+        </p:spPr>
+        <p:txBody>
+          <a:bodyPr wrap="square" lIns="0" tIns="0" rIns="0" bIns="0" rtlCol="0" anchor="ctr"/>
+          <a:lstStyle/>
+          <a:p>
+            <a:pPr algn="ctr" indent="0" marL="0">
+              <a:buNone/>
+            </a:pPr>
+            <a:r>
+              <a:rPr lang="en-US" sz="1300" b="1" dirty="0">
+                <a:solidFill>
+                  <a:srgbClr val="1428A0"/>
+                </a:solidFill>
+                <a:latin typeface="Malgun Gothic" pitchFamily="34" charset="0"/>
+                <a:ea typeface="Malgun Gothic" pitchFamily="34" charset="-122"/>
+                <a:cs typeface="Malgun Gothic" pitchFamily="34" charset="-120"/>
+              </a:rPr>
+              <a:t>≈25배</a:t>
+            </a:r>
+            <a:endParaRPr lang="en-US" sz="1300" dirty="0"/>
+          </a:p>
+        </p:txBody>
+      </p:sp>
+      <p:sp>
+        <p:nvSpPr>
+          <p:cNvPr id="45" name="Text 43"/>
+          <p:cNvSpPr/>
+          <p:nvPr/>
+        </p:nvSpPr>
+        <p:spPr>
+          <a:xfrm>
+            <a:off x="4498848" y="4626864"/>
+            <a:ext cx="3200400" cy="768096"/>
+          </a:xfrm>
+          <a:prstGeom prst="roundRect">
+            <a:avLst>
+              <a:gd name="adj" fmla="val 5952"/>
+            </a:avLst>
+          </a:prstGeom>
+          <a:solidFill>
+            <a:srgbClr val="F4F4F6"/>
+          </a:solidFill>
+          <a:ln/>
+        </p:spPr>
+        <p:txBody>
+          <a:bodyPr wrap="square" lIns="1016" tIns="1016" rIns="1016" bIns="1016" rtlCol="0" anchor="ctr"/>
+          <a:lstStyle/>
+          <a:p>
+            <a:pPr indent="0" marL="0">
+              <a:lnSpc>
+                <a:spcPct val="112000"/>
+              </a:lnSpc>
+              <a:buNone/>
+            </a:pPr>
+            <a:r>
+              <a:rPr lang="en-US" sz="950" b="1" dirty="0">
+                <a:solidFill>
+                  <a:srgbClr val="1428A0"/>
+                </a:solidFill>
+                <a:latin typeface="Malgun Gothic" pitchFamily="34" charset="0"/>
+                <a:ea typeface="Malgun Gothic" pitchFamily="34" charset="-122"/>
+                <a:cs typeface="Malgun Gothic" pitchFamily="34" charset="-120"/>
+              </a:rPr>
+              <a:t>왜 200+인가  </a:t>
+            </a:r>
+            <a:pPr indent="0" marL="0">
+              <a:lnSpc>
+                <a:spcPct val="112000"/>
+              </a:lnSpc>
+              <a:buNone/>
+            </a:pPr>
+            <a:r>
+              <a:rPr lang="en-US" sz="950" dirty="0">
+                <a:solidFill>
+                  <a:srgbClr val="1A1A1A"/>
+                </a:solidFill>
+                <a:latin typeface="Malgun Gothic" pitchFamily="34" charset="0"/>
+                <a:ea typeface="Malgun Gothic" pitchFamily="34" charset="-122"/>
+                <a:cs typeface="Malgun Gothic" pitchFamily="34" charset="-120"/>
+              </a:rPr>
+              <a:t>세션·테넌트·공유 프리픽스·수명 등급별로 스트림을 분리해야 hot/cold 혼재로 인한 GC 증폭이 끊긴다. 소수 RUH로는 WAF 문제 지속</a:t>
+            </a:r>
+            <a:endParaRPr lang="en-US" sz="950" dirty="0"/>
+          </a:p>
+        </p:txBody>
+      </p:sp>
+      <p:sp>
+        <p:nvSpPr>
+          <p:cNvPr id="46" name="Text 44"/>
+          <p:cNvSpPr/>
+          <p:nvPr/>
+        </p:nvSpPr>
+        <p:spPr>
+          <a:xfrm>
+            <a:off x="4498848" y="5486400"/>
+            <a:ext cx="3200400" cy="402336"/>
+          </a:xfrm>
+          <a:prstGeom prst="rect">
+            <a:avLst/>
+          </a:prstGeom>
+          <a:noFill/>
+          <a:ln/>
+        </p:spPr>
+        <p:txBody>
+          <a:bodyPr wrap="square" lIns="0" tIns="0" rIns="0" bIns="0" rtlCol="0" anchor="ctr"/>
+          <a:lstStyle/>
+          <a:p>
+            <a:pPr indent="0" marL="0">
+              <a:lnSpc>
+                <a:spcPct val="110000"/>
+              </a:lnSpc>
+              <a:buNone/>
+            </a:pPr>
+            <a:r>
+              <a:rPr lang="en-US" sz="800" dirty="0">
+                <a:solidFill>
+                  <a:srgbClr val="555555"/>
+                </a:solidFill>
+                <a:latin typeface="Malgun Gothic" pitchFamily="34" charset="0"/>
+                <a:ea typeface="Malgun Gothic" pitchFamily="34" charset="-122"/>
+                <a:cs typeface="Malgun Gothic" pitchFamily="34" charset="-120"/>
+              </a:rPr>
+              <a:t>RUH(Reclaim Unit Handle): 수명이 같은 데이터를 같은 소거 단위에 모으는 FDP 스트림 핸들 · 요구 수준은 NVIDIA CMX 타깃 ScaleFlux 플랫폼 스펙 기준</a:t>
+            </a:r>
+            <a:endParaRPr lang="en-US" sz="800" dirty="0"/>
+          </a:p>
+        </p:txBody>
+      </p:sp>
+      <p:sp>
+        <p:nvSpPr>
+          <p:cNvPr id="47" name="Text 45"/>
+          <p:cNvSpPr/>
+          <p:nvPr/>
+        </p:nvSpPr>
+        <p:spPr>
+          <a:xfrm>
+            <a:off x="4498848" y="5943600"/>
+            <a:ext cx="3200400" cy="237744"/>
+          </a:xfrm>
+          <a:prstGeom prst="rect">
+            <a:avLst/>
+          </a:prstGeom>
+          <a:noFill/>
+          <a:ln/>
+        </p:spPr>
+        <p:txBody>
+          <a:bodyPr wrap="square" lIns="0" tIns="0" rIns="0" bIns="0" rtlCol="0" anchor="ctr"/>
+          <a:lstStyle/>
+          <a:p>
+            <a:pPr indent="0" marL="0">
+              <a:buNone/>
+            </a:pPr>
+            <a:r>
+              <a:rPr lang="en-US" sz="850" dirty="0">
+                <a:solidFill>
+                  <a:srgbClr val="555555"/>
+                </a:solidFill>
+                <a:latin typeface="Malgun Gothic" pitchFamily="34" charset="0"/>
+                <a:ea typeface="Malgun Gothic" pitchFamily="34" charset="-122"/>
+                <a:cs typeface="Malgun Gothic" pitchFamily="34" charset="-120"/>
+              </a:rPr>
+              <a:t>출처: StorageReview ’26.07 · Blocks &amp; Files ’26.01</a:t>
+            </a:r>
+            <a:endParaRPr lang="en-US" sz="850" dirty="0"/>
+          </a:p>
+        </p:txBody>
+      </p:sp>
+      <p:sp>
+        <p:nvSpPr>
+          <p:cNvPr id="48" name="Text 46"/>
+          <p:cNvSpPr/>
+          <p:nvPr/>
+        </p:nvSpPr>
+        <p:spPr>
+          <a:xfrm>
+            <a:off x="8330184" y="1773936"/>
+            <a:ext cx="3200400" cy="256032"/>
+          </a:xfrm>
+          <a:prstGeom prst="rect">
+            <a:avLst/>
+          </a:prstGeom>
+          <a:noFill/>
+          <a:ln/>
+        </p:spPr>
+        <p:txBody>
+          <a:bodyPr wrap="square" lIns="0" tIns="0" rIns="0" bIns="0" rtlCol="0" anchor="ctr"/>
+          <a:lstStyle/>
+          <a:p>
+            <a:pPr indent="0" marL="0">
+              <a:buNone/>
+            </a:pPr>
+            <a:r>
+              <a:rPr lang="en-US" sz="1050" b="1" dirty="0">
+                <a:solidFill>
+                  <a:srgbClr val="1428A0"/>
+                </a:solidFill>
+                <a:latin typeface="Malgun Gothic" pitchFamily="34" charset="0"/>
+                <a:ea typeface="Malgun Gothic" pitchFamily="34" charset="-122"/>
+                <a:cs typeface="Malgun Gothic" pitchFamily="34" charset="-120"/>
+              </a:rPr>
+              <a:t>요구 대비 2~10배 갭 (5년 보증 기준 DWPD)</a:t>
+            </a:r>
+            <a:endParaRPr lang="en-US" sz="1050" dirty="0"/>
+          </a:p>
+        </p:txBody>
+      </p:sp>
+      <p:sp>
+        <p:nvSpPr>
+          <p:cNvPr id="49" name="Shape 47"/>
+          <p:cNvSpPr/>
+          <p:nvPr/>
+        </p:nvSpPr>
+        <p:spPr>
+          <a:xfrm>
+            <a:off x="8275320" y="4370832"/>
+            <a:ext cx="3246120" cy="0"/>
+          </a:xfrm>
+          <a:prstGeom prst="line">
+            <a:avLst/>
+          </a:prstGeom>
+          <a:noFill/>
+          <a:ln w="12700">
+            <a:solidFill>
+              <a:srgbClr val="555555"/>
+            </a:solidFill>
+            <a:prstDash val="solid"/>
+          </a:ln>
+        </p:spPr>
+      </p:sp>
+      <p:sp>
+        <p:nvSpPr>
+          <p:cNvPr id="50" name="Shape 48"/>
           <p:cNvSpPr/>
           <p:nvPr/>
         </p:nvSpPr>
@@ -16128,7 +17518,7 @@
       </p:sp>
       <p:sp>
         <p:nvSpPr>
-          <p:cNvPr id="49" name="Text 47"/>
+          <p:cNvPr id="51" name="Text 49"/>
           <p:cNvSpPr/>
           <p:nvPr/>
         </p:nvSpPr>
@@ -16167,7 +17557,7 @@
       </p:sp>
       <p:sp>
         <p:nvSpPr>
-          <p:cNvPr id="50" name="Text 48"/>
+          <p:cNvPr id="52" name="Text 50"/>
           <p:cNvSpPr/>
           <p:nvPr/>
         </p:nvSpPr>
@@ -16209,7 +17599,7 @@
       </p:sp>
       <p:sp>
         <p:nvSpPr>
-          <p:cNvPr id="51" name="Shape 49"/>
+          <p:cNvPr id="53" name="Shape 51"/>
           <p:cNvSpPr/>
           <p:nvPr/>
         </p:nvSpPr>
@@ -16229,7 +17619,7 @@
       </p:sp>
       <p:sp>
         <p:nvSpPr>
-          <p:cNvPr id="52" name="Text 50"/>
+          <p:cNvPr id="54" name="Text 52"/>
           <p:cNvSpPr/>
           <p:nvPr/>
         </p:nvSpPr>
@@ -16268,7 +17658,7 @@
       </p:sp>
       <p:sp>
         <p:nvSpPr>
-          <p:cNvPr id="53" name="Text 51"/>
+          <p:cNvPr id="55" name="Text 53"/>
           <p:cNvSpPr/>
           <p:nvPr/>
         </p:nvSpPr>
@@ -16310,7 +17700,7 @@
       </p:sp>
       <p:sp>
         <p:nvSpPr>
-          <p:cNvPr id="54" name="Shape 52"/>
+          <p:cNvPr id="56" name="Shape 54"/>
           <p:cNvSpPr/>
           <p:nvPr/>
         </p:nvSpPr>
@@ -16330,7 +17720,7 @@
       </p:sp>
       <p:sp>
         <p:nvSpPr>
-          <p:cNvPr id="55" name="Text 53"/>
+          <p:cNvPr id="57" name="Text 55"/>
           <p:cNvSpPr/>
           <p:nvPr/>
         </p:nvSpPr>
@@ -16369,7 +17759,7 @@
       </p:sp>
       <p:sp>
         <p:nvSpPr>
-          <p:cNvPr id="56" name="Text 54"/>
+          <p:cNvPr id="58" name="Text 56"/>
           <p:cNvSpPr/>
           <p:nvPr/>
         </p:nvSpPr>
@@ -16411,7 +17801,7 @@
       </p:sp>
       <p:sp>
         <p:nvSpPr>
-          <p:cNvPr id="57" name="Shape 55"/>
+          <p:cNvPr id="59" name="Shape 57"/>
           <p:cNvSpPr/>
           <p:nvPr/>
         </p:nvSpPr>
@@ -16431,7 +17821,7 @@
       </p:sp>
       <p:sp>
         <p:nvSpPr>
-          <p:cNvPr id="58" name="Shape 56"/>
+          <p:cNvPr id="60" name="Shape 58"/>
           <p:cNvSpPr/>
           <p:nvPr/>
         </p:nvSpPr>
@@ -16451,7 +17841,7 @@
       </p:sp>
       <p:sp>
         <p:nvSpPr>
-          <p:cNvPr id="59" name="Text 57"/>
+          <p:cNvPr id="61" name="Text 59"/>
           <p:cNvSpPr/>
           <p:nvPr/>
         </p:nvSpPr>
@@ -16490,7 +17880,7 @@
       </p:sp>
       <p:sp>
         <p:nvSpPr>
-          <p:cNvPr id="60" name="Text 58"/>
+          <p:cNvPr id="62" name="Text 60"/>
           <p:cNvSpPr/>
           <p:nvPr/>
         </p:nvSpPr>
@@ -16532,7 +17922,7 @@
       </p:sp>
       <p:sp>
         <p:nvSpPr>
-          <p:cNvPr id="61" name="Shape 59"/>
+          <p:cNvPr id="63" name="Shape 61"/>
           <p:cNvSpPr/>
           <p:nvPr/>
         </p:nvSpPr>
@@ -16559,7 +17949,7 @@
       </p:sp>
       <p:sp>
         <p:nvSpPr>
-          <p:cNvPr id="62" name="Text 60"/>
+          <p:cNvPr id="64" name="Text 62"/>
           <p:cNvSpPr/>
           <p:nvPr/>
         </p:nvSpPr>
@@ -16593,7 +17983,7 @@
                 <a:ea typeface="Malgun Gothic" pitchFamily="34" charset="-122"/>
                 <a:cs typeface="Malgun Gothic" pitchFamily="34" charset="-120"/>
               </a:rPr>
-              <a:t>갭의 해법이 곧 전략</a:t>
+              <a:t>실증: ScaleFlux, NVIDIA CMX 타깃</a:t>
             </a:r>
             <a:endParaRPr lang="en-US" sz="1100" dirty="0"/>
           </a:p>
@@ -16613,7 +18003,7 @@
                 <a:ea typeface="Malgun Gothic" pitchFamily="34" charset="-122"/>
                 <a:cs typeface="Malgun Gothic" pitchFamily="34" charset="-120"/>
               </a:rPr>
-              <a:t>FDP로 수명별 RUH 분리·WAF 절감 = 유효 DWPD 확보 (ScaleFlux도 FDP 200+ 스트림으로 7~10 DWPD 달성) + 고내구 설계. NVIDIA CMX 생태계와 직결</a:t>
+              <a:t>200+ FDP 스트림으로 KV 블록을 수명별 분리, WAF를 낮춰 유효 7~10+ DWPD(5년) 달성 발표(StorageReview ’26.07.30). RUH 분리 + 고내구 설계가 갭의 해법, 곧 본 전략</a:t>
             </a:r>
             <a:endParaRPr lang="en-US" sz="1100" dirty="0"/>
           </a:p>
